--- a/Proposal_Team5.pptx
+++ b/Proposal_Team5.pptx
@@ -137,7 +137,7 @@
   <p:extLst>
     <p:ext uri="{521415D9-36F7-43E2-AB2F-B90AF26B5E84}">
       <p14:sectionLst xmlns:p14="http://schemas.microsoft.com/office/powerpoint/2010/main">
-        <p14:section name="Talk" id="{d275799b-37a4-08d7-aef7-4fd8334ca2f6}">
+        <p14:section name="Talk" id="{7b44b55d-b23a-ef58-99fd-de838483eba8}">
           <p14:sldIdLst>
             <p14:sldId id="256"/>
             <p14:sldId id="257"/>
@@ -150,7 +150,7 @@
             <p14:sldId id="264"/>
           </p14:sldIdLst>
         </p14:section>
-        <p14:section name="Extra pages" id="{81a1a52b-bcd0-47fd-ac80-5a4bc4e077ef}">
+        <p14:section name="Extra pages" id="{7ca72f2d-3070-5b49-4723-86bfd2798d2a}">
           <p14:sldIdLst>
             <p14:sldId id="265"/>
             <p14:sldId id="266"/>

--- a/Proposal_Team5.pptx
+++ b/Proposal_Team5.pptx
@@ -137,7 +137,7 @@
   <p:extLst>
     <p:ext uri="{521415D9-36F7-43E2-AB2F-B90AF26B5E84}">
       <p14:sectionLst xmlns:p14="http://schemas.microsoft.com/office/powerpoint/2010/main">
-        <p14:section name="Talk" id="{7b44b55d-b23a-ef58-99fd-de838483eba8}">
+        <p14:section name="Talk" id="{de6dfb44-8cf8-22dc-eca7-194610449782}">
           <p14:sldIdLst>
             <p14:sldId id="256"/>
             <p14:sldId id="257"/>
@@ -150,7 +150,7 @@
             <p14:sldId id="264"/>
           </p14:sldIdLst>
         </p14:section>
-        <p14:section name="Extra pages" id="{7ca72f2d-3070-5b49-4723-86bfd2798d2a}">
+        <p14:section name="Extra pages" id="{5b41a29f-9c16-8343-db88-3a891194d91b}">
           <p14:sldIdLst>
             <p14:sldId id="265"/>
             <p14:sldId id="266"/>
@@ -3776,7 +3776,7 @@
           <a:p>
             <a:r>
               <a:rPr lang="en-US" dirty="0"/>
-              <a:t>(30초) 두 번째 발견입니다. 공짜 검사가 실패할 때만 생각하게 하세요. 검사 A는 문제에 적힌 예제입니다. 예제를 통과하면 바로 제출하고, 틀리면 그 문제만 더 생각합니다. 검사 B는 프로그램을 두 버전으로 짜서, 답이 다를 때만 생각합니다. 두 경우 모두 항상 생각할 때와 정확도는 같고, 토큰은 18에서 27% 적습니다. 두 검사 모두 정답이 필요 없고, 기하, 경시, 경로, 문장제에서 모두 통했습니다.</a:t>
+              <a:t>(30초) 두 번째 발견입니다. 공짜 검사가 실패할 때만 생각하게 하세요. 검사 A는 문제에 적힌 예제입니다. 예제를 통과하면 바로 제출하고, 틀리면 그 문제만 더 생각합니다. 예제만 쓰면 65%로 조금 낮고, 모든 경우를 다 따져 보는 짧은 프로그램과도 답을 맞춰 보면 66%가 됩니다. 검사 B는 프로그램을 두 버전으로 짜서, 답이 다를 때만 생각합니다. 두 경우 모두 항상 생각할 때와 정확도는 같고, 토큰은 18에서 27% 적습니다. 두 검사 모두 정답이 필요 없고, 기하, 경시, 경로, 문장제에서 모두 통했습니다.</a:t>
             </a:r>
             <a:endParaRPr lang="en-US" dirty="0"/>
           </a:p>
@@ -6520,7 +6520,7 @@
                             <a:srgbClr val="38761D"/>
                           </a:solidFill>
                         </a:rPr>
-                        <a:t>✓ 66.3% @ 24.7k vs 66.2% @ 30.1k</a:t>
+                        <a:t>✓ 66.3% @ 24.7k vs 66.2% @ 30.1k (examples + brute force)</a:t>
                       </a:r>
                       <a:endParaRPr lang="en-US" sz="1300" dirty="0"/>
                     </a:p>
@@ -16017,7 +16017,7 @@
                             <a:schemeClr val="tx1"/>
                           </a:solidFill>
                         </a:rPr>
-                        <a:t>the examples printed in the problem</a:t>
+                        <a:t>the examples printed in the problem; a quick brute-force program must agree</a:t>
                       </a:r>
                       <a:endParaRPr lang="en-US" sz="1500" dirty="0"/>
                     </a:p>
@@ -16075,7 +16075,7 @@
                             <a:schemeClr val="tx1"/>
                           </a:solidFill>
                         </a:rPr>
-                        <a:t>never rejects a right program; 24–37% of wrong ones pass</a:t>
+                        <a:t>examples never reject a right program, but 24–37% of wrong ones pass; with brute force: 66.3% = always thinking</a:t>
                       </a:r>
                       <a:endParaRPr lang="en-US" sz="1500" dirty="0"/>
                     </a:p>
@@ -20799,7 +20799,7 @@
                             <a:srgbClr val="38761D"/>
                           </a:solidFill>
                         </a:rPr>
-                        <a:t>think only on a failed check: 66.3% · 24.7k</a:t>
+                        <a:t>think when the examples or a brute-force check fail: 66.3% · 24.7k</a:t>
                       </a:r>
                       <a:endParaRPr lang="en-US" sz="1500" dirty="0"/>
                     </a:p>
@@ -38548,11 +38548,11 @@
         <p:spPr>
           <a:xfrm>
             <a:off x="548640" y="1325880"/>
-            <a:ext cx="5440680" cy="4114800"/>
+            <a:ext cx="5440680" cy="4160520"/>
           </a:xfrm>
           <a:prstGeom prst="roundRect">
             <a:avLst>
-              <a:gd name="adj" fmla="val 1778"/>
+              <a:gd name="adj" fmla="val 1758"/>
             </a:avLst>
           </a:prstGeom>
           <a:solidFill>
@@ -38610,12 +38610,12 @@
         </p:nvSpPr>
         <p:spPr>
           <a:xfrm>
-            <a:off x="777240" y="1965960"/>
-            <a:ext cx="4983480" cy="548640"/>
+            <a:off x="777240" y="1920240"/>
+            <a:ext cx="4983480" cy="512064"/>
           </a:xfrm>
           <a:prstGeom prst="roundRect">
             <a:avLst>
-              <a:gd name="adj" fmla="val 10000"/>
+              <a:gd name="adj" fmla="val 10714"/>
             </a:avLst>
           </a:prstGeom>
           <a:solidFill>
@@ -38637,8 +38637,8 @@
         </p:nvSpPr>
         <p:spPr>
           <a:xfrm>
-            <a:off x="850392" y="1965960"/>
-            <a:ext cx="4837176" cy="548640"/>
+            <a:off x="850392" y="1920240"/>
+            <a:ext cx="4837176" cy="512064"/>
           </a:xfrm>
           <a:prstGeom prst="rect">
             <a:avLst/>
@@ -38673,12 +38673,12 @@
         </p:nvSpPr>
         <p:spPr>
           <a:xfrm>
-            <a:off x="777240" y="2624328"/>
-            <a:ext cx="4983480" cy="548640"/>
+            <a:off x="777240" y="2523744"/>
+            <a:ext cx="4983480" cy="512064"/>
           </a:xfrm>
           <a:prstGeom prst="roundRect">
             <a:avLst>
-              <a:gd name="adj" fmla="val 10000"/>
+              <a:gd name="adj" fmla="val 10714"/>
             </a:avLst>
           </a:prstGeom>
           <a:solidFill>
@@ -38700,8 +38700,8 @@
         </p:nvSpPr>
         <p:spPr>
           <a:xfrm>
-            <a:off x="850392" y="2624328"/>
-            <a:ext cx="4837176" cy="548640"/>
+            <a:off x="850392" y="2523744"/>
+            <a:ext cx="4837176" cy="512064"/>
           </a:xfrm>
           <a:prstGeom prst="rect">
             <a:avLst/>
@@ -38736,7 +38736,7 @@
         </p:nvSpPr>
         <p:spPr>
           <a:xfrm>
-            <a:off x="777240" y="3337560"/>
+            <a:off x="777240" y="3154680"/>
             <a:ext cx="4983480" cy="365760"/>
           </a:xfrm>
           <a:prstGeom prst="rect">
@@ -38772,7 +38772,7 @@
         </p:nvSpPr>
         <p:spPr>
           <a:xfrm>
-            <a:off x="2651760" y="3749040"/>
+            <a:off x="2926080" y="3520440"/>
             <a:ext cx="822960" cy="320040"/>
           </a:xfrm>
           <a:prstGeom prst="rect">
@@ -38808,8 +38808,8 @@
         </p:nvSpPr>
         <p:spPr>
           <a:xfrm>
-            <a:off x="3566160" y="3749040"/>
-            <a:ext cx="2194560" cy="320040"/>
+            <a:off x="3840480" y="3520440"/>
+            <a:ext cx="1920240" cy="320040"/>
           </a:xfrm>
           <a:prstGeom prst="rect">
             <a:avLst/>
@@ -38844,8 +38844,8 @@
         </p:nvSpPr>
         <p:spPr>
           <a:xfrm>
-            <a:off x="777240" y="4114800"/>
-            <a:ext cx="1783080" cy="457200"/>
+            <a:off x="777240" y="3886200"/>
+            <a:ext cx="2057400" cy="457200"/>
           </a:xfrm>
           <a:prstGeom prst="rect">
             <a:avLst/>
@@ -38880,7 +38880,7 @@
         </p:nvSpPr>
         <p:spPr>
           <a:xfrm>
-            <a:off x="2651760" y="4114800"/>
+            <a:off x="2926080" y="3886200"/>
             <a:ext cx="822960" cy="457200"/>
           </a:xfrm>
           <a:prstGeom prst="rect">
@@ -38916,8 +38916,8 @@
         </p:nvSpPr>
         <p:spPr>
           <a:xfrm>
-            <a:off x="3566160" y="4215384"/>
-            <a:ext cx="1463040" cy="256032"/>
+            <a:off x="3840480" y="3986784"/>
+            <a:ext cx="1188720" cy="256032"/>
           </a:xfrm>
           <a:prstGeom prst="rect">
             <a:avLst/>
@@ -38941,7 +38941,7 @@
         </p:nvSpPr>
         <p:spPr>
           <a:xfrm>
-            <a:off x="5120640" y="4114800"/>
+            <a:off x="5120640" y="3886200"/>
             <a:ext cx="731520" cy="457200"/>
           </a:xfrm>
           <a:prstGeom prst="rect">
@@ -38977,8 +38977,8 @@
         </p:nvSpPr>
         <p:spPr>
           <a:xfrm>
-            <a:off x="777240" y="4645152"/>
-            <a:ext cx="1783080" cy="457200"/>
+            <a:off x="777240" y="4416552"/>
+            <a:ext cx="2057400" cy="457200"/>
           </a:xfrm>
           <a:prstGeom prst="rect">
             <a:avLst/>
@@ -38999,7 +38999,7 @@
                   <a:schemeClr val="tx1"/>
                 </a:solidFill>
               </a:rPr>
-              <a:t>only on failure</a:t>
+              <a:t>an example fails</a:t>
             </a:r>
             <a:endParaRPr lang="en-US" sz="1500" dirty="0"/>
           </a:p>
@@ -39013,7 +39013,7 @@
         </p:nvSpPr>
         <p:spPr>
           <a:xfrm>
-            <a:off x="2651760" y="4645152"/>
+            <a:off x="2926080" y="4416552"/>
             <a:ext cx="822960" cy="457200"/>
           </a:xfrm>
           <a:prstGeom prst="rect">
@@ -39032,6 +39032,139 @@
             <a:r>
               <a:rPr lang="en-US" sz="1700" b="1" dirty="0">
                 <a:solidFill>
+                  <a:srgbClr val="5B9BD5"/>
+                </a:solidFill>
+              </a:rPr>
+              <a:t>65.0%</a:t>
+            </a:r>
+            <a:endParaRPr lang="en-US" sz="1700" dirty="0"/>
+          </a:p>
+        </p:txBody>
+      </p:sp>
+      <p:sp>
+        <p:nvSpPr>
+          <p:cNvPr id="27" name="tokens an example fails"/>
+          <p:cNvSpPr/>
+          <p:nvPr/>
+        </p:nvSpPr>
+        <p:spPr>
+          <a:xfrm>
+            <a:off x="3840480" y="4517136"/>
+            <a:ext cx="797746" cy="256032"/>
+          </a:xfrm>
+          <a:prstGeom prst="rect">
+            <a:avLst/>
+          </a:prstGeom>
+          <a:solidFill>
+            <a:srgbClr val="5B9BD5"/>
+          </a:solidFill>
+          <a:ln w="6350">
+            <a:solidFill>
+              <a:srgbClr val="5B9BD5"/>
+            </a:solidFill>
+            <a:prstDash val="solid"/>
+          </a:ln>
+        </p:spPr>
+      </p:sp>
+      <p:sp>
+        <p:nvSpPr>
+          <p:cNvPr id="28" name="Text 20"/>
+          <p:cNvSpPr txBox="1"/>
+          <p:nvPr/>
+        </p:nvSpPr>
+        <p:spPr>
+          <a:xfrm>
+            <a:off x="4729666" y="4416552"/>
+            <a:ext cx="731520" cy="457200"/>
+          </a:xfrm>
+          <a:prstGeom prst="rect">
+            <a:avLst/>
+          </a:prstGeom>
+          <a:noFill/>
+          <a:ln/>
+        </p:spPr>
+        <p:txBody>
+          <a:bodyPr wrap="square" lIns="0" tIns="0" rIns="0" bIns="0" rtlCol="0" anchor="ctr"/>
+          <a:lstStyle/>
+          <a:p>
+            <a:pPr indent="0" marL="0">
+              <a:buNone/>
+            </a:pPr>
+            <a:r>
+              <a:rPr lang="en-US" sz="1500" b="1" dirty="0">
+                <a:solidFill>
+                  <a:srgbClr val="5B9BD5"/>
+                </a:solidFill>
+              </a:rPr>
+              <a:t>20k</a:t>
+            </a:r>
+            <a:endParaRPr lang="en-US" sz="1500" dirty="0"/>
+          </a:p>
+        </p:txBody>
+      </p:sp>
+      <p:sp>
+        <p:nvSpPr>
+          <p:cNvPr id="29" name="Text 21"/>
+          <p:cNvSpPr txBox="1"/>
+          <p:nvPr/>
+        </p:nvSpPr>
+        <p:spPr>
+          <a:xfrm>
+            <a:off x="777240" y="4946904"/>
+            <a:ext cx="2057400" cy="457200"/>
+          </a:xfrm>
+          <a:prstGeom prst="rect">
+            <a:avLst/>
+          </a:prstGeom>
+          <a:noFill/>
+          <a:ln/>
+        </p:spPr>
+        <p:txBody>
+          <a:bodyPr wrap="square" lIns="0" tIns="0" rIns="0" bIns="0" rtlCol="0" anchor="ctr"/>
+          <a:lstStyle/>
+          <a:p>
+            <a:pPr algn="r" indent="0" marL="0">
+              <a:buNone/>
+            </a:pPr>
+            <a:r>
+              <a:rPr lang="en-US" sz="1500" dirty="0">
+                <a:solidFill>
+                  <a:schemeClr val="tx1"/>
+                </a:solidFill>
+              </a:rPr>
+              <a:t>+ brute-force check</a:t>
+            </a:r>
+            <a:endParaRPr lang="en-US" sz="1500" dirty="0"/>
+          </a:p>
+        </p:txBody>
+      </p:sp>
+      <p:sp>
+        <p:nvSpPr>
+          <p:cNvPr id="30" name="Text 22"/>
+          <p:cNvSpPr txBox="1"/>
+          <p:nvPr/>
+        </p:nvSpPr>
+        <p:spPr>
+          <a:xfrm>
+            <a:off x="2926080" y="4946904"/>
+            <a:ext cx="822960" cy="457200"/>
+          </a:xfrm>
+          <a:prstGeom prst="rect">
+            <a:avLst/>
+          </a:prstGeom>
+          <a:noFill/>
+          <a:ln/>
+        </p:spPr>
+        <p:txBody>
+          <a:bodyPr wrap="square" lIns="0" tIns="0" rIns="0" bIns="0" rtlCol="0" anchor="ctr"/>
+          <a:lstStyle/>
+          <a:p>
+            <a:pPr algn="ctr" indent="0" marL="0">
+              <a:buNone/>
+            </a:pPr>
+            <a:r>
+              <a:rPr lang="en-US" sz="1700" b="1" dirty="0">
+                <a:solidFill>
                   <a:srgbClr val="4472C4"/>
                 </a:solidFill>
               </a:rPr>
@@ -39043,14 +39176,14 @@
       </p:sp>
       <p:sp>
         <p:nvSpPr>
-          <p:cNvPr id="27" name="tokens only on failure"/>
+          <p:cNvPr id="31" name="tokens + brute-force check"/>
           <p:cNvSpPr/>
           <p:nvPr/>
         </p:nvSpPr>
         <p:spPr>
           <a:xfrm>
-            <a:off x="3566160" y="4745736"/>
-            <a:ext cx="1200568" cy="256032"/>
+            <a:off x="3840480" y="5047488"/>
+            <a:ext cx="975461" cy="256032"/>
           </a:xfrm>
           <a:prstGeom prst="rect">
             <a:avLst/>
@@ -39068,13 +39201,13 @@
       </p:sp>
       <p:sp>
         <p:nvSpPr>
-          <p:cNvPr id="28" name="Text 20"/>
-          <p:cNvSpPr txBox="1"/>
-          <p:nvPr/>
-        </p:nvSpPr>
-        <p:spPr>
-          <a:xfrm>
-            <a:off x="4858168" y="4645152"/>
+          <p:cNvPr id="32" name="Text 24"/>
+          <p:cNvSpPr txBox="1"/>
+          <p:nvPr/>
+        </p:nvSpPr>
+        <p:spPr>
+          <a:xfrm>
+            <a:off x="4907381" y="4946904"/>
             <a:ext cx="731520" cy="457200"/>
           </a:xfrm>
           <a:prstGeom prst="rect">
@@ -39104,18 +39237,18 @@
       </p:sp>
       <p:sp>
         <p:nvSpPr>
-          <p:cNvPr id="29" name="Check B: two versions must agree"/>
+          <p:cNvPr id="33" name="Check B: two versions must agree"/>
           <p:cNvSpPr/>
           <p:nvPr/>
         </p:nvSpPr>
         <p:spPr>
           <a:xfrm>
             <a:off x="6172200" y="1325880"/>
-            <a:ext cx="5440680" cy="4114800"/>
+            <a:ext cx="5440680" cy="4160520"/>
           </a:xfrm>
           <a:prstGeom prst="roundRect">
             <a:avLst>
-              <a:gd name="adj" fmla="val 1778"/>
+              <a:gd name="adj" fmla="val 1758"/>
             </a:avLst>
           </a:prstGeom>
           <a:solidFill>
@@ -39131,7 +39264,7 @@
       </p:sp>
       <p:sp>
         <p:nvSpPr>
-          <p:cNvPr id="30" name="Text 22"/>
+          <p:cNvPr id="34" name="Text 26"/>
           <p:cNvSpPr txBox="1"/>
           <p:nvPr/>
         </p:nvSpPr>
@@ -39167,18 +39300,18 @@
       </p:sp>
       <p:sp>
         <p:nvSpPr>
-          <p:cNvPr id="31" name="box program A (task only"/>
+          <p:cNvPr id="35" name="box program A (task only"/>
           <p:cNvSpPr/>
           <p:nvPr/>
         </p:nvSpPr>
         <p:spPr>
           <a:xfrm>
-            <a:off x="6400800" y="1965960"/>
-            <a:ext cx="4983480" cy="548640"/>
+            <a:off x="6400800" y="1920240"/>
+            <a:ext cx="4983480" cy="512064"/>
           </a:xfrm>
           <a:prstGeom prst="roundRect">
             <a:avLst>
-              <a:gd name="adj" fmla="val 10000"/>
+              <a:gd name="adj" fmla="val 10714"/>
             </a:avLst>
           </a:prstGeom>
           <a:solidFill>
@@ -39194,14 +39327,14 @@
       </p:sp>
       <p:sp>
         <p:nvSpPr>
-          <p:cNvPr id="32" name="Text 24"/>
-          <p:cNvSpPr txBox="1"/>
-          <p:nvPr/>
-        </p:nvSpPr>
-        <p:spPr>
-          <a:xfrm>
-            <a:off x="6473952" y="1965960"/>
-            <a:ext cx="4837176" cy="548640"/>
+          <p:cNvPr id="36" name="Text 28"/>
+          <p:cNvSpPr txBox="1"/>
+          <p:nvPr/>
+        </p:nvSpPr>
+        <p:spPr>
+          <a:xfrm>
+            <a:off x="6473952" y="1920240"/>
+            <a:ext cx="4837176" cy="512064"/>
           </a:xfrm>
           <a:prstGeom prst="rect">
             <a:avLst/>
@@ -39230,18 +39363,18 @@
       </p:sp>
       <p:sp>
         <p:nvSpPr>
-          <p:cNvPr id="33" name="box program B (+ helper "/>
+          <p:cNvPr id="37" name="box program B (+ helper "/>
           <p:cNvSpPr/>
           <p:nvPr/>
         </p:nvSpPr>
         <p:spPr>
           <a:xfrm>
-            <a:off x="6400800" y="2624328"/>
-            <a:ext cx="4983480" cy="548640"/>
+            <a:off x="6400800" y="2523744"/>
+            <a:ext cx="4983480" cy="512064"/>
           </a:xfrm>
           <a:prstGeom prst="roundRect">
             <a:avLst>
-              <a:gd name="adj" fmla="val 10000"/>
+              <a:gd name="adj" fmla="val 10714"/>
             </a:avLst>
           </a:prstGeom>
           <a:solidFill>
@@ -39257,14 +39390,14 @@
       </p:sp>
       <p:sp>
         <p:nvSpPr>
-          <p:cNvPr id="34" name="Text 26"/>
-          <p:cNvSpPr txBox="1"/>
-          <p:nvPr/>
-        </p:nvSpPr>
-        <p:spPr>
-          <a:xfrm>
-            <a:off x="6473952" y="2624328"/>
-            <a:ext cx="4837176" cy="548640"/>
+          <p:cNvPr id="38" name="Text 30"/>
+          <p:cNvSpPr txBox="1"/>
+          <p:nvPr/>
+        </p:nvSpPr>
+        <p:spPr>
+          <a:xfrm>
+            <a:off x="6473952" y="2523744"/>
+            <a:ext cx="4837176" cy="512064"/>
           </a:xfrm>
           <a:prstGeom prst="rect">
             <a:avLst/>
@@ -39293,13 +39426,13 @@
       </p:sp>
       <p:sp>
         <p:nvSpPr>
-          <p:cNvPr id="35" name="Text 27"/>
-          <p:cNvSpPr txBox="1"/>
-          <p:nvPr/>
-        </p:nvSpPr>
-        <p:spPr>
-          <a:xfrm>
-            <a:off x="6400800" y="3337560"/>
+          <p:cNvPr id="39" name="Text 31"/>
+          <p:cNvSpPr txBox="1"/>
+          <p:nvPr/>
+        </p:nvSpPr>
+        <p:spPr>
+          <a:xfrm>
+            <a:off x="6400800" y="3154680"/>
             <a:ext cx="4983480" cy="365760"/>
           </a:xfrm>
           <a:prstGeom prst="rect">
@@ -39329,13 +39462,13 @@
       </p:sp>
       <p:sp>
         <p:nvSpPr>
-          <p:cNvPr id="36" name="Text 28"/>
-          <p:cNvSpPr txBox="1"/>
-          <p:nvPr/>
-        </p:nvSpPr>
-        <p:spPr>
-          <a:xfrm>
-            <a:off x="8275320" y="3749040"/>
+          <p:cNvPr id="40" name="Text 32"/>
+          <p:cNvSpPr txBox="1"/>
+          <p:nvPr/>
+        </p:nvSpPr>
+        <p:spPr>
+          <a:xfrm>
+            <a:off x="8549640" y="3520440"/>
             <a:ext cx="822960" cy="320040"/>
           </a:xfrm>
           <a:prstGeom prst="rect">
@@ -39365,14 +39498,14 @@
       </p:sp>
       <p:sp>
         <p:nvSpPr>
-          <p:cNvPr id="37" name="Text 29"/>
-          <p:cNvSpPr txBox="1"/>
-          <p:nvPr/>
-        </p:nvSpPr>
-        <p:spPr>
-          <a:xfrm>
-            <a:off x="9189720" y="3749040"/>
-            <a:ext cx="2194560" cy="320040"/>
+          <p:cNvPr id="41" name="Text 33"/>
+          <p:cNvSpPr txBox="1"/>
+          <p:nvPr/>
+        </p:nvSpPr>
+        <p:spPr>
+          <a:xfrm>
+            <a:off x="9464040" y="3520440"/>
+            <a:ext cx="1920240" cy="320040"/>
           </a:xfrm>
           <a:prstGeom prst="rect">
             <a:avLst/>
@@ -39401,14 +39534,14 @@
       </p:sp>
       <p:sp>
         <p:nvSpPr>
-          <p:cNvPr id="38" name="Text 30"/>
-          <p:cNvSpPr txBox="1"/>
-          <p:nvPr/>
-        </p:nvSpPr>
-        <p:spPr>
-          <a:xfrm>
-            <a:off x="6400800" y="4114800"/>
-            <a:ext cx="1783080" cy="457200"/>
+          <p:cNvPr id="42" name="Text 34"/>
+          <p:cNvSpPr txBox="1"/>
+          <p:nvPr/>
+        </p:nvSpPr>
+        <p:spPr>
+          <a:xfrm>
+            <a:off x="6400800" y="3886200"/>
+            <a:ext cx="2057400" cy="457200"/>
           </a:xfrm>
           <a:prstGeom prst="rect">
             <a:avLst/>
@@ -39437,13 +39570,13 @@
       </p:sp>
       <p:sp>
         <p:nvSpPr>
-          <p:cNvPr id="39" name="Text 31"/>
-          <p:cNvSpPr txBox="1"/>
-          <p:nvPr/>
-        </p:nvSpPr>
-        <p:spPr>
-          <a:xfrm>
-            <a:off x="8275320" y="4114800"/>
+          <p:cNvPr id="43" name="Text 35"/>
+          <p:cNvSpPr txBox="1"/>
+          <p:nvPr/>
+        </p:nvSpPr>
+        <p:spPr>
+          <a:xfrm>
+            <a:off x="8549640" y="3886200"/>
             <a:ext cx="822960" cy="457200"/>
           </a:xfrm>
           <a:prstGeom prst="rect">
@@ -39473,14 +39606,14 @@
       </p:sp>
       <p:sp>
         <p:nvSpPr>
-          <p:cNvPr id="40" name="tokens always think"/>
+          <p:cNvPr id="44" name="tokens always think"/>
           <p:cNvSpPr/>
           <p:nvPr/>
         </p:nvSpPr>
         <p:spPr>
           <a:xfrm>
-            <a:off x="9189720" y="4215384"/>
-            <a:ext cx="1463040" cy="256032"/>
+            <a:off x="9464040" y="3986784"/>
+            <a:ext cx="1188720" cy="256032"/>
           </a:xfrm>
           <a:prstGeom prst="rect">
             <a:avLst/>
@@ -39498,13 +39631,13 @@
       </p:sp>
       <p:sp>
         <p:nvSpPr>
-          <p:cNvPr id="41" name="Text 33"/>
-          <p:cNvSpPr txBox="1"/>
-          <p:nvPr/>
-        </p:nvSpPr>
-        <p:spPr>
-          <a:xfrm>
-            <a:off x="10744200" y="4114800"/>
+          <p:cNvPr id="45" name="Text 37"/>
+          <p:cNvSpPr txBox="1"/>
+          <p:nvPr/>
+        </p:nvSpPr>
+        <p:spPr>
+          <a:xfrm>
+            <a:off x="10744200" y="3886200"/>
             <a:ext cx="731520" cy="457200"/>
           </a:xfrm>
           <a:prstGeom prst="rect">
@@ -39534,14 +39667,14 @@
       </p:sp>
       <p:sp>
         <p:nvSpPr>
-          <p:cNvPr id="42" name="Text 34"/>
-          <p:cNvSpPr txBox="1"/>
-          <p:nvPr/>
-        </p:nvSpPr>
-        <p:spPr>
-          <a:xfrm>
-            <a:off x="6400800" y="4645152"/>
-            <a:ext cx="1783080" cy="457200"/>
+          <p:cNvPr id="46" name="Text 38"/>
+          <p:cNvSpPr txBox="1"/>
+          <p:nvPr/>
+        </p:nvSpPr>
+        <p:spPr>
+          <a:xfrm>
+            <a:off x="6400800" y="4416552"/>
+            <a:ext cx="2057400" cy="457200"/>
           </a:xfrm>
           <a:prstGeom prst="rect">
             <a:avLst/>
@@ -39570,13 +39703,13 @@
       </p:sp>
       <p:sp>
         <p:nvSpPr>
-          <p:cNvPr id="43" name="Text 35"/>
-          <p:cNvSpPr txBox="1"/>
-          <p:nvPr/>
-        </p:nvSpPr>
-        <p:spPr>
-          <a:xfrm>
-            <a:off x="8275320" y="4645152"/>
+          <p:cNvPr id="47" name="Text 39"/>
+          <p:cNvSpPr txBox="1"/>
+          <p:nvPr/>
+        </p:nvSpPr>
+        <p:spPr>
+          <a:xfrm>
+            <a:off x="8549640" y="4416552"/>
             <a:ext cx="822960" cy="457200"/>
           </a:xfrm>
           <a:prstGeom prst="rect">
@@ -39606,14 +39739,14 @@
       </p:sp>
       <p:sp>
         <p:nvSpPr>
-          <p:cNvPr id="44" name="tokens only if they differ"/>
+          <p:cNvPr id="48" name="tokens only if they differ"/>
           <p:cNvSpPr/>
           <p:nvPr/>
         </p:nvSpPr>
         <p:spPr>
           <a:xfrm>
-            <a:off x="9189720" y="4745736"/>
-            <a:ext cx="1066283" cy="256032"/>
+            <a:off x="9464040" y="4517136"/>
+            <a:ext cx="866355" cy="256032"/>
           </a:xfrm>
           <a:prstGeom prst="rect">
             <a:avLst/>
@@ -39631,13 +39764,13 @@
       </p:sp>
       <p:sp>
         <p:nvSpPr>
-          <p:cNvPr id="45" name="Text 37"/>
-          <p:cNvSpPr txBox="1"/>
-          <p:nvPr/>
-        </p:nvSpPr>
-        <p:spPr>
-          <a:xfrm>
-            <a:off x="10347443" y="4645152"/>
+          <p:cNvPr id="49" name="Text 41"/>
+          <p:cNvSpPr txBox="1"/>
+          <p:nvPr/>
+        </p:nvSpPr>
+        <p:spPr>
+          <a:xfrm>
+            <a:off x="10421835" y="4416552"/>
             <a:ext cx="731520" cy="457200"/>
           </a:xfrm>
           <a:prstGeom prst="rect">
@@ -39667,7 +39800,7 @@
       </p:sp>
       <p:sp>
         <p:nvSpPr>
-          <p:cNvPr id="46" name="Text 38"/>
+          <p:cNvPr id="50" name="Text 42"/>
           <p:cNvSpPr txBox="1"/>
           <p:nvPr/>
         </p:nvSpPr>

--- a/Proposal_Team5.pptx
+++ b/Proposal_Team5.pptx
@@ -137,7 +137,7 @@
   <p:extLst>
     <p:ext uri="{521415D9-36F7-43E2-AB2F-B90AF26B5E84}">
       <p14:sectionLst xmlns:p14="http://schemas.microsoft.com/office/powerpoint/2010/main">
-        <p14:section name="Talk" id="{de6dfb44-8cf8-22dc-eca7-194610449782}">
+        <p14:section name="Talk" id="{021a6ba3-5873-12c8-f33b-e1c3ba01283e}">
           <p14:sldIdLst>
             <p14:sldId id="256"/>
             <p14:sldId id="257"/>
@@ -150,7 +150,7 @@
             <p14:sldId id="264"/>
           </p14:sldIdLst>
         </p14:section>
-        <p14:section name="Extra pages" id="{5b41a29f-9c16-8343-db88-3a891194d91b}">
+        <p14:section name="Extra pages" id="{d1b80634-546b-6803-094c-d0afe4145057}">
           <p14:sldIdLst>
             <p14:sldId id="265"/>
             <p14:sldId id="266"/>
@@ -1400,7 +1400,7 @@
           <a:p>
             <a:r>
               <a:rPr lang="en-US" dirty="0"/>
-              <a:t>(10초) 안녕하세요, 5조입니다. LLM으로 계산 수학 문제를 정확하고 싸게 푸는 방법을 제안합니다. 질문은 하나입니다. 추가 노력을 사실, 검사, 생각 중 어디에 써야 할까요?</a:t>
+              <a:t>(15초) 안녕하세요, 5조입니다. LLM으로 계산 수학 문제를 정확하고 싸게 푸는 방법을 제안합니다. 질문은 하나입니다. 추가 노력을 사실, 검사, 생각 중 어디에 써야 할까요?</a:t>
             </a:r>
             <a:endParaRPr lang="en-US" dirty="0"/>
           </a:p>
@@ -1488,7 +1488,7 @@
           <a:p>
             <a:r>
               <a:rPr lang="en-US" dirty="0"/>
-              <a:t/>
+              <a:t>(답변) 아니요, 모든 결과를 다섯 종류 전부에서 잰 것은 아닙니다. 사실 주기는 기하, 경로, 문장제에서, 공짜 검사는 기하, 경시, 경로, 문장제에서 확인했습니다. 전체 방법의 87% 대 74%는 기하 108문제와 최적화 100문제를 세 모델로 푼 결과입니다. 경시 수학은 말로 답해도 충분하고, 증명은 특화된 증명 모델이 필요해서 이 방법의 범위 밖입니다.</a:t>
             </a:r>
             <a:endParaRPr lang="en-US" dirty="0"/>
           </a:p>
@@ -1576,7 +1576,7 @@
           <a:p>
             <a:r>
               <a:rPr lang="en-US" dirty="0"/>
-              <a:t/>
+              <a:t>(답변) 사람 기준으로 보면, 경시 문제 311개의 Codeforces 레이팅 중앙값은 2200으로 Master 수준이고, 46%는 Grandmaster 수준인 2400 이상입니다. 그 구간에서는 gpt-oss-120b도 48%만 풉니다. 경로 문제는 단순한 탐욕 계획이 최선보다 48% 길고, AIME는 AMC 응시자 중 상위 2.5에서 5%만 초대받는 시험입니다.</a:t>
             </a:r>
             <a:endParaRPr lang="en-US" dirty="0"/>
           </a:p>
@@ -1664,7 +1664,7 @@
           <a:p>
             <a:r>
               <a:rPr lang="en-US" dirty="0"/>
-              <a:t/>
+              <a:t>(답변) 항상은 아닙니다. 답을 계산해야 하는 문제에서는 말로 답하면 8개 복사본 중 1개만 맞고, 프로그램은 8개 모두 맞습니다. 하지만 짧은 답의 경시 수학인 MATH-500에서는 말이 98.3%로 프로그램 86.8%보다 낫습니다. 거기서는 프로그램을 두 번째 의견으로 씁니다. 말과 프로그램이 일치하면 틀린 경우가 0.3%뿐이고, 말 두 개가 일치할 때는 1.5%입니다.</a:t>
             </a:r>
             <a:endParaRPr lang="en-US" dirty="0"/>
           </a:p>
@@ -1752,7 +1752,7 @@
           <a:p>
             <a:r>
               <a:rPr lang="en-US" dirty="0"/>
-              <a:t/>
+              <a:t>(답변) 보조 코드를 주면 모델이 그 함수에 맞춰 방법을 짭니다. 이 예에서는 필요 없는 polar_sort로 각도 정렬을 하다가 0을 출력했습니다. 기하 108문제에서 보조 코드가 있으면 59%, 없으면 77%입니다. 두 버전을 모두 짜서 답이 다를 때만 생각하면 99%를 4.3k 토큰에 얻습니다.</a:t>
             </a:r>
             <a:endParaRPr lang="en-US" dirty="0"/>
           </a:p>
@@ -1840,7 +1840,7 @@
           <a:p>
             <a:r>
               <a:rPr lang="en-US" dirty="0"/>
-              <a:t/>
+              <a:t>(답변) 사실은 라이브러리를 어떻게 부르는지, 즉 함수 이름과 인자를 보여 주는 11줄짜리 코드 조각입니다. 같은 종류의 30문제에 똑같이 붙이고, 경로나 숫자나 정답은 들어 있지 않습니다. 긴 참조 문서가 아무것도 안 준 것보다 나쁜 이유는, 경로 설명은 있지만 용량 규칙이 없어서 모델이 빈 곳을 없는 함수로 채우기 때문입니다. 10개 프로그램이 RegisterUnaryLongLivingCallback을 불렀습니다.</a:t>
             </a:r>
             <a:endParaRPr lang="en-US" dirty="0"/>
           </a:p>
@@ -1928,7 +1928,7 @@
           <a:p>
             <a:r>
               <a:rPr lang="en-US" dirty="0"/>
-              <a:t/>
+              <a:t>(답변) 네. 제목이 붙은 코드 조각 라이브러리에서 BM25로 찾으면, 최적화 6문제에서 손으로 쓴 사실과 같은 수준입니다. 97% 대 96%입니다. 다만 비슷하지만 다른 문서가 섞이면 손해가 큽니다. 경로 문제에서 TSP 문서가 함께 들어오면 83%에서 57%로 떨어집니다. 문서가 아예 없으면 모델 자신의 검사된 프로그램을 사실로 씁니다.</a:t>
             </a:r>
             <a:endParaRPr lang="en-US" dirty="0"/>
           </a:p>
@@ -2016,7 +2016,7 @@
           <a:p>
             <a:r>
               <a:rPr lang="en-US" dirty="0"/>
-              <a:t/>
+              <a:t>(답변) 모르는 함수를 생각하는 동안 지어내기 때문입니다. Qwen3-32B는 문장제에서 생각을 켜면 65.4%에서 52.0%로 떨어지는데, 존재하지 않는 Objective().SetMaximize를 부릅니다. 정확한 사용법을 먼저 주면 생각이 도움이 되어 72%가 되고, 실패할 때만 생각하면 같은 정확도를 1.3k 토큰에 냅니다.</a:t>
             </a:r>
             <a:endParaRPr lang="en-US" dirty="0"/>
           </a:p>
@@ -2104,7 +2104,7 @@
           <a:p>
             <a:r>
               <a:rPr lang="en-US" dirty="0"/>
-              <a:t/>
+              <a:t>(답변) 생깁니다. 경시 문제에서는 틀린 프로그램의 24에서 37%가 예제를 통과하고, 문장제에서는 12에서 16%가 두 프로그램이 같은 오답을 냅니다. 하지만 이런 문제를 완벽한 검사로 모두 생각에 보내도 생각이 7에서 16%만 고치기 때문에, 14B 이상 모델에서는 1에서 3점밖에 오르지 않습니다. 일부는 정답 레이블 자체가 틀렸습니다. 그래서 다음 목표는 실행은 되지만 문제를 잘못 모델링한 프로그램입니다.</a:t>
             </a:r>
             <a:endParaRPr lang="en-US" dirty="0"/>
           </a:p>
@@ -2192,7 +2192,7 @@
           <a:p>
             <a:r>
               <a:rPr lang="en-US" dirty="0"/>
-              <a:t/>
+              <a:t>(답변) 저희가 다룬 문제에는 모두 정답 없이 쓸 수 있는 검사가 있습니다. 경시는 예제와 모든 경우를 따지는 짧은 프로그램, 기하는 입력을 옮기거나 돌려도 답이 같아야 한다는 검사나 두 버전의 일치, 경로는 계획이 모든 규칙을 지키는지 코드로 확인, 문장제는 두 프로그램의 일치, 경시 수학은 말과 프로그램의 일치, 증명은 Lean의 검사입니다. 검사가 얼마나 잡아내느냐가 생각을 얼마나 아낄지를 정합니다.</a:t>
             </a:r>
             <a:endParaRPr lang="en-US" dirty="0"/>
           </a:p>
@@ -2280,7 +2280,7 @@
           <a:p>
             <a:r>
               <a:rPr lang="en-US" dirty="0"/>
-              <a:t/>
+              <a:t>(답변) 사람이 쓰지 않습니다. 모델이 다른 문제에서 짜서 공짜 검사를 통과한 자기 프로그램 중 가장 짧은 것을 사실로 붙입니다. 끝까지 쓰지 않고 남겨 둔 MAMO 863문제에서 세 모델 모두 사람이 쓴 사실과 약 2점 안에 들었습니다. 단, 다른 종류의 문제에서 가져온 프로그램은 오히려 14에서 21점 손해이고, 라이브러리 이름 목록만 주면 66%에서 56%로 떨어집니다.</a:t>
             </a:r>
             <a:endParaRPr lang="en-US" dirty="0"/>
           </a:p>
@@ -2456,7 +2456,7 @@
           <a:p>
             <a:r>
               <a:rPr lang="en-US" dirty="0"/>
-              <a:t/>
+              <a:t>(답변) 오히려 강한 기준선을 만들어 봤습니다. 각 문제의 실제 Codeforces 레이팅을 알려 주고 어려운 문제만 높은 노력으로 보내도 예제 검사보다 못합니다. 레이팅 2600 이상만 보내면 61.4%, 1800 이상이면 65.3%인데 토큰이 27.8k로, 예제 검사의 65.0%, 20.2k보다 비쌉니다. 이 분석은 탐색적이라 사전 등록은 하지 않았습니다. 기하와 최적화에서도 난이도 기준 배분은 74%, 저희 방법은 87%입니다.</a:t>
             </a:r>
             <a:endParaRPr lang="en-US" dirty="0"/>
           </a:p>
@@ -2544,7 +2544,7 @@
           <a:p>
             <a:r>
               <a:rPr lang="en-US" dirty="0"/>
-              <a:t/>
+              <a:t>(답변) 같은 문제와 같은 모델로 기존 방법을 직접 돌려 비교했습니다. 난이도별 생각 배분은 74%, 4.1k 대 저희 87%, 2.5k이고, 항상 높은 노력은 66.2%, 30.1k 대 66.3%, 24.7k이고, 모델이 테스트를 쓰는 CodeT는 96.0% 대 대칭 검사 99.7%입니다. 특화 모델 ORLM-8B의 69.5%는 학습 없는 Qwen3-8B도 같은 69.5%입니다. 저희 방법은 더 정확하거나, 더 싸거나, 둘 다입니다.</a:t>
             </a:r>
             <a:endParaRPr lang="en-US" dirty="0"/>
           </a:p>
@@ -2632,7 +2632,7 @@
           <a:p>
             <a:r>
               <a:rPr lang="en-US" dirty="0"/>
-              <a:t/>
+              <a:t>(답변) 관련 연구는 여덟 갈래입니다. 텍스트 대신 프로그램, 코드용 라이브러리 문서, 오도하는 문맥, 프로그램 고르기, 테스트 시간 계산 배분, 최적화 모델링, 한 프로그램 재사용, 그리고 증명입니다. 저희가 더하는 것은 실패 원인에 맞춰 사실과 공짜 검사를 먼저 쓰고, 학습도 정답도 없이 생각을 아끼는 것입니다.</a:t>
             </a:r>
             <a:endParaRPr lang="en-US" dirty="0"/>
           </a:p>
@@ -2720,7 +2720,7 @@
           <a:p>
             <a:r>
               <a:rPr lang="en-US" dirty="0"/>
-              <a:t/>
+              <a:t>(답변) 논문 수치와 나란히 놓으면, MAMO Easy에서 학습 없는 Qwen3-14B가 82.8%로 파인튜닝한 ORLM의 82.3%와 비슷하고, gpt-oss-20b는 85.6%입니다. 프런티어 모델을 쓰는 OptiSkill의 90.8에서 94.3%보다는 낮습니다. miniF2F에서 Goedel-Prover-V2-8B는 논문 84.6%, 저희 환경에서 76.6%입니다. 평가 환경이 달라서 참고용입니다.</a:t>
             </a:r>
             <a:endParaRPr lang="en-US" dirty="0"/>
           </a:p>
@@ -2808,7 +2808,7 @@
           <a:p>
             <a:r>
               <a:rPr lang="en-US" dirty="0"/>
-              <a:t/>
+              <a:t>(답변) 다수결은 많이 나온 답을 고르고, 검사는 맞는 답을 고릅니다. 기하에서 세 프로그램 중 하나를 고를 때 다수결은 4.3% 틀리고, 대칭 검사는 0.3%만 틀립니다. 문장제에서 생각 세 번의 다수결은 79.4%로 저희보다 7점 높지만, 토큰이 16.4k로 12배입니다. MATH-500에서는 말 답 세 개의 다수결 89.2%보다 말과 프로그램 일치 검사가 97.2%로 높습니다.</a:t>
             </a:r>
             <a:endParaRPr lang="en-US" dirty="0"/>
           </a:p>
@@ -2896,7 +2896,7 @@
           <a:p>
             <a:r>
               <a:rPr lang="en-US" dirty="0"/>
-              <a:t/>
+              <a:t>(답변) 세 가지를 확인했습니다. 첫째, 입력 토큰입니다. 사실 조각은 입력을 213토큰 늘리고, 입력은 출력보다 싸고 캐시되므로 결론이 바뀌지 않습니다. 다만 프로그램을 돌리는 CPU 시간은 세지 않았습니다. 둘째, 암기입니다. 같은 난이도에서 오래된 대회와 최근 대회의 정답률이 81% 대 83%로 차이가 없고, MAMO는 끝까지 쓰지 않았으며, 모든 방법이 같은 모델을 씁니다. 셋째, 작은 차이는 '더 낫다'가 아니라 '같은 정확도에 더 적은 토큰'이라고만 말합니다.</a:t>
             </a:r>
             <a:endParaRPr lang="en-US" dirty="0"/>
           </a:p>
@@ -2984,7 +2984,7 @@
           <a:p>
             <a:r>
               <a:rPr lang="en-US" dirty="0"/>
-              <a:t/>
+              <a:t>(답변) 네, 작은 모델일수록 효과가 큽니다. 문장제 345문제에서 사실 하나로 Qwen3-1.7B는 44점, 4B는 31점 오르고, 32B는 1점 오릅니다. 그래서 24GB GPU 한 장에 들어가는 gpt-oss-20b가 사실과 함께 73%로, Qwen3-32B의 72%를 토큰 8분의 1로 따라잡습니다.</a:t>
             </a:r>
             <a:endParaRPr lang="en-US" dirty="0"/>
           </a:p>
@@ -3072,7 +3072,7 @@
           <a:p>
             <a:r>
               <a:rPr lang="en-US" dirty="0"/>
-              <a:t/>
+              <a:t>(답변) 기하와 최적화 208문제를 세 모델로 푼 정책 비교입니다. 사실을 먼저 주고 실패할 때만 생각하는 정책이 87%, 2.5k로 가장 정확하고 가장 싼 편입니다. 새 과제라면 30문제만 라벨링해서 네 정책 중 고르면, 63개 설정에서 최선 대비 손실이 0.6점입니다. 이 정책을 기본값으로 쓰면 1.4점, 항상 생각하면 8.4점 손해입니다.</a:t>
             </a:r>
             <a:endParaRPr lang="en-US" dirty="0"/>
           </a:p>
@@ -3160,7 +3160,7 @@
           <a:p>
             <a:r>
               <a:rPr lang="en-US" dirty="0"/>
-              <a:t/>
+              <a:t>(답변) 증명은 사실이 아니라 기술이 부족합니다. miniF2F 244문제에서 특화 증명 모델 Goedel-Prover-V2-8B가 74%를 증명하고, 일반 모델은 13에서 55%입니다. 일반 모델에는 비슷한 문제의 증명, 생각, 부등식 도구 모음 모두 도움이 되지 않았습니다. 이 8B 모델은 24GB GPU 한 장에 들어갑니다.</a:t>
             </a:r>
             <a:endParaRPr lang="en-US" dirty="0"/>
           </a:p>
@@ -3248,7 +3248,7 @@
           <a:p>
             <a:r>
               <a:rPr lang="en-US" dirty="0"/>
-              <a:t/>
+              <a:t>(답변) 방법이 멈추는 곳은 네 가지입니다. 증명, 다른 종류의 문제 사이의 자동 사실, 예제를 통과하는 틀린 프로그램, 그리고 세계 지식이 필요한 문제입니다. 다음으로는 MAMO 검증을 더 많은 모델로 마치고, 검사로 못 잡는 문제 모델링 오류를 다루고, 문제 종류마다 자동 사실을 찾겠습니다.</a:t>
             </a:r>
             <a:endParaRPr lang="en-US" dirty="0"/>
           </a:p>
@@ -3424,7 +3424,7 @@
           <a:p>
             <a:r>
               <a:rPr lang="en-US" dirty="0"/>
-              <a:t/>
+              <a:t>(답변) 같은 종류의 문제가 데이터만 바뀌어 반복되면, 검사된 프로그램 하나를 재사용합니다. 배송 경로 48일 동안 매일 새 프로그램을 쓰면 7%의 날만 유효하고 86k 토큰이 듭니다. 16개 프로그램을 한 번 쓰고 지난 8일에 유효한 것을 재사용하면 94%의 날이 유효하고 모두 28k 토큰입니다. 4배 큰 입력에서도 통했고, 규칙이 바뀌면 모델에게 고치게 하면 됩니다.</a:t>
             </a:r>
             <a:endParaRPr lang="en-US" dirty="0"/>
           </a:p>
@@ -3512,7 +3512,7 @@
           <a:p>
             <a:r>
               <a:rPr lang="en-US" dirty="0"/>
-              <a:t/>
+              <a:t>(답변) 모델은 Qwen3 1.7B에서 32B, Qwen3.6-35B, gpt-oss-20b와 120b, 증명용 Goedel과 DeepSeek-Prover이고 모두 직접 돌렸습니다. 채점은 정확히 맞았는지만 보고, 모든 결과에 토큰 비용을 함께 적습니다. 예측을 먼저 적고 한 번에 하나만 바꾸며 3개 시드로 확인했습니다. GPU는 96GB 한 장이고, 작은 모델은 24GB 한 장에 들어갑니다.</a:t>
             </a:r>
             <a:endParaRPr lang="en-US" dirty="0"/>
           </a:p>
@@ -3600,7 +3600,7 @@
           <a:p>
             <a:r>
               <a:rPr lang="en-US" dirty="0"/>
-              <a:t>(35초) 하지만 두 가지 문제가 있습니다. 첫째, 프로그램은 조용히 틀립니다. 같은 문제인데 프롬프트에 보조 코드만 더하면 6 대신 0을 출력하고, 에러 메시지도 없습니다. 없는 라이브러리 함수를 불러서 죽기도 합니다. 둘째, 오래 생각하면 비쌉니다. gpt-oss-120b는 오래 생각하면 57%에서 66%로 오르지만, 토큰은 4.4배를 씁니다. 그래서 질문입니다. 추가 노력을 빠진 사실, 공짜 검사, 더 많은 생각 중 어디에 써야 할까요?</a:t>
+              <a:t>(35초) 하지만 두 가지 문제가 있습니다. 첫째, 프로그램은 조용히 틀립니다. 같은 문제인데 프롬프트에 보조 코드만 더하면 6 대신 0을 출력하고, 에러 메시지도 없습니다. 없는 라이브러리 함수를 불러서 죽기도 합니다. 둘째, 오래 생각하면 비쌉니다. 경시 문제 311개에서 gpt-oss-120b는 오래 생각하면 57%에서 66%로 오르지만, 토큰은 4.4배를 씁니다. 그래서 질문입니다. 추가 노력을 빠진 사실, 공짜 검사, 더 많은 생각 중 어디에 써야 할까요?</a:t>
             </a:r>
             <a:endParaRPr lang="en-US" dirty="0"/>
           </a:p>
@@ -3776,7 +3776,7 @@
           <a:p>
             <a:r>
               <a:rPr lang="en-US" dirty="0"/>
-              <a:t>(30초) 두 번째 발견입니다. 공짜 검사가 실패할 때만 생각하게 하세요. 검사 A는 문제에 적힌 예제입니다. 예제를 통과하면 바로 제출하고, 틀리면 그 문제만 더 생각합니다. 예제만 쓰면 65%로 조금 낮고, 모든 경우를 다 따져 보는 짧은 프로그램과도 답을 맞춰 보면 66%가 됩니다. 검사 B는 프로그램을 두 버전으로 짜서, 답이 다를 때만 생각합니다. 두 경우 모두 항상 생각할 때와 정확도는 같고, 토큰은 18에서 27% 적습니다. 두 검사 모두 정답이 필요 없고, 기하, 경시, 경로, 문장제에서 모두 통했습니다.</a:t>
+              <a:t>(40초) 두 번째 발견입니다. 공짜 검사가 실패할 때만 생각하게 하세요. 검사 A는 문제에 적힌 예제입니다. 예제를 통과하면 바로 제출하고, 틀리면 그 문제만 더 생각합니다. 예제만 쓰면 65%로 조금 낮고, 모든 경우를 다 따져 보는 짧은 프로그램과도 답을 맞춰 보면 66%가 됩니다. 검사 B는 프로그램을 두 버전으로 짜서, 답이 다를 때만 생각합니다. 두 경우 모두 항상 생각할 때와 정확도는 같고, 토큰은 18에서 27% 적습니다. 두 검사 모두 정답이 필요 없고, 기하, 경시, 경로, 문장제에서 모두 통했습니다.</a:t>
             </a:r>
             <a:endParaRPr lang="en-US" dirty="0"/>
           </a:p>
@@ -3864,7 +3864,7 @@
           <a:p>
             <a:r>
               <a:rPr lang="en-US" dirty="0"/>
-              <a:t>(50초) 두 발견을 합친 것이 저희 방법입니다. 실제 최적화 문제로 보겠습니다. 1단계, 모델이 없는 메서드를 불러서 죽습니다. 2단계, 사실을 줍니다. 이 사실은 사람이 쓴 것이 아니라, 모델이 다른 문제에서 짜서 검사를 통과한 자기 프로그램에서 자동으로 가져옵니다. 3단계, 두 버전의 답이 20000으로 같으니, 4단계 생각은 건너뜁니다. 생각만 했다면 5.3k 토큰이 들었을 문제를 0.6k로 풉니다. 5단계, 같은 종류의 새 데이터에는 검사된 프로그램을 재사용합니다. 기하와 최적화 208문제를 세 모델로 풀면, 어려워 보이는 문제에 생각을 몰아주면 74%, 저희 방법은 87%이고 토큰도 더 적습니다.</a:t>
+              <a:t>(55초) 두 발견을 합친 것이 저희 방법입니다. 실제 최적화 문제로 보겠습니다. 1단계, 모델이 없는 메서드를 불러서 죽습니다. 2단계, 사실을 줍니다. 이 사실은 사람이 쓴 것이 아니라, 모델이 다른 문제에서 짜서 검사를 통과한 자기 프로그램에서 자동으로 가져옵니다. 3단계, 두 버전의 답이 20000으로 같으니, 4단계 생각은 건너뜁니다. 생각만 했다면 5.3k 토큰이 들었을 문제를 0.6k로 풉니다. 5단계, 같은 종류의 새 데이터에는 검사된 프로그램을 재사용합니다. 기하와 최적화 208문제를 세 모델로 풀면, 어려워 보이는 문제에 생각을 몰아주면 74%, 저희 방법은 87%이고 토큰도 더 적습니다. 처음 써 본 문장제 벤치마크에서도, 자동으로 찾은 사실이 사람이 쓴 사실과 같은 79%였습니다.</a:t>
             </a:r>
             <a:endParaRPr lang="en-US" dirty="0"/>
           </a:p>
@@ -4040,7 +4040,7 @@
           <a:p>
             <a:r>
               <a:rPr lang="en-US" dirty="0"/>
-              <a:t>(5초) 감사합니다. 질문 받겠습니다. 예상 질문마다 보충 슬라이드를 준비했습니다.</a:t>
+              <a:t>(10초) 감사합니다. 질문 받겠습니다. 예상 질문마다 보충 슬라이드를 준비했으니, 번호를 누르면 바로 넘어갑니다.</a:t>
             </a:r>
             <a:endParaRPr lang="en-US" dirty="0"/>
           </a:p>

--- a/Proposal_Team5.pptx
+++ b/Proposal_Team5.pptx
@@ -138,7 +138,7 @@
   <p:extLst>
     <p:ext uri="{521415D9-36F7-43E2-AB2F-B90AF26B5E84}">
       <p14:sectionLst xmlns:p14="http://schemas.microsoft.com/office/powerpoint/2010/main">
-        <p14:section name="Talk" id="{199d0fb3-3911-dfbd-0f1f-56eae52baec3}">
+        <p14:section name="Talk" id="{40c9819c-f9a8-ee37-d66f-2ee704ee84b7}">
           <p14:sldIdLst>
             <p14:sldId id="256"/>
             <p14:sldId id="257"/>
@@ -151,7 +151,7 @@
             <p14:sldId id="264"/>
           </p14:sldIdLst>
         </p14:section>
-        <p14:section name="Extra pages" id="{104f1de4-a923-5024-c565-a396ff4f7f48}">
+        <p14:section name="Extra pages" id="{48ce1c84-e22e-c264-5c11-35536d67111b}">
           <p14:sldIdLst>
             <p14:sldId id="265"/>
             <p14:sldId id="266"/>
@@ -1578,7 +1578,7 @@
           <a:p>
             <a:r>
               <a:rPr lang="en-US" dirty="0"/>
-              <a:t>(답변) 아니요, 모든 결과를 다섯 종류 전부에서 잰 것은 아닙니다. 사실 주기는 기하, 경로, 문장제에서, 공짜 검사는 기하, 경시, 경로, 문장제에서 확인했습니다. 전체 방법의 87% 대 74%는 기하 108문제와 최적화 100문제를 세 모델로 푼 결과입니다. 경시 수학은 말로 답해도 충분하고, 증명은 특화된 증명 모델이 필요해서 이 방법의 범위 밖입니다.</a:t>
+              <a:t>(답변) 아니요, 모든 결과를 네 종류 전부에서 잰 것은 아닙니다. 사실 주기는 기하, 경로, 문장제에서, 공짜 검사는 네 종류 모두에서 확인했습니다. 전체 방법의 87% 대 74%는 기하 108문제와 최적화 100문제를 세 모델로 푼 결과입니다. 확장으로 시험한 경시 수학은 말로 답해도 충분하고, 증명은 특화된 증명 모델이 필요해서 이 방법의 범위 밖입니다.</a:t>
             </a:r>
             <a:endParaRPr lang="en-US" dirty="0"/>
           </a:p>
@@ -2370,7 +2370,7 @@
           <a:p>
             <a:r>
               <a:rPr lang="en-US" dirty="0"/>
-              <a:t>(35초) 저희가 푸는 문제는 다섯 종류입니다. 기하 계산, Codeforces 기하 문제, 배송 경로, 최적화 문장제, 그리고 확장으로 경시 수학과 증명입니다. 쉽지 않습니다. 경시 문제의 중앙값은 Codeforces Master 수준이고, AIME는 고등학생 상위 5% 정도가 치는 시험입니다. 이 문제들을 고른 이유는, 답이 정확히 하나라 코드로 채점할 수 있고, 종류마다 필요한 것이 달라서 추가 노력을 어디에 써야 할지 비교할 수 있기 때문입니다. 기하와 경시는 맞는 알고리즘이, 경로와 문장제는 솔버를 맞게 부르는 법이 필요합니다. 공개 모델 Qwen3와 gpt-oss로 맞힌 문제 수와 토큰 수를 함께 잽니다.</a:t>
+              <a:t>(30초) 저희가 푸는 문제는 네 종류이고, 두 무리로 나뉩니다. 기하 계산과 Codeforces 경시 문제는 맞는 알고리즘이 필요하고, 경시 문제는 그중 어려운 쪽으로 중앙값이 Codeforces Master 수준입니다. 배송 경로와 최적화 문장제는 솔버를 맞게 부르는 법이 필요하고, 문장제는 글을 수식으로 옮기는 단계가 더 있습니다. 이 문제들을 고른 이유는 답이 정확히 하나라 코드로 채점할 수 있고, 필요한 것이 서로 달라서 추가 노력을 어디에 써야 할지 비교할 수 있기 때문입니다. 공개 모델 Qwen3와 gpt-oss로 맞힌 문제 수와 토큰 수를 함께 잽니다.</a:t>
             </a:r>
             <a:endParaRPr lang="en-US" dirty="0"/>
           </a:p>
@@ -7794,7 +7794,7 @@
                   <a:schemeClr val="tx1"/>
                 </a:solidFill>
               </a:rPr>
-              <a:t>Q: do the findings cover all five kinds?</a:t>
+              <a:t>Q: do the findings cover every kind?</a:t>
             </a:r>
             <a:endParaRPr lang="en-US" sz="3600" dirty="0"/>
           </a:p>
@@ -8178,7 +8178,7 @@
                             <a:srgbClr val="FFFFFF"/>
                           </a:solidFill>
                         </a:rPr>
-                        <a:t>Math and proofs</a:t>
+                        <a:t>Math, proofs (extension)</a:t>
                       </a:r>
                       <a:endParaRPr lang="en-US" sz="1300" dirty="0"/>
                     </a:p>
@@ -19687,18 +19687,144 @@
       </p:sp>
       <p:sp>
         <p:nvSpPr>
-          <p:cNvPr id="3" name="kind Geometry"/>
+          <p:cNvPr id="3" name="family needs the right algorithm"/>
           <p:cNvSpPr/>
           <p:nvPr/>
         </p:nvSpPr>
         <p:spPr>
           <a:xfrm>
-            <a:off x="548640" y="1280160"/>
-            <a:ext cx="2103120" cy="4069080"/>
+            <a:off x="548640" y="1234440"/>
+            <a:ext cx="5449824" cy="384048"/>
           </a:xfrm>
           <a:prstGeom prst="roundRect">
             <a:avLst>
-              <a:gd name="adj" fmla="val 3478"/>
+              <a:gd name="adj" fmla="val 19048"/>
+            </a:avLst>
+          </a:prstGeom>
+          <a:solidFill>
+            <a:srgbClr val="4472C4"/>
+          </a:solidFill>
+          <a:ln w="12700">
+            <a:solidFill>
+              <a:srgbClr val="4472C4"/>
+            </a:solidFill>
+            <a:prstDash val="solid"/>
+          </a:ln>
+        </p:spPr>
+      </p:sp>
+      <p:sp>
+        <p:nvSpPr>
+          <p:cNvPr id="4" name="Text 2"/>
+          <p:cNvSpPr txBox="1"/>
+          <p:nvPr/>
+        </p:nvSpPr>
+        <p:spPr>
+          <a:xfrm>
+            <a:off x="548640" y="1234440"/>
+            <a:ext cx="5449824" cy="384048"/>
+          </a:xfrm>
+          <a:prstGeom prst="rect">
+            <a:avLst/>
+          </a:prstGeom>
+          <a:noFill/>
+          <a:ln/>
+        </p:spPr>
+        <p:txBody>
+          <a:bodyPr wrap="square" lIns="0" tIns="0" rIns="0" bIns="0" rtlCol="0" anchor="ctr"/>
+          <a:lstStyle/>
+          <a:p>
+            <a:pPr algn="ctr" indent="0" marL="0">
+              <a:buNone/>
+            </a:pPr>
+            <a:r>
+              <a:rPr lang="en-US" sz="1600" b="1" dirty="0">
+                <a:solidFill>
+                  <a:srgbClr val="FFFFFF"/>
+                </a:solidFill>
+              </a:rPr>
+              <a:t>needs the right algorithm</a:t>
+            </a:r>
+            <a:endParaRPr lang="en-US" sz="1600" dirty="0"/>
+          </a:p>
+        </p:txBody>
+      </p:sp>
+      <p:sp>
+        <p:nvSpPr>
+          <p:cNvPr id="5" name="family needs the right solver call"/>
+          <p:cNvSpPr/>
+          <p:nvPr/>
+        </p:nvSpPr>
+        <p:spPr>
+          <a:xfrm>
+            <a:off x="6163056" y="1234440"/>
+            <a:ext cx="5449824" cy="384048"/>
+          </a:xfrm>
+          <a:prstGeom prst="roundRect">
+            <a:avLst>
+              <a:gd name="adj" fmla="val 19048"/>
+            </a:avLst>
+          </a:prstGeom>
+          <a:solidFill>
+            <a:srgbClr val="38761D"/>
+          </a:solidFill>
+          <a:ln w="12700">
+            <a:solidFill>
+              <a:srgbClr val="38761D"/>
+            </a:solidFill>
+            <a:prstDash val="solid"/>
+          </a:ln>
+        </p:spPr>
+      </p:sp>
+      <p:sp>
+        <p:nvSpPr>
+          <p:cNvPr id="6" name="Text 4"/>
+          <p:cNvSpPr txBox="1"/>
+          <p:nvPr/>
+        </p:nvSpPr>
+        <p:spPr>
+          <a:xfrm>
+            <a:off x="6163056" y="1234440"/>
+            <a:ext cx="5449824" cy="384048"/>
+          </a:xfrm>
+          <a:prstGeom prst="rect">
+            <a:avLst/>
+          </a:prstGeom>
+          <a:noFill/>
+          <a:ln/>
+        </p:spPr>
+        <p:txBody>
+          <a:bodyPr wrap="square" lIns="0" tIns="0" rIns="0" bIns="0" rtlCol="0" anchor="ctr"/>
+          <a:lstStyle/>
+          <a:p>
+            <a:pPr algn="ctr" indent="0" marL="0">
+              <a:buNone/>
+            </a:pPr>
+            <a:r>
+              <a:rPr lang="en-US" sz="1600" b="1" dirty="0">
+                <a:solidFill>
+                  <a:srgbClr val="FFFFFF"/>
+                </a:solidFill>
+              </a:rPr>
+              <a:t>needs the right solver call</a:t>
+            </a:r>
+            <a:endParaRPr lang="en-US" sz="1600" dirty="0"/>
+          </a:p>
+        </p:txBody>
+      </p:sp>
+      <p:sp>
+        <p:nvSpPr>
+          <p:cNvPr id="7" name="kind Geometry"/>
+          <p:cNvSpPr/>
+          <p:nvPr/>
+        </p:nvSpPr>
+        <p:spPr>
+          <a:xfrm>
+            <a:off x="548640" y="1737360"/>
+            <a:ext cx="2651760" cy="3611880"/>
+          </a:xfrm>
+          <a:prstGeom prst="roundRect">
+            <a:avLst>
+              <a:gd name="adj" fmla="val 2759"/>
             </a:avLst>
           </a:prstGeom>
           <a:solidFill>
@@ -19714,7 +19840,7 @@
       </p:sp>
       <p:pic>
         <p:nvPicPr>
-          <p:cNvPr id="4" name="icon shapes" descr="/NAS/SJ/POSTECH/nlp/figs/icons/shapes.png">    </p:cNvPr>
+          <p:cNvPr id="8" name="icon shapes" descr="/NAS/SJ/POSTECH/nlp/figs/icons/shapes.png">    </p:cNvPr>
           <p:cNvPicPr>
             <a:picLocks noChangeAspect="1"/>
           </p:cNvPicPr>
@@ -19728,7 +19854,7 @@
         </p:blipFill>
         <p:spPr>
           <a:xfrm>
-            <a:off x="1234440" y="1463040"/>
+            <a:off x="1508760" y="1874520"/>
             <a:ext cx="731520" cy="731520"/>
           </a:xfrm>
           <a:prstGeom prst="rect">
@@ -19738,14 +19864,14 @@
       </p:pic>
       <p:sp>
         <p:nvSpPr>
-          <p:cNvPr id="5" name="Text 2"/>
-          <p:cNvSpPr txBox="1"/>
-          <p:nvPr/>
-        </p:nvSpPr>
-        <p:spPr>
-          <a:xfrm>
-            <a:off x="640080" y="2286000"/>
-            <a:ext cx="1920240" cy="731520"/>
+          <p:cNvPr id="9" name="Text 6"/>
+          <p:cNvSpPr txBox="1"/>
+          <p:nvPr/>
+        </p:nvSpPr>
+        <p:spPr>
+          <a:xfrm>
+            <a:off x="640080" y="2697480"/>
+            <a:ext cx="2468880" cy="457200"/>
           </a:xfrm>
           <a:prstGeom prst="rect">
             <a:avLst/>
@@ -19761,27 +19887,27 @@
               <a:buNone/>
             </a:pPr>
             <a:r>
-              <a:rPr lang="en-US" sz="1800" b="1" dirty="0">
+              <a:rPr lang="en-US" sz="1900" b="1" dirty="0">
                 <a:solidFill>
                   <a:schemeClr val="tx1"/>
                 </a:solidFill>
               </a:rPr>
               <a:t>Geometry</a:t>
             </a:r>
-            <a:endParaRPr lang="en-US" sz="1800" dirty="0"/>
-          </a:p>
-        </p:txBody>
-      </p:sp>
-      <p:sp>
-        <p:nvSpPr>
-          <p:cNvPr id="6" name="Text 3"/>
-          <p:cNvSpPr txBox="1"/>
-          <p:nvPr/>
-        </p:nvSpPr>
-        <p:spPr>
-          <a:xfrm>
-            <a:off x="685800" y="3063240"/>
-            <a:ext cx="1828800" cy="1097280"/>
+            <a:endParaRPr lang="en-US" sz="1900" dirty="0"/>
+          </a:p>
+        </p:txBody>
+      </p:sp>
+      <p:sp>
+        <p:nvSpPr>
+          <p:cNvPr id="10" name="Text 7"/>
+          <p:cNvSpPr txBox="1"/>
+          <p:nvPr/>
+        </p:nvSpPr>
+        <p:spPr>
+          <a:xfrm>
+            <a:off x="731520" y="3200400"/>
+            <a:ext cx="2286000" cy="914400"/>
           </a:xfrm>
           <a:prstGeom prst="rect">
             <a:avLst/>
@@ -19810,14 +19936,14 @@
       </p:sp>
       <p:sp>
         <p:nvSpPr>
-          <p:cNvPr id="7" name="tag Geometry"/>
+          <p:cNvPr id="11" name="tag Geometry"/>
           <p:cNvSpPr/>
           <p:nvPr/>
         </p:nvSpPr>
         <p:spPr>
           <a:xfrm>
-            <a:off x="640080" y="4297680"/>
-            <a:ext cx="1920240" cy="868680"/>
+            <a:off x="685800" y="4297680"/>
+            <a:ext cx="2377440" cy="868680"/>
           </a:xfrm>
           <a:prstGeom prst="roundRect">
             <a:avLst>
@@ -19837,14 +19963,14 @@
       </p:sp>
       <p:sp>
         <p:nvSpPr>
-          <p:cNvPr id="8" name="Text 5"/>
-          <p:cNvSpPr txBox="1"/>
-          <p:nvPr/>
-        </p:nvSpPr>
-        <p:spPr>
-          <a:xfrm>
-            <a:off x="685800" y="4297680"/>
-            <a:ext cx="1828800" cy="868680"/>
+          <p:cNvPr id="12" name="Text 9"/>
+          <p:cNvSpPr txBox="1"/>
+          <p:nvPr/>
+        </p:nvSpPr>
+        <p:spPr>
+          <a:xfrm>
+            <a:off x="731520" y="4297680"/>
+            <a:ext cx="2286000" cy="868680"/>
           </a:xfrm>
           <a:prstGeom prst="rect">
             <a:avLst/>
@@ -19873,18 +19999,18 @@
       </p:sp>
       <p:sp>
         <p:nvSpPr>
-          <p:cNvPr id="9" name="kind Contest problems"/>
+          <p:cNvPr id="13" name="kind Contest problems"/>
           <p:cNvSpPr/>
           <p:nvPr/>
         </p:nvSpPr>
         <p:spPr>
           <a:xfrm>
-            <a:off x="2788920" y="1280160"/>
-            <a:ext cx="2103120" cy="4069080"/>
+            <a:off x="3355848" y="1737360"/>
+            <a:ext cx="2651760" cy="3611880"/>
           </a:xfrm>
           <a:prstGeom prst="roundRect">
             <a:avLst>
-              <a:gd name="adj" fmla="val 3478"/>
+              <a:gd name="adj" fmla="val 2759"/>
             </a:avLst>
           </a:prstGeom>
           <a:solidFill>
@@ -19900,7 +20026,7 @@
       </p:sp>
       <p:pic>
         <p:nvPicPr>
-          <p:cNvPr id="10" name="icon trophy" descr="/NAS/SJ/POSTECH/nlp/figs/icons/trophy.png">    </p:cNvPr>
+          <p:cNvPr id="14" name="icon trophy" descr="/NAS/SJ/POSTECH/nlp/figs/icons/trophy.png">    </p:cNvPr>
           <p:cNvPicPr>
             <a:picLocks noChangeAspect="1"/>
           </p:cNvPicPr>
@@ -19914,7 +20040,7 @@
         </p:blipFill>
         <p:spPr>
           <a:xfrm>
-            <a:off x="3474720" y="1463040"/>
+            <a:off x="4315968" y="1874520"/>
             <a:ext cx="731520" cy="731520"/>
           </a:xfrm>
           <a:prstGeom prst="rect">
@@ -19924,14 +20050,14 @@
       </p:pic>
       <p:sp>
         <p:nvSpPr>
-          <p:cNvPr id="11" name="Text 7"/>
-          <p:cNvSpPr txBox="1"/>
-          <p:nvPr/>
-        </p:nvSpPr>
-        <p:spPr>
-          <a:xfrm>
-            <a:off x="2880360" y="2286000"/>
-            <a:ext cx="1920240" cy="731520"/>
+          <p:cNvPr id="15" name="Text 11"/>
+          <p:cNvSpPr txBox="1"/>
+          <p:nvPr/>
+        </p:nvSpPr>
+        <p:spPr>
+          <a:xfrm>
+            <a:off x="3447288" y="2697480"/>
+            <a:ext cx="2468880" cy="457200"/>
           </a:xfrm>
           <a:prstGeom prst="rect">
             <a:avLst/>
@@ -19947,27 +20073,27 @@
               <a:buNone/>
             </a:pPr>
             <a:r>
-              <a:rPr lang="en-US" sz="1800" b="1" dirty="0">
+              <a:rPr lang="en-US" sz="1900" b="1" dirty="0">
                 <a:solidFill>
                   <a:schemeClr val="tx1"/>
                 </a:solidFill>
               </a:rPr>
               <a:t>Contest problems</a:t>
             </a:r>
-            <a:endParaRPr lang="en-US" sz="1800" dirty="0"/>
-          </a:p>
-        </p:txBody>
-      </p:sp>
-      <p:sp>
-        <p:nvSpPr>
-          <p:cNvPr id="12" name="Text 8"/>
-          <p:cNvSpPr txBox="1"/>
-          <p:nvPr/>
-        </p:nvSpPr>
-        <p:spPr>
-          <a:xfrm>
-            <a:off x="2926080" y="3063240"/>
-            <a:ext cx="1828800" cy="1097280"/>
+            <a:endParaRPr lang="en-US" sz="1900" dirty="0"/>
+          </a:p>
+        </p:txBody>
+      </p:sp>
+      <p:sp>
+        <p:nvSpPr>
+          <p:cNvPr id="16" name="Text 12"/>
+          <p:cNvSpPr txBox="1"/>
+          <p:nvPr/>
+        </p:nvSpPr>
+        <p:spPr>
+          <a:xfrm>
+            <a:off x="3538728" y="3200400"/>
+            <a:ext cx="2286000" cy="914400"/>
           </a:xfrm>
           <a:prstGeom prst="rect">
             <a:avLst/>
@@ -19996,14 +20122,14 @@
       </p:sp>
       <p:sp>
         <p:nvSpPr>
-          <p:cNvPr id="13" name="tag Contest problems"/>
+          <p:cNvPr id="17" name="tag Contest problems"/>
           <p:cNvSpPr/>
           <p:nvPr/>
         </p:nvSpPr>
         <p:spPr>
           <a:xfrm>
-            <a:off x="2880360" y="4297680"/>
-            <a:ext cx="1920240" cy="868680"/>
+            <a:off x="3493008" y="4297680"/>
+            <a:ext cx="2377440" cy="868680"/>
           </a:xfrm>
           <a:prstGeom prst="roundRect">
             <a:avLst>
@@ -20023,14 +20149,14 @@
       </p:sp>
       <p:sp>
         <p:nvSpPr>
-          <p:cNvPr id="14" name="Text 10"/>
-          <p:cNvSpPr txBox="1"/>
-          <p:nvPr/>
-        </p:nvSpPr>
-        <p:spPr>
-          <a:xfrm>
-            <a:off x="2926080" y="4297680"/>
-            <a:ext cx="1828800" cy="868680"/>
+          <p:cNvPr id="18" name="Text 14"/>
+          <p:cNvSpPr txBox="1"/>
+          <p:nvPr/>
+        </p:nvSpPr>
+        <p:spPr>
+          <a:xfrm>
+            <a:off x="3538728" y="4297680"/>
+            <a:ext cx="2286000" cy="868680"/>
           </a:xfrm>
           <a:prstGeom prst="rect">
             <a:avLst/>
@@ -20059,18 +20185,18 @@
       </p:sp>
       <p:sp>
         <p:nvSpPr>
-          <p:cNvPr id="15" name="kind Routing, scheduling"/>
+          <p:cNvPr id="19" name="kind Routing, scheduling"/>
           <p:cNvSpPr/>
           <p:nvPr/>
         </p:nvSpPr>
         <p:spPr>
           <a:xfrm>
-            <a:off x="5029200" y="1280160"/>
-            <a:ext cx="2103120" cy="4069080"/>
+            <a:off x="6163056" y="1737360"/>
+            <a:ext cx="2651760" cy="3611880"/>
           </a:xfrm>
           <a:prstGeom prst="roundRect">
             <a:avLst>
-              <a:gd name="adj" fmla="val 3478"/>
+              <a:gd name="adj" fmla="val 2759"/>
             </a:avLst>
           </a:prstGeom>
           <a:solidFill>
@@ -20086,7 +20212,7 @@
       </p:sp>
       <p:pic>
         <p:nvPicPr>
-          <p:cNvPr id="16" name="icon truck" descr="/NAS/SJ/POSTECH/nlp/figs/icons/truck.png">    </p:cNvPr>
+          <p:cNvPr id="20" name="icon truck" descr="/NAS/SJ/POSTECH/nlp/figs/icons/truck.png">    </p:cNvPr>
           <p:cNvPicPr>
             <a:picLocks noChangeAspect="1"/>
           </p:cNvPicPr>
@@ -20100,7 +20226,7 @@
         </p:blipFill>
         <p:spPr>
           <a:xfrm>
-            <a:off x="5715000" y="1463040"/>
+            <a:off x="7123176" y="1874520"/>
             <a:ext cx="731520" cy="731520"/>
           </a:xfrm>
           <a:prstGeom prst="rect">
@@ -20110,14 +20236,14 @@
       </p:pic>
       <p:sp>
         <p:nvSpPr>
-          <p:cNvPr id="17" name="Text 12"/>
-          <p:cNvSpPr txBox="1"/>
-          <p:nvPr/>
-        </p:nvSpPr>
-        <p:spPr>
-          <a:xfrm>
-            <a:off x="5120640" y="2286000"/>
-            <a:ext cx="1920240" cy="731520"/>
+          <p:cNvPr id="21" name="Text 16"/>
+          <p:cNvSpPr txBox="1"/>
+          <p:nvPr/>
+        </p:nvSpPr>
+        <p:spPr>
+          <a:xfrm>
+            <a:off x="6254496" y="2697480"/>
+            <a:ext cx="2468880" cy="457200"/>
           </a:xfrm>
           <a:prstGeom prst="rect">
             <a:avLst/>
@@ -20133,27 +20259,27 @@
               <a:buNone/>
             </a:pPr>
             <a:r>
-              <a:rPr lang="en-US" sz="1800" b="1" dirty="0">
+              <a:rPr lang="en-US" sz="1900" b="1" dirty="0">
                 <a:solidFill>
                   <a:schemeClr val="tx1"/>
                 </a:solidFill>
               </a:rPr>
               <a:t>Routing, scheduling</a:t>
             </a:r>
-            <a:endParaRPr lang="en-US" sz="1800" dirty="0"/>
-          </a:p>
-        </p:txBody>
-      </p:sp>
-      <p:sp>
-        <p:nvSpPr>
-          <p:cNvPr id="18" name="Text 13"/>
-          <p:cNvSpPr txBox="1"/>
-          <p:nvPr/>
-        </p:nvSpPr>
-        <p:spPr>
-          <a:xfrm>
-            <a:off x="5166360" y="3063240"/>
-            <a:ext cx="1828800" cy="1097280"/>
+            <a:endParaRPr lang="en-US" sz="1900" dirty="0"/>
+          </a:p>
+        </p:txBody>
+      </p:sp>
+      <p:sp>
+        <p:nvSpPr>
+          <p:cNvPr id="22" name="Text 17"/>
+          <p:cNvSpPr txBox="1"/>
+          <p:nvPr/>
+        </p:nvSpPr>
+        <p:spPr>
+          <a:xfrm>
+            <a:off x="6345936" y="3200400"/>
+            <a:ext cx="2286000" cy="914400"/>
           </a:xfrm>
           <a:prstGeom prst="rect">
             <a:avLst/>
@@ -20182,14 +20308,14 @@
       </p:sp>
       <p:sp>
         <p:nvSpPr>
-          <p:cNvPr id="19" name="tag Routing, scheduling"/>
+          <p:cNvPr id="23" name="tag Routing, scheduling"/>
           <p:cNvSpPr/>
           <p:nvPr/>
         </p:nvSpPr>
         <p:spPr>
           <a:xfrm>
-            <a:off x="5120640" y="4297680"/>
-            <a:ext cx="1920240" cy="868680"/>
+            <a:off x="6300216" y="4297680"/>
+            <a:ext cx="2377440" cy="868680"/>
           </a:xfrm>
           <a:prstGeom prst="roundRect">
             <a:avLst>
@@ -20209,14 +20335,14 @@
       </p:sp>
       <p:sp>
         <p:nvSpPr>
-          <p:cNvPr id="20" name="Text 15"/>
-          <p:cNvSpPr txBox="1"/>
-          <p:nvPr/>
-        </p:nvSpPr>
-        <p:spPr>
-          <a:xfrm>
-            <a:off x="5166360" y="4297680"/>
-            <a:ext cx="1828800" cy="868680"/>
+          <p:cNvPr id="24" name="Text 19"/>
+          <p:cNvSpPr txBox="1"/>
+          <p:nvPr/>
+        </p:nvSpPr>
+        <p:spPr>
+          <a:xfrm>
+            <a:off x="6345936" y="4297680"/>
+            <a:ext cx="2286000" cy="868680"/>
           </a:xfrm>
           <a:prstGeom prst="rect">
             <a:avLst/>
@@ -20245,18 +20371,18 @@
       </p:sp>
       <p:sp>
         <p:nvSpPr>
-          <p:cNvPr id="21" name="kind Word problems"/>
+          <p:cNvPr id="25" name="kind Word problems"/>
           <p:cNvSpPr/>
           <p:nvPr/>
         </p:nvSpPr>
         <p:spPr>
           <a:xfrm>
-            <a:off x="7269480" y="1280160"/>
-            <a:ext cx="2103120" cy="4069080"/>
+            <a:off x="8970264" y="1737360"/>
+            <a:ext cx="2651760" cy="3611880"/>
           </a:xfrm>
           <a:prstGeom prst="roundRect">
             <a:avLst>
-              <a:gd name="adj" fmla="val 3478"/>
+              <a:gd name="adj" fmla="val 2759"/>
             </a:avLst>
           </a:prstGeom>
           <a:solidFill>
@@ -20272,7 +20398,7 @@
       </p:sp>
       <p:pic>
         <p:nvPicPr>
-          <p:cNvPr id="22" name="icon calc" descr="/NAS/SJ/POSTECH/nlp/figs/icons/calc.png">    </p:cNvPr>
+          <p:cNvPr id="26" name="icon calc" descr="/NAS/SJ/POSTECH/nlp/figs/icons/calc.png">    </p:cNvPr>
           <p:cNvPicPr>
             <a:picLocks noChangeAspect="1"/>
           </p:cNvPicPr>
@@ -20286,7 +20412,7 @@
         </p:blipFill>
         <p:spPr>
           <a:xfrm>
-            <a:off x="7955280" y="1463040"/>
+            <a:off x="9930384" y="1874520"/>
             <a:ext cx="731520" cy="731520"/>
           </a:xfrm>
           <a:prstGeom prst="rect">
@@ -20296,14 +20422,14 @@
       </p:pic>
       <p:sp>
         <p:nvSpPr>
-          <p:cNvPr id="23" name="Text 17"/>
-          <p:cNvSpPr txBox="1"/>
-          <p:nvPr/>
-        </p:nvSpPr>
-        <p:spPr>
-          <a:xfrm>
-            <a:off x="7360920" y="2286000"/>
-            <a:ext cx="1920240" cy="731520"/>
+          <p:cNvPr id="27" name="Text 21"/>
+          <p:cNvSpPr txBox="1"/>
+          <p:nvPr/>
+        </p:nvSpPr>
+        <p:spPr>
+          <a:xfrm>
+            <a:off x="9061704" y="2697480"/>
+            <a:ext cx="2468880" cy="457200"/>
           </a:xfrm>
           <a:prstGeom prst="rect">
             <a:avLst/>
@@ -20319,27 +20445,27 @@
               <a:buNone/>
             </a:pPr>
             <a:r>
-              <a:rPr lang="en-US" sz="1800" b="1" dirty="0">
+              <a:rPr lang="en-US" sz="1900" b="1" dirty="0">
                 <a:solidFill>
                   <a:schemeClr val="tx1"/>
                 </a:solidFill>
               </a:rPr>
               <a:t>Word problems</a:t>
             </a:r>
-            <a:endParaRPr lang="en-US" sz="1800" dirty="0"/>
-          </a:p>
-        </p:txBody>
-      </p:sp>
-      <p:sp>
-        <p:nvSpPr>
-          <p:cNvPr id="24" name="Text 18"/>
-          <p:cNvSpPr txBox="1"/>
-          <p:nvPr/>
-        </p:nvSpPr>
-        <p:spPr>
-          <a:xfrm>
-            <a:off x="7406640" y="3063240"/>
-            <a:ext cx="1828800" cy="1097280"/>
+            <a:endParaRPr lang="en-US" sz="1900" dirty="0"/>
+          </a:p>
+        </p:txBody>
+      </p:sp>
+      <p:sp>
+        <p:nvSpPr>
+          <p:cNvPr id="28" name="Text 22"/>
+          <p:cNvSpPr txBox="1"/>
+          <p:nvPr/>
+        </p:nvSpPr>
+        <p:spPr>
+          <a:xfrm>
+            <a:off x="9153144" y="3200400"/>
+            <a:ext cx="2286000" cy="914400"/>
           </a:xfrm>
           <a:prstGeom prst="rect">
             <a:avLst/>
@@ -20368,14 +20494,14 @@
       </p:sp>
       <p:sp>
         <p:nvSpPr>
-          <p:cNvPr id="25" name="tag Word problems"/>
+          <p:cNvPr id="29" name="tag Word problems"/>
           <p:cNvSpPr/>
           <p:nvPr/>
         </p:nvSpPr>
         <p:spPr>
           <a:xfrm>
-            <a:off x="7360920" y="4297680"/>
-            <a:ext cx="1920240" cy="868680"/>
+            <a:off x="9107424" y="4297680"/>
+            <a:ext cx="2377440" cy="868680"/>
           </a:xfrm>
           <a:prstGeom prst="roundRect">
             <a:avLst>
@@ -20395,14 +20521,14 @@
       </p:sp>
       <p:sp>
         <p:nvSpPr>
-          <p:cNvPr id="26" name="Text 20"/>
-          <p:cNvSpPr txBox="1"/>
-          <p:nvPr/>
-        </p:nvSpPr>
-        <p:spPr>
-          <a:xfrm>
-            <a:off x="7406640" y="4297680"/>
-            <a:ext cx="1828800" cy="868680"/>
+          <p:cNvPr id="30" name="Text 24"/>
+          <p:cNvSpPr txBox="1"/>
+          <p:nvPr/>
+        </p:nvSpPr>
+        <p:spPr>
+          <a:xfrm>
+            <a:off x="9153144" y="4297680"/>
+            <a:ext cx="2286000" cy="868680"/>
           </a:xfrm>
           <a:prstGeom prst="rect">
             <a:avLst/>
@@ -20431,207 +20557,7 @@
       </p:sp>
       <p:sp>
         <p:nvSpPr>
-          <p:cNvPr id="27" name="kind Math and proofs"/>
-          <p:cNvSpPr/>
-          <p:nvPr/>
-        </p:nvSpPr>
-        <p:spPr>
-          <a:xfrm>
-            <a:off x="9509760" y="1280160"/>
-            <a:ext cx="2103120" cy="4069080"/>
-          </a:xfrm>
-          <a:prstGeom prst="roundRect">
-            <a:avLst>
-              <a:gd name="adj" fmla="val 3478"/>
-            </a:avLst>
-          </a:prstGeom>
-          <a:solidFill>
-            <a:srgbClr val="F7F7F7"/>
-          </a:solidFill>
-          <a:ln w="15875">
-            <a:solidFill>
-              <a:srgbClr val="A6A6A6"/>
-            </a:solidFill>
-            <a:prstDash val="dash"/>
-          </a:ln>
-        </p:spPr>
-      </p:sp>
-      <p:pic>
-        <p:nvPicPr>
-          <p:cNvPr id="28" name="icon sqrt" descr="/NAS/SJ/POSTECH/nlp/figs/icons/sqrt.png">    </p:cNvPr>
-          <p:cNvPicPr>
-            <a:picLocks noChangeAspect="1"/>
-          </p:cNvPicPr>
-          <p:nvPr/>
-        </p:nvPicPr>
-        <p:blipFill>
-          <a:blip r:embed="rId5"/>
-          <a:stretch>
-            <a:fillRect/>
-          </a:stretch>
-        </p:blipFill>
-        <p:spPr>
-          <a:xfrm>
-            <a:off x="10195560" y="1463040"/>
-            <a:ext cx="731520" cy="731520"/>
-          </a:xfrm>
-          <a:prstGeom prst="rect">
-            <a:avLst/>
-          </a:prstGeom>
-        </p:spPr>
-      </p:pic>
-      <p:sp>
-        <p:nvSpPr>
-          <p:cNvPr id="29" name="Text 22"/>
-          <p:cNvSpPr txBox="1"/>
-          <p:nvPr/>
-        </p:nvSpPr>
-        <p:spPr>
-          <a:xfrm>
-            <a:off x="9601200" y="2286000"/>
-            <a:ext cx="1920240" cy="731520"/>
-          </a:xfrm>
-          <a:prstGeom prst="rect">
-            <a:avLst/>
-          </a:prstGeom>
-          <a:noFill/>
-          <a:ln/>
-        </p:spPr>
-        <p:txBody>
-          <a:bodyPr wrap="square" lIns="0" tIns="0" rIns="0" bIns="0" rtlCol="0" anchor="ctr"/>
-          <a:lstStyle/>
-          <a:p>
-            <a:pPr algn="ctr" indent="0" marL="0">
-              <a:buNone/>
-            </a:pPr>
-            <a:r>
-              <a:rPr lang="en-US" sz="1800" b="1" dirty="0">
-                <a:solidFill>
-                  <a:schemeClr val="tx1"/>
-                </a:solidFill>
-              </a:rPr>
-              <a:t>Math and proofs</a:t>
-            </a:r>
-            <a:endParaRPr lang="en-US" sz="1800" dirty="0"/>
-          </a:p>
-          <a:p>
-            <a:pPr algn="ctr" indent="0" marL="0">
-              <a:buNone/>
-            </a:pPr>
-            <a:r>
-              <a:rPr lang="en-US" sz="1500" b="1" dirty="0">
-                <a:solidFill>
-                  <a:srgbClr val="7F7F7F"/>
-                </a:solidFill>
-              </a:rPr>
-              <a:t>(extension)</a:t>
-            </a:r>
-            <a:endParaRPr lang="en-US" sz="1800" dirty="0"/>
-          </a:p>
-        </p:txBody>
-      </p:sp>
-      <p:sp>
-        <p:nvSpPr>
-          <p:cNvPr id="30" name="Text 23"/>
-          <p:cNvSpPr txBox="1"/>
-          <p:nvPr/>
-        </p:nvSpPr>
-        <p:spPr>
-          <a:xfrm>
-            <a:off x="9646920" y="3063240"/>
-            <a:ext cx="1828800" cy="1097280"/>
-          </a:xfrm>
-          <a:prstGeom prst="rect">
-            <a:avLst/>
-          </a:prstGeom>
-          <a:noFill/>
-          <a:ln/>
-        </p:spPr>
-        <p:txBody>
-          <a:bodyPr wrap="square" lIns="0" tIns="0" rIns="0" bIns="0" rtlCol="0" anchor="t"/>
-          <a:lstStyle/>
-          <a:p>
-            <a:pPr algn="ctr" indent="0" marL="0">
-              <a:buNone/>
-            </a:pPr>
-            <a:r>
-              <a:rPr lang="en-US" sz="1500" dirty="0">
-                <a:solidFill>
-                  <a:schemeClr val="tx1"/>
-                </a:solidFill>
-              </a:rPr>
-              <a:t>contest answers; machine-checked proofs</a:t>
-            </a:r>
-            <a:endParaRPr lang="en-US" sz="1500" dirty="0"/>
-          </a:p>
-        </p:txBody>
-      </p:sp>
-      <p:sp>
-        <p:nvSpPr>
-          <p:cNvPr id="31" name="tag Math and proofs"/>
-          <p:cNvSpPr/>
-          <p:nvPr/>
-        </p:nvSpPr>
-        <p:spPr>
-          <a:xfrm>
-            <a:off x="9601200" y="4297680"/>
-            <a:ext cx="1920240" cy="868680"/>
-          </a:xfrm>
-          <a:prstGeom prst="roundRect">
-            <a:avLst>
-              <a:gd name="adj" fmla="val 10526"/>
-            </a:avLst>
-          </a:prstGeom>
-          <a:solidFill>
-            <a:srgbClr val="FFFFFF"/>
-          </a:solidFill>
-          <a:ln w="15875">
-            <a:solidFill>
-              <a:srgbClr val="595959"/>
-            </a:solidFill>
-            <a:prstDash val="solid"/>
-          </a:ln>
-        </p:spPr>
-      </p:sp>
-      <p:sp>
-        <p:nvSpPr>
-          <p:cNvPr id="32" name="Text 25"/>
-          <p:cNvSpPr txBox="1"/>
-          <p:nvPr/>
-        </p:nvSpPr>
-        <p:spPr>
-          <a:xfrm>
-            <a:off x="9646920" y="4297680"/>
-            <a:ext cx="1828800" cy="868680"/>
-          </a:xfrm>
-          <a:prstGeom prst="rect">
-            <a:avLst/>
-          </a:prstGeom>
-          <a:noFill/>
-          <a:ln/>
-        </p:spPr>
-        <p:txBody>
-          <a:bodyPr wrap="square" lIns="0" tIns="0" rIns="0" bIns="0" rtlCol="0" anchor="ctr"/>
-          <a:lstStyle/>
-          <a:p>
-            <a:pPr algn="ctr" indent="0" marL="0">
-              <a:buNone/>
-            </a:pPr>
-            <a:r>
-              <a:rPr lang="en-US" sz="1500" b="1" dirty="0">
-                <a:solidFill>
-                  <a:srgbClr val="595959"/>
-                </a:solidFill>
-              </a:rPr>
-              <a:t>AIME: top ~5% of high-school contestants</a:t>
-            </a:r>
-            <a:endParaRPr lang="en-US" sz="1500" dirty="0"/>
-          </a:p>
-        </p:txBody>
-      </p:sp>
-      <p:sp>
-        <p:nvSpPr>
-          <p:cNvPr id="33" name="Text 26"/>
+          <p:cNvPr id="31" name="Text 25"/>
           <p:cNvSpPr txBox="1"/>
           <p:nvPr/>
         </p:nvSpPr>
@@ -39701,7 +39627,7 @@
         </p:nvSpPr>
         <p:spPr>
           <a:xfrm>
-            <a:off x="8412480" y="987552"/>
+            <a:off x="8778240" y="987552"/>
             <a:ext cx="1143000" cy="274320"/>
           </a:xfrm>
           <a:prstGeom prst="rect">
@@ -39745,7 +39671,7 @@
         </p:blipFill>
         <p:spPr>
           <a:xfrm>
-            <a:off x="9692640" y="978408"/>
+            <a:off x="10058400" y="978408"/>
             <a:ext cx="274320" cy="274320"/>
           </a:xfrm>
           <a:prstGeom prst="rect">
@@ -39771,7 +39697,7 @@
         </p:blipFill>
         <p:spPr>
           <a:xfrm>
-            <a:off x="10076688" y="978408"/>
+            <a:off x="10442448" y="978408"/>
             <a:ext cx="274320" cy="274320"/>
           </a:xfrm>
           <a:prstGeom prst="rect">
@@ -39795,7 +39721,7 @@
         </p:blipFill>
         <p:spPr>
           <a:xfrm>
-            <a:off x="10460736" y="978408"/>
+            <a:off x="10826496" y="978408"/>
             <a:ext cx="274320" cy="274320"/>
           </a:xfrm>
           <a:prstGeom prst="rect">
@@ -39819,7 +39745,7 @@
         </p:blipFill>
         <p:spPr>
           <a:xfrm>
-            <a:off x="10844784" y="978408"/>
+            <a:off x="11210544" y="978408"/>
             <a:ext cx="274320" cy="274320"/>
           </a:xfrm>
           <a:prstGeom prst="rect">
@@ -39827,35 +39753,9 @@
           </a:prstGeom>
         </p:spPr>
       </p:pic>
-      <p:pic>
-        <p:nvPicPr>
-          <p:cNvPr id="11" name="not shown on sqrt" descr="/NAS/SJ/POSTECH/nlp/figs/icons/sqrt.png">    </p:cNvPr>
-          <p:cNvPicPr>
-            <a:picLocks noChangeAspect="1"/>
-          </p:cNvPicPr>
-          <p:nvPr/>
-        </p:nvPicPr>
-        <p:blipFill>
-          <a:blip r:embed="rId6">
-            <a:alphaModFix amt="18000"/>
-          </a:blip>
-          <a:stretch>
-            <a:fillRect/>
-          </a:stretch>
-        </p:blipFill>
-        <p:spPr>
-          <a:xfrm>
-            <a:off x="11228832" y="978408"/>
-            <a:ext cx="274320" cy="274320"/>
-          </a:xfrm>
-          <a:prstGeom prst="rect">
-            <a:avLst/>
-          </a:prstGeom>
-        </p:spPr>
-      </p:pic>
-      <p:sp>
-        <p:nvSpPr>
-          <p:cNvPr id="12" name="Text 4"/>
+      <p:sp>
+        <p:nvSpPr>
+          <p:cNvPr id="11" name="Text 4"/>
           <p:cNvSpPr txBox="1"/>
           <p:nvPr/>
         </p:nvSpPr>
@@ -39891,7 +39791,7 @@
       </p:sp>
       <p:sp>
         <p:nvSpPr>
-          <p:cNvPr id="13" name="box a long reference she"/>
+          <p:cNvPr id="12" name="box a long reference she"/>
           <p:cNvSpPr/>
           <p:nvPr/>
         </p:nvSpPr>
@@ -39918,7 +39818,7 @@
       </p:sp>
       <p:sp>
         <p:nvSpPr>
-          <p:cNvPr id="14" name="Text 6"/>
+          <p:cNvPr id="13" name="Text 6"/>
           <p:cNvSpPr txBox="1"/>
           <p:nvPr/>
         </p:nvSpPr>
@@ -39954,7 +39854,7 @@
       </p:sp>
       <p:sp>
         <p:nvSpPr>
-          <p:cNvPr id="15" name="Shape 7"/>
+          <p:cNvPr id="14" name="Shape 7"/>
           <p:cNvSpPr/>
           <p:nvPr/>
         </p:nvSpPr>
@@ -39978,7 +39878,7 @@
       </p:sp>
       <p:sp>
         <p:nvSpPr>
-          <p:cNvPr id="16" name="code RegisterUnaryLongLiv"/>
+          <p:cNvPr id="15" name="code RegisterUnaryLongLiv"/>
           <p:cNvSpPr/>
           <p:nvPr/>
         </p:nvSpPr>
@@ -40003,7 +39903,7 @@
       </p:sp>
       <p:sp>
         <p:nvSpPr>
-          <p:cNvPr id="17" name="Text 9"/>
+          <p:cNvPr id="16" name="Text 9"/>
           <p:cNvSpPr txBox="1"/>
           <p:nvPr/>
         </p:nvSpPr>
@@ -40042,7 +39942,7 @@
       </p:sp>
       <p:sp>
         <p:nvSpPr>
-          <p:cNvPr id="18" name="Text 10"/>
+          <p:cNvPr id="17" name="Text 10"/>
           <p:cNvSpPr txBox="1"/>
           <p:nvPr/>
         </p:nvSpPr>
@@ -40078,7 +39978,7 @@
       </p:sp>
       <p:sp>
         <p:nvSpPr>
-          <p:cNvPr id="19" name="box the exact usage (11 "/>
+          <p:cNvPr id="18" name="box the exact usage (11 "/>
           <p:cNvSpPr/>
           <p:nvPr/>
         </p:nvSpPr>
@@ -40105,7 +40005,7 @@
       </p:sp>
       <p:sp>
         <p:nvSpPr>
-          <p:cNvPr id="20" name="Text 12"/>
+          <p:cNvPr id="19" name="Text 12"/>
           <p:cNvSpPr txBox="1"/>
           <p:nvPr/>
         </p:nvSpPr>
@@ -40141,7 +40041,7 @@
       </p:sp>
       <p:sp>
         <p:nvSpPr>
-          <p:cNvPr id="21" name="Shape 13"/>
+          <p:cNvPr id="20" name="Shape 13"/>
           <p:cNvSpPr/>
           <p:nvPr/>
         </p:nvSpPr>
@@ -40165,7 +40065,7 @@
       </p:sp>
       <p:sp>
         <p:nvSpPr>
-          <p:cNvPr id="22" name="code RegisterUnaryTransit"/>
+          <p:cNvPr id="21" name="code RegisterUnaryTransit"/>
           <p:cNvSpPr/>
           <p:nvPr/>
         </p:nvSpPr>
@@ -40190,7 +40090,7 @@
       </p:sp>
       <p:sp>
         <p:nvSpPr>
-          <p:cNvPr id="23" name="Text 15"/>
+          <p:cNvPr id="22" name="Text 15"/>
           <p:cNvSpPr txBox="1"/>
           <p:nvPr/>
         </p:nvSpPr>
@@ -40229,7 +40129,7 @@
       </p:sp>
       <p:sp>
         <p:nvSpPr>
-          <p:cNvPr id="24" name="Text 16"/>
+          <p:cNvPr id="23" name="Text 16"/>
           <p:cNvSpPr txBox="1"/>
           <p:nvPr/>
         </p:nvSpPr>
@@ -40265,7 +40165,7 @@
       </p:sp>
       <p:sp>
         <p:nvSpPr>
-          <p:cNvPr id="25" name="Text 17"/>
+          <p:cNvPr id="24" name="Text 17"/>
           <p:cNvSpPr txBox="1"/>
           <p:nvPr/>
         </p:nvSpPr>
@@ -40301,7 +40201,7 @@
       </p:sp>
       <p:sp>
         <p:nvSpPr>
-          <p:cNvPr id="26" name="Text 18"/>
+          <p:cNvPr id="25" name="Text 18"/>
           <p:cNvSpPr txBox="1"/>
           <p:nvPr/>
         </p:nvSpPr>
@@ -40337,7 +40237,7 @@
       </p:sp>
       <p:sp>
         <p:nvSpPr>
-          <p:cNvPr id="27" name="bar nothing extra"/>
+          <p:cNvPr id="26" name="bar nothing extra"/>
           <p:cNvSpPr/>
           <p:nvPr/>
         </p:nvSpPr>
@@ -40362,7 +40262,7 @@
       </p:sp>
       <p:sp>
         <p:nvSpPr>
-          <p:cNvPr id="28" name="Text 20"/>
+          <p:cNvPr id="27" name="Text 20"/>
           <p:cNvSpPr txBox="1"/>
           <p:nvPr/>
         </p:nvSpPr>
@@ -40398,7 +40298,7 @@
       </p:sp>
       <p:sp>
         <p:nvSpPr>
-          <p:cNvPr id="29" name="Text 21"/>
+          <p:cNvPr id="28" name="Text 21"/>
           <p:cNvSpPr txBox="1"/>
           <p:nvPr/>
         </p:nvSpPr>
@@ -40434,7 +40334,7 @@
       </p:sp>
       <p:sp>
         <p:nvSpPr>
-          <p:cNvPr id="30" name="bar think longer"/>
+          <p:cNvPr id="29" name="bar think longer"/>
           <p:cNvSpPr/>
           <p:nvPr/>
         </p:nvSpPr>
@@ -40459,7 +40359,7 @@
       </p:sp>
       <p:sp>
         <p:nvSpPr>
-          <p:cNvPr id="31" name="Text 23"/>
+          <p:cNvPr id="30" name="Text 23"/>
           <p:cNvSpPr txBox="1"/>
           <p:nvPr/>
         </p:nvSpPr>
@@ -40495,7 +40395,7 @@
       </p:sp>
       <p:sp>
         <p:nvSpPr>
-          <p:cNvPr id="32" name="Text 24"/>
+          <p:cNvPr id="31" name="Text 24"/>
           <p:cNvSpPr txBox="1"/>
           <p:nvPr/>
         </p:nvSpPr>
@@ -40531,7 +40431,7 @@
       </p:sp>
       <p:sp>
         <p:nvSpPr>
-          <p:cNvPr id="33" name="bar long reference sheet"/>
+          <p:cNvPr id="32" name="bar long reference sheet"/>
           <p:cNvSpPr/>
           <p:nvPr/>
         </p:nvSpPr>
@@ -40556,7 +40456,7 @@
       </p:sp>
       <p:sp>
         <p:nvSpPr>
-          <p:cNvPr id="34" name="Text 26"/>
+          <p:cNvPr id="33" name="Text 26"/>
           <p:cNvSpPr txBox="1"/>
           <p:nvPr/>
         </p:nvSpPr>
@@ -40592,7 +40492,7 @@
       </p:sp>
       <p:sp>
         <p:nvSpPr>
-          <p:cNvPr id="35" name="Text 27"/>
+          <p:cNvPr id="34" name="Text 27"/>
           <p:cNvSpPr txBox="1"/>
           <p:nvPr/>
         </p:nvSpPr>
@@ -40628,7 +40528,7 @@
       </p:sp>
       <p:sp>
         <p:nvSpPr>
-          <p:cNvPr id="36" name="bar exact usage"/>
+          <p:cNvPr id="35" name="bar exact usage"/>
           <p:cNvSpPr/>
           <p:nvPr/>
         </p:nvSpPr>
@@ -40653,7 +40553,7 @@
       </p:sp>
       <p:sp>
         <p:nvSpPr>
-          <p:cNvPr id="37" name="Text 29"/>
+          <p:cNvPr id="36" name="Text 29"/>
           <p:cNvSpPr txBox="1"/>
           <p:nvPr/>
         </p:nvSpPr>
@@ -40689,7 +40589,7 @@
       </p:sp>
       <p:sp>
         <p:nvSpPr>
-          <p:cNvPr id="38" name="Text 30"/>
+          <p:cNvPr id="37" name="Text 30"/>
           <p:cNvSpPr txBox="1"/>
           <p:nvPr/>
         </p:nvSpPr>
@@ -40926,7 +40826,7 @@
         </p:nvSpPr>
         <p:spPr>
           <a:xfrm>
-            <a:off x="8412480" y="987552"/>
+            <a:off x="8778240" y="987552"/>
             <a:ext cx="1143000" cy="274320"/>
           </a:xfrm>
           <a:prstGeom prst="rect">
@@ -40970,7 +40870,7 @@
         </p:blipFill>
         <p:spPr>
           <a:xfrm>
-            <a:off x="9692640" y="978408"/>
+            <a:off x="10058400" y="978408"/>
             <a:ext cx="274320" cy="274320"/>
           </a:xfrm>
           <a:prstGeom prst="rect">
@@ -40994,7 +40894,7 @@
         </p:blipFill>
         <p:spPr>
           <a:xfrm>
-            <a:off x="10076688" y="978408"/>
+            <a:off x="10442448" y="978408"/>
             <a:ext cx="274320" cy="274320"/>
           </a:xfrm>
           <a:prstGeom prst="rect">
@@ -41018,7 +40918,7 @@
         </p:blipFill>
         <p:spPr>
           <a:xfrm>
-            <a:off x="10460736" y="978408"/>
+            <a:off x="10826496" y="978408"/>
             <a:ext cx="274320" cy="274320"/>
           </a:xfrm>
           <a:prstGeom prst="rect">
@@ -41042,7 +40942,7 @@
         </p:blipFill>
         <p:spPr>
           <a:xfrm>
-            <a:off x="10844784" y="978408"/>
+            <a:off x="11210544" y="978408"/>
             <a:ext cx="274320" cy="274320"/>
           </a:xfrm>
           <a:prstGeom prst="rect">
@@ -41050,35 +40950,9 @@
           </a:prstGeom>
         </p:spPr>
       </p:pic>
-      <p:pic>
-        <p:nvPicPr>
-          <p:cNvPr id="11" name="not shown on sqrt" descr="/NAS/SJ/POSTECH/nlp/figs/icons/sqrt.png">    </p:cNvPr>
-          <p:cNvPicPr>
-            <a:picLocks noChangeAspect="1"/>
-          </p:cNvPicPr>
-          <p:nvPr/>
-        </p:nvPicPr>
-        <p:blipFill>
-          <a:blip r:embed="rId6">
-            <a:alphaModFix amt="18000"/>
-          </a:blip>
-          <a:stretch>
-            <a:fillRect/>
-          </a:stretch>
-        </p:blipFill>
-        <p:spPr>
-          <a:xfrm>
-            <a:off x="11228832" y="978408"/>
-            <a:ext cx="274320" cy="274320"/>
-          </a:xfrm>
-          <a:prstGeom prst="rect">
-            <a:avLst/>
-          </a:prstGeom>
-        </p:spPr>
-      </p:pic>
-      <p:sp>
-        <p:nvSpPr>
-          <p:cNvPr id="12" name="Check A: the problem's own examples"/>
+      <p:sp>
+        <p:nvSpPr>
+          <p:cNvPr id="11" name="Check A: the problem's own examples"/>
           <p:cNvSpPr/>
           <p:nvPr/>
         </p:nvSpPr>
@@ -41105,7 +40979,7 @@
       </p:sp>
       <p:sp>
         <p:nvSpPr>
-          <p:cNvPr id="13" name="Text 5"/>
+          <p:cNvPr id="12" name="Text 5"/>
           <p:cNvSpPr txBox="1"/>
           <p:nvPr/>
         </p:nvSpPr>
@@ -41141,7 +41015,7 @@
       </p:sp>
       <p:sp>
         <p:nvSpPr>
-          <p:cNvPr id="14" name="box &quot;Make a triangle!&quot;: "/>
+          <p:cNvPr id="13" name="box &quot;Make a triangle!&quot;: "/>
           <p:cNvSpPr/>
           <p:nvPr/>
         </p:nvSpPr>
@@ -41168,7 +41042,7 @@
       </p:sp>
       <p:sp>
         <p:nvSpPr>
-          <p:cNvPr id="15" name="Text 7"/>
+          <p:cNvPr id="14" name="Text 7"/>
           <p:cNvSpPr txBox="1"/>
           <p:nvPr/>
         </p:nvSpPr>
@@ -41204,7 +41078,7 @@
       </p:sp>
       <p:sp>
         <p:nvSpPr>
-          <p:cNvPr id="16" name="box &quot;Arrow&quot;: an example "/>
+          <p:cNvPr id="15" name="box &quot;Arrow&quot;: an example "/>
           <p:cNvSpPr/>
           <p:nvPr/>
         </p:nvSpPr>
@@ -41231,7 +41105,7 @@
       </p:sp>
       <p:sp>
         <p:nvSpPr>
-          <p:cNvPr id="17" name="Text 9"/>
+          <p:cNvPr id="16" name="Text 9"/>
           <p:cNvSpPr txBox="1"/>
           <p:nvPr/>
         </p:nvSpPr>
@@ -41267,7 +41141,7 @@
       </p:sp>
       <p:sp>
         <p:nvSpPr>
-          <p:cNvPr id="18" name="Text 10"/>
+          <p:cNvPr id="17" name="Text 10"/>
           <p:cNvSpPr txBox="1"/>
           <p:nvPr/>
         </p:nvSpPr>
@@ -41303,7 +41177,7 @@
       </p:sp>
       <p:sp>
         <p:nvSpPr>
-          <p:cNvPr id="19" name="Text 11"/>
+          <p:cNvPr id="18" name="Text 11"/>
           <p:cNvSpPr txBox="1"/>
           <p:nvPr/>
         </p:nvSpPr>
@@ -41339,7 +41213,7 @@
       </p:sp>
       <p:sp>
         <p:nvSpPr>
-          <p:cNvPr id="20" name="Text 12"/>
+          <p:cNvPr id="19" name="Text 12"/>
           <p:cNvSpPr txBox="1"/>
           <p:nvPr/>
         </p:nvSpPr>
@@ -41375,7 +41249,7 @@
       </p:sp>
       <p:sp>
         <p:nvSpPr>
-          <p:cNvPr id="21" name="Text 13"/>
+          <p:cNvPr id="20" name="Text 13"/>
           <p:cNvSpPr txBox="1"/>
           <p:nvPr/>
         </p:nvSpPr>
@@ -41411,7 +41285,7 @@
       </p:sp>
       <p:sp>
         <p:nvSpPr>
-          <p:cNvPr id="22" name="Text 14"/>
+          <p:cNvPr id="21" name="Text 14"/>
           <p:cNvSpPr txBox="1"/>
           <p:nvPr/>
         </p:nvSpPr>
@@ -41447,7 +41321,7 @@
       </p:sp>
       <p:sp>
         <p:nvSpPr>
-          <p:cNvPr id="23" name="tokens always think hard"/>
+          <p:cNvPr id="22" name="tokens always think hard"/>
           <p:cNvSpPr/>
           <p:nvPr/>
         </p:nvSpPr>
@@ -41472,7 +41346,7 @@
       </p:sp>
       <p:sp>
         <p:nvSpPr>
-          <p:cNvPr id="24" name="Text 16"/>
+          <p:cNvPr id="23" name="Text 16"/>
           <p:cNvSpPr txBox="1"/>
           <p:nvPr/>
         </p:nvSpPr>
@@ -41508,7 +41382,7 @@
       </p:sp>
       <p:sp>
         <p:nvSpPr>
-          <p:cNvPr id="25" name="Text 17"/>
+          <p:cNvPr id="24" name="Text 17"/>
           <p:cNvSpPr txBox="1"/>
           <p:nvPr/>
         </p:nvSpPr>
@@ -41544,7 +41418,7 @@
       </p:sp>
       <p:sp>
         <p:nvSpPr>
-          <p:cNvPr id="26" name="Text 18"/>
+          <p:cNvPr id="25" name="Text 18"/>
           <p:cNvSpPr txBox="1"/>
           <p:nvPr/>
         </p:nvSpPr>
@@ -41580,7 +41454,7 @@
       </p:sp>
       <p:sp>
         <p:nvSpPr>
-          <p:cNvPr id="27" name="tokens an example fails"/>
+          <p:cNvPr id="26" name="tokens an example fails"/>
           <p:cNvSpPr/>
           <p:nvPr/>
         </p:nvSpPr>
@@ -41605,7 +41479,7 @@
       </p:sp>
       <p:sp>
         <p:nvSpPr>
-          <p:cNvPr id="28" name="Text 20"/>
+          <p:cNvPr id="27" name="Text 20"/>
           <p:cNvSpPr txBox="1"/>
           <p:nvPr/>
         </p:nvSpPr>
@@ -41641,7 +41515,7 @@
       </p:sp>
       <p:sp>
         <p:nvSpPr>
-          <p:cNvPr id="29" name="Text 21"/>
+          <p:cNvPr id="28" name="Text 21"/>
           <p:cNvSpPr txBox="1"/>
           <p:nvPr/>
         </p:nvSpPr>
@@ -41677,7 +41551,7 @@
       </p:sp>
       <p:sp>
         <p:nvSpPr>
-          <p:cNvPr id="30" name="Text 22"/>
+          <p:cNvPr id="29" name="Text 22"/>
           <p:cNvSpPr txBox="1"/>
           <p:nvPr/>
         </p:nvSpPr>
@@ -41713,7 +41587,7 @@
       </p:sp>
       <p:sp>
         <p:nvSpPr>
-          <p:cNvPr id="31" name="tokens + brute-force check"/>
+          <p:cNvPr id="30" name="tokens + brute-force check"/>
           <p:cNvSpPr/>
           <p:nvPr/>
         </p:nvSpPr>
@@ -41738,7 +41612,7 @@
       </p:sp>
       <p:sp>
         <p:nvSpPr>
-          <p:cNvPr id="32" name="Text 24"/>
+          <p:cNvPr id="31" name="Text 24"/>
           <p:cNvSpPr txBox="1"/>
           <p:nvPr/>
         </p:nvSpPr>
@@ -41774,7 +41648,7 @@
       </p:sp>
       <p:sp>
         <p:nvSpPr>
-          <p:cNvPr id="33" name="Check B: two versions must agree"/>
+          <p:cNvPr id="32" name="Check B: two versions must agree"/>
           <p:cNvSpPr/>
           <p:nvPr/>
         </p:nvSpPr>
@@ -41801,7 +41675,7 @@
       </p:sp>
       <p:sp>
         <p:nvSpPr>
-          <p:cNvPr id="34" name="Text 26"/>
+          <p:cNvPr id="33" name="Text 26"/>
           <p:cNvSpPr txBox="1"/>
           <p:nvPr/>
         </p:nvSpPr>
@@ -41837,7 +41711,7 @@
       </p:sp>
       <p:sp>
         <p:nvSpPr>
-          <p:cNvPr id="35" name="box program A (task only"/>
+          <p:cNvPr id="34" name="box program A (task only"/>
           <p:cNvSpPr/>
           <p:nvPr/>
         </p:nvSpPr>
@@ -41864,7 +41738,7 @@
       </p:sp>
       <p:sp>
         <p:nvSpPr>
-          <p:cNvPr id="36" name="Text 28"/>
+          <p:cNvPr id="35" name="Text 28"/>
           <p:cNvSpPr txBox="1"/>
           <p:nvPr/>
         </p:nvSpPr>
@@ -41900,7 +41774,7 @@
       </p:sp>
       <p:sp>
         <p:nvSpPr>
-          <p:cNvPr id="37" name="box program B (+ helper "/>
+          <p:cNvPr id="36" name="box program B (+ helper "/>
           <p:cNvSpPr/>
           <p:nvPr/>
         </p:nvSpPr>
@@ -41927,7 +41801,7 @@
       </p:sp>
       <p:sp>
         <p:nvSpPr>
-          <p:cNvPr id="38" name="Text 30"/>
+          <p:cNvPr id="37" name="Text 30"/>
           <p:cNvSpPr txBox="1"/>
           <p:nvPr/>
         </p:nvSpPr>
@@ -41963,7 +41837,7 @@
       </p:sp>
       <p:sp>
         <p:nvSpPr>
-          <p:cNvPr id="39" name="Text 31"/>
+          <p:cNvPr id="38" name="Text 31"/>
           <p:cNvSpPr txBox="1"/>
           <p:nvPr/>
         </p:nvSpPr>
@@ -41999,7 +41873,7 @@
       </p:sp>
       <p:sp>
         <p:nvSpPr>
-          <p:cNvPr id="40" name="Text 32"/>
+          <p:cNvPr id="39" name="Text 32"/>
           <p:cNvSpPr txBox="1"/>
           <p:nvPr/>
         </p:nvSpPr>
@@ -42035,7 +41909,7 @@
       </p:sp>
       <p:sp>
         <p:nvSpPr>
-          <p:cNvPr id="41" name="Text 33"/>
+          <p:cNvPr id="40" name="Text 33"/>
           <p:cNvSpPr txBox="1"/>
           <p:nvPr/>
         </p:nvSpPr>
@@ -42071,7 +41945,7 @@
       </p:sp>
       <p:sp>
         <p:nvSpPr>
-          <p:cNvPr id="42" name="Text 34"/>
+          <p:cNvPr id="41" name="Text 34"/>
           <p:cNvSpPr txBox="1"/>
           <p:nvPr/>
         </p:nvSpPr>
@@ -42107,7 +41981,7 @@
       </p:sp>
       <p:sp>
         <p:nvSpPr>
-          <p:cNvPr id="43" name="Text 35"/>
+          <p:cNvPr id="42" name="Text 35"/>
           <p:cNvSpPr txBox="1"/>
           <p:nvPr/>
         </p:nvSpPr>
@@ -42143,7 +42017,7 @@
       </p:sp>
       <p:sp>
         <p:nvSpPr>
-          <p:cNvPr id="44" name="tokens always think"/>
+          <p:cNvPr id="43" name="tokens always think"/>
           <p:cNvSpPr/>
           <p:nvPr/>
         </p:nvSpPr>
@@ -42168,7 +42042,7 @@
       </p:sp>
       <p:sp>
         <p:nvSpPr>
-          <p:cNvPr id="45" name="Text 37"/>
+          <p:cNvPr id="44" name="Text 37"/>
           <p:cNvSpPr txBox="1"/>
           <p:nvPr/>
         </p:nvSpPr>
@@ -42204,7 +42078,7 @@
       </p:sp>
       <p:sp>
         <p:nvSpPr>
-          <p:cNvPr id="46" name="Text 38"/>
+          <p:cNvPr id="45" name="Text 38"/>
           <p:cNvSpPr txBox="1"/>
           <p:nvPr/>
         </p:nvSpPr>
@@ -42240,7 +42114,7 @@
       </p:sp>
       <p:sp>
         <p:nvSpPr>
-          <p:cNvPr id="47" name="Text 39"/>
+          <p:cNvPr id="46" name="Text 39"/>
           <p:cNvSpPr txBox="1"/>
           <p:nvPr/>
         </p:nvSpPr>
@@ -42276,7 +42150,7 @@
       </p:sp>
       <p:sp>
         <p:nvSpPr>
-          <p:cNvPr id="48" name="tokens only if they differ"/>
+          <p:cNvPr id="47" name="tokens only if they differ"/>
           <p:cNvSpPr/>
           <p:nvPr/>
         </p:nvSpPr>
@@ -42301,7 +42175,7 @@
       </p:sp>
       <p:sp>
         <p:nvSpPr>
-          <p:cNvPr id="49" name="Text 41"/>
+          <p:cNvPr id="48" name="Text 41"/>
           <p:cNvSpPr txBox="1"/>
           <p:nvPr/>
         </p:nvSpPr>
@@ -42337,7 +42211,7 @@
       </p:sp>
       <p:sp>
         <p:nvSpPr>
-          <p:cNvPr id="50" name="Text 42"/>
+          <p:cNvPr id="49" name="Text 42"/>
           <p:cNvSpPr txBox="1"/>
           <p:nvPr/>
         </p:nvSpPr>
@@ -42661,7 +42535,7 @@
         </p:nvSpPr>
         <p:spPr>
           <a:xfrm>
-            <a:off x="8412480" y="987552"/>
+            <a:off x="8778240" y="987552"/>
             <a:ext cx="1143000" cy="274320"/>
           </a:xfrm>
           <a:prstGeom prst="rect">
@@ -42705,7 +42579,7 @@
         </p:blipFill>
         <p:spPr>
           <a:xfrm>
-            <a:off x="9692640" y="978408"/>
+            <a:off x="10058400" y="978408"/>
             <a:ext cx="274320" cy="274320"/>
           </a:xfrm>
           <a:prstGeom prst="rect">
@@ -42731,7 +42605,7 @@
         </p:blipFill>
         <p:spPr>
           <a:xfrm>
-            <a:off x="10076688" y="978408"/>
+            <a:off x="10442448" y="978408"/>
             <a:ext cx="274320" cy="274320"/>
           </a:xfrm>
           <a:prstGeom prst="rect">
@@ -42755,7 +42629,7 @@
         </p:blipFill>
         <p:spPr>
           <a:xfrm>
-            <a:off x="10460736" y="978408"/>
+            <a:off x="10826496" y="978408"/>
             <a:ext cx="274320" cy="274320"/>
           </a:xfrm>
           <a:prstGeom prst="rect">
@@ -42779,7 +42653,7 @@
         </p:blipFill>
         <p:spPr>
           <a:xfrm>
-            <a:off x="10844784" y="978408"/>
+            <a:off x="11210544" y="978408"/>
             <a:ext cx="274320" cy="274320"/>
           </a:xfrm>
           <a:prstGeom prst="rect">
@@ -42787,35 +42661,9 @@
           </a:prstGeom>
         </p:spPr>
       </p:pic>
-      <p:pic>
-        <p:nvPicPr>
-          <p:cNvPr id="14" name="not shown on sqrt" descr="/NAS/SJ/POSTECH/nlp/figs/icons/sqrt.png">    </p:cNvPr>
-          <p:cNvPicPr>
-            <a:picLocks noChangeAspect="1"/>
-          </p:cNvPicPr>
-          <p:nvPr/>
-        </p:nvPicPr>
-        <p:blipFill>
-          <a:blip r:embed="rId7">
-            <a:alphaModFix amt="18000"/>
-          </a:blip>
-          <a:stretch>
-            <a:fillRect/>
-          </a:stretch>
-        </p:blipFill>
-        <p:spPr>
-          <a:xfrm>
-            <a:off x="11228832" y="978408"/>
-            <a:ext cx="274320" cy="274320"/>
-          </a:xfrm>
-          <a:prstGeom prst="rect">
-            <a:avLst/>
-          </a:prstGeom>
-        </p:spPr>
-      </p:pic>
-      <p:sp>
-        <p:nvSpPr>
-          <p:cNvPr id="15" name="Text 6"/>
+      <p:sp>
+        <p:nvSpPr>
+          <p:cNvPr id="14" name="Text 6"/>
           <p:cNvSpPr txBox="1"/>
           <p:nvPr/>
         </p:nvSpPr>
@@ -42851,7 +42699,7 @@
       </p:sp>
       <p:sp>
         <p:nvSpPr>
-          <p:cNvPr id="16" name="Text 7"/>
+          <p:cNvPr id="15" name="Text 7"/>
           <p:cNvSpPr txBox="1"/>
           <p:nvPr/>
         </p:nvSpPr>
@@ -42887,7 +42735,7 @@
       </p:sp>
       <p:sp>
         <p:nvSpPr>
-          <p:cNvPr id="17" name="step 1 Program"/>
+          <p:cNvPr id="16" name="step 1 Program"/>
           <p:cNvSpPr/>
           <p:nvPr/>
         </p:nvSpPr>
@@ -42914,7 +42762,7 @@
       </p:sp>
       <p:sp>
         <p:nvSpPr>
-          <p:cNvPr id="18" name="Text 9"/>
+          <p:cNvPr id="17" name="Text 9"/>
           <p:cNvSpPr txBox="1"/>
           <p:nvPr/>
         </p:nvSpPr>
@@ -42970,7 +42818,7 @@
       </p:sp>
       <p:sp>
         <p:nvSpPr>
-          <p:cNvPr id="19" name="Text 10"/>
+          <p:cNvPr id="18" name="Text 10"/>
           <p:cNvSpPr txBox="1"/>
           <p:nvPr/>
         </p:nvSpPr>
@@ -43006,7 +42854,7 @@
       </p:sp>
       <p:sp>
         <p:nvSpPr>
-          <p:cNvPr id="20" name="Shape 11"/>
+          <p:cNvPr id="19" name="Shape 11"/>
           <p:cNvSpPr/>
           <p:nvPr/>
         </p:nvSpPr>
@@ -43030,7 +42878,7 @@
       </p:sp>
       <p:sp>
         <p:nvSpPr>
-          <p:cNvPr id="21" name="Text 12"/>
+          <p:cNvPr id="20" name="Text 12"/>
           <p:cNvSpPr txBox="1"/>
           <p:nvPr/>
         </p:nvSpPr>
@@ -43066,7 +42914,7 @@
       </p:sp>
       <p:sp>
         <p:nvSpPr>
-          <p:cNvPr id="22" name="step 2 + Fact"/>
+          <p:cNvPr id="21" name="step 2 + Fact"/>
           <p:cNvSpPr/>
           <p:nvPr/>
         </p:nvSpPr>
@@ -43093,7 +42941,7 @@
       </p:sp>
       <p:sp>
         <p:nvSpPr>
-          <p:cNvPr id="23" name="Text 14"/>
+          <p:cNvPr id="22" name="Text 14"/>
           <p:cNvSpPr txBox="1"/>
           <p:nvPr/>
         </p:nvSpPr>
@@ -43149,7 +42997,7 @@
       </p:sp>
       <p:sp>
         <p:nvSpPr>
-          <p:cNvPr id="24" name="Text 15"/>
+          <p:cNvPr id="23" name="Text 15"/>
           <p:cNvSpPr txBox="1"/>
           <p:nvPr/>
         </p:nvSpPr>
@@ -43185,7 +43033,7 @@
       </p:sp>
       <p:sp>
         <p:nvSpPr>
-          <p:cNvPr id="25" name="Shape 16"/>
+          <p:cNvPr id="24" name="Shape 16"/>
           <p:cNvSpPr/>
           <p:nvPr/>
         </p:nvSpPr>
@@ -43209,7 +43057,7 @@
       </p:sp>
       <p:sp>
         <p:nvSpPr>
-          <p:cNvPr id="26" name="Text 17"/>
+          <p:cNvPr id="25" name="Text 17"/>
           <p:cNvSpPr txBox="1"/>
           <p:nvPr/>
         </p:nvSpPr>
@@ -43245,7 +43093,7 @@
       </p:sp>
       <p:sp>
         <p:nvSpPr>
-          <p:cNvPr id="27" name="step 3 Free check"/>
+          <p:cNvPr id="26" name="step 3 Free check"/>
           <p:cNvSpPr/>
           <p:nvPr/>
         </p:nvSpPr>
@@ -43272,7 +43120,7 @@
       </p:sp>
       <p:sp>
         <p:nvSpPr>
-          <p:cNvPr id="28" name="Text 19"/>
+          <p:cNvPr id="27" name="Text 19"/>
           <p:cNvSpPr txBox="1"/>
           <p:nvPr/>
         </p:nvSpPr>
@@ -43311,7 +43159,7 @@
       </p:sp>
       <p:sp>
         <p:nvSpPr>
-          <p:cNvPr id="29" name="Text 20"/>
+          <p:cNvPr id="28" name="Text 20"/>
           <p:cNvSpPr txBox="1"/>
           <p:nvPr/>
         </p:nvSpPr>
@@ -43347,7 +43195,7 @@
       </p:sp>
       <p:sp>
         <p:nvSpPr>
-          <p:cNvPr id="30" name="Shape 21"/>
+          <p:cNvPr id="29" name="Shape 21"/>
           <p:cNvSpPr/>
           <p:nvPr/>
         </p:nvSpPr>
@@ -43371,7 +43219,7 @@
       </p:sp>
       <p:sp>
         <p:nvSpPr>
-          <p:cNvPr id="31" name="Text 22"/>
+          <p:cNvPr id="30" name="Text 22"/>
           <p:cNvSpPr txBox="1"/>
           <p:nvPr/>
         </p:nvSpPr>
@@ -43407,7 +43255,7 @@
       </p:sp>
       <p:sp>
         <p:nvSpPr>
-          <p:cNvPr id="32" name="step 4 Think?"/>
+          <p:cNvPr id="31" name="step 4 Think?"/>
           <p:cNvSpPr/>
           <p:nvPr/>
         </p:nvSpPr>
@@ -43434,7 +43282,7 @@
       </p:sp>
       <p:sp>
         <p:nvSpPr>
-          <p:cNvPr id="33" name="Text 24"/>
+          <p:cNvPr id="32" name="Text 24"/>
           <p:cNvSpPr txBox="1"/>
           <p:nvPr/>
         </p:nvSpPr>
@@ -43473,7 +43321,7 @@
       </p:sp>
       <p:sp>
         <p:nvSpPr>
-          <p:cNvPr id="34" name="Text 25"/>
+          <p:cNvPr id="33" name="Text 25"/>
           <p:cNvSpPr txBox="1"/>
           <p:nvPr/>
         </p:nvSpPr>
@@ -43509,7 +43357,7 @@
       </p:sp>
       <p:sp>
         <p:nvSpPr>
-          <p:cNvPr id="35" name="Shape 26"/>
+          <p:cNvPr id="34" name="Shape 26"/>
           <p:cNvSpPr/>
           <p:nvPr/>
         </p:nvSpPr>
@@ -43533,7 +43381,7 @@
       </p:sp>
       <p:sp>
         <p:nvSpPr>
-          <p:cNvPr id="36" name="Text 27"/>
+          <p:cNvPr id="35" name="Text 27"/>
           <p:cNvSpPr txBox="1"/>
           <p:nvPr/>
         </p:nvSpPr>
@@ -43569,7 +43417,7 @@
       </p:sp>
       <p:sp>
         <p:nvSpPr>
-          <p:cNvPr id="37" name="step 5 Reuse"/>
+          <p:cNvPr id="36" name="step 5 Reuse"/>
           <p:cNvSpPr/>
           <p:nvPr/>
         </p:nvSpPr>
@@ -43596,7 +43444,7 @@
       </p:sp>
       <p:sp>
         <p:nvSpPr>
-          <p:cNvPr id="38" name="Text 29"/>
+          <p:cNvPr id="37" name="Text 29"/>
           <p:cNvSpPr txBox="1"/>
           <p:nvPr/>
         </p:nvSpPr>
@@ -43635,7 +43483,7 @@
       </p:sp>
       <p:sp>
         <p:nvSpPr>
-          <p:cNvPr id="39" name="Text 30"/>
+          <p:cNvPr id="38" name="Text 30"/>
           <p:cNvSpPr txBox="1"/>
           <p:nvPr/>
         </p:nvSpPr>
@@ -43671,7 +43519,7 @@
       </p:sp>
       <p:sp>
         <p:nvSpPr>
-          <p:cNvPr id="40" name="Text 31"/>
+          <p:cNvPr id="39" name="Text 31"/>
           <p:cNvSpPr txBox="1"/>
           <p:nvPr/>
         </p:nvSpPr>
@@ -43707,7 +43555,7 @@
       </p:sp>
       <p:sp>
         <p:nvSpPr>
-          <p:cNvPr id="41" name="Text 32"/>
+          <p:cNvPr id="40" name="Text 32"/>
           <p:cNvSpPr txBox="1"/>
           <p:nvPr/>
         </p:nvSpPr>
@@ -43743,7 +43591,7 @@
       </p:sp>
       <p:sp>
         <p:nvSpPr>
-          <p:cNvPr id="42" name="Text 33"/>
+          <p:cNvPr id="41" name="Text 33"/>
           <p:cNvSpPr txBox="1"/>
           <p:nvPr/>
         </p:nvSpPr>
@@ -43779,7 +43627,7 @@
       </p:sp>
       <p:sp>
         <p:nvSpPr>
-          <p:cNvPr id="43" name="Text 34"/>
+          <p:cNvPr id="42" name="Text 34"/>
           <p:cNvSpPr txBox="1"/>
           <p:nvPr/>
         </p:nvSpPr>
@@ -43815,7 +43663,7 @@
       </p:sp>
       <p:sp>
         <p:nvSpPr>
-          <p:cNvPr id="44" name="Text 35"/>
+          <p:cNvPr id="43" name="Text 35"/>
           <p:cNvSpPr txBox="1"/>
           <p:nvPr/>
         </p:nvSpPr>
@@ -43851,7 +43699,7 @@
       </p:sp>
       <p:sp>
         <p:nvSpPr>
-          <p:cNvPr id="45" name="tokens think on hardest-looking"/>
+          <p:cNvPr id="44" name="tokens think on hardest-looking"/>
           <p:cNvSpPr/>
           <p:nvPr/>
         </p:nvSpPr>
@@ -43876,7 +43724,7 @@
       </p:sp>
       <p:sp>
         <p:nvSpPr>
-          <p:cNvPr id="46" name="Text 37"/>
+          <p:cNvPr id="45" name="Text 37"/>
           <p:cNvSpPr txBox="1"/>
           <p:nvPr/>
         </p:nvSpPr>
@@ -43912,7 +43760,7 @@
       </p:sp>
       <p:sp>
         <p:nvSpPr>
-          <p:cNvPr id="47" name="Text 38"/>
+          <p:cNvPr id="46" name="Text 38"/>
           <p:cNvSpPr txBox="1"/>
           <p:nvPr/>
         </p:nvSpPr>
@@ -43948,7 +43796,7 @@
       </p:sp>
       <p:sp>
         <p:nvSpPr>
-          <p:cNvPr id="48" name="Text 39"/>
+          <p:cNvPr id="47" name="Text 39"/>
           <p:cNvSpPr txBox="1"/>
           <p:nvPr/>
         </p:nvSpPr>
@@ -43984,7 +43832,7 @@
       </p:sp>
       <p:sp>
         <p:nvSpPr>
-          <p:cNvPr id="49" name="tokens our method"/>
+          <p:cNvPr id="48" name="tokens our method"/>
           <p:cNvSpPr/>
           <p:nvPr/>
         </p:nvSpPr>
@@ -44009,7 +43857,7 @@
       </p:sp>
       <p:sp>
         <p:nvSpPr>
-          <p:cNvPr id="50" name="Text 41"/>
+          <p:cNvPr id="49" name="Text 41"/>
           <p:cNvSpPr txBox="1"/>
           <p:nvPr/>
         </p:nvSpPr>
@@ -44045,7 +43893,7 @@
       </p:sp>
       <p:sp>
         <p:nvSpPr>
-          <p:cNvPr id="51" name="Text 42"/>
+          <p:cNvPr id="50" name="Text 42"/>
           <p:cNvSpPr txBox="1"/>
           <p:nvPr/>
         </p:nvSpPr>
@@ -44081,7 +43929,7 @@
       </p:sp>
       <p:sp>
         <p:nvSpPr>
-          <p:cNvPr id="52" name="Text 43"/>
+          <p:cNvPr id="51" name="Text 43"/>
           <p:cNvSpPr txBox="1"/>
           <p:nvPr/>
         </p:nvSpPr>
@@ -44117,7 +43965,7 @@
       </p:sp>
       <p:sp>
         <p:nvSpPr>
-          <p:cNvPr id="53" name="Text 44"/>
+          <p:cNvPr id="52" name="Text 44"/>
           <p:cNvSpPr txBox="1"/>
           <p:nvPr/>
         </p:nvSpPr>
@@ -44153,7 +44001,7 @@
       </p:sp>
       <p:sp>
         <p:nvSpPr>
-          <p:cNvPr id="54" name="Text 45"/>
+          <p:cNvPr id="53" name="Text 45"/>
           <p:cNvSpPr txBox="1"/>
           <p:nvPr/>
         </p:nvSpPr>
@@ -44189,7 +44037,7 @@
       </p:sp>
       <p:sp>
         <p:nvSpPr>
-          <p:cNvPr id="55" name="Text 46"/>
+          <p:cNvPr id="54" name="Text 46"/>
           <p:cNvSpPr txBox="1"/>
           <p:nvPr/>
         </p:nvSpPr>
@@ -46027,7 +45875,7 @@
                   <a:schemeClr val="tx1"/>
                 </a:solidFill>
               </a:rPr>
-              <a:t>Do the findings cover all five kinds?</a:t>
+              <a:t>Do the findings cover every kind?</a:t>
             </a:r>
             <a:endParaRPr lang="en-US" sz="1400" dirty="0"/>
           </a:p>
@@ -46461,7 +46309,7 @@
                   <a:schemeClr val="tx1"/>
                 </a:solidFill>
               </a:rPr>
-              <a:t>Proofs? Where does it stop?</a:t>
+              <a:t>What about competition math and proofs?</a:t>
             </a:r>
             <a:endParaRPr lang="en-US" sz="1400" dirty="0"/>
           </a:p>

--- a/Proposal_Team5.pptx
+++ b/Proposal_Team5.pptx
@@ -136,7 +136,7 @@
   <p:extLst>
     <p:ext uri="{521415D9-36F7-43E2-AB2F-B90AF26B5E84}">
       <p14:sectionLst xmlns:p14="http://schemas.microsoft.com/office/powerpoint/2010/main">
-        <p14:section name="Talk" id="{2863c014-2abc-cb71-475f-68c85118b29c}">
+        <p14:section name="Talk" id="{fa5ad9b4-e3ce-f2c7-9a40-edc9bba8bfe2}">
           <p14:sldIdLst>
             <p14:sldId id="256"/>
             <p14:sldId id="257"/>
@@ -149,7 +149,7 @@
             <p14:sldId id="264"/>
           </p14:sldIdLst>
         </p14:section>
-        <p14:section name="Extra pages" id="{f134c744-0454-3d63-85f1-8b07462001f0}">
+        <p14:section name="Extra pages" id="{fe6609a3-50b5-5813-48e6-623e1a624650}">
           <p14:sldIdLst>
             <p14:sldId id="265"/>
             <p14:sldId id="266"/>
@@ -1574,7 +1574,7 @@
           <a:p>
             <a:r>
               <a:rPr lang="en-US" dirty="0"/>
-              <a:t>(답변) 아니요, 모든 결과를 네 종류 전부에서 잰 것은 아닙니다. 힌트 주기는 기하, 경로, 문장제에서, 공짜 검사는 네 종류 모두에서 확인했습니다. 전체 방법의 87% 대 74%는 기하 108문제와 최적화 100문제를 세 모델로 푼 결과이고, 경시 문제에는 검사와 생각만 썼습니다.</a:t>
+              <a:t>(답변) 아니요, 모든 단계를 네 종류 전부에 쓰지는 않습니다. 경시 문제는 라이브러리 없이 알고리즘만 짜는 문제라 힌트로 채울 빈칸이 없습니다. 실패의 원인이 추론이라서, 예제와 짧은 완전 탐색 프로그램으로 검사하고 실패할 때만 더 생각하게 하면 항상 생각할 때와 같은 66%를 18% 적은 토큰에 얻습니다. 재사용은 같은 문제가 데이터만 바뀌어 반복될 때 쓰므로 매번 새 문제인 경시에는 맞지 않습니다. 전체 방법의 87% 대 74%는 기하와 최적화 208문제를 세 모델로 푼 결과입니다.</a:t>
             </a:r>
             <a:endParaRPr lang="en-US" dirty="0"/>
           </a:p>
@@ -3774,7 +3774,7 @@
           <a:p>
             <a:r>
               <a:rPr lang="en-US" dirty="0"/>
-              <a:t>(55초) 두 발견을 합친 것이 저희 방법입니다. 실제 최적화 문제로 보겠습니다. 1단계, 모델이 없는 메서드를 불러서 죽습니다. 2단계, 힌트를 줍니다. 이 힌트는 사람이 쓴 것이 아니라, 모델이 다른 문제에서 짜서 검사를 통과한 자기 프로그램에서 자동으로 가져옵니다. 3단계, 두 버전의 답이 20000으로 같으니, 4단계 생각은 건너뜁니다. 생각만 했다면 5.3k 토큰이 들었을 문제를 0.6k로 풉니다. 5단계, 같은 종류의 새 데이터에는 검사된 프로그램을 재사용합니다. 기하와 최적화 208문제를 세 모델로 풀면, 어려워 보이는 문제에 생각을 몰아주면 74%, 저희 방법은 87%이고 토큰도 더 적습니다. 처음 써 본 문장제 벤치마크에서도, 자동으로 찾은 힌트가 사람이 쓴 힌트와 같은 79%였습니다.</a:t>
+              <a:t>(55초) 두 발견을 합친 것이 저희 방법입니다. 실제 최적화 문제로 보겠습니다. 1단계, 모델이 없는 메서드를 불러서 죽습니다. 2단계, 힌트를 줍니다. 이 힌트는 사람이 쓴 것이 아니라, 모델이 다른 문제에서 짜서 검사를 통과한 자기 프로그램에서 자동으로 가져옵니다. 3단계, 두 버전의 답이 20000으로 같으니, 4단계 생각은 건너뜁니다. 생각만 했다면 5.3k 토큰이 들었을 문제를 0.6k로 풉니다. 5단계, 같은 종류의 새 데이터에는 검사된 프로그램을 재사용합니다. 기하와 최적화 208문제를 세 모델로 풀면, 어려워 보이는 문제에 생각을 몰아주면 74%, 저희 방법은 87%이고 토큰도 더 적습니다. 단계 아래 아이콘은 그 단계를 어디에 쓰는지입니다. 경시 문제는 라이브러리 없이 알고리즘만 짜서 힌트가 필요 없고, 검사와 생각만 씁니다. 재사용은 같은 문제가 반복되는 경로 문제에만 씁니다.</a:t>
             </a:r>
             <a:endParaRPr lang="en-US" dirty="0"/>
           </a:p>
@@ -4843,7 +4843,7 @@
                   <a:srgbClr val="44546A"/>
                 </a:solidFill>
               </a:rPr>
-              <a:t>POSTECH CSED490E (Graduate NLP) · Team 5</a:t>
+              <a:t>Team 5: Sangjun Lee, Seongbin Park · POSTECH CSED490E (Graduate NLP)</a:t>
             </a:r>
             <a:endParaRPr lang="en-US" sz="2200" dirty="0"/>
           </a:p>
@@ -8115,7 +8115,7 @@
                             <a:srgbClr val="8C8C8C"/>
                           </a:solidFill>
                         </a:rPr>
-                        <a:t>– not tested</a:t>
+                        <a:t>– no library to hint: plain algorithms</a:t>
                       </a:r>
                       <a:endParaRPr lang="en-US" sz="1400" dirty="0"/>
                     </a:p>
@@ -8699,7 +8699,7 @@
                             <a:srgbClr val="C55A11"/>
                           </a:solidFill>
                         </a:rPr>
-                        <a:t>~ check and think only (no hint)</a:t>
+                        <a:t>~ steps 3–4 only (no library, so no hint): same 66% at 18% fewer tokens</a:t>
                       </a:r>
                       <a:endParaRPr lang="en-US" sz="1400" dirty="0"/>
                     </a:p>
@@ -8991,7 +8991,7 @@
                             <a:srgbClr val="8C8C8C"/>
                           </a:solidFill>
                         </a:rPr>
-                        <a:t>– not tested</a:t>
+                        <a:t>– each problem is new</a:t>
                       </a:r>
                       <a:endParaRPr lang="en-US" sz="1400" dirty="0"/>
                     </a:p>
@@ -9222,7 +9222,7 @@
                   <a:schemeClr val="tx1"/>
                 </a:solidFill>
               </a:rPr>
-              <a:t>The whole recipe is shown on geometry, routing and word problems; contest problems use the check</a:t>
+              <a:t>Contest problems need no library, so no hint: the check and thinking alone, at 18% fewer tokens</a:t>
             </a:r>
             <a:endParaRPr lang="en-US" sz="2000" dirty="0"/>
           </a:p>
@@ -38199,8 +38199,8 @@
         </p:nvSpPr>
         <p:spPr>
           <a:xfrm>
-            <a:off x="8778240" y="987552"/>
-            <a:ext cx="1143000" cy="274320"/>
+            <a:off x="7863840" y="987552"/>
+            <a:ext cx="3749040" cy="274320"/>
           </a:xfrm>
           <a:prstGeom prst="rect">
             <a:avLst/>
@@ -38221,113 +38221,15 @@
                   <a:srgbClr val="7F7F7F"/>
                 </a:solidFill>
               </a:rPr>
-              <a:t>holds on</a:t>
+              <a:t>icons under each step: where it is used</a:t>
             </a:r>
             <a:endParaRPr lang="en-US" sz="1400" dirty="0"/>
           </a:p>
         </p:txBody>
       </p:sp>
-      <p:pic>
-        <p:nvPicPr>
-          <p:cNvPr id="10" name="holds on shapes" descr="/NAS/SJ/POSTECH/nlp/figs/icons/shapes.png">    </p:cNvPr>
-          <p:cNvPicPr>
-            <a:picLocks noChangeAspect="1"/>
-          </p:cNvPicPr>
-          <p:nvPr/>
-        </p:nvPicPr>
-        <p:blipFill>
-          <a:blip r:embed="rId3"/>
-          <a:stretch>
-            <a:fillRect/>
-          </a:stretch>
-        </p:blipFill>
-        <p:spPr>
-          <a:xfrm>
-            <a:off x="10058400" y="978408"/>
-            <a:ext cx="274320" cy="274320"/>
-          </a:xfrm>
-          <a:prstGeom prst="rect">
-            <a:avLst/>
-          </a:prstGeom>
-        </p:spPr>
-      </p:pic>
-      <p:pic>
-        <p:nvPicPr>
-          <p:cNvPr id="11" name="not shown on trophy" descr="/NAS/SJ/POSTECH/nlp/figs/icons/trophy.png">    </p:cNvPr>
-          <p:cNvPicPr>
-            <a:picLocks noChangeAspect="1"/>
-          </p:cNvPicPr>
-          <p:nvPr/>
-        </p:nvPicPr>
-        <p:blipFill>
-          <a:blip r:embed="rId4">
-            <a:alphaModFix amt="18000"/>
-          </a:blip>
-          <a:stretch>
-            <a:fillRect/>
-          </a:stretch>
-        </p:blipFill>
-        <p:spPr>
-          <a:xfrm>
-            <a:off x="10442448" y="978408"/>
-            <a:ext cx="274320" cy="274320"/>
-          </a:xfrm>
-          <a:prstGeom prst="rect">
-            <a:avLst/>
-          </a:prstGeom>
-        </p:spPr>
-      </p:pic>
-      <p:pic>
-        <p:nvPicPr>
-          <p:cNvPr id="12" name="holds on truck" descr="/NAS/SJ/POSTECH/nlp/figs/icons/truck.png">    </p:cNvPr>
-          <p:cNvPicPr>
-            <a:picLocks noChangeAspect="1"/>
-          </p:cNvPicPr>
-          <p:nvPr/>
-        </p:nvPicPr>
-        <p:blipFill>
-          <a:blip r:embed="rId5"/>
-          <a:stretch>
-            <a:fillRect/>
-          </a:stretch>
-        </p:blipFill>
-        <p:spPr>
-          <a:xfrm>
-            <a:off x="10826496" y="978408"/>
-            <a:ext cx="274320" cy="274320"/>
-          </a:xfrm>
-          <a:prstGeom prst="rect">
-            <a:avLst/>
-          </a:prstGeom>
-        </p:spPr>
-      </p:pic>
-      <p:pic>
-        <p:nvPicPr>
-          <p:cNvPr id="13" name="holds on calc" descr="/NAS/SJ/POSTECH/nlp/figs/icons/calc.png">    </p:cNvPr>
-          <p:cNvPicPr>
-            <a:picLocks noChangeAspect="1"/>
-          </p:cNvPicPr>
-          <p:nvPr/>
-        </p:nvPicPr>
-        <p:blipFill>
-          <a:blip r:embed="rId6"/>
-          <a:stretch>
-            <a:fillRect/>
-          </a:stretch>
-        </p:blipFill>
-        <p:spPr>
-          <a:xfrm>
-            <a:off x="11210544" y="978408"/>
-            <a:ext cx="274320" cy="274320"/>
-          </a:xfrm>
-          <a:prstGeom prst="rect">
-            <a:avLst/>
-          </a:prstGeom>
-        </p:spPr>
-      </p:pic>
-      <p:sp>
-        <p:nvSpPr>
-          <p:cNvPr id="14" name="Text 6"/>
+      <p:sp>
+        <p:nvSpPr>
+          <p:cNvPr id="10" name="Text 6"/>
           <p:cNvSpPr txBox="1"/>
           <p:nvPr/>
         </p:nvSpPr>
@@ -38363,7 +38265,7 @@
       </p:sp>
       <p:sp>
         <p:nvSpPr>
-          <p:cNvPr id="15" name="Text 7"/>
+          <p:cNvPr id="11" name="Text 7"/>
           <p:cNvSpPr txBox="1"/>
           <p:nvPr/>
         </p:nvSpPr>
@@ -38399,7 +38301,7 @@
       </p:sp>
       <p:sp>
         <p:nvSpPr>
-          <p:cNvPr id="16" name="step 1 Program"/>
+          <p:cNvPr id="12" name="step 1 Program"/>
           <p:cNvSpPr/>
           <p:nvPr/>
         </p:nvSpPr>
@@ -38426,7 +38328,7 @@
       </p:sp>
       <p:sp>
         <p:nvSpPr>
-          <p:cNvPr id="17" name="Text 9"/>
+          <p:cNvPr id="13" name="Text 9"/>
           <p:cNvSpPr txBox="1"/>
           <p:nvPr/>
         </p:nvSpPr>
@@ -38482,7 +38384,7 @@
       </p:sp>
       <p:sp>
         <p:nvSpPr>
-          <p:cNvPr id="18" name="Text 10"/>
+          <p:cNvPr id="14" name="Text 10"/>
           <p:cNvSpPr txBox="1"/>
           <p:nvPr/>
         </p:nvSpPr>
@@ -38518,7 +38420,7 @@
       </p:sp>
       <p:sp>
         <p:nvSpPr>
-          <p:cNvPr id="19" name="Shape 11"/>
+          <p:cNvPr id="15" name="Shape 11"/>
           <p:cNvSpPr/>
           <p:nvPr/>
         </p:nvSpPr>
@@ -38540,6 +38442,102 @@
           </a:ln>
         </p:spPr>
       </p:sp>
+      <p:pic>
+        <p:nvPicPr>
+          <p:cNvPr id="16" name="step 1 used on shapes" descr="/NAS/SJ/POSTECH/nlp/figs/icons/shapes.png">    </p:cNvPr>
+          <p:cNvPicPr>
+            <a:picLocks noChangeAspect="1"/>
+          </p:cNvPicPr>
+          <p:nvPr/>
+        </p:nvPicPr>
+        <p:blipFill>
+          <a:blip r:embed="rId3"/>
+          <a:stretch>
+            <a:fillRect/>
+          </a:stretch>
+        </p:blipFill>
+        <p:spPr>
+          <a:xfrm>
+            <a:off x="1042416" y="3401568"/>
+            <a:ext cx="237744" cy="237744"/>
+          </a:xfrm>
+          <a:prstGeom prst="rect">
+            <a:avLst/>
+          </a:prstGeom>
+        </p:spPr>
+      </p:pic>
+      <p:pic>
+        <p:nvPicPr>
+          <p:cNvPr id="17" name="step 1 used on trophy" descr="/NAS/SJ/POSTECH/nlp/figs/icons/trophy.png">    </p:cNvPr>
+          <p:cNvPicPr>
+            <a:picLocks noChangeAspect="1"/>
+          </p:cNvPicPr>
+          <p:nvPr/>
+        </p:nvPicPr>
+        <p:blipFill>
+          <a:blip r:embed="rId4"/>
+          <a:stretch>
+            <a:fillRect/>
+          </a:stretch>
+        </p:blipFill>
+        <p:spPr>
+          <a:xfrm>
+            <a:off x="1335024" y="3401568"/>
+            <a:ext cx="237744" cy="237744"/>
+          </a:xfrm>
+          <a:prstGeom prst="rect">
+            <a:avLst/>
+          </a:prstGeom>
+        </p:spPr>
+      </p:pic>
+      <p:pic>
+        <p:nvPicPr>
+          <p:cNvPr id="18" name="step 1 used on truck" descr="/NAS/SJ/POSTECH/nlp/figs/icons/truck.png">    </p:cNvPr>
+          <p:cNvPicPr>
+            <a:picLocks noChangeAspect="1"/>
+          </p:cNvPicPr>
+          <p:nvPr/>
+        </p:nvPicPr>
+        <p:blipFill>
+          <a:blip r:embed="rId5"/>
+          <a:stretch>
+            <a:fillRect/>
+          </a:stretch>
+        </p:blipFill>
+        <p:spPr>
+          <a:xfrm>
+            <a:off x="1627632" y="3401568"/>
+            <a:ext cx="237744" cy="237744"/>
+          </a:xfrm>
+          <a:prstGeom prst="rect">
+            <a:avLst/>
+          </a:prstGeom>
+        </p:spPr>
+      </p:pic>
+      <p:pic>
+        <p:nvPicPr>
+          <p:cNvPr id="19" name="step 1 used on calc" descr="/NAS/SJ/POSTECH/nlp/figs/icons/calc.png">    </p:cNvPr>
+          <p:cNvPicPr>
+            <a:picLocks noChangeAspect="1"/>
+          </p:cNvPicPr>
+          <p:nvPr/>
+        </p:nvPicPr>
+        <p:blipFill>
+          <a:blip r:embed="rId6"/>
+          <a:stretch>
+            <a:fillRect/>
+          </a:stretch>
+        </p:blipFill>
+        <p:spPr>
+          <a:xfrm>
+            <a:off x="1920240" y="3401568"/>
+            <a:ext cx="237744" cy="237744"/>
+          </a:xfrm>
+          <a:prstGeom prst="rect">
+            <a:avLst/>
+          </a:prstGeom>
+        </p:spPr>
+      </p:pic>
       <p:sp>
         <p:nvSpPr>
           <p:cNvPr id="20" name="Text 12"/>
@@ -38719,9 +38717,107 @@
           </a:ln>
         </p:spPr>
       </p:sp>
-      <p:sp>
-        <p:nvSpPr>
-          <p:cNvPr id="25" name="Text 17"/>
+      <p:pic>
+        <p:nvPicPr>
+          <p:cNvPr id="25" name="step 2 used on shapes" descr="/NAS/SJ/POSTECH/nlp/figs/icons/shapes.png">    </p:cNvPr>
+          <p:cNvPicPr>
+            <a:picLocks noChangeAspect="1"/>
+          </p:cNvPicPr>
+          <p:nvPr/>
+        </p:nvPicPr>
+        <p:blipFill>
+          <a:blip r:embed="rId7"/>
+          <a:stretch>
+            <a:fillRect/>
+          </a:stretch>
+        </p:blipFill>
+        <p:spPr>
+          <a:xfrm>
+            <a:off x="3282696" y="3401568"/>
+            <a:ext cx="237744" cy="237744"/>
+          </a:xfrm>
+          <a:prstGeom prst="rect">
+            <a:avLst/>
+          </a:prstGeom>
+        </p:spPr>
+      </p:pic>
+      <p:pic>
+        <p:nvPicPr>
+          <p:cNvPr id="26" name="step 2 not needed on trophy" descr="/NAS/SJ/POSTECH/nlp/figs/icons/trophy.png">    </p:cNvPr>
+          <p:cNvPicPr>
+            <a:picLocks noChangeAspect="1"/>
+          </p:cNvPicPr>
+          <p:nvPr/>
+        </p:nvPicPr>
+        <p:blipFill>
+          <a:blip r:embed="rId8">
+            <a:alphaModFix amt="18000"/>
+          </a:blip>
+          <a:stretch>
+            <a:fillRect/>
+          </a:stretch>
+        </p:blipFill>
+        <p:spPr>
+          <a:xfrm>
+            <a:off x="3575304" y="3401568"/>
+            <a:ext cx="237744" cy="237744"/>
+          </a:xfrm>
+          <a:prstGeom prst="rect">
+            <a:avLst/>
+          </a:prstGeom>
+        </p:spPr>
+      </p:pic>
+      <p:pic>
+        <p:nvPicPr>
+          <p:cNvPr id="27" name="step 2 used on truck" descr="/NAS/SJ/POSTECH/nlp/figs/icons/truck.png">    </p:cNvPr>
+          <p:cNvPicPr>
+            <a:picLocks noChangeAspect="1"/>
+          </p:cNvPicPr>
+          <p:nvPr/>
+        </p:nvPicPr>
+        <p:blipFill>
+          <a:blip r:embed="rId9"/>
+          <a:stretch>
+            <a:fillRect/>
+          </a:stretch>
+        </p:blipFill>
+        <p:spPr>
+          <a:xfrm>
+            <a:off x="3867912" y="3401568"/>
+            <a:ext cx="237744" cy="237744"/>
+          </a:xfrm>
+          <a:prstGeom prst="rect">
+            <a:avLst/>
+          </a:prstGeom>
+        </p:spPr>
+      </p:pic>
+      <p:pic>
+        <p:nvPicPr>
+          <p:cNvPr id="28" name="step 2 used on calc" descr="/NAS/SJ/POSTECH/nlp/figs/icons/calc.png">    </p:cNvPr>
+          <p:cNvPicPr>
+            <a:picLocks noChangeAspect="1"/>
+          </p:cNvPicPr>
+          <p:nvPr/>
+        </p:nvPicPr>
+        <p:blipFill>
+          <a:blip r:embed="rId10"/>
+          <a:stretch>
+            <a:fillRect/>
+          </a:stretch>
+        </p:blipFill>
+        <p:spPr>
+          <a:xfrm>
+            <a:off x="4160520" y="3401568"/>
+            <a:ext cx="237744" cy="237744"/>
+          </a:xfrm>
+          <a:prstGeom prst="rect">
+            <a:avLst/>
+          </a:prstGeom>
+        </p:spPr>
+      </p:pic>
+      <p:sp>
+        <p:nvSpPr>
+          <p:cNvPr id="29" name="Text 17"/>
           <p:cNvSpPr txBox="1"/>
           <p:nvPr/>
         </p:nvSpPr>
@@ -38757,7 +38853,7 @@
       </p:sp>
       <p:sp>
         <p:nvSpPr>
-          <p:cNvPr id="26" name="step 3 Free check"/>
+          <p:cNvPr id="30" name="step 3 Free check"/>
           <p:cNvSpPr/>
           <p:nvPr/>
         </p:nvSpPr>
@@ -38784,7 +38880,7 @@
       </p:sp>
       <p:sp>
         <p:nvSpPr>
-          <p:cNvPr id="27" name="Text 19"/>
+          <p:cNvPr id="31" name="Text 19"/>
           <p:cNvSpPr txBox="1"/>
           <p:nvPr/>
         </p:nvSpPr>
@@ -38823,7 +38919,7 @@
       </p:sp>
       <p:sp>
         <p:nvSpPr>
-          <p:cNvPr id="28" name="Text 20"/>
+          <p:cNvPr id="32" name="Text 20"/>
           <p:cNvSpPr txBox="1"/>
           <p:nvPr/>
         </p:nvSpPr>
@@ -38859,7 +38955,7 @@
       </p:sp>
       <p:sp>
         <p:nvSpPr>
-          <p:cNvPr id="29" name="Shape 21"/>
+          <p:cNvPr id="33" name="Shape 21"/>
           <p:cNvSpPr/>
           <p:nvPr/>
         </p:nvSpPr>
@@ -38881,9 +38977,105 @@
           </a:ln>
         </p:spPr>
       </p:sp>
-      <p:sp>
-        <p:nvSpPr>
-          <p:cNvPr id="30" name="Text 22"/>
+      <p:pic>
+        <p:nvPicPr>
+          <p:cNvPr id="34" name="step 3 used on shapes" descr="/NAS/SJ/POSTECH/nlp/figs/icons/shapes.png">    </p:cNvPr>
+          <p:cNvPicPr>
+            <a:picLocks noChangeAspect="1"/>
+          </p:cNvPicPr>
+          <p:nvPr/>
+        </p:nvPicPr>
+        <p:blipFill>
+          <a:blip r:embed="rId11"/>
+          <a:stretch>
+            <a:fillRect/>
+          </a:stretch>
+        </p:blipFill>
+        <p:spPr>
+          <a:xfrm>
+            <a:off x="5522976" y="3401568"/>
+            <a:ext cx="237744" cy="237744"/>
+          </a:xfrm>
+          <a:prstGeom prst="rect">
+            <a:avLst/>
+          </a:prstGeom>
+        </p:spPr>
+      </p:pic>
+      <p:pic>
+        <p:nvPicPr>
+          <p:cNvPr id="35" name="step 3 used on trophy" descr="/NAS/SJ/POSTECH/nlp/figs/icons/trophy.png">    </p:cNvPr>
+          <p:cNvPicPr>
+            <a:picLocks noChangeAspect="1"/>
+          </p:cNvPicPr>
+          <p:nvPr/>
+        </p:nvPicPr>
+        <p:blipFill>
+          <a:blip r:embed="rId12"/>
+          <a:stretch>
+            <a:fillRect/>
+          </a:stretch>
+        </p:blipFill>
+        <p:spPr>
+          <a:xfrm>
+            <a:off x="5815584" y="3401568"/>
+            <a:ext cx="237744" cy="237744"/>
+          </a:xfrm>
+          <a:prstGeom prst="rect">
+            <a:avLst/>
+          </a:prstGeom>
+        </p:spPr>
+      </p:pic>
+      <p:pic>
+        <p:nvPicPr>
+          <p:cNvPr id="36" name="step 3 used on truck" descr="/NAS/SJ/POSTECH/nlp/figs/icons/truck.png">    </p:cNvPr>
+          <p:cNvPicPr>
+            <a:picLocks noChangeAspect="1"/>
+          </p:cNvPicPr>
+          <p:nvPr/>
+        </p:nvPicPr>
+        <p:blipFill>
+          <a:blip r:embed="rId13"/>
+          <a:stretch>
+            <a:fillRect/>
+          </a:stretch>
+        </p:blipFill>
+        <p:spPr>
+          <a:xfrm>
+            <a:off x="6108192" y="3401568"/>
+            <a:ext cx="237744" cy="237744"/>
+          </a:xfrm>
+          <a:prstGeom prst="rect">
+            <a:avLst/>
+          </a:prstGeom>
+        </p:spPr>
+      </p:pic>
+      <p:pic>
+        <p:nvPicPr>
+          <p:cNvPr id="37" name="step 3 used on calc" descr="/NAS/SJ/POSTECH/nlp/figs/icons/calc.png">    </p:cNvPr>
+          <p:cNvPicPr>
+            <a:picLocks noChangeAspect="1"/>
+          </p:cNvPicPr>
+          <p:nvPr/>
+        </p:nvPicPr>
+        <p:blipFill>
+          <a:blip r:embed="rId14"/>
+          <a:stretch>
+            <a:fillRect/>
+          </a:stretch>
+        </p:blipFill>
+        <p:spPr>
+          <a:xfrm>
+            <a:off x="6400800" y="3401568"/>
+            <a:ext cx="237744" cy="237744"/>
+          </a:xfrm>
+          <a:prstGeom prst="rect">
+            <a:avLst/>
+          </a:prstGeom>
+        </p:spPr>
+      </p:pic>
+      <p:sp>
+        <p:nvSpPr>
+          <p:cNvPr id="38" name="Text 22"/>
           <p:cNvSpPr txBox="1"/>
           <p:nvPr/>
         </p:nvSpPr>
@@ -38919,7 +39111,7 @@
       </p:sp>
       <p:sp>
         <p:nvSpPr>
-          <p:cNvPr id="31" name="step 4 Think?"/>
+          <p:cNvPr id="39" name="step 4 Think?"/>
           <p:cNvSpPr/>
           <p:nvPr/>
         </p:nvSpPr>
@@ -38946,7 +39138,7 @@
       </p:sp>
       <p:sp>
         <p:nvSpPr>
-          <p:cNvPr id="32" name="Text 24"/>
+          <p:cNvPr id="40" name="Text 24"/>
           <p:cNvSpPr txBox="1"/>
           <p:nvPr/>
         </p:nvSpPr>
@@ -38985,7 +39177,7 @@
       </p:sp>
       <p:sp>
         <p:nvSpPr>
-          <p:cNvPr id="33" name="Text 25"/>
+          <p:cNvPr id="41" name="Text 25"/>
           <p:cNvSpPr txBox="1"/>
           <p:nvPr/>
         </p:nvSpPr>
@@ -39021,7 +39213,7 @@
       </p:sp>
       <p:sp>
         <p:nvSpPr>
-          <p:cNvPr id="34" name="Shape 26"/>
+          <p:cNvPr id="42" name="Shape 26"/>
           <p:cNvSpPr/>
           <p:nvPr/>
         </p:nvSpPr>
@@ -39043,9 +39235,105 @@
           </a:ln>
         </p:spPr>
       </p:sp>
-      <p:sp>
-        <p:nvSpPr>
-          <p:cNvPr id="35" name="Text 27"/>
+      <p:pic>
+        <p:nvPicPr>
+          <p:cNvPr id="43" name="step 4 used on shapes" descr="/NAS/SJ/POSTECH/nlp/figs/icons/shapes.png">    </p:cNvPr>
+          <p:cNvPicPr>
+            <a:picLocks noChangeAspect="1"/>
+          </p:cNvPicPr>
+          <p:nvPr/>
+        </p:nvPicPr>
+        <p:blipFill>
+          <a:blip r:embed="rId15"/>
+          <a:stretch>
+            <a:fillRect/>
+          </a:stretch>
+        </p:blipFill>
+        <p:spPr>
+          <a:xfrm>
+            <a:off x="7763256" y="3401568"/>
+            <a:ext cx="237744" cy="237744"/>
+          </a:xfrm>
+          <a:prstGeom prst="rect">
+            <a:avLst/>
+          </a:prstGeom>
+        </p:spPr>
+      </p:pic>
+      <p:pic>
+        <p:nvPicPr>
+          <p:cNvPr id="44" name="step 4 used on trophy" descr="/NAS/SJ/POSTECH/nlp/figs/icons/trophy.png">    </p:cNvPr>
+          <p:cNvPicPr>
+            <a:picLocks noChangeAspect="1"/>
+          </p:cNvPicPr>
+          <p:nvPr/>
+        </p:nvPicPr>
+        <p:blipFill>
+          <a:blip r:embed="rId16"/>
+          <a:stretch>
+            <a:fillRect/>
+          </a:stretch>
+        </p:blipFill>
+        <p:spPr>
+          <a:xfrm>
+            <a:off x="8055864" y="3401568"/>
+            <a:ext cx="237744" cy="237744"/>
+          </a:xfrm>
+          <a:prstGeom prst="rect">
+            <a:avLst/>
+          </a:prstGeom>
+        </p:spPr>
+      </p:pic>
+      <p:pic>
+        <p:nvPicPr>
+          <p:cNvPr id="45" name="step 4 used on truck" descr="/NAS/SJ/POSTECH/nlp/figs/icons/truck.png">    </p:cNvPr>
+          <p:cNvPicPr>
+            <a:picLocks noChangeAspect="1"/>
+          </p:cNvPicPr>
+          <p:nvPr/>
+        </p:nvPicPr>
+        <p:blipFill>
+          <a:blip r:embed="rId17"/>
+          <a:stretch>
+            <a:fillRect/>
+          </a:stretch>
+        </p:blipFill>
+        <p:spPr>
+          <a:xfrm>
+            <a:off x="8348472" y="3401568"/>
+            <a:ext cx="237744" cy="237744"/>
+          </a:xfrm>
+          <a:prstGeom prst="rect">
+            <a:avLst/>
+          </a:prstGeom>
+        </p:spPr>
+      </p:pic>
+      <p:pic>
+        <p:nvPicPr>
+          <p:cNvPr id="46" name="step 4 used on calc" descr="/NAS/SJ/POSTECH/nlp/figs/icons/calc.png">    </p:cNvPr>
+          <p:cNvPicPr>
+            <a:picLocks noChangeAspect="1"/>
+          </p:cNvPicPr>
+          <p:nvPr/>
+        </p:nvPicPr>
+        <p:blipFill>
+          <a:blip r:embed="rId18"/>
+          <a:stretch>
+            <a:fillRect/>
+          </a:stretch>
+        </p:blipFill>
+        <p:spPr>
+          <a:xfrm>
+            <a:off x="8641080" y="3401568"/>
+            <a:ext cx="237744" cy="237744"/>
+          </a:xfrm>
+          <a:prstGeom prst="rect">
+            <a:avLst/>
+          </a:prstGeom>
+        </p:spPr>
+      </p:pic>
+      <p:sp>
+        <p:nvSpPr>
+          <p:cNvPr id="47" name="Text 27"/>
           <p:cNvSpPr txBox="1"/>
           <p:nvPr/>
         </p:nvSpPr>
@@ -39081,7 +39369,7 @@
       </p:sp>
       <p:sp>
         <p:nvSpPr>
-          <p:cNvPr id="36" name="step 5 Reuse"/>
+          <p:cNvPr id="48" name="step 5 Reuse"/>
           <p:cNvSpPr/>
           <p:nvPr/>
         </p:nvSpPr>
@@ -39108,7 +39396,7 @@
       </p:sp>
       <p:sp>
         <p:nvSpPr>
-          <p:cNvPr id="37" name="Text 29"/>
+          <p:cNvPr id="49" name="Text 29"/>
           <p:cNvSpPr txBox="1"/>
           <p:nvPr/>
         </p:nvSpPr>
@@ -39147,7 +39435,7 @@
       </p:sp>
       <p:sp>
         <p:nvSpPr>
-          <p:cNvPr id="38" name="Text 30"/>
+          <p:cNvPr id="50" name="Text 30"/>
           <p:cNvSpPr txBox="1"/>
           <p:nvPr/>
         </p:nvSpPr>
@@ -39181,15 +39469,117 @@
           </a:p>
         </p:txBody>
       </p:sp>
-      <p:sp>
-        <p:nvSpPr>
-          <p:cNvPr id="39" name="Text 31"/>
-          <p:cNvSpPr txBox="1"/>
-          <p:nvPr/>
-        </p:nvSpPr>
-        <p:spPr>
-          <a:xfrm>
-            <a:off x="548640" y="3611880"/>
+      <p:pic>
+        <p:nvPicPr>
+          <p:cNvPr id="51" name="step 5 not needed on shapes" descr="/NAS/SJ/POSTECH/nlp/figs/icons/shapes.png">    </p:cNvPr>
+          <p:cNvPicPr>
+            <a:picLocks noChangeAspect="1"/>
+          </p:cNvPicPr>
+          <p:nvPr/>
+        </p:nvPicPr>
+        <p:blipFill>
+          <a:blip r:embed="rId19">
+            <a:alphaModFix amt="18000"/>
+          </a:blip>
+          <a:stretch>
+            <a:fillRect/>
+          </a:stretch>
+        </p:blipFill>
+        <p:spPr>
+          <a:xfrm>
+            <a:off x="10003536" y="3401568"/>
+            <a:ext cx="237744" cy="237744"/>
+          </a:xfrm>
+          <a:prstGeom prst="rect">
+            <a:avLst/>
+          </a:prstGeom>
+        </p:spPr>
+      </p:pic>
+      <p:pic>
+        <p:nvPicPr>
+          <p:cNvPr id="52" name="step 5 not needed on trophy" descr="/NAS/SJ/POSTECH/nlp/figs/icons/trophy.png">    </p:cNvPr>
+          <p:cNvPicPr>
+            <a:picLocks noChangeAspect="1"/>
+          </p:cNvPicPr>
+          <p:nvPr/>
+        </p:nvPicPr>
+        <p:blipFill>
+          <a:blip r:embed="rId20">
+            <a:alphaModFix amt="18000"/>
+          </a:blip>
+          <a:stretch>
+            <a:fillRect/>
+          </a:stretch>
+        </p:blipFill>
+        <p:spPr>
+          <a:xfrm>
+            <a:off x="10296144" y="3401568"/>
+            <a:ext cx="237744" cy="237744"/>
+          </a:xfrm>
+          <a:prstGeom prst="rect">
+            <a:avLst/>
+          </a:prstGeom>
+        </p:spPr>
+      </p:pic>
+      <p:pic>
+        <p:nvPicPr>
+          <p:cNvPr id="53" name="step 5 used on truck" descr="/NAS/SJ/POSTECH/nlp/figs/icons/truck.png">    </p:cNvPr>
+          <p:cNvPicPr>
+            <a:picLocks noChangeAspect="1"/>
+          </p:cNvPicPr>
+          <p:nvPr/>
+        </p:nvPicPr>
+        <p:blipFill>
+          <a:blip r:embed="rId21"/>
+          <a:stretch>
+            <a:fillRect/>
+          </a:stretch>
+        </p:blipFill>
+        <p:spPr>
+          <a:xfrm>
+            <a:off x="10588752" y="3401568"/>
+            <a:ext cx="237744" cy="237744"/>
+          </a:xfrm>
+          <a:prstGeom prst="rect">
+            <a:avLst/>
+          </a:prstGeom>
+        </p:spPr>
+      </p:pic>
+      <p:pic>
+        <p:nvPicPr>
+          <p:cNvPr id="54" name="step 5 not needed on calc" descr="/NAS/SJ/POSTECH/nlp/figs/icons/calc.png">    </p:cNvPr>
+          <p:cNvPicPr>
+            <a:picLocks noChangeAspect="1"/>
+          </p:cNvPicPr>
+          <p:nvPr/>
+        </p:nvPicPr>
+        <p:blipFill>
+          <a:blip r:embed="rId22">
+            <a:alphaModFix amt="18000"/>
+          </a:blip>
+          <a:stretch>
+            <a:fillRect/>
+          </a:stretch>
+        </p:blipFill>
+        <p:spPr>
+          <a:xfrm>
+            <a:off x="10881360" y="3401568"/>
+            <a:ext cx="237744" cy="237744"/>
+          </a:xfrm>
+          <a:prstGeom prst="rect">
+            <a:avLst/>
+          </a:prstGeom>
+        </p:spPr>
+      </p:pic>
+      <p:sp>
+        <p:nvSpPr>
+          <p:cNvPr id="55" name="Text 31"/>
+          <p:cNvSpPr txBox="1"/>
+          <p:nvPr/>
+        </p:nvSpPr>
+        <p:spPr>
+          <a:xfrm>
+            <a:off x="548640" y="3730752"/>
             <a:ext cx="6400800" cy="365760"/>
           </a:xfrm>
           <a:prstGeom prst="rect">
@@ -39219,13 +39609,13 @@
       </p:sp>
       <p:sp>
         <p:nvSpPr>
-          <p:cNvPr id="40" name="Text 32"/>
-          <p:cNvSpPr txBox="1"/>
-          <p:nvPr/>
-        </p:nvSpPr>
-        <p:spPr>
-          <a:xfrm>
-            <a:off x="2560320" y="3977640"/>
+          <p:cNvPr id="56" name="Text 32"/>
+          <p:cNvSpPr txBox="1"/>
+          <p:nvPr/>
+        </p:nvSpPr>
+        <p:spPr>
+          <a:xfrm>
+            <a:off x="2560320" y="4069080"/>
             <a:ext cx="822960" cy="320040"/>
           </a:xfrm>
           <a:prstGeom prst="rect">
@@ -39255,13 +39645,13 @@
       </p:sp>
       <p:sp>
         <p:nvSpPr>
-          <p:cNvPr id="41" name="Text 33"/>
-          <p:cNvSpPr txBox="1"/>
-          <p:nvPr/>
-        </p:nvSpPr>
-        <p:spPr>
-          <a:xfrm>
-            <a:off x="3474720" y="3977640"/>
+          <p:cNvPr id="57" name="Text 33"/>
+          <p:cNvSpPr txBox="1"/>
+          <p:nvPr/>
+        </p:nvSpPr>
+        <p:spPr>
+          <a:xfrm>
+            <a:off x="3474720" y="4069080"/>
             <a:ext cx="3474720" cy="320040"/>
           </a:xfrm>
           <a:prstGeom prst="rect">
@@ -39291,13 +39681,13 @@
       </p:sp>
       <p:sp>
         <p:nvSpPr>
-          <p:cNvPr id="42" name="Text 34"/>
-          <p:cNvSpPr txBox="1"/>
-          <p:nvPr/>
-        </p:nvSpPr>
-        <p:spPr>
-          <a:xfrm>
-            <a:off x="548640" y="4343400"/>
+          <p:cNvPr id="58" name="Text 34"/>
+          <p:cNvSpPr txBox="1"/>
+          <p:nvPr/>
+        </p:nvSpPr>
+        <p:spPr>
+          <a:xfrm>
+            <a:off x="548640" y="4434840"/>
             <a:ext cx="1920240" cy="457200"/>
           </a:xfrm>
           <a:prstGeom prst="rect">
@@ -39327,13 +39717,13 @@
       </p:sp>
       <p:sp>
         <p:nvSpPr>
-          <p:cNvPr id="43" name="Text 35"/>
-          <p:cNvSpPr txBox="1"/>
-          <p:nvPr/>
-        </p:nvSpPr>
-        <p:spPr>
-          <a:xfrm>
-            <a:off x="2560320" y="4343400"/>
+          <p:cNvPr id="59" name="Text 35"/>
+          <p:cNvSpPr txBox="1"/>
+          <p:nvPr/>
+        </p:nvSpPr>
+        <p:spPr>
+          <a:xfrm>
+            <a:off x="2560320" y="4434840"/>
             <a:ext cx="822960" cy="457200"/>
           </a:xfrm>
           <a:prstGeom prst="rect">
@@ -39363,13 +39753,13 @@
       </p:sp>
       <p:sp>
         <p:nvSpPr>
-          <p:cNvPr id="44" name="tokens think on hardest-looking"/>
+          <p:cNvPr id="60" name="tokens think on hardest-looking"/>
           <p:cNvSpPr/>
           <p:nvPr/>
         </p:nvSpPr>
         <p:spPr>
           <a:xfrm>
-            <a:off x="3474720" y="4443984"/>
+            <a:off x="3474720" y="4535424"/>
             <a:ext cx="2743200" cy="256032"/>
           </a:xfrm>
           <a:prstGeom prst="rect">
@@ -39388,13 +39778,13 @@
       </p:sp>
       <p:sp>
         <p:nvSpPr>
-          <p:cNvPr id="45" name="Text 37"/>
-          <p:cNvSpPr txBox="1"/>
-          <p:nvPr/>
-        </p:nvSpPr>
-        <p:spPr>
-          <a:xfrm>
-            <a:off x="6309360" y="4343400"/>
+          <p:cNvPr id="61" name="Text 37"/>
+          <p:cNvSpPr txBox="1"/>
+          <p:nvPr/>
+        </p:nvSpPr>
+        <p:spPr>
+          <a:xfrm>
+            <a:off x="6309360" y="4434840"/>
             <a:ext cx="731520" cy="457200"/>
           </a:xfrm>
           <a:prstGeom prst="rect">
@@ -39424,13 +39814,13 @@
       </p:sp>
       <p:sp>
         <p:nvSpPr>
-          <p:cNvPr id="46" name="Text 38"/>
-          <p:cNvSpPr txBox="1"/>
-          <p:nvPr/>
-        </p:nvSpPr>
-        <p:spPr>
-          <a:xfrm>
-            <a:off x="548640" y="4873752"/>
+          <p:cNvPr id="62" name="Text 38"/>
+          <p:cNvSpPr txBox="1"/>
+          <p:nvPr/>
+        </p:nvSpPr>
+        <p:spPr>
+          <a:xfrm>
+            <a:off x="548640" y="4965192"/>
             <a:ext cx="1920240" cy="457200"/>
           </a:xfrm>
           <a:prstGeom prst="rect">
@@ -39460,13 +39850,13 @@
       </p:sp>
       <p:sp>
         <p:nvSpPr>
-          <p:cNvPr id="47" name="Text 39"/>
-          <p:cNvSpPr txBox="1"/>
-          <p:nvPr/>
-        </p:nvSpPr>
-        <p:spPr>
-          <a:xfrm>
-            <a:off x="2560320" y="4873752"/>
+          <p:cNvPr id="63" name="Text 39"/>
+          <p:cNvSpPr txBox="1"/>
+          <p:nvPr/>
+        </p:nvSpPr>
+        <p:spPr>
+          <a:xfrm>
+            <a:off x="2560320" y="4965192"/>
             <a:ext cx="822960" cy="457200"/>
           </a:xfrm>
           <a:prstGeom prst="rect">
@@ -39496,13 +39886,13 @@
       </p:sp>
       <p:sp>
         <p:nvSpPr>
-          <p:cNvPr id="48" name="tokens our method"/>
+          <p:cNvPr id="64" name="tokens our method"/>
           <p:cNvSpPr/>
           <p:nvPr/>
         </p:nvSpPr>
         <p:spPr>
           <a:xfrm>
-            <a:off x="3474720" y="4974336"/>
+            <a:off x="3474720" y="5065776"/>
             <a:ext cx="1672683" cy="256032"/>
           </a:xfrm>
           <a:prstGeom prst="rect">
@@ -39521,13 +39911,13 @@
       </p:sp>
       <p:sp>
         <p:nvSpPr>
-          <p:cNvPr id="49" name="Text 41"/>
-          <p:cNvSpPr txBox="1"/>
-          <p:nvPr/>
-        </p:nvSpPr>
-        <p:spPr>
-          <a:xfrm>
-            <a:off x="5238843" y="4873752"/>
+          <p:cNvPr id="65" name="Text 41"/>
+          <p:cNvSpPr txBox="1"/>
+          <p:nvPr/>
+        </p:nvSpPr>
+        <p:spPr>
+          <a:xfrm>
+            <a:off x="5238843" y="4965192"/>
             <a:ext cx="731520" cy="457200"/>
           </a:xfrm>
           <a:prstGeom prst="rect">
@@ -39557,13 +39947,13 @@
       </p:sp>
       <p:sp>
         <p:nvSpPr>
-          <p:cNvPr id="50" name="Text 42"/>
-          <p:cNvSpPr txBox="1"/>
-          <p:nvPr/>
-        </p:nvSpPr>
-        <p:spPr>
-          <a:xfrm>
-            <a:off x="7498080" y="3611880"/>
+          <p:cNvPr id="66" name="Text 42"/>
+          <p:cNvSpPr txBox="1"/>
+          <p:nvPr/>
+        </p:nvSpPr>
+        <p:spPr>
+          <a:xfrm>
+            <a:off x="7498080" y="3730752"/>
             <a:ext cx="4114800" cy="457200"/>
           </a:xfrm>
           <a:prstGeom prst="rect">
@@ -39593,13 +39983,13 @@
       </p:sp>
       <p:sp>
         <p:nvSpPr>
-          <p:cNvPr id="51" name="Text 43"/>
-          <p:cNvSpPr txBox="1"/>
-          <p:nvPr/>
-        </p:nvSpPr>
-        <p:spPr>
-          <a:xfrm>
-            <a:off x="7498080" y="4050792"/>
+          <p:cNvPr id="67" name="Text 43"/>
+          <p:cNvSpPr txBox="1"/>
+          <p:nvPr/>
+        </p:nvSpPr>
+        <p:spPr>
+          <a:xfrm>
+            <a:off x="7498080" y="4169664"/>
             <a:ext cx="4114800" cy="457200"/>
           </a:xfrm>
           <a:prstGeom prst="rect">
@@ -39629,13 +40019,13 @@
       </p:sp>
       <p:sp>
         <p:nvSpPr>
-          <p:cNvPr id="52" name="Text 44"/>
-          <p:cNvSpPr txBox="1"/>
-          <p:nvPr/>
-        </p:nvSpPr>
-        <p:spPr>
-          <a:xfrm>
-            <a:off x="7498080" y="4572000"/>
+          <p:cNvPr id="68" name="Text 44"/>
+          <p:cNvSpPr txBox="1"/>
+          <p:nvPr/>
+        </p:nvSpPr>
+        <p:spPr>
+          <a:xfrm>
+            <a:off x="7498080" y="4645152"/>
             <a:ext cx="4114800" cy="457200"/>
           </a:xfrm>
           <a:prstGeom prst="rect">
@@ -39665,13 +40055,13 @@
       </p:sp>
       <p:sp>
         <p:nvSpPr>
-          <p:cNvPr id="53" name="Text 45"/>
-          <p:cNvSpPr txBox="1"/>
-          <p:nvPr/>
-        </p:nvSpPr>
-        <p:spPr>
-          <a:xfrm>
-            <a:off x="7498080" y="5010912"/>
+          <p:cNvPr id="69" name="Text 45"/>
+          <p:cNvSpPr txBox="1"/>
+          <p:nvPr/>
+        </p:nvSpPr>
+        <p:spPr>
+          <a:xfrm>
+            <a:off x="7498080" y="5084064"/>
             <a:ext cx="4114800" cy="457200"/>
           </a:xfrm>
           <a:prstGeom prst="rect">
@@ -39701,7 +40091,7 @@
       </p:sp>
       <p:sp>
         <p:nvSpPr>
-          <p:cNvPr id="54" name="Text 46"/>
+          <p:cNvPr id="70" name="Text 46"/>
           <p:cNvSpPr txBox="1"/>
           <p:nvPr/>
         </p:nvSpPr>
@@ -43926,7 +44316,7 @@
                   <a:schemeClr val="tx1"/>
                 </a:solidFill>
               </a:rPr>
-              <a:t>Where does the recipe stop?</a:t>
+              <a:t>Why no hint for contest problems?</a:t>
             </a:r>
             <a:endParaRPr lang="en-US" sz="1400" dirty="0"/>
           </a:p>
@@ -43934,7 +44324,7 @@
       </p:sp>
       <p:sp>
         <p:nvSpPr>
-          <p:cNvPr id="93" name="page limits"/>
+          <p:cNvPr id="93" name="page coverage"/>
           <p:cNvSpPr/>
           <p:nvPr/>
         </p:nvSpPr>
@@ -43989,7 +44379,7 @@
                   <a:srgbClr val="FFFFFF"/>
                 </a:solidFill>
               </a:rPr>
-              <a:t>28</a:t>
+              <a:t>11</a:t>
             </a:r>
             <a:endParaRPr lang="en-US" sz="1400" dirty="0"/>
           </a:p>
@@ -44052,7 +44442,7 @@
       </p:sp>
       <p:sp>
         <p:nvSpPr>
-          <p:cNvPr id="97" name="from slide 8"/>
+          <p:cNvPr id="97" name="from slide 7"/>
           <p:cNvSpPr/>
           <p:nvPr/>
         </p:nvSpPr>
@@ -44107,7 +44497,7 @@
                   <a:srgbClr val="404040"/>
                 </a:solidFill>
               </a:rPr>
-              <a:t>slide 8</a:t>
+              <a:t>slide 7</a:t>
             </a:r>
             <a:endParaRPr lang="en-US" sz="1400" dirty="0"/>
           </a:p>
@@ -44122,7 +44512,7 @@
         <p:spPr>
           <a:xfrm>
             <a:off x="7132320" y="3474720"/>
-            <a:ext cx="2880360" cy="402336"/>
+            <a:ext cx="3886200" cy="402336"/>
           </a:xfrm>
           <a:prstGeom prst="rect">
             <a:avLst/>
@@ -44143,7 +44533,7 @@
                   <a:schemeClr val="tx1"/>
                 </a:solidFill>
               </a:rPr>
-              <a:t>What is new vs PAL and cascades?</a:t>
+              <a:t>Where does the recipe stop?</a:t>
             </a:r>
             <a:endParaRPr lang="en-US" sz="1400" dirty="0"/>
           </a:p>
@@ -44151,13 +44541,13 @@
       </p:sp>
       <p:sp>
         <p:nvSpPr>
-          <p:cNvPr id="100" name="page published"/>
+          <p:cNvPr id="100" name="page limits"/>
           <p:cNvSpPr/>
           <p:nvPr/>
         </p:nvSpPr>
         <p:spPr>
           <a:xfrm>
-            <a:off x="10067544" y="3520440"/>
+            <a:off x="11073384" y="3520440"/>
             <a:ext cx="438912" cy="310896"/>
           </a:xfrm>
           <a:prstGeom prst="roundRect">
@@ -44184,7 +44574,7 @@
         </p:nvSpPr>
         <p:spPr>
           <a:xfrm>
-            <a:off x="10067544" y="3520440"/>
+            <a:off x="11073384" y="3520440"/>
             <a:ext cx="438912" cy="310896"/>
           </a:xfrm>
           <a:prstGeom prst="rect">
@@ -44206,7 +44596,7 @@
                   <a:srgbClr val="FFFFFF"/>
                 </a:solidFill>
               </a:rPr>
-              <a:t>21</a:t>
+              <a:t>28</a:t>
             </a:r>
             <a:endParaRPr lang="en-US" sz="1400" dirty="0"/>
           </a:p>
@@ -44214,13 +44604,167 @@
       </p:sp>
       <p:sp>
         <p:nvSpPr>
-          <p:cNvPr id="102" name="page related"/>
+          <p:cNvPr id="102" name="box "/>
           <p:cNvSpPr/>
           <p:nvPr/>
         </p:nvSpPr>
         <p:spPr>
           <a:xfrm>
-            <a:off x="10570464" y="3520440"/>
+            <a:off x="6172200" y="3931920"/>
+            <a:ext cx="5440680" cy="402336"/>
+          </a:xfrm>
+          <a:prstGeom prst="roundRect">
+            <a:avLst>
+              <a:gd name="adj" fmla="val 13636"/>
+            </a:avLst>
+          </a:prstGeom>
+          <a:solidFill>
+            <a:srgbClr val="F2F2F2"/>
+          </a:solidFill>
+          <a:ln w="9525">
+            <a:solidFill>
+              <a:srgbClr val="BFBFBF"/>
+            </a:solidFill>
+            <a:prstDash val="solid"/>
+          </a:ln>
+        </p:spPr>
+      </p:sp>
+      <p:sp>
+        <p:nvSpPr>
+          <p:cNvPr id="103" name="Text 101"/>
+          <p:cNvSpPr txBox="1"/>
+          <p:nvPr/>
+        </p:nvSpPr>
+        <p:spPr>
+          <a:xfrm>
+            <a:off x="6245352" y="3931920"/>
+            <a:ext cx="5294376" cy="402336"/>
+          </a:xfrm>
+          <a:prstGeom prst="rect">
+            <a:avLst/>
+          </a:prstGeom>
+          <a:noFill/>
+          <a:ln/>
+        </p:spPr>
+        <p:txBody>
+          <a:bodyPr wrap="square" lIns="0" tIns="0" rIns="0" bIns="0" rtlCol="0" anchor="ctr"/>
+          <a:lstStyle/>
+          <a:p>
+            <a:pPr algn="ctr" indent="0" marL="0">
+              <a:buNone/>
+            </a:pPr>
+            <a:endParaRPr lang="en-US" sz="1500" dirty="0"/>
+          </a:p>
+        </p:txBody>
+      </p:sp>
+      <p:sp>
+        <p:nvSpPr>
+          <p:cNvPr id="104" name="from slide 8"/>
+          <p:cNvSpPr/>
+          <p:nvPr/>
+        </p:nvSpPr>
+        <p:spPr>
+          <a:xfrm>
+            <a:off x="6245352" y="3986784"/>
+            <a:ext cx="777240" cy="292608"/>
+          </a:xfrm>
+          <a:prstGeom prst="roundRect">
+            <a:avLst>
+              <a:gd name="adj" fmla="val 18750"/>
+            </a:avLst>
+          </a:prstGeom>
+          <a:solidFill>
+            <a:srgbClr val="D9D9D9"/>
+          </a:solidFill>
+          <a:ln w="12700">
+            <a:solidFill>
+              <a:srgbClr val="D9D9D9"/>
+            </a:solidFill>
+            <a:prstDash val="solid"/>
+          </a:ln>
+        </p:spPr>
+      </p:sp>
+      <p:sp>
+        <p:nvSpPr>
+          <p:cNvPr id="105" name="Text 103"/>
+          <p:cNvSpPr txBox="1"/>
+          <p:nvPr/>
+        </p:nvSpPr>
+        <p:spPr>
+          <a:xfrm>
+            <a:off x="6245352" y="3986784"/>
+            <a:ext cx="777240" cy="292608"/>
+          </a:xfrm>
+          <a:prstGeom prst="rect">
+            <a:avLst/>
+          </a:prstGeom>
+          <a:noFill/>
+          <a:ln/>
+        </p:spPr>
+        <p:txBody>
+          <a:bodyPr wrap="square" lIns="0" tIns="0" rIns="0" bIns="0" rtlCol="0" anchor="ctr"/>
+          <a:lstStyle/>
+          <a:p>
+            <a:pPr algn="ctr" indent="0" marL="0">
+              <a:buNone/>
+            </a:pPr>
+            <a:r>
+              <a:rPr lang="en-US" sz="1400" dirty="0">
+                <a:solidFill>
+                  <a:srgbClr val="404040"/>
+                </a:solidFill>
+              </a:rPr>
+              <a:t>slide 8</a:t>
+            </a:r>
+            <a:endParaRPr lang="en-US" sz="1400" dirty="0"/>
+          </a:p>
+        </p:txBody>
+      </p:sp>
+      <p:sp>
+        <p:nvSpPr>
+          <p:cNvPr id="106" name="Text 104"/>
+          <p:cNvSpPr txBox="1"/>
+          <p:nvPr/>
+        </p:nvSpPr>
+        <p:spPr>
+          <a:xfrm>
+            <a:off x="7132320" y="3931920"/>
+            <a:ext cx="2880360" cy="402336"/>
+          </a:xfrm>
+          <a:prstGeom prst="rect">
+            <a:avLst/>
+          </a:prstGeom>
+          <a:noFill/>
+          <a:ln/>
+        </p:spPr>
+        <p:txBody>
+          <a:bodyPr wrap="square" lIns="0" tIns="0" rIns="0" bIns="0" rtlCol="0" anchor="ctr"/>
+          <a:lstStyle/>
+          <a:p>
+            <a:pPr indent="0" marL="0">
+              <a:buNone/>
+            </a:pPr>
+            <a:r>
+              <a:rPr lang="en-US" sz="1400" dirty="0">
+                <a:solidFill>
+                  <a:schemeClr val="tx1"/>
+                </a:solidFill>
+              </a:rPr>
+              <a:t>What is new vs PAL and cascades?</a:t>
+            </a:r>
+            <a:endParaRPr lang="en-US" sz="1400" dirty="0"/>
+          </a:p>
+        </p:txBody>
+      </p:sp>
+      <p:sp>
+        <p:nvSpPr>
+          <p:cNvPr id="107" name="page published"/>
+          <p:cNvSpPr/>
+          <p:nvPr/>
+        </p:nvSpPr>
+        <p:spPr>
+          <a:xfrm>
+            <a:off x="10067544" y="3977640"/>
             <a:ext cx="438912" cy="310896"/>
           </a:xfrm>
           <a:prstGeom prst="roundRect">
@@ -44241,13 +44785,13 @@
       </p:sp>
       <p:sp>
         <p:nvSpPr>
-          <p:cNvPr id="103" name="Text 101"/>
-          <p:cNvSpPr txBox="1"/>
-          <p:nvPr/>
-        </p:nvSpPr>
-        <p:spPr>
-          <a:xfrm>
-            <a:off x="10570464" y="3520440"/>
+          <p:cNvPr id="108" name="Text 106"/>
+          <p:cNvSpPr txBox="1"/>
+          <p:nvPr/>
+        </p:nvSpPr>
+        <p:spPr>
+          <a:xfrm>
+            <a:off x="10067544" y="3977640"/>
             <a:ext cx="438912" cy="310896"/>
           </a:xfrm>
           <a:prstGeom prst="rect">
@@ -44269,7 +44813,7 @@
                   <a:srgbClr val="FFFFFF"/>
                 </a:solidFill>
               </a:rPr>
-              <a:t>22</a:t>
+              <a:t>21</a:t>
             </a:r>
             <a:endParaRPr lang="en-US" sz="1400" dirty="0"/>
           </a:p>
@@ -44277,13 +44821,13 @@
       </p:sp>
       <p:sp>
         <p:nvSpPr>
-          <p:cNvPr id="104" name="page reported"/>
+          <p:cNvPr id="109" name="page related"/>
           <p:cNvSpPr/>
           <p:nvPr/>
         </p:nvSpPr>
         <p:spPr>
           <a:xfrm>
-            <a:off x="11073384" y="3520440"/>
+            <a:off x="10570464" y="3977640"/>
             <a:ext cx="438912" cy="310896"/>
           </a:xfrm>
           <a:prstGeom prst="roundRect">
@@ -44304,13 +44848,13 @@
       </p:sp>
       <p:sp>
         <p:nvSpPr>
-          <p:cNvPr id="105" name="Text 103"/>
-          <p:cNvSpPr txBox="1"/>
-          <p:nvPr/>
-        </p:nvSpPr>
-        <p:spPr>
-          <a:xfrm>
-            <a:off x="11073384" y="3520440"/>
+          <p:cNvPr id="110" name="Text 108"/>
+          <p:cNvSpPr txBox="1"/>
+          <p:nvPr/>
+        </p:nvSpPr>
+        <p:spPr>
+          <a:xfrm>
+            <a:off x="10570464" y="3977640"/>
             <a:ext cx="438912" cy="310896"/>
           </a:xfrm>
           <a:prstGeom prst="rect">
@@ -44332,6 +44876,69 @@
                   <a:srgbClr val="FFFFFF"/>
                 </a:solidFill>
               </a:rPr>
+              <a:t>22</a:t>
+            </a:r>
+            <a:endParaRPr lang="en-US" sz="1400" dirty="0"/>
+          </a:p>
+        </p:txBody>
+      </p:sp>
+      <p:sp>
+        <p:nvSpPr>
+          <p:cNvPr id="111" name="page reported"/>
+          <p:cNvSpPr/>
+          <p:nvPr/>
+        </p:nvSpPr>
+        <p:spPr>
+          <a:xfrm>
+            <a:off x="11073384" y="3977640"/>
+            <a:ext cx="438912" cy="310896"/>
+          </a:xfrm>
+          <a:prstGeom prst="roundRect">
+            <a:avLst>
+              <a:gd name="adj" fmla="val 23529"/>
+            </a:avLst>
+          </a:prstGeom>
+          <a:solidFill>
+            <a:srgbClr val="4472C4"/>
+          </a:solidFill>
+          <a:ln w="12700">
+            <a:solidFill>
+              <a:srgbClr val="4472C4"/>
+            </a:solidFill>
+            <a:prstDash val="solid"/>
+          </a:ln>
+        </p:spPr>
+      </p:sp>
+      <p:sp>
+        <p:nvSpPr>
+          <p:cNvPr id="112" name="Text 110"/>
+          <p:cNvSpPr txBox="1"/>
+          <p:nvPr/>
+        </p:nvSpPr>
+        <p:spPr>
+          <a:xfrm>
+            <a:off x="11073384" y="3977640"/>
+            <a:ext cx="438912" cy="310896"/>
+          </a:xfrm>
+          <a:prstGeom prst="rect">
+            <a:avLst/>
+          </a:prstGeom>
+          <a:noFill/>
+          <a:ln/>
+        </p:spPr>
+        <p:txBody>
+          <a:bodyPr wrap="square" lIns="0" tIns="0" rIns="0" bIns="0" rtlCol="0" anchor="ctr"/>
+          <a:lstStyle/>
+          <a:p>
+            <a:pPr algn="ctr" indent="0" marL="0">
+              <a:buNone/>
+            </a:pPr>
+            <a:r>
+              <a:rPr lang="en-US" sz="1400" b="1" dirty="0">
+                <a:solidFill>
+                  <a:srgbClr val="FFFFFF"/>
+                </a:solidFill>
+              </a:rPr>
               <a:t>23</a:t>
             </a:r>
             <a:endParaRPr lang="en-US" sz="1400" dirty="0"/>
@@ -44340,13 +44947,13 @@
       </p:sp>
       <p:sp>
         <p:nvSpPr>
-          <p:cNvPr id="106" name="box "/>
+          <p:cNvPr id="113" name="box "/>
           <p:cNvSpPr/>
           <p:nvPr/>
         </p:nvSpPr>
         <p:spPr>
           <a:xfrm>
-            <a:off x="6172200" y="3931920"/>
+            <a:off x="6172200" y="4389120"/>
             <a:ext cx="5440680" cy="402336"/>
           </a:xfrm>
           <a:prstGeom prst="roundRect">
@@ -44367,13 +44974,13 @@
       </p:sp>
       <p:sp>
         <p:nvSpPr>
-          <p:cNvPr id="107" name="Text 105"/>
-          <p:cNvSpPr txBox="1"/>
-          <p:nvPr/>
-        </p:nvSpPr>
-        <p:spPr>
-          <a:xfrm>
-            <a:off x="6245352" y="3931920"/>
+          <p:cNvPr id="114" name="Text 112"/>
+          <p:cNvSpPr txBox="1"/>
+          <p:nvPr/>
+        </p:nvSpPr>
+        <p:spPr>
+          <a:xfrm>
+            <a:off x="6245352" y="4389120"/>
             <a:ext cx="5294376" cy="402336"/>
           </a:xfrm>
           <a:prstGeom prst="rect">
@@ -44395,13 +45002,13 @@
       </p:sp>
       <p:sp>
         <p:nvSpPr>
-          <p:cNvPr id="108" name="from slide 8"/>
+          <p:cNvPr id="115" name="from slide 8"/>
           <p:cNvSpPr/>
           <p:nvPr/>
         </p:nvSpPr>
         <p:spPr>
           <a:xfrm>
-            <a:off x="6245352" y="3986784"/>
+            <a:off x="6245352" y="4443984"/>
             <a:ext cx="777240" cy="292608"/>
           </a:xfrm>
           <a:prstGeom prst="roundRect">
@@ -44422,13 +45029,13 @@
       </p:sp>
       <p:sp>
         <p:nvSpPr>
-          <p:cNvPr id="109" name="Text 107"/>
-          <p:cNvSpPr txBox="1"/>
-          <p:nvPr/>
-        </p:nvSpPr>
-        <p:spPr>
-          <a:xfrm>
-            <a:off x="6245352" y="3986784"/>
+          <p:cNvPr id="116" name="Text 114"/>
+          <p:cNvSpPr txBox="1"/>
+          <p:nvPr/>
+        </p:nvSpPr>
+        <p:spPr>
+          <a:xfrm>
+            <a:off x="6245352" y="4443984"/>
             <a:ext cx="777240" cy="292608"/>
           </a:xfrm>
           <a:prstGeom prst="rect">
@@ -44458,13 +45065,13 @@
       </p:sp>
       <p:sp>
         <p:nvSpPr>
-          <p:cNvPr id="110" name="Text 108"/>
-          <p:cNvSpPr txBox="1"/>
-          <p:nvPr/>
-        </p:nvSpPr>
-        <p:spPr>
-          <a:xfrm>
-            <a:off x="7132320" y="3931920"/>
+          <p:cNvPr id="117" name="Text 115"/>
+          <p:cNvSpPr txBox="1"/>
+          <p:nvPr/>
+        </p:nvSpPr>
+        <p:spPr>
+          <a:xfrm>
+            <a:off x="7132320" y="4389120"/>
             <a:ext cx="3886200" cy="402336"/>
           </a:xfrm>
           <a:prstGeom prst="rect">
@@ -44494,13 +45101,13 @@
       </p:sp>
       <p:sp>
         <p:nvSpPr>
-          <p:cNvPr id="111" name="page vote"/>
+          <p:cNvPr id="118" name="page vote"/>
           <p:cNvSpPr/>
           <p:nvPr/>
         </p:nvSpPr>
         <p:spPr>
           <a:xfrm>
-            <a:off x="11073384" y="3977640"/>
+            <a:off x="11073384" y="4434840"/>
             <a:ext cx="438912" cy="310896"/>
           </a:xfrm>
           <a:prstGeom prst="roundRect">
@@ -44521,13 +45128,13 @@
       </p:sp>
       <p:sp>
         <p:nvSpPr>
-          <p:cNvPr id="112" name="Text 110"/>
-          <p:cNvSpPr txBox="1"/>
-          <p:nvPr/>
-        </p:nvSpPr>
-        <p:spPr>
-          <a:xfrm>
-            <a:off x="11073384" y="3977640"/>
+          <p:cNvPr id="119" name="Text 117"/>
+          <p:cNvSpPr txBox="1"/>
+          <p:nvPr/>
+        </p:nvSpPr>
+        <p:spPr>
+          <a:xfrm>
+            <a:off x="11073384" y="4434840"/>
             <a:ext cx="438912" cy="310896"/>
           </a:xfrm>
           <a:prstGeom prst="rect">
@@ -44557,13 +45164,13 @@
       </p:sp>
       <p:sp>
         <p:nvSpPr>
-          <p:cNvPr id="113" name="box "/>
+          <p:cNvPr id="120" name="box "/>
           <p:cNvSpPr/>
           <p:nvPr/>
         </p:nvSpPr>
         <p:spPr>
           <a:xfrm>
-            <a:off x="6172200" y="4389120"/>
+            <a:off x="6172200" y="4846320"/>
             <a:ext cx="5440680" cy="402336"/>
           </a:xfrm>
           <a:prstGeom prst="roundRect">
@@ -44584,13 +45191,13 @@
       </p:sp>
       <p:sp>
         <p:nvSpPr>
-          <p:cNvPr id="114" name="Text 112"/>
-          <p:cNvSpPr txBox="1"/>
-          <p:nvPr/>
-        </p:nvSpPr>
-        <p:spPr>
-          <a:xfrm>
-            <a:off x="6245352" y="4389120"/>
+          <p:cNvPr id="121" name="Text 119"/>
+          <p:cNvSpPr txBox="1"/>
+          <p:nvPr/>
+        </p:nvSpPr>
+        <p:spPr>
+          <a:xfrm>
+            <a:off x="6245352" y="4846320"/>
             <a:ext cx="5294376" cy="402336"/>
           </a:xfrm>
           <a:prstGeom prst="rect">
@@ -44612,13 +45219,13 @@
       </p:sp>
       <p:sp>
         <p:nvSpPr>
-          <p:cNvPr id="115" name="from slide 8"/>
+          <p:cNvPr id="122" name="from slide 8"/>
           <p:cNvSpPr/>
           <p:nvPr/>
         </p:nvSpPr>
         <p:spPr>
           <a:xfrm>
-            <a:off x="6245352" y="4443984"/>
+            <a:off x="6245352" y="4901184"/>
             <a:ext cx="777240" cy="292608"/>
           </a:xfrm>
           <a:prstGeom prst="roundRect">
@@ -44639,13 +45246,13 @@
       </p:sp>
       <p:sp>
         <p:nvSpPr>
-          <p:cNvPr id="116" name="Text 114"/>
-          <p:cNvSpPr txBox="1"/>
-          <p:nvPr/>
-        </p:nvSpPr>
-        <p:spPr>
-          <a:xfrm>
-            <a:off x="6245352" y="4443984"/>
+          <p:cNvPr id="123" name="Text 121"/>
+          <p:cNvSpPr txBox="1"/>
+          <p:nvPr/>
+        </p:nvSpPr>
+        <p:spPr>
+          <a:xfrm>
+            <a:off x="6245352" y="4901184"/>
             <a:ext cx="777240" cy="292608"/>
           </a:xfrm>
           <a:prstGeom prst="rect">
@@ -44675,13 +45282,13 @@
       </p:sp>
       <p:sp>
         <p:nvSpPr>
-          <p:cNvPr id="117" name="Text 115"/>
-          <p:cNvSpPr txBox="1"/>
-          <p:nvPr/>
-        </p:nvSpPr>
-        <p:spPr>
-          <a:xfrm>
-            <a:off x="7132320" y="4389120"/>
+          <p:cNvPr id="124" name="Text 122"/>
+          <p:cNvSpPr txBox="1"/>
+          <p:nvPr/>
+        </p:nvSpPr>
+        <p:spPr>
+          <a:xfrm>
+            <a:off x="7132320" y="4846320"/>
             <a:ext cx="3383280" cy="402336"/>
           </a:xfrm>
           <a:prstGeom prst="rect">
@@ -44711,13 +45318,13 @@
       </p:sp>
       <p:sp>
         <p:nvSpPr>
-          <p:cNvPr id="118" name="page fair"/>
+          <p:cNvPr id="125" name="page fair"/>
           <p:cNvSpPr/>
           <p:nvPr/>
         </p:nvSpPr>
         <p:spPr>
           <a:xfrm>
-            <a:off x="10570464" y="4434840"/>
+            <a:off x="10570464" y="4892040"/>
             <a:ext cx="438912" cy="310896"/>
           </a:xfrm>
           <a:prstGeom prst="roundRect">
@@ -44738,13 +45345,13 @@
       </p:sp>
       <p:sp>
         <p:nvSpPr>
-          <p:cNvPr id="119" name="Text 117"/>
-          <p:cNvSpPr txBox="1"/>
-          <p:nvPr/>
-        </p:nvSpPr>
-        <p:spPr>
-          <a:xfrm>
-            <a:off x="10570464" y="4434840"/>
+          <p:cNvPr id="126" name="Text 124"/>
+          <p:cNvSpPr txBox="1"/>
+          <p:nvPr/>
+        </p:nvSpPr>
+        <p:spPr>
+          <a:xfrm>
+            <a:off x="10570464" y="4892040"/>
             <a:ext cx="438912" cy="310896"/>
           </a:xfrm>
           <a:prstGeom prst="rect">
@@ -44774,13 +45381,13 @@
       </p:sp>
       <p:sp>
         <p:nvSpPr>
-          <p:cNvPr id="120" name="page setup"/>
+          <p:cNvPr id="127" name="page setup"/>
           <p:cNvSpPr/>
           <p:nvPr/>
         </p:nvSpPr>
         <p:spPr>
           <a:xfrm>
-            <a:off x="11073384" y="4434840"/>
+            <a:off x="11073384" y="4892040"/>
             <a:ext cx="438912" cy="310896"/>
           </a:xfrm>
           <a:prstGeom prst="roundRect">
@@ -44801,13 +45408,13 @@
       </p:sp>
       <p:sp>
         <p:nvSpPr>
-          <p:cNvPr id="121" name="Text 119"/>
-          <p:cNvSpPr txBox="1"/>
-          <p:nvPr/>
-        </p:nvSpPr>
-        <p:spPr>
-          <a:xfrm>
-            <a:off x="11073384" y="4434840"/>
+          <p:cNvPr id="128" name="Text 126"/>
+          <p:cNvSpPr txBox="1"/>
+          <p:nvPr/>
+        </p:nvSpPr>
+        <p:spPr>
+          <a:xfrm>
+            <a:off x="11073384" y="4892040"/>
             <a:ext cx="438912" cy="310896"/>
           </a:xfrm>
           <a:prstGeom prst="rect">
@@ -44837,13 +45444,13 @@
       </p:sp>
       <p:sp>
         <p:nvSpPr>
-          <p:cNvPr id="122" name="box "/>
+          <p:cNvPr id="129" name="box "/>
           <p:cNvSpPr/>
           <p:nvPr/>
         </p:nvSpPr>
         <p:spPr>
           <a:xfrm>
-            <a:off x="6172200" y="4846320"/>
+            <a:off x="6172200" y="5303520"/>
             <a:ext cx="5440680" cy="402336"/>
           </a:xfrm>
           <a:prstGeom prst="roundRect">
@@ -44864,13 +45471,13 @@
       </p:sp>
       <p:sp>
         <p:nvSpPr>
-          <p:cNvPr id="123" name="Text 121"/>
-          <p:cNvSpPr txBox="1"/>
-          <p:nvPr/>
-        </p:nvSpPr>
-        <p:spPr>
-          <a:xfrm>
-            <a:off x="6245352" y="4846320"/>
+          <p:cNvPr id="130" name="Text 128"/>
+          <p:cNvSpPr txBox="1"/>
+          <p:nvPr/>
+        </p:nvSpPr>
+        <p:spPr>
+          <a:xfrm>
+            <a:off x="6245352" y="5303520"/>
             <a:ext cx="5294376" cy="402336"/>
           </a:xfrm>
           <a:prstGeom prst="rect">
@@ -44892,13 +45499,13 @@
       </p:sp>
       <p:sp>
         <p:nvSpPr>
-          <p:cNvPr id="124" name="from slide 8"/>
+          <p:cNvPr id="131" name="from slide 8"/>
           <p:cNvSpPr/>
           <p:nvPr/>
         </p:nvSpPr>
         <p:spPr>
           <a:xfrm>
-            <a:off x="6245352" y="4901184"/>
+            <a:off x="6245352" y="5358384"/>
             <a:ext cx="777240" cy="292608"/>
           </a:xfrm>
           <a:prstGeom prst="roundRect">
@@ -44919,13 +45526,13 @@
       </p:sp>
       <p:sp>
         <p:nvSpPr>
-          <p:cNvPr id="125" name="Text 123"/>
-          <p:cNvSpPr txBox="1"/>
-          <p:nvPr/>
-        </p:nvSpPr>
-        <p:spPr>
-          <a:xfrm>
-            <a:off x="6245352" y="4901184"/>
+          <p:cNvPr id="132" name="Text 130"/>
+          <p:cNvSpPr txBox="1"/>
+          <p:nvPr/>
+        </p:nvSpPr>
+        <p:spPr>
+          <a:xfrm>
+            <a:off x="6245352" y="5358384"/>
             <a:ext cx="777240" cy="292608"/>
           </a:xfrm>
           <a:prstGeom prst="rect">
@@ -44955,13 +45562,13 @@
       </p:sp>
       <p:sp>
         <p:nvSpPr>
-          <p:cNvPr id="126" name="Text 124"/>
-          <p:cNvSpPr txBox="1"/>
-          <p:nvPr/>
-        </p:nvSpPr>
-        <p:spPr>
-          <a:xfrm>
-            <a:off x="7132320" y="4846320"/>
+          <p:cNvPr id="133" name="Text 131"/>
+          <p:cNvSpPr txBox="1"/>
+          <p:nvPr/>
+        </p:nvSpPr>
+        <p:spPr>
+          <a:xfrm>
+            <a:off x="7132320" y="5303520"/>
             <a:ext cx="3886200" cy="402336"/>
           </a:xfrm>
           <a:prstGeom prst="rect">
@@ -44991,13 +45598,13 @@
       </p:sp>
       <p:sp>
         <p:nvSpPr>
-          <p:cNvPr id="127" name="page small"/>
+          <p:cNvPr id="134" name="page small"/>
           <p:cNvSpPr/>
           <p:nvPr/>
         </p:nvSpPr>
         <p:spPr>
           <a:xfrm>
-            <a:off x="11073384" y="4892040"/>
+            <a:off x="11073384" y="5349240"/>
             <a:ext cx="438912" cy="310896"/>
           </a:xfrm>
           <a:prstGeom prst="roundRect">
@@ -45018,13 +45625,13 @@
       </p:sp>
       <p:sp>
         <p:nvSpPr>
-          <p:cNvPr id="128" name="Text 126"/>
-          <p:cNvSpPr txBox="1"/>
-          <p:nvPr/>
-        </p:nvSpPr>
-        <p:spPr>
-          <a:xfrm>
-            <a:off x="11073384" y="4892040"/>
+          <p:cNvPr id="135" name="Text 133"/>
+          <p:cNvSpPr txBox="1"/>
+          <p:nvPr/>
+        </p:nvSpPr>
+        <p:spPr>
+          <a:xfrm>
+            <a:off x="11073384" y="5349240"/>
             <a:ext cx="438912" cy="310896"/>
           </a:xfrm>
           <a:prstGeom prst="rect">
@@ -45054,7 +45661,7 @@
       </p:sp>
       <p:sp>
         <p:nvSpPr>
-          <p:cNvPr id="129" name="Text 127"/>
+          <p:cNvPr id="136" name="Text 134"/>
           <p:cNvSpPr txBox="1"/>
           <p:nvPr/>
         </p:nvSpPr>

--- a/Proposal_Team5.pptx
+++ b/Proposal_Team5.pptx
@@ -136,7 +136,7 @@
   <p:extLst>
     <p:ext uri="{521415D9-36F7-43E2-AB2F-B90AF26B5E84}">
       <p14:sectionLst xmlns:p14="http://schemas.microsoft.com/office/powerpoint/2010/main">
-        <p14:section name="Talk" id="{fa5ad9b4-e3ce-f2c7-9a40-edc9bba8bfe2}">
+        <p14:section name="Talk" id="{446467f7-c4c9-b2e3-15b8-2cc65cd6b02b}">
           <p14:sldIdLst>
             <p14:sldId id="256"/>
             <p14:sldId id="257"/>
@@ -149,7 +149,7 @@
             <p14:sldId id="264"/>
           </p14:sldIdLst>
         </p14:section>
-        <p14:section name="Extra pages" id="{fe6609a3-50b5-5813-48e6-623e1a624650}">
+        <p14:section name="Extra pages" id="{5931e1d7-a719-afa7-7cef-69c0c54d2f01}">
           <p14:sldIdLst>
             <p14:sldId id="265"/>
             <p14:sldId id="266"/>
@@ -3950,7 +3950,26 @@
           <a:p>
             <a:r>
               <a:rPr lang="en-US" dirty="0"/>
-              <a:t>(10초) 감사합니다. 질문 받겠습니다. 예상 질문마다 보충 슬라이드를 준비했으니, 번호를 누르면 바로 넘어갑니다.</a:t>
+              <a:t>(5초) 감사합니다. 질문 받겠습니다.
+[발표자용] 예상 질문 → 보충 슬라이드 번호 (슬라이드 쇼에서 번호를 누르고 Enter):
+10: Why these problems? How do they differ? (slide 2)
+11: Do the findings cover every kind? (slide 2)
+12: How hard are the problems? (slide 2)
+13: Why does helper code change the answer? (slide 4)
+14: What exactly is the hint? Isn't it the answer? (slide 5)
+15: Can retrieval (RAG) find the hint? (slide 5)
+16: Why can thinking make it worse? (slide 5)
+17: What if a wrong program passes the check? (slide 6)
+18: Is there always a free check? (slide 6)
+19: Who writes the hint? (slide 7)
+20: Is 'think on the hardest' a weak baseline? (slide 7)
+29: What if the same problem repeats? (slide 7)
+11: Why no hint for contest problems? (slide 7)
+28: Where does the recipe stop? (slide 7)
+21, 22, 23: What is new vs PAL and cascades? (slide 8)
+24: Why not majority voting? (slide 8)
+25, 30: Is the comparison fair? (slide 8)
+26: Does it hold for smaller models? (slide 8)</a:t>
             </a:r>
             <a:endParaRPr lang="en-US" dirty="0"/>
           </a:p>
@@ -41500,4243 +41519,83 @@
         </p:nvSpPr>
         <p:spPr>
           <a:xfrm>
-            <a:off x="548640" y="274320"/>
-            <a:ext cx="11064240" cy="914400"/>
-          </a:xfrm>
-          <a:prstGeom prst="rect">
-            <a:avLst/>
-          </a:prstGeom>
-          <a:noFill/>
-          <a:ln/>
-        </p:spPr>
-        <p:txBody>
-          <a:bodyPr wrap="square" rtlCol="0" anchor="ctr"/>
-          <a:lstStyle/>
-          <a:p>
-            <a:pPr algn="l" indent="0" marL="0">
-              <a:buNone/>
-            </a:pPr>
-            <a:r>
-              <a:rPr lang="en-US" sz="3600" dirty="0">
+            <a:off x="1527048" y="1280160"/>
+            <a:ext cx="9144000" cy="2194560"/>
+          </a:xfrm>
+          <a:prstGeom prst="rect">
+            <a:avLst/>
+          </a:prstGeom>
+          <a:noFill/>
+          <a:ln/>
+        </p:spPr>
+        <p:txBody>
+          <a:bodyPr wrap="square" rtlCol="0" anchor="b"/>
+          <a:lstStyle/>
+          <a:p>
+            <a:pPr algn="ctr" indent="0" marL="0">
+              <a:buNone/>
+            </a:pPr>
+            <a:r>
+              <a:rPr lang="en-US" sz="5400" dirty="0">
                 <a:solidFill>
                   <a:schemeClr val="tx1"/>
                 </a:solidFill>
               </a:rPr>
-              <a:t>Thank you: questions?</a:t>
-            </a:r>
-            <a:endParaRPr lang="en-US" sz="3600" dirty="0"/>
-          </a:p>
-        </p:txBody>
-      </p:sp>
-      <p:sp>
-        <p:nvSpPr>
-          <p:cNvPr id="3" name="Text 1"/>
-          <p:cNvSpPr txBox="1"/>
-          <p:nvPr/>
-        </p:nvSpPr>
-        <p:spPr>
-          <a:xfrm>
-            <a:off x="548640" y="1188720"/>
-            <a:ext cx="11064240" cy="411480"/>
-          </a:xfrm>
-          <a:prstGeom prst="rect">
-            <a:avLst/>
-          </a:prstGeom>
-          <a:noFill/>
-          <a:ln/>
-        </p:spPr>
-        <p:txBody>
-          <a:bodyPr wrap="square" lIns="0" tIns="0" rIns="0" bIns="0" rtlCol="0" anchor="ctr"/>
-          <a:lstStyle/>
-          <a:p>
-            <a:pPr indent="0" marL="0">
-              <a:buNone/>
-            </a:pPr>
-            <a:r>
-              <a:rPr lang="en-US" sz="1600" b="1" dirty="0">
-                <a:solidFill>
-                  <a:srgbClr val="4472C4"/>
-                </a:solidFill>
-              </a:rPr>
-              <a:t>Expected questions, by the talk slide that raises them → extra page (type the number and press Enter)</a:t>
-            </a:r>
-            <a:endParaRPr lang="en-US" sz="1600" dirty="0"/>
-          </a:p>
-        </p:txBody>
-      </p:sp>
-      <p:sp>
-        <p:nvSpPr>
-          <p:cNvPr id="4" name="box "/>
+              <a:t>Thank you</a:t>
+            </a:r>
+            <a:endParaRPr lang="en-US" sz="5400" dirty="0"/>
+          </a:p>
+        </p:txBody>
+      </p:sp>
+      <p:sp>
+        <p:nvSpPr>
+          <p:cNvPr id="3" name="Text 0"/>
           <p:cNvSpPr/>
-          <p:nvPr/>
-        </p:nvSpPr>
-        <p:spPr>
-          <a:xfrm>
-            <a:off x="548640" y="1645920"/>
-            <a:ext cx="5440680" cy="402336"/>
-          </a:xfrm>
-          <a:prstGeom prst="roundRect">
-            <a:avLst>
-              <a:gd name="adj" fmla="val 13636"/>
-            </a:avLst>
-          </a:prstGeom>
-          <a:solidFill>
-            <a:srgbClr val="F2F2F2"/>
-          </a:solidFill>
-          <a:ln w="9525">
-            <a:solidFill>
-              <a:srgbClr val="BFBFBF"/>
-            </a:solidFill>
-            <a:prstDash val="solid"/>
-          </a:ln>
-        </p:spPr>
-      </p:sp>
-      <p:sp>
-        <p:nvSpPr>
-          <p:cNvPr id="5" name="Text 3"/>
-          <p:cNvSpPr txBox="1"/>
-          <p:nvPr/>
-        </p:nvSpPr>
-        <p:spPr>
-          <a:xfrm>
-            <a:off x="621792" y="1645920"/>
-            <a:ext cx="5294376" cy="402336"/>
-          </a:xfrm>
-          <a:prstGeom prst="rect">
-            <a:avLst/>
-          </a:prstGeom>
-          <a:noFill/>
-          <a:ln/>
-        </p:spPr>
-        <p:txBody>
-          <a:bodyPr wrap="square" lIns="0" tIns="0" rIns="0" bIns="0" rtlCol="0" anchor="ctr"/>
+          <p:nvPr>
+            <p:ph idx="101" type="body" hasCustomPrompt="1"/>
+          </p:nvPr>
+        </p:nvSpPr>
+        <p:spPr>
+          <a:xfrm>
+            <a:off x="1527048" y="3657600"/>
+            <a:ext cx="9144000" cy="1554480"/>
+          </a:xfrm>
+          <a:prstGeom prst="rect">
+            <a:avLst/>
+          </a:prstGeom>
+          <a:noFill/>
+          <a:ln/>
+        </p:spPr>
+        <p:txBody>
+          <a:bodyPr wrap="square" rtlCol="0" anchor="t"/>
           <a:lstStyle/>
           <a:p>
             <a:pPr algn="ctr" indent="0" marL="0">
               <a:buNone/>
             </a:pPr>
-            <a:endParaRPr lang="en-US" sz="1500" dirty="0"/>
-          </a:p>
-        </p:txBody>
-      </p:sp>
-      <p:sp>
-        <p:nvSpPr>
-          <p:cNvPr id="6" name="from slide 2"/>
-          <p:cNvSpPr/>
-          <p:nvPr/>
-        </p:nvSpPr>
-        <p:spPr>
-          <a:xfrm>
-            <a:off x="621792" y="1700784"/>
-            <a:ext cx="777240" cy="292608"/>
-          </a:xfrm>
-          <a:prstGeom prst="roundRect">
-            <a:avLst>
-              <a:gd name="adj" fmla="val 18750"/>
-            </a:avLst>
-          </a:prstGeom>
-          <a:solidFill>
-            <a:srgbClr val="D9D9D9"/>
-          </a:solidFill>
-          <a:ln w="12700">
-            <a:solidFill>
-              <a:srgbClr val="D9D9D9"/>
-            </a:solidFill>
-            <a:prstDash val="solid"/>
-          </a:ln>
-        </p:spPr>
-      </p:sp>
-      <p:sp>
-        <p:nvSpPr>
-          <p:cNvPr id="7" name="Text 5"/>
-          <p:cNvSpPr txBox="1"/>
-          <p:nvPr/>
-        </p:nvSpPr>
-        <p:spPr>
-          <a:xfrm>
-            <a:off x="621792" y="1700784"/>
-            <a:ext cx="777240" cy="292608"/>
-          </a:xfrm>
-          <a:prstGeom prst="rect">
-            <a:avLst/>
-          </a:prstGeom>
-          <a:noFill/>
-          <a:ln/>
-        </p:spPr>
-        <p:txBody>
-          <a:bodyPr wrap="square" lIns="0" tIns="0" rIns="0" bIns="0" rtlCol="0" anchor="ctr"/>
-          <a:lstStyle/>
+            <a:r>
+              <a:rPr lang="en-US" sz="2200" dirty="0">
+                <a:solidFill>
+                  <a:schemeClr val="tx1"/>
+                </a:solidFill>
+              </a:rPr>
+              <a:t>Questions?</a:t>
+            </a:r>
+            <a:endParaRPr lang="en-US" sz="2200" dirty="0"/>
+          </a:p>
           <a:p>
             <a:pPr algn="ctr" indent="0" marL="0">
               <a:buNone/>
             </a:pPr>
             <a:r>
-              <a:rPr lang="en-US" sz="1400" dirty="0">
-                <a:solidFill>
-                  <a:srgbClr val="404040"/>
-                </a:solidFill>
-              </a:rPr>
-              <a:t>slide 2</a:t>
-            </a:r>
-            <a:endParaRPr lang="en-US" sz="1400" dirty="0"/>
-          </a:p>
-        </p:txBody>
-      </p:sp>
-      <p:sp>
-        <p:nvSpPr>
-          <p:cNvPr id="8" name="Text 6"/>
-          <p:cNvSpPr txBox="1"/>
-          <p:nvPr/>
-        </p:nvSpPr>
-        <p:spPr>
-          <a:xfrm>
-            <a:off x="1508760" y="1645920"/>
-            <a:ext cx="3886200" cy="402336"/>
-          </a:xfrm>
-          <a:prstGeom prst="rect">
-            <a:avLst/>
-          </a:prstGeom>
-          <a:noFill/>
-          <a:ln/>
-        </p:spPr>
-        <p:txBody>
-          <a:bodyPr wrap="square" lIns="0" tIns="0" rIns="0" bIns="0" rtlCol="0" anchor="ctr"/>
-          <a:lstStyle/>
-          <a:p>
-            <a:pPr indent="0" marL="0">
-              <a:buNone/>
-            </a:pPr>
-            <a:r>
-              <a:rPr lang="en-US" sz="1400" dirty="0">
-                <a:solidFill>
-                  <a:schemeClr val="tx1"/>
-                </a:solidFill>
-              </a:rPr>
-              <a:t>Why these problems? How do they differ?</a:t>
-            </a:r>
-            <a:endParaRPr lang="en-US" sz="1400" dirty="0"/>
-          </a:p>
-        </p:txBody>
-      </p:sp>
-      <p:sp>
-        <p:nvSpPr>
-          <p:cNvPr id="9" name="page why"/>
-          <p:cNvSpPr/>
-          <p:nvPr/>
-        </p:nvSpPr>
-        <p:spPr>
-          <a:xfrm>
-            <a:off x="5449824" y="1691640"/>
-            <a:ext cx="438912" cy="310896"/>
-          </a:xfrm>
-          <a:prstGeom prst="roundRect">
-            <a:avLst>
-              <a:gd name="adj" fmla="val 23529"/>
-            </a:avLst>
-          </a:prstGeom>
-          <a:solidFill>
-            <a:srgbClr val="4472C4"/>
-          </a:solidFill>
-          <a:ln w="12700">
-            <a:solidFill>
-              <a:srgbClr val="4472C4"/>
-            </a:solidFill>
-            <a:prstDash val="solid"/>
-          </a:ln>
-        </p:spPr>
-      </p:sp>
-      <p:sp>
-        <p:nvSpPr>
-          <p:cNvPr id="10" name="Text 8"/>
-          <p:cNvSpPr txBox="1"/>
-          <p:nvPr/>
-        </p:nvSpPr>
-        <p:spPr>
-          <a:xfrm>
-            <a:off x="5449824" y="1691640"/>
-            <a:ext cx="438912" cy="310896"/>
-          </a:xfrm>
-          <a:prstGeom prst="rect">
-            <a:avLst/>
-          </a:prstGeom>
-          <a:noFill/>
-          <a:ln/>
-        </p:spPr>
-        <p:txBody>
-          <a:bodyPr wrap="square" lIns="0" tIns="0" rIns="0" bIns="0" rtlCol="0" anchor="ctr"/>
-          <a:lstStyle/>
-          <a:p>
-            <a:pPr algn="ctr" indent="0" marL="0">
-              <a:buNone/>
-            </a:pPr>
-            <a:r>
-              <a:rPr lang="en-US" sz="1400" b="1" dirty="0">
-                <a:solidFill>
-                  <a:srgbClr val="FFFFFF"/>
-                </a:solidFill>
-              </a:rPr>
-              <a:t>10</a:t>
-            </a:r>
-            <a:endParaRPr lang="en-US" sz="1400" dirty="0"/>
-          </a:p>
-        </p:txBody>
-      </p:sp>
-      <p:sp>
-        <p:nvSpPr>
-          <p:cNvPr id="11" name="box "/>
-          <p:cNvSpPr/>
-          <p:nvPr/>
-        </p:nvSpPr>
-        <p:spPr>
-          <a:xfrm>
-            <a:off x="548640" y="2103120"/>
-            <a:ext cx="5440680" cy="402336"/>
-          </a:xfrm>
-          <a:prstGeom prst="roundRect">
-            <a:avLst>
-              <a:gd name="adj" fmla="val 13636"/>
-            </a:avLst>
-          </a:prstGeom>
-          <a:solidFill>
-            <a:srgbClr val="F2F2F2"/>
-          </a:solidFill>
-          <a:ln w="9525">
-            <a:solidFill>
-              <a:srgbClr val="BFBFBF"/>
-            </a:solidFill>
-            <a:prstDash val="solid"/>
-          </a:ln>
-        </p:spPr>
-      </p:sp>
-      <p:sp>
-        <p:nvSpPr>
-          <p:cNvPr id="12" name="Text 10"/>
-          <p:cNvSpPr txBox="1"/>
-          <p:nvPr/>
-        </p:nvSpPr>
-        <p:spPr>
-          <a:xfrm>
-            <a:off x="621792" y="2103120"/>
-            <a:ext cx="5294376" cy="402336"/>
-          </a:xfrm>
-          <a:prstGeom prst="rect">
-            <a:avLst/>
-          </a:prstGeom>
-          <a:noFill/>
-          <a:ln/>
-        </p:spPr>
-        <p:txBody>
-          <a:bodyPr wrap="square" lIns="0" tIns="0" rIns="0" bIns="0" rtlCol="0" anchor="ctr"/>
-          <a:lstStyle/>
-          <a:p>
-            <a:pPr algn="ctr" indent="0" marL="0">
-              <a:buNone/>
-            </a:pPr>
-            <a:endParaRPr lang="en-US" sz="1500" dirty="0"/>
-          </a:p>
-        </p:txBody>
-      </p:sp>
-      <p:sp>
-        <p:nvSpPr>
-          <p:cNvPr id="13" name="from slide 2"/>
-          <p:cNvSpPr/>
-          <p:nvPr/>
-        </p:nvSpPr>
-        <p:spPr>
-          <a:xfrm>
-            <a:off x="621792" y="2157984"/>
-            <a:ext cx="777240" cy="292608"/>
-          </a:xfrm>
-          <a:prstGeom prst="roundRect">
-            <a:avLst>
-              <a:gd name="adj" fmla="val 18750"/>
-            </a:avLst>
-          </a:prstGeom>
-          <a:solidFill>
-            <a:srgbClr val="D9D9D9"/>
-          </a:solidFill>
-          <a:ln w="12700">
-            <a:solidFill>
-              <a:srgbClr val="D9D9D9"/>
-            </a:solidFill>
-            <a:prstDash val="solid"/>
-          </a:ln>
-        </p:spPr>
-      </p:sp>
-      <p:sp>
-        <p:nvSpPr>
-          <p:cNvPr id="14" name="Text 12"/>
-          <p:cNvSpPr txBox="1"/>
-          <p:nvPr/>
-        </p:nvSpPr>
-        <p:spPr>
-          <a:xfrm>
-            <a:off x="621792" y="2157984"/>
-            <a:ext cx="777240" cy="292608"/>
-          </a:xfrm>
-          <a:prstGeom prst="rect">
-            <a:avLst/>
-          </a:prstGeom>
-          <a:noFill/>
-          <a:ln/>
-        </p:spPr>
-        <p:txBody>
-          <a:bodyPr wrap="square" lIns="0" tIns="0" rIns="0" bIns="0" rtlCol="0" anchor="ctr"/>
-          <a:lstStyle/>
-          <a:p>
-            <a:pPr algn="ctr" indent="0" marL="0">
-              <a:buNone/>
-            </a:pPr>
-            <a:r>
-              <a:rPr lang="en-US" sz="1400" dirty="0">
-                <a:solidFill>
-                  <a:srgbClr val="404040"/>
-                </a:solidFill>
-              </a:rPr>
-              <a:t>slide 2</a:t>
-            </a:r>
-            <a:endParaRPr lang="en-US" sz="1400" dirty="0"/>
-          </a:p>
-        </p:txBody>
-      </p:sp>
-      <p:sp>
-        <p:nvSpPr>
-          <p:cNvPr id="15" name="Text 13"/>
-          <p:cNvSpPr txBox="1"/>
-          <p:nvPr/>
-        </p:nvSpPr>
-        <p:spPr>
-          <a:xfrm>
-            <a:off x="1508760" y="2103120"/>
-            <a:ext cx="3886200" cy="402336"/>
-          </a:xfrm>
-          <a:prstGeom prst="rect">
-            <a:avLst/>
-          </a:prstGeom>
-          <a:noFill/>
-          <a:ln/>
-        </p:spPr>
-        <p:txBody>
-          <a:bodyPr wrap="square" lIns="0" tIns="0" rIns="0" bIns="0" rtlCol="0" anchor="ctr"/>
-          <a:lstStyle/>
-          <a:p>
-            <a:pPr indent="0" marL="0">
-              <a:buNone/>
-            </a:pPr>
-            <a:r>
-              <a:rPr lang="en-US" sz="1400" dirty="0">
-                <a:solidFill>
-                  <a:schemeClr val="tx1"/>
-                </a:solidFill>
-              </a:rPr>
-              <a:t>Do the findings cover every kind?</a:t>
-            </a:r>
-            <a:endParaRPr lang="en-US" sz="1400" dirty="0"/>
-          </a:p>
-        </p:txBody>
-      </p:sp>
-      <p:sp>
-        <p:nvSpPr>
-          <p:cNvPr id="16" name="page coverage"/>
-          <p:cNvSpPr/>
-          <p:nvPr/>
-        </p:nvSpPr>
-        <p:spPr>
-          <a:xfrm>
-            <a:off x="5449824" y="2148840"/>
-            <a:ext cx="438912" cy="310896"/>
-          </a:xfrm>
-          <a:prstGeom prst="roundRect">
-            <a:avLst>
-              <a:gd name="adj" fmla="val 23529"/>
-            </a:avLst>
-          </a:prstGeom>
-          <a:solidFill>
-            <a:srgbClr val="4472C4"/>
-          </a:solidFill>
-          <a:ln w="12700">
-            <a:solidFill>
-              <a:srgbClr val="4472C4"/>
-            </a:solidFill>
-            <a:prstDash val="solid"/>
-          </a:ln>
-        </p:spPr>
-      </p:sp>
-      <p:sp>
-        <p:nvSpPr>
-          <p:cNvPr id="17" name="Text 15"/>
-          <p:cNvSpPr txBox="1"/>
-          <p:nvPr/>
-        </p:nvSpPr>
-        <p:spPr>
-          <a:xfrm>
-            <a:off x="5449824" y="2148840"/>
-            <a:ext cx="438912" cy="310896"/>
-          </a:xfrm>
-          <a:prstGeom prst="rect">
-            <a:avLst/>
-          </a:prstGeom>
-          <a:noFill/>
-          <a:ln/>
-        </p:spPr>
-        <p:txBody>
-          <a:bodyPr wrap="square" lIns="0" tIns="0" rIns="0" bIns="0" rtlCol="0" anchor="ctr"/>
-          <a:lstStyle/>
-          <a:p>
-            <a:pPr algn="ctr" indent="0" marL="0">
-              <a:buNone/>
-            </a:pPr>
-            <a:r>
-              <a:rPr lang="en-US" sz="1400" b="1" dirty="0">
-                <a:solidFill>
-                  <a:srgbClr val="FFFFFF"/>
-                </a:solidFill>
-              </a:rPr>
-              <a:t>11</a:t>
-            </a:r>
-            <a:endParaRPr lang="en-US" sz="1400" dirty="0"/>
-          </a:p>
-        </p:txBody>
-      </p:sp>
-      <p:sp>
-        <p:nvSpPr>
-          <p:cNvPr id="18" name="box "/>
-          <p:cNvSpPr/>
-          <p:nvPr/>
-        </p:nvSpPr>
-        <p:spPr>
-          <a:xfrm>
-            <a:off x="548640" y="2560320"/>
-            <a:ext cx="5440680" cy="402336"/>
-          </a:xfrm>
-          <a:prstGeom prst="roundRect">
-            <a:avLst>
-              <a:gd name="adj" fmla="val 13636"/>
-            </a:avLst>
-          </a:prstGeom>
-          <a:solidFill>
-            <a:srgbClr val="F2F2F2"/>
-          </a:solidFill>
-          <a:ln w="9525">
-            <a:solidFill>
-              <a:srgbClr val="BFBFBF"/>
-            </a:solidFill>
-            <a:prstDash val="solid"/>
-          </a:ln>
-        </p:spPr>
-      </p:sp>
-      <p:sp>
-        <p:nvSpPr>
-          <p:cNvPr id="19" name="Text 17"/>
-          <p:cNvSpPr txBox="1"/>
-          <p:nvPr/>
-        </p:nvSpPr>
-        <p:spPr>
-          <a:xfrm>
-            <a:off x="621792" y="2560320"/>
-            <a:ext cx="5294376" cy="402336"/>
-          </a:xfrm>
-          <a:prstGeom prst="rect">
-            <a:avLst/>
-          </a:prstGeom>
-          <a:noFill/>
-          <a:ln/>
-        </p:spPr>
-        <p:txBody>
-          <a:bodyPr wrap="square" lIns="0" tIns="0" rIns="0" bIns="0" rtlCol="0" anchor="ctr"/>
-          <a:lstStyle/>
-          <a:p>
-            <a:pPr algn="ctr" indent="0" marL="0">
-              <a:buNone/>
-            </a:pPr>
-            <a:endParaRPr lang="en-US" sz="1500" dirty="0"/>
-          </a:p>
-        </p:txBody>
-      </p:sp>
-      <p:sp>
-        <p:nvSpPr>
-          <p:cNvPr id="20" name="from slide 2"/>
-          <p:cNvSpPr/>
-          <p:nvPr/>
-        </p:nvSpPr>
-        <p:spPr>
-          <a:xfrm>
-            <a:off x="621792" y="2615184"/>
-            <a:ext cx="777240" cy="292608"/>
-          </a:xfrm>
-          <a:prstGeom prst="roundRect">
-            <a:avLst>
-              <a:gd name="adj" fmla="val 18750"/>
-            </a:avLst>
-          </a:prstGeom>
-          <a:solidFill>
-            <a:srgbClr val="D9D9D9"/>
-          </a:solidFill>
-          <a:ln w="12700">
-            <a:solidFill>
-              <a:srgbClr val="D9D9D9"/>
-            </a:solidFill>
-            <a:prstDash val="solid"/>
-          </a:ln>
-        </p:spPr>
-      </p:sp>
-      <p:sp>
-        <p:nvSpPr>
-          <p:cNvPr id="21" name="Text 19"/>
-          <p:cNvSpPr txBox="1"/>
-          <p:nvPr/>
-        </p:nvSpPr>
-        <p:spPr>
-          <a:xfrm>
-            <a:off x="621792" y="2615184"/>
-            <a:ext cx="777240" cy="292608"/>
-          </a:xfrm>
-          <a:prstGeom prst="rect">
-            <a:avLst/>
-          </a:prstGeom>
-          <a:noFill/>
-          <a:ln/>
-        </p:spPr>
-        <p:txBody>
-          <a:bodyPr wrap="square" lIns="0" tIns="0" rIns="0" bIns="0" rtlCol="0" anchor="ctr"/>
-          <a:lstStyle/>
-          <a:p>
-            <a:pPr algn="ctr" indent="0" marL="0">
-              <a:buNone/>
-            </a:pPr>
-            <a:r>
-              <a:rPr lang="en-US" sz="1400" dirty="0">
-                <a:solidFill>
-                  <a:srgbClr val="404040"/>
-                </a:solidFill>
-              </a:rPr>
-              <a:t>slide 2</a:t>
-            </a:r>
-            <a:endParaRPr lang="en-US" sz="1400" dirty="0"/>
-          </a:p>
-        </p:txBody>
-      </p:sp>
-      <p:sp>
-        <p:nvSpPr>
-          <p:cNvPr id="22" name="Text 20"/>
-          <p:cNvSpPr txBox="1"/>
-          <p:nvPr/>
-        </p:nvSpPr>
-        <p:spPr>
-          <a:xfrm>
-            <a:off x="1508760" y="2560320"/>
-            <a:ext cx="3886200" cy="402336"/>
-          </a:xfrm>
-          <a:prstGeom prst="rect">
-            <a:avLst/>
-          </a:prstGeom>
-          <a:noFill/>
-          <a:ln/>
-        </p:spPr>
-        <p:txBody>
-          <a:bodyPr wrap="square" lIns="0" tIns="0" rIns="0" bIns="0" rtlCol="0" anchor="ctr"/>
-          <a:lstStyle/>
-          <a:p>
-            <a:pPr indent="0" marL="0">
-              <a:buNone/>
-            </a:pPr>
-            <a:r>
-              <a:rPr lang="en-US" sz="1400" dirty="0">
-                <a:solidFill>
-                  <a:schemeClr val="tx1"/>
-                </a:solidFill>
-              </a:rPr>
-              <a:t>How hard are the problems?</a:t>
-            </a:r>
-            <a:endParaRPr lang="en-US" sz="1400" dirty="0"/>
-          </a:p>
-        </p:txBody>
-      </p:sp>
-      <p:sp>
-        <p:nvSpPr>
-          <p:cNvPr id="23" name="page kinds"/>
-          <p:cNvSpPr/>
-          <p:nvPr/>
-        </p:nvSpPr>
-        <p:spPr>
-          <a:xfrm>
-            <a:off x="5449824" y="2606040"/>
-            <a:ext cx="438912" cy="310896"/>
-          </a:xfrm>
-          <a:prstGeom prst="roundRect">
-            <a:avLst>
-              <a:gd name="adj" fmla="val 23529"/>
-            </a:avLst>
-          </a:prstGeom>
-          <a:solidFill>
-            <a:srgbClr val="4472C4"/>
-          </a:solidFill>
-          <a:ln w="12700">
-            <a:solidFill>
-              <a:srgbClr val="4472C4"/>
-            </a:solidFill>
-            <a:prstDash val="solid"/>
-          </a:ln>
-        </p:spPr>
-      </p:sp>
-      <p:sp>
-        <p:nvSpPr>
-          <p:cNvPr id="24" name="Text 22"/>
-          <p:cNvSpPr txBox="1"/>
-          <p:nvPr/>
-        </p:nvSpPr>
-        <p:spPr>
-          <a:xfrm>
-            <a:off x="5449824" y="2606040"/>
-            <a:ext cx="438912" cy="310896"/>
-          </a:xfrm>
-          <a:prstGeom prst="rect">
-            <a:avLst/>
-          </a:prstGeom>
-          <a:noFill/>
-          <a:ln/>
-        </p:spPr>
-        <p:txBody>
-          <a:bodyPr wrap="square" lIns="0" tIns="0" rIns="0" bIns="0" rtlCol="0" anchor="ctr"/>
-          <a:lstStyle/>
-          <a:p>
-            <a:pPr algn="ctr" indent="0" marL="0">
-              <a:buNone/>
-            </a:pPr>
-            <a:r>
-              <a:rPr lang="en-US" sz="1400" b="1" dirty="0">
-                <a:solidFill>
-                  <a:srgbClr val="FFFFFF"/>
-                </a:solidFill>
-              </a:rPr>
-              <a:t>12</a:t>
-            </a:r>
-            <a:endParaRPr lang="en-US" sz="1400" dirty="0"/>
-          </a:p>
-        </p:txBody>
-      </p:sp>
-      <p:sp>
-        <p:nvSpPr>
-          <p:cNvPr id="25" name="box "/>
-          <p:cNvSpPr/>
-          <p:nvPr/>
-        </p:nvSpPr>
-        <p:spPr>
-          <a:xfrm>
-            <a:off x="548640" y="3017520"/>
-            <a:ext cx="5440680" cy="402336"/>
-          </a:xfrm>
-          <a:prstGeom prst="roundRect">
-            <a:avLst>
-              <a:gd name="adj" fmla="val 13636"/>
-            </a:avLst>
-          </a:prstGeom>
-          <a:solidFill>
-            <a:srgbClr val="F2F2F2"/>
-          </a:solidFill>
-          <a:ln w="9525">
-            <a:solidFill>
-              <a:srgbClr val="BFBFBF"/>
-            </a:solidFill>
-            <a:prstDash val="solid"/>
-          </a:ln>
-        </p:spPr>
-      </p:sp>
-      <p:sp>
-        <p:nvSpPr>
-          <p:cNvPr id="26" name="Text 24"/>
-          <p:cNvSpPr txBox="1"/>
-          <p:nvPr/>
-        </p:nvSpPr>
-        <p:spPr>
-          <a:xfrm>
-            <a:off x="621792" y="3017520"/>
-            <a:ext cx="5294376" cy="402336"/>
-          </a:xfrm>
-          <a:prstGeom prst="rect">
-            <a:avLst/>
-          </a:prstGeom>
-          <a:noFill/>
-          <a:ln/>
-        </p:spPr>
-        <p:txBody>
-          <a:bodyPr wrap="square" lIns="0" tIns="0" rIns="0" bIns="0" rtlCol="0" anchor="ctr"/>
-          <a:lstStyle/>
-          <a:p>
-            <a:pPr algn="ctr" indent="0" marL="0">
-              <a:buNone/>
-            </a:pPr>
-            <a:endParaRPr lang="en-US" sz="1500" dirty="0"/>
-          </a:p>
-        </p:txBody>
-      </p:sp>
-      <p:sp>
-        <p:nvSpPr>
-          <p:cNvPr id="27" name="from slide 4"/>
-          <p:cNvSpPr/>
-          <p:nvPr/>
-        </p:nvSpPr>
-        <p:spPr>
-          <a:xfrm>
-            <a:off x="621792" y="3072384"/>
-            <a:ext cx="777240" cy="292608"/>
-          </a:xfrm>
-          <a:prstGeom prst="roundRect">
-            <a:avLst>
-              <a:gd name="adj" fmla="val 18750"/>
-            </a:avLst>
-          </a:prstGeom>
-          <a:solidFill>
-            <a:srgbClr val="D9D9D9"/>
-          </a:solidFill>
-          <a:ln w="12700">
-            <a:solidFill>
-              <a:srgbClr val="D9D9D9"/>
-            </a:solidFill>
-            <a:prstDash val="solid"/>
-          </a:ln>
-        </p:spPr>
-      </p:sp>
-      <p:sp>
-        <p:nvSpPr>
-          <p:cNvPr id="28" name="Text 26"/>
-          <p:cNvSpPr txBox="1"/>
-          <p:nvPr/>
-        </p:nvSpPr>
-        <p:spPr>
-          <a:xfrm>
-            <a:off x="621792" y="3072384"/>
-            <a:ext cx="777240" cy="292608"/>
-          </a:xfrm>
-          <a:prstGeom prst="rect">
-            <a:avLst/>
-          </a:prstGeom>
-          <a:noFill/>
-          <a:ln/>
-        </p:spPr>
-        <p:txBody>
-          <a:bodyPr wrap="square" lIns="0" tIns="0" rIns="0" bIns="0" rtlCol="0" anchor="ctr"/>
-          <a:lstStyle/>
-          <a:p>
-            <a:pPr algn="ctr" indent="0" marL="0">
-              <a:buNone/>
-            </a:pPr>
-            <a:r>
-              <a:rPr lang="en-US" sz="1400" dirty="0">
-                <a:solidFill>
-                  <a:srgbClr val="404040"/>
-                </a:solidFill>
-              </a:rPr>
-              <a:t>slide 4</a:t>
-            </a:r>
-            <a:endParaRPr lang="en-US" sz="1400" dirty="0"/>
-          </a:p>
-        </p:txBody>
-      </p:sp>
-      <p:sp>
-        <p:nvSpPr>
-          <p:cNvPr id="29" name="Text 27"/>
-          <p:cNvSpPr txBox="1"/>
-          <p:nvPr/>
-        </p:nvSpPr>
-        <p:spPr>
-          <a:xfrm>
-            <a:off x="1508760" y="3017520"/>
-            <a:ext cx="3886200" cy="402336"/>
-          </a:xfrm>
-          <a:prstGeom prst="rect">
-            <a:avLst/>
-          </a:prstGeom>
-          <a:noFill/>
-          <a:ln/>
-        </p:spPr>
-        <p:txBody>
-          <a:bodyPr wrap="square" lIns="0" tIns="0" rIns="0" bIns="0" rtlCol="0" anchor="ctr"/>
-          <a:lstStyle/>
-          <a:p>
-            <a:pPr indent="0" marL="0">
-              <a:buNone/>
-            </a:pPr>
-            <a:r>
-              <a:rPr lang="en-US" sz="1400" dirty="0">
-                <a:solidFill>
-                  <a:schemeClr val="tx1"/>
-                </a:solidFill>
-              </a:rPr>
-              <a:t>Why does helper code change the answer?</a:t>
-            </a:r>
-            <a:endParaRPr lang="en-US" sz="1400" dirty="0"/>
-          </a:p>
-        </p:txBody>
-      </p:sp>
-      <p:sp>
-        <p:nvSpPr>
-          <p:cNvPr id="30" name="page two"/>
-          <p:cNvSpPr/>
-          <p:nvPr/>
-        </p:nvSpPr>
-        <p:spPr>
-          <a:xfrm>
-            <a:off x="5449824" y="3063240"/>
-            <a:ext cx="438912" cy="310896"/>
-          </a:xfrm>
-          <a:prstGeom prst="roundRect">
-            <a:avLst>
-              <a:gd name="adj" fmla="val 23529"/>
-            </a:avLst>
-          </a:prstGeom>
-          <a:solidFill>
-            <a:srgbClr val="4472C4"/>
-          </a:solidFill>
-          <a:ln w="12700">
-            <a:solidFill>
-              <a:srgbClr val="4472C4"/>
-            </a:solidFill>
-            <a:prstDash val="solid"/>
-          </a:ln>
-        </p:spPr>
-      </p:sp>
-      <p:sp>
-        <p:nvSpPr>
-          <p:cNvPr id="31" name="Text 29"/>
-          <p:cNvSpPr txBox="1"/>
-          <p:nvPr/>
-        </p:nvSpPr>
-        <p:spPr>
-          <a:xfrm>
-            <a:off x="5449824" y="3063240"/>
-            <a:ext cx="438912" cy="310896"/>
-          </a:xfrm>
-          <a:prstGeom prst="rect">
-            <a:avLst/>
-          </a:prstGeom>
-          <a:noFill/>
-          <a:ln/>
-        </p:spPr>
-        <p:txBody>
-          <a:bodyPr wrap="square" lIns="0" tIns="0" rIns="0" bIns="0" rtlCol="0" anchor="ctr"/>
-          <a:lstStyle/>
-          <a:p>
-            <a:pPr algn="ctr" indent="0" marL="0">
-              <a:buNone/>
-            </a:pPr>
-            <a:r>
-              <a:rPr lang="en-US" sz="1400" b="1" dirty="0">
-                <a:solidFill>
-                  <a:srgbClr val="FFFFFF"/>
-                </a:solidFill>
-              </a:rPr>
-              <a:t>13</a:t>
-            </a:r>
-            <a:endParaRPr lang="en-US" sz="1400" dirty="0"/>
-          </a:p>
-        </p:txBody>
-      </p:sp>
-      <p:sp>
-        <p:nvSpPr>
-          <p:cNvPr id="32" name="box "/>
-          <p:cNvSpPr/>
-          <p:nvPr/>
-        </p:nvSpPr>
-        <p:spPr>
-          <a:xfrm>
-            <a:off x="548640" y="3474720"/>
-            <a:ext cx="5440680" cy="402336"/>
-          </a:xfrm>
-          <a:prstGeom prst="roundRect">
-            <a:avLst>
-              <a:gd name="adj" fmla="val 13636"/>
-            </a:avLst>
-          </a:prstGeom>
-          <a:solidFill>
-            <a:srgbClr val="F2F2F2"/>
-          </a:solidFill>
-          <a:ln w="9525">
-            <a:solidFill>
-              <a:srgbClr val="BFBFBF"/>
-            </a:solidFill>
-            <a:prstDash val="solid"/>
-          </a:ln>
-        </p:spPr>
-      </p:sp>
-      <p:sp>
-        <p:nvSpPr>
-          <p:cNvPr id="33" name="Text 31"/>
-          <p:cNvSpPr txBox="1"/>
-          <p:nvPr/>
-        </p:nvSpPr>
-        <p:spPr>
-          <a:xfrm>
-            <a:off x="621792" y="3474720"/>
-            <a:ext cx="5294376" cy="402336"/>
-          </a:xfrm>
-          <a:prstGeom prst="rect">
-            <a:avLst/>
-          </a:prstGeom>
-          <a:noFill/>
-          <a:ln/>
-        </p:spPr>
-        <p:txBody>
-          <a:bodyPr wrap="square" lIns="0" tIns="0" rIns="0" bIns="0" rtlCol="0" anchor="ctr"/>
-          <a:lstStyle/>
-          <a:p>
-            <a:pPr algn="ctr" indent="0" marL="0">
-              <a:buNone/>
-            </a:pPr>
-            <a:endParaRPr lang="en-US" sz="1500" dirty="0"/>
-          </a:p>
-        </p:txBody>
-      </p:sp>
-      <p:sp>
-        <p:nvSpPr>
-          <p:cNvPr id="34" name="from slide 5"/>
-          <p:cNvSpPr/>
-          <p:nvPr/>
-        </p:nvSpPr>
-        <p:spPr>
-          <a:xfrm>
-            <a:off x="621792" y="3529584"/>
-            <a:ext cx="777240" cy="292608"/>
-          </a:xfrm>
-          <a:prstGeom prst="roundRect">
-            <a:avLst>
-              <a:gd name="adj" fmla="val 18750"/>
-            </a:avLst>
-          </a:prstGeom>
-          <a:solidFill>
-            <a:srgbClr val="D9D9D9"/>
-          </a:solidFill>
-          <a:ln w="12700">
-            <a:solidFill>
-              <a:srgbClr val="D9D9D9"/>
-            </a:solidFill>
-            <a:prstDash val="solid"/>
-          </a:ln>
-        </p:spPr>
-      </p:sp>
-      <p:sp>
-        <p:nvSpPr>
-          <p:cNvPr id="35" name="Text 33"/>
-          <p:cNvSpPr txBox="1"/>
-          <p:nvPr/>
-        </p:nvSpPr>
-        <p:spPr>
-          <a:xfrm>
-            <a:off x="621792" y="3529584"/>
-            <a:ext cx="777240" cy="292608"/>
-          </a:xfrm>
-          <a:prstGeom prst="rect">
-            <a:avLst/>
-          </a:prstGeom>
-          <a:noFill/>
-          <a:ln/>
-        </p:spPr>
-        <p:txBody>
-          <a:bodyPr wrap="square" lIns="0" tIns="0" rIns="0" bIns="0" rtlCol="0" anchor="ctr"/>
-          <a:lstStyle/>
-          <a:p>
-            <a:pPr algn="ctr" indent="0" marL="0">
-              <a:buNone/>
-            </a:pPr>
-            <a:r>
-              <a:rPr lang="en-US" sz="1400" dirty="0">
-                <a:solidFill>
-                  <a:srgbClr val="404040"/>
-                </a:solidFill>
-              </a:rPr>
-              <a:t>slide 5</a:t>
-            </a:r>
-            <a:endParaRPr lang="en-US" sz="1400" dirty="0"/>
-          </a:p>
-        </p:txBody>
-      </p:sp>
-      <p:sp>
-        <p:nvSpPr>
-          <p:cNvPr id="36" name="Text 34"/>
-          <p:cNvSpPr txBox="1"/>
-          <p:nvPr/>
-        </p:nvSpPr>
-        <p:spPr>
-          <a:xfrm>
-            <a:off x="1508760" y="3474720"/>
-            <a:ext cx="3886200" cy="402336"/>
-          </a:xfrm>
-          <a:prstGeom prst="rect">
-            <a:avLst/>
-          </a:prstGeom>
-          <a:noFill/>
-          <a:ln/>
-        </p:spPr>
-        <p:txBody>
-          <a:bodyPr wrap="square" lIns="0" tIns="0" rIns="0" bIns="0" rtlCol="0" anchor="ctr"/>
-          <a:lstStyle/>
-          <a:p>
-            <a:pPr indent="0" marL="0">
-              <a:buNone/>
-            </a:pPr>
-            <a:r>
-              <a:rPr lang="en-US" sz="1400" dirty="0">
-                <a:solidFill>
-                  <a:schemeClr val="tx1"/>
-                </a:solidFill>
-              </a:rPr>
-              <a:t>What exactly is the hint? Isn't it the answer?</a:t>
-            </a:r>
-            <a:endParaRPr lang="en-US" sz="1400" dirty="0"/>
-          </a:p>
-        </p:txBody>
-      </p:sp>
-      <p:sp>
-        <p:nvSpPr>
-          <p:cNvPr id="37" name="page fact"/>
-          <p:cNvSpPr/>
-          <p:nvPr/>
-        </p:nvSpPr>
-        <p:spPr>
-          <a:xfrm>
-            <a:off x="5449824" y="3520440"/>
-            <a:ext cx="438912" cy="310896"/>
-          </a:xfrm>
-          <a:prstGeom prst="roundRect">
-            <a:avLst>
-              <a:gd name="adj" fmla="val 23529"/>
-            </a:avLst>
-          </a:prstGeom>
-          <a:solidFill>
-            <a:srgbClr val="4472C4"/>
-          </a:solidFill>
-          <a:ln w="12700">
-            <a:solidFill>
-              <a:srgbClr val="4472C4"/>
-            </a:solidFill>
-            <a:prstDash val="solid"/>
-          </a:ln>
-        </p:spPr>
-      </p:sp>
-      <p:sp>
-        <p:nvSpPr>
-          <p:cNvPr id="38" name="Text 36"/>
-          <p:cNvSpPr txBox="1"/>
-          <p:nvPr/>
-        </p:nvSpPr>
-        <p:spPr>
-          <a:xfrm>
-            <a:off x="5449824" y="3520440"/>
-            <a:ext cx="438912" cy="310896"/>
-          </a:xfrm>
-          <a:prstGeom prst="rect">
-            <a:avLst/>
-          </a:prstGeom>
-          <a:noFill/>
-          <a:ln/>
-        </p:spPr>
-        <p:txBody>
-          <a:bodyPr wrap="square" lIns="0" tIns="0" rIns="0" bIns="0" rtlCol="0" anchor="ctr"/>
-          <a:lstStyle/>
-          <a:p>
-            <a:pPr algn="ctr" indent="0" marL="0">
-              <a:buNone/>
-            </a:pPr>
-            <a:r>
-              <a:rPr lang="en-US" sz="1400" b="1" dirty="0">
-                <a:solidFill>
-                  <a:srgbClr val="FFFFFF"/>
-                </a:solidFill>
-              </a:rPr>
-              <a:t>14</a:t>
-            </a:r>
-            <a:endParaRPr lang="en-US" sz="1400" dirty="0"/>
-          </a:p>
-        </p:txBody>
-      </p:sp>
-      <p:sp>
-        <p:nvSpPr>
-          <p:cNvPr id="39" name="box "/>
-          <p:cNvSpPr/>
-          <p:nvPr/>
-        </p:nvSpPr>
-        <p:spPr>
-          <a:xfrm>
-            <a:off x="548640" y="3931920"/>
-            <a:ext cx="5440680" cy="402336"/>
-          </a:xfrm>
-          <a:prstGeom prst="roundRect">
-            <a:avLst>
-              <a:gd name="adj" fmla="val 13636"/>
-            </a:avLst>
-          </a:prstGeom>
-          <a:solidFill>
-            <a:srgbClr val="F2F2F2"/>
-          </a:solidFill>
-          <a:ln w="9525">
-            <a:solidFill>
-              <a:srgbClr val="BFBFBF"/>
-            </a:solidFill>
-            <a:prstDash val="solid"/>
-          </a:ln>
-        </p:spPr>
-      </p:sp>
-      <p:sp>
-        <p:nvSpPr>
-          <p:cNvPr id="40" name="Text 38"/>
-          <p:cNvSpPr txBox="1"/>
-          <p:nvPr/>
-        </p:nvSpPr>
-        <p:spPr>
-          <a:xfrm>
-            <a:off x="621792" y="3931920"/>
-            <a:ext cx="5294376" cy="402336"/>
-          </a:xfrm>
-          <a:prstGeom prst="rect">
-            <a:avLst/>
-          </a:prstGeom>
-          <a:noFill/>
-          <a:ln/>
-        </p:spPr>
-        <p:txBody>
-          <a:bodyPr wrap="square" lIns="0" tIns="0" rIns="0" bIns="0" rtlCol="0" anchor="ctr"/>
-          <a:lstStyle/>
-          <a:p>
-            <a:pPr algn="ctr" indent="0" marL="0">
-              <a:buNone/>
-            </a:pPr>
-            <a:endParaRPr lang="en-US" sz="1500" dirty="0"/>
-          </a:p>
-        </p:txBody>
-      </p:sp>
-      <p:sp>
-        <p:nvSpPr>
-          <p:cNvPr id="41" name="from slide 5"/>
-          <p:cNvSpPr/>
-          <p:nvPr/>
-        </p:nvSpPr>
-        <p:spPr>
-          <a:xfrm>
-            <a:off x="621792" y="3986784"/>
-            <a:ext cx="777240" cy="292608"/>
-          </a:xfrm>
-          <a:prstGeom prst="roundRect">
-            <a:avLst>
-              <a:gd name="adj" fmla="val 18750"/>
-            </a:avLst>
-          </a:prstGeom>
-          <a:solidFill>
-            <a:srgbClr val="D9D9D9"/>
-          </a:solidFill>
-          <a:ln w="12700">
-            <a:solidFill>
-              <a:srgbClr val="D9D9D9"/>
-            </a:solidFill>
-            <a:prstDash val="solid"/>
-          </a:ln>
-        </p:spPr>
-      </p:sp>
-      <p:sp>
-        <p:nvSpPr>
-          <p:cNvPr id="42" name="Text 40"/>
-          <p:cNvSpPr txBox="1"/>
-          <p:nvPr/>
-        </p:nvSpPr>
-        <p:spPr>
-          <a:xfrm>
-            <a:off x="621792" y="3986784"/>
-            <a:ext cx="777240" cy="292608"/>
-          </a:xfrm>
-          <a:prstGeom prst="rect">
-            <a:avLst/>
-          </a:prstGeom>
-          <a:noFill/>
-          <a:ln/>
-        </p:spPr>
-        <p:txBody>
-          <a:bodyPr wrap="square" lIns="0" tIns="0" rIns="0" bIns="0" rtlCol="0" anchor="ctr"/>
-          <a:lstStyle/>
-          <a:p>
-            <a:pPr algn="ctr" indent="0" marL="0">
-              <a:buNone/>
-            </a:pPr>
-            <a:r>
-              <a:rPr lang="en-US" sz="1400" dirty="0">
-                <a:solidFill>
-                  <a:srgbClr val="404040"/>
-                </a:solidFill>
-              </a:rPr>
-              <a:t>slide 5</a:t>
-            </a:r>
-            <a:endParaRPr lang="en-US" sz="1400" dirty="0"/>
-          </a:p>
-        </p:txBody>
-      </p:sp>
-      <p:sp>
-        <p:nvSpPr>
-          <p:cNvPr id="43" name="Text 41"/>
-          <p:cNvSpPr txBox="1"/>
-          <p:nvPr/>
-        </p:nvSpPr>
-        <p:spPr>
-          <a:xfrm>
-            <a:off x="1508760" y="3931920"/>
-            <a:ext cx="3886200" cy="402336"/>
-          </a:xfrm>
-          <a:prstGeom prst="rect">
-            <a:avLst/>
-          </a:prstGeom>
-          <a:noFill/>
-          <a:ln/>
-        </p:spPr>
-        <p:txBody>
-          <a:bodyPr wrap="square" lIns="0" tIns="0" rIns="0" bIns="0" rtlCol="0" anchor="ctr"/>
-          <a:lstStyle/>
-          <a:p>
-            <a:pPr indent="0" marL="0">
-              <a:buNone/>
-            </a:pPr>
-            <a:r>
-              <a:rPr lang="en-US" sz="1400" dirty="0">
-                <a:solidFill>
-                  <a:schemeClr val="tx1"/>
-                </a:solidFill>
-              </a:rPr>
-              <a:t>Can retrieval (RAG) find the hint?</a:t>
-            </a:r>
-            <a:endParaRPr lang="en-US" sz="1400" dirty="0"/>
-          </a:p>
-        </p:txBody>
-      </p:sp>
-      <p:sp>
-        <p:nvSpPr>
-          <p:cNvPr id="44" name="page rag"/>
-          <p:cNvSpPr/>
-          <p:nvPr/>
-        </p:nvSpPr>
-        <p:spPr>
-          <a:xfrm>
-            <a:off x="5449824" y="3977640"/>
-            <a:ext cx="438912" cy="310896"/>
-          </a:xfrm>
-          <a:prstGeom prst="roundRect">
-            <a:avLst>
-              <a:gd name="adj" fmla="val 23529"/>
-            </a:avLst>
-          </a:prstGeom>
-          <a:solidFill>
-            <a:srgbClr val="4472C4"/>
-          </a:solidFill>
-          <a:ln w="12700">
-            <a:solidFill>
-              <a:srgbClr val="4472C4"/>
-            </a:solidFill>
-            <a:prstDash val="solid"/>
-          </a:ln>
-        </p:spPr>
-      </p:sp>
-      <p:sp>
-        <p:nvSpPr>
-          <p:cNvPr id="45" name="Text 43"/>
-          <p:cNvSpPr txBox="1"/>
-          <p:nvPr/>
-        </p:nvSpPr>
-        <p:spPr>
-          <a:xfrm>
-            <a:off x="5449824" y="3977640"/>
-            <a:ext cx="438912" cy="310896"/>
-          </a:xfrm>
-          <a:prstGeom prst="rect">
-            <a:avLst/>
-          </a:prstGeom>
-          <a:noFill/>
-          <a:ln/>
-        </p:spPr>
-        <p:txBody>
-          <a:bodyPr wrap="square" lIns="0" tIns="0" rIns="0" bIns="0" rtlCol="0" anchor="ctr"/>
-          <a:lstStyle/>
-          <a:p>
-            <a:pPr algn="ctr" indent="0" marL="0">
-              <a:buNone/>
-            </a:pPr>
-            <a:r>
-              <a:rPr lang="en-US" sz="1400" b="1" dirty="0">
-                <a:solidFill>
-                  <a:srgbClr val="FFFFFF"/>
-                </a:solidFill>
-              </a:rPr>
-              <a:t>15</a:t>
-            </a:r>
-            <a:endParaRPr lang="en-US" sz="1400" dirty="0"/>
-          </a:p>
-        </p:txBody>
-      </p:sp>
-      <p:sp>
-        <p:nvSpPr>
-          <p:cNvPr id="46" name="box "/>
-          <p:cNvSpPr/>
-          <p:nvPr/>
-        </p:nvSpPr>
-        <p:spPr>
-          <a:xfrm>
-            <a:off x="548640" y="4389120"/>
-            <a:ext cx="5440680" cy="402336"/>
-          </a:xfrm>
-          <a:prstGeom prst="roundRect">
-            <a:avLst>
-              <a:gd name="adj" fmla="val 13636"/>
-            </a:avLst>
-          </a:prstGeom>
-          <a:solidFill>
-            <a:srgbClr val="F2F2F2"/>
-          </a:solidFill>
-          <a:ln w="9525">
-            <a:solidFill>
-              <a:srgbClr val="BFBFBF"/>
-            </a:solidFill>
-            <a:prstDash val="solid"/>
-          </a:ln>
-        </p:spPr>
-      </p:sp>
-      <p:sp>
-        <p:nvSpPr>
-          <p:cNvPr id="47" name="Text 45"/>
-          <p:cNvSpPr txBox="1"/>
-          <p:nvPr/>
-        </p:nvSpPr>
-        <p:spPr>
-          <a:xfrm>
-            <a:off x="621792" y="4389120"/>
-            <a:ext cx="5294376" cy="402336"/>
-          </a:xfrm>
-          <a:prstGeom prst="rect">
-            <a:avLst/>
-          </a:prstGeom>
-          <a:noFill/>
-          <a:ln/>
-        </p:spPr>
-        <p:txBody>
-          <a:bodyPr wrap="square" lIns="0" tIns="0" rIns="0" bIns="0" rtlCol="0" anchor="ctr"/>
-          <a:lstStyle/>
-          <a:p>
-            <a:pPr algn="ctr" indent="0" marL="0">
-              <a:buNone/>
-            </a:pPr>
-            <a:endParaRPr lang="en-US" sz="1500" dirty="0"/>
-          </a:p>
-        </p:txBody>
-      </p:sp>
-      <p:sp>
-        <p:nvSpPr>
-          <p:cNvPr id="48" name="from slide 5"/>
-          <p:cNvSpPr/>
-          <p:nvPr/>
-        </p:nvSpPr>
-        <p:spPr>
-          <a:xfrm>
-            <a:off x="621792" y="4443984"/>
-            <a:ext cx="777240" cy="292608"/>
-          </a:xfrm>
-          <a:prstGeom prst="roundRect">
-            <a:avLst>
-              <a:gd name="adj" fmla="val 18750"/>
-            </a:avLst>
-          </a:prstGeom>
-          <a:solidFill>
-            <a:srgbClr val="D9D9D9"/>
-          </a:solidFill>
-          <a:ln w="12700">
-            <a:solidFill>
-              <a:srgbClr val="D9D9D9"/>
-            </a:solidFill>
-            <a:prstDash val="solid"/>
-          </a:ln>
-        </p:spPr>
-      </p:sp>
-      <p:sp>
-        <p:nvSpPr>
-          <p:cNvPr id="49" name="Text 47"/>
-          <p:cNvSpPr txBox="1"/>
-          <p:nvPr/>
-        </p:nvSpPr>
-        <p:spPr>
-          <a:xfrm>
-            <a:off x="621792" y="4443984"/>
-            <a:ext cx="777240" cy="292608"/>
-          </a:xfrm>
-          <a:prstGeom prst="rect">
-            <a:avLst/>
-          </a:prstGeom>
-          <a:noFill/>
-          <a:ln/>
-        </p:spPr>
-        <p:txBody>
-          <a:bodyPr wrap="square" lIns="0" tIns="0" rIns="0" bIns="0" rtlCol="0" anchor="ctr"/>
-          <a:lstStyle/>
-          <a:p>
-            <a:pPr algn="ctr" indent="0" marL="0">
-              <a:buNone/>
-            </a:pPr>
-            <a:r>
-              <a:rPr lang="en-US" sz="1400" dirty="0">
-                <a:solidFill>
-                  <a:srgbClr val="404040"/>
-                </a:solidFill>
-              </a:rPr>
-              <a:t>slide 5</a:t>
-            </a:r>
-            <a:endParaRPr lang="en-US" sz="1400" dirty="0"/>
-          </a:p>
-        </p:txBody>
-      </p:sp>
-      <p:sp>
-        <p:nvSpPr>
-          <p:cNvPr id="50" name="Text 48"/>
-          <p:cNvSpPr txBox="1"/>
-          <p:nvPr/>
-        </p:nvSpPr>
-        <p:spPr>
-          <a:xfrm>
-            <a:off x="1508760" y="4389120"/>
-            <a:ext cx="3886200" cy="402336"/>
-          </a:xfrm>
-          <a:prstGeom prst="rect">
-            <a:avLst/>
-          </a:prstGeom>
-          <a:noFill/>
-          <a:ln/>
-        </p:spPr>
-        <p:txBody>
-          <a:bodyPr wrap="square" lIns="0" tIns="0" rIns="0" bIns="0" rtlCol="0" anchor="ctr"/>
-          <a:lstStyle/>
-          <a:p>
-            <a:pPr indent="0" marL="0">
-              <a:buNone/>
-            </a:pPr>
-            <a:r>
-              <a:rPr lang="en-US" sz="1400" dirty="0">
-                <a:solidFill>
-                  <a:schemeClr val="tx1"/>
-                </a:solidFill>
-              </a:rPr>
-              <a:t>Why can thinking make it worse?</a:t>
-            </a:r>
-            <a:endParaRPr lang="en-US" sz="1400" dirty="0"/>
-          </a:p>
-        </p:txBody>
-      </p:sp>
-      <p:sp>
-        <p:nvSpPr>
-          <p:cNvPr id="51" name="page think"/>
-          <p:cNvSpPr/>
-          <p:nvPr/>
-        </p:nvSpPr>
-        <p:spPr>
-          <a:xfrm>
-            <a:off x="5449824" y="4434840"/>
-            <a:ext cx="438912" cy="310896"/>
-          </a:xfrm>
-          <a:prstGeom prst="roundRect">
-            <a:avLst>
-              <a:gd name="adj" fmla="val 23529"/>
-            </a:avLst>
-          </a:prstGeom>
-          <a:solidFill>
-            <a:srgbClr val="4472C4"/>
-          </a:solidFill>
-          <a:ln w="12700">
-            <a:solidFill>
-              <a:srgbClr val="4472C4"/>
-            </a:solidFill>
-            <a:prstDash val="solid"/>
-          </a:ln>
-        </p:spPr>
-      </p:sp>
-      <p:sp>
-        <p:nvSpPr>
-          <p:cNvPr id="52" name="Text 50"/>
-          <p:cNvSpPr txBox="1"/>
-          <p:nvPr/>
-        </p:nvSpPr>
-        <p:spPr>
-          <a:xfrm>
-            <a:off x="5449824" y="4434840"/>
-            <a:ext cx="438912" cy="310896"/>
-          </a:xfrm>
-          <a:prstGeom prst="rect">
-            <a:avLst/>
-          </a:prstGeom>
-          <a:noFill/>
-          <a:ln/>
-        </p:spPr>
-        <p:txBody>
-          <a:bodyPr wrap="square" lIns="0" tIns="0" rIns="0" bIns="0" rtlCol="0" anchor="ctr"/>
-          <a:lstStyle/>
-          <a:p>
-            <a:pPr algn="ctr" indent="0" marL="0">
-              <a:buNone/>
-            </a:pPr>
-            <a:r>
-              <a:rPr lang="en-US" sz="1400" b="1" dirty="0">
-                <a:solidFill>
-                  <a:srgbClr val="FFFFFF"/>
-                </a:solidFill>
-              </a:rPr>
-              <a:t>16</a:t>
-            </a:r>
-            <a:endParaRPr lang="en-US" sz="1400" dirty="0"/>
-          </a:p>
-        </p:txBody>
-      </p:sp>
-      <p:sp>
-        <p:nvSpPr>
-          <p:cNvPr id="53" name="box "/>
-          <p:cNvSpPr/>
-          <p:nvPr/>
-        </p:nvSpPr>
-        <p:spPr>
-          <a:xfrm>
-            <a:off x="548640" y="4846320"/>
-            <a:ext cx="5440680" cy="402336"/>
-          </a:xfrm>
-          <a:prstGeom prst="roundRect">
-            <a:avLst>
-              <a:gd name="adj" fmla="val 13636"/>
-            </a:avLst>
-          </a:prstGeom>
-          <a:solidFill>
-            <a:srgbClr val="F2F2F2"/>
-          </a:solidFill>
-          <a:ln w="9525">
-            <a:solidFill>
-              <a:srgbClr val="BFBFBF"/>
-            </a:solidFill>
-            <a:prstDash val="solid"/>
-          </a:ln>
-        </p:spPr>
-      </p:sp>
-      <p:sp>
-        <p:nvSpPr>
-          <p:cNvPr id="54" name="Text 52"/>
-          <p:cNvSpPr txBox="1"/>
-          <p:nvPr/>
-        </p:nvSpPr>
-        <p:spPr>
-          <a:xfrm>
-            <a:off x="621792" y="4846320"/>
-            <a:ext cx="5294376" cy="402336"/>
-          </a:xfrm>
-          <a:prstGeom prst="rect">
-            <a:avLst/>
-          </a:prstGeom>
-          <a:noFill/>
-          <a:ln/>
-        </p:spPr>
-        <p:txBody>
-          <a:bodyPr wrap="square" lIns="0" tIns="0" rIns="0" bIns="0" rtlCol="0" anchor="ctr"/>
-          <a:lstStyle/>
-          <a:p>
-            <a:pPr algn="ctr" indent="0" marL="0">
-              <a:buNone/>
-            </a:pPr>
-            <a:endParaRPr lang="en-US" sz="1500" dirty="0"/>
-          </a:p>
-        </p:txBody>
-      </p:sp>
-      <p:sp>
-        <p:nvSpPr>
-          <p:cNvPr id="55" name="from slide 6"/>
-          <p:cNvSpPr/>
-          <p:nvPr/>
-        </p:nvSpPr>
-        <p:spPr>
-          <a:xfrm>
-            <a:off x="621792" y="4901184"/>
-            <a:ext cx="777240" cy="292608"/>
-          </a:xfrm>
-          <a:prstGeom prst="roundRect">
-            <a:avLst>
-              <a:gd name="adj" fmla="val 18750"/>
-            </a:avLst>
-          </a:prstGeom>
-          <a:solidFill>
-            <a:srgbClr val="D9D9D9"/>
-          </a:solidFill>
-          <a:ln w="12700">
-            <a:solidFill>
-              <a:srgbClr val="D9D9D9"/>
-            </a:solidFill>
-            <a:prstDash val="solid"/>
-          </a:ln>
-        </p:spPr>
-      </p:sp>
-      <p:sp>
-        <p:nvSpPr>
-          <p:cNvPr id="56" name="Text 54"/>
-          <p:cNvSpPr txBox="1"/>
-          <p:nvPr/>
-        </p:nvSpPr>
-        <p:spPr>
-          <a:xfrm>
-            <a:off x="621792" y="4901184"/>
-            <a:ext cx="777240" cy="292608"/>
-          </a:xfrm>
-          <a:prstGeom prst="rect">
-            <a:avLst/>
-          </a:prstGeom>
-          <a:noFill/>
-          <a:ln/>
-        </p:spPr>
-        <p:txBody>
-          <a:bodyPr wrap="square" lIns="0" tIns="0" rIns="0" bIns="0" rtlCol="0" anchor="ctr"/>
-          <a:lstStyle/>
-          <a:p>
-            <a:pPr algn="ctr" indent="0" marL="0">
-              <a:buNone/>
-            </a:pPr>
-            <a:r>
-              <a:rPr lang="en-US" sz="1400" dirty="0">
-                <a:solidFill>
-                  <a:srgbClr val="404040"/>
-                </a:solidFill>
-              </a:rPr>
-              <a:t>slide 6</a:t>
-            </a:r>
-            <a:endParaRPr lang="en-US" sz="1400" dirty="0"/>
-          </a:p>
-        </p:txBody>
-      </p:sp>
-      <p:sp>
-        <p:nvSpPr>
-          <p:cNvPr id="57" name="Text 55"/>
-          <p:cNvSpPr txBox="1"/>
-          <p:nvPr/>
-        </p:nvSpPr>
-        <p:spPr>
-          <a:xfrm>
-            <a:off x="1508760" y="4846320"/>
-            <a:ext cx="3886200" cy="402336"/>
-          </a:xfrm>
-          <a:prstGeom prst="rect">
-            <a:avLst/>
-          </a:prstGeom>
-          <a:noFill/>
-          <a:ln/>
-        </p:spPr>
-        <p:txBody>
-          <a:bodyPr wrap="square" lIns="0" tIns="0" rIns="0" bIns="0" rtlCol="0" anchor="ctr"/>
-          <a:lstStyle/>
-          <a:p>
-            <a:pPr indent="0" marL="0">
-              <a:buNone/>
-            </a:pPr>
-            <a:r>
-              <a:rPr lang="en-US" sz="1400" dirty="0">
-                <a:solidFill>
-                  <a:schemeClr val="tx1"/>
-                </a:solidFill>
-              </a:rPr>
-              <a:t>What if a wrong program passes the check?</a:t>
-            </a:r>
-            <a:endParaRPr lang="en-US" sz="1400" dirty="0"/>
-          </a:p>
-        </p:txBody>
-      </p:sp>
-      <p:sp>
-        <p:nvSpPr>
-          <p:cNvPr id="58" name="page leak"/>
-          <p:cNvSpPr/>
-          <p:nvPr/>
-        </p:nvSpPr>
-        <p:spPr>
-          <a:xfrm>
-            <a:off x="5449824" y="4892040"/>
-            <a:ext cx="438912" cy="310896"/>
-          </a:xfrm>
-          <a:prstGeom prst="roundRect">
-            <a:avLst>
-              <a:gd name="adj" fmla="val 23529"/>
-            </a:avLst>
-          </a:prstGeom>
-          <a:solidFill>
-            <a:srgbClr val="4472C4"/>
-          </a:solidFill>
-          <a:ln w="12700">
-            <a:solidFill>
-              <a:srgbClr val="4472C4"/>
-            </a:solidFill>
-            <a:prstDash val="solid"/>
-          </a:ln>
-        </p:spPr>
-      </p:sp>
-      <p:sp>
-        <p:nvSpPr>
-          <p:cNvPr id="59" name="Text 57"/>
-          <p:cNvSpPr txBox="1"/>
-          <p:nvPr/>
-        </p:nvSpPr>
-        <p:spPr>
-          <a:xfrm>
-            <a:off x="5449824" y="4892040"/>
-            <a:ext cx="438912" cy="310896"/>
-          </a:xfrm>
-          <a:prstGeom prst="rect">
-            <a:avLst/>
-          </a:prstGeom>
-          <a:noFill/>
-          <a:ln/>
-        </p:spPr>
-        <p:txBody>
-          <a:bodyPr wrap="square" lIns="0" tIns="0" rIns="0" bIns="0" rtlCol="0" anchor="ctr"/>
-          <a:lstStyle/>
-          <a:p>
-            <a:pPr algn="ctr" indent="0" marL="0">
-              <a:buNone/>
-            </a:pPr>
-            <a:r>
-              <a:rPr lang="en-US" sz="1400" b="1" dirty="0">
-                <a:solidFill>
-                  <a:srgbClr val="FFFFFF"/>
-                </a:solidFill>
-              </a:rPr>
-              <a:t>17</a:t>
-            </a:r>
-            <a:endParaRPr lang="en-US" sz="1400" dirty="0"/>
-          </a:p>
-        </p:txBody>
-      </p:sp>
-      <p:sp>
-        <p:nvSpPr>
-          <p:cNvPr id="60" name="box "/>
-          <p:cNvSpPr/>
-          <p:nvPr/>
-        </p:nvSpPr>
-        <p:spPr>
-          <a:xfrm>
-            <a:off x="548640" y="5303520"/>
-            <a:ext cx="5440680" cy="402336"/>
-          </a:xfrm>
-          <a:prstGeom prst="roundRect">
-            <a:avLst>
-              <a:gd name="adj" fmla="val 13636"/>
-            </a:avLst>
-          </a:prstGeom>
-          <a:solidFill>
-            <a:srgbClr val="F2F2F2"/>
-          </a:solidFill>
-          <a:ln w="9525">
-            <a:solidFill>
-              <a:srgbClr val="BFBFBF"/>
-            </a:solidFill>
-            <a:prstDash val="solid"/>
-          </a:ln>
-        </p:spPr>
-      </p:sp>
-      <p:sp>
-        <p:nvSpPr>
-          <p:cNvPr id="61" name="Text 59"/>
-          <p:cNvSpPr txBox="1"/>
-          <p:nvPr/>
-        </p:nvSpPr>
-        <p:spPr>
-          <a:xfrm>
-            <a:off x="621792" y="5303520"/>
-            <a:ext cx="5294376" cy="402336"/>
-          </a:xfrm>
-          <a:prstGeom prst="rect">
-            <a:avLst/>
-          </a:prstGeom>
-          <a:noFill/>
-          <a:ln/>
-        </p:spPr>
-        <p:txBody>
-          <a:bodyPr wrap="square" lIns="0" tIns="0" rIns="0" bIns="0" rtlCol="0" anchor="ctr"/>
-          <a:lstStyle/>
-          <a:p>
-            <a:pPr algn="ctr" indent="0" marL="0">
-              <a:buNone/>
-            </a:pPr>
-            <a:endParaRPr lang="en-US" sz="1500" dirty="0"/>
-          </a:p>
-        </p:txBody>
-      </p:sp>
-      <p:sp>
-        <p:nvSpPr>
-          <p:cNvPr id="62" name="from slide 6"/>
-          <p:cNvSpPr/>
-          <p:nvPr/>
-        </p:nvSpPr>
-        <p:spPr>
-          <a:xfrm>
-            <a:off x="621792" y="5358384"/>
-            <a:ext cx="777240" cy="292608"/>
-          </a:xfrm>
-          <a:prstGeom prst="roundRect">
-            <a:avLst>
-              <a:gd name="adj" fmla="val 18750"/>
-            </a:avLst>
-          </a:prstGeom>
-          <a:solidFill>
-            <a:srgbClr val="D9D9D9"/>
-          </a:solidFill>
-          <a:ln w="12700">
-            <a:solidFill>
-              <a:srgbClr val="D9D9D9"/>
-            </a:solidFill>
-            <a:prstDash val="solid"/>
-          </a:ln>
-        </p:spPr>
-      </p:sp>
-      <p:sp>
-        <p:nvSpPr>
-          <p:cNvPr id="63" name="Text 61"/>
-          <p:cNvSpPr txBox="1"/>
-          <p:nvPr/>
-        </p:nvSpPr>
-        <p:spPr>
-          <a:xfrm>
-            <a:off x="621792" y="5358384"/>
-            <a:ext cx="777240" cy="292608"/>
-          </a:xfrm>
-          <a:prstGeom prst="rect">
-            <a:avLst/>
-          </a:prstGeom>
-          <a:noFill/>
-          <a:ln/>
-        </p:spPr>
-        <p:txBody>
-          <a:bodyPr wrap="square" lIns="0" tIns="0" rIns="0" bIns="0" rtlCol="0" anchor="ctr"/>
-          <a:lstStyle/>
-          <a:p>
-            <a:pPr algn="ctr" indent="0" marL="0">
-              <a:buNone/>
-            </a:pPr>
-            <a:r>
-              <a:rPr lang="en-US" sz="1400" dirty="0">
-                <a:solidFill>
-                  <a:srgbClr val="404040"/>
-                </a:solidFill>
-              </a:rPr>
-              <a:t>slide 6</a:t>
-            </a:r>
-            <a:endParaRPr lang="en-US" sz="1400" dirty="0"/>
-          </a:p>
-        </p:txBody>
-      </p:sp>
-      <p:sp>
-        <p:nvSpPr>
-          <p:cNvPr id="64" name="Text 62"/>
-          <p:cNvSpPr txBox="1"/>
-          <p:nvPr/>
-        </p:nvSpPr>
-        <p:spPr>
-          <a:xfrm>
-            <a:off x="1508760" y="5303520"/>
-            <a:ext cx="3886200" cy="402336"/>
-          </a:xfrm>
-          <a:prstGeom prst="rect">
-            <a:avLst/>
-          </a:prstGeom>
-          <a:noFill/>
-          <a:ln/>
-        </p:spPr>
-        <p:txBody>
-          <a:bodyPr wrap="square" lIns="0" tIns="0" rIns="0" bIns="0" rtlCol="0" anchor="ctr"/>
-          <a:lstStyle/>
-          <a:p>
-            <a:pPr indent="0" marL="0">
-              <a:buNone/>
-            </a:pPr>
-            <a:r>
-              <a:rPr lang="en-US" sz="1400" dirty="0">
-                <a:solidFill>
-                  <a:schemeClr val="tx1"/>
-                </a:solidFill>
-              </a:rPr>
-              <a:t>Is there always a free check?</a:t>
-            </a:r>
-            <a:endParaRPr lang="en-US" sz="1400" dirty="0"/>
-          </a:p>
-        </p:txBody>
-      </p:sp>
-      <p:sp>
-        <p:nvSpPr>
-          <p:cNvPr id="65" name="page checks"/>
-          <p:cNvSpPr/>
-          <p:nvPr/>
-        </p:nvSpPr>
-        <p:spPr>
-          <a:xfrm>
-            <a:off x="5449824" y="5349240"/>
-            <a:ext cx="438912" cy="310896"/>
-          </a:xfrm>
-          <a:prstGeom prst="roundRect">
-            <a:avLst>
-              <a:gd name="adj" fmla="val 23529"/>
-            </a:avLst>
-          </a:prstGeom>
-          <a:solidFill>
-            <a:srgbClr val="4472C4"/>
-          </a:solidFill>
-          <a:ln w="12700">
-            <a:solidFill>
-              <a:srgbClr val="4472C4"/>
-            </a:solidFill>
-            <a:prstDash val="solid"/>
-          </a:ln>
-        </p:spPr>
-      </p:sp>
-      <p:sp>
-        <p:nvSpPr>
-          <p:cNvPr id="66" name="Text 64"/>
-          <p:cNvSpPr txBox="1"/>
-          <p:nvPr/>
-        </p:nvSpPr>
-        <p:spPr>
-          <a:xfrm>
-            <a:off x="5449824" y="5349240"/>
-            <a:ext cx="438912" cy="310896"/>
-          </a:xfrm>
-          <a:prstGeom prst="rect">
-            <a:avLst/>
-          </a:prstGeom>
-          <a:noFill/>
-          <a:ln/>
-        </p:spPr>
-        <p:txBody>
-          <a:bodyPr wrap="square" lIns="0" tIns="0" rIns="0" bIns="0" rtlCol="0" anchor="ctr"/>
-          <a:lstStyle/>
-          <a:p>
-            <a:pPr algn="ctr" indent="0" marL="0">
-              <a:buNone/>
-            </a:pPr>
-            <a:r>
-              <a:rPr lang="en-US" sz="1400" b="1" dirty="0">
-                <a:solidFill>
-                  <a:srgbClr val="FFFFFF"/>
-                </a:solidFill>
-              </a:rPr>
-              <a:t>18</a:t>
-            </a:r>
-            <a:endParaRPr lang="en-US" sz="1400" dirty="0"/>
-          </a:p>
-        </p:txBody>
-      </p:sp>
-      <p:sp>
-        <p:nvSpPr>
-          <p:cNvPr id="67" name="box "/>
-          <p:cNvSpPr/>
-          <p:nvPr/>
-        </p:nvSpPr>
-        <p:spPr>
-          <a:xfrm>
-            <a:off x="6172200" y="1645920"/>
-            <a:ext cx="5440680" cy="402336"/>
-          </a:xfrm>
-          <a:prstGeom prst="roundRect">
-            <a:avLst>
-              <a:gd name="adj" fmla="val 13636"/>
-            </a:avLst>
-          </a:prstGeom>
-          <a:solidFill>
-            <a:srgbClr val="F2F2F2"/>
-          </a:solidFill>
-          <a:ln w="9525">
-            <a:solidFill>
-              <a:srgbClr val="BFBFBF"/>
-            </a:solidFill>
-            <a:prstDash val="solid"/>
-          </a:ln>
-        </p:spPr>
-      </p:sp>
-      <p:sp>
-        <p:nvSpPr>
-          <p:cNvPr id="68" name="Text 66"/>
-          <p:cNvSpPr txBox="1"/>
-          <p:nvPr/>
-        </p:nvSpPr>
-        <p:spPr>
-          <a:xfrm>
-            <a:off x="6245352" y="1645920"/>
-            <a:ext cx="5294376" cy="402336"/>
-          </a:xfrm>
-          <a:prstGeom prst="rect">
-            <a:avLst/>
-          </a:prstGeom>
-          <a:noFill/>
-          <a:ln/>
-        </p:spPr>
-        <p:txBody>
-          <a:bodyPr wrap="square" lIns="0" tIns="0" rIns="0" bIns="0" rtlCol="0" anchor="ctr"/>
-          <a:lstStyle/>
-          <a:p>
-            <a:pPr algn="ctr" indent="0" marL="0">
-              <a:buNone/>
-            </a:pPr>
-            <a:endParaRPr lang="en-US" sz="1500" dirty="0"/>
-          </a:p>
-        </p:txBody>
-      </p:sp>
-      <p:sp>
-        <p:nvSpPr>
-          <p:cNvPr id="69" name="from slide 7"/>
-          <p:cNvSpPr/>
-          <p:nvPr/>
-        </p:nvSpPr>
-        <p:spPr>
-          <a:xfrm>
-            <a:off x="6245352" y="1700784"/>
-            <a:ext cx="777240" cy="292608"/>
-          </a:xfrm>
-          <a:prstGeom prst="roundRect">
-            <a:avLst>
-              <a:gd name="adj" fmla="val 18750"/>
-            </a:avLst>
-          </a:prstGeom>
-          <a:solidFill>
-            <a:srgbClr val="D9D9D9"/>
-          </a:solidFill>
-          <a:ln w="12700">
-            <a:solidFill>
-              <a:srgbClr val="D9D9D9"/>
-            </a:solidFill>
-            <a:prstDash val="solid"/>
-          </a:ln>
-        </p:spPr>
-      </p:sp>
-      <p:sp>
-        <p:nvSpPr>
-          <p:cNvPr id="70" name="Text 68"/>
-          <p:cNvSpPr txBox="1"/>
-          <p:nvPr/>
-        </p:nvSpPr>
-        <p:spPr>
-          <a:xfrm>
-            <a:off x="6245352" y="1700784"/>
-            <a:ext cx="777240" cy="292608"/>
-          </a:xfrm>
-          <a:prstGeom prst="rect">
-            <a:avLst/>
-          </a:prstGeom>
-          <a:noFill/>
-          <a:ln/>
-        </p:spPr>
-        <p:txBody>
-          <a:bodyPr wrap="square" lIns="0" tIns="0" rIns="0" bIns="0" rtlCol="0" anchor="ctr"/>
-          <a:lstStyle/>
-          <a:p>
-            <a:pPr algn="ctr" indent="0" marL="0">
-              <a:buNone/>
-            </a:pPr>
-            <a:r>
-              <a:rPr lang="en-US" sz="1400" dirty="0">
-                <a:solidFill>
-                  <a:srgbClr val="404040"/>
-                </a:solidFill>
-              </a:rPr>
-              <a:t>slide 7</a:t>
-            </a:r>
-            <a:endParaRPr lang="en-US" sz="1400" dirty="0"/>
-          </a:p>
-        </p:txBody>
-      </p:sp>
-      <p:sp>
-        <p:nvSpPr>
-          <p:cNvPr id="71" name="Text 69"/>
-          <p:cNvSpPr txBox="1"/>
-          <p:nvPr/>
-        </p:nvSpPr>
-        <p:spPr>
-          <a:xfrm>
-            <a:off x="7132320" y="1645920"/>
-            <a:ext cx="3886200" cy="402336"/>
-          </a:xfrm>
-          <a:prstGeom prst="rect">
-            <a:avLst/>
-          </a:prstGeom>
-          <a:noFill/>
-          <a:ln/>
-        </p:spPr>
-        <p:txBody>
-          <a:bodyPr wrap="square" lIns="0" tIns="0" rIns="0" bIns="0" rtlCol="0" anchor="ctr"/>
-          <a:lstStyle/>
-          <a:p>
-            <a:pPr indent="0" marL="0">
-              <a:buNone/>
-            </a:pPr>
-            <a:r>
-              <a:rPr lang="en-US" sz="1400" dirty="0">
-                <a:solidFill>
-                  <a:schemeClr val="tx1"/>
-                </a:solidFill>
-              </a:rPr>
-              <a:t>Who writes the hint?</a:t>
-            </a:r>
-            <a:endParaRPr lang="en-US" sz="1400" dirty="0"/>
-          </a:p>
-        </p:txBody>
-      </p:sp>
-      <p:sp>
-        <p:nvSpPr>
-          <p:cNvPr id="72" name="page auto"/>
-          <p:cNvSpPr/>
-          <p:nvPr/>
-        </p:nvSpPr>
-        <p:spPr>
-          <a:xfrm>
-            <a:off x="11073384" y="1691640"/>
-            <a:ext cx="438912" cy="310896"/>
-          </a:xfrm>
-          <a:prstGeom prst="roundRect">
-            <a:avLst>
-              <a:gd name="adj" fmla="val 23529"/>
-            </a:avLst>
-          </a:prstGeom>
-          <a:solidFill>
-            <a:srgbClr val="4472C4"/>
-          </a:solidFill>
-          <a:ln w="12700">
-            <a:solidFill>
-              <a:srgbClr val="4472C4"/>
-            </a:solidFill>
-            <a:prstDash val="solid"/>
-          </a:ln>
-        </p:spPr>
-      </p:sp>
-      <p:sp>
-        <p:nvSpPr>
-          <p:cNvPr id="73" name="Text 71"/>
-          <p:cNvSpPr txBox="1"/>
-          <p:nvPr/>
-        </p:nvSpPr>
-        <p:spPr>
-          <a:xfrm>
-            <a:off x="11073384" y="1691640"/>
-            <a:ext cx="438912" cy="310896"/>
-          </a:xfrm>
-          <a:prstGeom prst="rect">
-            <a:avLst/>
-          </a:prstGeom>
-          <a:noFill/>
-          <a:ln/>
-        </p:spPr>
-        <p:txBody>
-          <a:bodyPr wrap="square" lIns="0" tIns="0" rIns="0" bIns="0" rtlCol="0" anchor="ctr"/>
-          <a:lstStyle/>
-          <a:p>
-            <a:pPr algn="ctr" indent="0" marL="0">
-              <a:buNone/>
-            </a:pPr>
-            <a:r>
-              <a:rPr lang="en-US" sz="1400" b="1" dirty="0">
-                <a:solidFill>
-                  <a:srgbClr val="FFFFFF"/>
-                </a:solidFill>
-              </a:rPr>
-              <a:t>19</a:t>
-            </a:r>
-            <a:endParaRPr lang="en-US" sz="1400" dirty="0"/>
-          </a:p>
-        </p:txBody>
-      </p:sp>
-      <p:sp>
-        <p:nvSpPr>
-          <p:cNvPr id="74" name="box "/>
-          <p:cNvSpPr/>
-          <p:nvPr/>
-        </p:nvSpPr>
-        <p:spPr>
-          <a:xfrm>
-            <a:off x="6172200" y="2103120"/>
-            <a:ext cx="5440680" cy="402336"/>
-          </a:xfrm>
-          <a:prstGeom prst="roundRect">
-            <a:avLst>
-              <a:gd name="adj" fmla="val 13636"/>
-            </a:avLst>
-          </a:prstGeom>
-          <a:solidFill>
-            <a:srgbClr val="F2F2F2"/>
-          </a:solidFill>
-          <a:ln w="9525">
-            <a:solidFill>
-              <a:srgbClr val="BFBFBF"/>
-            </a:solidFill>
-            <a:prstDash val="solid"/>
-          </a:ln>
-        </p:spPr>
-      </p:sp>
-      <p:sp>
-        <p:nvSpPr>
-          <p:cNvPr id="75" name="Text 73"/>
-          <p:cNvSpPr txBox="1"/>
-          <p:nvPr/>
-        </p:nvSpPr>
-        <p:spPr>
-          <a:xfrm>
-            <a:off x="6245352" y="2103120"/>
-            <a:ext cx="5294376" cy="402336"/>
-          </a:xfrm>
-          <a:prstGeom prst="rect">
-            <a:avLst/>
-          </a:prstGeom>
-          <a:noFill/>
-          <a:ln/>
-        </p:spPr>
-        <p:txBody>
-          <a:bodyPr wrap="square" lIns="0" tIns="0" rIns="0" bIns="0" rtlCol="0" anchor="ctr"/>
-          <a:lstStyle/>
-          <a:p>
-            <a:pPr algn="ctr" indent="0" marL="0">
-              <a:buNone/>
-            </a:pPr>
-            <a:endParaRPr lang="en-US" sz="1500" dirty="0"/>
-          </a:p>
-        </p:txBody>
-      </p:sp>
-      <p:sp>
-        <p:nvSpPr>
-          <p:cNvPr id="76" name="from slide 7"/>
-          <p:cNvSpPr/>
-          <p:nvPr/>
-        </p:nvSpPr>
-        <p:spPr>
-          <a:xfrm>
-            <a:off x="6245352" y="2157984"/>
-            <a:ext cx="777240" cy="292608"/>
-          </a:xfrm>
-          <a:prstGeom prst="roundRect">
-            <a:avLst>
-              <a:gd name="adj" fmla="val 18750"/>
-            </a:avLst>
-          </a:prstGeom>
-          <a:solidFill>
-            <a:srgbClr val="D9D9D9"/>
-          </a:solidFill>
-          <a:ln w="12700">
-            <a:solidFill>
-              <a:srgbClr val="D9D9D9"/>
-            </a:solidFill>
-            <a:prstDash val="solid"/>
-          </a:ln>
-        </p:spPr>
-      </p:sp>
-      <p:sp>
-        <p:nvSpPr>
-          <p:cNvPr id="77" name="Text 75"/>
-          <p:cNvSpPr txBox="1"/>
-          <p:nvPr/>
-        </p:nvSpPr>
-        <p:spPr>
-          <a:xfrm>
-            <a:off x="6245352" y="2157984"/>
-            <a:ext cx="777240" cy="292608"/>
-          </a:xfrm>
-          <a:prstGeom prst="rect">
-            <a:avLst/>
-          </a:prstGeom>
-          <a:noFill/>
-          <a:ln/>
-        </p:spPr>
-        <p:txBody>
-          <a:bodyPr wrap="square" lIns="0" tIns="0" rIns="0" bIns="0" rtlCol="0" anchor="ctr"/>
-          <a:lstStyle/>
-          <a:p>
-            <a:pPr algn="ctr" indent="0" marL="0">
-              <a:buNone/>
-            </a:pPr>
-            <a:r>
-              <a:rPr lang="en-US" sz="1400" dirty="0">
-                <a:solidFill>
-                  <a:srgbClr val="404040"/>
-                </a:solidFill>
-              </a:rPr>
-              <a:t>slide 7</a:t>
-            </a:r>
-            <a:endParaRPr lang="en-US" sz="1400" dirty="0"/>
-          </a:p>
-        </p:txBody>
-      </p:sp>
-      <p:sp>
-        <p:nvSpPr>
-          <p:cNvPr id="78" name="Text 76"/>
-          <p:cNvSpPr txBox="1"/>
-          <p:nvPr/>
-        </p:nvSpPr>
-        <p:spPr>
-          <a:xfrm>
-            <a:off x="7132320" y="2103120"/>
-            <a:ext cx="3886200" cy="402336"/>
-          </a:xfrm>
-          <a:prstGeom prst="rect">
-            <a:avLst/>
-          </a:prstGeom>
-          <a:noFill/>
-          <a:ln/>
-        </p:spPr>
-        <p:txBody>
-          <a:bodyPr wrap="square" lIns="0" tIns="0" rIns="0" bIns="0" rtlCol="0" anchor="ctr"/>
-          <a:lstStyle/>
-          <a:p>
-            <a:pPr indent="0" marL="0">
-              <a:buNone/>
-            </a:pPr>
-            <a:r>
-              <a:rPr lang="en-US" sz="1400" dirty="0">
-                <a:solidFill>
-                  <a:schemeClr val="tx1"/>
-                </a:solidFill>
-              </a:rPr>
-              <a:t>Is 'think on the hardest' a weak baseline?</a:t>
-            </a:r>
-            <a:endParaRPr lang="en-US" sz="1400" dirty="0"/>
-          </a:p>
-        </p:txBody>
-      </p:sp>
-      <p:sp>
-        <p:nvSpPr>
-          <p:cNvPr id="79" name="page hard"/>
-          <p:cNvSpPr/>
-          <p:nvPr/>
-        </p:nvSpPr>
-        <p:spPr>
-          <a:xfrm>
-            <a:off x="11073384" y="2148840"/>
-            <a:ext cx="438912" cy="310896"/>
-          </a:xfrm>
-          <a:prstGeom prst="roundRect">
-            <a:avLst>
-              <a:gd name="adj" fmla="val 23529"/>
-            </a:avLst>
-          </a:prstGeom>
-          <a:solidFill>
-            <a:srgbClr val="4472C4"/>
-          </a:solidFill>
-          <a:ln w="12700">
-            <a:solidFill>
-              <a:srgbClr val="4472C4"/>
-            </a:solidFill>
-            <a:prstDash val="solid"/>
-          </a:ln>
-        </p:spPr>
-      </p:sp>
-      <p:sp>
-        <p:nvSpPr>
-          <p:cNvPr id="80" name="Text 78"/>
-          <p:cNvSpPr txBox="1"/>
-          <p:nvPr/>
-        </p:nvSpPr>
-        <p:spPr>
-          <a:xfrm>
-            <a:off x="11073384" y="2148840"/>
-            <a:ext cx="438912" cy="310896"/>
-          </a:xfrm>
-          <a:prstGeom prst="rect">
-            <a:avLst/>
-          </a:prstGeom>
-          <a:noFill/>
-          <a:ln/>
-        </p:spPr>
-        <p:txBody>
-          <a:bodyPr wrap="square" lIns="0" tIns="0" rIns="0" bIns="0" rtlCol="0" anchor="ctr"/>
-          <a:lstStyle/>
-          <a:p>
-            <a:pPr algn="ctr" indent="0" marL="0">
-              <a:buNone/>
-            </a:pPr>
-            <a:r>
-              <a:rPr lang="en-US" sz="1400" b="1" dirty="0">
-                <a:solidFill>
-                  <a:srgbClr val="FFFFFF"/>
-                </a:solidFill>
-              </a:rPr>
-              <a:t>20</a:t>
-            </a:r>
-            <a:endParaRPr lang="en-US" sz="1400" dirty="0"/>
-          </a:p>
-        </p:txBody>
-      </p:sp>
-      <p:sp>
-        <p:nvSpPr>
-          <p:cNvPr id="81" name="box "/>
-          <p:cNvSpPr/>
-          <p:nvPr/>
-        </p:nvSpPr>
-        <p:spPr>
-          <a:xfrm>
-            <a:off x="6172200" y="2560320"/>
-            <a:ext cx="5440680" cy="402336"/>
-          </a:xfrm>
-          <a:prstGeom prst="roundRect">
-            <a:avLst>
-              <a:gd name="adj" fmla="val 13636"/>
-            </a:avLst>
-          </a:prstGeom>
-          <a:solidFill>
-            <a:srgbClr val="F2F2F2"/>
-          </a:solidFill>
-          <a:ln w="9525">
-            <a:solidFill>
-              <a:srgbClr val="BFBFBF"/>
-            </a:solidFill>
-            <a:prstDash val="solid"/>
-          </a:ln>
-        </p:spPr>
-      </p:sp>
-      <p:sp>
-        <p:nvSpPr>
-          <p:cNvPr id="82" name="Text 80"/>
-          <p:cNvSpPr txBox="1"/>
-          <p:nvPr/>
-        </p:nvSpPr>
-        <p:spPr>
-          <a:xfrm>
-            <a:off x="6245352" y="2560320"/>
-            <a:ext cx="5294376" cy="402336"/>
-          </a:xfrm>
-          <a:prstGeom prst="rect">
-            <a:avLst/>
-          </a:prstGeom>
-          <a:noFill/>
-          <a:ln/>
-        </p:spPr>
-        <p:txBody>
-          <a:bodyPr wrap="square" lIns="0" tIns="0" rIns="0" bIns="0" rtlCol="0" anchor="ctr"/>
-          <a:lstStyle/>
-          <a:p>
-            <a:pPr algn="ctr" indent="0" marL="0">
-              <a:buNone/>
-            </a:pPr>
-            <a:endParaRPr lang="en-US" sz="1500" dirty="0"/>
-          </a:p>
-        </p:txBody>
-      </p:sp>
-      <p:sp>
-        <p:nvSpPr>
-          <p:cNvPr id="83" name="from slide 7"/>
-          <p:cNvSpPr/>
-          <p:nvPr/>
-        </p:nvSpPr>
-        <p:spPr>
-          <a:xfrm>
-            <a:off x="6245352" y="2615184"/>
-            <a:ext cx="777240" cy="292608"/>
-          </a:xfrm>
-          <a:prstGeom prst="roundRect">
-            <a:avLst>
-              <a:gd name="adj" fmla="val 18750"/>
-            </a:avLst>
-          </a:prstGeom>
-          <a:solidFill>
-            <a:srgbClr val="D9D9D9"/>
-          </a:solidFill>
-          <a:ln w="12700">
-            <a:solidFill>
-              <a:srgbClr val="D9D9D9"/>
-            </a:solidFill>
-            <a:prstDash val="solid"/>
-          </a:ln>
-        </p:spPr>
-      </p:sp>
-      <p:sp>
-        <p:nvSpPr>
-          <p:cNvPr id="84" name="Text 82"/>
-          <p:cNvSpPr txBox="1"/>
-          <p:nvPr/>
-        </p:nvSpPr>
-        <p:spPr>
-          <a:xfrm>
-            <a:off x="6245352" y="2615184"/>
-            <a:ext cx="777240" cy="292608"/>
-          </a:xfrm>
-          <a:prstGeom prst="rect">
-            <a:avLst/>
-          </a:prstGeom>
-          <a:noFill/>
-          <a:ln/>
-        </p:spPr>
-        <p:txBody>
-          <a:bodyPr wrap="square" lIns="0" tIns="0" rIns="0" bIns="0" rtlCol="0" anchor="ctr"/>
-          <a:lstStyle/>
-          <a:p>
-            <a:pPr algn="ctr" indent="0" marL="0">
-              <a:buNone/>
-            </a:pPr>
-            <a:r>
-              <a:rPr lang="en-US" sz="1400" dirty="0">
-                <a:solidFill>
-                  <a:srgbClr val="404040"/>
-                </a:solidFill>
-              </a:rPr>
-              <a:t>slide 7</a:t>
-            </a:r>
-            <a:endParaRPr lang="en-US" sz="1400" dirty="0"/>
-          </a:p>
-        </p:txBody>
-      </p:sp>
-      <p:sp>
-        <p:nvSpPr>
-          <p:cNvPr id="85" name="Text 83"/>
-          <p:cNvSpPr txBox="1"/>
-          <p:nvPr/>
-        </p:nvSpPr>
-        <p:spPr>
-          <a:xfrm>
-            <a:off x="7132320" y="2560320"/>
-            <a:ext cx="3886200" cy="402336"/>
-          </a:xfrm>
-          <a:prstGeom prst="rect">
-            <a:avLst/>
-          </a:prstGeom>
-          <a:noFill/>
-          <a:ln/>
-        </p:spPr>
-        <p:txBody>
-          <a:bodyPr wrap="square" lIns="0" tIns="0" rIns="0" bIns="0" rtlCol="0" anchor="ctr"/>
-          <a:lstStyle/>
-          <a:p>
-            <a:pPr indent="0" marL="0">
-              <a:buNone/>
-            </a:pPr>
-            <a:r>
-              <a:rPr lang="en-US" sz="1400" dirty="0">
-                <a:solidFill>
-                  <a:schemeClr val="tx1"/>
-                </a:solidFill>
-              </a:rPr>
-              <a:t>What if the same problem repeats?</a:t>
-            </a:r>
-            <a:endParaRPr lang="en-US" sz="1400" dirty="0"/>
-          </a:p>
-        </p:txBody>
-      </p:sp>
-      <p:sp>
-        <p:nvSpPr>
-          <p:cNvPr id="86" name="page reuse"/>
-          <p:cNvSpPr/>
-          <p:nvPr/>
-        </p:nvSpPr>
-        <p:spPr>
-          <a:xfrm>
-            <a:off x="11073384" y="2606040"/>
-            <a:ext cx="438912" cy="310896"/>
-          </a:xfrm>
-          <a:prstGeom prst="roundRect">
-            <a:avLst>
-              <a:gd name="adj" fmla="val 23529"/>
-            </a:avLst>
-          </a:prstGeom>
-          <a:solidFill>
-            <a:srgbClr val="4472C4"/>
-          </a:solidFill>
-          <a:ln w="12700">
-            <a:solidFill>
-              <a:srgbClr val="4472C4"/>
-            </a:solidFill>
-            <a:prstDash val="solid"/>
-          </a:ln>
-        </p:spPr>
-      </p:sp>
-      <p:sp>
-        <p:nvSpPr>
-          <p:cNvPr id="87" name="Text 85"/>
-          <p:cNvSpPr txBox="1"/>
-          <p:nvPr/>
-        </p:nvSpPr>
-        <p:spPr>
-          <a:xfrm>
-            <a:off x="11073384" y="2606040"/>
-            <a:ext cx="438912" cy="310896"/>
-          </a:xfrm>
-          <a:prstGeom prst="rect">
-            <a:avLst/>
-          </a:prstGeom>
-          <a:noFill/>
-          <a:ln/>
-        </p:spPr>
-        <p:txBody>
-          <a:bodyPr wrap="square" lIns="0" tIns="0" rIns="0" bIns="0" rtlCol="0" anchor="ctr"/>
-          <a:lstStyle/>
-          <a:p>
-            <a:pPr algn="ctr" indent="0" marL="0">
-              <a:buNone/>
-            </a:pPr>
-            <a:r>
-              <a:rPr lang="en-US" sz="1400" b="1" dirty="0">
-                <a:solidFill>
-                  <a:srgbClr val="FFFFFF"/>
-                </a:solidFill>
-              </a:rPr>
-              <a:t>29</a:t>
-            </a:r>
-            <a:endParaRPr lang="en-US" sz="1400" dirty="0"/>
-          </a:p>
-        </p:txBody>
-      </p:sp>
-      <p:sp>
-        <p:nvSpPr>
-          <p:cNvPr id="88" name="box "/>
-          <p:cNvSpPr/>
-          <p:nvPr/>
-        </p:nvSpPr>
-        <p:spPr>
-          <a:xfrm>
-            <a:off x="6172200" y="3017520"/>
-            <a:ext cx="5440680" cy="402336"/>
-          </a:xfrm>
-          <a:prstGeom prst="roundRect">
-            <a:avLst>
-              <a:gd name="adj" fmla="val 13636"/>
-            </a:avLst>
-          </a:prstGeom>
-          <a:solidFill>
-            <a:srgbClr val="F2F2F2"/>
-          </a:solidFill>
-          <a:ln w="9525">
-            <a:solidFill>
-              <a:srgbClr val="BFBFBF"/>
-            </a:solidFill>
-            <a:prstDash val="solid"/>
-          </a:ln>
-        </p:spPr>
-      </p:sp>
-      <p:sp>
-        <p:nvSpPr>
-          <p:cNvPr id="89" name="Text 87"/>
-          <p:cNvSpPr txBox="1"/>
-          <p:nvPr/>
-        </p:nvSpPr>
-        <p:spPr>
-          <a:xfrm>
-            <a:off x="6245352" y="3017520"/>
-            <a:ext cx="5294376" cy="402336"/>
-          </a:xfrm>
-          <a:prstGeom prst="rect">
-            <a:avLst/>
-          </a:prstGeom>
-          <a:noFill/>
-          <a:ln/>
-        </p:spPr>
-        <p:txBody>
-          <a:bodyPr wrap="square" lIns="0" tIns="0" rIns="0" bIns="0" rtlCol="0" anchor="ctr"/>
-          <a:lstStyle/>
-          <a:p>
-            <a:pPr algn="ctr" indent="0" marL="0">
-              <a:buNone/>
-            </a:pPr>
-            <a:endParaRPr lang="en-US" sz="1500" dirty="0"/>
-          </a:p>
-        </p:txBody>
-      </p:sp>
-      <p:sp>
-        <p:nvSpPr>
-          <p:cNvPr id="90" name="from slide 7"/>
-          <p:cNvSpPr/>
-          <p:nvPr/>
-        </p:nvSpPr>
-        <p:spPr>
-          <a:xfrm>
-            <a:off x="6245352" y="3072384"/>
-            <a:ext cx="777240" cy="292608"/>
-          </a:xfrm>
-          <a:prstGeom prst="roundRect">
-            <a:avLst>
-              <a:gd name="adj" fmla="val 18750"/>
-            </a:avLst>
-          </a:prstGeom>
-          <a:solidFill>
-            <a:srgbClr val="D9D9D9"/>
-          </a:solidFill>
-          <a:ln w="12700">
-            <a:solidFill>
-              <a:srgbClr val="D9D9D9"/>
-            </a:solidFill>
-            <a:prstDash val="solid"/>
-          </a:ln>
-        </p:spPr>
-      </p:sp>
-      <p:sp>
-        <p:nvSpPr>
-          <p:cNvPr id="91" name="Text 89"/>
-          <p:cNvSpPr txBox="1"/>
-          <p:nvPr/>
-        </p:nvSpPr>
-        <p:spPr>
-          <a:xfrm>
-            <a:off x="6245352" y="3072384"/>
-            <a:ext cx="777240" cy="292608"/>
-          </a:xfrm>
-          <a:prstGeom prst="rect">
-            <a:avLst/>
-          </a:prstGeom>
-          <a:noFill/>
-          <a:ln/>
-        </p:spPr>
-        <p:txBody>
-          <a:bodyPr wrap="square" lIns="0" tIns="0" rIns="0" bIns="0" rtlCol="0" anchor="ctr"/>
-          <a:lstStyle/>
-          <a:p>
-            <a:pPr algn="ctr" indent="0" marL="0">
-              <a:buNone/>
-            </a:pPr>
-            <a:r>
-              <a:rPr lang="en-US" sz="1400" dirty="0">
-                <a:solidFill>
-                  <a:srgbClr val="404040"/>
-                </a:solidFill>
-              </a:rPr>
-              <a:t>slide 7</a:t>
-            </a:r>
-            <a:endParaRPr lang="en-US" sz="1400" dirty="0"/>
-          </a:p>
-        </p:txBody>
-      </p:sp>
-      <p:sp>
-        <p:nvSpPr>
-          <p:cNvPr id="92" name="Text 90"/>
-          <p:cNvSpPr txBox="1"/>
-          <p:nvPr/>
-        </p:nvSpPr>
-        <p:spPr>
-          <a:xfrm>
-            <a:off x="7132320" y="3017520"/>
-            <a:ext cx="3886200" cy="402336"/>
-          </a:xfrm>
-          <a:prstGeom prst="rect">
-            <a:avLst/>
-          </a:prstGeom>
-          <a:noFill/>
-          <a:ln/>
-        </p:spPr>
-        <p:txBody>
-          <a:bodyPr wrap="square" lIns="0" tIns="0" rIns="0" bIns="0" rtlCol="0" anchor="ctr"/>
-          <a:lstStyle/>
-          <a:p>
-            <a:pPr indent="0" marL="0">
-              <a:buNone/>
-            </a:pPr>
-            <a:r>
-              <a:rPr lang="en-US" sz="1400" dirty="0">
-                <a:solidFill>
-                  <a:schemeClr val="tx1"/>
-                </a:solidFill>
-              </a:rPr>
-              <a:t>Why no hint for contest problems?</a:t>
-            </a:r>
-            <a:endParaRPr lang="en-US" sz="1400" dirty="0"/>
-          </a:p>
-        </p:txBody>
-      </p:sp>
-      <p:sp>
-        <p:nvSpPr>
-          <p:cNvPr id="93" name="page coverage"/>
-          <p:cNvSpPr/>
-          <p:nvPr/>
-        </p:nvSpPr>
-        <p:spPr>
-          <a:xfrm>
-            <a:off x="11073384" y="3063240"/>
-            <a:ext cx="438912" cy="310896"/>
-          </a:xfrm>
-          <a:prstGeom prst="roundRect">
-            <a:avLst>
-              <a:gd name="adj" fmla="val 23529"/>
-            </a:avLst>
-          </a:prstGeom>
-          <a:solidFill>
-            <a:srgbClr val="4472C4"/>
-          </a:solidFill>
-          <a:ln w="12700">
-            <a:solidFill>
-              <a:srgbClr val="4472C4"/>
-            </a:solidFill>
-            <a:prstDash val="solid"/>
-          </a:ln>
-        </p:spPr>
-      </p:sp>
-      <p:sp>
-        <p:nvSpPr>
-          <p:cNvPr id="94" name="Text 92"/>
-          <p:cNvSpPr txBox="1"/>
-          <p:nvPr/>
-        </p:nvSpPr>
-        <p:spPr>
-          <a:xfrm>
-            <a:off x="11073384" y="3063240"/>
-            <a:ext cx="438912" cy="310896"/>
-          </a:xfrm>
-          <a:prstGeom prst="rect">
-            <a:avLst/>
-          </a:prstGeom>
-          <a:noFill/>
-          <a:ln/>
-        </p:spPr>
-        <p:txBody>
-          <a:bodyPr wrap="square" lIns="0" tIns="0" rIns="0" bIns="0" rtlCol="0" anchor="ctr"/>
-          <a:lstStyle/>
-          <a:p>
-            <a:pPr algn="ctr" indent="0" marL="0">
-              <a:buNone/>
-            </a:pPr>
-            <a:r>
-              <a:rPr lang="en-US" sz="1400" b="1" dirty="0">
-                <a:solidFill>
-                  <a:srgbClr val="FFFFFF"/>
-                </a:solidFill>
-              </a:rPr>
-              <a:t>11</a:t>
-            </a:r>
-            <a:endParaRPr lang="en-US" sz="1400" dirty="0"/>
-          </a:p>
-        </p:txBody>
-      </p:sp>
-      <p:sp>
-        <p:nvSpPr>
-          <p:cNvPr id="95" name="box "/>
-          <p:cNvSpPr/>
-          <p:nvPr/>
-        </p:nvSpPr>
-        <p:spPr>
-          <a:xfrm>
-            <a:off x="6172200" y="3474720"/>
-            <a:ext cx="5440680" cy="402336"/>
-          </a:xfrm>
-          <a:prstGeom prst="roundRect">
-            <a:avLst>
-              <a:gd name="adj" fmla="val 13636"/>
-            </a:avLst>
-          </a:prstGeom>
-          <a:solidFill>
-            <a:srgbClr val="F2F2F2"/>
-          </a:solidFill>
-          <a:ln w="9525">
-            <a:solidFill>
-              <a:srgbClr val="BFBFBF"/>
-            </a:solidFill>
-            <a:prstDash val="solid"/>
-          </a:ln>
-        </p:spPr>
-      </p:sp>
-      <p:sp>
-        <p:nvSpPr>
-          <p:cNvPr id="96" name="Text 94"/>
-          <p:cNvSpPr txBox="1"/>
-          <p:nvPr/>
-        </p:nvSpPr>
-        <p:spPr>
-          <a:xfrm>
-            <a:off x="6245352" y="3474720"/>
-            <a:ext cx="5294376" cy="402336"/>
-          </a:xfrm>
-          <a:prstGeom prst="rect">
-            <a:avLst/>
-          </a:prstGeom>
-          <a:noFill/>
-          <a:ln/>
-        </p:spPr>
-        <p:txBody>
-          <a:bodyPr wrap="square" lIns="0" tIns="0" rIns="0" bIns="0" rtlCol="0" anchor="ctr"/>
-          <a:lstStyle/>
-          <a:p>
-            <a:pPr algn="ctr" indent="0" marL="0">
-              <a:buNone/>
-            </a:pPr>
-            <a:endParaRPr lang="en-US" sz="1500" dirty="0"/>
-          </a:p>
-        </p:txBody>
-      </p:sp>
-      <p:sp>
-        <p:nvSpPr>
-          <p:cNvPr id="97" name="from slide 7"/>
-          <p:cNvSpPr/>
-          <p:nvPr/>
-        </p:nvSpPr>
-        <p:spPr>
-          <a:xfrm>
-            <a:off x="6245352" y="3529584"/>
-            <a:ext cx="777240" cy="292608"/>
-          </a:xfrm>
-          <a:prstGeom prst="roundRect">
-            <a:avLst>
-              <a:gd name="adj" fmla="val 18750"/>
-            </a:avLst>
-          </a:prstGeom>
-          <a:solidFill>
-            <a:srgbClr val="D9D9D9"/>
-          </a:solidFill>
-          <a:ln w="12700">
-            <a:solidFill>
-              <a:srgbClr val="D9D9D9"/>
-            </a:solidFill>
-            <a:prstDash val="solid"/>
-          </a:ln>
-        </p:spPr>
-      </p:sp>
-      <p:sp>
-        <p:nvSpPr>
-          <p:cNvPr id="98" name="Text 96"/>
-          <p:cNvSpPr txBox="1"/>
-          <p:nvPr/>
-        </p:nvSpPr>
-        <p:spPr>
-          <a:xfrm>
-            <a:off x="6245352" y="3529584"/>
-            <a:ext cx="777240" cy="292608"/>
-          </a:xfrm>
-          <a:prstGeom prst="rect">
-            <a:avLst/>
-          </a:prstGeom>
-          <a:noFill/>
-          <a:ln/>
-        </p:spPr>
-        <p:txBody>
-          <a:bodyPr wrap="square" lIns="0" tIns="0" rIns="0" bIns="0" rtlCol="0" anchor="ctr"/>
-          <a:lstStyle/>
-          <a:p>
-            <a:pPr algn="ctr" indent="0" marL="0">
-              <a:buNone/>
-            </a:pPr>
-            <a:r>
-              <a:rPr lang="en-US" sz="1400" dirty="0">
-                <a:solidFill>
-                  <a:srgbClr val="404040"/>
-                </a:solidFill>
-              </a:rPr>
-              <a:t>slide 7</a:t>
-            </a:r>
-            <a:endParaRPr lang="en-US" sz="1400" dirty="0"/>
-          </a:p>
-        </p:txBody>
-      </p:sp>
-      <p:sp>
-        <p:nvSpPr>
-          <p:cNvPr id="99" name="Text 97"/>
-          <p:cNvSpPr txBox="1"/>
-          <p:nvPr/>
-        </p:nvSpPr>
-        <p:spPr>
-          <a:xfrm>
-            <a:off x="7132320" y="3474720"/>
-            <a:ext cx="3886200" cy="402336"/>
-          </a:xfrm>
-          <a:prstGeom prst="rect">
-            <a:avLst/>
-          </a:prstGeom>
-          <a:noFill/>
-          <a:ln/>
-        </p:spPr>
-        <p:txBody>
-          <a:bodyPr wrap="square" lIns="0" tIns="0" rIns="0" bIns="0" rtlCol="0" anchor="ctr"/>
-          <a:lstStyle/>
-          <a:p>
-            <a:pPr indent="0" marL="0">
-              <a:buNone/>
-            </a:pPr>
-            <a:r>
-              <a:rPr lang="en-US" sz="1400" dirty="0">
-                <a:solidFill>
-                  <a:schemeClr val="tx1"/>
-                </a:solidFill>
-              </a:rPr>
-              <a:t>Where does the recipe stop?</a:t>
-            </a:r>
-            <a:endParaRPr lang="en-US" sz="1400" dirty="0"/>
-          </a:p>
-        </p:txBody>
-      </p:sp>
-      <p:sp>
-        <p:nvSpPr>
-          <p:cNvPr id="100" name="page limits"/>
-          <p:cNvSpPr/>
-          <p:nvPr/>
-        </p:nvSpPr>
-        <p:spPr>
-          <a:xfrm>
-            <a:off x="11073384" y="3520440"/>
-            <a:ext cx="438912" cy="310896"/>
-          </a:xfrm>
-          <a:prstGeom prst="roundRect">
-            <a:avLst>
-              <a:gd name="adj" fmla="val 23529"/>
-            </a:avLst>
-          </a:prstGeom>
-          <a:solidFill>
-            <a:srgbClr val="4472C4"/>
-          </a:solidFill>
-          <a:ln w="12700">
-            <a:solidFill>
-              <a:srgbClr val="4472C4"/>
-            </a:solidFill>
-            <a:prstDash val="solid"/>
-          </a:ln>
-        </p:spPr>
-      </p:sp>
-      <p:sp>
-        <p:nvSpPr>
-          <p:cNvPr id="101" name="Text 99"/>
-          <p:cNvSpPr txBox="1"/>
-          <p:nvPr/>
-        </p:nvSpPr>
-        <p:spPr>
-          <a:xfrm>
-            <a:off x="11073384" y="3520440"/>
-            <a:ext cx="438912" cy="310896"/>
-          </a:xfrm>
-          <a:prstGeom prst="rect">
-            <a:avLst/>
-          </a:prstGeom>
-          <a:noFill/>
-          <a:ln/>
-        </p:spPr>
-        <p:txBody>
-          <a:bodyPr wrap="square" lIns="0" tIns="0" rIns="0" bIns="0" rtlCol="0" anchor="ctr"/>
-          <a:lstStyle/>
-          <a:p>
-            <a:pPr algn="ctr" indent="0" marL="0">
-              <a:buNone/>
-            </a:pPr>
-            <a:r>
-              <a:rPr lang="en-US" sz="1400" b="1" dirty="0">
-                <a:solidFill>
-                  <a:srgbClr val="FFFFFF"/>
-                </a:solidFill>
-              </a:rPr>
-              <a:t>28</a:t>
-            </a:r>
-            <a:endParaRPr lang="en-US" sz="1400" dirty="0"/>
-          </a:p>
-        </p:txBody>
-      </p:sp>
-      <p:sp>
-        <p:nvSpPr>
-          <p:cNvPr id="102" name="box "/>
-          <p:cNvSpPr/>
-          <p:nvPr/>
-        </p:nvSpPr>
-        <p:spPr>
-          <a:xfrm>
-            <a:off x="6172200" y="3931920"/>
-            <a:ext cx="5440680" cy="402336"/>
-          </a:xfrm>
-          <a:prstGeom prst="roundRect">
-            <a:avLst>
-              <a:gd name="adj" fmla="val 13636"/>
-            </a:avLst>
-          </a:prstGeom>
-          <a:solidFill>
-            <a:srgbClr val="F2F2F2"/>
-          </a:solidFill>
-          <a:ln w="9525">
-            <a:solidFill>
-              <a:srgbClr val="BFBFBF"/>
-            </a:solidFill>
-            <a:prstDash val="solid"/>
-          </a:ln>
-        </p:spPr>
-      </p:sp>
-      <p:sp>
-        <p:nvSpPr>
-          <p:cNvPr id="103" name="Text 101"/>
-          <p:cNvSpPr txBox="1"/>
-          <p:nvPr/>
-        </p:nvSpPr>
-        <p:spPr>
-          <a:xfrm>
-            <a:off x="6245352" y="3931920"/>
-            <a:ext cx="5294376" cy="402336"/>
-          </a:xfrm>
-          <a:prstGeom prst="rect">
-            <a:avLst/>
-          </a:prstGeom>
-          <a:noFill/>
-          <a:ln/>
-        </p:spPr>
-        <p:txBody>
-          <a:bodyPr wrap="square" lIns="0" tIns="0" rIns="0" bIns="0" rtlCol="0" anchor="ctr"/>
-          <a:lstStyle/>
-          <a:p>
-            <a:pPr algn="ctr" indent="0" marL="0">
-              <a:buNone/>
-            </a:pPr>
-            <a:endParaRPr lang="en-US" sz="1500" dirty="0"/>
-          </a:p>
-        </p:txBody>
-      </p:sp>
-      <p:sp>
-        <p:nvSpPr>
-          <p:cNvPr id="104" name="from slide 8"/>
-          <p:cNvSpPr/>
-          <p:nvPr/>
-        </p:nvSpPr>
-        <p:spPr>
-          <a:xfrm>
-            <a:off x="6245352" y="3986784"/>
-            <a:ext cx="777240" cy="292608"/>
-          </a:xfrm>
-          <a:prstGeom prst="roundRect">
-            <a:avLst>
-              <a:gd name="adj" fmla="val 18750"/>
-            </a:avLst>
-          </a:prstGeom>
-          <a:solidFill>
-            <a:srgbClr val="D9D9D9"/>
-          </a:solidFill>
-          <a:ln w="12700">
-            <a:solidFill>
-              <a:srgbClr val="D9D9D9"/>
-            </a:solidFill>
-            <a:prstDash val="solid"/>
-          </a:ln>
-        </p:spPr>
-      </p:sp>
-      <p:sp>
-        <p:nvSpPr>
-          <p:cNvPr id="105" name="Text 103"/>
-          <p:cNvSpPr txBox="1"/>
-          <p:nvPr/>
-        </p:nvSpPr>
-        <p:spPr>
-          <a:xfrm>
-            <a:off x="6245352" y="3986784"/>
-            <a:ext cx="777240" cy="292608"/>
-          </a:xfrm>
-          <a:prstGeom prst="rect">
-            <a:avLst/>
-          </a:prstGeom>
-          <a:noFill/>
-          <a:ln/>
-        </p:spPr>
-        <p:txBody>
-          <a:bodyPr wrap="square" lIns="0" tIns="0" rIns="0" bIns="0" rtlCol="0" anchor="ctr"/>
-          <a:lstStyle/>
-          <a:p>
-            <a:pPr algn="ctr" indent="0" marL="0">
-              <a:buNone/>
-            </a:pPr>
-            <a:r>
-              <a:rPr lang="en-US" sz="1400" dirty="0">
-                <a:solidFill>
-                  <a:srgbClr val="404040"/>
-                </a:solidFill>
-              </a:rPr>
-              <a:t>slide 8</a:t>
-            </a:r>
-            <a:endParaRPr lang="en-US" sz="1400" dirty="0"/>
-          </a:p>
-        </p:txBody>
-      </p:sp>
-      <p:sp>
-        <p:nvSpPr>
-          <p:cNvPr id="106" name="Text 104"/>
-          <p:cNvSpPr txBox="1"/>
-          <p:nvPr/>
-        </p:nvSpPr>
-        <p:spPr>
-          <a:xfrm>
-            <a:off x="7132320" y="3931920"/>
-            <a:ext cx="2880360" cy="402336"/>
-          </a:xfrm>
-          <a:prstGeom prst="rect">
-            <a:avLst/>
-          </a:prstGeom>
-          <a:noFill/>
-          <a:ln/>
-        </p:spPr>
-        <p:txBody>
-          <a:bodyPr wrap="square" lIns="0" tIns="0" rIns="0" bIns="0" rtlCol="0" anchor="ctr"/>
-          <a:lstStyle/>
-          <a:p>
-            <a:pPr indent="0" marL="0">
-              <a:buNone/>
-            </a:pPr>
-            <a:r>
-              <a:rPr lang="en-US" sz="1400" dirty="0">
-                <a:solidFill>
-                  <a:schemeClr val="tx1"/>
-                </a:solidFill>
-              </a:rPr>
-              <a:t>What is new vs PAL and cascades?</a:t>
-            </a:r>
-            <a:endParaRPr lang="en-US" sz="1400" dirty="0"/>
-          </a:p>
-        </p:txBody>
-      </p:sp>
-      <p:sp>
-        <p:nvSpPr>
-          <p:cNvPr id="107" name="page published"/>
-          <p:cNvSpPr/>
-          <p:nvPr/>
-        </p:nvSpPr>
-        <p:spPr>
-          <a:xfrm>
-            <a:off x="10067544" y="3977640"/>
-            <a:ext cx="438912" cy="310896"/>
-          </a:xfrm>
-          <a:prstGeom prst="roundRect">
-            <a:avLst>
-              <a:gd name="adj" fmla="val 23529"/>
-            </a:avLst>
-          </a:prstGeom>
-          <a:solidFill>
-            <a:srgbClr val="4472C4"/>
-          </a:solidFill>
-          <a:ln w="12700">
-            <a:solidFill>
-              <a:srgbClr val="4472C4"/>
-            </a:solidFill>
-            <a:prstDash val="solid"/>
-          </a:ln>
-        </p:spPr>
-      </p:sp>
-      <p:sp>
-        <p:nvSpPr>
-          <p:cNvPr id="108" name="Text 106"/>
-          <p:cNvSpPr txBox="1"/>
-          <p:nvPr/>
-        </p:nvSpPr>
-        <p:spPr>
-          <a:xfrm>
-            <a:off x="10067544" y="3977640"/>
-            <a:ext cx="438912" cy="310896"/>
-          </a:xfrm>
-          <a:prstGeom prst="rect">
-            <a:avLst/>
-          </a:prstGeom>
-          <a:noFill/>
-          <a:ln/>
-        </p:spPr>
-        <p:txBody>
-          <a:bodyPr wrap="square" lIns="0" tIns="0" rIns="0" bIns="0" rtlCol="0" anchor="ctr"/>
-          <a:lstStyle/>
-          <a:p>
-            <a:pPr algn="ctr" indent="0" marL="0">
-              <a:buNone/>
-            </a:pPr>
-            <a:r>
-              <a:rPr lang="en-US" sz="1400" b="1" dirty="0">
-                <a:solidFill>
-                  <a:srgbClr val="FFFFFF"/>
-                </a:solidFill>
-              </a:rPr>
-              <a:t>21</a:t>
-            </a:r>
-            <a:endParaRPr lang="en-US" sz="1400" dirty="0"/>
-          </a:p>
-        </p:txBody>
-      </p:sp>
-      <p:sp>
-        <p:nvSpPr>
-          <p:cNvPr id="109" name="page related"/>
-          <p:cNvSpPr/>
-          <p:nvPr/>
-        </p:nvSpPr>
-        <p:spPr>
-          <a:xfrm>
-            <a:off x="10570464" y="3977640"/>
-            <a:ext cx="438912" cy="310896"/>
-          </a:xfrm>
-          <a:prstGeom prst="roundRect">
-            <a:avLst>
-              <a:gd name="adj" fmla="val 23529"/>
-            </a:avLst>
-          </a:prstGeom>
-          <a:solidFill>
-            <a:srgbClr val="4472C4"/>
-          </a:solidFill>
-          <a:ln w="12700">
-            <a:solidFill>
-              <a:srgbClr val="4472C4"/>
-            </a:solidFill>
-            <a:prstDash val="solid"/>
-          </a:ln>
-        </p:spPr>
-      </p:sp>
-      <p:sp>
-        <p:nvSpPr>
-          <p:cNvPr id="110" name="Text 108"/>
-          <p:cNvSpPr txBox="1"/>
-          <p:nvPr/>
-        </p:nvSpPr>
-        <p:spPr>
-          <a:xfrm>
-            <a:off x="10570464" y="3977640"/>
-            <a:ext cx="438912" cy="310896"/>
-          </a:xfrm>
-          <a:prstGeom prst="rect">
-            <a:avLst/>
-          </a:prstGeom>
-          <a:noFill/>
-          <a:ln/>
-        </p:spPr>
-        <p:txBody>
-          <a:bodyPr wrap="square" lIns="0" tIns="0" rIns="0" bIns="0" rtlCol="0" anchor="ctr"/>
-          <a:lstStyle/>
-          <a:p>
-            <a:pPr algn="ctr" indent="0" marL="0">
-              <a:buNone/>
-            </a:pPr>
-            <a:r>
-              <a:rPr lang="en-US" sz="1400" b="1" dirty="0">
-                <a:solidFill>
-                  <a:srgbClr val="FFFFFF"/>
-                </a:solidFill>
-              </a:rPr>
-              <a:t>22</a:t>
-            </a:r>
-            <a:endParaRPr lang="en-US" sz="1400" dirty="0"/>
-          </a:p>
-        </p:txBody>
-      </p:sp>
-      <p:sp>
-        <p:nvSpPr>
-          <p:cNvPr id="111" name="page reported"/>
-          <p:cNvSpPr/>
-          <p:nvPr/>
-        </p:nvSpPr>
-        <p:spPr>
-          <a:xfrm>
-            <a:off x="11073384" y="3977640"/>
-            <a:ext cx="438912" cy="310896"/>
-          </a:xfrm>
-          <a:prstGeom prst="roundRect">
-            <a:avLst>
-              <a:gd name="adj" fmla="val 23529"/>
-            </a:avLst>
-          </a:prstGeom>
-          <a:solidFill>
-            <a:srgbClr val="4472C4"/>
-          </a:solidFill>
-          <a:ln w="12700">
-            <a:solidFill>
-              <a:srgbClr val="4472C4"/>
-            </a:solidFill>
-            <a:prstDash val="solid"/>
-          </a:ln>
-        </p:spPr>
-      </p:sp>
-      <p:sp>
-        <p:nvSpPr>
-          <p:cNvPr id="112" name="Text 110"/>
-          <p:cNvSpPr txBox="1"/>
-          <p:nvPr/>
-        </p:nvSpPr>
-        <p:spPr>
-          <a:xfrm>
-            <a:off x="11073384" y="3977640"/>
-            <a:ext cx="438912" cy="310896"/>
-          </a:xfrm>
-          <a:prstGeom prst="rect">
-            <a:avLst/>
-          </a:prstGeom>
-          <a:noFill/>
-          <a:ln/>
-        </p:spPr>
-        <p:txBody>
-          <a:bodyPr wrap="square" lIns="0" tIns="0" rIns="0" bIns="0" rtlCol="0" anchor="ctr"/>
-          <a:lstStyle/>
-          <a:p>
-            <a:pPr algn="ctr" indent="0" marL="0">
-              <a:buNone/>
-            </a:pPr>
-            <a:r>
-              <a:rPr lang="en-US" sz="1400" b="1" dirty="0">
-                <a:solidFill>
-                  <a:srgbClr val="FFFFFF"/>
-                </a:solidFill>
-              </a:rPr>
-              <a:t>23</a:t>
-            </a:r>
-            <a:endParaRPr lang="en-US" sz="1400" dirty="0"/>
-          </a:p>
-        </p:txBody>
-      </p:sp>
-      <p:sp>
-        <p:nvSpPr>
-          <p:cNvPr id="113" name="box "/>
-          <p:cNvSpPr/>
-          <p:nvPr/>
-        </p:nvSpPr>
-        <p:spPr>
-          <a:xfrm>
-            <a:off x="6172200" y="4389120"/>
-            <a:ext cx="5440680" cy="402336"/>
-          </a:xfrm>
-          <a:prstGeom prst="roundRect">
-            <a:avLst>
-              <a:gd name="adj" fmla="val 13636"/>
-            </a:avLst>
-          </a:prstGeom>
-          <a:solidFill>
-            <a:srgbClr val="F2F2F2"/>
-          </a:solidFill>
-          <a:ln w="9525">
-            <a:solidFill>
-              <a:srgbClr val="BFBFBF"/>
-            </a:solidFill>
-            <a:prstDash val="solid"/>
-          </a:ln>
-        </p:spPr>
-      </p:sp>
-      <p:sp>
-        <p:nvSpPr>
-          <p:cNvPr id="114" name="Text 112"/>
-          <p:cNvSpPr txBox="1"/>
-          <p:nvPr/>
-        </p:nvSpPr>
-        <p:spPr>
-          <a:xfrm>
-            <a:off x="6245352" y="4389120"/>
-            <a:ext cx="5294376" cy="402336"/>
-          </a:xfrm>
-          <a:prstGeom prst="rect">
-            <a:avLst/>
-          </a:prstGeom>
-          <a:noFill/>
-          <a:ln/>
-        </p:spPr>
-        <p:txBody>
-          <a:bodyPr wrap="square" lIns="0" tIns="0" rIns="0" bIns="0" rtlCol="0" anchor="ctr"/>
-          <a:lstStyle/>
-          <a:p>
-            <a:pPr algn="ctr" indent="0" marL="0">
-              <a:buNone/>
-            </a:pPr>
-            <a:endParaRPr lang="en-US" sz="1500" dirty="0"/>
-          </a:p>
-        </p:txBody>
-      </p:sp>
-      <p:sp>
-        <p:nvSpPr>
-          <p:cNvPr id="115" name="from slide 8"/>
-          <p:cNvSpPr/>
-          <p:nvPr/>
-        </p:nvSpPr>
-        <p:spPr>
-          <a:xfrm>
-            <a:off x="6245352" y="4443984"/>
-            <a:ext cx="777240" cy="292608"/>
-          </a:xfrm>
-          <a:prstGeom prst="roundRect">
-            <a:avLst>
-              <a:gd name="adj" fmla="val 18750"/>
-            </a:avLst>
-          </a:prstGeom>
-          <a:solidFill>
-            <a:srgbClr val="D9D9D9"/>
-          </a:solidFill>
-          <a:ln w="12700">
-            <a:solidFill>
-              <a:srgbClr val="D9D9D9"/>
-            </a:solidFill>
-            <a:prstDash val="solid"/>
-          </a:ln>
-        </p:spPr>
-      </p:sp>
-      <p:sp>
-        <p:nvSpPr>
-          <p:cNvPr id="116" name="Text 114"/>
-          <p:cNvSpPr txBox="1"/>
-          <p:nvPr/>
-        </p:nvSpPr>
-        <p:spPr>
-          <a:xfrm>
-            <a:off x="6245352" y="4443984"/>
-            <a:ext cx="777240" cy="292608"/>
-          </a:xfrm>
-          <a:prstGeom prst="rect">
-            <a:avLst/>
-          </a:prstGeom>
-          <a:noFill/>
-          <a:ln/>
-        </p:spPr>
-        <p:txBody>
-          <a:bodyPr wrap="square" lIns="0" tIns="0" rIns="0" bIns="0" rtlCol="0" anchor="ctr"/>
-          <a:lstStyle/>
-          <a:p>
-            <a:pPr algn="ctr" indent="0" marL="0">
-              <a:buNone/>
-            </a:pPr>
-            <a:r>
-              <a:rPr lang="en-US" sz="1400" dirty="0">
-                <a:solidFill>
-                  <a:srgbClr val="404040"/>
-                </a:solidFill>
-              </a:rPr>
-              <a:t>slide 8</a:t>
-            </a:r>
-            <a:endParaRPr lang="en-US" sz="1400" dirty="0"/>
-          </a:p>
-        </p:txBody>
-      </p:sp>
-      <p:sp>
-        <p:nvSpPr>
-          <p:cNvPr id="117" name="Text 115"/>
-          <p:cNvSpPr txBox="1"/>
-          <p:nvPr/>
-        </p:nvSpPr>
-        <p:spPr>
-          <a:xfrm>
-            <a:off x="7132320" y="4389120"/>
-            <a:ext cx="3886200" cy="402336"/>
-          </a:xfrm>
-          <a:prstGeom prst="rect">
-            <a:avLst/>
-          </a:prstGeom>
-          <a:noFill/>
-          <a:ln/>
-        </p:spPr>
-        <p:txBody>
-          <a:bodyPr wrap="square" lIns="0" tIns="0" rIns="0" bIns="0" rtlCol="0" anchor="ctr"/>
-          <a:lstStyle/>
-          <a:p>
-            <a:pPr indent="0" marL="0">
-              <a:buNone/>
-            </a:pPr>
-            <a:r>
-              <a:rPr lang="en-US" sz="1400" dirty="0">
-                <a:solidFill>
-                  <a:schemeClr val="tx1"/>
-                </a:solidFill>
-              </a:rPr>
-              <a:t>Why not majority voting?</a:t>
-            </a:r>
-            <a:endParaRPr lang="en-US" sz="1400" dirty="0"/>
-          </a:p>
-        </p:txBody>
-      </p:sp>
-      <p:sp>
-        <p:nvSpPr>
-          <p:cNvPr id="118" name="page vote"/>
-          <p:cNvSpPr/>
-          <p:nvPr/>
-        </p:nvSpPr>
-        <p:spPr>
-          <a:xfrm>
-            <a:off x="11073384" y="4434840"/>
-            <a:ext cx="438912" cy="310896"/>
-          </a:xfrm>
-          <a:prstGeom prst="roundRect">
-            <a:avLst>
-              <a:gd name="adj" fmla="val 23529"/>
-            </a:avLst>
-          </a:prstGeom>
-          <a:solidFill>
-            <a:srgbClr val="4472C4"/>
-          </a:solidFill>
-          <a:ln w="12700">
-            <a:solidFill>
-              <a:srgbClr val="4472C4"/>
-            </a:solidFill>
-            <a:prstDash val="solid"/>
-          </a:ln>
-        </p:spPr>
-      </p:sp>
-      <p:sp>
-        <p:nvSpPr>
-          <p:cNvPr id="119" name="Text 117"/>
-          <p:cNvSpPr txBox="1"/>
-          <p:nvPr/>
-        </p:nvSpPr>
-        <p:spPr>
-          <a:xfrm>
-            <a:off x="11073384" y="4434840"/>
-            <a:ext cx="438912" cy="310896"/>
-          </a:xfrm>
-          <a:prstGeom prst="rect">
-            <a:avLst/>
-          </a:prstGeom>
-          <a:noFill/>
-          <a:ln/>
-        </p:spPr>
-        <p:txBody>
-          <a:bodyPr wrap="square" lIns="0" tIns="0" rIns="0" bIns="0" rtlCol="0" anchor="ctr"/>
-          <a:lstStyle/>
-          <a:p>
-            <a:pPr algn="ctr" indent="0" marL="0">
-              <a:buNone/>
-            </a:pPr>
-            <a:r>
-              <a:rPr lang="en-US" sz="1400" b="1" dirty="0">
-                <a:solidFill>
-                  <a:srgbClr val="FFFFFF"/>
-                </a:solidFill>
-              </a:rPr>
-              <a:t>24</a:t>
-            </a:r>
-            <a:endParaRPr lang="en-US" sz="1400" dirty="0"/>
-          </a:p>
-        </p:txBody>
-      </p:sp>
-      <p:sp>
-        <p:nvSpPr>
-          <p:cNvPr id="120" name="box "/>
-          <p:cNvSpPr/>
-          <p:nvPr/>
-        </p:nvSpPr>
-        <p:spPr>
-          <a:xfrm>
-            <a:off x="6172200" y="4846320"/>
-            <a:ext cx="5440680" cy="402336"/>
-          </a:xfrm>
-          <a:prstGeom prst="roundRect">
-            <a:avLst>
-              <a:gd name="adj" fmla="val 13636"/>
-            </a:avLst>
-          </a:prstGeom>
-          <a:solidFill>
-            <a:srgbClr val="F2F2F2"/>
-          </a:solidFill>
-          <a:ln w="9525">
-            <a:solidFill>
-              <a:srgbClr val="BFBFBF"/>
-            </a:solidFill>
-            <a:prstDash val="solid"/>
-          </a:ln>
-        </p:spPr>
-      </p:sp>
-      <p:sp>
-        <p:nvSpPr>
-          <p:cNvPr id="121" name="Text 119"/>
-          <p:cNvSpPr txBox="1"/>
-          <p:nvPr/>
-        </p:nvSpPr>
-        <p:spPr>
-          <a:xfrm>
-            <a:off x="6245352" y="4846320"/>
-            <a:ext cx="5294376" cy="402336"/>
-          </a:xfrm>
-          <a:prstGeom prst="rect">
-            <a:avLst/>
-          </a:prstGeom>
-          <a:noFill/>
-          <a:ln/>
-        </p:spPr>
-        <p:txBody>
-          <a:bodyPr wrap="square" lIns="0" tIns="0" rIns="0" bIns="0" rtlCol="0" anchor="ctr"/>
-          <a:lstStyle/>
-          <a:p>
-            <a:pPr algn="ctr" indent="0" marL="0">
-              <a:buNone/>
-            </a:pPr>
-            <a:endParaRPr lang="en-US" sz="1500" dirty="0"/>
-          </a:p>
-        </p:txBody>
-      </p:sp>
-      <p:sp>
-        <p:nvSpPr>
-          <p:cNvPr id="122" name="from slide 8"/>
-          <p:cNvSpPr/>
-          <p:nvPr/>
-        </p:nvSpPr>
-        <p:spPr>
-          <a:xfrm>
-            <a:off x="6245352" y="4901184"/>
-            <a:ext cx="777240" cy="292608"/>
-          </a:xfrm>
-          <a:prstGeom prst="roundRect">
-            <a:avLst>
-              <a:gd name="adj" fmla="val 18750"/>
-            </a:avLst>
-          </a:prstGeom>
-          <a:solidFill>
-            <a:srgbClr val="D9D9D9"/>
-          </a:solidFill>
-          <a:ln w="12700">
-            <a:solidFill>
-              <a:srgbClr val="D9D9D9"/>
-            </a:solidFill>
-            <a:prstDash val="solid"/>
-          </a:ln>
-        </p:spPr>
-      </p:sp>
-      <p:sp>
-        <p:nvSpPr>
-          <p:cNvPr id="123" name="Text 121"/>
-          <p:cNvSpPr txBox="1"/>
-          <p:nvPr/>
-        </p:nvSpPr>
-        <p:spPr>
-          <a:xfrm>
-            <a:off x="6245352" y="4901184"/>
-            <a:ext cx="777240" cy="292608"/>
-          </a:xfrm>
-          <a:prstGeom prst="rect">
-            <a:avLst/>
-          </a:prstGeom>
-          <a:noFill/>
-          <a:ln/>
-        </p:spPr>
-        <p:txBody>
-          <a:bodyPr wrap="square" lIns="0" tIns="0" rIns="0" bIns="0" rtlCol="0" anchor="ctr"/>
-          <a:lstStyle/>
-          <a:p>
-            <a:pPr algn="ctr" indent="0" marL="0">
-              <a:buNone/>
-            </a:pPr>
-            <a:r>
-              <a:rPr lang="en-US" sz="1400" dirty="0">
-                <a:solidFill>
-                  <a:srgbClr val="404040"/>
-                </a:solidFill>
-              </a:rPr>
-              <a:t>slide 8</a:t>
-            </a:r>
-            <a:endParaRPr lang="en-US" sz="1400" dirty="0"/>
-          </a:p>
-        </p:txBody>
-      </p:sp>
-      <p:sp>
-        <p:nvSpPr>
-          <p:cNvPr id="124" name="Text 122"/>
-          <p:cNvSpPr txBox="1"/>
-          <p:nvPr/>
-        </p:nvSpPr>
-        <p:spPr>
-          <a:xfrm>
-            <a:off x="7132320" y="4846320"/>
-            <a:ext cx="3383280" cy="402336"/>
-          </a:xfrm>
-          <a:prstGeom prst="rect">
-            <a:avLst/>
-          </a:prstGeom>
-          <a:noFill/>
-          <a:ln/>
-        </p:spPr>
-        <p:txBody>
-          <a:bodyPr wrap="square" lIns="0" tIns="0" rIns="0" bIns="0" rtlCol="0" anchor="ctr"/>
-          <a:lstStyle/>
-          <a:p>
-            <a:pPr indent="0" marL="0">
-              <a:buNone/>
-            </a:pPr>
-            <a:r>
-              <a:rPr lang="en-US" sz="1400" dirty="0">
-                <a:solidFill>
-                  <a:schemeClr val="tx1"/>
-                </a:solidFill>
-              </a:rPr>
-              <a:t>Is the comparison fair?</a:t>
-            </a:r>
-            <a:endParaRPr lang="en-US" sz="1400" dirty="0"/>
-          </a:p>
-        </p:txBody>
-      </p:sp>
-      <p:sp>
-        <p:nvSpPr>
-          <p:cNvPr id="125" name="page fair"/>
-          <p:cNvSpPr/>
-          <p:nvPr/>
-        </p:nvSpPr>
-        <p:spPr>
-          <a:xfrm>
-            <a:off x="10570464" y="4892040"/>
-            <a:ext cx="438912" cy="310896"/>
-          </a:xfrm>
-          <a:prstGeom prst="roundRect">
-            <a:avLst>
-              <a:gd name="adj" fmla="val 23529"/>
-            </a:avLst>
-          </a:prstGeom>
-          <a:solidFill>
-            <a:srgbClr val="4472C4"/>
-          </a:solidFill>
-          <a:ln w="12700">
-            <a:solidFill>
-              <a:srgbClr val="4472C4"/>
-            </a:solidFill>
-            <a:prstDash val="solid"/>
-          </a:ln>
-        </p:spPr>
-      </p:sp>
-      <p:sp>
-        <p:nvSpPr>
-          <p:cNvPr id="126" name="Text 124"/>
-          <p:cNvSpPr txBox="1"/>
-          <p:nvPr/>
-        </p:nvSpPr>
-        <p:spPr>
-          <a:xfrm>
-            <a:off x="10570464" y="4892040"/>
-            <a:ext cx="438912" cy="310896"/>
-          </a:xfrm>
-          <a:prstGeom prst="rect">
-            <a:avLst/>
-          </a:prstGeom>
-          <a:noFill/>
-          <a:ln/>
-        </p:spPr>
-        <p:txBody>
-          <a:bodyPr wrap="square" lIns="0" tIns="0" rIns="0" bIns="0" rtlCol="0" anchor="ctr"/>
-          <a:lstStyle/>
-          <a:p>
-            <a:pPr algn="ctr" indent="0" marL="0">
-              <a:buNone/>
-            </a:pPr>
-            <a:r>
-              <a:rPr lang="en-US" sz="1400" b="1" dirty="0">
-                <a:solidFill>
-                  <a:srgbClr val="FFFFFF"/>
-                </a:solidFill>
-              </a:rPr>
-              <a:t>25</a:t>
-            </a:r>
-            <a:endParaRPr lang="en-US" sz="1400" dirty="0"/>
-          </a:p>
-        </p:txBody>
-      </p:sp>
-      <p:sp>
-        <p:nvSpPr>
-          <p:cNvPr id="127" name="page setup"/>
-          <p:cNvSpPr/>
-          <p:nvPr/>
-        </p:nvSpPr>
-        <p:spPr>
-          <a:xfrm>
-            <a:off x="11073384" y="4892040"/>
-            <a:ext cx="438912" cy="310896"/>
-          </a:xfrm>
-          <a:prstGeom prst="roundRect">
-            <a:avLst>
-              <a:gd name="adj" fmla="val 23529"/>
-            </a:avLst>
-          </a:prstGeom>
-          <a:solidFill>
-            <a:srgbClr val="4472C4"/>
-          </a:solidFill>
-          <a:ln w="12700">
-            <a:solidFill>
-              <a:srgbClr val="4472C4"/>
-            </a:solidFill>
-            <a:prstDash val="solid"/>
-          </a:ln>
-        </p:spPr>
-      </p:sp>
-      <p:sp>
-        <p:nvSpPr>
-          <p:cNvPr id="128" name="Text 126"/>
-          <p:cNvSpPr txBox="1"/>
-          <p:nvPr/>
-        </p:nvSpPr>
-        <p:spPr>
-          <a:xfrm>
-            <a:off x="11073384" y="4892040"/>
-            <a:ext cx="438912" cy="310896"/>
-          </a:xfrm>
-          <a:prstGeom prst="rect">
-            <a:avLst/>
-          </a:prstGeom>
-          <a:noFill/>
-          <a:ln/>
-        </p:spPr>
-        <p:txBody>
-          <a:bodyPr wrap="square" lIns="0" tIns="0" rIns="0" bIns="0" rtlCol="0" anchor="ctr"/>
-          <a:lstStyle/>
-          <a:p>
-            <a:pPr algn="ctr" indent="0" marL="0">
-              <a:buNone/>
-            </a:pPr>
-            <a:r>
-              <a:rPr lang="en-US" sz="1400" b="1" dirty="0">
-                <a:solidFill>
-                  <a:srgbClr val="FFFFFF"/>
-                </a:solidFill>
-              </a:rPr>
-              <a:t>30</a:t>
-            </a:r>
-            <a:endParaRPr lang="en-US" sz="1400" dirty="0"/>
-          </a:p>
-        </p:txBody>
-      </p:sp>
-      <p:sp>
-        <p:nvSpPr>
-          <p:cNvPr id="129" name="box "/>
-          <p:cNvSpPr/>
-          <p:nvPr/>
-        </p:nvSpPr>
-        <p:spPr>
-          <a:xfrm>
-            <a:off x="6172200" y="5303520"/>
-            <a:ext cx="5440680" cy="402336"/>
-          </a:xfrm>
-          <a:prstGeom prst="roundRect">
-            <a:avLst>
-              <a:gd name="adj" fmla="val 13636"/>
-            </a:avLst>
-          </a:prstGeom>
-          <a:solidFill>
-            <a:srgbClr val="F2F2F2"/>
-          </a:solidFill>
-          <a:ln w="9525">
-            <a:solidFill>
-              <a:srgbClr val="BFBFBF"/>
-            </a:solidFill>
-            <a:prstDash val="solid"/>
-          </a:ln>
-        </p:spPr>
-      </p:sp>
-      <p:sp>
-        <p:nvSpPr>
-          <p:cNvPr id="130" name="Text 128"/>
-          <p:cNvSpPr txBox="1"/>
-          <p:nvPr/>
-        </p:nvSpPr>
-        <p:spPr>
-          <a:xfrm>
-            <a:off x="6245352" y="5303520"/>
-            <a:ext cx="5294376" cy="402336"/>
-          </a:xfrm>
-          <a:prstGeom prst="rect">
-            <a:avLst/>
-          </a:prstGeom>
-          <a:noFill/>
-          <a:ln/>
-        </p:spPr>
-        <p:txBody>
-          <a:bodyPr wrap="square" lIns="0" tIns="0" rIns="0" bIns="0" rtlCol="0" anchor="ctr"/>
-          <a:lstStyle/>
-          <a:p>
-            <a:pPr algn="ctr" indent="0" marL="0">
-              <a:buNone/>
-            </a:pPr>
-            <a:endParaRPr lang="en-US" sz="1500" dirty="0"/>
-          </a:p>
-        </p:txBody>
-      </p:sp>
-      <p:sp>
-        <p:nvSpPr>
-          <p:cNvPr id="131" name="from slide 8"/>
-          <p:cNvSpPr/>
-          <p:nvPr/>
-        </p:nvSpPr>
-        <p:spPr>
-          <a:xfrm>
-            <a:off x="6245352" y="5358384"/>
-            <a:ext cx="777240" cy="292608"/>
-          </a:xfrm>
-          <a:prstGeom prst="roundRect">
-            <a:avLst>
-              <a:gd name="adj" fmla="val 18750"/>
-            </a:avLst>
-          </a:prstGeom>
-          <a:solidFill>
-            <a:srgbClr val="D9D9D9"/>
-          </a:solidFill>
-          <a:ln w="12700">
-            <a:solidFill>
-              <a:srgbClr val="D9D9D9"/>
-            </a:solidFill>
-            <a:prstDash val="solid"/>
-          </a:ln>
-        </p:spPr>
-      </p:sp>
-      <p:sp>
-        <p:nvSpPr>
-          <p:cNvPr id="132" name="Text 130"/>
-          <p:cNvSpPr txBox="1"/>
-          <p:nvPr/>
-        </p:nvSpPr>
-        <p:spPr>
-          <a:xfrm>
-            <a:off x="6245352" y="5358384"/>
-            <a:ext cx="777240" cy="292608"/>
-          </a:xfrm>
-          <a:prstGeom prst="rect">
-            <a:avLst/>
-          </a:prstGeom>
-          <a:noFill/>
-          <a:ln/>
-        </p:spPr>
-        <p:txBody>
-          <a:bodyPr wrap="square" lIns="0" tIns="0" rIns="0" bIns="0" rtlCol="0" anchor="ctr"/>
-          <a:lstStyle/>
-          <a:p>
-            <a:pPr algn="ctr" indent="0" marL="0">
-              <a:buNone/>
-            </a:pPr>
-            <a:r>
-              <a:rPr lang="en-US" sz="1400" dirty="0">
-                <a:solidFill>
-                  <a:srgbClr val="404040"/>
-                </a:solidFill>
-              </a:rPr>
-              <a:t>slide 8</a:t>
-            </a:r>
-            <a:endParaRPr lang="en-US" sz="1400" dirty="0"/>
-          </a:p>
-        </p:txBody>
-      </p:sp>
-      <p:sp>
-        <p:nvSpPr>
-          <p:cNvPr id="133" name="Text 131"/>
-          <p:cNvSpPr txBox="1"/>
-          <p:nvPr/>
-        </p:nvSpPr>
-        <p:spPr>
-          <a:xfrm>
-            <a:off x="7132320" y="5303520"/>
-            <a:ext cx="3886200" cy="402336"/>
-          </a:xfrm>
-          <a:prstGeom prst="rect">
-            <a:avLst/>
-          </a:prstGeom>
-          <a:noFill/>
-          <a:ln/>
-        </p:spPr>
-        <p:txBody>
-          <a:bodyPr wrap="square" lIns="0" tIns="0" rIns="0" bIns="0" rtlCol="0" anchor="ctr"/>
-          <a:lstStyle/>
-          <a:p>
-            <a:pPr indent="0" marL="0">
-              <a:buNone/>
-            </a:pPr>
-            <a:r>
-              <a:rPr lang="en-US" sz="1400" dirty="0">
-                <a:solidFill>
-                  <a:schemeClr val="tx1"/>
-                </a:solidFill>
-              </a:rPr>
-              <a:t>Does it hold for smaller models?</a:t>
-            </a:r>
-            <a:endParaRPr lang="en-US" sz="1400" dirty="0"/>
-          </a:p>
-        </p:txBody>
-      </p:sp>
-      <p:sp>
-        <p:nvSpPr>
-          <p:cNvPr id="134" name="page small"/>
-          <p:cNvSpPr/>
-          <p:nvPr/>
-        </p:nvSpPr>
-        <p:spPr>
-          <a:xfrm>
-            <a:off x="11073384" y="5349240"/>
-            <a:ext cx="438912" cy="310896"/>
-          </a:xfrm>
-          <a:prstGeom prst="roundRect">
-            <a:avLst>
-              <a:gd name="adj" fmla="val 23529"/>
-            </a:avLst>
-          </a:prstGeom>
-          <a:solidFill>
-            <a:srgbClr val="4472C4"/>
-          </a:solidFill>
-          <a:ln w="12700">
-            <a:solidFill>
-              <a:srgbClr val="4472C4"/>
-            </a:solidFill>
-            <a:prstDash val="solid"/>
-          </a:ln>
-        </p:spPr>
-      </p:sp>
-      <p:sp>
-        <p:nvSpPr>
-          <p:cNvPr id="135" name="Text 133"/>
-          <p:cNvSpPr txBox="1"/>
-          <p:nvPr/>
-        </p:nvSpPr>
-        <p:spPr>
-          <a:xfrm>
-            <a:off x="11073384" y="5349240"/>
-            <a:ext cx="438912" cy="310896"/>
-          </a:xfrm>
-          <a:prstGeom prst="rect">
-            <a:avLst/>
-          </a:prstGeom>
-          <a:noFill/>
-          <a:ln/>
-        </p:spPr>
-        <p:txBody>
-          <a:bodyPr wrap="square" lIns="0" tIns="0" rIns="0" bIns="0" rtlCol="0" anchor="ctr"/>
-          <a:lstStyle/>
-          <a:p>
-            <a:pPr algn="ctr" indent="0" marL="0">
-              <a:buNone/>
-            </a:pPr>
-            <a:r>
-              <a:rPr lang="en-US" sz="1400" b="1" dirty="0">
-                <a:solidFill>
-                  <a:srgbClr val="FFFFFF"/>
-                </a:solidFill>
-              </a:rPr>
-              <a:t>26</a:t>
-            </a:r>
-            <a:endParaRPr lang="en-US" sz="1400" dirty="0"/>
-          </a:p>
-        </p:txBody>
-      </p:sp>
-      <p:sp>
-        <p:nvSpPr>
-          <p:cNvPr id="136" name="Text 134"/>
-          <p:cNvSpPr txBox="1"/>
-          <p:nvPr/>
-        </p:nvSpPr>
-        <p:spPr>
-          <a:xfrm>
-            <a:off x="548640" y="5806440"/>
-            <a:ext cx="11064240" cy="365760"/>
-          </a:xfrm>
-          <a:prstGeom prst="rect">
-            <a:avLst/>
-          </a:prstGeom>
-          <a:noFill/>
-          <a:ln/>
-        </p:spPr>
-        <p:txBody>
-          <a:bodyPr wrap="square" lIns="0" tIns="0" rIns="0" bIns="0" rtlCol="0" anchor="ctr"/>
-          <a:lstStyle/>
-          <a:p>
-            <a:pPr indent="0" marL="0">
-              <a:buNone/>
-            </a:pPr>
-            <a:r>
-              <a:rPr lang="en-US" sz="1500" dirty="0">
-                <a:solidFill>
-                  <a:schemeClr val="tx2"/>
-                </a:solidFill>
-              </a:rPr>
-              <a:t>Also: 27 all policies, cost vs accuracy</a:t>
-            </a:r>
-            <a:endParaRPr lang="en-US" sz="1500" dirty="0"/>
-          </a:p>
-        </p:txBody>
-      </p:sp>
-      <p:sp>
-        <p:nvSpPr>
-          <p:cNvPr id="25" name="Slide Number Placeholder 0"/>
-          <p:cNvSpPr>
-            <a:spLocks noGrp="1"/>
-          </p:cNvSpPr>
-          <p:nvPr>
-            <p:ph type="sldNum" sz="quarter" idx="4294967295"/>
-          </p:nvPr>
-        </p:nvSpPr>
-        <p:spPr>
-          <a:xfrm>
-            <a:off x="11155680" y="6355080"/>
-            <a:ext cx="731520" cy="320040"/>
-          </a:xfrm>
-          <a:prstGeom prst="rect">
-            <a:avLst/>
-          </a:prstGeom>
-          <a:extLst>
-            <a:ext uri="{C572A759-6A51-4108-AA02-DFA0A04FC94B}">
-              <ma14:wrappingTextBoxFlag xmlns:ma14="http://schemas.microsoft.com/office/mac/drawingml/2011/main" val="0"/>
-            </a:ext>
-          </a:extLst>
-        </p:spPr>
-        <p:txBody>
-          <a:bodyPr/>
-          <a:lstStyle>
-            <a:lvl1pPr>
-              <a:defRPr sz="1200">
-                <a:solidFill>
-                  <a:srgbClr val="8C8C8C"/>
-                </a:solidFill>
-              </a:defRPr>
-            </a:lvl1pPr>
-          </a:lstStyle>
-          <a:p>
-            <a:pPr algn="r"/>
-            <a:fld id="{F7021451-1387-4CA6-816F-3879F97B5CBC}" type="slidenum">
-              <a:rPr b="0" lang="en-US"/>
-              <a:t>9</a:t>
-            </a:fld>
-            <a:endParaRPr lang="en-US"/>
+              <a:rPr lang="en-US" sz="1600" dirty="0">
+                <a:solidFill>
+                  <a:srgbClr val="44546A"/>
+                </a:solidFill>
+              </a:rPr>
+              <a:t>Team 5: Sangjun Lee, Seongbin Park</a:t>
+            </a:r>
+            <a:endParaRPr lang="en-US" sz="2200" dirty="0"/>
           </a:p>
         </p:txBody>
       </p:sp>

--- a/Proposal_Team5.pptx
+++ b/Proposal_Team5.pptx
@@ -136,7 +136,7 @@
   <p:extLst>
     <p:ext uri="{521415D9-36F7-43E2-AB2F-B90AF26B5E84}">
       <p14:sectionLst xmlns:p14="http://schemas.microsoft.com/office/powerpoint/2010/main">
-        <p14:section name="Talk" id="{446467f7-c4c9-b2e3-15b8-2cc65cd6b02b}">
+        <p14:section name="Talk" id="{c6541ae8-6280-058c-a5e7-31fd0fd83439}">
           <p14:sldIdLst>
             <p14:sldId id="256"/>
             <p14:sldId id="257"/>
@@ -149,7 +149,7 @@
             <p14:sldId id="264"/>
           </p14:sldIdLst>
         </p14:section>
-        <p14:section name="Extra pages" id="{5931e1d7-a719-afa7-7cef-69c0c54d2f01}">
+        <p14:section name="Extra pages" id="{7ca83e5c-d34d-74f5-e6e6-214d6695fc8d}">
           <p14:sldIdLst>
             <p14:sldId id="265"/>
             <p14:sldId id="266"/>
@@ -1574,7 +1574,7 @@
           <a:p>
             <a:r>
               <a:rPr lang="en-US" dirty="0"/>
-              <a:t>(답변) 아니요, 모든 단계를 네 종류 전부에 쓰지는 않습니다. 경시 문제는 라이브러리 없이 알고리즘만 짜는 문제라 힌트로 채울 빈칸이 없습니다. 실패의 원인이 추론이라서, 예제와 짧은 완전 탐색 프로그램으로 검사하고 실패할 때만 더 생각하게 하면 항상 생각할 때와 같은 66%를 18% 적은 토큰에 얻습니다. 재사용은 같은 문제가 데이터만 바뀌어 반복될 때 쓰므로 매번 새 문제인 경시에는 맞지 않습니다. 전체 방법의 87% 대 74%는 기하와 최적화 208문제를 세 모델로 푼 결과입니다.</a:t>
+              <a:t>(답변) 아니요, 모든 단계를 네 종류 전부에 쓰지는 않습니다. 경시 문제는 라이브러리 없이 알고리즘만 짜는 문제라 힌트로 채울 빈칸이 없고, 실패 원인은 추론입니다. 가장 가까운 힌트로 관련 기하 함수 8개를 줘 봤는데, Qwen3-32B는 12.1%에서 13.7%로 차이가 없었고 gpt-oss-20b는 37.7%에서 33.4%로 오히려 떨어졌습니다. 함수를 받으면 덜 생각하고 다른 오답을 썼습니다. 문제마다 알고리즘을 알려 주는 힌트는 사실상 풀이의 일부라 싸지도 자동도 아닙니다. 그래서 경시에는 검사와 생각만 써서, 항상 생각할 때와 같은 66%를 18% 적은 토큰에 얻습니다. 재사용도 매번 새 문제라 맞지 않습니다.</a:t>
             </a:r>
             <a:endParaRPr lang="en-US" dirty="0"/>
           </a:p>
@@ -8131,10 +8131,10 @@
                       <a:r>
                         <a:rPr lang="en-US" sz="1400" dirty="0">
                           <a:solidFill>
-                            <a:srgbClr val="8C8C8C"/>
+                            <a:srgbClr val="C00000"/>
                           </a:solidFill>
                         </a:rPr>
-                        <a:t>– no library to hint: plain algorithms</a:t>
+                        <a:t>✗ no library to hint; 8 geometry helpers hurt: 37.7% → 33.4% (gpt-oss-20b)</a:t>
                       </a:r>
                       <a:endParaRPr lang="en-US" sz="1400" dirty="0"/>
                     </a:p>
@@ -9205,7 +9205,7 @@
                   <a:schemeClr val="tx2"/>
                 </a:solidFill>
               </a:rPr>
-              <a:t>✓ holds   ~ partly   – not tested.   The 87% pools 108 geometry and 100 optimization problems, each solved by 3 models.</a:t>
+              <a:t>✓ holds   ~ partly   ✗ does not help   – not tested.   The 87% pools 108 geometry and 100 optimization problems, each solved by 3 models.</a:t>
             </a:r>
             <a:endParaRPr lang="en-US" sz="1400" dirty="0"/>
           </a:p>

--- a/Proposal_Team5.pptx
+++ b/Proposal_Team5.pptx
@@ -136,7 +136,7 @@
   <p:extLst>
     <p:ext uri="{521415D9-36F7-43E2-AB2F-B90AF26B5E84}">
       <p14:sectionLst xmlns:p14="http://schemas.microsoft.com/office/powerpoint/2010/main">
-        <p14:section name="Talk" id="{c6541ae8-6280-058c-a5e7-31fd0fd83439}">
+        <p14:section name="Talk" id="{863868c7-7d04-ed96-d6f8-ba26627d3b16}">
           <p14:sldIdLst>
             <p14:sldId id="256"/>
             <p14:sldId id="257"/>
@@ -149,7 +149,7 @@
             <p14:sldId id="264"/>
           </p14:sldIdLst>
         </p14:section>
-        <p14:section name="Extra pages" id="{7ca83e5c-d34d-74f5-e6e6-214d6695fc8d}">
+        <p14:section name="Extra pages" id="{6be392ba-d282-c24e-e049-e1f4e516e36e}">
           <p14:sldIdLst>
             <p14:sldId id="265"/>
             <p14:sldId id="266"/>
@@ -3862,7 +3862,12 @@
           <a:p>
             <a:r>
               <a:rPr lang="en-US" dirty="0"/>
-              <a:t>(35초) 새로운 점은 세 가지입니다. 학습 없이, 공짜 검사가 실패할 때만 생각합니다. 정답 없이, 모델 자신의 검사된 프로그램을 힌트로 줍니다. 그리고 특화 모델을 파인튜닝하지 않고도, 24GB GPU 한 장으로 같은 정확도를 냅니다. 다음으로는 더 많은 모델로 검증을 마치고, 검사로 못 잡는 오류, 즉 실행은 되지만 문제를 잘못 모델링한 프로그램을 다루겠습니다. 정리하면, 짧은 힌트를 먼저 주고, 공짜 검사가 실패한 곳에서만 생각하게 하자는 것입니다.</a:t>
+              <a:t>(60초) 마지막으로 새로운 점과 다음 계획입니다. 왼쪽이 흔히 쓰는 방법, 오른쪽이 저희 방법입니다. 첫째, 기존에는 어려워 보이는 문제에 생각을 몰아주거나 언제 생각할지를 학습시키지만, 저희는 학습 없이 공짜 검사가 실패한 문제에만 생각을 써서 74%를 87%로 올리고 토큰도 줄였습니다. 둘째, 기존에는 매뉴얼이나 교사 모델이 짠 프로그램을 주지만, 저희는 모델 자신이 짜서 검사를 통과한 프로그램을 짧은 힌트로 주므로 사람도 정답도 필요 없습니다. 셋째, 특화 모델을 파인튜닝하지 않고도 24GB GPU 한 장으로 같은 69.5%를 냅니다. 다음으로는 더 많은 모델로 검증을 마치고, 실행은 되지만 문제를 잘못 수식으로 옮긴 오류를 힌트로 고칠 수 있는지 시험하고, 문제 종류마다 힌트를 찾겠습니다. 정리하면, 짧은 힌트를 먼저 주고, 공짜 검사가 실패한 곳에서만 생각하게 하자는 것입니다.
+[더 자세히: 질문이 나오거나 시간이 남을 때]
+첫째 줄, 생각을 어디에 쓸지. 기존 방법은 어려워 보이는 문제에 계산을 더 쓰는 Snell 등의 방식과, 언제 생각할지를 강화학습으로 가르치는 Thinkless, AdaptThink입니다. 저희는 정답 없이 돌리는 공짜 검사가 실패한 문제에만 생각을 씁니다. 기하와 최적화 208문제를 세 모델로 풀면 74%가 87%로 오르고, 토큰은 문제당 4.1k에서 2.5k로 줄었습니다.
+둘째 줄, 모델에게 무엇을 주는지. 기존에는 매뉴얼 전체를 주거나, 더 큰 교사 모델이 짜서 정답으로 확인한 프로그램 모음을 줍니다. 저희 힌트는 모델이 다른 문제에서 짜서 공짜 검사를 통과한 자기 프로그램입니다. 끝까지 남겨 둔 MAMO 벤치마크에서 사람이 쓴 힌트와 같은 79%를 냈습니다.
+셋째 줄, 비용. 최적화 문장제용으로 파인튜닝한 ORLM-8B가 MAMO에서 69.5%인데, 학습하지 않은 Qwen3-8B도 같은 69.5%를 더 적은 토큰으로 냅니다. gpt-oss-20b는 78.8%입니다.
+다음 계획. 하나, MAMO 검증을 Qwen3-32B와 Qwen3.6까지 세 시드로 마칩니다. 둘, 검사로 못 잡는 오류입니다. 지금 남은 오류의 절반쯤은 정답 라벨이 의심스러운 문제이고, 나머지는 같은 유형에서 같은 수식 실수가 반복됩니다. 예를 들어 순서 제약이나 공급 균형을 잘못 씁니다. 고치기 한 번이나 생각으로는 안 고쳐져서, 힌트 하나로 고쳐지는지 시험합니다. 셋, 지금은 같은 종류의 문제 안에서만 자동 힌트가 통하므로, 문제 종류마다 힌트를 찾고 최종 보고서와 코드를 냅니다.</a:t>
             </a:r>
             <a:endParaRPr lang="en-US" dirty="0"/>
           </a:p>

--- a/Proposal_Team5.pptx
+++ b/Proposal_Team5.pptx
@@ -136,7 +136,7 @@
   <p:extLst>
     <p:ext uri="{521415D9-36F7-43E2-AB2F-B90AF26B5E84}">
       <p14:sectionLst xmlns:p14="http://schemas.microsoft.com/office/powerpoint/2010/main">
-        <p14:section name="Talk" id="{863868c7-7d04-ed96-d6f8-ba26627d3b16}">
+        <p14:section name="Talk" id="{a6159a21-e486-e3f4-7fea-0d037da4046d}">
           <p14:sldIdLst>
             <p14:sldId id="256"/>
             <p14:sldId id="257"/>
@@ -149,7 +149,7 @@
             <p14:sldId id="264"/>
           </p14:sldIdLst>
         </p14:section>
-        <p14:section name="Extra pages" id="{6be392ba-d282-c24e-e049-e1f4e516e36e}">
+        <p14:section name="Extra pages" id="{bccce8ad-3a88-0b23-5b38-79d070f82f99}">
           <p14:sldIdLst>
             <p14:sldId id="265"/>
             <p14:sldId id="266"/>
@@ -3774,7 +3774,7 @@
           <a:p>
             <a:r>
               <a:rPr lang="en-US" dirty="0"/>
-              <a:t>(55초) 두 발견을 합친 것이 저희 방법입니다. 실제 최적화 문제로 보겠습니다. 1단계, 모델이 없는 메서드를 불러서 죽습니다. 2단계, 힌트를 줍니다. 이 힌트는 사람이 쓴 것이 아니라, 모델이 다른 문제에서 짜서 검사를 통과한 자기 프로그램에서 자동으로 가져옵니다. 3단계, 두 버전의 답이 20000으로 같으니, 4단계 생각은 건너뜁니다. 생각만 했다면 5.3k 토큰이 들었을 문제를 0.6k로 풉니다. 5단계, 같은 종류의 새 데이터에는 검사된 프로그램을 재사용합니다. 기하와 최적화 208문제를 세 모델로 풀면, 어려워 보이는 문제에 생각을 몰아주면 74%, 저희 방법은 87%이고 토큰도 더 적습니다. 단계 아래 아이콘은 그 단계를 어디에 쓰는지입니다. 경시 문제는 라이브러리 없이 알고리즘만 짜서 힌트가 필요 없고, 검사와 생각만 씁니다. 재사용은 같은 문제가 반복되는 경로 문제에만 씁니다.</a:t>
+              <a:t>(55초) 두 발견을 합친 것이 저희 방법입니다. 실제 최적화 문제로 보겠습니다. 1단계, 모델이 없는 메서드를 불러서 죽습니다. 2단계, 힌트를 줍니다. 이 힌트는 사람이 쓴 것이 아니라, 모델이 다른 문제에서 짜서 검사를 통과한 자기 프로그램에서 자동으로 가져옵니다. 3단계, 두 버전의 답이 20000으로 같으니, 4단계 생각은 건너뜁니다. 생각만 했다면 5.3k 토큰이 들었을 문제를 0.6k로 풉니다. 5단계, 같은 종류의 새 데이터에는 검사된 프로그램을 재사용합니다. 기하와 최적화 208문제를 세 모델로 풀면, 어려워 보이는 문제에 생각을 몰아주는 방식은 74%, 사람이 쓴 힌트로 저희 방법을 쓰면 87%이고 토큰도 더 적습니다. 단계 아래 아이콘은 그 단계를 어디에 쓰는지입니다. 경시 문제는 라이브러리 없이 알고리즘만 짜서 힌트가 필요 없고, 검사와 생각만 씁니다. 재사용은 같은 문제가 반복되는 경로 문제에만 씁니다.</a:t>
             </a:r>
             <a:endParaRPr lang="en-US" dirty="0"/>
           </a:p>
@@ -3864,7 +3864,7 @@
               <a:rPr lang="en-US" dirty="0"/>
               <a:t>(60초) 마지막으로 새로운 점과 다음 계획입니다. 왼쪽이 흔히 쓰는 방법, 오른쪽이 저희 방법입니다. 첫째, 기존에는 어려워 보이는 문제에 생각을 몰아주거나 언제 생각할지를 학습시키지만, 저희는 학습 없이 공짜 검사가 실패한 문제에만 생각을 써서 74%를 87%로 올리고 토큰도 줄였습니다. 둘째, 기존에는 매뉴얼이나 교사 모델이 짠 프로그램을 주지만, 저희는 모델 자신이 짜서 검사를 통과한 프로그램을 짧은 힌트로 주므로 사람도 정답도 필요 없습니다. 셋째, 특화 모델을 파인튜닝하지 않고도 24GB GPU 한 장으로 같은 69.5%를 냅니다. 다음으로는 더 많은 모델로 검증을 마치고, 실행은 되지만 문제를 잘못 수식으로 옮긴 오류를 힌트로 고칠 수 있는지 시험하고, 문제 종류마다 힌트를 찾겠습니다. 정리하면, 짧은 힌트를 먼저 주고, 공짜 검사가 실패한 곳에서만 생각하게 하자는 것입니다.
 [더 자세히: 질문이 나오거나 시간이 남을 때]
-첫째 줄, 생각을 어디에 쓸지. 기존 방법은 어려워 보이는 문제에 계산을 더 쓰는 Snell 등의 방식과, 언제 생각할지를 강화학습으로 가르치는 Thinkless, AdaptThink입니다. 저희는 정답 없이 돌리는 공짜 검사가 실패한 문제에만 생각을 씁니다. 기하와 최적화 208문제를 세 모델로 풀면 74%가 87%로 오르고, 토큰은 문제당 4.1k에서 2.5k로 줄었습니다.
+첫째 줄, 생각을 어디에 쓸지. 기존 방법은 어려워 보이는 문제에 계산을 더 쓰는 Snell 등의 방식과, 언제 생각할지를 강화학습으로 가르치는 Thinkless, AdaptThink입니다. 저희는 정답 없이 돌리는 공짜 검사가 실패한 문제에만 생각을 씁니다. 기하와 최적화 208문제를 세 모델로 풀면 74%가 87%로 오르고, 토큰은 문제당 4.1k에서 2.5k로 줄었습니다. 87%는 사람이 쓴 힌트를 쓴 결과이고, 검색으로 찾은 힌트로도 84%입니다.
 둘째 줄, 모델에게 무엇을 주는지. 기존에는 매뉴얼 전체를 주거나, 더 큰 교사 모델이 짜서 정답으로 확인한 프로그램 모음을 줍니다. 저희 힌트는 모델이 다른 문제에서 짜서 공짜 검사를 통과한 자기 프로그램입니다. 끝까지 남겨 둔 MAMO 벤치마크에서 사람이 쓴 힌트와 같은 79%를 냈습니다.
 셋째 줄, 비용. 최적화 문장제용으로 파인튜닝한 ORLM-8B가 MAMO에서 69.5%인데, 학습하지 않은 Qwen3-8B도 같은 69.5%를 더 적은 토큰으로 냅니다. gpt-oss-20b는 78.8%입니다.
 다음 계획. 하나, MAMO 검증을 Qwen3-32B와 Qwen3.6까지 세 시드로 마칩니다. 둘, 검사로 못 잡는 오류입니다. 지금 남은 오류의 절반쯤은 정답 라벨이 의심스러운 문제이고, 나머지는 같은 유형에서 같은 수식 실수가 반복됩니다. 예를 들어 순서 제약이나 공급 균형을 잘못 씁니다. 고치기 한 번이나 생각으로는 안 고쳐져서, 힌트 하나로 고쳐지는지 시험합니다. 셋, 지금은 같은 종류의 문제 안에서만 자동 힌트가 통하므로, 문제 종류마다 힌트를 찾고 최종 보고서와 코드를 냅니다.</a:t>
@@ -39639,7 +39639,7 @@
         </p:nvSpPr>
         <p:spPr>
           <a:xfrm>
-            <a:off x="2560320" y="4069080"/>
+            <a:off x="2834640" y="4069080"/>
             <a:ext cx="822960" cy="320040"/>
           </a:xfrm>
           <a:prstGeom prst="rect">
@@ -39675,8 +39675,8 @@
         </p:nvSpPr>
         <p:spPr>
           <a:xfrm>
-            <a:off x="3474720" y="4069080"/>
-            <a:ext cx="3474720" cy="320040"/>
+            <a:off x="3749040" y="4069080"/>
+            <a:ext cx="3200400" cy="320040"/>
           </a:xfrm>
           <a:prstGeom prst="rect">
             <a:avLst/>
@@ -39712,7 +39712,7 @@
         <p:spPr>
           <a:xfrm>
             <a:off x="548640" y="4434840"/>
-            <a:ext cx="1920240" cy="457200"/>
+            <a:ext cx="2194560" cy="457200"/>
           </a:xfrm>
           <a:prstGeom prst="rect">
             <a:avLst/>
@@ -39747,7 +39747,7 @@
         </p:nvSpPr>
         <p:spPr>
           <a:xfrm>
-            <a:off x="2560320" y="4434840"/>
+            <a:off x="2834640" y="4434840"/>
             <a:ext cx="822960" cy="457200"/>
           </a:xfrm>
           <a:prstGeom prst="rect">
@@ -39783,8 +39783,8 @@
         </p:nvSpPr>
         <p:spPr>
           <a:xfrm>
-            <a:off x="3474720" y="4535424"/>
-            <a:ext cx="2743200" cy="256032"/>
+            <a:off x="3749040" y="4535424"/>
+            <a:ext cx="2468880" cy="256032"/>
           </a:xfrm>
           <a:prstGeom prst="rect">
             <a:avLst/>
@@ -39845,7 +39845,7 @@
         <p:spPr>
           <a:xfrm>
             <a:off x="548640" y="4965192"/>
-            <a:ext cx="1920240" cy="457200"/>
+            <a:ext cx="2194560" cy="457200"/>
           </a:xfrm>
           <a:prstGeom prst="rect">
             <a:avLst/>
@@ -39866,7 +39866,7 @@
                   <a:schemeClr val="tx1"/>
                 </a:solidFill>
               </a:rPr>
-              <a:t>our method</a:t>
+              <a:t>ours, hand-written hint</a:t>
             </a:r>
             <a:endParaRPr lang="en-US" sz="1500" dirty="0"/>
           </a:p>
@@ -39880,7 +39880,7 @@
         </p:nvSpPr>
         <p:spPr>
           <a:xfrm>
-            <a:off x="2560320" y="4965192"/>
+            <a:off x="2834640" y="4965192"/>
             <a:ext cx="822960" cy="457200"/>
           </a:xfrm>
           <a:prstGeom prst="rect">
@@ -39910,14 +39910,14 @@
       </p:sp>
       <p:sp>
         <p:nvSpPr>
-          <p:cNvPr id="64" name="tokens our method"/>
+          <p:cNvPr id="64" name="tokens ours, hand-written hint"/>
           <p:cNvSpPr/>
           <p:nvPr/>
         </p:nvSpPr>
         <p:spPr>
           <a:xfrm>
-            <a:off x="3474720" y="5065776"/>
-            <a:ext cx="1672683" cy="256032"/>
+            <a:off x="3749040" y="5065776"/>
+            <a:ext cx="1505415" cy="256032"/>
           </a:xfrm>
           <a:prstGeom prst="rect">
             <a:avLst/>
@@ -39941,7 +39941,7 @@
         </p:nvSpPr>
         <p:spPr>
           <a:xfrm>
-            <a:off x="5238843" y="4965192"/>
+            <a:off x="5345895" y="4965192"/>
             <a:ext cx="731520" cy="457200"/>
           </a:xfrm>
           <a:prstGeom prst="rect">

--- a/Proposal_Team5.pptx
+++ b/Proposal_Team5.pptx
@@ -136,7 +136,7 @@
   <p:extLst>
     <p:ext uri="{521415D9-36F7-43E2-AB2F-B90AF26B5E84}">
       <p14:sectionLst xmlns:p14="http://schemas.microsoft.com/office/powerpoint/2010/main">
-        <p14:section name="Talk" id="{a6159a21-e486-e3f4-7fea-0d037da4046d}">
+        <p14:section name="Talk" id="{af8c5e5c-fbee-10de-a7a2-0669fce852ec}">
           <p14:sldIdLst>
             <p14:sldId id="256"/>
             <p14:sldId id="257"/>
@@ -149,7 +149,7 @@
             <p14:sldId id="264"/>
           </p14:sldIdLst>
         </p14:section>
-        <p14:section name="Extra pages" id="{bccce8ad-3a88-0b23-5b38-79d070f82f99}">
+        <p14:section name="Extra pages" id="{13598940-678c-914d-c545-1d9094ea819c}">
           <p14:sldIdLst>
             <p14:sldId id="265"/>
             <p14:sldId id="266"/>
@@ -3774,7 +3774,7 @@
           <a:p>
             <a:r>
               <a:rPr lang="en-US" dirty="0"/>
-              <a:t>(55초) 두 발견을 합친 것이 저희 방법입니다. 실제 최적화 문제로 보겠습니다. 1단계, 모델이 없는 메서드를 불러서 죽습니다. 2단계, 힌트를 줍니다. 이 힌트는 사람이 쓴 것이 아니라, 모델이 다른 문제에서 짜서 검사를 통과한 자기 프로그램에서 자동으로 가져옵니다. 3단계, 두 버전의 답이 20000으로 같으니, 4단계 생각은 건너뜁니다. 생각만 했다면 5.3k 토큰이 들었을 문제를 0.6k로 풉니다. 5단계, 같은 종류의 새 데이터에는 검사된 프로그램을 재사용합니다. 기하와 최적화 208문제를 세 모델로 풀면, 어려워 보이는 문제에 생각을 몰아주는 방식은 74%, 사람이 쓴 힌트로 저희 방법을 쓰면 87%이고 토큰도 더 적습니다. 단계 아래 아이콘은 그 단계를 어디에 쓰는지입니다. 경시 문제는 라이브러리 없이 알고리즘만 짜서 힌트가 필요 없고, 검사와 생각만 씁니다. 재사용은 같은 문제가 반복되는 경로 문제에만 씁니다.</a:t>
+              <a:t>(60초, [생략 가능] 포함 80초) 두 발견을 합친 것이 저희 방법입니다. 실제 최적화 문제로 보면, 1단계에서 모델이 없는 메서드를 불러 죽습니다. 2단계 힌트는 모델이 다른 문제에서 짜서 검사를 통과한 자기 프로그램에서 자동으로 가져옵니다. 3단계, 두 버전의 답이 20000으로 같으니 4단계 생각은 건너뛰어, 생각만 했을 때의 5.3k 대신 0.6k 토큰을 씁니다. 5단계, 같은 종류의 새 데이터에는 이 프로그램을 재사용합니다. [생략 가능] 아이콘은 각 단계를 쓰는 문제 종류이고, 경시 문제는 라이브러리가 없어 힌트 없이 검사와 생각만 씁니다. 전체 비교는 이렇게 했습니다. 기존 방식은 각 문제에 세 번 빠르게 답하게 해서 답이 갈리는 문제를 어렵다고 보고 거기에 생각을 씁니다. 저희는 모든 문제에 사람이 쓴 힌트를 먼저 주고 검사에 실패한 문제만 생각하게 합니다. 기하와 최적화 208문제를 세 모델로 풀면 정답률이 74% 대 87%, 토큰은 4.1k 대 2.5k입니다. [생략 가능] 오른쪽 79%는 개발에 쓰지 않은 MAMO 문제 863개에서 gpt-oss-20b에 자동 힌트를 준 결과로, 사람이 쓴 힌트와 같고, 힌트가 없으면 73%입니다.</a:t>
             </a:r>
             <a:endParaRPr lang="en-US" dirty="0"/>
           </a:p>
@@ -3862,11 +3862,11 @@
           <a:p>
             <a:r>
               <a:rPr lang="en-US" dirty="0"/>
-              <a:t>(60초) 마지막으로 새로운 점과 다음 계획입니다. 왼쪽이 흔히 쓰는 방법, 오른쪽이 저희 방법입니다. 첫째, 기존에는 어려워 보이는 문제에 생각을 몰아주거나 언제 생각할지를 학습시키지만, 저희는 학습 없이 공짜 검사가 실패한 문제에만 생각을 써서 74%를 87%로 올리고 토큰도 줄였습니다. 둘째, 기존에는 매뉴얼이나 교사 모델이 짠 프로그램을 주지만, 저희는 모델 자신이 짜서 검사를 통과한 프로그램을 짧은 힌트로 주므로 사람도 정답도 필요 없습니다. 셋째, 특화 모델을 파인튜닝하지 않고도 24GB GPU 한 장으로 같은 69.5%를 냅니다. 다음으로는 더 많은 모델로 검증을 마치고, 실행은 되지만 문제를 잘못 수식으로 옮긴 오류를 힌트로 고칠 수 있는지 시험하고, 문제 종류마다 힌트를 찾겠습니다. 정리하면, 짧은 힌트를 먼저 주고, 공짜 검사가 실패한 곳에서만 생각하게 하자는 것입니다.
+              <a:t>(75초) 마지막으로 새로운 점과 다음 계획입니다. 왼쪽이 흔히 쓰는 방법, 오른쪽이 저희 방법입니다. 첫째, 기존에는 세 번 답해서 답이 갈리는 문제에 생각을 몰아주거나 언제 생각할지를 학습시키지만, 저희는 학습 없이 공짜 검사가 실패한 문제에만 생각을 씁니다. 둘째, 기존에는 매뉴얼이나 교사 모델이 짜서 정답으로 확인한 프로그램을 주지만, 저희는 모델 자신이 짜서 검사를 통과한 프로그램을 짧은 힌트로 주므로 사람도 정답도 필요 없습니다. 셋째, 비용입니다. 개발에 쓰지 않은 MAMO 863문제에서 최적화용으로 파인튜닝한 ORLM-8B를 저희 채점기로 돌리면 69.5%인데, 학습하지 않은 Qwen3-8B에 자기 힌트를 주면 24GB GPU 한 장으로 같은 69.5%를 더 적은 토큰에 냅니다. 다음으로는 더 많은 모델로 검증을 마치고, 실행은 되지만 문제를 잘못 수식으로 옮긴 오류를 힌트로 고칠 수 있는지 시험하고, 문제 종류마다 힌트를 찾겠습니다. 정리하면, 짧은 힌트를 먼저 주고, 공짜 검사가 실패한 곳에서만 생각하게 하자는 것입니다.
 [더 자세히: 질문이 나오거나 시간이 남을 때]
 첫째 줄, 생각을 어디에 쓸지. 기존 방법은 어려워 보이는 문제에 계산을 더 쓰는 Snell 등의 방식과, 언제 생각할지를 강화학습으로 가르치는 Thinkless, AdaptThink입니다. 저희는 정답 없이 돌리는 공짜 검사가 실패한 문제에만 생각을 씁니다. 기하와 최적화 208문제를 세 모델로 풀면 74%가 87%로 오르고, 토큰은 문제당 4.1k에서 2.5k로 줄었습니다. 87%는 사람이 쓴 힌트를 쓴 결과이고, 검색으로 찾은 힌트로도 84%입니다.
 둘째 줄, 모델에게 무엇을 주는지. 기존에는 매뉴얼 전체를 주거나, 더 큰 교사 모델이 짜서 정답으로 확인한 프로그램 모음을 줍니다. 저희 힌트는 모델이 다른 문제에서 짜서 공짜 검사를 통과한 자기 프로그램입니다. 끝까지 남겨 둔 MAMO 벤치마크에서 사람이 쓴 힌트와 같은 79%를 냈습니다.
-셋째 줄, 비용. 최적화 문장제용으로 파인튜닝한 ORLM-8B가 MAMO에서 69.5%인데, 학습하지 않은 Qwen3-8B도 같은 69.5%를 더 적은 토큰으로 냅니다. gpt-oss-20b는 78.8%입니다.
+셋째 줄, 비용. ORLM-8B는 최적화 문장제용으로 파인튜닝한 공개 모델이고, 모델 카드의 형식과 솔버, 그리디 디코딩으로 저희 채점기에서 돌렸습니다: MAMO 69.5%, 문제당 1.1k 토큰(샘플링하면 64~66%). Qwen3-8B는 학습 없이 자기 힌트를 붙여 프로그램을 한 번 짜고 실행이 안 될 때만 생각하게 해서 69.5%, 1.0k 토큰입니다. 두 버전 검사까지 쓰면 71%(3.1k), gpt-oss-20b는 78.8%입니다.
 다음 계획. 하나, MAMO 검증을 Qwen3-32B와 Qwen3.6까지 세 시드로 마칩니다. 둘, 검사로 못 잡는 오류입니다. 지금 남은 오류의 절반쯤은 정답 라벨이 의심스러운 문제이고, 나머지는 같은 유형에서 같은 수식 실수가 반복됩니다. 예를 들어 순서 제약이나 공급 균형을 잘못 씁니다. 고치기 한 번이나 생각으로는 안 고쳐져서, 힌트 하나로 고쳐지는지 시험합니다. 셋, 지금은 같은 종류의 문제 안에서만 자동 힌트가 통하므로, 문제 종류마다 힌트를 찾고 최종 보고서와 코드를 냅니다.</a:t>
             </a:r>
             <a:endParaRPr lang="en-US" dirty="0"/>
@@ -40014,7 +40014,7 @@
         <p:spPr>
           <a:xfrm>
             <a:off x="7498080" y="4169664"/>
-            <a:ext cx="4114800" cy="457200"/>
+            <a:ext cx="4114800" cy="731520"/>
           </a:xfrm>
           <a:prstGeom prst="rect">
             <a:avLst/>
@@ -40035,7 +40035,7 @@
                   <a:schemeClr val="tx1"/>
                 </a:solidFill>
               </a:rPr>
-              <a:t>the hint found automatically (its own earlier checked program) = a hand-written hint, on new problems</a:t>
+              <a:t>gpt-oss-20b on 863 held-out MAMO problems: its own checked program as the hint = a hand-written hint (no hint: 73%)</a:t>
             </a:r>
             <a:endParaRPr lang="en-US" sz="1400" dirty="0"/>
           </a:p>
@@ -40049,8 +40049,8 @@
         </p:nvSpPr>
         <p:spPr>
           <a:xfrm>
-            <a:off x="7498080" y="4645152"/>
-            <a:ext cx="4114800" cy="457200"/>
+            <a:off x="7498080" y="4983480"/>
+            <a:ext cx="4114800" cy="365760"/>
           </a:xfrm>
           <a:prstGeom prst="rect">
             <a:avLst/>
@@ -40066,56 +40066,42 @@
               <a:buNone/>
             </a:pPr>
             <a:r>
-              <a:rPr lang="en-US" sz="2400" b="1" dirty="0">
+              <a:rPr lang="en-US" sz="1400" dirty="0">
+                <a:solidFill>
+                  <a:schemeClr val="tx1"/>
+                </a:solidFill>
+              </a:rPr>
+              <a:t>This problem: </a:t>
+            </a:r>
+            <a:pPr indent="0" marL="0">
+              <a:buNone/>
+            </a:pPr>
+            <a:r>
+              <a:rPr lang="en-US" sz="1400" b="1" dirty="0">
                 <a:solidFill>
                   <a:srgbClr val="4472C4"/>
                 </a:solidFill>
               </a:rPr>
-              <a:t>0.6k vs 5.3k</a:t>
-            </a:r>
-            <a:endParaRPr lang="en-US" sz="2400" dirty="0"/>
+              <a:t>0.6k tokens</a:t>
+            </a:r>
+            <a:pPr indent="0" marL="0">
+              <a:buNone/>
+            </a:pPr>
+            <a:r>
+              <a:rPr lang="en-US" sz="1400" dirty="0">
+                <a:solidFill>
+                  <a:schemeClr val="tx1"/>
+                </a:solidFill>
+              </a:rPr>
+              <a:t> (thinking alone: 5.3k)</a:t>
+            </a:r>
+            <a:endParaRPr lang="en-US" sz="1400" dirty="0"/>
           </a:p>
         </p:txBody>
       </p:sp>
       <p:sp>
         <p:nvSpPr>
           <p:cNvPr id="69" name="Text 45"/>
-          <p:cNvSpPr txBox="1"/>
-          <p:nvPr/>
-        </p:nvSpPr>
-        <p:spPr>
-          <a:xfrm>
-            <a:off x="7498080" y="5084064"/>
-            <a:ext cx="4114800" cy="457200"/>
-          </a:xfrm>
-          <a:prstGeom prst="rect">
-            <a:avLst/>
-          </a:prstGeom>
-          <a:noFill/>
-          <a:ln/>
-        </p:spPr>
-        <p:txBody>
-          <a:bodyPr wrap="square" lIns="0" tIns="0" rIns="0" bIns="0" rtlCol="0" anchor="t"/>
-          <a:lstStyle/>
-          <a:p>
-            <a:pPr indent="0" marL="0">
-              <a:buNone/>
-            </a:pPr>
-            <a:r>
-              <a:rPr lang="en-US" sz="1400" dirty="0">
-                <a:solidFill>
-                  <a:schemeClr val="tx1"/>
-                </a:solidFill>
-              </a:rPr>
-              <a:t>tokens on this problem vs thinking alone</a:t>
-            </a:r>
-            <a:endParaRPr lang="en-US" sz="1400" dirty="0"/>
-          </a:p>
-        </p:txBody>
-      </p:sp>
-      <p:sp>
-        <p:nvSpPr>
-          <p:cNvPr id="70" name="Text 46"/>
           <p:cNvSpPr txBox="1"/>
           <p:nvPr/>
         </p:nvSpPr>
@@ -40438,7 +40424,7 @@
                   <a:srgbClr val="404040"/>
                 </a:solidFill>
               </a:rPr>
-              <a:t>think more on hard-looking problems, or train when to think</a:t>
+              <a:t>think more where 3 quick answers disagree, or train when to think</a:t>
             </a:r>
             <a:endParaRPr lang="en-US" sz="1500" dirty="0"/>
           </a:p>
@@ -40578,7 +40564,7 @@
                   <a:srgbClr val="1F3864"/>
                 </a:solidFill>
               </a:rPr>
-              <a:t>think only when a free check fails; no training (87% vs 74%)</a:t>
+              <a:t>think only when a free check fails, no training: 87% vs 74% on the same 208 problems</a:t>
             </a:r>
             <a:endParaRPr lang="en-US" sz="1500" dirty="0"/>
           </a:p>
@@ -40833,7 +40819,7 @@
                   <a:srgbClr val="1F3864"/>
                 </a:solidFill>
               </a:rPr>
-              <a:t>give one hint: the model's own checked program; no answer key</a:t>
+              <a:t>one short hint: the model's own program that passed the check; no answer key</a:t>
             </a:r>
             <a:endParaRPr lang="en-US" sz="1500" dirty="0"/>
           </a:p>
@@ -40948,7 +40934,7 @@
                   <a:srgbClr val="404040"/>
                 </a:solidFill>
               </a:rPr>
-              <a:t>fine-tune a specialist model (ORLM-8B)</a:t>
+              <a:t>fine-tune a specialist (ORLM-8B): 69.5% on MAMO, 1.1k tokens</a:t>
             </a:r>
             <a:endParaRPr lang="en-US" sz="1500" dirty="0"/>
           </a:p>
@@ -41088,7 +41074,7 @@
                   <a:srgbClr val="1F3864"/>
                 </a:solidFill>
               </a:rPr>
-              <a:t>no training, one 24 GB GPU: the same 69.5% on MAMO</a:t>
+              <a:t>untrained Qwen3-8B + that hint, one 24 GB GPU: 69.5% at 1.0k tokens</a:t>
             </a:r>
             <a:endParaRPr lang="en-US" sz="1500" dirty="0"/>
           </a:p>

--- a/Proposal_Team5.pptx
+++ b/Proposal_Team5.pptx
@@ -136,7 +136,7 @@
   <p:extLst>
     <p:ext uri="{521415D9-36F7-43E2-AB2F-B90AF26B5E84}">
       <p14:sectionLst xmlns:p14="http://schemas.microsoft.com/office/powerpoint/2010/main">
-        <p14:section name="Talk" id="{af8c5e5c-fbee-10de-a7a2-0669fce852ec}">
+        <p14:section name="Talk" id="{dc79cecb-57cb-f8fc-2d11-2229a63c4a6d}">
           <p14:sldIdLst>
             <p14:sldId id="256"/>
             <p14:sldId id="257"/>
@@ -149,7 +149,7 @@
             <p14:sldId id="264"/>
           </p14:sldIdLst>
         </p14:section>
-        <p14:section name="Extra pages" id="{13598940-678c-914d-c545-1d9094ea819c}">
+        <p14:section name="Extra pages" id="{eca2beb0-36dd-2dbc-1f91-b02d6462817f}">
           <p14:sldIdLst>
             <p14:sldId id="265"/>
             <p14:sldId id="266"/>
@@ -3686,7 +3686,7 @@
           <a:p>
             <a:r>
               <a:rPr lang="en-US" dirty="0"/>
-              <a:t>(40초) 두 번째 발견입니다. 공짜 검사가 실패할 때만 생각하게 하세요. 검사 A는 문제에 적힌 예제입니다. 예제를 통과하면 바로 제출하고, 틀리면 그 문제만 더 생각합니다. 예제만 쓰면 65%로 조금 낮고, 모든 경우를 다 따져 보는 짧은 프로그램과도 답을 맞춰 보면 66%가 됩니다. 검사 B는 프로그램을 두 버전으로 짜서, 답이 다를 때만 생각합니다. 두 경우 모두 항상 생각할 때와 정확도는 같고, 토큰은 18에서 27% 적습니다. 두 검사 모두 정답이 필요 없고, 기하, 경시, 경로, 문장제에서 모두 통했습니다.</a:t>
+              <a:t>(60초) 두 번째 발견입니다. 공짜 검사가 실패할 때만 생각하게 하세요. 공짜 검사란, 정답을 몰라도 프로그램을 실행만 해서 틀렸는지 알아보는 방법입니다. 모델에게 더 생각시키지 않으니 토큰이 거의 들지 않습니다. 통과하면 답을 그대로 쓰고, 실패한 문제에만 더 생각합니다. 검사 A는 문제에 적힌 예제입니다. 'Make a triangle!'은 예제 3, 4, 5에서 정답 0을 그대로 내서 바로 씁니다. 'Arrow'는 예제와 꼭짓점이 달라서 그 문제만 더 생각했고, 맞았습니다. 예제만 쓰면 65%이고, 모든 경우를 다 따져 보는 느린 프로그램과도 답을 맞춰 보면 66%로, 항상 오래 생각할 때와 정확도가 같고 토큰은 18% 적습니다. 검사 B는 프로그램을 두 가지로 짜서 답을 비교합니다. 같으면 쓰고, 6과 0처럼 다르면 생각합니다. 기하 108문제에서 99% 대 98%이고, 토큰은 27% 적습니다.</a:t>
             </a:r>
             <a:endParaRPr lang="en-US" dirty="0"/>
           </a:p>
@@ -36640,18 +36640,342 @@
       </p:pic>
       <p:sp>
         <p:nvSpPr>
-          <p:cNvPr id="11" name="Check A: the problem's own examples"/>
+          <p:cNvPr id="11" name="box the model's program"/>
           <p:cNvSpPr/>
           <p:nvPr/>
         </p:nvSpPr>
         <p:spPr>
           <a:xfrm>
-            <a:off x="548640" y="1325880"/>
-            <a:ext cx="5440680" cy="4160520"/>
+            <a:off x="548640" y="1371600"/>
+            <a:ext cx="2011680" cy="548640"/>
           </a:xfrm>
           <a:prstGeom prst="roundRect">
             <a:avLst>
-              <a:gd name="adj" fmla="val 1758"/>
+              <a:gd name="adj" fmla="val 10000"/>
+            </a:avLst>
+          </a:prstGeom>
+          <a:solidFill>
+            <a:srgbClr val="F2F2F2"/>
+          </a:solidFill>
+          <a:ln w="9525">
+            <a:solidFill>
+              <a:srgbClr val="BFBFBF"/>
+            </a:solidFill>
+            <a:prstDash val="solid"/>
+          </a:ln>
+        </p:spPr>
+      </p:sp>
+      <p:sp>
+        <p:nvSpPr>
+          <p:cNvPr id="12" name="Text 5"/>
+          <p:cNvSpPr txBox="1"/>
+          <p:nvPr/>
+        </p:nvSpPr>
+        <p:spPr>
+          <a:xfrm>
+            <a:off x="621792" y="1371600"/>
+            <a:ext cx="1865376" cy="548640"/>
+          </a:xfrm>
+          <a:prstGeom prst="rect">
+            <a:avLst/>
+          </a:prstGeom>
+          <a:noFill/>
+          <a:ln/>
+        </p:spPr>
+        <p:txBody>
+          <a:bodyPr wrap="square" lIns="0" tIns="0" rIns="0" bIns="0" rtlCol="0" anchor="ctr"/>
+          <a:lstStyle/>
+          <a:p>
+            <a:pPr algn="ctr" indent="0" marL="0">
+              <a:buNone/>
+            </a:pPr>
+            <a:r>
+              <a:rPr lang="en-US" sz="1500" b="1" dirty="0">
+                <a:solidFill>
+                  <a:schemeClr val="tx1"/>
+                </a:solidFill>
+              </a:rPr>
+              <a:t>the model's program</a:t>
+            </a:r>
+            <a:endParaRPr lang="en-US" sz="1500" dirty="0"/>
+          </a:p>
+        </p:txBody>
+      </p:sp>
+      <p:sp>
+        <p:nvSpPr>
+          <p:cNvPr id="13" name="Shape 6"/>
+          <p:cNvSpPr/>
+          <p:nvPr/>
+        </p:nvSpPr>
+        <p:spPr>
+          <a:xfrm>
+            <a:off x="2560320" y="1645920"/>
+            <a:ext cx="274320" cy="0"/>
+          </a:xfrm>
+          <a:prstGeom prst="line">
+            <a:avLst/>
+          </a:prstGeom>
+          <a:noFill/>
+          <a:ln w="25400">
+            <a:solidFill>
+              <a:srgbClr val="7F7F7F"/>
+            </a:solidFill>
+            <a:prstDash val="solid"/>
+            <a:tailEnd type="triangle"/>
+          </a:ln>
+        </p:spPr>
+      </p:sp>
+      <p:sp>
+        <p:nvSpPr>
+          <p:cNvPr id="14" name="box free check: run it a"/>
+          <p:cNvSpPr/>
+          <p:nvPr/>
+        </p:nvSpPr>
+        <p:spPr>
+          <a:xfrm>
+            <a:off x="2834640" y="1371600"/>
+            <a:ext cx="3840480" cy="548640"/>
+          </a:xfrm>
+          <a:prstGeom prst="roundRect">
+            <a:avLst>
+              <a:gd name="adj" fmla="val 10000"/>
+            </a:avLst>
+          </a:prstGeom>
+          <a:solidFill>
+            <a:srgbClr val="DEEBF7"/>
+          </a:solidFill>
+          <a:ln w="9525">
+            <a:solidFill>
+              <a:srgbClr val="BFBFBF"/>
+            </a:solidFill>
+            <a:prstDash val="solid"/>
+          </a:ln>
+        </p:spPr>
+      </p:sp>
+      <p:sp>
+        <p:nvSpPr>
+          <p:cNvPr id="15" name="Text 8"/>
+          <p:cNvSpPr txBox="1"/>
+          <p:nvPr/>
+        </p:nvSpPr>
+        <p:spPr>
+          <a:xfrm>
+            <a:off x="2907792" y="1371600"/>
+            <a:ext cx="3694176" cy="548640"/>
+          </a:xfrm>
+          <a:prstGeom prst="rect">
+            <a:avLst/>
+          </a:prstGeom>
+          <a:noFill/>
+          <a:ln/>
+        </p:spPr>
+        <p:txBody>
+          <a:bodyPr wrap="square" lIns="0" tIns="0" rIns="0" bIns="0" rtlCol="0" anchor="ctr"/>
+          <a:lstStyle/>
+          <a:p>
+            <a:pPr algn="ctr" indent="0" marL="0">
+              <a:buNone/>
+            </a:pPr>
+            <a:r>
+              <a:rPr lang="en-US" sz="1500" b="1" dirty="0">
+                <a:solidFill>
+                  <a:srgbClr val="1F3864"/>
+                </a:solidFill>
+              </a:rPr>
+              <a:t>free check: run it and compare (no answer key, no thinking)</a:t>
+            </a:r>
+            <a:endParaRPr lang="en-US" sz="1500" dirty="0"/>
+          </a:p>
+        </p:txBody>
+      </p:sp>
+      <p:sp>
+        <p:nvSpPr>
+          <p:cNvPr id="16" name="Shape 9"/>
+          <p:cNvSpPr/>
+          <p:nvPr/>
+        </p:nvSpPr>
+        <p:spPr>
+          <a:xfrm flipV="1">
+            <a:off x="6675120" y="1481328"/>
+            <a:ext cx="365760" cy="164592"/>
+          </a:xfrm>
+          <a:prstGeom prst="line">
+            <a:avLst/>
+          </a:prstGeom>
+          <a:noFill/>
+          <a:ln w="25400">
+            <a:solidFill>
+              <a:srgbClr val="7F7F7F"/>
+            </a:solidFill>
+            <a:prstDash val="solid"/>
+            <a:tailEnd type="triangle"/>
+          </a:ln>
+        </p:spPr>
+      </p:sp>
+      <p:sp>
+        <p:nvSpPr>
+          <p:cNvPr id="17" name="Shape 10"/>
+          <p:cNvSpPr/>
+          <p:nvPr/>
+        </p:nvSpPr>
+        <p:spPr>
+          <a:xfrm>
+            <a:off x="6675120" y="1645920"/>
+            <a:ext cx="365760" cy="164592"/>
+          </a:xfrm>
+          <a:prstGeom prst="line">
+            <a:avLst/>
+          </a:prstGeom>
+          <a:noFill/>
+          <a:ln w="25400">
+            <a:solidFill>
+              <a:srgbClr val="7F7F7F"/>
+            </a:solidFill>
+            <a:prstDash val="solid"/>
+            <a:tailEnd type="triangle"/>
+          </a:ln>
+        </p:spPr>
+      </p:sp>
+      <p:sp>
+        <p:nvSpPr>
+          <p:cNvPr id="18" name="box ✓ pass → keep the an"/>
+          <p:cNvSpPr/>
+          <p:nvPr/>
+        </p:nvSpPr>
+        <p:spPr>
+          <a:xfrm>
+            <a:off x="7040880" y="1316736"/>
+            <a:ext cx="4572000" cy="310896"/>
+          </a:xfrm>
+          <a:prstGeom prst="roundRect">
+            <a:avLst>
+              <a:gd name="adj" fmla="val 17647"/>
+            </a:avLst>
+          </a:prstGeom>
+          <a:solidFill>
+            <a:srgbClr val="E2F0D9"/>
+          </a:solidFill>
+          <a:ln w="9525">
+            <a:solidFill>
+              <a:srgbClr val="BFBFBF"/>
+            </a:solidFill>
+            <a:prstDash val="solid"/>
+          </a:ln>
+        </p:spPr>
+      </p:sp>
+      <p:sp>
+        <p:nvSpPr>
+          <p:cNvPr id="19" name="Text 12"/>
+          <p:cNvSpPr txBox="1"/>
+          <p:nvPr/>
+        </p:nvSpPr>
+        <p:spPr>
+          <a:xfrm>
+            <a:off x="7114032" y="1316736"/>
+            <a:ext cx="4425696" cy="310896"/>
+          </a:xfrm>
+          <a:prstGeom prst="rect">
+            <a:avLst/>
+          </a:prstGeom>
+          <a:noFill/>
+          <a:ln/>
+        </p:spPr>
+        <p:txBody>
+          <a:bodyPr wrap="square" lIns="0" tIns="0" rIns="0" bIns="0" rtlCol="0" anchor="ctr"/>
+          <a:lstStyle/>
+          <a:p>
+            <a:pPr algn="ctr" indent="0" marL="0">
+              <a:buNone/>
+            </a:pPr>
+            <a:r>
+              <a:rPr lang="en-US" sz="1400" b="1" dirty="0">
+                <a:solidFill>
+                  <a:srgbClr val="38761D"/>
+                </a:solidFill>
+              </a:rPr>
+              <a:t>✓ pass → keep the answer (no extra tokens)</a:t>
+            </a:r>
+            <a:endParaRPr lang="en-US" sz="1400" dirty="0"/>
+          </a:p>
+        </p:txBody>
+      </p:sp>
+      <p:sp>
+        <p:nvSpPr>
+          <p:cNvPr id="20" name="box ✗ fail → think harde"/>
+          <p:cNvSpPr/>
+          <p:nvPr/>
+        </p:nvSpPr>
+        <p:spPr>
+          <a:xfrm>
+            <a:off x="7040880" y="1664208"/>
+            <a:ext cx="4572000" cy="310896"/>
+          </a:xfrm>
+          <a:prstGeom prst="roundRect">
+            <a:avLst>
+              <a:gd name="adj" fmla="val 17647"/>
+            </a:avLst>
+          </a:prstGeom>
+          <a:solidFill>
+            <a:srgbClr val="FADBD8"/>
+          </a:solidFill>
+          <a:ln w="9525">
+            <a:solidFill>
+              <a:srgbClr val="BFBFBF"/>
+            </a:solidFill>
+            <a:prstDash val="solid"/>
+          </a:ln>
+        </p:spPr>
+      </p:sp>
+      <p:sp>
+        <p:nvSpPr>
+          <p:cNvPr id="21" name="Text 14"/>
+          <p:cNvSpPr txBox="1"/>
+          <p:nvPr/>
+        </p:nvSpPr>
+        <p:spPr>
+          <a:xfrm>
+            <a:off x="7114032" y="1664208"/>
+            <a:ext cx="4425696" cy="310896"/>
+          </a:xfrm>
+          <a:prstGeom prst="rect">
+            <a:avLst/>
+          </a:prstGeom>
+          <a:noFill/>
+          <a:ln/>
+        </p:spPr>
+        <p:txBody>
+          <a:bodyPr wrap="square" lIns="0" tIns="0" rIns="0" bIns="0" rtlCol="0" anchor="ctr"/>
+          <a:lstStyle/>
+          <a:p>
+            <a:pPr algn="ctr" indent="0" marL="0">
+              <a:buNone/>
+            </a:pPr>
+            <a:r>
+              <a:rPr lang="en-US" sz="1400" b="1" dirty="0">
+                <a:solidFill>
+                  <a:srgbClr val="C00000"/>
+                </a:solidFill>
+              </a:rPr>
+              <a:t>✗ fail → think harder (tokens are spent only here)</a:t>
+            </a:r>
+            <a:endParaRPr lang="en-US" sz="1400" dirty="0"/>
+          </a:p>
+        </p:txBody>
+      </p:sp>
+      <p:sp>
+        <p:nvSpPr>
+          <p:cNvPr id="22" name="Check A: the examples printed in the problem"/>
+          <p:cNvSpPr/>
+          <p:nvPr/>
+        </p:nvSpPr>
+        <p:spPr>
+          <a:xfrm>
+            <a:off x="548640" y="2103120"/>
+            <a:ext cx="5440680" cy="3429000"/>
+          </a:xfrm>
+          <a:prstGeom prst="roundRect">
+            <a:avLst>
+              <a:gd name="adj" fmla="val 2133"/>
             </a:avLst>
           </a:prstGeom>
           <a:solidFill>
@@ -36667,14 +36991,14 @@
       </p:sp>
       <p:sp>
         <p:nvSpPr>
-          <p:cNvPr id="12" name="Text 5"/>
+          <p:cNvPr id="23" name="Text 16"/>
           <p:cNvSpPr txBox="1"/>
           <p:nvPr/>
         </p:nvSpPr>
         <p:spPr>
           <a:xfrm>
-            <a:off x="777240" y="1417320"/>
-            <a:ext cx="4983480" cy="457200"/>
+            <a:off x="777240" y="2148840"/>
+            <a:ext cx="4983480" cy="411480"/>
           </a:xfrm>
           <a:prstGeom prst="rect">
             <a:avLst/>
@@ -36690,31 +37014,31 @@
               <a:buNone/>
             </a:pPr>
             <a:r>
-              <a:rPr lang="en-US" sz="1800" b="1" dirty="0">
+              <a:rPr lang="en-US" sz="1700" b="1" dirty="0">
                 <a:solidFill>
                   <a:srgbClr val="4472C4"/>
                 </a:solidFill>
               </a:rPr>
-              <a:t>Check A: the problem's own examples</a:t>
-            </a:r>
-            <a:endParaRPr lang="en-US" sz="1800" dirty="0"/>
-          </a:p>
-        </p:txBody>
-      </p:sp>
-      <p:sp>
-        <p:nvSpPr>
-          <p:cNvPr id="13" name="box &quot;Make a triangle!&quot;: "/>
+              <a:t>Check A: the examples printed in the problem</a:t>
+            </a:r>
+            <a:endParaRPr lang="en-US" sz="1700" dirty="0"/>
+          </a:p>
+        </p:txBody>
+      </p:sp>
+      <p:sp>
+        <p:nvSpPr>
+          <p:cNvPr id="24" name="box Make a triangle!: ex"/>
           <p:cNvSpPr/>
           <p:nvPr/>
         </p:nvSpPr>
         <p:spPr>
           <a:xfrm>
-            <a:off x="777240" y="1920240"/>
-            <a:ext cx="4983480" cy="512064"/>
+            <a:off x="777240" y="2578608"/>
+            <a:ext cx="4983480" cy="438912"/>
           </a:xfrm>
           <a:prstGeom prst="roundRect">
             <a:avLst>
-              <a:gd name="adj" fmla="val 10714"/>
+              <a:gd name="adj" fmla="val 12500"/>
             </a:avLst>
           </a:prstGeom>
           <a:solidFill>
@@ -36730,14 +37054,14 @@
       </p:sp>
       <p:sp>
         <p:nvSpPr>
-          <p:cNvPr id="14" name="Text 7"/>
+          <p:cNvPr id="25" name="Text 18"/>
           <p:cNvSpPr txBox="1"/>
           <p:nvPr/>
         </p:nvSpPr>
         <p:spPr>
           <a:xfrm>
-            <a:off x="850392" y="1920240"/>
-            <a:ext cx="4837176" cy="512064"/>
+            <a:off x="850392" y="2578608"/>
+            <a:ext cx="4837176" cy="438912"/>
           </a:xfrm>
           <a:prstGeom prst="rect">
             <a:avLst/>
@@ -36753,31 +37077,31 @@
               <a:buNone/>
             </a:pPr>
             <a:r>
-              <a:rPr lang="en-US" sz="1500" dirty="0">
+              <a:rPr lang="en-US" sz="1400" dirty="0">
                 <a:solidFill>
                   <a:srgbClr val="38761D"/>
                 </a:solidFill>
               </a:rPr>
-              <a:t>"Make a triangle!": examples pass → submit</a:t>
-            </a:r>
-            <a:endParaRPr lang="en-US" sz="1500" dirty="0"/>
-          </a:p>
-        </p:txBody>
-      </p:sp>
-      <p:sp>
-        <p:nvSpPr>
-          <p:cNvPr id="15" name="box &quot;Arrow&quot;: an example "/>
+              <a:t>Make a triangle!: example 3 4 5 → 0, prints 0 ✓ → keep</a:t>
+            </a:r>
+            <a:endParaRPr lang="en-US" sz="1400" dirty="0"/>
+          </a:p>
+        </p:txBody>
+      </p:sp>
+      <p:sp>
+        <p:nvSpPr>
+          <p:cNvPr id="26" name="box Arrow: corners diffe"/>
           <p:cNvSpPr/>
           <p:nvPr/>
         </p:nvSpPr>
         <p:spPr>
           <a:xfrm>
-            <a:off x="777240" y="2523744"/>
-            <a:ext cx="4983480" cy="512064"/>
+            <a:off x="777240" y="3081528"/>
+            <a:ext cx="4983480" cy="438912"/>
           </a:xfrm>
           <a:prstGeom prst="roundRect">
             <a:avLst>
-              <a:gd name="adj" fmla="val 10714"/>
+              <a:gd name="adj" fmla="val 12500"/>
             </a:avLst>
           </a:prstGeom>
           <a:solidFill>
@@ -36793,14 +37117,14 @@
       </p:sp>
       <p:sp>
         <p:nvSpPr>
-          <p:cNvPr id="16" name="Text 9"/>
+          <p:cNvPr id="27" name="Text 20"/>
           <p:cNvSpPr txBox="1"/>
           <p:nvPr/>
         </p:nvSpPr>
         <p:spPr>
           <a:xfrm>
-            <a:off x="850392" y="2523744"/>
-            <a:ext cx="4837176" cy="512064"/>
+            <a:off x="850392" y="3081528"/>
+            <a:ext cx="4837176" cy="438912"/>
           </a:xfrm>
           <a:prstGeom prst="rect">
             <a:avLst/>
@@ -36816,12 +37140,156 @@
               <a:buNone/>
             </a:pPr>
             <a:r>
+              <a:rPr lang="en-US" sz="1400" dirty="0">
+                <a:solidFill>
+                  <a:srgbClr val="C00000"/>
+                </a:solidFill>
+              </a:rPr>
+              <a:t>Arrow: corners differ from the example ✗ → think → right</a:t>
+            </a:r>
+            <a:endParaRPr lang="en-US" sz="1400" dirty="0"/>
+          </a:p>
+        </p:txBody>
+      </p:sp>
+      <p:sp>
+        <p:nvSpPr>
+          <p:cNvPr id="28" name="Text 21"/>
+          <p:cNvSpPr txBox="1"/>
+          <p:nvPr/>
+        </p:nvSpPr>
+        <p:spPr>
+          <a:xfrm>
+            <a:off x="777240" y="3584448"/>
+            <a:ext cx="4983480" cy="320040"/>
+          </a:xfrm>
+          <a:prstGeom prst="rect">
+            <a:avLst/>
+          </a:prstGeom>
+          <a:noFill/>
+          <a:ln/>
+        </p:spPr>
+        <p:txBody>
+          <a:bodyPr wrap="square" lIns="0" tIns="0" rIns="0" bIns="0" rtlCol="0" anchor="ctr"/>
+          <a:lstStyle/>
+          <a:p>
+            <a:pPr indent="0" marL="0">
+              <a:buNone/>
+            </a:pPr>
+            <a:r>
+              <a:rPr lang="en-US" sz="1400" b="1" dirty="0">
+                <a:solidFill>
+                  <a:schemeClr val="tx1"/>
+                </a:solidFill>
+              </a:rPr>
+              <a:t>311 contest problems (gpt-oss-120b)</a:t>
+            </a:r>
+            <a:endParaRPr lang="en-US" sz="1400" dirty="0"/>
+          </a:p>
+        </p:txBody>
+      </p:sp>
+      <p:sp>
+        <p:nvSpPr>
+          <p:cNvPr id="29" name="Text 22"/>
+          <p:cNvSpPr txBox="1"/>
+          <p:nvPr/>
+        </p:nvSpPr>
+        <p:spPr>
+          <a:xfrm>
+            <a:off x="2926080" y="3858768"/>
+            <a:ext cx="822960" cy="320040"/>
+          </a:xfrm>
+          <a:prstGeom prst="rect">
+            <a:avLst/>
+          </a:prstGeom>
+          <a:noFill/>
+          <a:ln/>
+        </p:spPr>
+        <p:txBody>
+          <a:bodyPr wrap="square" lIns="0" tIns="0" rIns="0" bIns="0" rtlCol="0" anchor="ctr"/>
+          <a:lstStyle/>
+          <a:p>
+            <a:pPr algn="ctr" indent="0" marL="0">
+              <a:buNone/>
+            </a:pPr>
+            <a:r>
+              <a:rPr lang="en-US" sz="1400" dirty="0">
+                <a:solidFill>
+                  <a:srgbClr val="7F7F7F"/>
+                </a:solidFill>
+              </a:rPr>
+              <a:t>solved</a:t>
+            </a:r>
+            <a:endParaRPr lang="en-US" sz="1400" dirty="0"/>
+          </a:p>
+        </p:txBody>
+      </p:sp>
+      <p:sp>
+        <p:nvSpPr>
+          <p:cNvPr id="30" name="Text 23"/>
+          <p:cNvSpPr txBox="1"/>
+          <p:nvPr/>
+        </p:nvSpPr>
+        <p:spPr>
+          <a:xfrm>
+            <a:off x="3840480" y="3858768"/>
+            <a:ext cx="1920240" cy="320040"/>
+          </a:xfrm>
+          <a:prstGeom prst="rect">
+            <a:avLst/>
+          </a:prstGeom>
+          <a:noFill/>
+          <a:ln/>
+        </p:spPr>
+        <p:txBody>
+          <a:bodyPr wrap="square" lIns="0" tIns="0" rIns="0" bIns="0" rtlCol="0" anchor="ctr"/>
+          <a:lstStyle/>
+          <a:p>
+            <a:pPr indent="0" marL="0">
+              <a:buNone/>
+            </a:pPr>
+            <a:r>
+              <a:rPr lang="en-US" sz="1400" dirty="0">
+                <a:solidFill>
+                  <a:srgbClr val="7F7F7F"/>
+                </a:solidFill>
+              </a:rPr>
+              <a:t>tokens per problem</a:t>
+            </a:r>
+            <a:endParaRPr lang="en-US" sz="1400" dirty="0"/>
+          </a:p>
+        </p:txBody>
+      </p:sp>
+      <p:sp>
+        <p:nvSpPr>
+          <p:cNvPr id="31" name="Text 24"/>
+          <p:cNvSpPr txBox="1"/>
+          <p:nvPr/>
+        </p:nvSpPr>
+        <p:spPr>
+          <a:xfrm>
+            <a:off x="777240" y="4224528"/>
+            <a:ext cx="2057400" cy="457200"/>
+          </a:xfrm>
+          <a:prstGeom prst="rect">
+            <a:avLst/>
+          </a:prstGeom>
+          <a:noFill/>
+          <a:ln/>
+        </p:spPr>
+        <p:txBody>
+          <a:bodyPr wrap="square" lIns="0" tIns="0" rIns="0" bIns="0" rtlCol="0" anchor="ctr"/>
+          <a:lstStyle/>
+          <a:p>
+            <a:pPr algn="r" indent="0" marL="0">
+              <a:buNone/>
+            </a:pPr>
+            <a:r>
               <a:rPr lang="en-US" sz="1500" dirty="0">
                 <a:solidFill>
-                  <a:srgbClr val="C00000"/>
-                </a:solidFill>
-              </a:rPr>
-              <a:t>"Arrow": an example fails → think harder → right</a:t>
+                  <a:schemeClr val="tx1"/>
+                </a:solidFill>
+              </a:rPr>
+              <a:t>always think hard</a:t>
             </a:r>
             <a:endParaRPr lang="en-US" sz="1500" dirty="0"/>
           </a:p>
@@ -36829,14 +37297,14 @@
       </p:sp>
       <p:sp>
         <p:nvSpPr>
-          <p:cNvPr id="17" name="Text 10"/>
+          <p:cNvPr id="32" name="Text 25"/>
           <p:cNvSpPr txBox="1"/>
           <p:nvPr/>
         </p:nvSpPr>
         <p:spPr>
           <a:xfrm>
-            <a:off x="777240" y="3154680"/>
-            <a:ext cx="4983480" cy="365760"/>
+            <a:off x="2926080" y="4224528"/>
+            <a:ext cx="822960" cy="457200"/>
           </a:xfrm>
           <a:prstGeom prst="rect">
             <a:avLst/>
@@ -36848,159 +37316,15 @@
           <a:bodyPr wrap="square" lIns="0" tIns="0" rIns="0" bIns="0" rtlCol="0" anchor="ctr"/>
           <a:lstStyle/>
           <a:p>
-            <a:pPr indent="0" marL="0">
-              <a:buNone/>
-            </a:pPr>
-            <a:r>
-              <a:rPr lang="en-US" sz="1500" b="1" dirty="0">
-                <a:solidFill>
-                  <a:schemeClr val="tx1"/>
-                </a:solidFill>
-              </a:rPr>
-              <a:t>311 contest problems (gpt-oss-120b)</a:t>
-            </a:r>
-            <a:endParaRPr lang="en-US" sz="1500" dirty="0"/>
-          </a:p>
-        </p:txBody>
-      </p:sp>
-      <p:sp>
-        <p:nvSpPr>
-          <p:cNvPr id="18" name="Text 11"/>
-          <p:cNvSpPr txBox="1"/>
-          <p:nvPr/>
-        </p:nvSpPr>
-        <p:spPr>
-          <a:xfrm>
-            <a:off x="2926080" y="3520440"/>
-            <a:ext cx="822960" cy="320040"/>
-          </a:xfrm>
-          <a:prstGeom prst="rect">
-            <a:avLst/>
-          </a:prstGeom>
-          <a:noFill/>
-          <a:ln/>
-        </p:spPr>
-        <p:txBody>
-          <a:bodyPr wrap="square" lIns="0" tIns="0" rIns="0" bIns="0" rtlCol="0" anchor="ctr"/>
-          <a:lstStyle/>
-          <a:p>
             <a:pPr algn="ctr" indent="0" marL="0">
               <a:buNone/>
             </a:pPr>
             <a:r>
-              <a:rPr lang="en-US" sz="1400" dirty="0">
+              <a:rPr lang="en-US" sz="1700" b="1" dirty="0">
                 <a:solidFill>
                   <a:srgbClr val="7F7F7F"/>
                 </a:solidFill>
               </a:rPr>
-              <a:t>solved</a:t>
-            </a:r>
-            <a:endParaRPr lang="en-US" sz="1400" dirty="0"/>
-          </a:p>
-        </p:txBody>
-      </p:sp>
-      <p:sp>
-        <p:nvSpPr>
-          <p:cNvPr id="19" name="Text 12"/>
-          <p:cNvSpPr txBox="1"/>
-          <p:nvPr/>
-        </p:nvSpPr>
-        <p:spPr>
-          <a:xfrm>
-            <a:off x="3840480" y="3520440"/>
-            <a:ext cx="1920240" cy="320040"/>
-          </a:xfrm>
-          <a:prstGeom prst="rect">
-            <a:avLst/>
-          </a:prstGeom>
-          <a:noFill/>
-          <a:ln/>
-        </p:spPr>
-        <p:txBody>
-          <a:bodyPr wrap="square" lIns="0" tIns="0" rIns="0" bIns="0" rtlCol="0" anchor="ctr"/>
-          <a:lstStyle/>
-          <a:p>
-            <a:pPr indent="0" marL="0">
-              <a:buNone/>
-            </a:pPr>
-            <a:r>
-              <a:rPr lang="en-US" sz="1400" dirty="0">
-                <a:solidFill>
-                  <a:srgbClr val="7F7F7F"/>
-                </a:solidFill>
-              </a:rPr>
-              <a:t>tokens per problem</a:t>
-            </a:r>
-            <a:endParaRPr lang="en-US" sz="1400" dirty="0"/>
-          </a:p>
-        </p:txBody>
-      </p:sp>
-      <p:sp>
-        <p:nvSpPr>
-          <p:cNvPr id="20" name="Text 13"/>
-          <p:cNvSpPr txBox="1"/>
-          <p:nvPr/>
-        </p:nvSpPr>
-        <p:spPr>
-          <a:xfrm>
-            <a:off x="777240" y="3886200"/>
-            <a:ext cx="2057400" cy="457200"/>
-          </a:xfrm>
-          <a:prstGeom prst="rect">
-            <a:avLst/>
-          </a:prstGeom>
-          <a:noFill/>
-          <a:ln/>
-        </p:spPr>
-        <p:txBody>
-          <a:bodyPr wrap="square" lIns="0" tIns="0" rIns="0" bIns="0" rtlCol="0" anchor="ctr"/>
-          <a:lstStyle/>
-          <a:p>
-            <a:pPr algn="r" indent="0" marL="0">
-              <a:buNone/>
-            </a:pPr>
-            <a:r>
-              <a:rPr lang="en-US" sz="1500" dirty="0">
-                <a:solidFill>
-                  <a:schemeClr val="tx1"/>
-                </a:solidFill>
-              </a:rPr>
-              <a:t>always think hard</a:t>
-            </a:r>
-            <a:endParaRPr lang="en-US" sz="1500" dirty="0"/>
-          </a:p>
-        </p:txBody>
-      </p:sp>
-      <p:sp>
-        <p:nvSpPr>
-          <p:cNvPr id="21" name="Text 14"/>
-          <p:cNvSpPr txBox="1"/>
-          <p:nvPr/>
-        </p:nvSpPr>
-        <p:spPr>
-          <a:xfrm>
-            <a:off x="2926080" y="3886200"/>
-            <a:ext cx="822960" cy="457200"/>
-          </a:xfrm>
-          <a:prstGeom prst="rect">
-            <a:avLst/>
-          </a:prstGeom>
-          <a:noFill/>
-          <a:ln/>
-        </p:spPr>
-        <p:txBody>
-          <a:bodyPr wrap="square" lIns="0" tIns="0" rIns="0" bIns="0" rtlCol="0" anchor="ctr"/>
-          <a:lstStyle/>
-          <a:p>
-            <a:pPr algn="ctr" indent="0" marL="0">
-              <a:buNone/>
-            </a:pPr>
-            <a:r>
-              <a:rPr lang="en-US" sz="1700" b="1" dirty="0">
-                <a:solidFill>
-                  <a:srgbClr val="7F7F7F"/>
-                </a:solidFill>
-              </a:rPr>
               <a:t>66.2%</a:t>
             </a:r>
             <a:endParaRPr lang="en-US" sz="1700" dirty="0"/>
@@ -37009,13 +37333,13 @@
       </p:sp>
       <p:sp>
         <p:nvSpPr>
-          <p:cNvPr id="22" name="tokens always think hard"/>
+          <p:cNvPr id="33" name="tokens always think hard"/>
           <p:cNvSpPr/>
           <p:nvPr/>
         </p:nvSpPr>
         <p:spPr>
           <a:xfrm>
-            <a:off x="3840480" y="3986784"/>
+            <a:off x="3840480" y="4325112"/>
             <a:ext cx="1188720" cy="256032"/>
           </a:xfrm>
           <a:prstGeom prst="rect">
@@ -37034,13 +37358,13 @@
       </p:sp>
       <p:sp>
         <p:nvSpPr>
-          <p:cNvPr id="23" name="Text 16"/>
+          <p:cNvPr id="34" name="Text 27"/>
           <p:cNvSpPr txBox="1"/>
           <p:nvPr/>
         </p:nvSpPr>
         <p:spPr>
           <a:xfrm>
-            <a:off x="5120640" y="3886200"/>
+            <a:off x="5120640" y="4224528"/>
             <a:ext cx="731520" cy="457200"/>
           </a:xfrm>
           <a:prstGeom prst="rect">
@@ -37070,13 +37394,13 @@
       </p:sp>
       <p:sp>
         <p:nvSpPr>
-          <p:cNvPr id="24" name="Text 17"/>
+          <p:cNvPr id="35" name="Text 28"/>
           <p:cNvSpPr txBox="1"/>
           <p:nvPr/>
         </p:nvSpPr>
         <p:spPr>
           <a:xfrm>
-            <a:off x="777240" y="4416552"/>
+            <a:off x="777240" y="4681728"/>
             <a:ext cx="2057400" cy="457200"/>
           </a:xfrm>
           <a:prstGeom prst="rect">
@@ -37098,7 +37422,7 @@
                   <a:schemeClr val="tx1"/>
                 </a:solidFill>
               </a:rPr>
-              <a:t>an example fails</a:t>
+              <a:t>think if an example fails</a:t>
             </a:r>
             <a:endParaRPr lang="en-US" sz="1500" dirty="0"/>
           </a:p>
@@ -37106,13 +37430,13 @@
       </p:sp>
       <p:sp>
         <p:nvSpPr>
-          <p:cNvPr id="25" name="Text 18"/>
+          <p:cNvPr id="36" name="Text 29"/>
           <p:cNvSpPr txBox="1"/>
           <p:nvPr/>
         </p:nvSpPr>
         <p:spPr>
           <a:xfrm>
-            <a:off x="2926080" y="4416552"/>
+            <a:off x="2926080" y="4681728"/>
             <a:ext cx="822960" cy="457200"/>
           </a:xfrm>
           <a:prstGeom prst="rect">
@@ -37142,13 +37466,13 @@
       </p:sp>
       <p:sp>
         <p:nvSpPr>
-          <p:cNvPr id="26" name="tokens an example fails"/>
+          <p:cNvPr id="37" name="tokens think if an example fails"/>
           <p:cNvSpPr/>
           <p:nvPr/>
         </p:nvSpPr>
         <p:spPr>
           <a:xfrm>
-            <a:off x="3840480" y="4517136"/>
+            <a:off x="3840480" y="4782312"/>
             <a:ext cx="797746" cy="256032"/>
           </a:xfrm>
           <a:prstGeom prst="rect">
@@ -37167,13 +37491,13 @@
       </p:sp>
       <p:sp>
         <p:nvSpPr>
-          <p:cNvPr id="27" name="Text 20"/>
+          <p:cNvPr id="38" name="Text 31"/>
           <p:cNvSpPr txBox="1"/>
           <p:nvPr/>
         </p:nvSpPr>
         <p:spPr>
           <a:xfrm>
-            <a:off x="4729666" y="4416552"/>
+            <a:off x="4729666" y="4681728"/>
             <a:ext cx="731520" cy="457200"/>
           </a:xfrm>
           <a:prstGeom prst="rect">
@@ -37203,13 +37527,13 @@
       </p:sp>
       <p:sp>
         <p:nvSpPr>
-          <p:cNvPr id="28" name="Text 21"/>
+          <p:cNvPr id="39" name="Text 32"/>
           <p:cNvSpPr txBox="1"/>
           <p:nvPr/>
         </p:nvSpPr>
         <p:spPr>
           <a:xfrm>
-            <a:off x="777240" y="4946904"/>
+            <a:off x="777240" y="5138928"/>
             <a:ext cx="2057400" cy="457200"/>
           </a:xfrm>
           <a:prstGeom prst="rect">
@@ -37231,7 +37555,7 @@
                   <a:schemeClr val="tx1"/>
                 </a:solidFill>
               </a:rPr>
-              <a:t>+ brute-force check</a:t>
+              <a:t>… or a brute-force run</a:t>
             </a:r>
             <a:endParaRPr lang="en-US" sz="1500" dirty="0"/>
           </a:p>
@@ -37239,13 +37563,13 @@
       </p:sp>
       <p:sp>
         <p:nvSpPr>
-          <p:cNvPr id="29" name="Text 22"/>
+          <p:cNvPr id="40" name="Text 33"/>
           <p:cNvSpPr txBox="1"/>
           <p:nvPr/>
         </p:nvSpPr>
         <p:spPr>
           <a:xfrm>
-            <a:off x="2926080" y="4946904"/>
+            <a:off x="2926080" y="5138928"/>
             <a:ext cx="822960" cy="457200"/>
           </a:xfrm>
           <a:prstGeom prst="rect">
@@ -37275,13 +37599,13 @@
       </p:sp>
       <p:sp>
         <p:nvSpPr>
-          <p:cNvPr id="30" name="tokens + brute-force check"/>
+          <p:cNvPr id="41" name="tokens … or a brute-force run"/>
           <p:cNvSpPr/>
           <p:nvPr/>
         </p:nvSpPr>
         <p:spPr>
           <a:xfrm>
-            <a:off x="3840480" y="5047488"/>
+            <a:off x="3840480" y="5239512"/>
             <a:ext cx="975461" cy="256032"/>
           </a:xfrm>
           <a:prstGeom prst="rect">
@@ -37300,13 +37624,13 @@
       </p:sp>
       <p:sp>
         <p:nvSpPr>
-          <p:cNvPr id="31" name="Text 24"/>
+          <p:cNvPr id="42" name="Text 35"/>
           <p:cNvSpPr txBox="1"/>
           <p:nvPr/>
         </p:nvSpPr>
         <p:spPr>
           <a:xfrm>
-            <a:off x="4907381" y="4946904"/>
+            <a:off x="4907381" y="5138928"/>
             <a:ext cx="731520" cy="457200"/>
           </a:xfrm>
           <a:prstGeom prst="rect">
@@ -37336,18 +37660,18 @@
       </p:sp>
       <p:sp>
         <p:nvSpPr>
-          <p:cNvPr id="32" name="Check B: two versions must agree"/>
+          <p:cNvPr id="43" name="Check B: write it twice, compare"/>
           <p:cNvSpPr/>
           <p:nvPr/>
         </p:nvSpPr>
         <p:spPr>
           <a:xfrm>
-            <a:off x="6172200" y="1325880"/>
-            <a:ext cx="5440680" cy="4160520"/>
+            <a:off x="6172200" y="2103120"/>
+            <a:ext cx="5440680" cy="3429000"/>
           </a:xfrm>
           <a:prstGeom prst="roundRect">
             <a:avLst>
-              <a:gd name="adj" fmla="val 1758"/>
+              <a:gd name="adj" fmla="val 2133"/>
             </a:avLst>
           </a:prstGeom>
           <a:solidFill>
@@ -37363,14 +37687,14 @@
       </p:sp>
       <p:sp>
         <p:nvSpPr>
-          <p:cNvPr id="33" name="Text 26"/>
+          <p:cNvPr id="44" name="Text 37"/>
           <p:cNvSpPr txBox="1"/>
           <p:nvPr/>
         </p:nvSpPr>
         <p:spPr>
           <a:xfrm>
-            <a:off x="6400800" y="1417320"/>
-            <a:ext cx="4983480" cy="457200"/>
+            <a:off x="6400800" y="2148840"/>
+            <a:ext cx="4983480" cy="411480"/>
           </a:xfrm>
           <a:prstGeom prst="rect">
             <a:avLst/>
@@ -37386,31 +37710,31 @@
               <a:buNone/>
             </a:pPr>
             <a:r>
-              <a:rPr lang="en-US" sz="1800" b="1" dirty="0">
+              <a:rPr lang="en-US" sz="1700" b="1" dirty="0">
                 <a:solidFill>
                   <a:srgbClr val="4472C4"/>
                 </a:solidFill>
               </a:rPr>
-              <a:t>Check B: two versions must agree</a:t>
-            </a:r>
-            <a:endParaRPr lang="en-US" sz="1800" dirty="0"/>
-          </a:p>
-        </p:txBody>
-      </p:sp>
-      <p:sp>
-        <p:nvSpPr>
-          <p:cNvPr id="34" name="box program A (task only"/>
+              <a:t>Check B: write it twice, compare</a:t>
+            </a:r>
+            <a:endParaRPr lang="en-US" sz="1700" dirty="0"/>
+          </a:p>
+        </p:txBody>
+      </p:sp>
+      <p:sp>
+        <p:nvSpPr>
+          <p:cNvPr id="45" name="box both versions print "/>
           <p:cNvSpPr/>
           <p:nvPr/>
         </p:nvSpPr>
         <p:spPr>
           <a:xfrm>
-            <a:off x="6400800" y="1920240"/>
-            <a:ext cx="4983480" cy="512064"/>
+            <a:off x="6400800" y="2578608"/>
+            <a:ext cx="4983480" cy="438912"/>
           </a:xfrm>
           <a:prstGeom prst="roundRect">
             <a:avLst>
-              <a:gd name="adj" fmla="val 10714"/>
+              <a:gd name="adj" fmla="val 12500"/>
             </a:avLst>
           </a:prstGeom>
           <a:solidFill>
@@ -37426,14 +37750,14 @@
       </p:sp>
       <p:sp>
         <p:nvSpPr>
-          <p:cNvPr id="35" name="Text 28"/>
+          <p:cNvPr id="46" name="Text 39"/>
           <p:cNvSpPr txBox="1"/>
           <p:nvPr/>
         </p:nvSpPr>
         <p:spPr>
           <a:xfrm>
-            <a:off x="6473952" y="1920240"/>
-            <a:ext cx="4837176" cy="512064"/>
+            <a:off x="6473952" y="2578608"/>
+            <a:ext cx="4837176" cy="438912"/>
           </a:xfrm>
           <a:prstGeom prst="rect">
             <a:avLst/>
@@ -37449,31 +37773,31 @@
               <a:buNone/>
             </a:pPr>
             <a:r>
-              <a:rPr lang="en-US" sz="1500" dirty="0">
+              <a:rPr lang="en-US" sz="1400" dirty="0">
                 <a:solidFill>
                   <a:srgbClr val="38761D"/>
                 </a:solidFill>
               </a:rPr>
-              <a:t>program A (task only) → 6</a:t>
-            </a:r>
-            <a:endParaRPr lang="en-US" sz="1500" dirty="0"/>
-          </a:p>
-        </p:txBody>
-      </p:sp>
-      <p:sp>
-        <p:nvSpPr>
-          <p:cNvPr id="36" name="box program B (+ helper "/>
+              <a:t>both versions print the same → keep</a:t>
+            </a:r>
+            <a:endParaRPr lang="en-US" sz="1400" dirty="0"/>
+          </a:p>
+        </p:txBody>
+      </p:sp>
+      <p:sp>
+        <p:nvSpPr>
+          <p:cNvPr id="47" name="box version A → 6, versi"/>
           <p:cNvSpPr/>
           <p:nvPr/>
         </p:nvSpPr>
         <p:spPr>
           <a:xfrm>
-            <a:off x="6400800" y="2523744"/>
-            <a:ext cx="4983480" cy="512064"/>
+            <a:off x="6400800" y="3081528"/>
+            <a:ext cx="4983480" cy="438912"/>
           </a:xfrm>
           <a:prstGeom prst="roundRect">
             <a:avLst>
-              <a:gd name="adj" fmla="val 10714"/>
+              <a:gd name="adj" fmla="val 12500"/>
             </a:avLst>
           </a:prstGeom>
           <a:solidFill>
@@ -37489,14 +37813,14 @@
       </p:sp>
       <p:sp>
         <p:nvSpPr>
-          <p:cNvPr id="37" name="Text 30"/>
+          <p:cNvPr id="48" name="Text 41"/>
           <p:cNvSpPr txBox="1"/>
           <p:nvPr/>
         </p:nvSpPr>
         <p:spPr>
           <a:xfrm>
-            <a:off x="6473952" y="2523744"/>
-            <a:ext cx="4837176" cy="512064"/>
+            <a:off x="6473952" y="3081528"/>
+            <a:ext cx="4837176" cy="438912"/>
           </a:xfrm>
           <a:prstGeom prst="rect">
             <a:avLst/>
@@ -37512,12 +37836,156 @@
               <a:buNone/>
             </a:pPr>
             <a:r>
+              <a:rPr lang="en-US" sz="1400" dirty="0">
+                <a:solidFill>
+                  <a:srgbClr val="C00000"/>
+                </a:solidFill>
+              </a:rPr>
+              <a:t>version A → 6, version B → 0 ✗ → think harder</a:t>
+            </a:r>
+            <a:endParaRPr lang="en-US" sz="1400" dirty="0"/>
+          </a:p>
+        </p:txBody>
+      </p:sp>
+      <p:sp>
+        <p:nvSpPr>
+          <p:cNvPr id="49" name="Text 42"/>
+          <p:cNvSpPr txBox="1"/>
+          <p:nvPr/>
+        </p:nvSpPr>
+        <p:spPr>
+          <a:xfrm>
+            <a:off x="6400800" y="3584448"/>
+            <a:ext cx="4983480" cy="320040"/>
+          </a:xfrm>
+          <a:prstGeom prst="rect">
+            <a:avLst/>
+          </a:prstGeom>
+          <a:noFill/>
+          <a:ln/>
+        </p:spPr>
+        <p:txBody>
+          <a:bodyPr wrap="square" lIns="0" tIns="0" rIns="0" bIns="0" rtlCol="0" anchor="ctr"/>
+          <a:lstStyle/>
+          <a:p>
+            <a:pPr indent="0" marL="0">
+              <a:buNone/>
+            </a:pPr>
+            <a:r>
+              <a:rPr lang="en-US" sz="1400" b="1" dirty="0">
+                <a:solidFill>
+                  <a:schemeClr val="tx1"/>
+                </a:solidFill>
+              </a:rPr>
+              <a:t>108 geometry problems (Qwen3-32B, 3 runs)</a:t>
+            </a:r>
+            <a:endParaRPr lang="en-US" sz="1400" dirty="0"/>
+          </a:p>
+        </p:txBody>
+      </p:sp>
+      <p:sp>
+        <p:nvSpPr>
+          <p:cNvPr id="50" name="Text 43"/>
+          <p:cNvSpPr txBox="1"/>
+          <p:nvPr/>
+        </p:nvSpPr>
+        <p:spPr>
+          <a:xfrm>
+            <a:off x="8549640" y="3858768"/>
+            <a:ext cx="822960" cy="320040"/>
+          </a:xfrm>
+          <a:prstGeom prst="rect">
+            <a:avLst/>
+          </a:prstGeom>
+          <a:noFill/>
+          <a:ln/>
+        </p:spPr>
+        <p:txBody>
+          <a:bodyPr wrap="square" lIns="0" tIns="0" rIns="0" bIns="0" rtlCol="0" anchor="ctr"/>
+          <a:lstStyle/>
+          <a:p>
+            <a:pPr algn="ctr" indent="0" marL="0">
+              <a:buNone/>
+            </a:pPr>
+            <a:r>
+              <a:rPr lang="en-US" sz="1400" dirty="0">
+                <a:solidFill>
+                  <a:srgbClr val="7F7F7F"/>
+                </a:solidFill>
+              </a:rPr>
+              <a:t>solved</a:t>
+            </a:r>
+            <a:endParaRPr lang="en-US" sz="1400" dirty="0"/>
+          </a:p>
+        </p:txBody>
+      </p:sp>
+      <p:sp>
+        <p:nvSpPr>
+          <p:cNvPr id="51" name="Text 44"/>
+          <p:cNvSpPr txBox="1"/>
+          <p:nvPr/>
+        </p:nvSpPr>
+        <p:spPr>
+          <a:xfrm>
+            <a:off x="9464040" y="3858768"/>
+            <a:ext cx="1920240" cy="320040"/>
+          </a:xfrm>
+          <a:prstGeom prst="rect">
+            <a:avLst/>
+          </a:prstGeom>
+          <a:noFill/>
+          <a:ln/>
+        </p:spPr>
+        <p:txBody>
+          <a:bodyPr wrap="square" lIns="0" tIns="0" rIns="0" bIns="0" rtlCol="0" anchor="ctr"/>
+          <a:lstStyle/>
+          <a:p>
+            <a:pPr indent="0" marL="0">
+              <a:buNone/>
+            </a:pPr>
+            <a:r>
+              <a:rPr lang="en-US" sz="1400" dirty="0">
+                <a:solidFill>
+                  <a:srgbClr val="7F7F7F"/>
+                </a:solidFill>
+              </a:rPr>
+              <a:t>tokens per problem</a:t>
+            </a:r>
+            <a:endParaRPr lang="en-US" sz="1400" dirty="0"/>
+          </a:p>
+        </p:txBody>
+      </p:sp>
+      <p:sp>
+        <p:nvSpPr>
+          <p:cNvPr id="52" name="Text 45"/>
+          <p:cNvSpPr txBox="1"/>
+          <p:nvPr/>
+        </p:nvSpPr>
+        <p:spPr>
+          <a:xfrm>
+            <a:off x="6400800" y="4224528"/>
+            <a:ext cx="2057400" cy="457200"/>
+          </a:xfrm>
+          <a:prstGeom prst="rect">
+            <a:avLst/>
+          </a:prstGeom>
+          <a:noFill/>
+          <a:ln/>
+        </p:spPr>
+        <p:txBody>
+          <a:bodyPr wrap="square" lIns="0" tIns="0" rIns="0" bIns="0" rtlCol="0" anchor="ctr"/>
+          <a:lstStyle/>
+          <a:p>
+            <a:pPr algn="r" indent="0" marL="0">
+              <a:buNone/>
+            </a:pPr>
+            <a:r>
               <a:rPr lang="en-US" sz="1500" dirty="0">
                 <a:solidFill>
-                  <a:srgbClr val="C00000"/>
-                </a:solidFill>
-              </a:rPr>
-              <a:t>program B (+ helper code) → 0: differ → think</a:t>
+                  <a:schemeClr val="tx1"/>
+                </a:solidFill>
+              </a:rPr>
+              <a:t>always think</a:t>
             </a:r>
             <a:endParaRPr lang="en-US" sz="1500" dirty="0"/>
           </a:p>
@@ -37525,14 +37993,14 @@
       </p:sp>
       <p:sp>
         <p:nvSpPr>
-          <p:cNvPr id="38" name="Text 31"/>
+          <p:cNvPr id="53" name="Text 46"/>
           <p:cNvSpPr txBox="1"/>
           <p:nvPr/>
         </p:nvSpPr>
         <p:spPr>
           <a:xfrm>
-            <a:off x="6400800" y="3154680"/>
-            <a:ext cx="4983480" cy="365760"/>
+            <a:off x="8549640" y="4224528"/>
+            <a:ext cx="822960" cy="457200"/>
           </a:xfrm>
           <a:prstGeom prst="rect">
             <a:avLst/>
@@ -37544,159 +38012,15 @@
           <a:bodyPr wrap="square" lIns="0" tIns="0" rIns="0" bIns="0" rtlCol="0" anchor="ctr"/>
           <a:lstStyle/>
           <a:p>
-            <a:pPr indent="0" marL="0">
-              <a:buNone/>
-            </a:pPr>
-            <a:r>
-              <a:rPr lang="en-US" sz="1500" b="1" dirty="0">
-                <a:solidFill>
-                  <a:schemeClr val="tx1"/>
-                </a:solidFill>
-              </a:rPr>
-              <a:t>108 geometry problems (Qwen3-32B, 3 runs)</a:t>
-            </a:r>
-            <a:endParaRPr lang="en-US" sz="1500" dirty="0"/>
-          </a:p>
-        </p:txBody>
-      </p:sp>
-      <p:sp>
-        <p:nvSpPr>
-          <p:cNvPr id="39" name="Text 32"/>
-          <p:cNvSpPr txBox="1"/>
-          <p:nvPr/>
-        </p:nvSpPr>
-        <p:spPr>
-          <a:xfrm>
-            <a:off x="8549640" y="3520440"/>
-            <a:ext cx="822960" cy="320040"/>
-          </a:xfrm>
-          <a:prstGeom prst="rect">
-            <a:avLst/>
-          </a:prstGeom>
-          <a:noFill/>
-          <a:ln/>
-        </p:spPr>
-        <p:txBody>
-          <a:bodyPr wrap="square" lIns="0" tIns="0" rIns="0" bIns="0" rtlCol="0" anchor="ctr"/>
-          <a:lstStyle/>
-          <a:p>
             <a:pPr algn="ctr" indent="0" marL="0">
               <a:buNone/>
             </a:pPr>
             <a:r>
-              <a:rPr lang="en-US" sz="1400" dirty="0">
+              <a:rPr lang="en-US" sz="1700" b="1" dirty="0">
                 <a:solidFill>
                   <a:srgbClr val="7F7F7F"/>
                 </a:solidFill>
               </a:rPr>
-              <a:t>solved</a:t>
-            </a:r>
-            <a:endParaRPr lang="en-US" sz="1400" dirty="0"/>
-          </a:p>
-        </p:txBody>
-      </p:sp>
-      <p:sp>
-        <p:nvSpPr>
-          <p:cNvPr id="40" name="Text 33"/>
-          <p:cNvSpPr txBox="1"/>
-          <p:nvPr/>
-        </p:nvSpPr>
-        <p:spPr>
-          <a:xfrm>
-            <a:off x="9464040" y="3520440"/>
-            <a:ext cx="1920240" cy="320040"/>
-          </a:xfrm>
-          <a:prstGeom prst="rect">
-            <a:avLst/>
-          </a:prstGeom>
-          <a:noFill/>
-          <a:ln/>
-        </p:spPr>
-        <p:txBody>
-          <a:bodyPr wrap="square" lIns="0" tIns="0" rIns="0" bIns="0" rtlCol="0" anchor="ctr"/>
-          <a:lstStyle/>
-          <a:p>
-            <a:pPr indent="0" marL="0">
-              <a:buNone/>
-            </a:pPr>
-            <a:r>
-              <a:rPr lang="en-US" sz="1400" dirty="0">
-                <a:solidFill>
-                  <a:srgbClr val="7F7F7F"/>
-                </a:solidFill>
-              </a:rPr>
-              <a:t>tokens per problem</a:t>
-            </a:r>
-            <a:endParaRPr lang="en-US" sz="1400" dirty="0"/>
-          </a:p>
-        </p:txBody>
-      </p:sp>
-      <p:sp>
-        <p:nvSpPr>
-          <p:cNvPr id="41" name="Text 34"/>
-          <p:cNvSpPr txBox="1"/>
-          <p:nvPr/>
-        </p:nvSpPr>
-        <p:spPr>
-          <a:xfrm>
-            <a:off x="6400800" y="3886200"/>
-            <a:ext cx="2057400" cy="457200"/>
-          </a:xfrm>
-          <a:prstGeom prst="rect">
-            <a:avLst/>
-          </a:prstGeom>
-          <a:noFill/>
-          <a:ln/>
-        </p:spPr>
-        <p:txBody>
-          <a:bodyPr wrap="square" lIns="0" tIns="0" rIns="0" bIns="0" rtlCol="0" anchor="ctr"/>
-          <a:lstStyle/>
-          <a:p>
-            <a:pPr algn="r" indent="0" marL="0">
-              <a:buNone/>
-            </a:pPr>
-            <a:r>
-              <a:rPr lang="en-US" sz="1500" dirty="0">
-                <a:solidFill>
-                  <a:schemeClr val="tx1"/>
-                </a:solidFill>
-              </a:rPr>
-              <a:t>always think</a:t>
-            </a:r>
-            <a:endParaRPr lang="en-US" sz="1500" dirty="0"/>
-          </a:p>
-        </p:txBody>
-      </p:sp>
-      <p:sp>
-        <p:nvSpPr>
-          <p:cNvPr id="42" name="Text 35"/>
-          <p:cNvSpPr txBox="1"/>
-          <p:nvPr/>
-        </p:nvSpPr>
-        <p:spPr>
-          <a:xfrm>
-            <a:off x="8549640" y="3886200"/>
-            <a:ext cx="822960" cy="457200"/>
-          </a:xfrm>
-          <a:prstGeom prst="rect">
-            <a:avLst/>
-          </a:prstGeom>
-          <a:noFill/>
-          <a:ln/>
-        </p:spPr>
-        <p:txBody>
-          <a:bodyPr wrap="square" lIns="0" tIns="0" rIns="0" bIns="0" rtlCol="0" anchor="ctr"/>
-          <a:lstStyle/>
-          <a:p>
-            <a:pPr algn="ctr" indent="0" marL="0">
-              <a:buNone/>
-            </a:pPr>
-            <a:r>
-              <a:rPr lang="en-US" sz="1700" b="1" dirty="0">
-                <a:solidFill>
-                  <a:srgbClr val="7F7F7F"/>
-                </a:solidFill>
-              </a:rPr>
               <a:t>98%</a:t>
             </a:r>
             <a:endParaRPr lang="en-US" sz="1700" dirty="0"/>
@@ -37705,13 +38029,13 @@
       </p:sp>
       <p:sp>
         <p:nvSpPr>
-          <p:cNvPr id="43" name="tokens always think"/>
+          <p:cNvPr id="54" name="tokens always think"/>
           <p:cNvSpPr/>
           <p:nvPr/>
         </p:nvSpPr>
         <p:spPr>
           <a:xfrm>
-            <a:off x="9464040" y="3986784"/>
+            <a:off x="9464040" y="4325112"/>
             <a:ext cx="1188720" cy="256032"/>
           </a:xfrm>
           <a:prstGeom prst="rect">
@@ -37730,13 +38054,13 @@
       </p:sp>
       <p:sp>
         <p:nvSpPr>
-          <p:cNvPr id="44" name="Text 37"/>
+          <p:cNvPr id="55" name="Text 48"/>
           <p:cNvSpPr txBox="1"/>
           <p:nvPr/>
         </p:nvSpPr>
         <p:spPr>
           <a:xfrm>
-            <a:off x="10744200" y="3886200"/>
+            <a:off x="10744200" y="4224528"/>
             <a:ext cx="731520" cy="457200"/>
           </a:xfrm>
           <a:prstGeom prst="rect">
@@ -37766,13 +38090,13 @@
       </p:sp>
       <p:sp>
         <p:nvSpPr>
-          <p:cNvPr id="45" name="Text 38"/>
+          <p:cNvPr id="56" name="Text 49"/>
           <p:cNvSpPr txBox="1"/>
           <p:nvPr/>
         </p:nvSpPr>
         <p:spPr>
           <a:xfrm>
-            <a:off x="6400800" y="4416552"/>
+            <a:off x="6400800" y="4681728"/>
             <a:ext cx="2057400" cy="457200"/>
           </a:xfrm>
           <a:prstGeom prst="rect">
@@ -37794,7 +38118,7 @@
                   <a:schemeClr val="tx1"/>
                 </a:solidFill>
               </a:rPr>
-              <a:t>only if they differ</a:t>
+              <a:t>think if they differ</a:t>
             </a:r>
             <a:endParaRPr lang="en-US" sz="1500" dirty="0"/>
           </a:p>
@@ -37802,13 +38126,13 @@
       </p:sp>
       <p:sp>
         <p:nvSpPr>
-          <p:cNvPr id="46" name="Text 39"/>
+          <p:cNvPr id="57" name="Text 50"/>
           <p:cNvSpPr txBox="1"/>
           <p:nvPr/>
         </p:nvSpPr>
         <p:spPr>
           <a:xfrm>
-            <a:off x="8549640" y="4416552"/>
+            <a:off x="8549640" y="4681728"/>
             <a:ext cx="822960" cy="457200"/>
           </a:xfrm>
           <a:prstGeom prst="rect">
@@ -37838,13 +38162,13 @@
       </p:sp>
       <p:sp>
         <p:nvSpPr>
-          <p:cNvPr id="47" name="tokens only if they differ"/>
+          <p:cNvPr id="58" name="tokens think if they differ"/>
           <p:cNvSpPr/>
           <p:nvPr/>
         </p:nvSpPr>
         <p:spPr>
           <a:xfrm>
-            <a:off x="9464040" y="4517136"/>
+            <a:off x="9464040" y="4782312"/>
             <a:ext cx="866355" cy="256032"/>
           </a:xfrm>
           <a:prstGeom prst="rect">
@@ -37863,13 +38187,13 @@
       </p:sp>
       <p:sp>
         <p:nvSpPr>
-          <p:cNvPr id="48" name="Text 41"/>
+          <p:cNvPr id="59" name="Text 52"/>
           <p:cNvSpPr txBox="1"/>
           <p:nvPr/>
         </p:nvSpPr>
         <p:spPr>
           <a:xfrm>
-            <a:off x="10421835" y="4416552"/>
+            <a:off x="10421835" y="4681728"/>
             <a:ext cx="731520" cy="457200"/>
           </a:xfrm>
           <a:prstGeom prst="rect">
@@ -37899,7 +38223,7 @@
       </p:sp>
       <p:sp>
         <p:nvSpPr>
-          <p:cNvPr id="49" name="Text 42"/>
+          <p:cNvPr id="60" name="Text 53"/>
           <p:cNvSpPr txBox="1"/>
           <p:nvPr/>
         </p:nvSpPr>

--- a/Proposal_Team5.pptx
+++ b/Proposal_Team5.pptx
@@ -137,7 +137,7 @@
   <p:extLst>
     <p:ext uri="{521415D9-36F7-43E2-AB2F-B90AF26B5E84}">
       <p14:sectionLst xmlns:p14="http://schemas.microsoft.com/office/powerpoint/2010/main">
-        <p14:section name="Talk" id="{4ee40c13-6538-2646-1b3c-db691d26da9a}">
+        <p14:section name="Talk" id="{a0711f0a-7943-cd93-d31e-a7d768ccb46c}">
           <p14:sldIdLst>
             <p14:sldId id="256"/>
             <p14:sldId id="257"/>
@@ -150,7 +150,7 @@
             <p14:sldId id="264"/>
           </p14:sldIdLst>
         </p14:section>
-        <p14:section name="Extra pages" id="{abdd5391-3ebf-59b4-41e3-87cc14925083}">
+        <p14:section name="Extra pages" id="{98fe6148-b321-1118-c2b9-0892824582f5}">
           <p14:sldIdLst>
             <p14:sldId id="265"/>
             <p14:sldId id="266"/>
@@ -3776,7 +3776,7 @@
           <a:p>
             <a:r>
               <a:rPr lang="en-US" dirty="0"/>
-              <a:t>(70초) 두 번째 발견입니다. 공짜 검사가 실패할 때만 생각하게 하세요. 공짜 검사는 정답을 몰라도, 모델 없이 컴퓨터에서 프로그램을 실행만 해서 틀렸는지 알아보는 방법입니다. 실행 순서는 이렇습니다. 먼저 모델이 보통 수준으로 프로그램을 씁니다. 그다음 컴퓨터에서 검사를 돌립니다. 통과하면 그대로 내고, 실패한 문제만 깊게 생각해서 다시 씁니다. 검사 A는 문제에 적힌 예제입니다. 'Make a triangle!' 문제에는 막대 3, 4, 5면 답이 0이라는 예제가 있고, 우리 프로그램에 3, 4, 5를 넣어 0이 나오면 통과입니다. 'Arrow'는 예제의 일곱 꼭짓점과 다른 답이 나와서 다시 생각했고, 맞혔습니다. 예제만 쓰면 65%, 작은 입력을 전부 따져 보는 느린 프로그램과도 비교하면 66%로, 항상 오래 생각할 때와 같고 토큰은 18% 적습니다. 검사 B는 같은 문제를 두 가지 프롬프트로 두 번 짜서 답을 비교합니다. 6과 0처럼 다르면 실패입니다. 기하 108문제에서 99% 대 98%, 토큰은 27% 적습니다.</a:t>
+              <a:t>(60초) 두 번째 발견입니다. 공짜 검사가 실패할 때만 생각하게 하세요. 공짜 검사는 이렇게 돌아갑니다. 문제에는 보통 예제가 적혀 있습니다. 'Make a triangle!'에는 막대 3, 4, 5면 답이 0이라는 예제가 있습니다. 모델이 짠 프로그램을 모델 없이 컴퓨터에서 3, 4, 5로 실행해 0이 나오면 그대로 내고, 다르면 그 문제만 더 생각해서 다시 짭니다. 예제가 없으면 프로그램을 두 가지로 짜서 답이 같은지 봅니다. 오른쪽이 결과입니다. 경시 문제 311개에서 항상 오래 생각하면 66.2%에 3만 토큰, 실패할 때만 생각하면 66.3%에 2만 5천 토큰입니다. 예제만으로는 65%이고, 작은 입력을 전부 따져 보는 짧은 프로그램과도 비교해서 66%가 됩니다. 기하에서는 98% 대 99%이고 토큰은 27% 적습니다. 정답 없이도 같은 정확도를 더 싸게 얻습니다.</a:t>
             </a:r>
             <a:endParaRPr lang="en-US" dirty="0"/>
           </a:p>
@@ -37595,22 +37595,85 @@
       </p:pic>
       <p:sp>
         <p:nvSpPr>
-          <p:cNvPr id="11" name="box ① the model writes a"/>
+          <p:cNvPr id="11" name="how a free check works"/>
           <p:cNvSpPr/>
           <p:nvPr/>
         </p:nvSpPr>
         <p:spPr>
           <a:xfrm>
             <a:off x="548640" y="1371600"/>
-            <a:ext cx="2651760" cy="548640"/>
+            <a:ext cx="5349240" cy="4160520"/>
           </a:xfrm>
           <a:prstGeom prst="roundRect">
             <a:avLst>
-              <a:gd name="adj" fmla="val 10000"/>
+              <a:gd name="adj" fmla="val 1758"/>
             </a:avLst>
           </a:prstGeom>
           <a:solidFill>
             <a:srgbClr val="F2F2F2"/>
+          </a:solidFill>
+          <a:ln w="9525">
+            <a:solidFill>
+              <a:srgbClr val="D9D9D9"/>
+            </a:solidFill>
+            <a:prstDash val="solid"/>
+          </a:ln>
+        </p:spPr>
+      </p:sp>
+      <p:sp>
+        <p:nvSpPr>
+          <p:cNvPr id="12" name="Text 5"/>
+          <p:cNvSpPr txBox="1"/>
+          <p:nvPr/>
+        </p:nvSpPr>
+        <p:spPr>
+          <a:xfrm>
+            <a:off x="777240" y="1444752"/>
+            <a:ext cx="4937760" cy="384048"/>
+          </a:xfrm>
+          <a:prstGeom prst="rect">
+            <a:avLst/>
+          </a:prstGeom>
+          <a:noFill/>
+          <a:ln/>
+        </p:spPr>
+        <p:txBody>
+          <a:bodyPr wrap="square" lIns="0" tIns="0" rIns="0" bIns="0" rtlCol="0" anchor="ctr"/>
+          <a:lstStyle/>
+          <a:p>
+            <a:pPr indent="0" marL="0">
+              <a:buNone/>
+            </a:pPr>
+            <a:r>
+              <a:rPr lang="en-US" sz="1800" b="1" dirty="0">
+                <a:solidFill>
+                  <a:srgbClr val="4472C4"/>
+                </a:solidFill>
+              </a:rPr>
+              <a:t>How a free check works</a:t>
+            </a:r>
+            <a:endParaRPr lang="en-US" sz="1800" dirty="0"/>
+          </a:p>
+        </p:txBody>
+      </p:sp>
+      <p:sp>
+        <p:nvSpPr>
+          <p:cNvPr id="13" name="box The problem shows an"/>
+          <p:cNvSpPr/>
+          <p:nvPr/>
+        </p:nvSpPr>
+        <p:spPr>
+          <a:xfrm>
+            <a:off x="777240" y="1874520"/>
+            <a:ext cx="4892040" cy="566928"/>
+          </a:xfrm>
+          <a:prstGeom prst="roundRect">
+            <a:avLst>
+              <a:gd name="adj" fmla="val 9677"/>
+            </a:avLst>
+          </a:prstGeom>
+          <a:solidFill>
+            <a:srgbClr val="FFFFFF"/>
           </a:solidFill>
           <a:ln w="9525">
             <a:solidFill>
@@ -37622,14 +37685,14 @@
       </p:sp>
       <p:sp>
         <p:nvSpPr>
-          <p:cNvPr id="12" name="Text 5"/>
+          <p:cNvPr id="14" name="Text 7"/>
           <p:cNvSpPr txBox="1"/>
           <p:nvPr/>
         </p:nvSpPr>
         <p:spPr>
           <a:xfrm>
-            <a:off x="621792" y="1371600"/>
-            <a:ext cx="2505456" cy="548640"/>
+            <a:off x="850392" y="1874520"/>
+            <a:ext cx="4745736" cy="566928"/>
           </a:xfrm>
           <a:prstGeom prst="rect">
             <a:avLst/>
@@ -37645,27 +37708,27 @@
               <a:buNone/>
             </a:pPr>
             <a:r>
-              <a:rPr lang="en-US" sz="1400" b="1" dirty="0">
+              <a:rPr lang="en-US" sz="1500" dirty="0">
                 <a:solidFill>
                   <a:schemeClr val="tx1"/>
                 </a:solidFill>
               </a:rPr>
-              <a:t>① the model writes a program (normal effort)</a:t>
-            </a:r>
-            <a:endParaRPr lang="en-US" sz="1400" dirty="0"/>
-          </a:p>
-        </p:txBody>
-      </p:sp>
-      <p:sp>
-        <p:nvSpPr>
-          <p:cNvPr id="13" name="Shape 6"/>
+              <a:t>The problem shows an example: sticks 3 4 5 → answer 0</a:t>
+            </a:r>
+            <a:endParaRPr lang="en-US" sz="1500" dirty="0"/>
+          </a:p>
+        </p:txBody>
+      </p:sp>
+      <p:sp>
+        <p:nvSpPr>
+          <p:cNvPr id="15" name="Shape 8"/>
           <p:cNvSpPr/>
           <p:nvPr/>
         </p:nvSpPr>
         <p:spPr>
           <a:xfrm>
-            <a:off x="3200400" y="1645920"/>
-            <a:ext cx="228600" cy="0"/>
+            <a:off x="3218688" y="2441448"/>
+            <a:ext cx="0" cy="210312"/>
           </a:xfrm>
           <a:prstGeom prst="line">
             <a:avLst/>
@@ -37682,22 +37745,22 @@
       </p:sp>
       <p:sp>
         <p:nvSpPr>
-          <p:cNvPr id="14" name="box ② run the free check"/>
+          <p:cNvPr id="16" name="box Run our program on 3"/>
           <p:cNvSpPr/>
           <p:nvPr/>
         </p:nvSpPr>
         <p:spPr>
           <a:xfrm>
-            <a:off x="3429000" y="1371600"/>
-            <a:ext cx="3246120" cy="548640"/>
+            <a:off x="777240" y="2651760"/>
+            <a:ext cx="4892040" cy="566928"/>
           </a:xfrm>
           <a:prstGeom prst="roundRect">
             <a:avLst>
-              <a:gd name="adj" fmla="val 10000"/>
+              <a:gd name="adj" fmla="val 9677"/>
             </a:avLst>
           </a:prstGeom>
           <a:solidFill>
-            <a:srgbClr val="DEEBF7"/>
+            <a:srgbClr val="FFFFFF"/>
           </a:solidFill>
           <a:ln w="9525">
             <a:solidFill>
@@ -37709,14 +37772,14 @@
       </p:sp>
       <p:sp>
         <p:nvSpPr>
-          <p:cNvPr id="15" name="Text 8"/>
+          <p:cNvPr id="17" name="Text 10"/>
           <p:cNvSpPr txBox="1"/>
           <p:nvPr/>
         </p:nvSpPr>
         <p:spPr>
           <a:xfrm>
-            <a:off x="3502152" y="1371600"/>
-            <a:ext cx="3099816" cy="548640"/>
+            <a:off x="850392" y="2651760"/>
+            <a:ext cx="4745736" cy="566928"/>
           </a:xfrm>
           <a:prstGeom prst="rect">
             <a:avLst/>
@@ -37732,27 +37795,27 @@
               <a:buNone/>
             </a:pPr>
             <a:r>
-              <a:rPr lang="en-US" sz="1400" b="1" dirty="0">
-                <a:solidFill>
-                  <a:srgbClr val="1F3864"/>
-                </a:solidFill>
-              </a:rPr>
-              <a:t>② run the free check on the computer: no model, no answer key</a:t>
-            </a:r>
-            <a:endParaRPr lang="en-US" sz="1400" dirty="0"/>
-          </a:p>
-        </p:txBody>
-      </p:sp>
-      <p:sp>
-        <p:nvSpPr>
-          <p:cNvPr id="16" name="Shape 9"/>
+              <a:rPr lang="en-US" sz="1500" dirty="0">
+                <a:solidFill>
+                  <a:schemeClr val="tx1"/>
+                </a:solidFill>
+              </a:rPr>
+              <a:t>Run our program on 3 4 5 (no model needed): it prints 0</a:t>
+            </a:r>
+            <a:endParaRPr lang="en-US" sz="1500" dirty="0"/>
+          </a:p>
+        </p:txBody>
+      </p:sp>
+      <p:sp>
+        <p:nvSpPr>
+          <p:cNvPr id="18" name="Shape 11"/>
           <p:cNvSpPr/>
           <p:nvPr/>
         </p:nvSpPr>
         <p:spPr>
-          <a:xfrm flipV="1">
-            <a:off x="6675120" y="1481328"/>
-            <a:ext cx="365760" cy="164592"/>
+          <a:xfrm>
+            <a:off x="1920240" y="3218688"/>
+            <a:ext cx="182880" cy="237744"/>
           </a:xfrm>
           <a:prstGeom prst="line">
             <a:avLst/>
@@ -37769,14 +37832,14 @@
       </p:sp>
       <p:sp>
         <p:nvSpPr>
-          <p:cNvPr id="17" name="Shape 10"/>
+          <p:cNvPr id="19" name="Shape 12"/>
           <p:cNvSpPr/>
           <p:nvPr/>
         </p:nvSpPr>
         <p:spPr>
           <a:xfrm>
-            <a:off x="6675120" y="1645920"/>
-            <a:ext cx="365760" cy="164592"/>
+            <a:off x="4343400" y="3218688"/>
+            <a:ext cx="182880" cy="237744"/>
           </a:xfrm>
           <a:prstGeom prst="line">
             <a:avLst/>
@@ -37793,18 +37856,18 @@
       </p:sp>
       <p:sp>
         <p:nvSpPr>
-          <p:cNvPr id="18" name="box ③ ✓ pass → submit it"/>
+          <p:cNvPr id="20" name="box ✓ same → submit (no "/>
           <p:cNvSpPr/>
           <p:nvPr/>
         </p:nvSpPr>
         <p:spPr>
           <a:xfrm>
-            <a:off x="7040880" y="1316736"/>
-            <a:ext cx="4572000" cy="310896"/>
+            <a:off x="777240" y="3456432"/>
+            <a:ext cx="2377440" cy="658368"/>
           </a:xfrm>
           <a:prstGeom prst="roundRect">
             <a:avLst>
-              <a:gd name="adj" fmla="val 17647"/>
+              <a:gd name="adj" fmla="val 8333"/>
             </a:avLst>
           </a:prstGeom>
           <a:solidFill>
@@ -37820,14 +37883,14 @@
       </p:sp>
       <p:sp>
         <p:nvSpPr>
-          <p:cNvPr id="19" name="Text 12"/>
+          <p:cNvPr id="21" name="Text 14"/>
           <p:cNvSpPr txBox="1"/>
           <p:nvPr/>
         </p:nvSpPr>
         <p:spPr>
           <a:xfrm>
-            <a:off x="7114032" y="1316736"/>
-            <a:ext cx="4425696" cy="310896"/>
+            <a:off x="850392" y="3456432"/>
+            <a:ext cx="2231136" cy="658368"/>
           </a:xfrm>
           <a:prstGeom prst="rect">
             <a:avLst/>
@@ -37843,31 +37906,31 @@
               <a:buNone/>
             </a:pPr>
             <a:r>
-              <a:rPr lang="en-US" sz="1400" b="1" dirty="0">
+              <a:rPr lang="en-US" sz="1500" b="1" dirty="0">
                 <a:solidFill>
                   <a:srgbClr val="38761D"/>
                 </a:solidFill>
               </a:rPr>
-              <a:t>③ ✓ pass → submit it (no extra tokens)</a:t>
-            </a:r>
-            <a:endParaRPr lang="en-US" sz="1400" dirty="0"/>
-          </a:p>
-        </p:txBody>
-      </p:sp>
-      <p:sp>
-        <p:nvSpPr>
-          <p:cNvPr id="20" name="box ③ ✗ fail → think har"/>
+              <a:t>✓ same → submit (no extra tokens)</a:t>
+            </a:r>
+            <a:endParaRPr lang="en-US" sz="1500" dirty="0"/>
+          </a:p>
+        </p:txBody>
+      </p:sp>
+      <p:sp>
+        <p:nvSpPr>
+          <p:cNvPr id="22" name="box ✗ different → think "/>
           <p:cNvSpPr/>
           <p:nvPr/>
         </p:nvSpPr>
         <p:spPr>
           <a:xfrm>
-            <a:off x="7040880" y="1664208"/>
-            <a:ext cx="4572000" cy="310896"/>
+            <a:off x="3291840" y="3456432"/>
+            <a:ext cx="2377440" cy="658368"/>
           </a:xfrm>
           <a:prstGeom prst="roundRect">
             <a:avLst>
-              <a:gd name="adj" fmla="val 17647"/>
+              <a:gd name="adj" fmla="val 8333"/>
             </a:avLst>
           </a:prstGeom>
           <a:solidFill>
@@ -37883,14 +37946,14 @@
       </p:sp>
       <p:sp>
         <p:nvSpPr>
-          <p:cNvPr id="21" name="Text 14"/>
+          <p:cNvPr id="23" name="Text 16"/>
           <p:cNvSpPr txBox="1"/>
           <p:nvPr/>
         </p:nvSpPr>
         <p:spPr>
           <a:xfrm>
-            <a:off x="7114032" y="1664208"/>
-            <a:ext cx="4425696" cy="310896"/>
+            <a:off x="3364992" y="3456432"/>
+            <a:ext cx="2231136" cy="658368"/>
           </a:xfrm>
           <a:prstGeom prst="rect">
             <a:avLst/>
@@ -37906,31 +37969,280 @@
               <a:buNone/>
             </a:pPr>
             <a:r>
-              <a:rPr lang="en-US" sz="1400" b="1" dirty="0">
+              <a:rPr lang="en-US" sz="1500" b="1" dirty="0">
                 <a:solidFill>
                   <a:srgbClr val="C00000"/>
                 </a:solidFill>
               </a:rPr>
-              <a:t>③ ✗ fail → think harder, write it again (tokens only here)</a:t>
-            </a:r>
-            <a:endParaRPr lang="en-US" sz="1400" dirty="0"/>
-          </a:p>
-        </p:txBody>
-      </p:sp>
-      <p:sp>
-        <p:nvSpPr>
-          <p:cNvPr id="22" name="check A"/>
+              <a:t>✗ different → think harder, write again</a:t>
+            </a:r>
+            <a:endParaRPr lang="en-US" sz="1500" dirty="0"/>
+          </a:p>
+        </p:txBody>
+      </p:sp>
+      <p:sp>
+        <p:nvSpPr>
+          <p:cNvPr id="24" name="Text 17"/>
+          <p:cNvSpPr txBox="1"/>
+          <p:nvPr/>
+        </p:nvSpPr>
+        <p:spPr>
+          <a:xfrm>
+            <a:off x="777240" y="4279392"/>
+            <a:ext cx="4892040" cy="365760"/>
+          </a:xfrm>
+          <a:prstGeom prst="rect">
+            <a:avLst/>
+          </a:prstGeom>
+          <a:noFill/>
+          <a:ln/>
+        </p:spPr>
+        <p:txBody>
+          <a:bodyPr wrap="square" lIns="0" tIns="0" rIns="0" bIns="0" rtlCol="0" anchor="ctr"/>
+          <a:lstStyle/>
+          <a:p>
+            <a:pPr indent="0" marL="0">
+              <a:buNone/>
+            </a:pPr>
+            <a:r>
+              <a:rPr lang="en-US" sz="1500" b="1" dirty="0">
+                <a:solidFill>
+                  <a:schemeClr val="tx1"/>
+                </a:solidFill>
+              </a:rPr>
+              <a:t>No example? Write the program twice, compare:</a:t>
+            </a:r>
+            <a:endParaRPr lang="en-US" sz="1500" dirty="0"/>
+          </a:p>
+        </p:txBody>
+      </p:sp>
+      <p:sp>
+        <p:nvSpPr>
+          <p:cNvPr id="25" name="box version A prints 6"/>
           <p:cNvSpPr/>
           <p:nvPr/>
         </p:nvSpPr>
         <p:spPr>
           <a:xfrm>
-            <a:off x="548640" y="2057400"/>
-            <a:ext cx="5440680" cy="3474720"/>
+            <a:off x="777240" y="4709160"/>
+            <a:ext cx="1463040" cy="548640"/>
           </a:xfrm>
           <a:prstGeom prst="roundRect">
             <a:avLst>
-              <a:gd name="adj" fmla="val 2105"/>
+              <a:gd name="adj" fmla="val 10000"/>
+            </a:avLst>
+          </a:prstGeom>
+          <a:solidFill>
+            <a:srgbClr val="FFFFFF"/>
+          </a:solidFill>
+          <a:ln w="9525">
+            <a:solidFill>
+              <a:srgbClr val="BFBFBF"/>
+            </a:solidFill>
+            <a:prstDash val="solid"/>
+          </a:ln>
+        </p:spPr>
+      </p:sp>
+      <p:sp>
+        <p:nvSpPr>
+          <p:cNvPr id="26" name="Text 19"/>
+          <p:cNvSpPr txBox="1"/>
+          <p:nvPr/>
+        </p:nvSpPr>
+        <p:spPr>
+          <a:xfrm>
+            <a:off x="850392" y="4709160"/>
+            <a:ext cx="1316736" cy="548640"/>
+          </a:xfrm>
+          <a:prstGeom prst="rect">
+            <a:avLst/>
+          </a:prstGeom>
+          <a:noFill/>
+          <a:ln/>
+        </p:spPr>
+        <p:txBody>
+          <a:bodyPr wrap="square" lIns="0" tIns="0" rIns="0" bIns="0" rtlCol="0" anchor="ctr"/>
+          <a:lstStyle/>
+          <a:p>
+            <a:pPr algn="ctr" indent="0" marL="0">
+              <a:buNone/>
+            </a:pPr>
+            <a:r>
+              <a:rPr lang="en-US" sz="1400" dirty="0">
+                <a:solidFill>
+                  <a:schemeClr val="tx1"/>
+                </a:solidFill>
+              </a:rPr>
+              <a:t>version A prints 6</a:t>
+            </a:r>
+            <a:endParaRPr lang="en-US" sz="1400" dirty="0"/>
+          </a:p>
+        </p:txBody>
+      </p:sp>
+      <p:sp>
+        <p:nvSpPr>
+          <p:cNvPr id="27" name="box version B prints 0"/>
+          <p:cNvSpPr/>
+          <p:nvPr/>
+        </p:nvSpPr>
+        <p:spPr>
+          <a:xfrm>
+            <a:off x="2331720" y="4709160"/>
+            <a:ext cx="1463040" cy="548640"/>
+          </a:xfrm>
+          <a:prstGeom prst="roundRect">
+            <a:avLst>
+              <a:gd name="adj" fmla="val 10000"/>
+            </a:avLst>
+          </a:prstGeom>
+          <a:solidFill>
+            <a:srgbClr val="FFFFFF"/>
+          </a:solidFill>
+          <a:ln w="9525">
+            <a:solidFill>
+              <a:srgbClr val="BFBFBF"/>
+            </a:solidFill>
+            <a:prstDash val="solid"/>
+          </a:ln>
+        </p:spPr>
+      </p:sp>
+      <p:sp>
+        <p:nvSpPr>
+          <p:cNvPr id="28" name="Text 21"/>
+          <p:cNvSpPr txBox="1"/>
+          <p:nvPr/>
+        </p:nvSpPr>
+        <p:spPr>
+          <a:xfrm>
+            <a:off x="2404872" y="4709160"/>
+            <a:ext cx="1316736" cy="548640"/>
+          </a:xfrm>
+          <a:prstGeom prst="rect">
+            <a:avLst/>
+          </a:prstGeom>
+          <a:noFill/>
+          <a:ln/>
+        </p:spPr>
+        <p:txBody>
+          <a:bodyPr wrap="square" lIns="0" tIns="0" rIns="0" bIns="0" rtlCol="0" anchor="ctr"/>
+          <a:lstStyle/>
+          <a:p>
+            <a:pPr algn="ctr" indent="0" marL="0">
+              <a:buNone/>
+            </a:pPr>
+            <a:r>
+              <a:rPr lang="en-US" sz="1400" dirty="0">
+                <a:solidFill>
+                  <a:schemeClr val="tx1"/>
+                </a:solidFill>
+              </a:rPr>
+              <a:t>version B prints 0</a:t>
+            </a:r>
+            <a:endParaRPr lang="en-US" sz="1400" dirty="0"/>
+          </a:p>
+        </p:txBody>
+      </p:sp>
+      <p:sp>
+        <p:nvSpPr>
+          <p:cNvPr id="29" name="Shape 22"/>
+          <p:cNvSpPr/>
+          <p:nvPr/>
+        </p:nvSpPr>
+        <p:spPr>
+          <a:xfrm>
+            <a:off x="3794760" y="4983480"/>
+            <a:ext cx="228600" cy="0"/>
+          </a:xfrm>
+          <a:prstGeom prst="line">
+            <a:avLst/>
+          </a:prstGeom>
+          <a:noFill/>
+          <a:ln w="25400">
+            <a:solidFill>
+              <a:srgbClr val="7F7F7F"/>
+            </a:solidFill>
+            <a:prstDash val="solid"/>
+            <a:tailEnd type="triangle"/>
+          </a:ln>
+        </p:spPr>
+      </p:sp>
+      <p:sp>
+        <p:nvSpPr>
+          <p:cNvPr id="30" name="box ✗ different → think"/>
+          <p:cNvSpPr/>
+          <p:nvPr/>
+        </p:nvSpPr>
+        <p:spPr>
+          <a:xfrm>
+            <a:off x="4023360" y="4709160"/>
+            <a:ext cx="1645920" cy="548640"/>
+          </a:xfrm>
+          <a:prstGeom prst="roundRect">
+            <a:avLst>
+              <a:gd name="adj" fmla="val 10000"/>
+            </a:avLst>
+          </a:prstGeom>
+          <a:solidFill>
+            <a:srgbClr val="FADBD8"/>
+          </a:solidFill>
+          <a:ln w="9525">
+            <a:solidFill>
+              <a:srgbClr val="BFBFBF"/>
+            </a:solidFill>
+            <a:prstDash val="solid"/>
+          </a:ln>
+        </p:spPr>
+      </p:sp>
+      <p:sp>
+        <p:nvSpPr>
+          <p:cNvPr id="31" name="Text 24"/>
+          <p:cNvSpPr txBox="1"/>
+          <p:nvPr/>
+        </p:nvSpPr>
+        <p:spPr>
+          <a:xfrm>
+            <a:off x="4096512" y="4709160"/>
+            <a:ext cx="1499616" cy="548640"/>
+          </a:xfrm>
+          <a:prstGeom prst="rect">
+            <a:avLst/>
+          </a:prstGeom>
+          <a:noFill/>
+          <a:ln/>
+        </p:spPr>
+        <p:txBody>
+          <a:bodyPr wrap="square" lIns="0" tIns="0" rIns="0" bIns="0" rtlCol="0" anchor="ctr"/>
+          <a:lstStyle/>
+          <a:p>
+            <a:pPr algn="ctr" indent="0" marL="0">
+              <a:buNone/>
+            </a:pPr>
+            <a:r>
+              <a:rPr lang="en-US" sz="1400" b="1" dirty="0">
+                <a:solidFill>
+                  <a:srgbClr val="C00000"/>
+                </a:solidFill>
+              </a:rPr>
+              <a:t>✗ different → think</a:t>
+            </a:r>
+            <a:endParaRPr lang="en-US" sz="1400" dirty="0"/>
+          </a:p>
+        </p:txBody>
+      </p:sp>
+      <p:sp>
+        <p:nvSpPr>
+          <p:cNvPr id="32" name="what it buys"/>
+          <p:cNvSpPr/>
+          <p:nvPr/>
+        </p:nvSpPr>
+        <p:spPr>
+          <a:xfrm>
+            <a:off x="6172200" y="1371600"/>
+            <a:ext cx="5440680" cy="4160520"/>
+          </a:xfrm>
+          <a:prstGeom prst="roundRect">
+            <a:avLst>
+              <a:gd name="adj" fmla="val 1758"/>
             </a:avLst>
           </a:prstGeom>
           <a:solidFill>
@@ -37946,314 +38258,14 @@
       </p:sp>
       <p:sp>
         <p:nvSpPr>
-          <p:cNvPr id="23" name="Text 16"/>
-          <p:cNvSpPr txBox="1"/>
-          <p:nvPr/>
-        </p:nvSpPr>
-        <p:spPr>
-          <a:xfrm>
-            <a:off x="777240" y="2103120"/>
-            <a:ext cx="4983480" cy="365760"/>
-          </a:xfrm>
-          <a:prstGeom prst="rect">
-            <a:avLst/>
-          </a:prstGeom>
-          <a:noFill/>
-          <a:ln/>
-        </p:spPr>
-        <p:txBody>
-          <a:bodyPr wrap="square" lIns="0" tIns="0" rIns="0" bIns="0" rtlCol="0" anchor="ctr"/>
-          <a:lstStyle/>
-          <a:p>
-            <a:pPr indent="0" marL="0">
-              <a:buNone/>
-            </a:pPr>
-            <a:r>
-              <a:rPr lang="en-US" sz="1700" b="1" dirty="0">
-                <a:solidFill>
-                  <a:srgbClr val="4472C4"/>
-                </a:solidFill>
-              </a:rPr>
-              <a:t>Check A: the examples printed in the problem</a:t>
-            </a:r>
-            <a:endParaRPr lang="en-US" sz="1700" dirty="0"/>
-          </a:p>
-        </p:txBody>
-      </p:sp>
-      <p:sp>
-        <p:nvSpPr>
-          <p:cNvPr id="24" name="box Make a triangle! exa"/>
-          <p:cNvSpPr/>
-          <p:nvPr/>
-        </p:nvSpPr>
-        <p:spPr>
-          <a:xfrm>
-            <a:off x="777240" y="2514600"/>
-            <a:ext cx="2148840" cy="457200"/>
-          </a:xfrm>
-          <a:prstGeom prst="roundRect">
-            <a:avLst>
-              <a:gd name="adj" fmla="val 12000"/>
-            </a:avLst>
-          </a:prstGeom>
-          <a:solidFill>
-            <a:srgbClr val="FFFFFF"/>
-          </a:solidFill>
-          <a:ln w="9525">
-            <a:solidFill>
-              <a:srgbClr val="BFBFBF"/>
-            </a:solidFill>
-            <a:prstDash val="solid"/>
-          </a:ln>
-        </p:spPr>
-      </p:sp>
-      <p:sp>
-        <p:nvSpPr>
-          <p:cNvPr id="25" name="Text 18"/>
-          <p:cNvSpPr txBox="1"/>
-          <p:nvPr/>
-        </p:nvSpPr>
-        <p:spPr>
-          <a:xfrm>
-            <a:off x="850392" y="2514600"/>
-            <a:ext cx="2002536" cy="457200"/>
-          </a:xfrm>
-          <a:prstGeom prst="rect">
-            <a:avLst/>
-          </a:prstGeom>
-          <a:noFill/>
-          <a:ln/>
-        </p:spPr>
-        <p:txBody>
-          <a:bodyPr wrap="square" lIns="0" tIns="0" rIns="0" bIns="0" rtlCol="0" anchor="ctr"/>
-          <a:lstStyle/>
-          <a:p>
-            <a:pPr algn="ctr" indent="0" marL="0">
-              <a:buNone/>
-            </a:pPr>
-            <a:r>
-              <a:rPr lang="en-US" sz="1400" dirty="0">
-                <a:solidFill>
-                  <a:schemeClr val="tx1"/>
-                </a:solidFill>
-              </a:rPr>
-              <a:t>Make a triangle! example: sticks 3 4 5 → 0</a:t>
-            </a:r>
-            <a:endParaRPr lang="en-US" sz="1400" dirty="0"/>
-          </a:p>
-        </p:txBody>
-      </p:sp>
-      <p:sp>
-        <p:nvSpPr>
-          <p:cNvPr id="26" name="Shape 19"/>
-          <p:cNvSpPr/>
-          <p:nvPr/>
-        </p:nvSpPr>
-        <p:spPr>
-          <a:xfrm>
-            <a:off x="2926080" y="2743200"/>
-            <a:ext cx="137160" cy="0"/>
-          </a:xfrm>
-          <a:prstGeom prst="line">
-            <a:avLst/>
-          </a:prstGeom>
-          <a:noFill/>
-          <a:ln w="25400">
-            <a:solidFill>
-              <a:srgbClr val="7F7F7F"/>
-            </a:solidFill>
-            <a:prstDash val="solid"/>
-            <a:tailEnd type="triangle"/>
-          </a:ln>
-        </p:spPr>
-      </p:sp>
-      <p:sp>
-        <p:nvSpPr>
-          <p:cNvPr id="27" name="box our program on 3 4 5"/>
-          <p:cNvSpPr/>
-          <p:nvPr/>
-        </p:nvSpPr>
-        <p:spPr>
-          <a:xfrm>
-            <a:off x="3063240" y="2514600"/>
-            <a:ext cx="1691640" cy="457200"/>
-          </a:xfrm>
-          <a:prstGeom prst="roundRect">
-            <a:avLst>
-              <a:gd name="adj" fmla="val 12000"/>
-            </a:avLst>
-          </a:prstGeom>
-          <a:solidFill>
-            <a:srgbClr val="FFFFFF"/>
-          </a:solidFill>
-          <a:ln w="9525">
-            <a:solidFill>
-              <a:srgbClr val="BFBFBF"/>
-            </a:solidFill>
-            <a:prstDash val="solid"/>
-          </a:ln>
-        </p:spPr>
-      </p:sp>
-      <p:sp>
-        <p:nvSpPr>
-          <p:cNvPr id="28" name="Text 21"/>
-          <p:cNvSpPr txBox="1"/>
-          <p:nvPr/>
-        </p:nvSpPr>
-        <p:spPr>
-          <a:xfrm>
-            <a:off x="3136392" y="2514600"/>
-            <a:ext cx="1545336" cy="457200"/>
-          </a:xfrm>
-          <a:prstGeom prst="rect">
-            <a:avLst/>
-          </a:prstGeom>
-          <a:noFill/>
-          <a:ln/>
-        </p:spPr>
-        <p:txBody>
-          <a:bodyPr wrap="square" lIns="0" tIns="0" rIns="0" bIns="0" rtlCol="0" anchor="ctr"/>
-          <a:lstStyle/>
-          <a:p>
-            <a:pPr algn="ctr" indent="0" marL="0">
-              <a:buNone/>
-            </a:pPr>
-            <a:r>
-              <a:rPr lang="en-US" sz="1400" dirty="0">
-                <a:solidFill>
-                  <a:schemeClr val="tx1"/>
-                </a:solidFill>
-              </a:rPr>
-              <a:t>our program on 3 4 5 prints 0</a:t>
-            </a:r>
-            <a:endParaRPr lang="en-US" sz="1400" dirty="0"/>
-          </a:p>
-        </p:txBody>
-      </p:sp>
-      <p:sp>
-        <p:nvSpPr>
-          <p:cNvPr id="29" name="Shape 22"/>
-          <p:cNvSpPr/>
-          <p:nvPr/>
-        </p:nvSpPr>
-        <p:spPr>
-          <a:xfrm>
-            <a:off x="4754880" y="2743200"/>
-            <a:ext cx="91440" cy="0"/>
-          </a:xfrm>
-          <a:prstGeom prst="line">
-            <a:avLst/>
-          </a:prstGeom>
-          <a:noFill/>
-          <a:ln w="25400">
-            <a:solidFill>
-              <a:srgbClr val="7F7F7F"/>
-            </a:solidFill>
-            <a:prstDash val="solid"/>
-            <a:tailEnd type="triangle"/>
-          </a:ln>
-        </p:spPr>
-      </p:sp>
-      <p:sp>
-        <p:nvSpPr>
-          <p:cNvPr id="30" name="box ✓ same: submit"/>
-          <p:cNvSpPr/>
-          <p:nvPr/>
-        </p:nvSpPr>
-        <p:spPr>
-          <a:xfrm>
-            <a:off x="4846320" y="2514600"/>
-            <a:ext cx="914400" cy="457200"/>
-          </a:xfrm>
-          <a:prstGeom prst="roundRect">
-            <a:avLst>
-              <a:gd name="adj" fmla="val 12000"/>
-            </a:avLst>
-          </a:prstGeom>
-          <a:solidFill>
-            <a:srgbClr val="E2F0D9"/>
-          </a:solidFill>
-          <a:ln w="9525">
-            <a:solidFill>
-              <a:srgbClr val="BFBFBF"/>
-            </a:solidFill>
-            <a:prstDash val="solid"/>
-          </a:ln>
-        </p:spPr>
-      </p:sp>
-      <p:sp>
-        <p:nvSpPr>
-          <p:cNvPr id="31" name="Text 24"/>
-          <p:cNvSpPr txBox="1"/>
-          <p:nvPr/>
-        </p:nvSpPr>
-        <p:spPr>
-          <a:xfrm>
-            <a:off x="4919472" y="2514600"/>
-            <a:ext cx="768096" cy="457200"/>
-          </a:xfrm>
-          <a:prstGeom prst="rect">
-            <a:avLst/>
-          </a:prstGeom>
-          <a:noFill/>
-          <a:ln/>
-        </p:spPr>
-        <p:txBody>
-          <a:bodyPr wrap="square" lIns="0" tIns="0" rIns="0" bIns="0" rtlCol="0" anchor="ctr"/>
-          <a:lstStyle/>
-          <a:p>
-            <a:pPr algn="ctr" indent="0" marL="0">
-              <a:buNone/>
-            </a:pPr>
-            <a:r>
-              <a:rPr lang="en-US" sz="1400" dirty="0">
-                <a:solidFill>
-                  <a:srgbClr val="38761D"/>
-                </a:solidFill>
-              </a:rPr>
-              <a:t>✓ same: submit</a:t>
-            </a:r>
-            <a:endParaRPr lang="en-US" sz="1400" dirty="0"/>
-          </a:p>
-        </p:txBody>
-      </p:sp>
-      <p:sp>
-        <p:nvSpPr>
-          <p:cNvPr id="32" name="box Arrow example: the 7"/>
-          <p:cNvSpPr/>
-          <p:nvPr/>
-        </p:nvSpPr>
-        <p:spPr>
-          <a:xfrm>
-            <a:off x="777240" y="3035808"/>
-            <a:ext cx="2148840" cy="457200"/>
-          </a:xfrm>
-          <a:prstGeom prst="roundRect">
-            <a:avLst>
-              <a:gd name="adj" fmla="val 12000"/>
-            </a:avLst>
-          </a:prstGeom>
-          <a:solidFill>
-            <a:srgbClr val="FFFFFF"/>
-          </a:solidFill>
-          <a:ln w="9525">
-            <a:solidFill>
-              <a:srgbClr val="BFBFBF"/>
-            </a:solidFill>
-            <a:prstDash val="solid"/>
-          </a:ln>
-        </p:spPr>
-      </p:sp>
-      <p:sp>
-        <p:nvSpPr>
           <p:cNvPr id="33" name="Text 26"/>
           <p:cNvSpPr txBox="1"/>
           <p:nvPr/>
         </p:nvSpPr>
         <p:spPr>
           <a:xfrm>
-            <a:off x="850392" y="3035808"/>
-            <a:ext cx="2002536" cy="457200"/>
+            <a:off x="6400800" y="1444752"/>
+            <a:ext cx="4983480" cy="384048"/>
           </a:xfrm>
           <a:prstGeom prst="rect">
             <a:avLst/>
@@ -38265,71 +38277,92 @@
           <a:bodyPr wrap="square" lIns="0" tIns="0" rIns="0" bIns="0" rtlCol="0" anchor="ctr"/>
           <a:lstStyle/>
           <a:p>
+            <a:pPr indent="0" marL="0">
+              <a:buNone/>
+            </a:pPr>
+            <a:r>
+              <a:rPr lang="en-US" sz="1800" b="1" dirty="0">
+                <a:solidFill>
+                  <a:srgbClr val="4472C4"/>
+                </a:solidFill>
+              </a:rPr>
+              <a:t>Result: the same accuracy, fewer tokens</a:t>
+            </a:r>
+            <a:endParaRPr lang="en-US" sz="1800" dirty="0"/>
+          </a:p>
+        </p:txBody>
+      </p:sp>
+      <p:sp>
+        <p:nvSpPr>
+          <p:cNvPr id="34" name="Text 27"/>
+          <p:cNvSpPr txBox="1"/>
+          <p:nvPr/>
+        </p:nvSpPr>
+        <p:spPr>
+          <a:xfrm>
+            <a:off x="6400800" y="1847088"/>
+            <a:ext cx="4983480" cy="292608"/>
+          </a:xfrm>
+          <a:prstGeom prst="rect">
+            <a:avLst/>
+          </a:prstGeom>
+          <a:noFill/>
+          <a:ln/>
+        </p:spPr>
+        <p:txBody>
+          <a:bodyPr wrap="square" lIns="0" tIns="0" rIns="0" bIns="0" rtlCol="0" anchor="ctr"/>
+          <a:lstStyle/>
+          <a:p>
+            <a:pPr indent="0" marL="0">
+              <a:buNone/>
+            </a:pPr>
+            <a:r>
+              <a:rPr lang="en-US" sz="1500" b="1" dirty="0">
+                <a:solidFill>
+                  <a:schemeClr val="tx1"/>
+                </a:solidFill>
+              </a:rPr>
+              <a:t>311 contest problems (gpt-oss-120b)</a:t>
+            </a:r>
+            <a:endParaRPr lang="en-US" sz="1500" dirty="0"/>
+          </a:p>
+        </p:txBody>
+      </p:sp>
+      <p:sp>
+        <p:nvSpPr>
+          <p:cNvPr id="35" name="Text 28"/>
+          <p:cNvSpPr txBox="1"/>
+          <p:nvPr/>
+        </p:nvSpPr>
+        <p:spPr>
+          <a:xfrm>
+            <a:off x="8641080" y="2103120"/>
+            <a:ext cx="822960" cy="320040"/>
+          </a:xfrm>
+          <a:prstGeom prst="rect">
+            <a:avLst/>
+          </a:prstGeom>
+          <a:noFill/>
+          <a:ln/>
+        </p:spPr>
+        <p:txBody>
+          <a:bodyPr wrap="square" lIns="0" tIns="0" rIns="0" bIns="0" rtlCol="0" anchor="ctr"/>
+          <a:lstStyle/>
+          <a:p>
             <a:pPr algn="ctr" indent="0" marL="0">
               <a:buNone/>
             </a:pPr>
             <a:r>
               <a:rPr lang="en-US" sz="1400" dirty="0">
                 <a:solidFill>
-                  <a:schemeClr val="tx1"/>
-                </a:solidFill>
-              </a:rPr>
-              <a:t>Arrow example: the 7 corners of the shape</a:t>
+                  <a:srgbClr val="7F7F7F"/>
+                </a:solidFill>
+              </a:rPr>
+              <a:t>solved</a:t>
             </a:r>
             <a:endParaRPr lang="en-US" sz="1400" dirty="0"/>
           </a:p>
         </p:txBody>
-      </p:sp>
-      <p:sp>
-        <p:nvSpPr>
-          <p:cNvPr id="34" name="Shape 27"/>
-          <p:cNvSpPr/>
-          <p:nvPr/>
-        </p:nvSpPr>
-        <p:spPr>
-          <a:xfrm>
-            <a:off x="2926080" y="3264408"/>
-            <a:ext cx="137160" cy="0"/>
-          </a:xfrm>
-          <a:prstGeom prst="line">
-            <a:avLst/>
-          </a:prstGeom>
-          <a:noFill/>
-          <a:ln w="25400">
-            <a:solidFill>
-              <a:srgbClr val="7F7F7F"/>
-            </a:solidFill>
-            <a:prstDash val="solid"/>
-            <a:tailEnd type="triangle"/>
-          </a:ln>
-        </p:spPr>
-      </p:sp>
-      <p:sp>
-        <p:nvSpPr>
-          <p:cNvPr id="35" name="box our program prints o"/>
-          <p:cNvSpPr/>
-          <p:nvPr/>
-        </p:nvSpPr>
-        <p:spPr>
-          <a:xfrm>
-            <a:off x="3063240" y="3035808"/>
-            <a:ext cx="1691640" cy="457200"/>
-          </a:xfrm>
-          <a:prstGeom prst="roundRect">
-            <a:avLst>
-              <a:gd name="adj" fmla="val 12000"/>
-            </a:avLst>
-          </a:prstGeom>
-          <a:solidFill>
-            <a:srgbClr val="FFFFFF"/>
-          </a:solidFill>
-          <a:ln w="9525">
-            <a:solidFill>
-              <a:srgbClr val="BFBFBF"/>
-            </a:solidFill>
-            <a:prstDash val="solid"/>
-          </a:ln>
-        </p:spPr>
       </p:sp>
       <p:sp>
         <p:nvSpPr>
@@ -38339,8 +38372,8 @@
         </p:nvSpPr>
         <p:spPr>
           <a:xfrm>
-            <a:off x="3136392" y="3035808"/>
-            <a:ext cx="1545336" cy="457200"/>
+            <a:off x="9555480" y="2103120"/>
+            <a:ext cx="1828800" cy="320040"/>
           </a:xfrm>
           <a:prstGeom prst="rect">
             <a:avLst/>
@@ -38352,298 +38385,103 @@
           <a:bodyPr wrap="square" lIns="0" tIns="0" rIns="0" bIns="0" rtlCol="0" anchor="ctr"/>
           <a:lstStyle/>
           <a:p>
+            <a:pPr indent="0" marL="0">
+              <a:buNone/>
+            </a:pPr>
+            <a:r>
+              <a:rPr lang="en-US" sz="1400" dirty="0">
+                <a:solidFill>
+                  <a:srgbClr val="7F7F7F"/>
+                </a:solidFill>
+              </a:rPr>
+              <a:t>tokens per problem</a:t>
+            </a:r>
+            <a:endParaRPr lang="en-US" sz="1400" dirty="0"/>
+          </a:p>
+        </p:txBody>
+      </p:sp>
+      <p:sp>
+        <p:nvSpPr>
+          <p:cNvPr id="37" name="Text 30"/>
+          <p:cNvSpPr txBox="1"/>
+          <p:nvPr/>
+        </p:nvSpPr>
+        <p:spPr>
+          <a:xfrm>
+            <a:off x="6400800" y="2468880"/>
+            <a:ext cx="2148840" cy="457200"/>
+          </a:xfrm>
+          <a:prstGeom prst="rect">
+            <a:avLst/>
+          </a:prstGeom>
+          <a:noFill/>
+          <a:ln/>
+        </p:spPr>
+        <p:txBody>
+          <a:bodyPr wrap="square" lIns="0" tIns="0" rIns="0" bIns="0" rtlCol="0" anchor="ctr"/>
+          <a:lstStyle/>
+          <a:p>
+            <a:pPr algn="r" indent="0" marL="0">
+              <a:buNone/>
+            </a:pPr>
+            <a:r>
+              <a:rPr lang="en-US" sz="1500" dirty="0">
+                <a:solidFill>
+                  <a:schemeClr val="tx1"/>
+                </a:solidFill>
+              </a:rPr>
+              <a:t>always think hard</a:t>
+            </a:r>
+            <a:endParaRPr lang="en-US" sz="1500" dirty="0"/>
+          </a:p>
+        </p:txBody>
+      </p:sp>
+      <p:sp>
+        <p:nvSpPr>
+          <p:cNvPr id="38" name="Text 31"/>
+          <p:cNvSpPr txBox="1"/>
+          <p:nvPr/>
+        </p:nvSpPr>
+        <p:spPr>
+          <a:xfrm>
+            <a:off x="8641080" y="2468880"/>
+            <a:ext cx="822960" cy="457200"/>
+          </a:xfrm>
+          <a:prstGeom prst="rect">
+            <a:avLst/>
+          </a:prstGeom>
+          <a:noFill/>
+          <a:ln/>
+        </p:spPr>
+        <p:txBody>
+          <a:bodyPr wrap="square" lIns="0" tIns="0" rIns="0" bIns="0" rtlCol="0" anchor="ctr"/>
+          <a:lstStyle/>
+          <a:p>
             <a:pPr algn="ctr" indent="0" marL="0">
               <a:buNone/>
             </a:pPr>
             <a:r>
-              <a:rPr lang="en-US" sz="1400" dirty="0">
-                <a:solidFill>
-                  <a:schemeClr val="tx1"/>
-                </a:solidFill>
-              </a:rPr>
-              <a:t>our program prints other corners</a:t>
-            </a:r>
-            <a:endParaRPr lang="en-US" sz="1400" dirty="0"/>
-          </a:p>
-        </p:txBody>
-      </p:sp>
-      <p:sp>
-        <p:nvSpPr>
-          <p:cNvPr id="37" name="Shape 30"/>
+              <a:rPr lang="en-US" sz="1700" b="1" dirty="0">
+                <a:solidFill>
+                  <a:srgbClr val="7F7F7F"/>
+                </a:solidFill>
+              </a:rPr>
+              <a:t>66.2%</a:t>
+            </a:r>
+            <a:endParaRPr lang="en-US" sz="1700" dirty="0"/>
+          </a:p>
+        </p:txBody>
+      </p:sp>
+      <p:sp>
+        <p:nvSpPr>
+          <p:cNvPr id="39" name="tokens always think hard"/>
           <p:cNvSpPr/>
           <p:nvPr/>
         </p:nvSpPr>
         <p:spPr>
           <a:xfrm>
-            <a:off x="4754880" y="3264408"/>
-            <a:ext cx="91440" cy="0"/>
-          </a:xfrm>
-          <a:prstGeom prst="line">
-            <a:avLst/>
-          </a:prstGeom>
-          <a:noFill/>
-          <a:ln w="25400">
-            <a:solidFill>
-              <a:srgbClr val="7F7F7F"/>
-            </a:solidFill>
-            <a:prstDash val="solid"/>
-            <a:tailEnd type="triangle"/>
-          </a:ln>
-        </p:spPr>
-      </p:sp>
-      <p:sp>
-        <p:nvSpPr>
-          <p:cNvPr id="38" name="box ✗ think again"/>
-          <p:cNvSpPr/>
-          <p:nvPr/>
-        </p:nvSpPr>
-        <p:spPr>
-          <a:xfrm>
-            <a:off x="4846320" y="3035808"/>
-            <a:ext cx="914400" cy="457200"/>
-          </a:xfrm>
-          <a:prstGeom prst="roundRect">
-            <a:avLst>
-              <a:gd name="adj" fmla="val 12000"/>
-            </a:avLst>
-          </a:prstGeom>
-          <a:solidFill>
-            <a:srgbClr val="FADBD8"/>
-          </a:solidFill>
-          <a:ln w="9525">
-            <a:solidFill>
-              <a:srgbClr val="BFBFBF"/>
-            </a:solidFill>
-            <a:prstDash val="solid"/>
-          </a:ln>
-        </p:spPr>
-      </p:sp>
-      <p:sp>
-        <p:nvSpPr>
-          <p:cNvPr id="39" name="Text 32"/>
-          <p:cNvSpPr txBox="1"/>
-          <p:nvPr/>
-        </p:nvSpPr>
-        <p:spPr>
-          <a:xfrm>
-            <a:off x="4919472" y="3035808"/>
-            <a:ext cx="768096" cy="457200"/>
-          </a:xfrm>
-          <a:prstGeom prst="rect">
-            <a:avLst/>
-          </a:prstGeom>
-          <a:noFill/>
-          <a:ln/>
-        </p:spPr>
-        <p:txBody>
-          <a:bodyPr wrap="square" lIns="0" tIns="0" rIns="0" bIns="0" rtlCol="0" anchor="ctr"/>
-          <a:lstStyle/>
-          <a:p>
-            <a:pPr algn="ctr" indent="0" marL="0">
-              <a:buNone/>
-            </a:pPr>
-            <a:r>
-              <a:rPr lang="en-US" sz="1400" dirty="0">
-                <a:solidFill>
-                  <a:srgbClr val="C00000"/>
-                </a:solidFill>
-              </a:rPr>
-              <a:t>✗ think again</a:t>
-            </a:r>
-            <a:endParaRPr lang="en-US" sz="1400" dirty="0"/>
-          </a:p>
-        </p:txBody>
-      </p:sp>
-      <p:sp>
-        <p:nvSpPr>
-          <p:cNvPr id="40" name="Text 33"/>
-          <p:cNvSpPr txBox="1"/>
-          <p:nvPr/>
-        </p:nvSpPr>
-        <p:spPr>
-          <a:xfrm>
-            <a:off x="777240" y="3547872"/>
-            <a:ext cx="4983480" cy="274320"/>
-          </a:xfrm>
-          <a:prstGeom prst="rect">
-            <a:avLst/>
-          </a:prstGeom>
-          <a:noFill/>
-          <a:ln/>
-        </p:spPr>
-        <p:txBody>
-          <a:bodyPr wrap="square" lIns="0" tIns="0" rIns="0" bIns="0" rtlCol="0" anchor="ctr"/>
-          <a:lstStyle/>
-          <a:p>
-            <a:pPr indent="0" marL="0">
-              <a:buNone/>
-            </a:pPr>
-            <a:r>
-              <a:rPr lang="en-US" sz="1400" b="1" dirty="0">
-                <a:solidFill>
-                  <a:schemeClr val="tx1"/>
-                </a:solidFill>
-              </a:rPr>
-              <a:t>311 contest problems (gpt-oss-120b)</a:t>
-            </a:r>
-            <a:endParaRPr lang="en-US" sz="1400" dirty="0"/>
-          </a:p>
-        </p:txBody>
-      </p:sp>
-      <p:sp>
-        <p:nvSpPr>
-          <p:cNvPr id="41" name="Text 34"/>
-          <p:cNvSpPr txBox="1"/>
-          <p:nvPr/>
-        </p:nvSpPr>
-        <p:spPr>
-          <a:xfrm>
-            <a:off x="2926080" y="3794760"/>
-            <a:ext cx="822960" cy="320040"/>
-          </a:xfrm>
-          <a:prstGeom prst="rect">
-            <a:avLst/>
-          </a:prstGeom>
-          <a:noFill/>
-          <a:ln/>
-        </p:spPr>
-        <p:txBody>
-          <a:bodyPr wrap="square" lIns="0" tIns="0" rIns="0" bIns="0" rtlCol="0" anchor="ctr"/>
-          <a:lstStyle/>
-          <a:p>
-            <a:pPr algn="ctr" indent="0" marL="0">
-              <a:buNone/>
-            </a:pPr>
-            <a:r>
-              <a:rPr lang="en-US" sz="1400" dirty="0">
-                <a:solidFill>
-                  <a:srgbClr val="7F7F7F"/>
-                </a:solidFill>
-              </a:rPr>
-              <a:t>solved</a:t>
-            </a:r>
-            <a:endParaRPr lang="en-US" sz="1400" dirty="0"/>
-          </a:p>
-        </p:txBody>
-      </p:sp>
-      <p:sp>
-        <p:nvSpPr>
-          <p:cNvPr id="42" name="Text 35"/>
-          <p:cNvSpPr txBox="1"/>
-          <p:nvPr/>
-        </p:nvSpPr>
-        <p:spPr>
-          <a:xfrm>
-            <a:off x="3840480" y="3794760"/>
-            <a:ext cx="1920240" cy="320040"/>
-          </a:xfrm>
-          <a:prstGeom prst="rect">
-            <a:avLst/>
-          </a:prstGeom>
-          <a:noFill/>
-          <a:ln/>
-        </p:spPr>
-        <p:txBody>
-          <a:bodyPr wrap="square" lIns="0" tIns="0" rIns="0" bIns="0" rtlCol="0" anchor="ctr"/>
-          <a:lstStyle/>
-          <a:p>
-            <a:pPr indent="0" marL="0">
-              <a:buNone/>
-            </a:pPr>
-            <a:r>
-              <a:rPr lang="en-US" sz="1400" dirty="0">
-                <a:solidFill>
-                  <a:srgbClr val="7F7F7F"/>
-                </a:solidFill>
-              </a:rPr>
-              <a:t>tokens per problem</a:t>
-            </a:r>
-            <a:endParaRPr lang="en-US" sz="1400" dirty="0"/>
-          </a:p>
-        </p:txBody>
-      </p:sp>
-      <p:sp>
-        <p:nvSpPr>
-          <p:cNvPr id="43" name="Text 36"/>
-          <p:cNvSpPr txBox="1"/>
-          <p:nvPr/>
-        </p:nvSpPr>
-        <p:spPr>
-          <a:xfrm>
-            <a:off x="777240" y="4160520"/>
-            <a:ext cx="2057400" cy="457200"/>
-          </a:xfrm>
-          <a:prstGeom prst="rect">
-            <a:avLst/>
-          </a:prstGeom>
-          <a:noFill/>
-          <a:ln/>
-        </p:spPr>
-        <p:txBody>
-          <a:bodyPr wrap="square" lIns="0" tIns="0" rIns="0" bIns="0" rtlCol="0" anchor="ctr"/>
-          <a:lstStyle/>
-          <a:p>
-            <a:pPr algn="r" indent="0" marL="0">
-              <a:buNone/>
-            </a:pPr>
-            <a:r>
-              <a:rPr lang="en-US" sz="1500" dirty="0">
-                <a:solidFill>
-                  <a:schemeClr val="tx1"/>
-                </a:solidFill>
-              </a:rPr>
-              <a:t>always think hard</a:t>
-            </a:r>
-            <a:endParaRPr lang="en-US" sz="1500" dirty="0"/>
-          </a:p>
-        </p:txBody>
-      </p:sp>
-      <p:sp>
-        <p:nvSpPr>
-          <p:cNvPr id="44" name="Text 37"/>
-          <p:cNvSpPr txBox="1"/>
-          <p:nvPr/>
-        </p:nvSpPr>
-        <p:spPr>
-          <a:xfrm>
-            <a:off x="2926080" y="4160520"/>
-            <a:ext cx="822960" cy="457200"/>
-          </a:xfrm>
-          <a:prstGeom prst="rect">
-            <a:avLst/>
-          </a:prstGeom>
-          <a:noFill/>
-          <a:ln/>
-        </p:spPr>
-        <p:txBody>
-          <a:bodyPr wrap="square" lIns="0" tIns="0" rIns="0" bIns="0" rtlCol="0" anchor="ctr"/>
-          <a:lstStyle/>
-          <a:p>
-            <a:pPr algn="ctr" indent="0" marL="0">
-              <a:buNone/>
-            </a:pPr>
-            <a:r>
-              <a:rPr lang="en-US" sz="1700" b="1" dirty="0">
-                <a:solidFill>
-                  <a:srgbClr val="7F7F7F"/>
-                </a:solidFill>
-              </a:rPr>
-              <a:t>66.2%</a:t>
-            </a:r>
-            <a:endParaRPr lang="en-US" sz="1700" dirty="0"/>
-          </a:p>
-        </p:txBody>
-      </p:sp>
-      <p:sp>
-        <p:nvSpPr>
-          <p:cNvPr id="45" name="tokens always think hard"/>
-          <p:cNvSpPr/>
-          <p:nvPr/>
-        </p:nvSpPr>
-        <p:spPr>
-          <a:xfrm>
-            <a:off x="3840480" y="4261104"/>
-            <a:ext cx="1188720" cy="256032"/>
+            <a:off x="9555480" y="2569464"/>
+            <a:ext cx="1097280" cy="256032"/>
           </a:xfrm>
           <a:prstGeom prst="rect">
             <a:avLst/>
@@ -38661,13 +38499,13 @@
       </p:sp>
       <p:sp>
         <p:nvSpPr>
-          <p:cNvPr id="46" name="Text 39"/>
+          <p:cNvPr id="40" name="Text 33"/>
           <p:cNvSpPr txBox="1"/>
           <p:nvPr/>
         </p:nvSpPr>
         <p:spPr>
           <a:xfrm>
-            <a:off x="5120640" y="4160520"/>
+            <a:off x="10744200" y="2468880"/>
             <a:ext cx="731520" cy="457200"/>
           </a:xfrm>
           <a:prstGeom prst="rect">
@@ -38697,14 +38535,14 @@
       </p:sp>
       <p:sp>
         <p:nvSpPr>
-          <p:cNvPr id="47" name="Text 40"/>
+          <p:cNvPr id="41" name="Text 34"/>
           <p:cNvSpPr txBox="1"/>
           <p:nvPr/>
         </p:nvSpPr>
         <p:spPr>
           <a:xfrm>
-            <a:off x="777240" y="4572000"/>
-            <a:ext cx="2057400" cy="457200"/>
+            <a:off x="6400800" y="2907792"/>
+            <a:ext cx="2148840" cy="457200"/>
           </a:xfrm>
           <a:prstGeom prst="rect">
             <a:avLst/>
@@ -38725,7 +38563,7 @@
                   <a:schemeClr val="tx1"/>
                 </a:solidFill>
               </a:rPr>
-              <a:t>think if an example fails</a:t>
+              <a:t>think only on failure</a:t>
             </a:r>
             <a:endParaRPr lang="en-US" sz="1500" dirty="0"/>
           </a:p>
@@ -38733,13 +38571,13 @@
       </p:sp>
       <p:sp>
         <p:nvSpPr>
-          <p:cNvPr id="48" name="Text 41"/>
+          <p:cNvPr id="42" name="Text 35"/>
           <p:cNvSpPr txBox="1"/>
           <p:nvPr/>
         </p:nvSpPr>
         <p:spPr>
           <a:xfrm>
-            <a:off x="2926080" y="4572000"/>
+            <a:off x="8641080" y="2907792"/>
             <a:ext cx="822960" cy="457200"/>
           </a:xfrm>
           <a:prstGeom prst="rect">
@@ -38758,10 +38596,10 @@
             <a:r>
               <a:rPr lang="en-US" sz="1700" b="1" dirty="0">
                 <a:solidFill>
-                  <a:srgbClr val="5B9BD5"/>
-                </a:solidFill>
-              </a:rPr>
-              <a:t>65.0%</a:t>
+                  <a:srgbClr val="4472C4"/>
+                </a:solidFill>
+              </a:rPr>
+              <a:t>66.3%</a:t>
             </a:r>
             <a:endParaRPr lang="en-US" sz="1700" dirty="0"/>
           </a:p>
@@ -38769,147 +38607,14 @@
       </p:sp>
       <p:sp>
         <p:nvSpPr>
-          <p:cNvPr id="49" name="tokens think if an example fails"/>
+          <p:cNvPr id="43" name="tokens think only on failure"/>
           <p:cNvSpPr/>
           <p:nvPr/>
         </p:nvSpPr>
         <p:spPr>
           <a:xfrm>
-            <a:off x="3840480" y="4672584"/>
-            <a:ext cx="797746" cy="256032"/>
-          </a:xfrm>
-          <a:prstGeom prst="rect">
-            <a:avLst/>
-          </a:prstGeom>
-          <a:solidFill>
-            <a:srgbClr val="5B9BD5"/>
-          </a:solidFill>
-          <a:ln w="6350">
-            <a:solidFill>
-              <a:srgbClr val="5B9BD5"/>
-            </a:solidFill>
-            <a:prstDash val="solid"/>
-          </a:ln>
-        </p:spPr>
-      </p:sp>
-      <p:sp>
-        <p:nvSpPr>
-          <p:cNvPr id="50" name="Text 43"/>
-          <p:cNvSpPr txBox="1"/>
-          <p:nvPr/>
-        </p:nvSpPr>
-        <p:spPr>
-          <a:xfrm>
-            <a:off x="4729666" y="4572000"/>
-            <a:ext cx="731520" cy="457200"/>
-          </a:xfrm>
-          <a:prstGeom prst="rect">
-            <a:avLst/>
-          </a:prstGeom>
-          <a:noFill/>
-          <a:ln/>
-        </p:spPr>
-        <p:txBody>
-          <a:bodyPr wrap="square" lIns="0" tIns="0" rIns="0" bIns="0" rtlCol="0" anchor="ctr"/>
-          <a:lstStyle/>
-          <a:p>
-            <a:pPr indent="0" marL="0">
-              <a:buNone/>
-            </a:pPr>
-            <a:r>
-              <a:rPr lang="en-US" sz="1500" b="1" dirty="0">
-                <a:solidFill>
-                  <a:srgbClr val="5B9BD5"/>
-                </a:solidFill>
-              </a:rPr>
-              <a:t>20k</a:t>
-            </a:r>
-            <a:endParaRPr lang="en-US" sz="1500" dirty="0"/>
-          </a:p>
-        </p:txBody>
-      </p:sp>
-      <p:sp>
-        <p:nvSpPr>
-          <p:cNvPr id="51" name="Text 44"/>
-          <p:cNvSpPr txBox="1"/>
-          <p:nvPr/>
-        </p:nvSpPr>
-        <p:spPr>
-          <a:xfrm>
-            <a:off x="777240" y="4983480"/>
-            <a:ext cx="2057400" cy="457200"/>
-          </a:xfrm>
-          <a:prstGeom prst="rect">
-            <a:avLst/>
-          </a:prstGeom>
-          <a:noFill/>
-          <a:ln/>
-        </p:spPr>
-        <p:txBody>
-          <a:bodyPr wrap="square" lIns="0" tIns="0" rIns="0" bIns="0" rtlCol="0" anchor="ctr"/>
-          <a:lstStyle/>
-          <a:p>
-            <a:pPr algn="r" indent="0" marL="0">
-              <a:buNone/>
-            </a:pPr>
-            <a:r>
-              <a:rPr lang="en-US" sz="1500" dirty="0">
-                <a:solidFill>
-                  <a:schemeClr val="tx1"/>
-                </a:solidFill>
-              </a:rPr>
-              <a:t>… or a brute-force run</a:t>
-            </a:r>
-            <a:endParaRPr lang="en-US" sz="1500" dirty="0"/>
-          </a:p>
-        </p:txBody>
-      </p:sp>
-      <p:sp>
-        <p:nvSpPr>
-          <p:cNvPr id="52" name="Text 45"/>
-          <p:cNvSpPr txBox="1"/>
-          <p:nvPr/>
-        </p:nvSpPr>
-        <p:spPr>
-          <a:xfrm>
-            <a:off x="2926080" y="4983480"/>
-            <a:ext cx="822960" cy="457200"/>
-          </a:xfrm>
-          <a:prstGeom prst="rect">
-            <a:avLst/>
-          </a:prstGeom>
-          <a:noFill/>
-          <a:ln/>
-        </p:spPr>
-        <p:txBody>
-          <a:bodyPr wrap="square" lIns="0" tIns="0" rIns="0" bIns="0" rtlCol="0" anchor="ctr"/>
-          <a:lstStyle/>
-          <a:p>
-            <a:pPr algn="ctr" indent="0" marL="0">
-              <a:buNone/>
-            </a:pPr>
-            <a:r>
-              <a:rPr lang="en-US" sz="1700" b="1" dirty="0">
-                <a:solidFill>
-                  <a:srgbClr val="4472C4"/>
-                </a:solidFill>
-              </a:rPr>
-              <a:t>66.3%</a:t>
-            </a:r>
-            <a:endParaRPr lang="en-US" sz="1700" dirty="0"/>
-          </a:p>
-        </p:txBody>
-      </p:sp>
-      <p:sp>
-        <p:nvSpPr>
-          <p:cNvPr id="53" name="tokens … or a brute-force run"/>
-          <p:cNvSpPr/>
-          <p:nvPr/>
-        </p:nvSpPr>
-        <p:spPr>
-          <a:xfrm>
-            <a:off x="3840480" y="5084064"/>
-            <a:ext cx="975461" cy="256032"/>
+            <a:off x="9555480" y="3008376"/>
+            <a:ext cx="900426" cy="256032"/>
           </a:xfrm>
           <a:prstGeom prst="rect">
             <a:avLst/>
@@ -38927,13 +38632,13 @@
       </p:sp>
       <p:sp>
         <p:nvSpPr>
-          <p:cNvPr id="54" name="Text 47"/>
+          <p:cNvPr id="44" name="Text 37"/>
           <p:cNvSpPr txBox="1"/>
           <p:nvPr/>
         </p:nvSpPr>
         <p:spPr>
           <a:xfrm>
-            <a:off x="4907381" y="4983480"/>
+            <a:off x="10547346" y="2907792"/>
             <a:ext cx="731520" cy="457200"/>
           </a:xfrm>
           <a:prstGeom prst="rect">
@@ -38963,668 +38668,230 @@
       </p:sp>
       <p:sp>
         <p:nvSpPr>
-          <p:cNvPr id="55" name="check B"/>
+          <p:cNvPr id="45" name="Text 38"/>
+          <p:cNvSpPr txBox="1"/>
+          <p:nvPr/>
+        </p:nvSpPr>
+        <p:spPr>
+          <a:xfrm>
+            <a:off x="6400800" y="3364992"/>
+            <a:ext cx="4983480" cy="457200"/>
+          </a:xfrm>
+          <a:prstGeom prst="rect">
+            <a:avLst/>
+          </a:prstGeom>
+          <a:noFill/>
+          <a:ln/>
+        </p:spPr>
+        <p:txBody>
+          <a:bodyPr wrap="square" lIns="0" tIns="0" rIns="0" bIns="0" rtlCol="0" anchor="t"/>
+          <a:lstStyle/>
+          <a:p>
+            <a:pPr indent="0" marL="0">
+              <a:buNone/>
+            </a:pPr>
+            <a:r>
+              <a:rPr lang="en-US" sz="1400" dirty="0">
+                <a:solidFill>
+                  <a:schemeClr val="tx2"/>
+                </a:solidFill>
+              </a:rPr>
+              <a:t>examples alone give 65.0% at 20k; adding a brute-force program as a second check gives 66.3%</a:t>
+            </a:r>
+            <a:endParaRPr lang="en-US" sz="1400" dirty="0"/>
+          </a:p>
+        </p:txBody>
+      </p:sp>
+      <p:sp>
+        <p:nvSpPr>
+          <p:cNvPr id="46" name="Text 39"/>
+          <p:cNvSpPr txBox="1"/>
+          <p:nvPr/>
+        </p:nvSpPr>
+        <p:spPr>
+          <a:xfrm>
+            <a:off x="6400800" y="3931920"/>
+            <a:ext cx="4983480" cy="292608"/>
+          </a:xfrm>
+          <a:prstGeom prst="rect">
+            <a:avLst/>
+          </a:prstGeom>
+          <a:noFill/>
+          <a:ln/>
+        </p:spPr>
+        <p:txBody>
+          <a:bodyPr wrap="square" lIns="0" tIns="0" rIns="0" bIns="0" rtlCol="0" anchor="ctr"/>
+          <a:lstStyle/>
+          <a:p>
+            <a:pPr indent="0" marL="0">
+              <a:buNone/>
+            </a:pPr>
+            <a:r>
+              <a:rPr lang="en-US" sz="1500" b="1" dirty="0">
+                <a:solidFill>
+                  <a:schemeClr val="tx1"/>
+                </a:solidFill>
+              </a:rPr>
+              <a:t>108 geometry problems (Qwen3-32B, 3 runs)</a:t>
+            </a:r>
+            <a:endParaRPr lang="en-US" sz="1500" dirty="0"/>
+          </a:p>
+        </p:txBody>
+      </p:sp>
+      <p:sp>
+        <p:nvSpPr>
+          <p:cNvPr id="47" name="Text 40"/>
+          <p:cNvSpPr txBox="1"/>
+          <p:nvPr/>
+        </p:nvSpPr>
+        <p:spPr>
+          <a:xfrm>
+            <a:off x="8641080" y="4187952"/>
+            <a:ext cx="822960" cy="320040"/>
+          </a:xfrm>
+          <a:prstGeom prst="rect">
+            <a:avLst/>
+          </a:prstGeom>
+          <a:noFill/>
+          <a:ln/>
+        </p:spPr>
+        <p:txBody>
+          <a:bodyPr wrap="square" lIns="0" tIns="0" rIns="0" bIns="0" rtlCol="0" anchor="ctr"/>
+          <a:lstStyle/>
+          <a:p>
+            <a:pPr algn="ctr" indent="0" marL="0">
+              <a:buNone/>
+            </a:pPr>
+            <a:r>
+              <a:rPr lang="en-US" sz="1400" dirty="0">
+                <a:solidFill>
+                  <a:srgbClr val="7F7F7F"/>
+                </a:solidFill>
+              </a:rPr>
+              <a:t>solved</a:t>
+            </a:r>
+            <a:endParaRPr lang="en-US" sz="1400" dirty="0"/>
+          </a:p>
+        </p:txBody>
+      </p:sp>
+      <p:sp>
+        <p:nvSpPr>
+          <p:cNvPr id="48" name="Text 41"/>
+          <p:cNvSpPr txBox="1"/>
+          <p:nvPr/>
+        </p:nvSpPr>
+        <p:spPr>
+          <a:xfrm>
+            <a:off x="9555480" y="4187952"/>
+            <a:ext cx="1828800" cy="320040"/>
+          </a:xfrm>
+          <a:prstGeom prst="rect">
+            <a:avLst/>
+          </a:prstGeom>
+          <a:noFill/>
+          <a:ln/>
+        </p:spPr>
+        <p:txBody>
+          <a:bodyPr wrap="square" lIns="0" tIns="0" rIns="0" bIns="0" rtlCol="0" anchor="ctr"/>
+          <a:lstStyle/>
+          <a:p>
+            <a:pPr indent="0" marL="0">
+              <a:buNone/>
+            </a:pPr>
+            <a:r>
+              <a:rPr lang="en-US" sz="1400" dirty="0">
+                <a:solidFill>
+                  <a:srgbClr val="7F7F7F"/>
+                </a:solidFill>
+              </a:rPr>
+              <a:t>tokens per problem</a:t>
+            </a:r>
+            <a:endParaRPr lang="en-US" sz="1400" dirty="0"/>
+          </a:p>
+        </p:txBody>
+      </p:sp>
+      <p:sp>
+        <p:nvSpPr>
+          <p:cNvPr id="49" name="Text 42"/>
+          <p:cNvSpPr txBox="1"/>
+          <p:nvPr/>
+        </p:nvSpPr>
+        <p:spPr>
+          <a:xfrm>
+            <a:off x="6400800" y="4553712"/>
+            <a:ext cx="2148840" cy="457200"/>
+          </a:xfrm>
+          <a:prstGeom prst="rect">
+            <a:avLst/>
+          </a:prstGeom>
+          <a:noFill/>
+          <a:ln/>
+        </p:spPr>
+        <p:txBody>
+          <a:bodyPr wrap="square" lIns="0" tIns="0" rIns="0" bIns="0" rtlCol="0" anchor="ctr"/>
+          <a:lstStyle/>
+          <a:p>
+            <a:pPr algn="r" indent="0" marL="0">
+              <a:buNone/>
+            </a:pPr>
+            <a:r>
+              <a:rPr lang="en-US" sz="1500" dirty="0">
+                <a:solidFill>
+                  <a:schemeClr val="tx1"/>
+                </a:solidFill>
+              </a:rPr>
+              <a:t>always think</a:t>
+            </a:r>
+            <a:endParaRPr lang="en-US" sz="1500" dirty="0"/>
+          </a:p>
+        </p:txBody>
+      </p:sp>
+      <p:sp>
+        <p:nvSpPr>
+          <p:cNvPr id="50" name="Text 43"/>
+          <p:cNvSpPr txBox="1"/>
+          <p:nvPr/>
+        </p:nvSpPr>
+        <p:spPr>
+          <a:xfrm>
+            <a:off x="8641080" y="4553712"/>
+            <a:ext cx="822960" cy="457200"/>
+          </a:xfrm>
+          <a:prstGeom prst="rect">
+            <a:avLst/>
+          </a:prstGeom>
+          <a:noFill/>
+          <a:ln/>
+        </p:spPr>
+        <p:txBody>
+          <a:bodyPr wrap="square" lIns="0" tIns="0" rIns="0" bIns="0" rtlCol="0" anchor="ctr"/>
+          <a:lstStyle/>
+          <a:p>
+            <a:pPr algn="ctr" indent="0" marL="0">
+              <a:buNone/>
+            </a:pPr>
+            <a:r>
+              <a:rPr lang="en-US" sz="1700" b="1" dirty="0">
+                <a:solidFill>
+                  <a:srgbClr val="7F7F7F"/>
+                </a:solidFill>
+              </a:rPr>
+              <a:t>98%</a:t>
+            </a:r>
+            <a:endParaRPr lang="en-US" sz="1700" dirty="0"/>
+          </a:p>
+        </p:txBody>
+      </p:sp>
+      <p:sp>
+        <p:nvSpPr>
+          <p:cNvPr id="51" name="tokens always think"/>
           <p:cNvSpPr/>
           <p:nvPr/>
         </p:nvSpPr>
         <p:spPr>
           <a:xfrm>
-            <a:off x="6172200" y="2057400"/>
-            <a:ext cx="5440680" cy="3474720"/>
-          </a:xfrm>
-          <a:prstGeom prst="roundRect">
-            <a:avLst>
-              <a:gd name="adj" fmla="val 2105"/>
-            </a:avLst>
-          </a:prstGeom>
-          <a:solidFill>
-            <a:srgbClr val="F2F2F2"/>
-          </a:solidFill>
-          <a:ln w="9525">
-            <a:solidFill>
-              <a:srgbClr val="D9D9D9"/>
-            </a:solidFill>
-            <a:prstDash val="solid"/>
-          </a:ln>
-        </p:spPr>
-      </p:sp>
-      <p:sp>
-        <p:nvSpPr>
-          <p:cNvPr id="56" name="Text 49"/>
-          <p:cNvSpPr txBox="1"/>
-          <p:nvPr/>
-        </p:nvSpPr>
-        <p:spPr>
-          <a:xfrm>
-            <a:off x="6400800" y="2103120"/>
-            <a:ext cx="4983480" cy="365760"/>
-          </a:xfrm>
-          <a:prstGeom prst="rect">
-            <a:avLst/>
-          </a:prstGeom>
-          <a:noFill/>
-          <a:ln/>
-        </p:spPr>
-        <p:txBody>
-          <a:bodyPr wrap="square" lIns="0" tIns="0" rIns="0" bIns="0" rtlCol="0" anchor="ctr"/>
-          <a:lstStyle/>
-          <a:p>
-            <a:pPr indent="0" marL="0">
-              <a:buNone/>
-            </a:pPr>
-            <a:r>
-              <a:rPr lang="en-US" sz="1700" b="1" dirty="0">
-                <a:solidFill>
-                  <a:srgbClr val="4472C4"/>
-                </a:solidFill>
-              </a:rPr>
-              <a:t>Check B: write it twice, compare the answers</a:t>
-            </a:r>
-            <a:endParaRPr lang="en-US" sz="1700" dirty="0"/>
-          </a:p>
-        </p:txBody>
-      </p:sp>
-      <p:sp>
-        <p:nvSpPr>
-          <p:cNvPr id="57" name="box version A: the task "/>
-          <p:cNvSpPr/>
-          <p:nvPr/>
-        </p:nvSpPr>
-        <p:spPr>
-          <a:xfrm>
-            <a:off x="6400800" y="2514600"/>
-            <a:ext cx="2011680" cy="457200"/>
-          </a:xfrm>
-          <a:prstGeom prst="roundRect">
-            <a:avLst>
-              <a:gd name="adj" fmla="val 12000"/>
-            </a:avLst>
-          </a:prstGeom>
-          <a:solidFill>
-            <a:srgbClr val="FFFFFF"/>
-          </a:solidFill>
-          <a:ln w="9525">
-            <a:solidFill>
-              <a:srgbClr val="BFBFBF"/>
-            </a:solidFill>
-            <a:prstDash val="solid"/>
-          </a:ln>
-        </p:spPr>
-      </p:sp>
-      <p:sp>
-        <p:nvSpPr>
-          <p:cNvPr id="58" name="Text 51"/>
-          <p:cNvSpPr txBox="1"/>
-          <p:nvPr/>
-        </p:nvSpPr>
-        <p:spPr>
-          <a:xfrm>
-            <a:off x="6473952" y="2514600"/>
-            <a:ext cx="1865376" cy="457200"/>
-          </a:xfrm>
-          <a:prstGeom prst="rect">
-            <a:avLst/>
-          </a:prstGeom>
-          <a:noFill/>
-          <a:ln/>
-        </p:spPr>
-        <p:txBody>
-          <a:bodyPr wrap="square" lIns="0" tIns="0" rIns="0" bIns="0" rtlCol="0" anchor="ctr"/>
-          <a:lstStyle/>
-          <a:p>
-            <a:pPr algn="ctr" indent="0" marL="0">
-              <a:buNone/>
-            </a:pPr>
-            <a:r>
-              <a:rPr lang="en-US" sz="1400" dirty="0">
-                <a:solidFill>
-                  <a:schemeClr val="tx1"/>
-                </a:solidFill>
-              </a:rPr>
-              <a:t>version A: the task only</a:t>
-            </a:r>
-            <a:endParaRPr lang="en-US" sz="1400" dirty="0"/>
-          </a:p>
-        </p:txBody>
-      </p:sp>
-      <p:sp>
-        <p:nvSpPr>
-          <p:cNvPr id="59" name="Shape 52"/>
-          <p:cNvSpPr/>
-          <p:nvPr/>
-        </p:nvSpPr>
-        <p:spPr>
-          <a:xfrm>
-            <a:off x="8412480" y="2743200"/>
-            <a:ext cx="137160" cy="0"/>
-          </a:xfrm>
-          <a:prstGeom prst="line">
-            <a:avLst/>
-          </a:prstGeom>
-          <a:noFill/>
-          <a:ln w="25400">
-            <a:solidFill>
-              <a:srgbClr val="7F7F7F"/>
-            </a:solidFill>
-            <a:prstDash val="solid"/>
-            <a:tailEnd type="triangle"/>
-          </a:ln>
-        </p:spPr>
-      </p:sp>
-      <p:sp>
-        <p:nvSpPr>
-          <p:cNvPr id="60" name="box prints 6"/>
-          <p:cNvSpPr/>
-          <p:nvPr/>
-        </p:nvSpPr>
-        <p:spPr>
-          <a:xfrm>
-            <a:off x="8549640" y="2514600"/>
-            <a:ext cx="1280160" cy="457200"/>
-          </a:xfrm>
-          <a:prstGeom prst="roundRect">
-            <a:avLst>
-              <a:gd name="adj" fmla="val 12000"/>
-            </a:avLst>
-          </a:prstGeom>
-          <a:solidFill>
-            <a:srgbClr val="FFFFFF"/>
-          </a:solidFill>
-          <a:ln w="9525">
-            <a:solidFill>
-              <a:srgbClr val="BFBFBF"/>
-            </a:solidFill>
-            <a:prstDash val="solid"/>
-          </a:ln>
-        </p:spPr>
-      </p:sp>
-      <p:sp>
-        <p:nvSpPr>
-          <p:cNvPr id="61" name="Text 54"/>
-          <p:cNvSpPr txBox="1"/>
-          <p:nvPr/>
-        </p:nvSpPr>
-        <p:spPr>
-          <a:xfrm>
-            <a:off x="8622792" y="2514600"/>
-            <a:ext cx="1133856" cy="457200"/>
-          </a:xfrm>
-          <a:prstGeom prst="rect">
-            <a:avLst/>
-          </a:prstGeom>
-          <a:noFill/>
-          <a:ln/>
-        </p:spPr>
-        <p:txBody>
-          <a:bodyPr wrap="square" lIns="0" tIns="0" rIns="0" bIns="0" rtlCol="0" anchor="ctr"/>
-          <a:lstStyle/>
-          <a:p>
-            <a:pPr algn="ctr" indent="0" marL="0">
-              <a:buNone/>
-            </a:pPr>
-            <a:r>
-              <a:rPr lang="en-US" sz="1400" dirty="0">
-                <a:solidFill>
-                  <a:schemeClr val="tx1"/>
-                </a:solidFill>
-              </a:rPr>
-              <a:t>prints 6</a:t>
-            </a:r>
-            <a:endParaRPr lang="en-US" sz="1400" dirty="0"/>
-          </a:p>
-        </p:txBody>
-      </p:sp>
-      <p:sp>
-        <p:nvSpPr>
-          <p:cNvPr id="62" name="box version B: task + he"/>
-          <p:cNvSpPr/>
-          <p:nvPr/>
-        </p:nvSpPr>
-        <p:spPr>
-          <a:xfrm>
-            <a:off x="6400800" y="3035808"/>
-            <a:ext cx="2011680" cy="457200"/>
-          </a:xfrm>
-          <a:prstGeom prst="roundRect">
-            <a:avLst>
-              <a:gd name="adj" fmla="val 12000"/>
-            </a:avLst>
-          </a:prstGeom>
-          <a:solidFill>
-            <a:srgbClr val="FFFFFF"/>
-          </a:solidFill>
-          <a:ln w="9525">
-            <a:solidFill>
-              <a:srgbClr val="BFBFBF"/>
-            </a:solidFill>
-            <a:prstDash val="solid"/>
-          </a:ln>
-        </p:spPr>
-      </p:sp>
-      <p:sp>
-        <p:nvSpPr>
-          <p:cNvPr id="63" name="Text 56"/>
-          <p:cNvSpPr txBox="1"/>
-          <p:nvPr/>
-        </p:nvSpPr>
-        <p:spPr>
-          <a:xfrm>
-            <a:off x="6473952" y="3035808"/>
-            <a:ext cx="1865376" cy="457200"/>
-          </a:xfrm>
-          <a:prstGeom prst="rect">
-            <a:avLst/>
-          </a:prstGeom>
-          <a:noFill/>
-          <a:ln/>
-        </p:spPr>
-        <p:txBody>
-          <a:bodyPr wrap="square" lIns="0" tIns="0" rIns="0" bIns="0" rtlCol="0" anchor="ctr"/>
-          <a:lstStyle/>
-          <a:p>
-            <a:pPr algn="ctr" indent="0" marL="0">
-              <a:buNone/>
-            </a:pPr>
-            <a:r>
-              <a:rPr lang="en-US" sz="1400" dirty="0">
-                <a:solidFill>
-                  <a:schemeClr val="tx1"/>
-                </a:solidFill>
-              </a:rPr>
-              <a:t>version B: task + helper code</a:t>
-            </a:r>
-            <a:endParaRPr lang="en-US" sz="1400" dirty="0"/>
-          </a:p>
-        </p:txBody>
-      </p:sp>
-      <p:sp>
-        <p:nvSpPr>
-          <p:cNvPr id="64" name="Shape 57"/>
-          <p:cNvSpPr/>
-          <p:nvPr/>
-        </p:nvSpPr>
-        <p:spPr>
-          <a:xfrm>
-            <a:off x="8412480" y="3264408"/>
-            <a:ext cx="137160" cy="0"/>
-          </a:xfrm>
-          <a:prstGeom prst="line">
-            <a:avLst/>
-          </a:prstGeom>
-          <a:noFill/>
-          <a:ln w="25400">
-            <a:solidFill>
-              <a:srgbClr val="7F7F7F"/>
-            </a:solidFill>
-            <a:prstDash val="solid"/>
-            <a:tailEnd type="triangle"/>
-          </a:ln>
-        </p:spPr>
-      </p:sp>
-      <p:sp>
-        <p:nvSpPr>
-          <p:cNvPr id="65" name="box prints 0"/>
-          <p:cNvSpPr/>
-          <p:nvPr/>
-        </p:nvSpPr>
-        <p:spPr>
-          <a:xfrm>
-            <a:off x="8549640" y="3035808"/>
-            <a:ext cx="1280160" cy="457200"/>
-          </a:xfrm>
-          <a:prstGeom prst="roundRect">
-            <a:avLst>
-              <a:gd name="adj" fmla="val 12000"/>
-            </a:avLst>
-          </a:prstGeom>
-          <a:solidFill>
-            <a:srgbClr val="FFFFFF"/>
-          </a:solidFill>
-          <a:ln w="9525">
-            <a:solidFill>
-              <a:srgbClr val="BFBFBF"/>
-            </a:solidFill>
-            <a:prstDash val="solid"/>
-          </a:ln>
-        </p:spPr>
-      </p:sp>
-      <p:sp>
-        <p:nvSpPr>
-          <p:cNvPr id="66" name="Text 59"/>
-          <p:cNvSpPr txBox="1"/>
-          <p:nvPr/>
-        </p:nvSpPr>
-        <p:spPr>
-          <a:xfrm>
-            <a:off x="8622792" y="3035808"/>
-            <a:ext cx="1133856" cy="457200"/>
-          </a:xfrm>
-          <a:prstGeom prst="rect">
-            <a:avLst/>
-          </a:prstGeom>
-          <a:noFill/>
-          <a:ln/>
-        </p:spPr>
-        <p:txBody>
-          <a:bodyPr wrap="square" lIns="0" tIns="0" rIns="0" bIns="0" rtlCol="0" anchor="ctr"/>
-          <a:lstStyle/>
-          <a:p>
-            <a:pPr algn="ctr" indent="0" marL="0">
-              <a:buNone/>
-            </a:pPr>
-            <a:r>
-              <a:rPr lang="en-US" sz="1400" dirty="0">
-                <a:solidFill>
-                  <a:schemeClr val="tx1"/>
-                </a:solidFill>
-              </a:rPr>
-              <a:t>prints 0</a:t>
-            </a:r>
-            <a:endParaRPr lang="en-US" sz="1400" dirty="0"/>
-          </a:p>
-        </p:txBody>
-      </p:sp>
-      <p:sp>
-        <p:nvSpPr>
-          <p:cNvPr id="67" name="Shape 60"/>
-          <p:cNvSpPr/>
-          <p:nvPr/>
-        </p:nvSpPr>
-        <p:spPr>
-          <a:xfrm>
-            <a:off x="9829800" y="2743200"/>
-            <a:ext cx="182880" cy="228600"/>
-          </a:xfrm>
-          <a:prstGeom prst="line">
-            <a:avLst/>
-          </a:prstGeom>
-          <a:noFill/>
-          <a:ln w="25400">
-            <a:solidFill>
-              <a:srgbClr val="7F7F7F"/>
-            </a:solidFill>
-            <a:prstDash val="solid"/>
-            <a:tailEnd type="triangle"/>
-          </a:ln>
-        </p:spPr>
-      </p:sp>
-      <p:sp>
-        <p:nvSpPr>
-          <p:cNvPr id="68" name="Shape 61"/>
-          <p:cNvSpPr/>
-          <p:nvPr/>
-        </p:nvSpPr>
-        <p:spPr>
-          <a:xfrm flipV="1">
-            <a:off x="9829800" y="3063240"/>
-            <a:ext cx="182880" cy="201168"/>
-          </a:xfrm>
-          <a:prstGeom prst="line">
-            <a:avLst/>
-          </a:prstGeom>
-          <a:noFill/>
-          <a:ln w="25400">
-            <a:solidFill>
-              <a:srgbClr val="7F7F7F"/>
-            </a:solidFill>
-            <a:prstDash val="solid"/>
-            <a:tailEnd type="triangle"/>
-          </a:ln>
-        </p:spPr>
-      </p:sp>
-      <p:sp>
-        <p:nvSpPr>
-          <p:cNvPr id="69" name="box 6 ≠ 0: ✗ think again"/>
-          <p:cNvSpPr/>
-          <p:nvPr/>
-        </p:nvSpPr>
-        <p:spPr>
-          <a:xfrm>
-            <a:off x="10012680" y="2514600"/>
-            <a:ext cx="1371600" cy="978408"/>
-          </a:xfrm>
-          <a:prstGeom prst="roundRect">
-            <a:avLst>
-              <a:gd name="adj" fmla="val 5607"/>
-            </a:avLst>
-          </a:prstGeom>
-          <a:solidFill>
-            <a:srgbClr val="FADBD8"/>
-          </a:solidFill>
-          <a:ln w="9525">
-            <a:solidFill>
-              <a:srgbClr val="BFBFBF"/>
-            </a:solidFill>
-            <a:prstDash val="solid"/>
-          </a:ln>
-        </p:spPr>
-      </p:sp>
-      <p:sp>
-        <p:nvSpPr>
-          <p:cNvPr id="70" name="Text 63"/>
-          <p:cNvSpPr txBox="1"/>
-          <p:nvPr/>
-        </p:nvSpPr>
-        <p:spPr>
-          <a:xfrm>
-            <a:off x="10085832" y="2514600"/>
-            <a:ext cx="1225296" cy="978408"/>
-          </a:xfrm>
-          <a:prstGeom prst="rect">
-            <a:avLst/>
-          </a:prstGeom>
-          <a:noFill/>
-          <a:ln/>
-        </p:spPr>
-        <p:txBody>
-          <a:bodyPr wrap="square" lIns="0" tIns="0" rIns="0" bIns="0" rtlCol="0" anchor="ctr"/>
-          <a:lstStyle/>
-          <a:p>
-            <a:pPr algn="ctr" indent="0" marL="0">
-              <a:buNone/>
-            </a:pPr>
-            <a:r>
-              <a:rPr lang="en-US" sz="1400" dirty="0">
-                <a:solidFill>
-                  <a:srgbClr val="C00000"/>
-                </a:solidFill>
-              </a:rPr>
-              <a:t>6 ≠ 0: ✗ think again (same: submit)</a:t>
-            </a:r>
-            <a:endParaRPr lang="en-US" sz="1400" dirty="0"/>
-          </a:p>
-        </p:txBody>
-      </p:sp>
-      <p:sp>
-        <p:nvSpPr>
-          <p:cNvPr id="71" name="Text 64"/>
-          <p:cNvSpPr txBox="1"/>
-          <p:nvPr/>
-        </p:nvSpPr>
-        <p:spPr>
-          <a:xfrm>
-            <a:off x="6400800" y="3547872"/>
-            <a:ext cx="4983480" cy="274320"/>
-          </a:xfrm>
-          <a:prstGeom prst="rect">
-            <a:avLst/>
-          </a:prstGeom>
-          <a:noFill/>
-          <a:ln/>
-        </p:spPr>
-        <p:txBody>
-          <a:bodyPr wrap="square" lIns="0" tIns="0" rIns="0" bIns="0" rtlCol="0" anchor="ctr"/>
-          <a:lstStyle/>
-          <a:p>
-            <a:pPr indent="0" marL="0">
-              <a:buNone/>
-            </a:pPr>
-            <a:r>
-              <a:rPr lang="en-US" sz="1400" b="1" dirty="0">
-                <a:solidFill>
-                  <a:schemeClr val="tx1"/>
-                </a:solidFill>
-              </a:rPr>
-              <a:t>108 geometry problems (Qwen3-32B, 3 runs)</a:t>
-            </a:r>
-            <a:endParaRPr lang="en-US" sz="1400" dirty="0"/>
-          </a:p>
-        </p:txBody>
-      </p:sp>
-      <p:sp>
-        <p:nvSpPr>
-          <p:cNvPr id="72" name="Text 65"/>
-          <p:cNvSpPr txBox="1"/>
-          <p:nvPr/>
-        </p:nvSpPr>
-        <p:spPr>
-          <a:xfrm>
-            <a:off x="8549640" y="3794760"/>
-            <a:ext cx="822960" cy="320040"/>
-          </a:xfrm>
-          <a:prstGeom prst="rect">
-            <a:avLst/>
-          </a:prstGeom>
-          <a:noFill/>
-          <a:ln/>
-        </p:spPr>
-        <p:txBody>
-          <a:bodyPr wrap="square" lIns="0" tIns="0" rIns="0" bIns="0" rtlCol="0" anchor="ctr"/>
-          <a:lstStyle/>
-          <a:p>
-            <a:pPr algn="ctr" indent="0" marL="0">
-              <a:buNone/>
-            </a:pPr>
-            <a:r>
-              <a:rPr lang="en-US" sz="1400" dirty="0">
-                <a:solidFill>
-                  <a:srgbClr val="7F7F7F"/>
-                </a:solidFill>
-              </a:rPr>
-              <a:t>solved</a:t>
-            </a:r>
-            <a:endParaRPr lang="en-US" sz="1400" dirty="0"/>
-          </a:p>
-        </p:txBody>
-      </p:sp>
-      <p:sp>
-        <p:nvSpPr>
-          <p:cNvPr id="73" name="Text 66"/>
-          <p:cNvSpPr txBox="1"/>
-          <p:nvPr/>
-        </p:nvSpPr>
-        <p:spPr>
-          <a:xfrm>
-            <a:off x="9464040" y="3794760"/>
-            <a:ext cx="1920240" cy="320040"/>
-          </a:xfrm>
-          <a:prstGeom prst="rect">
-            <a:avLst/>
-          </a:prstGeom>
-          <a:noFill/>
-          <a:ln/>
-        </p:spPr>
-        <p:txBody>
-          <a:bodyPr wrap="square" lIns="0" tIns="0" rIns="0" bIns="0" rtlCol="0" anchor="ctr"/>
-          <a:lstStyle/>
-          <a:p>
-            <a:pPr indent="0" marL="0">
-              <a:buNone/>
-            </a:pPr>
-            <a:r>
-              <a:rPr lang="en-US" sz="1400" dirty="0">
-                <a:solidFill>
-                  <a:srgbClr val="7F7F7F"/>
-                </a:solidFill>
-              </a:rPr>
-              <a:t>tokens per problem</a:t>
-            </a:r>
-            <a:endParaRPr lang="en-US" sz="1400" dirty="0"/>
-          </a:p>
-        </p:txBody>
-      </p:sp>
-      <p:sp>
-        <p:nvSpPr>
-          <p:cNvPr id="74" name="Text 67"/>
-          <p:cNvSpPr txBox="1"/>
-          <p:nvPr/>
-        </p:nvSpPr>
-        <p:spPr>
-          <a:xfrm>
-            <a:off x="6400800" y="4160520"/>
-            <a:ext cx="2057400" cy="457200"/>
-          </a:xfrm>
-          <a:prstGeom prst="rect">
-            <a:avLst/>
-          </a:prstGeom>
-          <a:noFill/>
-          <a:ln/>
-        </p:spPr>
-        <p:txBody>
-          <a:bodyPr wrap="square" lIns="0" tIns="0" rIns="0" bIns="0" rtlCol="0" anchor="ctr"/>
-          <a:lstStyle/>
-          <a:p>
-            <a:pPr algn="r" indent="0" marL="0">
-              <a:buNone/>
-            </a:pPr>
-            <a:r>
-              <a:rPr lang="en-US" sz="1500" dirty="0">
-                <a:solidFill>
-                  <a:schemeClr val="tx1"/>
-                </a:solidFill>
-              </a:rPr>
-              <a:t>always think</a:t>
-            </a:r>
-            <a:endParaRPr lang="en-US" sz="1500" dirty="0"/>
-          </a:p>
-        </p:txBody>
-      </p:sp>
-      <p:sp>
-        <p:nvSpPr>
-          <p:cNvPr id="75" name="Text 68"/>
-          <p:cNvSpPr txBox="1"/>
-          <p:nvPr/>
-        </p:nvSpPr>
-        <p:spPr>
-          <a:xfrm>
-            <a:off x="8549640" y="4160520"/>
-            <a:ext cx="822960" cy="457200"/>
-          </a:xfrm>
-          <a:prstGeom prst="rect">
-            <a:avLst/>
-          </a:prstGeom>
-          <a:noFill/>
-          <a:ln/>
-        </p:spPr>
-        <p:txBody>
-          <a:bodyPr wrap="square" lIns="0" tIns="0" rIns="0" bIns="0" rtlCol="0" anchor="ctr"/>
-          <a:lstStyle/>
-          <a:p>
-            <a:pPr algn="ctr" indent="0" marL="0">
-              <a:buNone/>
-            </a:pPr>
-            <a:r>
-              <a:rPr lang="en-US" sz="1700" b="1" dirty="0">
-                <a:solidFill>
-                  <a:srgbClr val="7F7F7F"/>
-                </a:solidFill>
-              </a:rPr>
-              <a:t>98%</a:t>
-            </a:r>
-            <a:endParaRPr lang="en-US" sz="1700" dirty="0"/>
-          </a:p>
-        </p:txBody>
-      </p:sp>
-      <p:sp>
-        <p:nvSpPr>
-          <p:cNvPr id="76" name="tokens always think"/>
-          <p:cNvSpPr/>
-          <p:nvPr/>
-        </p:nvSpPr>
-        <p:spPr>
-          <a:xfrm>
-            <a:off x="9464040" y="4261104"/>
-            <a:ext cx="1188720" cy="256032"/>
+            <a:off x="9555480" y="4654296"/>
+            <a:ext cx="1097280" cy="256032"/>
           </a:xfrm>
           <a:prstGeom prst="rect">
             <a:avLst/>
@@ -39642,13 +38909,13 @@
       </p:sp>
       <p:sp>
         <p:nvSpPr>
-          <p:cNvPr id="77" name="Text 70"/>
+          <p:cNvPr id="52" name="Text 45"/>
           <p:cNvSpPr txBox="1"/>
           <p:nvPr/>
         </p:nvSpPr>
         <p:spPr>
           <a:xfrm>
-            <a:off x="10744200" y="4160520"/>
+            <a:off x="10744200" y="4553712"/>
             <a:ext cx="731520" cy="457200"/>
           </a:xfrm>
           <a:prstGeom prst="rect">
@@ -39678,14 +38945,14 @@
       </p:sp>
       <p:sp>
         <p:nvSpPr>
-          <p:cNvPr id="78" name="Text 71"/>
+          <p:cNvPr id="53" name="Text 46"/>
           <p:cNvSpPr txBox="1"/>
           <p:nvPr/>
         </p:nvSpPr>
         <p:spPr>
           <a:xfrm>
-            <a:off x="6400800" y="4572000"/>
-            <a:ext cx="2057400" cy="457200"/>
+            <a:off x="6400800" y="4992624"/>
+            <a:ext cx="2148840" cy="457200"/>
           </a:xfrm>
           <a:prstGeom prst="rect">
             <a:avLst/>
@@ -39706,7 +38973,7 @@
                   <a:schemeClr val="tx1"/>
                 </a:solidFill>
               </a:rPr>
-              <a:t>think if they differ</a:t>
+              <a:t>think only on failure</a:t>
             </a:r>
             <a:endParaRPr lang="en-US" sz="1500" dirty="0"/>
           </a:p>
@@ -39714,13 +38981,13 @@
       </p:sp>
       <p:sp>
         <p:nvSpPr>
-          <p:cNvPr id="79" name="Text 72"/>
+          <p:cNvPr id="54" name="Text 47"/>
           <p:cNvSpPr txBox="1"/>
           <p:nvPr/>
         </p:nvSpPr>
         <p:spPr>
           <a:xfrm>
-            <a:off x="8549640" y="4572000"/>
+            <a:off x="8641080" y="4992624"/>
             <a:ext cx="822960" cy="457200"/>
           </a:xfrm>
           <a:prstGeom prst="rect">
@@ -39750,14 +39017,14 @@
       </p:sp>
       <p:sp>
         <p:nvSpPr>
-          <p:cNvPr id="80" name="tokens think if they differ"/>
+          <p:cNvPr id="55" name="tokens think only on failure"/>
           <p:cNvSpPr/>
           <p:nvPr/>
         </p:nvSpPr>
         <p:spPr>
           <a:xfrm>
-            <a:off x="9464040" y="4672584"/>
-            <a:ext cx="866355" cy="256032"/>
+            <a:off x="9555480" y="5093208"/>
+            <a:ext cx="799713" cy="256032"/>
           </a:xfrm>
           <a:prstGeom prst="rect">
             <a:avLst/>
@@ -39775,13 +39042,13 @@
       </p:sp>
       <p:sp>
         <p:nvSpPr>
-          <p:cNvPr id="81" name="Text 74"/>
+          <p:cNvPr id="56" name="Text 49"/>
           <p:cNvSpPr txBox="1"/>
           <p:nvPr/>
         </p:nvSpPr>
         <p:spPr>
           <a:xfrm>
-            <a:off x="10421835" y="4572000"/>
+            <a:off x="10446633" y="4992624"/>
             <a:ext cx="731520" cy="457200"/>
           </a:xfrm>
           <a:prstGeom prst="rect">
@@ -39811,7 +39078,7 @@
       </p:sp>
       <p:sp>
         <p:nvSpPr>
-          <p:cNvPr id="82" name="Text 75"/>
+          <p:cNvPr id="57" name="Text 50"/>
           <p:cNvSpPr txBox="1"/>
           <p:nvPr/>
         </p:nvSpPr>

--- a/Proposal_Team5.pptx
+++ b/Proposal_Team5.pptx
@@ -137,7 +137,7 @@
   <p:extLst>
     <p:ext uri="{521415D9-36F7-43E2-AB2F-B90AF26B5E84}">
       <p14:sectionLst xmlns:p14="http://schemas.microsoft.com/office/powerpoint/2010/main">
-        <p14:section name="Talk" id="{a0711f0a-7943-cd93-d31e-a7d768ccb46c}">
+        <p14:section name="Talk" id="{39df98b2-722f-82c8-4509-817ac9fd6531}">
           <p14:sldIdLst>
             <p14:sldId id="256"/>
             <p14:sldId id="257"/>
@@ -150,7 +150,7 @@
             <p14:sldId id="264"/>
           </p14:sldIdLst>
         </p14:section>
-        <p14:section name="Extra pages" id="{98fe6148-b321-1118-c2b9-0892824582f5}">
+        <p14:section name="Extra pages" id="{608abdc5-b7fc-0d52-baaf-201135546195}">
           <p14:sldIdLst>
             <p14:sldId id="265"/>
             <p14:sldId id="266"/>
@@ -3688,7 +3688,7 @@
           <a:p>
             <a:r>
               <a:rPr lang="en-US" dirty="0"/>
-              <a:t>(35초) 첫 번째 발견입니다. 매뉴얼이 아니라 짧은 힌트를 주세요. Qwen3-32B가 OR-Tools로 배송 경로 프로그램을 짭니다. 긴 참조 문서를 주면 존재하지 않는 함수를 불러서 죽고, 정확한 사용법 열한 줄을 주면 최적 경로를 찾습니다. 경로 문제 30개에서 최적해를 찾는 비율은 아무것도 안 주면 23%, 오래 생각하면 오히려 3%, 긴 참조 문서는 7%, 정확한 사용법은 77에서 90%입니다. 최적화 문장제와 기하에서도 같았습니다. 모르는 것은 생각한다고 생기지 않습니다.</a:t>
+              <a:t>(70초) 첫 번째 발견입니다. 매뉴얼이 아니라 짧은 힌트를 주세요. 힌트는 이렇게 줍니다. 과제는 무게 제한이 있는 트럭들의 배송 경로를 짜는 것이고, 프롬프트에 OR-Tools를 정확히 쓰는 법 열한 줄을 같이 붙입니다. 그러면 Qwen3-32B가 맞는 함수를 불러 최적 경로를 찾습니다. 대신 긴 참조 문서를 주면, 문서에 경로는 있지만 트럭 무게 규칙이 없어서 없는 함수를 지어내고 프로그램이 죽습니다. 오른쪽은 30문제에서 최적 경로를 찾은 비율입니다. 아무것도 안 주면 23%, 오래 생각하면 오히려 3%, 긴 문서는 7%, 짧은 힌트는 77에서 90%입니다. 모르는 함수 이름은 오래 생각한다고 생기지 않습니다. 힌트는 문제 종류마다 한 번만 만들면 됩니다. 라이브러리를 아는 사람이 쓰거나, 사용법 코드 조각 모음에서 검색하거나, 모델이 다른 문제에서 짜서 검사를 통과한 자기 프로그램을 그대로 씁니다. 세 번째 방법은 사람이 필요 없고, 사람이 쓴 힌트와 같은 정확도였습니다.</a:t>
             </a:r>
             <a:endParaRPr lang="en-US" dirty="0"/>
           </a:p>
@@ -3864,7 +3864,7 @@
           <a:p>
             <a:r>
               <a:rPr lang="en-US" dirty="0"/>
-              <a:t>(60초, [생략 가능] 포함 80초) 두 발견을 합친 것이 저희 방법입니다. 실제 최적화 문제로 보면, 1단계에서 모델이 없는 메서드를 불러 죽습니다. 2단계 힌트는 모델이 다른 문제에서 짜서 검사를 통과한 자기 프로그램에서 자동으로 가져옵니다. 3단계, 두 버전의 답이 20000으로 같으니 4단계 생각은 건너뛰어, 생각만 했을 때의 5.3k 대신 0.6k 토큰을 씁니다. 5단계, 같은 종류의 새 데이터에는 이 프로그램을 재사용합니다. [생략 가능] 아이콘은 각 단계를 쓰는 문제 종류이고, 경시 문제는 라이브러리가 없어 힌트 없이 검사와 생각만 씁니다. 전체 비교는 이렇게 했습니다. 기존 방식은 각 문제에 세 번 빠르게 답하게 해서 답이 갈리는 문제를 어렵다고 보고 거기에 생각을 씁니다. 저희는 모든 문제에 사람이 쓴 힌트를 먼저 주고 검사에 실패한 문제만 생각하게 합니다. 기하와 최적화 208문제를 세 모델로 풀면 정답률이 74% 대 87%, 토큰은 4.1k 대 2.5k입니다. [생략 가능] 오른쪽 79%는 개발에 쓰지 않은 MAMO 문제 863개에서 gpt-oss-20b에 자동 힌트를 준 결과로, 사람이 쓴 힌트와 같고, 힌트가 없으면 73%입니다.</a:t>
+              <a:t>(60초) 두 발견을 합친 것이 저희 방법입니다. 위의 네 단계입니다. 힌트를 붙여 프로그램을 쓰고, 공짜 검사를 돌려서, 통과하면 내고 실패하면 생각합니다. 같은 종류의 문제가 데이터만 바꿔 다시 오면 그 프로그램을 재사용합니다. 아이콘은 각 단계를 쓰는 문제 종류입니다. 왼쪽은 실제 문제 하나입니다. Qwen3-8B가 힌트 없이 짜면 없는 함수를 불러 죽습니다. 힌트로 다른 문제에서 검사를 통과한 자기 프로그램을 주면, 두 버전이 모두 20000을 내서 바로 냅니다. 생각만 했다면 5.3k 토큰, 이렇게 하면 0.6k입니다. 오른쪽은 전체 결과입니다. 세 번 답해서 답이 갈리는 문제에 생각을 몰아주는 기존 방식은 74%이고, 저희 방법은 검색으로 찾은 힌트로 84%, 사람이 쓴 힌트로 87%이며 토큰도 더 적습니다. 처음 써 본 MAMO에서는 자동 힌트가 사람이 쓴 힌트와 같은 79%였습니다.</a:t>
             </a:r>
             <a:endParaRPr lang="en-US" dirty="0"/>
           </a:p>
@@ -36398,62 +36398,26 @@
       </p:pic>
       <p:sp>
         <p:nvSpPr>
-          <p:cNvPr id="11" name="Text 4"/>
-          <p:cNvSpPr txBox="1"/>
-          <p:nvPr/>
-        </p:nvSpPr>
-        <p:spPr>
-          <a:xfrm>
-            <a:off x="548640" y="1188720"/>
-            <a:ext cx="11064240" cy="411480"/>
-          </a:xfrm>
-          <a:prstGeom prst="rect">
-            <a:avLst/>
-          </a:prstGeom>
-          <a:noFill/>
-          <a:ln/>
-        </p:spPr>
-        <p:txBody>
-          <a:bodyPr wrap="square" lIns="0" tIns="0" rIns="0" bIns="0" rtlCol="0" anchor="ctr"/>
-          <a:lstStyle/>
-          <a:p>
-            <a:pPr indent="0" marL="0">
-              <a:buNone/>
-            </a:pPr>
-            <a:r>
-              <a:rPr lang="en-US" sz="1700" dirty="0">
-                <a:solidFill>
-                  <a:schemeClr val="tx1"/>
-                </a:solidFill>
-              </a:rPr>
-              <a:t>Qwen3-32B plans delivery routes with Google's OR-Tools library</a:t>
-            </a:r>
-            <a:endParaRPr lang="en-US" sz="1700" dirty="0"/>
-          </a:p>
-        </p:txBody>
-      </p:sp>
-      <p:sp>
-        <p:nvSpPr>
-          <p:cNvPr id="12" name="box a long reference she"/>
+          <p:cNvPr id="11" name="how the hint is given"/>
           <p:cNvSpPr/>
           <p:nvPr/>
         </p:nvSpPr>
         <p:spPr>
           <a:xfrm>
-            <a:off x="548640" y="1783080"/>
-            <a:ext cx="2468880" cy="548640"/>
+            <a:off x="548640" y="1371600"/>
+            <a:ext cx="5349240" cy="4160520"/>
           </a:xfrm>
           <a:prstGeom prst="roundRect">
             <a:avLst>
-              <a:gd name="adj" fmla="val 10000"/>
+              <a:gd name="adj" fmla="val 1758"/>
             </a:avLst>
           </a:prstGeom>
           <a:solidFill>
-            <a:srgbClr val="FCE4D6"/>
+            <a:srgbClr val="F2F2F2"/>
           </a:solidFill>
           <a:ln w="9525">
             <a:solidFill>
-              <a:srgbClr val="BFBFBF"/>
+              <a:srgbClr val="D9D9D9"/>
             </a:solidFill>
             <a:prstDash val="solid"/>
           </a:ln>
@@ -36461,14 +36425,14 @@
       </p:sp>
       <p:sp>
         <p:nvSpPr>
-          <p:cNvPr id="13" name="Text 6"/>
+          <p:cNvPr id="12" name="Text 5"/>
           <p:cNvSpPr txBox="1"/>
           <p:nvPr/>
         </p:nvSpPr>
         <p:spPr>
           <a:xfrm>
-            <a:off x="621792" y="1783080"/>
-            <a:ext cx="2322576" cy="548640"/>
+            <a:off x="777240" y="1444752"/>
+            <a:ext cx="4937760" cy="384048"/>
           </a:xfrm>
           <a:prstGeom prst="rect">
             <a:avLst/>
@@ -36480,58 +36444,36 @@
           <a:bodyPr wrap="square" lIns="0" tIns="0" rIns="0" bIns="0" rtlCol="0" anchor="ctr"/>
           <a:lstStyle/>
           <a:p>
-            <a:pPr algn="ctr" indent="0" marL="0">
-              <a:buNone/>
-            </a:pPr>
-            <a:r>
-              <a:rPr lang="en-US" sz="1600" b="1" dirty="0">
-                <a:solidFill>
-                  <a:schemeClr val="tx1"/>
-                </a:solidFill>
-              </a:rPr>
-              <a:t>a long reference sheet</a:t>
-            </a:r>
-            <a:endParaRPr lang="en-US" sz="1600" dirty="0"/>
-          </a:p>
-        </p:txBody>
-      </p:sp>
-      <p:sp>
-        <p:nvSpPr>
-          <p:cNvPr id="14" name="Shape 7"/>
+            <a:pPr indent="0" marL="0">
+              <a:buNone/>
+            </a:pPr>
+            <a:r>
+              <a:rPr lang="en-US" sz="1800" b="1" dirty="0">
+                <a:solidFill>
+                  <a:srgbClr val="4472C4"/>
+                </a:solidFill>
+              </a:rPr>
+              <a:t>How the hint is given (Qwen3-32B, OR-Tools)</a:t>
+            </a:r>
+            <a:endParaRPr lang="en-US" sz="1800" dirty="0"/>
+          </a:p>
+        </p:txBody>
+      </p:sp>
+      <p:sp>
+        <p:nvSpPr>
+          <p:cNvPr id="13" name="box Task: plan routes fo"/>
           <p:cNvSpPr/>
           <p:nvPr/>
         </p:nvSpPr>
         <p:spPr>
           <a:xfrm>
-            <a:off x="3017520" y="2057400"/>
-            <a:ext cx="320040" cy="0"/>
-          </a:xfrm>
-          <a:prstGeom prst="line">
-            <a:avLst/>
-          </a:prstGeom>
-          <a:noFill/>
-          <a:ln w="25400">
-            <a:solidFill>
-              <a:srgbClr val="7F7F7F"/>
-            </a:solidFill>
-            <a:prstDash val="solid"/>
-            <a:tailEnd type="triangle"/>
-          </a:ln>
-        </p:spPr>
-      </p:sp>
-      <p:sp>
-        <p:nvSpPr>
-          <p:cNvPr id="15" name="code RegisterUnaryLongLiv"/>
-          <p:cNvSpPr/>
-          <p:nvPr/>
-        </p:nvSpPr>
-        <p:spPr>
-          <a:xfrm>
-            <a:off x="3337560" y="1783080"/>
-            <a:ext cx="4480560" cy="548640"/>
-          </a:xfrm>
-          <a:prstGeom prst="rect">
-            <a:avLst/>
+            <a:off x="777240" y="1874520"/>
+            <a:ext cx="4892040" cy="457200"/>
+          </a:xfrm>
+          <a:prstGeom prst="roundRect">
+            <a:avLst>
+              <a:gd name="adj" fmla="val 12000"/>
+            </a:avLst>
           </a:prstGeom>
           <a:solidFill>
             <a:srgbClr val="FFFFFF"/>
@@ -36546,14 +36488,14 @@
       </p:sp>
       <p:sp>
         <p:nvSpPr>
-          <p:cNvPr id="16" name="Text 9"/>
+          <p:cNvPr id="14" name="Text 7"/>
           <p:cNvSpPr txBox="1"/>
           <p:nvPr/>
         </p:nvSpPr>
         <p:spPr>
           <a:xfrm>
-            <a:off x="3447288" y="1783080"/>
-            <a:ext cx="4261104" cy="548640"/>
+            <a:off x="850392" y="1874520"/>
+            <a:ext cx="4745736" cy="457200"/>
           </a:xfrm>
           <a:prstGeom prst="rect">
             <a:avLst/>
@@ -36565,74 +36507,195 @@
           <a:bodyPr wrap="square" lIns="0" tIns="0" rIns="0" bIns="0" rtlCol="0" anchor="ctr"/>
           <a:lstStyle/>
           <a:p>
+            <a:pPr algn="ctr" indent="0" marL="0">
+              <a:buNone/>
+            </a:pPr>
+            <a:r>
+              <a:rPr lang="en-US" sz="1500" dirty="0">
+                <a:solidFill>
+                  <a:schemeClr val="tx1"/>
+                </a:solidFill>
+              </a:rPr>
+              <a:t>Task: plan routes for trucks with a weight limit</a:t>
+            </a:r>
+            <a:endParaRPr lang="en-US" sz="1500" dirty="0"/>
+          </a:p>
+        </p:txBody>
+      </p:sp>
+      <p:sp>
+        <p:nvSpPr>
+          <p:cNvPr id="15" name="Text 8"/>
+          <p:cNvSpPr txBox="1"/>
+          <p:nvPr/>
+        </p:nvSpPr>
+        <p:spPr>
+          <a:xfrm>
+            <a:off x="3108960" y="2331720"/>
+            <a:ext cx="274320" cy="228600"/>
+          </a:xfrm>
+          <a:prstGeom prst="rect">
+            <a:avLst/>
+          </a:prstGeom>
+          <a:noFill/>
+          <a:ln/>
+        </p:spPr>
+        <p:txBody>
+          <a:bodyPr wrap="square" lIns="0" tIns="0" rIns="0" bIns="0" rtlCol="0" anchor="ctr"/>
+          <a:lstStyle/>
+          <a:p>
+            <a:pPr algn="ctr" indent="0" marL="0">
+              <a:buNone/>
+            </a:pPr>
+            <a:r>
+              <a:rPr lang="en-US" sz="1600" b="1" dirty="0">
+                <a:solidFill>
+                  <a:schemeClr val="tx1"/>
+                </a:solidFill>
+              </a:rPr>
+              <a:t>+</a:t>
+            </a:r>
+            <a:endParaRPr lang="en-US" sz="1600" dirty="0"/>
+          </a:p>
+        </p:txBody>
+      </p:sp>
+      <p:sp>
+        <p:nvSpPr>
+          <p:cNvPr id="16" name="the hint"/>
+          <p:cNvSpPr/>
+          <p:nvPr/>
+        </p:nvSpPr>
+        <p:spPr>
+          <a:xfrm>
+            <a:off x="777240" y="2560320"/>
+            <a:ext cx="4892040" cy="960120"/>
+          </a:xfrm>
+          <a:prstGeom prst="roundRect">
+            <a:avLst>
+              <a:gd name="adj" fmla="val 5714"/>
+            </a:avLst>
+          </a:prstGeom>
+          <a:solidFill>
+            <a:srgbClr val="E2F0D9"/>
+          </a:solidFill>
+          <a:ln w="12700">
+            <a:solidFill>
+              <a:srgbClr val="38761D"/>
+            </a:solidFill>
+            <a:prstDash val="solid"/>
+          </a:ln>
+        </p:spPr>
+      </p:sp>
+      <p:sp>
+        <p:nvSpPr>
+          <p:cNvPr id="17" name="Text 10"/>
+          <p:cNvSpPr txBox="1"/>
+          <p:nvPr/>
+        </p:nvSpPr>
+        <p:spPr>
+          <a:xfrm>
+            <a:off x="914400" y="2578608"/>
+            <a:ext cx="4663440" cy="914400"/>
+          </a:xfrm>
+          <a:prstGeom prst="rect">
+            <a:avLst/>
+          </a:prstGeom>
+          <a:noFill/>
+          <a:ln/>
+        </p:spPr>
+        <p:txBody>
+          <a:bodyPr wrap="square" lIns="0" tIns="0" rIns="0" bIns="0" rtlCol="0" anchor="ctr"/>
+          <a:lstStyle/>
+          <a:p>
             <a:pPr indent="0" marL="0">
               <a:buNone/>
             </a:pPr>
             <a:r>
-              <a:rPr lang="en-US" sz="1500" dirty="0">
-                <a:solidFill>
-                  <a:srgbClr val="C00000"/>
+              <a:rPr lang="en-US" sz="1400" b="1" dirty="0">
+                <a:solidFill>
+                  <a:srgbClr val="38761D"/>
+                </a:solidFill>
+                <a:latin typeface="Calibri" pitchFamily="34" charset="0"/>
+                <a:ea typeface="Calibri" pitchFamily="34" charset="-122"/>
+                <a:cs typeface="Calibri" pitchFamily="34" charset="-120"/>
+              </a:rPr>
+              <a:t>Hint: the exact usage, 11 lines, e.g.</a:t>
+            </a:r>
+            <a:endParaRPr lang="en-US" sz="1400" dirty="0"/>
+          </a:p>
+          <a:p>
+            <a:pPr indent="0" marL="0">
+              <a:buNone/>
+            </a:pPr>
+            <a:r>
+              <a:rPr lang="en-US" sz="1400" dirty="0">
+                <a:solidFill>
+                  <a:schemeClr val="tx1"/>
                 </a:solidFill>
                 <a:latin typeface="Courier New" pitchFamily="34" charset="0"/>
                 <a:ea typeface="Courier New" pitchFamily="34" charset="-122"/>
                 <a:cs typeface="Courier New" pitchFamily="34" charset="-120"/>
               </a:rPr>
-              <a:t>RegisterUnaryLongLivingCallback()</a:t>
-            </a:r>
-            <a:endParaRPr lang="en-US" sz="1500" dirty="0"/>
-          </a:p>
-        </p:txBody>
-      </p:sp>
-      <p:sp>
-        <p:nvSpPr>
-          <p:cNvPr id="17" name="Text 10"/>
-          <p:cNvSpPr txBox="1"/>
-          <p:nvPr/>
-        </p:nvSpPr>
-        <p:spPr>
-          <a:xfrm>
-            <a:off x="8001000" y="1783080"/>
-            <a:ext cx="3566160" cy="548640"/>
-          </a:xfrm>
-          <a:prstGeom prst="rect">
-            <a:avLst/>
-          </a:prstGeom>
-          <a:noFill/>
-          <a:ln/>
-        </p:spPr>
-        <p:txBody>
-          <a:bodyPr wrap="square" lIns="0" tIns="0" rIns="0" bIns="0" rtlCol="0" anchor="ctr"/>
-          <a:lstStyle/>
+              <a:t>r.RegisterUnaryTransitCallback(demand)</a:t>
+            </a:r>
+            <a:endParaRPr lang="en-US" sz="1400" dirty="0"/>
+          </a:p>
           <a:p>
             <a:pPr indent="0" marL="0">
               <a:buNone/>
             </a:pPr>
             <a:r>
-              <a:rPr lang="en-US" sz="1700" b="1" dirty="0">
-                <a:solidFill>
-                  <a:srgbClr val="C00000"/>
-                </a:solidFill>
-              </a:rPr>
-              <a:t>✗ does not exist: crash</a:t>
-            </a:r>
-            <a:endParaRPr lang="en-US" sz="1700" dirty="0"/>
-          </a:p>
-        </p:txBody>
-      </p:sp>
-      <p:sp>
-        <p:nvSpPr>
-          <p:cNvPr id="18" name="box the exact usage (11 "/>
+              <a:rPr lang="en-US" sz="1400" dirty="0">
+                <a:solidFill>
+                  <a:schemeClr val="tx1"/>
+                </a:solidFill>
+                <a:latin typeface="Courier New" pitchFamily="34" charset="0"/>
+                <a:ea typeface="Courier New" pitchFamily="34" charset="-122"/>
+                <a:cs typeface="Courier New" pitchFamily="34" charset="-120"/>
+              </a:rPr>
+              <a:t>r.AddDimensionWithVehicleCapacity(...)</a:t>
+            </a:r>
+            <a:endParaRPr lang="en-US" sz="1400" dirty="0"/>
+          </a:p>
+        </p:txBody>
+      </p:sp>
+      <p:sp>
+        <p:nvSpPr>
+          <p:cNvPr id="18" name="Shape 11"/>
           <p:cNvSpPr/>
           <p:nvPr/>
         </p:nvSpPr>
         <p:spPr>
           <a:xfrm>
-            <a:off x="548640" y="2514600"/>
-            <a:ext cx="2468880" cy="548640"/>
+            <a:off x="3218688" y="3520440"/>
+            <a:ext cx="0" cy="182880"/>
+          </a:xfrm>
+          <a:prstGeom prst="line">
+            <a:avLst/>
+          </a:prstGeom>
+          <a:noFill/>
+          <a:ln w="25400">
+            <a:solidFill>
+              <a:srgbClr val="7F7F7F"/>
+            </a:solidFill>
+            <a:prstDash val="solid"/>
+            <a:tailEnd type="triangle"/>
+          </a:ln>
+        </p:spPr>
+      </p:sp>
+      <p:sp>
+        <p:nvSpPr>
+          <p:cNvPr id="19" name="box ✓ the program runs: "/>
+          <p:cNvSpPr/>
+          <p:nvPr/>
+        </p:nvSpPr>
+        <p:spPr>
+          <a:xfrm>
+            <a:off x="777240" y="3703320"/>
+            <a:ext cx="4892040" cy="411480"/>
           </a:xfrm>
           <a:prstGeom prst="roundRect">
             <a:avLst>
-              <a:gd name="adj" fmla="val 10000"/>
+              <a:gd name="adj" fmla="val 13333"/>
             </a:avLst>
           </a:prstGeom>
           <a:solidFill>
@@ -36648,14 +36711,14 @@
       </p:sp>
       <p:sp>
         <p:nvSpPr>
-          <p:cNvPr id="19" name="Text 12"/>
+          <p:cNvPr id="20" name="Text 13"/>
           <p:cNvSpPr txBox="1"/>
           <p:nvPr/>
         </p:nvSpPr>
         <p:spPr>
           <a:xfrm>
-            <a:off x="621792" y="2514600"/>
-            <a:ext cx="2322576" cy="548640"/>
+            <a:off x="850392" y="3703320"/>
+            <a:ext cx="4745736" cy="411480"/>
           </a:xfrm>
           <a:prstGeom prst="rect">
             <a:avLst/>
@@ -36671,61 +36734,155 @@
               <a:buNone/>
             </a:pPr>
             <a:r>
-              <a:rPr lang="en-US" sz="1600" b="1" dirty="0">
+              <a:rPr lang="en-US" sz="1500" b="1" dirty="0">
+                <a:solidFill>
+                  <a:srgbClr val="38761D"/>
+                </a:solidFill>
+              </a:rPr>
+              <a:t>✓ the program runs: best route</a:t>
+            </a:r>
+            <a:endParaRPr lang="en-US" sz="1500" dirty="0"/>
+          </a:p>
+        </p:txBody>
+      </p:sp>
+      <p:sp>
+        <p:nvSpPr>
+          <p:cNvPr id="21" name="Text 14"/>
+          <p:cNvSpPr txBox="1"/>
+          <p:nvPr/>
+        </p:nvSpPr>
+        <p:spPr>
+          <a:xfrm>
+            <a:off x="777240" y="4224528"/>
+            <a:ext cx="4892040" cy="320040"/>
+          </a:xfrm>
+          <a:prstGeom prst="rect">
+            <a:avLst/>
+          </a:prstGeom>
+          <a:noFill/>
+          <a:ln/>
+        </p:spPr>
+        <p:txBody>
+          <a:bodyPr wrap="square" lIns="0" tIns="0" rIns="0" bIns="0" rtlCol="0" anchor="ctr"/>
+          <a:lstStyle/>
+          <a:p>
+            <a:pPr indent="0" marL="0">
+              <a:buNone/>
+            </a:pPr>
+            <a:r>
+              <a:rPr lang="en-US" sz="1500" b="1" dirty="0">
                 <a:solidFill>
                   <a:schemeClr val="tx1"/>
                 </a:solidFill>
               </a:rPr>
-              <a:t>the exact usage (11 lines)</a:t>
-            </a:r>
-            <a:endParaRPr lang="en-US" sz="1600" dirty="0"/>
-          </a:p>
-        </p:txBody>
-      </p:sp>
-      <p:sp>
-        <p:nvSpPr>
-          <p:cNvPr id="20" name="Shape 13"/>
+              <a:t>A long reference sheet instead (no weight rule in it):</a:t>
+            </a:r>
+            <a:endParaRPr lang="en-US" sz="1500" dirty="0"/>
+          </a:p>
+        </p:txBody>
+      </p:sp>
+      <p:sp>
+        <p:nvSpPr>
+          <p:cNvPr id="22" name="invented call"/>
           <p:cNvSpPr/>
           <p:nvPr/>
         </p:nvSpPr>
         <p:spPr>
           <a:xfrm>
-            <a:off x="3017520" y="2788920"/>
-            <a:ext cx="320040" cy="0"/>
-          </a:xfrm>
-          <a:prstGeom prst="line">
-            <a:avLst/>
-          </a:prstGeom>
-          <a:noFill/>
-          <a:ln w="25400">
+            <a:off x="777240" y="4572000"/>
+            <a:ext cx="4892040" cy="777240"/>
+          </a:xfrm>
+          <a:prstGeom prst="roundRect">
+            <a:avLst>
+              <a:gd name="adj" fmla="val 7059"/>
+            </a:avLst>
+          </a:prstGeom>
+          <a:solidFill>
+            <a:srgbClr val="FADBD8"/>
+          </a:solidFill>
+          <a:ln w="12700">
             <a:solidFill>
-              <a:srgbClr val="7F7F7F"/>
+              <a:srgbClr val="C00000"/>
             </a:solidFill>
             <a:prstDash val="solid"/>
-            <a:tailEnd type="triangle"/>
           </a:ln>
         </p:spPr>
       </p:sp>
       <p:sp>
         <p:nvSpPr>
-          <p:cNvPr id="21" name="code RegisterUnaryTransit"/>
+          <p:cNvPr id="23" name="Text 16"/>
+          <p:cNvSpPr txBox="1"/>
+          <p:nvPr/>
+        </p:nvSpPr>
+        <p:spPr>
+          <a:xfrm>
+            <a:off x="914400" y="4572000"/>
+            <a:ext cx="4663440" cy="777240"/>
+          </a:xfrm>
+          <a:prstGeom prst="rect">
+            <a:avLst/>
+          </a:prstGeom>
+          <a:noFill/>
+          <a:ln/>
+        </p:spPr>
+        <p:txBody>
+          <a:bodyPr wrap="square" lIns="0" tIns="0" rIns="0" bIns="0" rtlCol="0" anchor="ctr"/>
+          <a:lstStyle/>
+          <a:p>
+            <a:pPr indent="0" marL="0">
+              <a:buNone/>
+            </a:pPr>
+            <a:r>
+              <a:rPr lang="en-US" sz="1400" dirty="0">
+                <a:solidFill>
+                  <a:srgbClr val="C00000"/>
+                </a:solidFill>
+                <a:latin typeface="Courier New" pitchFamily="34" charset="0"/>
+                <a:ea typeface="Courier New" pitchFamily="34" charset="-122"/>
+                <a:cs typeface="Courier New" pitchFamily="34" charset="-120"/>
+              </a:rPr>
+              <a:t>RegisterUnaryLongLivingCallback()</a:t>
+            </a:r>
+            <a:endParaRPr lang="en-US" sz="1400" dirty="0"/>
+          </a:p>
+          <a:p>
+            <a:pPr indent="0" marL="0">
+              <a:buNone/>
+            </a:pPr>
+            <a:r>
+              <a:rPr lang="en-US" sz="1400" b="1" dirty="0">
+                <a:solidFill>
+                  <a:srgbClr val="C00000"/>
+                </a:solidFill>
+              </a:rPr>
+              <a:t>✗ invented, does not exist: crash</a:t>
+            </a:r>
+            <a:endParaRPr lang="en-US" sz="1400" dirty="0"/>
+          </a:p>
+        </p:txBody>
+      </p:sp>
+      <p:sp>
+        <p:nvSpPr>
+          <p:cNvPr id="24" name="what it buys"/>
           <p:cNvSpPr/>
           <p:nvPr/>
         </p:nvSpPr>
         <p:spPr>
           <a:xfrm>
-            <a:off x="3337560" y="2514600"/>
-            <a:ext cx="4480560" cy="548640"/>
-          </a:xfrm>
-          <a:prstGeom prst="rect">
-            <a:avLst/>
+            <a:off x="6172200" y="1371600"/>
+            <a:ext cx="5440680" cy="4160520"/>
+          </a:xfrm>
+          <a:prstGeom prst="roundRect">
+            <a:avLst>
+              <a:gd name="adj" fmla="val 1758"/>
+            </a:avLst>
           </a:prstGeom>
           <a:solidFill>
-            <a:srgbClr val="FFFFFF"/>
+            <a:srgbClr val="F2F2F2"/>
           </a:solidFill>
           <a:ln w="9525">
             <a:solidFill>
-              <a:srgbClr val="BFBFBF"/>
+              <a:srgbClr val="D9D9D9"/>
             </a:solidFill>
             <a:prstDash val="solid"/>
           </a:ln>
@@ -36733,125 +36890,14 @@
       </p:sp>
       <p:sp>
         <p:nvSpPr>
-          <p:cNvPr id="22" name="Text 15"/>
-          <p:cNvSpPr txBox="1"/>
-          <p:nvPr/>
-        </p:nvSpPr>
-        <p:spPr>
-          <a:xfrm>
-            <a:off x="3447288" y="2514600"/>
-            <a:ext cx="4261104" cy="548640"/>
-          </a:xfrm>
-          <a:prstGeom prst="rect">
-            <a:avLst/>
-          </a:prstGeom>
-          <a:noFill/>
-          <a:ln/>
-        </p:spPr>
-        <p:txBody>
-          <a:bodyPr wrap="square" lIns="0" tIns="0" rIns="0" bIns="0" rtlCol="0" anchor="ctr"/>
-          <a:lstStyle/>
-          <a:p>
-            <a:pPr indent="0" marL="0">
-              <a:buNone/>
-            </a:pPr>
-            <a:r>
-              <a:rPr lang="en-US" sz="1500" dirty="0">
-                <a:solidFill>
-                  <a:srgbClr val="38761D"/>
-                </a:solidFill>
-                <a:latin typeface="Courier New" pitchFamily="34" charset="0"/>
-                <a:ea typeface="Courier New" pitchFamily="34" charset="-122"/>
-                <a:cs typeface="Courier New" pitchFamily="34" charset="-120"/>
-              </a:rPr>
-              <a:t>RegisterUnaryTransitCallback()</a:t>
-            </a:r>
-            <a:endParaRPr lang="en-US" sz="1500" dirty="0"/>
-          </a:p>
-        </p:txBody>
-      </p:sp>
-      <p:sp>
-        <p:nvSpPr>
-          <p:cNvPr id="23" name="Text 16"/>
-          <p:cNvSpPr txBox="1"/>
-          <p:nvPr/>
-        </p:nvSpPr>
-        <p:spPr>
-          <a:xfrm>
-            <a:off x="8001000" y="2514600"/>
-            <a:ext cx="3566160" cy="548640"/>
-          </a:xfrm>
-          <a:prstGeom prst="rect">
-            <a:avLst/>
-          </a:prstGeom>
-          <a:noFill/>
-          <a:ln/>
-        </p:spPr>
-        <p:txBody>
-          <a:bodyPr wrap="square" lIns="0" tIns="0" rIns="0" bIns="0" rtlCol="0" anchor="ctr"/>
-          <a:lstStyle/>
-          <a:p>
-            <a:pPr indent="0" marL="0">
-              <a:buNone/>
-            </a:pPr>
-            <a:r>
-              <a:rPr lang="en-US" sz="1700" b="1" dirty="0">
-                <a:solidFill>
-                  <a:srgbClr val="38761D"/>
-                </a:solidFill>
-              </a:rPr>
-              <a:t>✓ runs: best route</a:t>
-            </a:r>
-            <a:endParaRPr lang="en-US" sz="1700" dirty="0"/>
-          </a:p>
-        </p:txBody>
-      </p:sp>
-      <p:sp>
-        <p:nvSpPr>
-          <p:cNvPr id="24" name="Text 17"/>
-          <p:cNvSpPr txBox="1"/>
-          <p:nvPr/>
-        </p:nvSpPr>
-        <p:spPr>
-          <a:xfrm>
-            <a:off x="548640" y="3337560"/>
-            <a:ext cx="11064240" cy="365760"/>
-          </a:xfrm>
-          <a:prstGeom prst="rect">
-            <a:avLst/>
-          </a:prstGeom>
-          <a:noFill/>
-          <a:ln/>
-        </p:spPr>
-        <p:txBody>
-          <a:bodyPr wrap="square" lIns="0" tIns="0" rIns="0" bIns="0" rtlCol="0" anchor="ctr"/>
-          <a:lstStyle/>
-          <a:p>
-            <a:pPr indent="0" marL="0">
-              <a:buNone/>
-            </a:pPr>
-            <a:r>
-              <a:rPr lang="en-US" sz="1700" b="1" dirty="0">
-                <a:solidFill>
-                  <a:schemeClr val="tx1"/>
-                </a:solidFill>
-              </a:rPr>
-              <a:t>% of 30 routing problems solved optimally:</a:t>
-            </a:r>
-            <a:endParaRPr lang="en-US" sz="1700" dirty="0"/>
-          </a:p>
-        </p:txBody>
-      </p:sp>
-      <p:sp>
-        <p:nvSpPr>
           <p:cNvPr id="25" name="Text 18"/>
           <p:cNvSpPr txBox="1"/>
           <p:nvPr/>
         </p:nvSpPr>
         <p:spPr>
           <a:xfrm>
-            <a:off x="548640" y="3749040"/>
-            <a:ext cx="2377440" cy="365760"/>
+            <a:off x="6400800" y="1444752"/>
+            <a:ext cx="4983480" cy="384048"/>
           </a:xfrm>
           <a:prstGeom prst="rect">
             <a:avLst/>
@@ -36863,6 +36909,42 @@
           <a:bodyPr wrap="square" lIns="0" tIns="0" rIns="0" bIns="0" rtlCol="0" anchor="ctr"/>
           <a:lstStyle/>
           <a:p>
+            <a:pPr indent="0" marL="0">
+              <a:buNone/>
+            </a:pPr>
+            <a:r>
+              <a:rPr lang="en-US" sz="1800" b="1" dirty="0">
+                <a:solidFill>
+                  <a:srgbClr val="4472C4"/>
+                </a:solidFill>
+              </a:rPr>
+              <a:t>Result: 30 routing problems solved optimally</a:t>
+            </a:r>
+            <a:endParaRPr lang="en-US" sz="1800" dirty="0"/>
+          </a:p>
+        </p:txBody>
+      </p:sp>
+      <p:sp>
+        <p:nvSpPr>
+          <p:cNvPr id="26" name="Text 19"/>
+          <p:cNvSpPr txBox="1"/>
+          <p:nvPr/>
+        </p:nvSpPr>
+        <p:spPr>
+          <a:xfrm>
+            <a:off x="6400800" y="1920240"/>
+            <a:ext cx="1600200" cy="402336"/>
+          </a:xfrm>
+          <a:prstGeom prst="rect">
+            <a:avLst/>
+          </a:prstGeom>
+          <a:noFill/>
+          <a:ln/>
+        </p:spPr>
+        <p:txBody>
+          <a:bodyPr wrap="square" lIns="0" tIns="0" rIns="0" bIns="0" rtlCol="0" anchor="ctr"/>
+          <a:lstStyle/>
+          <a:p>
             <a:pPr algn="r" indent="0" marL="0">
               <a:buNone/>
             </a:pPr>
@@ -36872,7 +36954,7 @@
                   <a:schemeClr val="tx1"/>
                 </a:solidFill>
               </a:rPr>
-              <a:t>nothing extra</a:t>
+              <a:t>task only</a:t>
             </a:r>
             <a:endParaRPr lang="en-US" sz="1600" dirty="0"/>
           </a:p>
@@ -36880,14 +36962,14 @@
       </p:sp>
       <p:sp>
         <p:nvSpPr>
-          <p:cNvPr id="26" name="bar nothing extra"/>
+          <p:cNvPr id="27" name="bar task only"/>
           <p:cNvSpPr/>
           <p:nvPr/>
         </p:nvSpPr>
         <p:spPr>
           <a:xfrm>
-            <a:off x="3063240" y="3817620"/>
-            <a:ext cx="1409090" cy="228600"/>
+            <a:off x="8138160" y="1995678"/>
+            <a:ext cx="336499" cy="251460"/>
           </a:xfrm>
           <a:prstGeom prst="rect">
             <a:avLst/>
@@ -36905,50 +36987,14 @@
       </p:sp>
       <p:sp>
         <p:nvSpPr>
-          <p:cNvPr id="27" name="Text 20"/>
-          <p:cNvSpPr txBox="1"/>
-          <p:nvPr/>
-        </p:nvSpPr>
-        <p:spPr>
-          <a:xfrm>
-            <a:off x="4563770" y="3749040"/>
-            <a:ext cx="2377440" cy="365760"/>
-          </a:xfrm>
-          <a:prstGeom prst="rect">
-            <a:avLst/>
-          </a:prstGeom>
-          <a:noFill/>
-          <a:ln/>
-        </p:spPr>
-        <p:txBody>
-          <a:bodyPr wrap="square" lIns="0" tIns="0" rIns="0" bIns="0" rtlCol="0" anchor="ctr"/>
-          <a:lstStyle/>
-          <a:p>
-            <a:pPr indent="0" marL="0">
-              <a:buNone/>
-            </a:pPr>
-            <a:r>
-              <a:rPr lang="en-US" sz="1800" b="1" dirty="0">
-                <a:solidFill>
-                  <a:srgbClr val="7F7F7F"/>
-                </a:solidFill>
-              </a:rPr>
-              <a:t>23%</a:t>
-            </a:r>
-            <a:endParaRPr lang="en-US" sz="1800" dirty="0"/>
-          </a:p>
-        </p:txBody>
-      </p:sp>
-      <p:sp>
-        <p:nvSpPr>
           <p:cNvPr id="28" name="Text 21"/>
           <p:cNvSpPr txBox="1"/>
           <p:nvPr/>
         </p:nvSpPr>
         <p:spPr>
           <a:xfrm>
-            <a:off x="548640" y="4206240"/>
-            <a:ext cx="2377440" cy="365760"/>
+            <a:off x="8566099" y="1920240"/>
+            <a:ext cx="1737360" cy="402336"/>
           </a:xfrm>
           <a:prstGeom prst="rect">
             <a:avLst/>
@@ -36960,6 +37006,42 @@
           <a:bodyPr wrap="square" lIns="0" tIns="0" rIns="0" bIns="0" rtlCol="0" anchor="ctr"/>
           <a:lstStyle/>
           <a:p>
+            <a:pPr indent="0" marL="0">
+              <a:buNone/>
+            </a:pPr>
+            <a:r>
+              <a:rPr lang="en-US" sz="1800" b="1" dirty="0">
+                <a:solidFill>
+                  <a:srgbClr val="7F7F7F"/>
+                </a:solidFill>
+              </a:rPr>
+              <a:t>23%</a:t>
+            </a:r>
+            <a:endParaRPr lang="en-US" sz="1800" dirty="0"/>
+          </a:p>
+        </p:txBody>
+      </p:sp>
+      <p:sp>
+        <p:nvSpPr>
+          <p:cNvPr id="29" name="Text 22"/>
+          <p:cNvSpPr txBox="1"/>
+          <p:nvPr/>
+        </p:nvSpPr>
+        <p:spPr>
+          <a:xfrm>
+            <a:off x="6400800" y="2423160"/>
+            <a:ext cx="1600200" cy="402336"/>
+          </a:xfrm>
+          <a:prstGeom prst="rect">
+            <a:avLst/>
+          </a:prstGeom>
+          <a:noFill/>
+          <a:ln/>
+        </p:spPr>
+        <p:txBody>
+          <a:bodyPr wrap="square" lIns="0" tIns="0" rIns="0" bIns="0" rtlCol="0" anchor="ctr"/>
+          <a:lstStyle/>
+          <a:p>
             <a:pPr algn="r" indent="0" marL="0">
               <a:buNone/>
             </a:pPr>
@@ -36969,7 +37051,7 @@
                   <a:schemeClr val="tx1"/>
                 </a:solidFill>
               </a:rPr>
-              <a:t>think longer</a:t>
+              <a:t>+ think longer</a:t>
             </a:r>
             <a:endParaRPr lang="en-US" sz="1600" dirty="0"/>
           </a:p>
@@ -36977,14 +37059,14 @@
       </p:sp>
       <p:sp>
         <p:nvSpPr>
-          <p:cNvPr id="29" name="bar think longer"/>
+          <p:cNvPr id="30" name="bar + think longer"/>
           <p:cNvSpPr/>
           <p:nvPr/>
         </p:nvSpPr>
         <p:spPr>
           <a:xfrm>
-            <a:off x="3063240" y="4274820"/>
-            <a:ext cx="183794" cy="228600"/>
+            <a:off x="8138160" y="2498598"/>
+            <a:ext cx="45720" cy="251460"/>
           </a:xfrm>
           <a:prstGeom prst="rect">
             <a:avLst/>
@@ -37002,50 +37084,14 @@
       </p:sp>
       <p:sp>
         <p:nvSpPr>
-          <p:cNvPr id="30" name="Text 23"/>
-          <p:cNvSpPr txBox="1"/>
-          <p:nvPr/>
-        </p:nvSpPr>
-        <p:spPr>
-          <a:xfrm>
-            <a:off x="3338474" y="4206240"/>
-            <a:ext cx="2377440" cy="365760"/>
-          </a:xfrm>
-          <a:prstGeom prst="rect">
-            <a:avLst/>
-          </a:prstGeom>
-          <a:noFill/>
-          <a:ln/>
-        </p:spPr>
-        <p:txBody>
-          <a:bodyPr wrap="square" lIns="0" tIns="0" rIns="0" bIns="0" rtlCol="0" anchor="ctr"/>
-          <a:lstStyle/>
-          <a:p>
-            <a:pPr indent="0" marL="0">
-              <a:buNone/>
-            </a:pPr>
-            <a:r>
-              <a:rPr lang="en-US" sz="1800" b="1" dirty="0">
-                <a:solidFill>
-                  <a:srgbClr val="C00000"/>
-                </a:solidFill>
-              </a:rPr>
-              <a:t>3%</a:t>
-            </a:r>
-            <a:endParaRPr lang="en-US" sz="1800" dirty="0"/>
-          </a:p>
-        </p:txBody>
-      </p:sp>
-      <p:sp>
-        <p:nvSpPr>
           <p:cNvPr id="31" name="Text 24"/>
           <p:cNvSpPr txBox="1"/>
           <p:nvPr/>
         </p:nvSpPr>
         <p:spPr>
           <a:xfrm>
-            <a:off x="548640" y="4663440"/>
-            <a:ext cx="2377440" cy="365760"/>
+            <a:off x="8273491" y="2423160"/>
+            <a:ext cx="1737360" cy="402336"/>
           </a:xfrm>
           <a:prstGeom prst="rect">
             <a:avLst/>
@@ -37057,6 +37103,42 @@
           <a:bodyPr wrap="square" lIns="0" tIns="0" rIns="0" bIns="0" rtlCol="0" anchor="ctr"/>
           <a:lstStyle/>
           <a:p>
+            <a:pPr indent="0" marL="0">
+              <a:buNone/>
+            </a:pPr>
+            <a:r>
+              <a:rPr lang="en-US" sz="1800" b="1" dirty="0">
+                <a:solidFill>
+                  <a:srgbClr val="C00000"/>
+                </a:solidFill>
+              </a:rPr>
+              <a:t>3%</a:t>
+            </a:r>
+            <a:endParaRPr lang="en-US" sz="1800" dirty="0"/>
+          </a:p>
+        </p:txBody>
+      </p:sp>
+      <p:sp>
+        <p:nvSpPr>
+          <p:cNvPr id="32" name="Text 25"/>
+          <p:cNvSpPr txBox="1"/>
+          <p:nvPr/>
+        </p:nvSpPr>
+        <p:spPr>
+          <a:xfrm>
+            <a:off x="6400800" y="2926080"/>
+            <a:ext cx="1600200" cy="402336"/>
+          </a:xfrm>
+          <a:prstGeom prst="rect">
+            <a:avLst/>
+          </a:prstGeom>
+          <a:noFill/>
+          <a:ln/>
+        </p:spPr>
+        <p:txBody>
+          <a:bodyPr wrap="square" lIns="0" tIns="0" rIns="0" bIns="0" rtlCol="0" anchor="ctr"/>
+          <a:lstStyle/>
+          <a:p>
             <a:pPr algn="r" indent="0" marL="0">
               <a:buNone/>
             </a:pPr>
@@ -37066,7 +37148,7 @@
                   <a:schemeClr val="tx1"/>
                 </a:solidFill>
               </a:rPr>
-              <a:t>long reference sheet</a:t>
+              <a:t>+ long sheet</a:t>
             </a:r>
             <a:endParaRPr lang="en-US" sz="1600" dirty="0"/>
           </a:p>
@@ -37074,14 +37156,14 @@
       </p:sp>
       <p:sp>
         <p:nvSpPr>
-          <p:cNvPr id="32" name="bar long reference sheet"/>
+          <p:cNvPr id="33" name="bar + long sheet"/>
           <p:cNvSpPr/>
           <p:nvPr/>
         </p:nvSpPr>
         <p:spPr>
           <a:xfrm>
-            <a:off x="3063240" y="4732020"/>
-            <a:ext cx="428854" cy="228600"/>
+            <a:off x="8138160" y="3001518"/>
+            <a:ext cx="102413" cy="251460"/>
           </a:xfrm>
           <a:prstGeom prst="rect">
             <a:avLst/>
@@ -37099,50 +37181,14 @@
       </p:sp>
       <p:sp>
         <p:nvSpPr>
-          <p:cNvPr id="33" name="Text 26"/>
-          <p:cNvSpPr txBox="1"/>
-          <p:nvPr/>
-        </p:nvSpPr>
-        <p:spPr>
-          <a:xfrm>
-            <a:off x="3583534" y="4663440"/>
-            <a:ext cx="2377440" cy="365760"/>
-          </a:xfrm>
-          <a:prstGeom prst="rect">
-            <a:avLst/>
-          </a:prstGeom>
-          <a:noFill/>
-          <a:ln/>
-        </p:spPr>
-        <p:txBody>
-          <a:bodyPr wrap="square" lIns="0" tIns="0" rIns="0" bIns="0" rtlCol="0" anchor="ctr"/>
-          <a:lstStyle/>
-          <a:p>
-            <a:pPr indent="0" marL="0">
-              <a:buNone/>
-            </a:pPr>
-            <a:r>
-              <a:rPr lang="en-US" sz="1800" b="1" dirty="0">
-                <a:solidFill>
-                  <a:srgbClr val="C00000"/>
-                </a:solidFill>
-              </a:rPr>
-              <a:t>7%</a:t>
-            </a:r>
-            <a:endParaRPr lang="en-US" sz="1800" dirty="0"/>
-          </a:p>
-        </p:txBody>
-      </p:sp>
-      <p:sp>
-        <p:nvSpPr>
           <p:cNvPr id="34" name="Text 27"/>
           <p:cNvSpPr txBox="1"/>
           <p:nvPr/>
         </p:nvSpPr>
         <p:spPr>
           <a:xfrm>
-            <a:off x="548640" y="5120640"/>
-            <a:ext cx="2377440" cy="365760"/>
+            <a:off x="8332013" y="2926080"/>
+            <a:ext cx="1737360" cy="402336"/>
           </a:xfrm>
           <a:prstGeom prst="rect">
             <a:avLst/>
@@ -37154,6 +37200,42 @@
           <a:bodyPr wrap="square" lIns="0" tIns="0" rIns="0" bIns="0" rtlCol="0" anchor="ctr"/>
           <a:lstStyle/>
           <a:p>
+            <a:pPr indent="0" marL="0">
+              <a:buNone/>
+            </a:pPr>
+            <a:r>
+              <a:rPr lang="en-US" sz="1800" b="1" dirty="0">
+                <a:solidFill>
+                  <a:srgbClr val="C00000"/>
+                </a:solidFill>
+              </a:rPr>
+              <a:t>7%</a:t>
+            </a:r>
+            <a:endParaRPr lang="en-US" sz="1800" dirty="0"/>
+          </a:p>
+        </p:txBody>
+      </p:sp>
+      <p:sp>
+        <p:nvSpPr>
+          <p:cNvPr id="35" name="Text 28"/>
+          <p:cNvSpPr txBox="1"/>
+          <p:nvPr/>
+        </p:nvSpPr>
+        <p:spPr>
+          <a:xfrm>
+            <a:off x="6400800" y="3429000"/>
+            <a:ext cx="1600200" cy="402336"/>
+          </a:xfrm>
+          <a:prstGeom prst="rect">
+            <a:avLst/>
+          </a:prstGeom>
+          <a:noFill/>
+          <a:ln/>
+        </p:spPr>
+        <p:txBody>
+          <a:bodyPr wrap="square" lIns="0" tIns="0" rIns="0" bIns="0" rtlCol="0" anchor="ctr"/>
+          <a:lstStyle/>
+          <a:p>
             <a:pPr algn="r" indent="0" marL="0">
               <a:buNone/>
             </a:pPr>
@@ -37163,7 +37245,7 @@
                   <a:schemeClr val="tx1"/>
                 </a:solidFill>
               </a:rPr>
-              <a:t>exact usage</a:t>
+              <a:t>+ short hint</a:t>
             </a:r>
             <a:endParaRPr lang="en-US" sz="1600" dirty="0"/>
           </a:p>
@@ -37171,14 +37253,14 @@
       </p:sp>
       <p:sp>
         <p:nvSpPr>
-          <p:cNvPr id="35" name="bar exact usage"/>
+          <p:cNvPr id="36" name="bar + short hint"/>
           <p:cNvSpPr/>
           <p:nvPr/>
         </p:nvSpPr>
         <p:spPr>
           <a:xfrm>
-            <a:off x="3063240" y="5189220"/>
-            <a:ext cx="5084978" cy="228600"/>
+            <a:off x="8138160" y="3504438"/>
+            <a:ext cx="1214323" cy="251460"/>
           </a:xfrm>
           <a:prstGeom prst="rect">
             <a:avLst/>
@@ -37196,48 +37278,264 @@
       </p:sp>
       <p:sp>
         <p:nvSpPr>
-          <p:cNvPr id="36" name="Text 29"/>
-          <p:cNvSpPr txBox="1"/>
-          <p:nvPr/>
-        </p:nvSpPr>
-        <p:spPr>
-          <a:xfrm>
-            <a:off x="8239658" y="5120640"/>
-            <a:ext cx="2377440" cy="365760"/>
-          </a:xfrm>
-          <a:prstGeom prst="rect">
-            <a:avLst/>
-          </a:prstGeom>
-          <a:noFill/>
-          <a:ln/>
-        </p:spPr>
-        <p:txBody>
-          <a:bodyPr wrap="square" lIns="0" tIns="0" rIns="0" bIns="0" rtlCol="0" anchor="ctr"/>
-          <a:lstStyle/>
-          <a:p>
-            <a:pPr indent="0" marL="0">
-              <a:buNone/>
-            </a:pPr>
-            <a:r>
-              <a:rPr lang="en-US" sz="1800" b="1" dirty="0">
-                <a:solidFill>
-                  <a:srgbClr val="4472C4"/>
-                </a:solidFill>
-              </a:rPr>
-              <a:t>77–90% (3 seeds)</a:t>
-            </a:r>
-            <a:endParaRPr lang="en-US" sz="1800" dirty="0"/>
-          </a:p>
-        </p:txBody>
-      </p:sp>
-      <p:sp>
-        <p:nvSpPr>
           <p:cNvPr id="37" name="Text 30"/>
           <p:cNvSpPr txBox="1"/>
           <p:nvPr/>
         </p:nvSpPr>
         <p:spPr>
           <a:xfrm>
+            <a:off x="9443923" y="3429000"/>
+            <a:ext cx="1737360" cy="402336"/>
+          </a:xfrm>
+          <a:prstGeom prst="rect">
+            <a:avLst/>
+          </a:prstGeom>
+          <a:noFill/>
+          <a:ln/>
+        </p:spPr>
+        <p:txBody>
+          <a:bodyPr wrap="square" lIns="0" tIns="0" rIns="0" bIns="0" rtlCol="0" anchor="ctr"/>
+          <a:lstStyle/>
+          <a:p>
+            <a:pPr indent="0" marL="0">
+              <a:buNone/>
+            </a:pPr>
+            <a:r>
+              <a:rPr lang="en-US" sz="1800" b="1" dirty="0">
+                <a:solidFill>
+                  <a:srgbClr val="4472C4"/>
+                </a:solidFill>
+              </a:rPr>
+              <a:t>77–90% (3 runs)</a:t>
+            </a:r>
+            <a:endParaRPr lang="en-US" sz="1800" dirty="0"/>
+          </a:p>
+        </p:txBody>
+      </p:sp>
+      <p:sp>
+        <p:nvSpPr>
+          <p:cNvPr id="38" name="Text 31"/>
+          <p:cNvSpPr txBox="1"/>
+          <p:nvPr/>
+        </p:nvSpPr>
+        <p:spPr>
+          <a:xfrm>
+            <a:off x="6400800" y="4041648"/>
+            <a:ext cx="4983480" cy="347472"/>
+          </a:xfrm>
+          <a:prstGeom prst="rect">
+            <a:avLst/>
+          </a:prstGeom>
+          <a:noFill/>
+          <a:ln/>
+        </p:spPr>
+        <p:txBody>
+          <a:bodyPr wrap="square" lIns="0" tIns="0" rIns="0" bIns="0" rtlCol="0" anchor="ctr"/>
+          <a:lstStyle/>
+          <a:p>
+            <a:pPr indent="0" marL="0">
+              <a:buNone/>
+            </a:pPr>
+            <a:r>
+              <a:rPr lang="en-US" sz="1500" b="1" dirty="0">
+                <a:solidFill>
+                  <a:schemeClr val="tx1"/>
+                </a:solidFill>
+              </a:rPr>
+              <a:t>Where the hint comes from (once per problem type):</a:t>
+            </a:r>
+            <a:endParaRPr lang="en-US" sz="1500" dirty="0"/>
+          </a:p>
+        </p:txBody>
+      </p:sp>
+      <p:pic>
+        <p:nvPicPr>
+          <p:cNvPr id="39" name="hint source pen" descr="/NAS/SJ/POSTECH/nlp/figs/icons/pen.png">    </p:cNvPr>
+          <p:cNvPicPr>
+            <a:picLocks noChangeAspect="1"/>
+          </p:cNvPicPr>
+          <p:nvPr/>
+        </p:nvPicPr>
+        <p:blipFill>
+          <a:blip r:embed="rId6"/>
+          <a:stretch>
+            <a:fillRect/>
+          </a:stretch>
+        </p:blipFill>
+        <p:spPr>
+          <a:xfrm>
+            <a:off x="6446520" y="4462272"/>
+            <a:ext cx="256032" cy="256032"/>
+          </a:xfrm>
+          <a:prstGeom prst="rect">
+            <a:avLst/>
+          </a:prstGeom>
+        </p:spPr>
+      </p:pic>
+      <p:sp>
+        <p:nvSpPr>
+          <p:cNvPr id="40" name="Text 32"/>
+          <p:cNvSpPr txBox="1"/>
+          <p:nvPr/>
+        </p:nvSpPr>
+        <p:spPr>
+          <a:xfrm>
+            <a:off x="6812280" y="4434840"/>
+            <a:ext cx="4572000" cy="310896"/>
+          </a:xfrm>
+          <a:prstGeom prst="rect">
+            <a:avLst/>
+          </a:prstGeom>
+          <a:noFill/>
+          <a:ln/>
+        </p:spPr>
+        <p:txBody>
+          <a:bodyPr wrap="square" lIns="0" tIns="0" rIns="0" bIns="0" rtlCol="0" anchor="ctr"/>
+          <a:lstStyle/>
+          <a:p>
+            <a:pPr indent="0" marL="0">
+              <a:buNone/>
+            </a:pPr>
+            <a:r>
+              <a:rPr lang="en-US" sz="1400" dirty="0">
+                <a:solidFill>
+                  <a:schemeClr val="tx1"/>
+                </a:solidFill>
+              </a:rPr>
+              <a:t>written by hand by someone who knows the library</a:t>
+            </a:r>
+            <a:endParaRPr lang="en-US" sz="1400" dirty="0"/>
+          </a:p>
+        </p:txBody>
+      </p:sp>
+      <p:pic>
+        <p:nvPicPr>
+          <p:cNvPr id="41" name="hint source page" descr="/NAS/SJ/POSTECH/nlp/figs/icons/page.png">    </p:cNvPr>
+          <p:cNvPicPr>
+            <a:picLocks noChangeAspect="1"/>
+          </p:cNvPicPr>
+          <p:nvPr/>
+        </p:nvPicPr>
+        <p:blipFill>
+          <a:blip r:embed="rId7"/>
+          <a:stretch>
+            <a:fillRect/>
+          </a:stretch>
+        </p:blipFill>
+        <p:spPr>
+          <a:xfrm>
+            <a:off x="6446520" y="4809744"/>
+            <a:ext cx="256032" cy="256032"/>
+          </a:xfrm>
+          <a:prstGeom prst="rect">
+            <a:avLst/>
+          </a:prstGeom>
+        </p:spPr>
+      </p:pic>
+      <p:sp>
+        <p:nvSpPr>
+          <p:cNvPr id="42" name="Text 33"/>
+          <p:cNvSpPr txBox="1"/>
+          <p:nvPr/>
+        </p:nvSpPr>
+        <p:spPr>
+          <a:xfrm>
+            <a:off x="6812280" y="4782312"/>
+            <a:ext cx="4572000" cy="310896"/>
+          </a:xfrm>
+          <a:prstGeom prst="rect">
+            <a:avLst/>
+          </a:prstGeom>
+          <a:noFill/>
+          <a:ln/>
+        </p:spPr>
+        <p:txBody>
+          <a:bodyPr wrap="square" lIns="0" tIns="0" rIns="0" bIns="0" rtlCol="0" anchor="ctr"/>
+          <a:lstStyle/>
+          <a:p>
+            <a:pPr indent="0" marL="0">
+              <a:buNone/>
+            </a:pPr>
+            <a:r>
+              <a:rPr lang="en-US" sz="1400" dirty="0">
+                <a:solidFill>
+                  <a:schemeClr val="tx1"/>
+                </a:solidFill>
+              </a:rPr>
+              <a:t>found by search in a library of usage snippets</a:t>
+            </a:r>
+            <a:endParaRPr lang="en-US" sz="1400" dirty="0"/>
+          </a:p>
+        </p:txBody>
+      </p:sp>
+      <p:pic>
+        <p:nvPicPr>
+          <p:cNvPr id="43" name="hint source check" descr="/NAS/SJ/POSTECH/nlp/figs/icons/check.png">    </p:cNvPr>
+          <p:cNvPicPr>
+            <a:picLocks noChangeAspect="1"/>
+          </p:cNvPicPr>
+          <p:nvPr/>
+        </p:nvPicPr>
+        <p:blipFill>
+          <a:blip r:embed="rId8"/>
+          <a:stretch>
+            <a:fillRect/>
+          </a:stretch>
+        </p:blipFill>
+        <p:spPr>
+          <a:xfrm>
+            <a:off x="6446520" y="5157216"/>
+            <a:ext cx="256032" cy="256032"/>
+          </a:xfrm>
+          <a:prstGeom prst="rect">
+            <a:avLst/>
+          </a:prstGeom>
+        </p:spPr>
+      </p:pic>
+      <p:sp>
+        <p:nvSpPr>
+          <p:cNvPr id="44" name="Text 34"/>
+          <p:cNvSpPr txBox="1"/>
+          <p:nvPr/>
+        </p:nvSpPr>
+        <p:spPr>
+          <a:xfrm>
+            <a:off x="6812280" y="5129784"/>
+            <a:ext cx="4572000" cy="310896"/>
+          </a:xfrm>
+          <a:prstGeom prst="rect">
+            <a:avLst/>
+          </a:prstGeom>
+          <a:noFill/>
+          <a:ln/>
+        </p:spPr>
+        <p:txBody>
+          <a:bodyPr wrap="square" lIns="0" tIns="0" rIns="0" bIns="0" rtlCol="0" anchor="ctr"/>
+          <a:lstStyle/>
+          <a:p>
+            <a:pPr indent="0" marL="0">
+              <a:buNone/>
+            </a:pPr>
+            <a:r>
+              <a:rPr lang="en-US" sz="1400" dirty="0">
+                <a:solidFill>
+                  <a:schemeClr val="tx1"/>
+                </a:solidFill>
+              </a:rPr>
+              <a:t>the model's own program that passed the check (no human)</a:t>
+            </a:r>
+            <a:endParaRPr lang="en-US" sz="1400" dirty="0"/>
+          </a:p>
+        </p:txBody>
+      </p:sp>
+      <p:sp>
+        <p:nvSpPr>
+          <p:cNvPr id="45" name="Text 35"/>
+          <p:cNvSpPr txBox="1"/>
+          <p:nvPr/>
+        </p:nvSpPr>
+        <p:spPr>
+          <a:xfrm>
             <a:off x="548640" y="5669280"/>
             <a:ext cx="11064240" cy="548640"/>
           </a:xfrm>
@@ -37260,7 +37558,7 @@
                   <a:schemeClr val="tx1"/>
                 </a:solidFill>
               </a:rPr>
-              <a:t>Thinking cannot supply what the model does not know</a:t>
+              <a:t>Thinking cannot supply what the model does not know: give it the hint</a:t>
             </a:r>
             <a:endParaRPr lang="en-US" sz="2000" dirty="0"/>
           </a:p>
@@ -39402,8 +39700,8 @@
         </p:nvSpPr>
         <p:spPr>
           <a:xfrm>
-            <a:off x="7863840" y="987552"/>
-            <a:ext cx="3749040" cy="274320"/>
+            <a:off x="8229600" y="987552"/>
+            <a:ext cx="3383280" cy="274320"/>
           </a:xfrm>
           <a:prstGeom prst="rect">
             <a:avLst/>
@@ -39424,7 +39722,7 @@
                   <a:srgbClr val="7F7F7F"/>
                 </a:solidFill>
               </a:rPr>
-              <a:t>icons under each step: where it is used</a:t>
+              <a:t>icons: where each step is used</a:t>
             </a:r>
             <a:endParaRPr lang="en-US" sz="1400" dirty="0"/>
           </a:p>
@@ -39432,98 +39730,26 @@
       </p:sp>
       <p:sp>
         <p:nvSpPr>
-          <p:cNvPr id="10" name="Text 6"/>
-          <p:cNvSpPr txBox="1"/>
-          <p:nvPr/>
-        </p:nvSpPr>
-        <p:spPr>
-          <a:xfrm>
-            <a:off x="548640" y="1170432"/>
-            <a:ext cx="7863840" cy="365760"/>
-          </a:xfrm>
-          <a:prstGeom prst="rect">
-            <a:avLst/>
-          </a:prstGeom>
-          <a:noFill/>
-          <a:ln/>
-        </p:spPr>
-        <p:txBody>
-          <a:bodyPr wrap="square" lIns="0" tIns="0" rIns="0" bIns="0" rtlCol="0" anchor="ctr"/>
-          <a:lstStyle/>
-          <a:p>
-            <a:pPr indent="0" marL="0">
-              <a:buNone/>
-            </a:pPr>
-            <a:r>
-              <a:rPr lang="en-US" sz="1600" dirty="0">
-                <a:solidFill>
-                  <a:schemeClr val="tx1"/>
-                </a:solidFill>
-              </a:rPr>
-              <a:t>One real problem (Qwen3-8B): minimum cost of X, Y, Z under three limits → 20000</a:t>
-            </a:r>
-            <a:endParaRPr lang="en-US" sz="1600" dirty="0"/>
-          </a:p>
-        </p:txBody>
-      </p:sp>
-      <p:sp>
-        <p:nvSpPr>
-          <p:cNvPr id="11" name="Text 7"/>
-          <p:cNvSpPr txBox="1"/>
-          <p:nvPr/>
-        </p:nvSpPr>
-        <p:spPr>
-          <a:xfrm>
-            <a:off x="548640" y="1627632"/>
-            <a:ext cx="2103120" cy="365760"/>
-          </a:xfrm>
-          <a:prstGeom prst="rect">
-            <a:avLst/>
-          </a:prstGeom>
-          <a:noFill/>
-          <a:ln/>
-        </p:spPr>
-        <p:txBody>
-          <a:bodyPr wrap="square" lIns="0" tIns="0" rIns="0" bIns="0" rtlCol="0" anchor="ctr"/>
-          <a:lstStyle/>
-          <a:p>
-            <a:pPr indent="0" marL="0">
-              <a:buNone/>
-            </a:pPr>
-            <a:r>
-              <a:rPr lang="en-US" sz="1700" b="1" dirty="0">
-                <a:solidFill>
-                  <a:srgbClr val="4472C4"/>
-                </a:solidFill>
-              </a:rPr>
-              <a:t>1 Program</a:t>
-            </a:r>
-            <a:endParaRPr lang="en-US" sz="1700" dirty="0"/>
-          </a:p>
-        </p:txBody>
-      </p:sp>
-      <p:sp>
-        <p:nvSpPr>
-          <p:cNvPr id="12" name="step 1 Program"/>
+          <p:cNvPr id="10" name="box ① program + hint"/>
           <p:cNvSpPr/>
           <p:nvPr/>
         </p:nvSpPr>
         <p:spPr>
           <a:xfrm>
-            <a:off x="548640" y="2011680"/>
-            <a:ext cx="2103120" cy="1325880"/>
+            <a:off x="548640" y="1325880"/>
+            <a:ext cx="2606040" cy="502920"/>
           </a:xfrm>
           <a:prstGeom prst="roundRect">
             <a:avLst>
-              <a:gd name="adj" fmla="val 5517"/>
+              <a:gd name="adj" fmla="val 10909"/>
             </a:avLst>
           </a:prstGeom>
           <a:solidFill>
-            <a:srgbClr val="FADBD8"/>
+            <a:srgbClr val="F2F2F2"/>
           </a:solidFill>
-          <a:ln w="12700">
+          <a:ln w="9525">
             <a:solidFill>
-              <a:srgbClr val="C00000"/>
+              <a:srgbClr val="BFBFBF"/>
             </a:solidFill>
             <a:prstDash val="solid"/>
           </a:ln>
@@ -39531,14 +39757,14 @@
       </p:sp>
       <p:sp>
         <p:nvSpPr>
-          <p:cNvPr id="13" name="Text 9"/>
+          <p:cNvPr id="11" name="Text 7"/>
           <p:cNvSpPr txBox="1"/>
           <p:nvPr/>
         </p:nvSpPr>
         <p:spPr>
           <a:xfrm>
-            <a:off x="621792" y="2057400"/>
-            <a:ext cx="1956816" cy="566928"/>
+            <a:off x="621792" y="1325880"/>
+            <a:ext cx="2459736" cy="502920"/>
           </a:xfrm>
           <a:prstGeom prst="rect">
             <a:avLst/>
@@ -39554,83 +39780,27 @@
               <a:buNone/>
             </a:pPr>
             <a:r>
-              <a:rPr lang="en-US" sz="1400" b="1" dirty="0">
-                <a:solidFill>
-                  <a:srgbClr val="C00000"/>
-                </a:solidFill>
-                <a:latin typeface="Courier New" pitchFamily="34" charset="0"/>
-                <a:ea typeface="Courier New" pitchFamily="34" charset="-122"/>
-                <a:cs typeface="Courier New" pitchFamily="34" charset="-120"/>
-              </a:rPr>
-              <a:t>Objective()</a:t>
-            </a:r>
-            <a:endParaRPr lang="en-US" sz="1400" dirty="0"/>
-          </a:p>
-          <a:p>
-            <a:pPr algn="ctr" indent="0" marL="0">
-              <a:buNone/>
-            </a:pPr>
-            <a:r>
-              <a:rPr lang="en-US" sz="1400" b="1" dirty="0">
-                <a:solidFill>
-                  <a:srgbClr val="C00000"/>
-                </a:solidFill>
-                <a:latin typeface="Courier New" pitchFamily="34" charset="0"/>
-                <a:ea typeface="Courier New" pitchFamily="34" charset="-122"/>
-                <a:cs typeface="Courier New" pitchFamily="34" charset="-120"/>
-              </a:rPr>
-              <a:t>.Minimize()</a:t>
-            </a:r>
-            <a:endParaRPr lang="en-US" sz="1400" dirty="0"/>
-          </a:p>
-        </p:txBody>
-      </p:sp>
-      <p:sp>
-        <p:nvSpPr>
-          <p:cNvPr id="14" name="Text 10"/>
-          <p:cNvSpPr txBox="1"/>
-          <p:nvPr/>
-        </p:nvSpPr>
-        <p:spPr>
-          <a:xfrm>
-            <a:off x="640080" y="2651760"/>
-            <a:ext cx="1920240" cy="658368"/>
-          </a:xfrm>
-          <a:prstGeom prst="rect">
-            <a:avLst/>
-          </a:prstGeom>
-          <a:noFill/>
-          <a:ln/>
-        </p:spPr>
-        <p:txBody>
-          <a:bodyPr wrap="square" lIns="0" tIns="0" rIns="0" bIns="0" rtlCol="0" anchor="t"/>
-          <a:lstStyle/>
-          <a:p>
-            <a:pPr algn="ctr" indent="0" marL="0">
-              <a:buNone/>
-            </a:pPr>
-            <a:r>
-              <a:rPr lang="en-US" sz="1400" dirty="0">
+              <a:rPr lang="en-US" sz="1500" b="1" dirty="0">
                 <a:solidFill>
                   <a:schemeClr val="tx1"/>
                 </a:solidFill>
               </a:rPr>
-              <a:t>✗ crash, no hint</a:t>
-            </a:r>
-            <a:endParaRPr lang="en-US" sz="1400" dirty="0"/>
-          </a:p>
-        </p:txBody>
-      </p:sp>
-      <p:sp>
-        <p:nvSpPr>
-          <p:cNvPr id="15" name="Shape 11"/>
+              <a:t>① program + hint</a:t>
+            </a:r>
+            <a:endParaRPr lang="en-US" sz="1500" dirty="0"/>
+          </a:p>
+        </p:txBody>
+      </p:sp>
+      <p:sp>
+        <p:nvSpPr>
+          <p:cNvPr id="12" name="Shape 8"/>
           <p:cNvSpPr/>
           <p:nvPr/>
         </p:nvSpPr>
         <p:spPr>
           <a:xfrm>
-            <a:off x="2651760" y="2670048"/>
-            <a:ext cx="137160" cy="0"/>
+            <a:off x="3154680" y="1572768"/>
+            <a:ext cx="201168" cy="0"/>
           </a:xfrm>
           <a:prstGeom prst="line">
             <a:avLst/>
@@ -39647,7 +39817,7 @@
       </p:sp>
       <p:pic>
         <p:nvPicPr>
-          <p:cNvPr id="16" name="step 1 used on shapes" descr="/NAS/SJ/POSTECH/nlp/figs/icons/shapes.png">    </p:cNvPr>
+          <p:cNvPr id="13" name="step 1 used on shapes" descr="/NAS/SJ/POSTECH/nlp/figs/icons/shapes.png">    </p:cNvPr>
           <p:cNvPicPr>
             <a:picLocks noChangeAspect="1"/>
           </p:cNvPicPr>
@@ -39661,8 +39831,8 @@
         </p:blipFill>
         <p:spPr>
           <a:xfrm>
-            <a:off x="1042416" y="3401568"/>
-            <a:ext cx="237744" cy="237744"/>
+            <a:off x="1335024" y="1892808"/>
+            <a:ext cx="219456" cy="219456"/>
           </a:xfrm>
           <a:prstGeom prst="rect">
             <a:avLst/>
@@ -39671,22 +39841,24 @@
       </p:pic>
       <p:pic>
         <p:nvPicPr>
-          <p:cNvPr id="17" name="step 1 used on trophy" descr="/NAS/SJ/POSTECH/nlp/figs/icons/trophy.png">    </p:cNvPr>
+          <p:cNvPr id="14" name="step 1 not needed on trophy" descr="/NAS/SJ/POSTECH/nlp/figs/icons/trophy.png">    </p:cNvPr>
           <p:cNvPicPr>
             <a:picLocks noChangeAspect="1"/>
           </p:cNvPicPr>
           <p:nvPr/>
         </p:nvPicPr>
         <p:blipFill>
-          <a:blip r:embed="rId4"/>
+          <a:blip r:embed="rId4">
+            <a:alphaModFix amt="18000"/>
+          </a:blip>
           <a:stretch>
             <a:fillRect/>
           </a:stretch>
         </p:blipFill>
         <p:spPr>
           <a:xfrm>
-            <a:off x="1335024" y="3401568"/>
-            <a:ext cx="237744" cy="237744"/>
+            <a:off x="1609344" y="1892808"/>
+            <a:ext cx="219456" cy="219456"/>
           </a:xfrm>
           <a:prstGeom prst="rect">
             <a:avLst/>
@@ -39695,7 +39867,7 @@
       </p:pic>
       <p:pic>
         <p:nvPicPr>
-          <p:cNvPr id="18" name="step 1 used on truck" descr="/NAS/SJ/POSTECH/nlp/figs/icons/truck.png">    </p:cNvPr>
+          <p:cNvPr id="15" name="step 1 used on truck" descr="/NAS/SJ/POSTECH/nlp/figs/icons/truck.png">    </p:cNvPr>
           <p:cNvPicPr>
             <a:picLocks noChangeAspect="1"/>
           </p:cNvPicPr>
@@ -39709,8 +39881,8 @@
         </p:blipFill>
         <p:spPr>
           <a:xfrm>
-            <a:off x="1627632" y="3401568"/>
-            <a:ext cx="237744" cy="237744"/>
+            <a:off x="1883664" y="1892808"/>
+            <a:ext cx="219456" cy="219456"/>
           </a:xfrm>
           <a:prstGeom prst="rect">
             <a:avLst/>
@@ -39719,7 +39891,7 @@
       </p:pic>
       <p:pic>
         <p:nvPicPr>
-          <p:cNvPr id="19" name="step 1 used on calc" descr="/NAS/SJ/POSTECH/nlp/figs/icons/calc.png">    </p:cNvPr>
+          <p:cNvPr id="16" name="step 1 used on calc" descr="/NAS/SJ/POSTECH/nlp/figs/icons/calc.png">    </p:cNvPr>
           <p:cNvPicPr>
             <a:picLocks noChangeAspect="1"/>
           </p:cNvPicPr>
@@ -39733,8 +39905,8 @@
         </p:blipFill>
         <p:spPr>
           <a:xfrm>
-            <a:off x="1920240" y="3401568"/>
-            <a:ext cx="237744" cy="237744"/>
+            <a:off x="2157984" y="1892808"/>
+            <a:ext cx="219456" cy="219456"/>
           </a:xfrm>
           <a:prstGeom prst="rect">
             <a:avLst/>
@@ -39743,62 +39915,26 @@
       </p:pic>
       <p:sp>
         <p:nvSpPr>
-          <p:cNvPr id="20" name="Text 12"/>
-          <p:cNvSpPr txBox="1"/>
-          <p:nvPr/>
-        </p:nvSpPr>
-        <p:spPr>
-          <a:xfrm>
-            <a:off x="2788920" y="1627632"/>
-            <a:ext cx="2103120" cy="365760"/>
-          </a:xfrm>
-          <a:prstGeom prst="rect">
-            <a:avLst/>
-          </a:prstGeom>
-          <a:noFill/>
-          <a:ln/>
-        </p:spPr>
-        <p:txBody>
-          <a:bodyPr wrap="square" lIns="0" tIns="0" rIns="0" bIns="0" rtlCol="0" anchor="ctr"/>
-          <a:lstStyle/>
-          <a:p>
-            <a:pPr indent="0" marL="0">
-              <a:buNone/>
-            </a:pPr>
-            <a:r>
-              <a:rPr lang="en-US" sz="1700" b="1" dirty="0">
-                <a:solidFill>
-                  <a:srgbClr val="4472C4"/>
-                </a:solidFill>
-              </a:rPr>
-              <a:t>2 + Hint</a:t>
-            </a:r>
-            <a:endParaRPr lang="en-US" sz="1700" dirty="0"/>
-          </a:p>
-        </p:txBody>
-      </p:sp>
-      <p:sp>
-        <p:nvSpPr>
-          <p:cNvPr id="21" name="step 2 + Fact"/>
+          <p:cNvPr id="17" name="box ② free check"/>
           <p:cNvSpPr/>
           <p:nvPr/>
         </p:nvSpPr>
         <p:spPr>
           <a:xfrm>
-            <a:off x="2788920" y="2011680"/>
-            <a:ext cx="2103120" cy="1325880"/>
+            <a:off x="3355848" y="1325880"/>
+            <a:ext cx="2606040" cy="502920"/>
           </a:xfrm>
           <a:prstGeom prst="roundRect">
             <a:avLst>
-              <a:gd name="adj" fmla="val 5517"/>
+              <a:gd name="adj" fmla="val 10909"/>
             </a:avLst>
           </a:prstGeom>
           <a:solidFill>
-            <a:srgbClr val="E2F0D9"/>
+            <a:srgbClr val="DEEBF7"/>
           </a:solidFill>
-          <a:ln w="12700">
+          <a:ln w="9525">
             <a:solidFill>
-              <a:srgbClr val="38761D"/>
+              <a:srgbClr val="BFBFBF"/>
             </a:solidFill>
             <a:prstDash val="solid"/>
           </a:ln>
@@ -39806,14 +39942,14 @@
       </p:sp>
       <p:sp>
         <p:nvSpPr>
-          <p:cNvPr id="22" name="Text 14"/>
+          <p:cNvPr id="18" name="Text 10"/>
           <p:cNvSpPr txBox="1"/>
           <p:nvPr/>
         </p:nvSpPr>
         <p:spPr>
           <a:xfrm>
-            <a:off x="2862072" y="2057400"/>
-            <a:ext cx="1956816" cy="566928"/>
+            <a:off x="3429000" y="1325880"/>
+            <a:ext cx="2459736" cy="502920"/>
           </a:xfrm>
           <a:prstGeom prst="rect">
             <a:avLst/>
@@ -39829,83 +39965,27 @@
               <a:buNone/>
             </a:pPr>
             <a:r>
-              <a:rPr lang="en-US" sz="1400" b="1" dirty="0">
-                <a:solidFill>
-                  <a:srgbClr val="38761D"/>
-                </a:solidFill>
-                <a:latin typeface="Courier New" pitchFamily="34" charset="0"/>
-                <a:ea typeface="Courier New" pitchFamily="34" charset="-122"/>
-                <a:cs typeface="Courier New" pitchFamily="34" charset="-120"/>
-              </a:rPr>
-              <a:t>solver</a:t>
-            </a:r>
-            <a:endParaRPr lang="en-US" sz="1400" dirty="0"/>
-          </a:p>
-          <a:p>
-            <a:pPr algn="ctr" indent="0" marL="0">
-              <a:buNone/>
-            </a:pPr>
-            <a:r>
-              <a:rPr lang="en-US" sz="1400" b="1" dirty="0">
-                <a:solidFill>
-                  <a:srgbClr val="38761D"/>
-                </a:solidFill>
-                <a:latin typeface="Courier New" pitchFamily="34" charset="0"/>
-                <a:ea typeface="Courier New" pitchFamily="34" charset="-122"/>
-                <a:cs typeface="Courier New" pitchFamily="34" charset="-120"/>
-              </a:rPr>
-              <a:t>.Minimize(...)</a:t>
-            </a:r>
-            <a:endParaRPr lang="en-US" sz="1400" dirty="0"/>
-          </a:p>
-        </p:txBody>
-      </p:sp>
-      <p:sp>
-        <p:nvSpPr>
-          <p:cNvPr id="23" name="Text 15"/>
-          <p:cNvSpPr txBox="1"/>
-          <p:nvPr/>
-        </p:nvSpPr>
-        <p:spPr>
-          <a:xfrm>
-            <a:off x="2880360" y="2651760"/>
-            <a:ext cx="1920240" cy="658368"/>
-          </a:xfrm>
-          <a:prstGeom prst="rect">
-            <a:avLst/>
-          </a:prstGeom>
-          <a:noFill/>
-          <a:ln/>
-        </p:spPr>
-        <p:txBody>
-          <a:bodyPr wrap="square" lIns="0" tIns="0" rIns="0" bIns="0" rtlCol="0" anchor="t"/>
-          <a:lstStyle/>
-          <a:p>
-            <a:pPr algn="ctr" indent="0" marL="0">
-              <a:buNone/>
-            </a:pPr>
-            <a:r>
-              <a:rPr lang="en-US" sz="1400" dirty="0">
-                <a:solidFill>
-                  <a:schemeClr val="tx1"/>
-                </a:solidFill>
-              </a:rPr>
-              <a:t>found automatically: its own checked program</a:t>
-            </a:r>
-            <a:endParaRPr lang="en-US" sz="1400" dirty="0"/>
-          </a:p>
-        </p:txBody>
-      </p:sp>
-      <p:sp>
-        <p:nvSpPr>
-          <p:cNvPr id="24" name="Shape 16"/>
+              <a:rPr lang="en-US" sz="1500" b="1" dirty="0">
+                <a:solidFill>
+                  <a:srgbClr val="1F3864"/>
+                </a:solidFill>
+              </a:rPr>
+              <a:t>② free check</a:t>
+            </a:r>
+            <a:endParaRPr lang="en-US" sz="1500" dirty="0"/>
+          </a:p>
+        </p:txBody>
+      </p:sp>
+      <p:sp>
+        <p:nvSpPr>
+          <p:cNvPr id="19" name="Shape 11"/>
           <p:cNvSpPr/>
           <p:nvPr/>
         </p:nvSpPr>
         <p:spPr>
           <a:xfrm>
-            <a:off x="4892040" y="2670048"/>
-            <a:ext cx="137160" cy="0"/>
+            <a:off x="5961888" y="1572768"/>
+            <a:ext cx="201168" cy="0"/>
           </a:xfrm>
           <a:prstGeom prst="line">
             <a:avLst/>
@@ -39922,7 +40002,7 @@
       </p:sp>
       <p:pic>
         <p:nvPicPr>
-          <p:cNvPr id="25" name="step 2 used on shapes" descr="/NAS/SJ/POSTECH/nlp/figs/icons/shapes.png">    </p:cNvPr>
+          <p:cNvPr id="20" name="step 2 used on shapes" descr="/NAS/SJ/POSTECH/nlp/figs/icons/shapes.png">    </p:cNvPr>
           <p:cNvPicPr>
             <a:picLocks noChangeAspect="1"/>
           </p:cNvPicPr>
@@ -39936,8 +40016,8 @@
         </p:blipFill>
         <p:spPr>
           <a:xfrm>
-            <a:off x="3282696" y="3401568"/>
-            <a:ext cx="237744" cy="237744"/>
+            <a:off x="4142232" y="1892808"/>
+            <a:ext cx="219456" cy="219456"/>
           </a:xfrm>
           <a:prstGeom prst="rect">
             <a:avLst/>
@@ -39946,24 +40026,22 @@
       </p:pic>
       <p:pic>
         <p:nvPicPr>
-          <p:cNvPr id="26" name="step 2 not needed on trophy" descr="/NAS/SJ/POSTECH/nlp/figs/icons/trophy.png">    </p:cNvPr>
+          <p:cNvPr id="21" name="step 2 used on trophy" descr="/NAS/SJ/POSTECH/nlp/figs/icons/trophy.png">    </p:cNvPr>
           <p:cNvPicPr>
             <a:picLocks noChangeAspect="1"/>
           </p:cNvPicPr>
           <p:nvPr/>
         </p:nvPicPr>
         <p:blipFill>
-          <a:blip r:embed="rId8">
-            <a:alphaModFix amt="18000"/>
-          </a:blip>
+          <a:blip r:embed="rId8"/>
           <a:stretch>
             <a:fillRect/>
           </a:stretch>
         </p:blipFill>
         <p:spPr>
           <a:xfrm>
-            <a:off x="3575304" y="3401568"/>
-            <a:ext cx="237744" cy="237744"/>
+            <a:off x="4416552" y="1892808"/>
+            <a:ext cx="219456" cy="219456"/>
           </a:xfrm>
           <a:prstGeom prst="rect">
             <a:avLst/>
@@ -39972,7 +40050,7 @@
       </p:pic>
       <p:pic>
         <p:nvPicPr>
-          <p:cNvPr id="27" name="step 2 used on truck" descr="/NAS/SJ/POSTECH/nlp/figs/icons/truck.png">    </p:cNvPr>
+          <p:cNvPr id="22" name="step 2 used on truck" descr="/NAS/SJ/POSTECH/nlp/figs/icons/truck.png">    </p:cNvPr>
           <p:cNvPicPr>
             <a:picLocks noChangeAspect="1"/>
           </p:cNvPicPr>
@@ -39986,8 +40064,8 @@
         </p:blipFill>
         <p:spPr>
           <a:xfrm>
-            <a:off x="3867912" y="3401568"/>
-            <a:ext cx="237744" cy="237744"/>
+            <a:off x="4690872" y="1892808"/>
+            <a:ext cx="219456" cy="219456"/>
           </a:xfrm>
           <a:prstGeom prst="rect">
             <a:avLst/>
@@ -39996,7 +40074,7 @@
       </p:pic>
       <p:pic>
         <p:nvPicPr>
-          <p:cNvPr id="28" name="step 2 used on calc" descr="/NAS/SJ/POSTECH/nlp/figs/icons/calc.png">    </p:cNvPr>
+          <p:cNvPr id="23" name="step 2 used on calc" descr="/NAS/SJ/POSTECH/nlp/figs/icons/calc.png">    </p:cNvPr>
           <p:cNvPicPr>
             <a:picLocks noChangeAspect="1"/>
           </p:cNvPicPr>
@@ -40010,8 +40088,8 @@
         </p:blipFill>
         <p:spPr>
           <a:xfrm>
-            <a:off x="4160520" y="3401568"/>
-            <a:ext cx="237744" cy="237744"/>
+            <a:off x="4965192" y="1892808"/>
+            <a:ext cx="219456" cy="219456"/>
           </a:xfrm>
           <a:prstGeom prst="rect">
             <a:avLst/>
@@ -40020,62 +40098,26 @@
       </p:pic>
       <p:sp>
         <p:nvSpPr>
-          <p:cNvPr id="29" name="Text 17"/>
-          <p:cNvSpPr txBox="1"/>
-          <p:nvPr/>
-        </p:nvSpPr>
-        <p:spPr>
-          <a:xfrm>
-            <a:off x="5029200" y="1627632"/>
-            <a:ext cx="2103120" cy="365760"/>
-          </a:xfrm>
-          <a:prstGeom prst="rect">
-            <a:avLst/>
-          </a:prstGeom>
-          <a:noFill/>
-          <a:ln/>
-        </p:spPr>
-        <p:txBody>
-          <a:bodyPr wrap="square" lIns="0" tIns="0" rIns="0" bIns="0" rtlCol="0" anchor="ctr"/>
-          <a:lstStyle/>
-          <a:p>
-            <a:pPr indent="0" marL="0">
-              <a:buNone/>
-            </a:pPr>
-            <a:r>
-              <a:rPr lang="en-US" sz="1700" b="1" dirty="0">
-                <a:solidFill>
-                  <a:srgbClr val="4472C4"/>
-                </a:solidFill>
-              </a:rPr>
-              <a:t>3 Free check</a:t>
-            </a:r>
-            <a:endParaRPr lang="en-US" sz="1700" dirty="0"/>
-          </a:p>
-        </p:txBody>
-      </p:sp>
-      <p:sp>
-        <p:nvSpPr>
-          <p:cNvPr id="30" name="step 3 Free check"/>
+          <p:cNvPr id="24" name="box ③ pass: submit · fai"/>
           <p:cNvSpPr/>
           <p:nvPr/>
         </p:nvSpPr>
         <p:spPr>
           <a:xfrm>
-            <a:off x="5029200" y="2011680"/>
-            <a:ext cx="2103120" cy="1325880"/>
+            <a:off x="6163056" y="1325880"/>
+            <a:ext cx="2606040" cy="502920"/>
           </a:xfrm>
           <a:prstGeom prst="roundRect">
             <a:avLst>
-              <a:gd name="adj" fmla="val 5517"/>
+              <a:gd name="adj" fmla="val 10909"/>
             </a:avLst>
           </a:prstGeom>
           <a:solidFill>
             <a:srgbClr val="E2F0D9"/>
           </a:solidFill>
-          <a:ln w="12700">
+          <a:ln w="9525">
             <a:solidFill>
-              <a:srgbClr val="38761D"/>
+              <a:srgbClr val="BFBFBF"/>
             </a:solidFill>
             <a:prstDash val="solid"/>
           </a:ln>
@@ -40083,14 +40125,14 @@
       </p:sp>
       <p:sp>
         <p:nvSpPr>
-          <p:cNvPr id="31" name="Text 19"/>
+          <p:cNvPr id="25" name="Text 13"/>
           <p:cNvSpPr txBox="1"/>
           <p:nvPr/>
         </p:nvSpPr>
         <p:spPr>
           <a:xfrm>
-            <a:off x="5102352" y="2057400"/>
-            <a:ext cx="1956816" cy="566928"/>
+            <a:off x="6236208" y="1325880"/>
+            <a:ext cx="2459736" cy="502920"/>
           </a:xfrm>
           <a:prstGeom prst="rect">
             <a:avLst/>
@@ -40106,66 +40148,27 @@
               <a:buNone/>
             </a:pPr>
             <a:r>
-              <a:rPr lang="en-US" sz="1800" b="1" dirty="0">
+              <a:rPr lang="en-US" sz="1500" b="1" dirty="0">
                 <a:solidFill>
                   <a:srgbClr val="38761D"/>
                 </a:solidFill>
-                <a:latin typeface="Calibri" pitchFamily="34" charset="0"/>
-                <a:ea typeface="Calibri" pitchFamily="34" charset="-122"/>
-                <a:cs typeface="Calibri" pitchFamily="34" charset="-120"/>
-              </a:rPr>
-              <a:t>20000 = 20000</a:t>
-            </a:r>
-            <a:endParaRPr lang="en-US" sz="1800" dirty="0"/>
-          </a:p>
-        </p:txBody>
-      </p:sp>
-      <p:sp>
-        <p:nvSpPr>
-          <p:cNvPr id="32" name="Text 20"/>
-          <p:cNvSpPr txBox="1"/>
-          <p:nvPr/>
-        </p:nvSpPr>
-        <p:spPr>
-          <a:xfrm>
-            <a:off x="5120640" y="2651760"/>
-            <a:ext cx="1920240" cy="658368"/>
-          </a:xfrm>
-          <a:prstGeom prst="rect">
-            <a:avLst/>
-          </a:prstGeom>
-          <a:noFill/>
-          <a:ln/>
-        </p:spPr>
-        <p:txBody>
-          <a:bodyPr wrap="square" lIns="0" tIns="0" rIns="0" bIns="0" rtlCol="0" anchor="t"/>
-          <a:lstStyle/>
-          <a:p>
-            <a:pPr algn="ctr" indent="0" marL="0">
-              <a:buNone/>
-            </a:pPr>
-            <a:r>
-              <a:rPr lang="en-US" sz="1400" dirty="0">
-                <a:solidFill>
-                  <a:schemeClr val="tx1"/>
-                </a:solidFill>
-              </a:rPr>
-              <a:t>a second version agrees</a:t>
-            </a:r>
-            <a:endParaRPr lang="en-US" sz="1400" dirty="0"/>
-          </a:p>
-        </p:txBody>
-      </p:sp>
-      <p:sp>
-        <p:nvSpPr>
-          <p:cNvPr id="33" name="Shape 21"/>
+              </a:rPr>
+              <a:t>③ pass: submit · fail: think</a:t>
+            </a:r>
+            <a:endParaRPr lang="en-US" sz="1500" dirty="0"/>
+          </a:p>
+        </p:txBody>
+      </p:sp>
+      <p:sp>
+        <p:nvSpPr>
+          <p:cNvPr id="26" name="Shape 14"/>
           <p:cNvSpPr/>
           <p:nvPr/>
         </p:nvSpPr>
         <p:spPr>
           <a:xfrm>
-            <a:off x="7132320" y="2670048"/>
-            <a:ext cx="137160" cy="0"/>
+            <a:off x="8769096" y="1572768"/>
+            <a:ext cx="201168" cy="0"/>
           </a:xfrm>
           <a:prstGeom prst="line">
             <a:avLst/>
@@ -40182,7 +40185,7 @@
       </p:sp>
       <p:pic>
         <p:nvPicPr>
-          <p:cNvPr id="34" name="step 3 used on shapes" descr="/NAS/SJ/POSTECH/nlp/figs/icons/shapes.png">    </p:cNvPr>
+          <p:cNvPr id="27" name="step 3 used on shapes" descr="/NAS/SJ/POSTECH/nlp/figs/icons/shapes.png">    </p:cNvPr>
           <p:cNvPicPr>
             <a:picLocks noChangeAspect="1"/>
           </p:cNvPicPr>
@@ -40196,8 +40199,8 @@
         </p:blipFill>
         <p:spPr>
           <a:xfrm>
-            <a:off x="5522976" y="3401568"/>
-            <a:ext cx="237744" cy="237744"/>
+            <a:off x="6949440" y="1892808"/>
+            <a:ext cx="219456" cy="219456"/>
           </a:xfrm>
           <a:prstGeom prst="rect">
             <a:avLst/>
@@ -40206,7 +40209,7 @@
       </p:pic>
       <p:pic>
         <p:nvPicPr>
-          <p:cNvPr id="35" name="step 3 used on trophy" descr="/NAS/SJ/POSTECH/nlp/figs/icons/trophy.png">    </p:cNvPr>
+          <p:cNvPr id="28" name="step 3 used on trophy" descr="/NAS/SJ/POSTECH/nlp/figs/icons/trophy.png">    </p:cNvPr>
           <p:cNvPicPr>
             <a:picLocks noChangeAspect="1"/>
           </p:cNvPicPr>
@@ -40220,8 +40223,8 @@
         </p:blipFill>
         <p:spPr>
           <a:xfrm>
-            <a:off x="5815584" y="3401568"/>
-            <a:ext cx="237744" cy="237744"/>
+            <a:off x="7223760" y="1892808"/>
+            <a:ext cx="219456" cy="219456"/>
           </a:xfrm>
           <a:prstGeom prst="rect">
             <a:avLst/>
@@ -40230,7 +40233,7 @@
       </p:pic>
       <p:pic>
         <p:nvPicPr>
-          <p:cNvPr id="36" name="step 3 used on truck" descr="/NAS/SJ/POSTECH/nlp/figs/icons/truck.png">    </p:cNvPr>
+          <p:cNvPr id="29" name="step 3 used on truck" descr="/NAS/SJ/POSTECH/nlp/figs/icons/truck.png">    </p:cNvPr>
           <p:cNvPicPr>
             <a:picLocks noChangeAspect="1"/>
           </p:cNvPicPr>
@@ -40244,8 +40247,8 @@
         </p:blipFill>
         <p:spPr>
           <a:xfrm>
-            <a:off x="6108192" y="3401568"/>
-            <a:ext cx="237744" cy="237744"/>
+            <a:off x="7498080" y="1892808"/>
+            <a:ext cx="219456" cy="219456"/>
           </a:xfrm>
           <a:prstGeom prst="rect">
             <a:avLst/>
@@ -40254,7 +40257,7 @@
       </p:pic>
       <p:pic>
         <p:nvPicPr>
-          <p:cNvPr id="37" name="step 3 used on calc" descr="/NAS/SJ/POSTECH/nlp/figs/icons/calc.png">    </p:cNvPr>
+          <p:cNvPr id="30" name="step 3 used on calc" descr="/NAS/SJ/POSTECH/nlp/figs/icons/calc.png">    </p:cNvPr>
           <p:cNvPicPr>
             <a:picLocks noChangeAspect="1"/>
           </p:cNvPicPr>
@@ -40268,8 +40271,8 @@
         </p:blipFill>
         <p:spPr>
           <a:xfrm>
-            <a:off x="6400800" y="3401568"/>
-            <a:ext cx="237744" cy="237744"/>
+            <a:off x="7772400" y="1892808"/>
+            <a:ext cx="219456" cy="219456"/>
           </a:xfrm>
           <a:prstGeom prst="rect">
             <a:avLst/>
@@ -40278,62 +40281,26 @@
       </p:pic>
       <p:sp>
         <p:nvSpPr>
-          <p:cNvPr id="38" name="Text 22"/>
-          <p:cNvSpPr txBox="1"/>
-          <p:nvPr/>
-        </p:nvSpPr>
-        <p:spPr>
-          <a:xfrm>
-            <a:off x="7269480" y="1627632"/>
-            <a:ext cx="2103120" cy="365760"/>
-          </a:xfrm>
-          <a:prstGeom prst="rect">
-            <a:avLst/>
-          </a:prstGeom>
-          <a:noFill/>
-          <a:ln/>
-        </p:spPr>
-        <p:txBody>
-          <a:bodyPr wrap="square" lIns="0" tIns="0" rIns="0" bIns="0" rtlCol="0" anchor="ctr"/>
-          <a:lstStyle/>
-          <a:p>
-            <a:pPr indent="0" marL="0">
-              <a:buNone/>
-            </a:pPr>
-            <a:r>
-              <a:rPr lang="en-US" sz="1700" b="1" dirty="0">
-                <a:solidFill>
-                  <a:srgbClr val="4472C4"/>
-                </a:solidFill>
-              </a:rPr>
-              <a:t>4 Think?</a:t>
-            </a:r>
-            <a:endParaRPr lang="en-US" sz="1700" dirty="0"/>
-          </a:p>
-        </p:txBody>
-      </p:sp>
-      <p:sp>
-        <p:nvSpPr>
-          <p:cNvPr id="39" name="step 4 Think?"/>
+          <p:cNvPr id="31" name="box ④ same type again: r"/>
           <p:cNvSpPr/>
           <p:nvPr/>
         </p:nvSpPr>
         <p:spPr>
           <a:xfrm>
-            <a:off x="7269480" y="2011680"/>
-            <a:ext cx="2103120" cy="1325880"/>
+            <a:off x="8970264" y="1325880"/>
+            <a:ext cx="2606040" cy="502920"/>
           </a:xfrm>
           <a:prstGeom prst="roundRect">
             <a:avLst>
-              <a:gd name="adj" fmla="val 5517"/>
+              <a:gd name="adj" fmla="val 10909"/>
             </a:avLst>
           </a:prstGeom>
           <a:solidFill>
             <a:srgbClr val="F2F2F2"/>
           </a:solidFill>
-          <a:ln w="12700">
+          <a:ln w="9525">
             <a:solidFill>
-              <a:srgbClr val="7F7F7F"/>
+              <a:srgbClr val="BFBFBF"/>
             </a:solidFill>
             <a:prstDash val="solid"/>
           </a:ln>
@@ -40341,14 +40308,14 @@
       </p:sp>
       <p:sp>
         <p:nvSpPr>
-          <p:cNvPr id="40" name="Text 24"/>
+          <p:cNvPr id="32" name="Text 16"/>
           <p:cNvSpPr txBox="1"/>
           <p:nvPr/>
         </p:nvSpPr>
         <p:spPr>
           <a:xfrm>
-            <a:off x="7342632" y="2057400"/>
-            <a:ext cx="1956816" cy="566928"/>
+            <a:off x="9043416" y="1325880"/>
+            <a:ext cx="2459736" cy="502920"/>
           </a:xfrm>
           <a:prstGeom prst="rect">
             <a:avLst/>
@@ -40364,98 +40331,37 @@
               <a:buNone/>
             </a:pPr>
             <a:r>
-              <a:rPr lang="en-US" sz="1800" b="1" dirty="0">
-                <a:solidFill>
-                  <a:srgbClr val="7F7F7F"/>
-                </a:solidFill>
-                <a:latin typeface="Calibri" pitchFamily="34" charset="0"/>
-                <a:ea typeface="Calibri" pitchFamily="34" charset="-122"/>
-                <a:cs typeface="Calibri" pitchFamily="34" charset="-120"/>
-              </a:rPr>
-              <a:t>skipped</a:t>
-            </a:r>
-            <a:endParaRPr lang="en-US" sz="1800" dirty="0"/>
-          </a:p>
-        </p:txBody>
-      </p:sp>
-      <p:sp>
-        <p:nvSpPr>
-          <p:cNvPr id="41" name="Text 25"/>
-          <p:cNvSpPr txBox="1"/>
-          <p:nvPr/>
-        </p:nvSpPr>
-        <p:spPr>
-          <a:xfrm>
-            <a:off x="7360920" y="2651760"/>
-            <a:ext cx="1920240" cy="658368"/>
-          </a:xfrm>
-          <a:prstGeom prst="rect">
-            <a:avLst/>
-          </a:prstGeom>
-          <a:noFill/>
-          <a:ln/>
-        </p:spPr>
-        <p:txBody>
-          <a:bodyPr wrap="square" lIns="0" tIns="0" rIns="0" bIns="0" rtlCol="0" anchor="t"/>
-          <a:lstStyle/>
-          <a:p>
-            <a:pPr algn="ctr" indent="0" marL="0">
-              <a:buNone/>
-            </a:pPr>
-            <a:r>
-              <a:rPr lang="en-US" sz="1400" dirty="0">
+              <a:rPr lang="en-US" sz="1500" b="1" dirty="0">
                 <a:solidFill>
                   <a:schemeClr val="tx1"/>
                 </a:solidFill>
               </a:rPr>
-              <a:t>think only if the two differ</a:t>
-            </a:r>
-            <a:endParaRPr lang="en-US" sz="1400" dirty="0"/>
-          </a:p>
-        </p:txBody>
-      </p:sp>
-      <p:sp>
-        <p:nvSpPr>
-          <p:cNvPr id="42" name="Shape 26"/>
-          <p:cNvSpPr/>
-          <p:nvPr/>
-        </p:nvSpPr>
-        <p:spPr>
-          <a:xfrm>
-            <a:off x="9372600" y="2670048"/>
-            <a:ext cx="137160" cy="0"/>
-          </a:xfrm>
-          <a:prstGeom prst="line">
-            <a:avLst/>
-          </a:prstGeom>
-          <a:noFill/>
-          <a:ln w="25400">
-            <a:solidFill>
-              <a:srgbClr val="7F7F7F"/>
-            </a:solidFill>
-            <a:prstDash val="solid"/>
-            <a:tailEnd type="triangle"/>
-          </a:ln>
-        </p:spPr>
+              <a:t>④ same type again: reuse it</a:t>
+            </a:r>
+            <a:endParaRPr lang="en-US" sz="1500" dirty="0"/>
+          </a:p>
+        </p:txBody>
       </p:sp>
       <p:pic>
         <p:nvPicPr>
-          <p:cNvPr id="43" name="step 4 used on shapes" descr="/NAS/SJ/POSTECH/nlp/figs/icons/shapes.png">    </p:cNvPr>
+          <p:cNvPr id="33" name="step 4 not needed on shapes" descr="/NAS/SJ/POSTECH/nlp/figs/icons/shapes.png">    </p:cNvPr>
           <p:cNvPicPr>
             <a:picLocks noChangeAspect="1"/>
           </p:cNvPicPr>
           <p:nvPr/>
         </p:nvPicPr>
         <p:blipFill>
-          <a:blip r:embed="rId15"/>
+          <a:blip r:embed="rId15">
+            <a:alphaModFix amt="18000"/>
+          </a:blip>
           <a:stretch>
             <a:fillRect/>
           </a:stretch>
         </p:blipFill>
         <p:spPr>
           <a:xfrm>
-            <a:off x="7763256" y="3401568"/>
-            <a:ext cx="237744" cy="237744"/>
+            <a:off x="9756648" y="1892808"/>
+            <a:ext cx="219456" cy="219456"/>
           </a:xfrm>
           <a:prstGeom prst="rect">
             <a:avLst/>
@@ -40464,22 +40370,24 @@
       </p:pic>
       <p:pic>
         <p:nvPicPr>
-          <p:cNvPr id="44" name="step 4 used on trophy" descr="/NAS/SJ/POSTECH/nlp/figs/icons/trophy.png">    </p:cNvPr>
+          <p:cNvPr id="34" name="step 4 not needed on trophy" descr="/NAS/SJ/POSTECH/nlp/figs/icons/trophy.png">    </p:cNvPr>
           <p:cNvPicPr>
             <a:picLocks noChangeAspect="1"/>
           </p:cNvPicPr>
           <p:nvPr/>
         </p:nvPicPr>
         <p:blipFill>
-          <a:blip r:embed="rId16"/>
+          <a:blip r:embed="rId16">
+            <a:alphaModFix amt="18000"/>
+          </a:blip>
           <a:stretch>
             <a:fillRect/>
           </a:stretch>
         </p:blipFill>
         <p:spPr>
           <a:xfrm>
-            <a:off x="8055864" y="3401568"/>
-            <a:ext cx="237744" cy="237744"/>
+            <a:off x="10030968" y="1892808"/>
+            <a:ext cx="219456" cy="219456"/>
           </a:xfrm>
           <a:prstGeom prst="rect">
             <a:avLst/>
@@ -40488,7 +40396,7 @@
       </p:pic>
       <p:pic>
         <p:nvPicPr>
-          <p:cNvPr id="45" name="step 4 used on truck" descr="/NAS/SJ/POSTECH/nlp/figs/icons/truck.png">    </p:cNvPr>
+          <p:cNvPr id="35" name="step 4 used on truck" descr="/NAS/SJ/POSTECH/nlp/figs/icons/truck.png">    </p:cNvPr>
           <p:cNvPicPr>
             <a:picLocks noChangeAspect="1"/>
           </p:cNvPicPr>
@@ -40502,8 +40410,8 @@
         </p:blipFill>
         <p:spPr>
           <a:xfrm>
-            <a:off x="8348472" y="3401568"/>
-            <a:ext cx="237744" cy="237744"/>
+            <a:off x="10305288" y="1892808"/>
+            <a:ext cx="219456" cy="219456"/>
           </a:xfrm>
           <a:prstGeom prst="rect">
             <a:avLst/>
@@ -40512,176 +40420,14 @@
       </p:pic>
       <p:pic>
         <p:nvPicPr>
-          <p:cNvPr id="46" name="step 4 used on calc" descr="/NAS/SJ/POSTECH/nlp/figs/icons/calc.png">    </p:cNvPr>
+          <p:cNvPr id="36" name="step 4 not needed on calc" descr="/NAS/SJ/POSTECH/nlp/figs/icons/calc.png">    </p:cNvPr>
           <p:cNvPicPr>
             <a:picLocks noChangeAspect="1"/>
           </p:cNvPicPr>
           <p:nvPr/>
         </p:nvPicPr>
         <p:blipFill>
-          <a:blip r:embed="rId18"/>
-          <a:stretch>
-            <a:fillRect/>
-          </a:stretch>
-        </p:blipFill>
-        <p:spPr>
-          <a:xfrm>
-            <a:off x="8641080" y="3401568"/>
-            <a:ext cx="237744" cy="237744"/>
-          </a:xfrm>
-          <a:prstGeom prst="rect">
-            <a:avLst/>
-          </a:prstGeom>
-        </p:spPr>
-      </p:pic>
-      <p:sp>
-        <p:nvSpPr>
-          <p:cNvPr id="47" name="Text 27"/>
-          <p:cNvSpPr txBox="1"/>
-          <p:nvPr/>
-        </p:nvSpPr>
-        <p:spPr>
-          <a:xfrm>
-            <a:off x="9509760" y="1627632"/>
-            <a:ext cx="2103120" cy="365760"/>
-          </a:xfrm>
-          <a:prstGeom prst="rect">
-            <a:avLst/>
-          </a:prstGeom>
-          <a:noFill/>
-          <a:ln/>
-        </p:spPr>
-        <p:txBody>
-          <a:bodyPr wrap="square" lIns="0" tIns="0" rIns="0" bIns="0" rtlCol="0" anchor="ctr"/>
-          <a:lstStyle/>
-          <a:p>
-            <a:pPr indent="0" marL="0">
-              <a:buNone/>
-            </a:pPr>
-            <a:r>
-              <a:rPr lang="en-US" sz="1700" b="1" dirty="0">
-                <a:solidFill>
-                  <a:srgbClr val="4472C4"/>
-                </a:solidFill>
-              </a:rPr>
-              <a:t>5 Reuse</a:t>
-            </a:r>
-            <a:endParaRPr lang="en-US" sz="1700" dirty="0"/>
-          </a:p>
-        </p:txBody>
-      </p:sp>
-      <p:sp>
-        <p:nvSpPr>
-          <p:cNvPr id="48" name="step 5 Reuse"/>
-          <p:cNvSpPr/>
-          <p:nvPr/>
-        </p:nvSpPr>
-        <p:spPr>
-          <a:xfrm>
-            <a:off x="9509760" y="2011680"/>
-            <a:ext cx="2103120" cy="1325880"/>
-          </a:xfrm>
-          <a:prstGeom prst="roundRect">
-            <a:avLst>
-              <a:gd name="adj" fmla="val 5517"/>
-            </a:avLst>
-          </a:prstGeom>
-          <a:solidFill>
-            <a:srgbClr val="DEEBF7"/>
-          </a:solidFill>
-          <a:ln w="12700">
-            <a:solidFill>
-              <a:srgbClr val="4472C4"/>
-            </a:solidFill>
-            <a:prstDash val="solid"/>
-          </a:ln>
-        </p:spPr>
-      </p:sp>
-      <p:sp>
-        <p:nvSpPr>
-          <p:cNvPr id="49" name="Text 29"/>
-          <p:cNvSpPr txBox="1"/>
-          <p:nvPr/>
-        </p:nvSpPr>
-        <p:spPr>
-          <a:xfrm>
-            <a:off x="9582912" y="2057400"/>
-            <a:ext cx="1956816" cy="566928"/>
-          </a:xfrm>
-          <a:prstGeom prst="rect">
-            <a:avLst/>
-          </a:prstGeom>
-          <a:noFill/>
-          <a:ln/>
-        </p:spPr>
-        <p:txBody>
-          <a:bodyPr wrap="square" lIns="0" tIns="0" rIns="0" bIns="0" rtlCol="0" anchor="ctr"/>
-          <a:lstStyle/>
-          <a:p>
-            <a:pPr algn="ctr" indent="0" marL="0">
-              <a:buNone/>
-            </a:pPr>
-            <a:r>
-              <a:rPr lang="en-US" sz="1800" b="1" dirty="0">
-                <a:solidFill>
-                  <a:srgbClr val="4472C4"/>
-                </a:solidFill>
-                <a:latin typeface="Calibri" pitchFamily="34" charset="0"/>
-                <a:ea typeface="Calibri" pitchFamily="34" charset="-122"/>
-                <a:cs typeface="Calibri" pitchFamily="34" charset="-120"/>
-              </a:rPr>
-              <a:t>same program</a:t>
-            </a:r>
-            <a:endParaRPr lang="en-US" sz="1800" dirty="0"/>
-          </a:p>
-        </p:txBody>
-      </p:sp>
-      <p:sp>
-        <p:nvSpPr>
-          <p:cNvPr id="50" name="Text 30"/>
-          <p:cNvSpPr txBox="1"/>
-          <p:nvPr/>
-        </p:nvSpPr>
-        <p:spPr>
-          <a:xfrm>
-            <a:off x="9601200" y="2651760"/>
-            <a:ext cx="1920240" cy="658368"/>
-          </a:xfrm>
-          <a:prstGeom prst="rect">
-            <a:avLst/>
-          </a:prstGeom>
-          <a:noFill/>
-          <a:ln/>
-        </p:spPr>
-        <p:txBody>
-          <a:bodyPr wrap="square" lIns="0" tIns="0" rIns="0" bIns="0" rtlCol="0" anchor="t"/>
-          <a:lstStyle/>
-          <a:p>
-            <a:pPr algn="ctr" indent="0" marL="0">
-              <a:buNone/>
-            </a:pPr>
-            <a:r>
-              <a:rPr lang="en-US" sz="1400" dirty="0">
-                <a:solidFill>
-                  <a:schemeClr val="tx1"/>
-                </a:solidFill>
-              </a:rPr>
-              <a:t>same kind, new data: no new tokens</a:t>
-            </a:r>
-            <a:endParaRPr lang="en-US" sz="1400" dirty="0"/>
-          </a:p>
-        </p:txBody>
-      </p:sp>
-      <p:pic>
-        <p:nvPicPr>
-          <p:cNvPr id="51" name="step 5 not needed on shapes" descr="/NAS/SJ/POSTECH/nlp/figs/icons/shapes.png">    </p:cNvPr>
-          <p:cNvPicPr>
-            <a:picLocks noChangeAspect="1"/>
-          </p:cNvPicPr>
-          <p:nvPr/>
-        </p:nvPicPr>
-        <p:blipFill>
-          <a:blip r:embed="rId19">
+          <a:blip r:embed="rId18">
             <a:alphaModFix amt="18000"/>
           </a:blip>
           <a:stretch>
@@ -40690,100 +40436,51 @@
         </p:blipFill>
         <p:spPr>
           <a:xfrm>
-            <a:off x="10003536" y="3401568"/>
-            <a:ext cx="237744" cy="237744"/>
+            <a:off x="10579608" y="1892808"/>
+            <a:ext cx="219456" cy="219456"/>
           </a:xfrm>
           <a:prstGeom prst="rect">
             <a:avLst/>
           </a:prstGeom>
         </p:spPr>
       </p:pic>
-      <p:pic>
-        <p:nvPicPr>
-          <p:cNvPr id="52" name="step 5 not needed on trophy" descr="/NAS/SJ/POSTECH/nlp/figs/icons/trophy.png">    </p:cNvPr>
-          <p:cNvPicPr>
-            <a:picLocks noChangeAspect="1"/>
-          </p:cNvPicPr>
-          <p:nvPr/>
-        </p:nvPicPr>
-        <p:blipFill>
-          <a:blip r:embed="rId20">
-            <a:alphaModFix amt="18000"/>
-          </a:blip>
-          <a:stretch>
-            <a:fillRect/>
-          </a:stretch>
-        </p:blipFill>
-        <p:spPr>
-          <a:xfrm>
-            <a:off x="10296144" y="3401568"/>
-            <a:ext cx="237744" cy="237744"/>
-          </a:xfrm>
-          <a:prstGeom prst="rect">
-            <a:avLst/>
-          </a:prstGeom>
-        </p:spPr>
-      </p:pic>
-      <p:pic>
-        <p:nvPicPr>
-          <p:cNvPr id="53" name="step 5 used on truck" descr="/NAS/SJ/POSTECH/nlp/figs/icons/truck.png">    </p:cNvPr>
-          <p:cNvPicPr>
-            <a:picLocks noChangeAspect="1"/>
-          </p:cNvPicPr>
-          <p:nvPr/>
-        </p:nvPicPr>
-        <p:blipFill>
-          <a:blip r:embed="rId21"/>
-          <a:stretch>
-            <a:fillRect/>
-          </a:stretch>
-        </p:blipFill>
-        <p:spPr>
-          <a:xfrm>
-            <a:off x="10588752" y="3401568"/>
-            <a:ext cx="237744" cy="237744"/>
-          </a:xfrm>
-          <a:prstGeom prst="rect">
-            <a:avLst/>
-          </a:prstGeom>
-        </p:spPr>
-      </p:pic>
-      <p:pic>
-        <p:nvPicPr>
-          <p:cNvPr id="54" name="step 5 not needed on calc" descr="/NAS/SJ/POSTECH/nlp/figs/icons/calc.png">    </p:cNvPr>
-          <p:cNvPicPr>
-            <a:picLocks noChangeAspect="1"/>
-          </p:cNvPicPr>
-          <p:nvPr/>
-        </p:nvPicPr>
-        <p:blipFill>
-          <a:blip r:embed="rId22">
-            <a:alphaModFix amt="18000"/>
-          </a:blip>
-          <a:stretch>
-            <a:fillRect/>
-          </a:stretch>
-        </p:blipFill>
-        <p:spPr>
-          <a:xfrm>
-            <a:off x="10881360" y="3401568"/>
-            <a:ext cx="237744" cy="237744"/>
-          </a:xfrm>
-          <a:prstGeom prst="rect">
-            <a:avLst/>
-          </a:prstGeom>
-        </p:spPr>
-      </p:pic>
-      <p:sp>
-        <p:nvSpPr>
-          <p:cNvPr id="55" name="Text 31"/>
+      <p:sp>
+        <p:nvSpPr>
+          <p:cNvPr id="37" name="one real problem"/>
+          <p:cNvSpPr/>
+          <p:nvPr/>
+        </p:nvSpPr>
+        <p:spPr>
+          <a:xfrm>
+            <a:off x="548640" y="2286000"/>
+            <a:ext cx="5349240" cy="3246120"/>
+          </a:xfrm>
+          <a:prstGeom prst="roundRect">
+            <a:avLst>
+              <a:gd name="adj" fmla="val 2254"/>
+            </a:avLst>
+          </a:prstGeom>
+          <a:solidFill>
+            <a:srgbClr val="F2F2F2"/>
+          </a:solidFill>
+          <a:ln w="9525">
+            <a:solidFill>
+              <a:srgbClr val="D9D9D9"/>
+            </a:solidFill>
+            <a:prstDash val="solid"/>
+          </a:ln>
+        </p:spPr>
+      </p:sp>
+      <p:sp>
+        <p:nvSpPr>
+          <p:cNvPr id="38" name="Text 18"/>
           <p:cNvSpPr txBox="1"/>
           <p:nvPr/>
         </p:nvSpPr>
         <p:spPr>
           <a:xfrm>
-            <a:off x="548640" y="3730752"/>
-            <a:ext cx="6400800" cy="365760"/>
+            <a:off x="777240" y="2340864"/>
+            <a:ext cx="4937760" cy="365760"/>
           </a:xfrm>
           <a:prstGeom prst="rect">
             <a:avLst/>
@@ -40799,26 +40496,325 @@
               <a:buNone/>
             </a:pPr>
             <a:r>
-              <a:rPr lang="en-US" sz="1600" b="1" dirty="0">
+              <a:rPr lang="en-US" sz="1700" b="1" dirty="0">
+                <a:solidFill>
+                  <a:srgbClr val="4472C4"/>
+                </a:solidFill>
+              </a:rPr>
+              <a:t>One real problem (Qwen3-8B, a MAMO word problem)</a:t>
+            </a:r>
+            <a:endParaRPr lang="en-US" sz="1700" dirty="0"/>
+          </a:p>
+        </p:txBody>
+      </p:sp>
+      <p:sp>
+        <p:nvSpPr>
+          <p:cNvPr id="39" name="box Task: the minimum co"/>
+          <p:cNvSpPr/>
+          <p:nvPr/>
+        </p:nvSpPr>
+        <p:spPr>
+          <a:xfrm>
+            <a:off x="777240" y="2743200"/>
+            <a:ext cx="4892040" cy="548640"/>
+          </a:xfrm>
+          <a:prstGeom prst="roundRect">
+            <a:avLst>
+              <a:gd name="adj" fmla="val 10000"/>
+            </a:avLst>
+          </a:prstGeom>
+          <a:solidFill>
+            <a:srgbClr val="FFFFFF"/>
+          </a:solidFill>
+          <a:ln w="9525">
+            <a:solidFill>
+              <a:srgbClr val="BFBFBF"/>
+            </a:solidFill>
+            <a:prstDash val="solid"/>
+          </a:ln>
+        </p:spPr>
+      </p:sp>
+      <p:sp>
+        <p:nvSpPr>
+          <p:cNvPr id="40" name="Text 20"/>
+          <p:cNvSpPr txBox="1"/>
+          <p:nvPr/>
+        </p:nvSpPr>
+        <p:spPr>
+          <a:xfrm>
+            <a:off x="850392" y="2743200"/>
+            <a:ext cx="4745736" cy="548640"/>
+          </a:xfrm>
+          <a:prstGeom prst="rect">
+            <a:avLst/>
+          </a:prstGeom>
+          <a:noFill/>
+          <a:ln/>
+        </p:spPr>
+        <p:txBody>
+          <a:bodyPr wrap="square" lIns="0" tIns="0" rIns="0" bIns="0" rtlCol="0" anchor="ctr"/>
+          <a:lstStyle/>
+          <a:p>
+            <a:pPr algn="ctr" indent="0" marL="0">
+              <a:buNone/>
+            </a:pPr>
+            <a:r>
+              <a:rPr lang="en-US" sz="1500" dirty="0">
                 <a:solidFill>
                   <a:schemeClr val="tx1"/>
                 </a:solidFill>
               </a:rPr>
-              <a:t>108 geometry + 100 optimization problems × 3 models:</a:t>
-            </a:r>
-            <a:endParaRPr lang="en-US" sz="1600" dirty="0"/>
-          </a:p>
-        </p:txBody>
-      </p:sp>
-      <p:sp>
-        <p:nvSpPr>
-          <p:cNvPr id="56" name="Text 32"/>
+              <a:t>Task: the minimum cost of products X, Y, Z under three limits (answer 20000)</a:t>
+            </a:r>
+            <a:endParaRPr lang="en-US" sz="1500" dirty="0"/>
+          </a:p>
+        </p:txBody>
+      </p:sp>
+      <p:sp>
+        <p:nvSpPr>
+          <p:cNvPr id="41" name="box ✗ no hint: it calls "/>
+          <p:cNvSpPr/>
+          <p:nvPr/>
+        </p:nvSpPr>
+        <p:spPr>
+          <a:xfrm>
+            <a:off x="777240" y="3383280"/>
+            <a:ext cx="4892040" cy="502920"/>
+          </a:xfrm>
+          <a:prstGeom prst="roundRect">
+            <a:avLst>
+              <a:gd name="adj" fmla="val 10909"/>
+            </a:avLst>
+          </a:prstGeom>
+          <a:solidFill>
+            <a:srgbClr val="FADBD8"/>
+          </a:solidFill>
+          <a:ln w="9525">
+            <a:solidFill>
+              <a:srgbClr val="BFBFBF"/>
+            </a:solidFill>
+            <a:prstDash val="solid"/>
+          </a:ln>
+        </p:spPr>
+      </p:sp>
+      <p:sp>
+        <p:nvSpPr>
+          <p:cNvPr id="42" name="Text 22"/>
           <p:cNvSpPr txBox="1"/>
           <p:nvPr/>
         </p:nvSpPr>
         <p:spPr>
           <a:xfrm>
-            <a:off x="2834640" y="4069080"/>
+            <a:off x="850392" y="3383280"/>
+            <a:ext cx="4745736" cy="502920"/>
+          </a:xfrm>
+          <a:prstGeom prst="rect">
+            <a:avLst/>
+          </a:prstGeom>
+          <a:noFill/>
+          <a:ln/>
+        </p:spPr>
+        <p:txBody>
+          <a:bodyPr wrap="square" lIns="0" tIns="0" rIns="0" bIns="0" rtlCol="0" anchor="ctr"/>
+          <a:lstStyle/>
+          <a:p>
+            <a:pPr algn="ctr" indent="0" marL="0">
+              <a:buNone/>
+            </a:pPr>
+            <a:r>
+              <a:rPr lang="en-US" sz="1500" dirty="0">
+                <a:solidFill>
+                  <a:srgbClr val="C00000"/>
+                </a:solidFill>
+              </a:rPr>
+              <a:t>✗ no hint: it calls a function that does not exist → crash</a:t>
+            </a:r>
+            <a:endParaRPr lang="en-US" sz="1500" dirty="0"/>
+          </a:p>
+        </p:txBody>
+      </p:sp>
+      <p:sp>
+        <p:nvSpPr>
+          <p:cNvPr id="43" name="box ✓ hint = its own che"/>
+          <p:cNvSpPr/>
+          <p:nvPr/>
+        </p:nvSpPr>
+        <p:spPr>
+          <a:xfrm>
+            <a:off x="777240" y="3977640"/>
+            <a:ext cx="4892040" cy="731520"/>
+          </a:xfrm>
+          <a:prstGeom prst="roundRect">
+            <a:avLst>
+              <a:gd name="adj" fmla="val 7500"/>
+            </a:avLst>
+          </a:prstGeom>
+          <a:solidFill>
+            <a:srgbClr val="E2F0D9"/>
+          </a:solidFill>
+          <a:ln w="9525">
+            <a:solidFill>
+              <a:srgbClr val="BFBFBF"/>
+            </a:solidFill>
+            <a:prstDash val="solid"/>
+          </a:ln>
+        </p:spPr>
+      </p:sp>
+      <p:sp>
+        <p:nvSpPr>
+          <p:cNvPr id="44" name="Text 24"/>
+          <p:cNvSpPr txBox="1"/>
+          <p:nvPr/>
+        </p:nvSpPr>
+        <p:spPr>
+          <a:xfrm>
+            <a:off x="850392" y="3977640"/>
+            <a:ext cx="4745736" cy="731520"/>
+          </a:xfrm>
+          <a:prstGeom prst="rect">
+            <a:avLst/>
+          </a:prstGeom>
+          <a:noFill/>
+          <a:ln/>
+        </p:spPr>
+        <p:txBody>
+          <a:bodyPr wrap="square" lIns="0" tIns="0" rIns="0" bIns="0" rtlCol="0" anchor="ctr"/>
+          <a:lstStyle/>
+          <a:p>
+            <a:pPr algn="ctr" indent="0" marL="0">
+              <a:buNone/>
+            </a:pPr>
+            <a:r>
+              <a:rPr lang="en-US" sz="1500" dirty="0">
+                <a:solidFill>
+                  <a:srgbClr val="38761D"/>
+                </a:solidFill>
+              </a:rPr>
+              <a:t>✓ hint = its own checked program from another problem: both versions print 20000 → submit</a:t>
+            </a:r>
+            <a:endParaRPr lang="en-US" sz="1500" dirty="0"/>
+          </a:p>
+        </p:txBody>
+      </p:sp>
+      <p:sp>
+        <p:nvSpPr>
+          <p:cNvPr id="45" name="Text 25"/>
+          <p:cNvSpPr txBox="1"/>
+          <p:nvPr/>
+        </p:nvSpPr>
+        <p:spPr>
+          <a:xfrm>
+            <a:off x="777240" y="4846320"/>
+            <a:ext cx="4892040" cy="411480"/>
+          </a:xfrm>
+          <a:prstGeom prst="rect">
+            <a:avLst/>
+          </a:prstGeom>
+          <a:noFill/>
+          <a:ln/>
+        </p:spPr>
+        <p:txBody>
+          <a:bodyPr wrap="square" lIns="0" tIns="0" rIns="0" bIns="0" rtlCol="0" anchor="ctr"/>
+          <a:lstStyle/>
+          <a:p>
+            <a:pPr indent="0" marL="0">
+              <a:buNone/>
+            </a:pPr>
+            <a:r>
+              <a:rPr lang="en-US" sz="1700" b="1" dirty="0">
+                <a:solidFill>
+                  <a:srgbClr val="4472C4"/>
+                </a:solidFill>
+              </a:rPr>
+              <a:t>0.6k tokens</a:t>
+            </a:r>
+            <a:pPr indent="0" marL="0">
+              <a:buNone/>
+            </a:pPr>
+            <a:r>
+              <a:rPr lang="en-US" sz="1700" dirty="0">
+                <a:solidFill>
+                  <a:schemeClr val="tx1"/>
+                </a:solidFill>
+              </a:rPr>
+              <a:t>  (thinking alone: 5.3k)</a:t>
+            </a:r>
+            <a:endParaRPr lang="en-US" sz="1700" dirty="0"/>
+          </a:p>
+        </p:txBody>
+      </p:sp>
+      <p:sp>
+        <p:nvSpPr>
+          <p:cNvPr id="46" name="overall result"/>
+          <p:cNvSpPr/>
+          <p:nvPr/>
+        </p:nvSpPr>
+        <p:spPr>
+          <a:xfrm>
+            <a:off x="6172200" y="2286000"/>
+            <a:ext cx="5440680" cy="3246120"/>
+          </a:xfrm>
+          <a:prstGeom prst="roundRect">
+            <a:avLst>
+              <a:gd name="adj" fmla="val 2254"/>
+            </a:avLst>
+          </a:prstGeom>
+          <a:solidFill>
+            <a:srgbClr val="F2F2F2"/>
+          </a:solidFill>
+          <a:ln w="9525">
+            <a:solidFill>
+              <a:srgbClr val="D9D9D9"/>
+            </a:solidFill>
+            <a:prstDash val="solid"/>
+          </a:ln>
+        </p:spPr>
+      </p:sp>
+      <p:sp>
+        <p:nvSpPr>
+          <p:cNvPr id="47" name="Text 27"/>
+          <p:cNvSpPr txBox="1"/>
+          <p:nvPr/>
+        </p:nvSpPr>
+        <p:spPr>
+          <a:xfrm>
+            <a:off x="6400800" y="2340864"/>
+            <a:ext cx="4983480" cy="365760"/>
+          </a:xfrm>
+          <a:prstGeom prst="rect">
+            <a:avLst/>
+          </a:prstGeom>
+          <a:noFill/>
+          <a:ln/>
+        </p:spPr>
+        <p:txBody>
+          <a:bodyPr wrap="square" lIns="0" tIns="0" rIns="0" bIns="0" rtlCol="0" anchor="ctr"/>
+          <a:lstStyle/>
+          <a:p>
+            <a:pPr indent="0" marL="0">
+              <a:buNone/>
+            </a:pPr>
+            <a:r>
+              <a:rPr lang="en-US" sz="1700" b="1" dirty="0">
+                <a:solidFill>
+                  <a:srgbClr val="4472C4"/>
+                </a:solidFill>
+              </a:rPr>
+              <a:t>208 geometry + optimization problems × 3 models</a:t>
+            </a:r>
+            <a:endParaRPr lang="en-US" sz="1700" dirty="0"/>
+          </a:p>
+        </p:txBody>
+      </p:sp>
+      <p:sp>
+        <p:nvSpPr>
+          <p:cNvPr id="48" name="Text 28"/>
+          <p:cNvSpPr txBox="1"/>
+          <p:nvPr/>
+        </p:nvSpPr>
+        <p:spPr>
+          <a:xfrm>
+            <a:off x="8686800" y="2724912"/>
             <a:ext cx="822960" cy="320040"/>
           </a:xfrm>
           <a:prstGeom prst="rect">
@@ -40848,14 +40844,14 @@
       </p:sp>
       <p:sp>
         <p:nvSpPr>
-          <p:cNvPr id="57" name="Text 33"/>
+          <p:cNvPr id="49" name="Text 29"/>
           <p:cNvSpPr txBox="1"/>
           <p:nvPr/>
         </p:nvSpPr>
         <p:spPr>
           <a:xfrm>
-            <a:off x="3749040" y="4069080"/>
-            <a:ext cx="3200400" cy="320040"/>
+            <a:off x="9601200" y="2724912"/>
+            <a:ext cx="1783080" cy="320040"/>
           </a:xfrm>
           <a:prstGeom prst="rect">
             <a:avLst/>
@@ -40884,13 +40880,13 @@
       </p:sp>
       <p:sp>
         <p:nvSpPr>
-          <p:cNvPr id="58" name="Text 34"/>
+          <p:cNvPr id="50" name="Text 30"/>
           <p:cNvSpPr txBox="1"/>
           <p:nvPr/>
         </p:nvSpPr>
         <p:spPr>
           <a:xfrm>
-            <a:off x="548640" y="4434840"/>
+            <a:off x="6400800" y="3090672"/>
             <a:ext cx="2194560" cy="457200"/>
           </a:xfrm>
           <a:prstGeom prst="rect">
@@ -40912,7 +40908,7 @@
                   <a:schemeClr val="tx1"/>
                 </a:solidFill>
               </a:rPr>
-              <a:t>think on hardest-looking</a:t>
+              <a:t>think where answers differ</a:t>
             </a:r>
             <a:endParaRPr lang="en-US" sz="1500" dirty="0"/>
           </a:p>
@@ -40920,13 +40916,13 @@
       </p:sp>
       <p:sp>
         <p:nvSpPr>
-          <p:cNvPr id="59" name="Text 35"/>
+          <p:cNvPr id="51" name="Text 31"/>
           <p:cNvSpPr txBox="1"/>
           <p:nvPr/>
         </p:nvSpPr>
         <p:spPr>
           <a:xfrm>
-            <a:off x="2834640" y="4434840"/>
+            <a:off x="8686800" y="3090672"/>
             <a:ext cx="822960" cy="457200"/>
           </a:xfrm>
           <a:prstGeom prst="rect">
@@ -40956,14 +40952,14 @@
       </p:sp>
       <p:sp>
         <p:nvSpPr>
-          <p:cNvPr id="60" name="tokens think on hardest-looking"/>
+          <p:cNvPr id="52" name="tokens think where answers differ"/>
           <p:cNvSpPr/>
           <p:nvPr/>
         </p:nvSpPr>
         <p:spPr>
           <a:xfrm>
-            <a:off x="3749040" y="4535424"/>
-            <a:ext cx="2468880" cy="256032"/>
+            <a:off x="9601200" y="3191256"/>
+            <a:ext cx="1051560" cy="256032"/>
           </a:xfrm>
           <a:prstGeom prst="rect">
             <a:avLst/>
@@ -40981,13 +40977,13 @@
       </p:sp>
       <p:sp>
         <p:nvSpPr>
-          <p:cNvPr id="61" name="Text 37"/>
+          <p:cNvPr id="53" name="Text 33"/>
           <p:cNvSpPr txBox="1"/>
           <p:nvPr/>
         </p:nvSpPr>
         <p:spPr>
           <a:xfrm>
-            <a:off x="6309360" y="4434840"/>
+            <a:off x="10744200" y="3090672"/>
             <a:ext cx="731520" cy="457200"/>
           </a:xfrm>
           <a:prstGeom prst="rect">
@@ -41017,13 +41013,13 @@
       </p:sp>
       <p:sp>
         <p:nvSpPr>
-          <p:cNvPr id="62" name="Text 38"/>
+          <p:cNvPr id="54" name="Text 34"/>
           <p:cNvSpPr txBox="1"/>
           <p:nvPr/>
         </p:nvSpPr>
         <p:spPr>
           <a:xfrm>
-            <a:off x="548640" y="4965192"/>
+            <a:off x="6400800" y="3547872"/>
             <a:ext cx="2194560" cy="457200"/>
           </a:xfrm>
           <a:prstGeom prst="rect">
@@ -41045,6 +41041,139 @@
                   <a:schemeClr val="tx1"/>
                 </a:solidFill>
               </a:rPr>
+              <a:t>ours, hint found by search</a:t>
+            </a:r>
+            <a:endParaRPr lang="en-US" sz="1500" dirty="0"/>
+          </a:p>
+        </p:txBody>
+      </p:sp>
+      <p:sp>
+        <p:nvSpPr>
+          <p:cNvPr id="55" name="Text 35"/>
+          <p:cNvSpPr txBox="1"/>
+          <p:nvPr/>
+        </p:nvSpPr>
+        <p:spPr>
+          <a:xfrm>
+            <a:off x="8686800" y="3547872"/>
+            <a:ext cx="822960" cy="457200"/>
+          </a:xfrm>
+          <a:prstGeom prst="rect">
+            <a:avLst/>
+          </a:prstGeom>
+          <a:noFill/>
+          <a:ln/>
+        </p:spPr>
+        <p:txBody>
+          <a:bodyPr wrap="square" lIns="0" tIns="0" rIns="0" bIns="0" rtlCol="0" anchor="ctr"/>
+          <a:lstStyle/>
+          <a:p>
+            <a:pPr algn="ctr" indent="0" marL="0">
+              <a:buNone/>
+            </a:pPr>
+            <a:r>
+              <a:rPr lang="en-US" sz="1700" b="1" dirty="0">
+                <a:solidFill>
+                  <a:srgbClr val="5B9BD5"/>
+                </a:solidFill>
+              </a:rPr>
+              <a:t>84%</a:t>
+            </a:r>
+            <a:endParaRPr lang="en-US" sz="1700" dirty="0"/>
+          </a:p>
+        </p:txBody>
+      </p:sp>
+      <p:sp>
+        <p:nvSpPr>
+          <p:cNvPr id="56" name="tokens ours, hint found by search"/>
+          <p:cNvSpPr/>
+          <p:nvPr/>
+        </p:nvSpPr>
+        <p:spPr>
+          <a:xfrm>
+            <a:off x="9601200" y="3648456"/>
+            <a:ext cx="846378" cy="256032"/>
+          </a:xfrm>
+          <a:prstGeom prst="rect">
+            <a:avLst/>
+          </a:prstGeom>
+          <a:solidFill>
+            <a:srgbClr val="5B9BD5"/>
+          </a:solidFill>
+          <a:ln w="6350">
+            <a:solidFill>
+              <a:srgbClr val="5B9BD5"/>
+            </a:solidFill>
+            <a:prstDash val="solid"/>
+          </a:ln>
+        </p:spPr>
+      </p:sp>
+      <p:sp>
+        <p:nvSpPr>
+          <p:cNvPr id="57" name="Text 37"/>
+          <p:cNvSpPr txBox="1"/>
+          <p:nvPr/>
+        </p:nvSpPr>
+        <p:spPr>
+          <a:xfrm>
+            <a:off x="10539018" y="3547872"/>
+            <a:ext cx="731520" cy="457200"/>
+          </a:xfrm>
+          <a:prstGeom prst="rect">
+            <a:avLst/>
+          </a:prstGeom>
+          <a:noFill/>
+          <a:ln/>
+        </p:spPr>
+        <p:txBody>
+          <a:bodyPr wrap="square" lIns="0" tIns="0" rIns="0" bIns="0" rtlCol="0" anchor="ctr"/>
+          <a:lstStyle/>
+          <a:p>
+            <a:pPr indent="0" marL="0">
+              <a:buNone/>
+            </a:pPr>
+            <a:r>
+              <a:rPr lang="en-US" sz="1500" b="1" dirty="0">
+                <a:solidFill>
+                  <a:srgbClr val="5B9BD5"/>
+                </a:solidFill>
+              </a:rPr>
+              <a:t>3.3k</a:t>
+            </a:r>
+            <a:endParaRPr lang="en-US" sz="1500" dirty="0"/>
+          </a:p>
+        </p:txBody>
+      </p:sp>
+      <p:sp>
+        <p:nvSpPr>
+          <p:cNvPr id="58" name="Text 38"/>
+          <p:cNvSpPr txBox="1"/>
+          <p:nvPr/>
+        </p:nvSpPr>
+        <p:spPr>
+          <a:xfrm>
+            <a:off x="6400800" y="4005072"/>
+            <a:ext cx="2194560" cy="457200"/>
+          </a:xfrm>
+          <a:prstGeom prst="rect">
+            <a:avLst/>
+          </a:prstGeom>
+          <a:noFill/>
+          <a:ln/>
+        </p:spPr>
+        <p:txBody>
+          <a:bodyPr wrap="square" lIns="0" tIns="0" rIns="0" bIns="0" rtlCol="0" anchor="ctr"/>
+          <a:lstStyle/>
+          <a:p>
+            <a:pPr algn="r" indent="0" marL="0">
+              <a:buNone/>
+            </a:pPr>
+            <a:r>
+              <a:rPr lang="en-US" sz="1500" dirty="0">
+                <a:solidFill>
+                  <a:schemeClr val="tx1"/>
+                </a:solidFill>
+              </a:rPr>
               <a:t>ours, hand-written hint</a:t>
             </a:r>
             <a:endParaRPr lang="en-US" sz="1500" dirty="0"/>
@@ -41053,13 +41182,13 @@
       </p:sp>
       <p:sp>
         <p:nvSpPr>
-          <p:cNvPr id="63" name="Text 39"/>
+          <p:cNvPr id="59" name="Text 39"/>
           <p:cNvSpPr txBox="1"/>
           <p:nvPr/>
         </p:nvSpPr>
         <p:spPr>
           <a:xfrm>
-            <a:off x="2834640" y="4965192"/>
+            <a:off x="8686800" y="4005072"/>
             <a:ext cx="822960" cy="457200"/>
           </a:xfrm>
           <a:prstGeom prst="rect">
@@ -41089,14 +41218,14 @@
       </p:sp>
       <p:sp>
         <p:nvSpPr>
-          <p:cNvPr id="64" name="tokens ours, hand-written hint"/>
+          <p:cNvPr id="60" name="tokens ours, hand-written hint"/>
           <p:cNvSpPr/>
           <p:nvPr/>
         </p:nvSpPr>
         <p:spPr>
           <a:xfrm>
-            <a:off x="3749040" y="5065776"/>
-            <a:ext cx="1505415" cy="256032"/>
+            <a:off x="9601200" y="4105656"/>
+            <a:ext cx="641195" cy="256032"/>
           </a:xfrm>
           <a:prstGeom prst="rect">
             <a:avLst/>
@@ -41114,13 +41243,13 @@
       </p:sp>
       <p:sp>
         <p:nvSpPr>
-          <p:cNvPr id="65" name="Text 41"/>
+          <p:cNvPr id="61" name="Text 41"/>
           <p:cNvSpPr txBox="1"/>
           <p:nvPr/>
         </p:nvSpPr>
         <p:spPr>
           <a:xfrm>
-            <a:off x="5345895" y="4965192"/>
+            <a:off x="10333835" y="4005072"/>
             <a:ext cx="731520" cy="457200"/>
           </a:xfrm>
           <a:prstGeom prst="rect">
@@ -41150,71 +41279,35 @@
       </p:sp>
       <p:sp>
         <p:nvSpPr>
-          <p:cNvPr id="66" name="Text 42"/>
+          <p:cNvPr id="62" name="Text 42"/>
           <p:cNvSpPr txBox="1"/>
           <p:nvPr/>
         </p:nvSpPr>
         <p:spPr>
           <a:xfrm>
-            <a:off x="7498080" y="3730752"/>
-            <a:ext cx="4114800" cy="457200"/>
-          </a:xfrm>
-          <a:prstGeom prst="rect">
-            <a:avLst/>
-          </a:prstGeom>
-          <a:noFill/>
-          <a:ln/>
-        </p:spPr>
-        <p:txBody>
-          <a:bodyPr wrap="square" lIns="0" tIns="0" rIns="0" bIns="0" rtlCol="0" anchor="ctr"/>
+            <a:off x="6400800" y="4526280"/>
+            <a:ext cx="4983480" cy="822960"/>
+          </a:xfrm>
+          <a:prstGeom prst="rect">
+            <a:avLst/>
+          </a:prstGeom>
+          <a:noFill/>
+          <a:ln/>
+        </p:spPr>
+        <p:txBody>
+          <a:bodyPr wrap="square" lIns="0" tIns="0" rIns="0" bIns="0" rtlCol="0" anchor="t"/>
           <a:lstStyle/>
           <a:p>
             <a:pPr indent="0" marL="0">
               <a:buNone/>
             </a:pPr>
             <a:r>
-              <a:rPr lang="en-US" sz="2400" b="1" dirty="0">
-                <a:solidFill>
-                  <a:srgbClr val="4472C4"/>
-                </a:solidFill>
-              </a:rPr>
-              <a:t>79% = 79%</a:t>
-            </a:r>
-            <a:endParaRPr lang="en-US" sz="2400" dirty="0"/>
-          </a:p>
-        </p:txBody>
-      </p:sp>
-      <p:sp>
-        <p:nvSpPr>
-          <p:cNvPr id="67" name="Text 43"/>
-          <p:cNvSpPr txBox="1"/>
-          <p:nvPr/>
-        </p:nvSpPr>
-        <p:spPr>
-          <a:xfrm>
-            <a:off x="7498080" y="4169664"/>
-            <a:ext cx="4114800" cy="731520"/>
-          </a:xfrm>
-          <a:prstGeom prst="rect">
-            <a:avLst/>
-          </a:prstGeom>
-          <a:noFill/>
-          <a:ln/>
-        </p:spPr>
-        <p:txBody>
-          <a:bodyPr wrap="square" lIns="0" tIns="0" rIns="0" bIns="0" rtlCol="0" anchor="t"/>
-          <a:lstStyle/>
-          <a:p>
-            <a:pPr indent="0" marL="0">
-              <a:buNone/>
-            </a:pPr>
-            <a:r>
               <a:rPr lang="en-US" sz="1400" dirty="0">
                 <a:solidFill>
-                  <a:schemeClr val="tx1"/>
-                </a:solidFill>
-              </a:rPr>
-              <a:t>gpt-oss-20b on 863 held-out MAMO problems: its own checked program as the hint = a hand-written hint (no hint: 73%)</a:t>
+                  <a:schemeClr val="tx2"/>
+                </a:solidFill>
+              </a:rPr>
+              <a:t>Held-out MAMO (863): the model's own program as the hint = a hand-written one (79% = 79%, gpt-oss-20b)</a:t>
             </a:r>
             <a:endParaRPr lang="en-US" sz="1400" dirty="0"/>
           </a:p>
@@ -41222,65 +41315,7 @@
       </p:sp>
       <p:sp>
         <p:nvSpPr>
-          <p:cNvPr id="68" name="Text 44"/>
-          <p:cNvSpPr txBox="1"/>
-          <p:nvPr/>
-        </p:nvSpPr>
-        <p:spPr>
-          <a:xfrm>
-            <a:off x="7498080" y="4983480"/>
-            <a:ext cx="4114800" cy="365760"/>
-          </a:xfrm>
-          <a:prstGeom prst="rect">
-            <a:avLst/>
-          </a:prstGeom>
-          <a:noFill/>
-          <a:ln/>
-        </p:spPr>
-        <p:txBody>
-          <a:bodyPr wrap="square" lIns="0" tIns="0" rIns="0" bIns="0" rtlCol="0" anchor="ctr"/>
-          <a:lstStyle/>
-          <a:p>
-            <a:pPr indent="0" marL="0">
-              <a:buNone/>
-            </a:pPr>
-            <a:r>
-              <a:rPr lang="en-US" sz="1400" dirty="0">
-                <a:solidFill>
-                  <a:schemeClr val="tx1"/>
-                </a:solidFill>
-              </a:rPr>
-              <a:t>This problem: </a:t>
-            </a:r>
-            <a:pPr indent="0" marL="0">
-              <a:buNone/>
-            </a:pPr>
-            <a:r>
-              <a:rPr lang="en-US" sz="1400" b="1" dirty="0">
-                <a:solidFill>
-                  <a:srgbClr val="4472C4"/>
-                </a:solidFill>
-              </a:rPr>
-              <a:t>0.6k tokens</a:t>
-            </a:r>
-            <a:pPr indent="0" marL="0">
-              <a:buNone/>
-            </a:pPr>
-            <a:r>
-              <a:rPr lang="en-US" sz="1400" dirty="0">
-                <a:solidFill>
-                  <a:schemeClr val="tx1"/>
-                </a:solidFill>
-              </a:rPr>
-              <a:t> (thinking alone: 5.3k)</a:t>
-            </a:r>
-            <a:endParaRPr lang="en-US" sz="1400" dirty="0"/>
-          </a:p>
-        </p:txBody>
-      </p:sp>
-      <p:sp>
-        <p:nvSpPr>
-          <p:cNvPr id="69" name="Text 45"/>
+          <p:cNvPr id="63" name="Text 43"/>
           <p:cNvSpPr txBox="1"/>
           <p:nvPr/>
         </p:nvSpPr>
@@ -41430,8 +41465,8 @@
         </p:nvSpPr>
         <p:spPr>
           <a:xfrm>
-            <a:off x="548640" y="1188720"/>
-            <a:ext cx="4846320" cy="365760"/>
+            <a:off x="2103120" y="1188720"/>
+            <a:ext cx="4206240" cy="365760"/>
           </a:xfrm>
           <a:prstGeom prst="rect">
             <a:avLst/>
@@ -41466,8 +41501,8 @@
         </p:nvSpPr>
         <p:spPr>
           <a:xfrm>
-            <a:off x="6766560" y="1188720"/>
-            <a:ext cx="4846320" cy="365760"/>
+            <a:off x="6949440" y="1188720"/>
+            <a:ext cx="4663440" cy="365760"/>
           </a:xfrm>
           <a:prstGeom prst="rect">
             <a:avLst/>
@@ -41496,14 +41531,50 @@
       </p:sp>
       <p:sp>
         <p:nvSpPr>
-          <p:cNvPr id="5" name="box "/>
+          <p:cNvPr id="5" name="Text 3"/>
+          <p:cNvSpPr txBox="1"/>
+          <p:nvPr/>
+        </p:nvSpPr>
+        <p:spPr>
+          <a:xfrm>
+            <a:off x="548640" y="1600200"/>
+            <a:ext cx="1463040" cy="685800"/>
+          </a:xfrm>
+          <a:prstGeom prst="rect">
+            <a:avLst/>
+          </a:prstGeom>
+          <a:noFill/>
+          <a:ln/>
+        </p:spPr>
+        <p:txBody>
+          <a:bodyPr wrap="square" lIns="0" tIns="0" rIns="0" bIns="0" rtlCol="0" anchor="ctr"/>
+          <a:lstStyle/>
+          <a:p>
+            <a:pPr indent="0" marL="0">
+              <a:buNone/>
+            </a:pPr>
+            <a:r>
+              <a:rPr lang="en-US" sz="1600" b="1" dirty="0">
+                <a:solidFill>
+                  <a:schemeClr val="tx1"/>
+                </a:solidFill>
+              </a:rPr>
+              <a:t>When to think</a:t>
+            </a:r>
+            <a:endParaRPr lang="en-US" sz="1600" dirty="0"/>
+          </a:p>
+        </p:txBody>
+      </p:sp>
+      <p:sp>
+        <p:nvSpPr>
+          <p:cNvPr id="6" name="box "/>
           <p:cNvSpPr/>
           <p:nvPr/>
         </p:nvSpPr>
         <p:spPr>
           <a:xfrm>
-            <a:off x="548640" y="1600200"/>
-            <a:ext cx="4846320" cy="685800"/>
+            <a:off x="2103120" y="1600200"/>
+            <a:ext cx="4206240" cy="685800"/>
           </a:xfrm>
           <a:prstGeom prst="roundRect">
             <a:avLst>
@@ -41523,14 +41594,14 @@
       </p:sp>
       <p:sp>
         <p:nvSpPr>
-          <p:cNvPr id="6" name="Text 4"/>
+          <p:cNvPr id="7" name="Text 5"/>
           <p:cNvSpPr txBox="1"/>
           <p:nvPr/>
         </p:nvSpPr>
         <p:spPr>
           <a:xfrm>
-            <a:off x="621792" y="1600200"/>
-            <a:ext cx="4700016" cy="685800"/>
+            <a:off x="2176272" y="1600200"/>
+            <a:ext cx="4059936" cy="685800"/>
           </a:xfrm>
           <a:prstGeom prst="rect">
             <a:avLst/>
@@ -41551,7 +41622,7 @@
       </p:sp>
       <p:pic>
         <p:nvPicPr>
-          <p:cNvPr id="7" name="usual icon 0" descr="/NAS/SJ/POSTECH/nlp/figs/icons/brain.png">    </p:cNvPr>
+          <p:cNvPr id="8" name="usual icon 0" descr="/NAS/SJ/POSTECH/nlp/figs/icons/brain.png">    </p:cNvPr>
           <p:cNvPicPr>
             <a:picLocks noChangeAspect="1"/>
           </p:cNvPicPr>
@@ -41565,7 +41636,7 @@
         </p:blipFill>
         <p:spPr>
           <a:xfrm>
-            <a:off x="685800" y="1737360"/>
+            <a:off x="2212848" y="1737360"/>
             <a:ext cx="411480" cy="411480"/>
           </a:xfrm>
           <a:prstGeom prst="rect">
@@ -41575,14 +41646,14 @@
       </p:pic>
       <p:sp>
         <p:nvSpPr>
-          <p:cNvPr id="8" name="Text 5"/>
+          <p:cNvPr id="9" name="Text 6"/>
           <p:cNvSpPr txBox="1"/>
           <p:nvPr/>
         </p:nvSpPr>
         <p:spPr>
           <a:xfrm>
-            <a:off x="1234440" y="1600200"/>
-            <a:ext cx="4069080" cy="685800"/>
+            <a:off x="2743200" y="1600200"/>
+            <a:ext cx="3474720" cy="685800"/>
           </a:xfrm>
           <a:prstGeom prst="rect">
             <a:avLst/>
@@ -41603,7 +41674,7 @@
                   <a:srgbClr val="404040"/>
                 </a:solidFill>
               </a:rPr>
-              <a:t>think more where 3 quick answers disagree, or train when to think</a:t>
+              <a:t>think more on hard-looking problems, or train the model when to think</a:t>
             </a:r>
             <a:endParaRPr lang="en-US" sz="1500" dirty="0"/>
           </a:p>
@@ -41611,14 +41682,14 @@
       </p:sp>
       <p:sp>
         <p:nvSpPr>
-          <p:cNvPr id="9" name="arrow 0"/>
+          <p:cNvPr id="10" name="arrow 0"/>
           <p:cNvSpPr/>
           <p:nvPr/>
         </p:nvSpPr>
         <p:spPr>
           <a:xfrm>
-            <a:off x="5577840" y="1755648"/>
-            <a:ext cx="1005840" cy="384048"/>
+            <a:off x="6400800" y="1783080"/>
+            <a:ext cx="457200" cy="329184"/>
           </a:xfrm>
           <a:prstGeom prst="rightArrow">
             <a:avLst/>
@@ -41636,14 +41707,14 @@
       </p:sp>
       <p:sp>
         <p:nvSpPr>
-          <p:cNvPr id="10" name="box "/>
+          <p:cNvPr id="11" name="box "/>
           <p:cNvSpPr/>
           <p:nvPr/>
         </p:nvSpPr>
         <p:spPr>
           <a:xfrm>
-            <a:off x="6766560" y="1600200"/>
-            <a:ext cx="4846320" cy="685800"/>
+            <a:off x="6949440" y="1600200"/>
+            <a:ext cx="4663440" cy="685800"/>
           </a:xfrm>
           <a:prstGeom prst="roundRect">
             <a:avLst>
@@ -41663,14 +41734,14 @@
       </p:sp>
       <p:sp>
         <p:nvSpPr>
-          <p:cNvPr id="11" name="Text 8"/>
+          <p:cNvPr id="12" name="Text 9"/>
           <p:cNvSpPr txBox="1"/>
           <p:nvPr/>
         </p:nvSpPr>
         <p:spPr>
           <a:xfrm>
-            <a:off x="6839712" y="1600200"/>
-            <a:ext cx="4700016" cy="685800"/>
+            <a:off x="7022592" y="1600200"/>
+            <a:ext cx="4517136" cy="685800"/>
           </a:xfrm>
           <a:prstGeom prst="rect">
             <a:avLst/>
@@ -41691,7 +41762,7 @@
       </p:sp>
       <p:pic>
         <p:nvPicPr>
-          <p:cNvPr id="12" name="ours icon 0" descr="/NAS/SJ/POSTECH/nlp/figs/icons/check.png">    </p:cNvPr>
+          <p:cNvPr id="13" name="ours icon 0" descr="/NAS/SJ/POSTECH/nlp/figs/icons/check.png">    </p:cNvPr>
           <p:cNvPicPr>
             <a:picLocks noChangeAspect="1"/>
           </p:cNvPicPr>
@@ -41705,7 +41776,7 @@
         </p:blipFill>
         <p:spPr>
           <a:xfrm>
-            <a:off x="6903720" y="1737360"/>
+            <a:off x="7059168" y="1737360"/>
             <a:ext cx="411480" cy="411480"/>
           </a:xfrm>
           <a:prstGeom prst="rect">
@@ -41715,14 +41786,14 @@
       </p:pic>
       <p:sp>
         <p:nvSpPr>
-          <p:cNvPr id="13" name="Text 9"/>
+          <p:cNvPr id="14" name="Text 10"/>
           <p:cNvSpPr txBox="1"/>
           <p:nvPr/>
         </p:nvSpPr>
         <p:spPr>
           <a:xfrm>
-            <a:off x="7452360" y="1600200"/>
-            <a:ext cx="4069080" cy="685800"/>
+            <a:off x="7589520" y="1600200"/>
+            <a:ext cx="3931920" cy="685800"/>
           </a:xfrm>
           <a:prstGeom prst="rect">
             <a:avLst/>
@@ -41743,7 +41814,7 @@
                   <a:srgbClr val="1F3864"/>
                 </a:solidFill>
               </a:rPr>
-              <a:t>think only when a free check fails, no training: 87% vs 74% on the same 208 problems</a:t>
+              <a:t>think only when a free check fails; no training: 87% vs 74% (208 problems)</a:t>
             </a:r>
             <a:endParaRPr lang="en-US" sz="1500" dirty="0"/>
           </a:p>
@@ -41751,14 +41822,50 @@
       </p:sp>
       <p:sp>
         <p:nvSpPr>
-          <p:cNvPr id="14" name="box "/>
+          <p:cNvPr id="15" name="Text 11"/>
+          <p:cNvSpPr txBox="1"/>
+          <p:nvPr/>
+        </p:nvSpPr>
+        <p:spPr>
+          <a:xfrm>
+            <a:off x="548640" y="2423160"/>
+            <a:ext cx="1463040" cy="685800"/>
+          </a:xfrm>
+          <a:prstGeom prst="rect">
+            <a:avLst/>
+          </a:prstGeom>
+          <a:noFill/>
+          <a:ln/>
+        </p:spPr>
+        <p:txBody>
+          <a:bodyPr wrap="square" lIns="0" tIns="0" rIns="0" bIns="0" rtlCol="0" anchor="ctr"/>
+          <a:lstStyle/>
+          <a:p>
+            <a:pPr indent="0" marL="0">
+              <a:buNone/>
+            </a:pPr>
+            <a:r>
+              <a:rPr lang="en-US" sz="1600" b="1" dirty="0">
+                <a:solidFill>
+                  <a:schemeClr val="tx1"/>
+                </a:solidFill>
+              </a:rPr>
+              <a:t>What to give</a:t>
+            </a:r>
+            <a:endParaRPr lang="en-US" sz="1600" dirty="0"/>
+          </a:p>
+        </p:txBody>
+      </p:sp>
+      <p:sp>
+        <p:nvSpPr>
+          <p:cNvPr id="16" name="box "/>
           <p:cNvSpPr/>
           <p:nvPr/>
         </p:nvSpPr>
         <p:spPr>
           <a:xfrm>
-            <a:off x="548640" y="2423160"/>
-            <a:ext cx="4846320" cy="685800"/>
+            <a:off x="2103120" y="2423160"/>
+            <a:ext cx="4206240" cy="685800"/>
           </a:xfrm>
           <a:prstGeom prst="roundRect">
             <a:avLst>
@@ -41778,14 +41885,14 @@
       </p:sp>
       <p:sp>
         <p:nvSpPr>
-          <p:cNvPr id="15" name="Text 11"/>
+          <p:cNvPr id="17" name="Text 13"/>
           <p:cNvSpPr txBox="1"/>
           <p:nvPr/>
         </p:nvSpPr>
         <p:spPr>
           <a:xfrm>
-            <a:off x="621792" y="2423160"/>
-            <a:ext cx="4700016" cy="685800"/>
+            <a:off x="2176272" y="2423160"/>
+            <a:ext cx="4059936" cy="685800"/>
           </a:xfrm>
           <a:prstGeom prst="rect">
             <a:avLst/>
@@ -41806,7 +41913,7 @@
       </p:sp>
       <p:pic>
         <p:nvPicPr>
-          <p:cNvPr id="16" name="usual icon 1" descr="/NAS/SJ/POSTECH/nlp/figs/icons/page.png">    </p:cNvPr>
+          <p:cNvPr id="18" name="usual icon 1" descr="/NAS/SJ/POSTECH/nlp/figs/icons/page.png">    </p:cNvPr>
           <p:cNvPicPr>
             <a:picLocks noChangeAspect="1"/>
           </p:cNvPicPr>
@@ -41820,7 +41927,7 @@
         </p:blipFill>
         <p:spPr>
           <a:xfrm>
-            <a:off x="685800" y="2560320"/>
+            <a:off x="2212848" y="2560320"/>
             <a:ext cx="411480" cy="411480"/>
           </a:xfrm>
           <a:prstGeom prst="rect">
@@ -41830,14 +41937,14 @@
       </p:pic>
       <p:sp>
         <p:nvSpPr>
-          <p:cNvPr id="17" name="Text 12"/>
+          <p:cNvPr id="19" name="Text 14"/>
           <p:cNvSpPr txBox="1"/>
           <p:nvPr/>
         </p:nvSpPr>
         <p:spPr>
           <a:xfrm>
-            <a:off x="1234440" y="2423160"/>
-            <a:ext cx="4069080" cy="685800"/>
+            <a:off x="2743200" y="2423160"/>
+            <a:ext cx="3474720" cy="685800"/>
           </a:xfrm>
           <a:prstGeom prst="rect">
             <a:avLst/>
@@ -41858,7 +41965,7 @@
                   <a:srgbClr val="404040"/>
                 </a:solidFill>
               </a:rPr>
-              <a:t>give the manual, or a teacher's programs checked against answers</a:t>
+              <a:t>the whole manual, or programs from a bigger model checked with answers</a:t>
             </a:r>
             <a:endParaRPr lang="en-US" sz="1500" dirty="0"/>
           </a:p>
@@ -41866,14 +41973,14 @@
       </p:sp>
       <p:sp>
         <p:nvSpPr>
-          <p:cNvPr id="18" name="arrow 1"/>
+          <p:cNvPr id="20" name="arrow 1"/>
           <p:cNvSpPr/>
           <p:nvPr/>
         </p:nvSpPr>
         <p:spPr>
           <a:xfrm>
-            <a:off x="5577840" y="2578608"/>
-            <a:ext cx="1005840" cy="384048"/>
+            <a:off x="6400800" y="2606040"/>
+            <a:ext cx="457200" cy="329184"/>
           </a:xfrm>
           <a:prstGeom prst="rightArrow">
             <a:avLst/>
@@ -41891,14 +41998,14 @@
       </p:sp>
       <p:sp>
         <p:nvSpPr>
-          <p:cNvPr id="19" name="box "/>
+          <p:cNvPr id="21" name="box "/>
           <p:cNvSpPr/>
           <p:nvPr/>
         </p:nvSpPr>
         <p:spPr>
           <a:xfrm>
-            <a:off x="6766560" y="2423160"/>
-            <a:ext cx="4846320" cy="685800"/>
+            <a:off x="6949440" y="2423160"/>
+            <a:ext cx="4663440" cy="685800"/>
           </a:xfrm>
           <a:prstGeom prst="roundRect">
             <a:avLst>
@@ -41918,14 +42025,14 @@
       </p:sp>
       <p:sp>
         <p:nvSpPr>
-          <p:cNvPr id="20" name="Text 15"/>
+          <p:cNvPr id="22" name="Text 17"/>
           <p:cNvSpPr txBox="1"/>
           <p:nvPr/>
         </p:nvSpPr>
         <p:spPr>
           <a:xfrm>
-            <a:off x="6839712" y="2423160"/>
-            <a:ext cx="4700016" cy="685800"/>
+            <a:off x="7022592" y="2423160"/>
+            <a:ext cx="4517136" cy="685800"/>
           </a:xfrm>
           <a:prstGeom prst="rect">
             <a:avLst/>
@@ -41946,7 +42053,7 @@
       </p:sp>
       <p:pic>
         <p:nvPicPr>
-          <p:cNvPr id="21" name="ours icon 1" descr="/NAS/SJ/POSTECH/nlp/figs/icons/fact.png">    </p:cNvPr>
+          <p:cNvPr id="23" name="ours icon 1" descr="/NAS/SJ/POSTECH/nlp/figs/icons/fact.png">    </p:cNvPr>
           <p:cNvPicPr>
             <a:picLocks noChangeAspect="1"/>
           </p:cNvPicPr>
@@ -41960,7 +42067,7 @@
         </p:blipFill>
         <p:spPr>
           <a:xfrm>
-            <a:off x="6903720" y="2560320"/>
+            <a:off x="7059168" y="2560320"/>
             <a:ext cx="411480" cy="411480"/>
           </a:xfrm>
           <a:prstGeom prst="rect">
@@ -41970,14 +42077,14 @@
       </p:pic>
       <p:sp>
         <p:nvSpPr>
-          <p:cNvPr id="22" name="Text 16"/>
+          <p:cNvPr id="24" name="Text 18"/>
           <p:cNvSpPr txBox="1"/>
           <p:nvPr/>
         </p:nvSpPr>
         <p:spPr>
           <a:xfrm>
-            <a:off x="7452360" y="2423160"/>
-            <a:ext cx="4069080" cy="685800"/>
+            <a:off x="7589520" y="2423160"/>
+            <a:ext cx="3931920" cy="685800"/>
           </a:xfrm>
           <a:prstGeom prst="rect">
             <a:avLst/>
@@ -41998,7 +42105,7 @@
                   <a:srgbClr val="1F3864"/>
                 </a:solidFill>
               </a:rPr>
-              <a:t>one short hint: the model's own program that passed the check; no answer key</a:t>
+              <a:t>one short hint: the model's own program that passed the check; no answers</a:t>
             </a:r>
             <a:endParaRPr lang="en-US" sz="1500" dirty="0"/>
           </a:p>
@@ -42006,14 +42113,50 @@
       </p:sp>
       <p:sp>
         <p:nvSpPr>
-          <p:cNvPr id="23" name="box "/>
+          <p:cNvPr id="25" name="Text 19"/>
+          <p:cNvSpPr txBox="1"/>
+          <p:nvPr/>
+        </p:nvSpPr>
+        <p:spPr>
+          <a:xfrm>
+            <a:off x="548640" y="3246120"/>
+            <a:ext cx="1463040" cy="685800"/>
+          </a:xfrm>
+          <a:prstGeom prst="rect">
+            <a:avLst/>
+          </a:prstGeom>
+          <a:noFill/>
+          <a:ln/>
+        </p:spPr>
+        <p:txBody>
+          <a:bodyPr wrap="square" lIns="0" tIns="0" rIns="0" bIns="0" rtlCol="0" anchor="ctr"/>
+          <a:lstStyle/>
+          <a:p>
+            <a:pPr indent="0" marL="0">
+              <a:buNone/>
+            </a:pPr>
+            <a:r>
+              <a:rPr lang="en-US" sz="1600" b="1" dirty="0">
+                <a:solidFill>
+                  <a:schemeClr val="tx1"/>
+                </a:solidFill>
+              </a:rPr>
+              <a:t>What it costs</a:t>
+            </a:r>
+            <a:endParaRPr lang="en-US" sz="1600" dirty="0"/>
+          </a:p>
+        </p:txBody>
+      </p:sp>
+      <p:sp>
+        <p:nvSpPr>
+          <p:cNvPr id="26" name="box "/>
           <p:cNvSpPr/>
           <p:nvPr/>
         </p:nvSpPr>
         <p:spPr>
           <a:xfrm>
-            <a:off x="548640" y="3246120"/>
-            <a:ext cx="4846320" cy="685800"/>
+            <a:off x="2103120" y="3246120"/>
+            <a:ext cx="4206240" cy="685800"/>
           </a:xfrm>
           <a:prstGeom prst="roundRect">
             <a:avLst>
@@ -42033,14 +42176,14 @@
       </p:sp>
       <p:sp>
         <p:nvSpPr>
-          <p:cNvPr id="24" name="Text 18"/>
+          <p:cNvPr id="27" name="Text 21"/>
           <p:cNvSpPr txBox="1"/>
           <p:nvPr/>
         </p:nvSpPr>
         <p:spPr>
           <a:xfrm>
-            <a:off x="621792" y="3246120"/>
-            <a:ext cx="4700016" cy="685800"/>
+            <a:off x="2176272" y="3246120"/>
+            <a:ext cx="4059936" cy="685800"/>
           </a:xfrm>
           <a:prstGeom prst="rect">
             <a:avLst/>
@@ -42061,7 +42204,7 @@
       </p:sp>
       <p:pic>
         <p:nvPicPr>
-          <p:cNvPr id="25" name="usual icon 2" descr="/NAS/SJ/POSTECH/nlp/figs/icons/robot.png">    </p:cNvPr>
+          <p:cNvPr id="28" name="usual icon 2" descr="/NAS/SJ/POSTECH/nlp/figs/icons/robot.png">    </p:cNvPr>
           <p:cNvPicPr>
             <a:picLocks noChangeAspect="1"/>
           </p:cNvPicPr>
@@ -42075,7 +42218,7 @@
         </p:blipFill>
         <p:spPr>
           <a:xfrm>
-            <a:off x="685800" y="3383280"/>
+            <a:off x="2212848" y="3383280"/>
             <a:ext cx="411480" cy="411480"/>
           </a:xfrm>
           <a:prstGeom prst="rect">
@@ -42085,14 +42228,14 @@
       </p:pic>
       <p:sp>
         <p:nvSpPr>
-          <p:cNvPr id="26" name="Text 19"/>
+          <p:cNvPr id="29" name="Text 22"/>
           <p:cNvSpPr txBox="1"/>
           <p:nvPr/>
         </p:nvSpPr>
         <p:spPr>
           <a:xfrm>
-            <a:off x="1234440" y="3246120"/>
-            <a:ext cx="4069080" cy="685800"/>
+            <a:off x="2743200" y="3246120"/>
+            <a:ext cx="3474720" cy="685800"/>
           </a:xfrm>
           <a:prstGeom prst="rect">
             <a:avLst/>
@@ -42113,7 +42256,7 @@
                   <a:srgbClr val="404040"/>
                 </a:solidFill>
               </a:rPr>
-              <a:t>fine-tune a specialist (ORLM-8B): 69.5% on MAMO, 1.1k tokens</a:t>
+              <a:t>fine-tune a specialist (ORLM-8B): 69.5% on MAMO</a:t>
             </a:r>
             <a:endParaRPr lang="en-US" sz="1500" dirty="0"/>
           </a:p>
@@ -42121,14 +42264,14 @@
       </p:sp>
       <p:sp>
         <p:nvSpPr>
-          <p:cNvPr id="27" name="arrow 2"/>
+          <p:cNvPr id="30" name="arrow 2"/>
           <p:cNvSpPr/>
           <p:nvPr/>
         </p:nvSpPr>
         <p:spPr>
           <a:xfrm>
-            <a:off x="5577840" y="3401568"/>
-            <a:ext cx="1005840" cy="384048"/>
+            <a:off x="6400800" y="3429000"/>
+            <a:ext cx="457200" cy="329184"/>
           </a:xfrm>
           <a:prstGeom prst="rightArrow">
             <a:avLst/>
@@ -42146,14 +42289,14 @@
       </p:sp>
       <p:sp>
         <p:nvSpPr>
-          <p:cNvPr id="28" name="box "/>
+          <p:cNvPr id="31" name="box "/>
           <p:cNvSpPr/>
           <p:nvPr/>
         </p:nvSpPr>
         <p:spPr>
           <a:xfrm>
-            <a:off x="6766560" y="3246120"/>
-            <a:ext cx="4846320" cy="685800"/>
+            <a:off x="6949440" y="3246120"/>
+            <a:ext cx="4663440" cy="685800"/>
           </a:xfrm>
           <a:prstGeom prst="roundRect">
             <a:avLst>
@@ -42173,14 +42316,14 @@
       </p:sp>
       <p:sp>
         <p:nvSpPr>
-          <p:cNvPr id="29" name="Text 22"/>
+          <p:cNvPr id="32" name="Text 25"/>
           <p:cNvSpPr txBox="1"/>
           <p:nvPr/>
         </p:nvSpPr>
         <p:spPr>
           <a:xfrm>
-            <a:off x="6839712" y="3246120"/>
-            <a:ext cx="4700016" cy="685800"/>
+            <a:off x="7022592" y="3246120"/>
+            <a:ext cx="4517136" cy="685800"/>
           </a:xfrm>
           <a:prstGeom prst="rect">
             <a:avLst/>
@@ -42201,7 +42344,7 @@
       </p:sp>
       <p:pic>
         <p:nvPicPr>
-          <p:cNvPr id="30" name="ours icon 2" descr="/NAS/SJ/POSTECH/nlp/figs/icons/gpu.png">    </p:cNvPr>
+          <p:cNvPr id="33" name="ours icon 2" descr="/NAS/SJ/POSTECH/nlp/figs/icons/gpu.png">    </p:cNvPr>
           <p:cNvPicPr>
             <a:picLocks noChangeAspect="1"/>
           </p:cNvPicPr>
@@ -42215,7 +42358,7 @@
         </p:blipFill>
         <p:spPr>
           <a:xfrm>
-            <a:off x="6903720" y="3383280"/>
+            <a:off x="7059168" y="3383280"/>
             <a:ext cx="411480" cy="411480"/>
           </a:xfrm>
           <a:prstGeom prst="rect">
@@ -42225,14 +42368,14 @@
       </p:pic>
       <p:sp>
         <p:nvSpPr>
-          <p:cNvPr id="31" name="Text 23"/>
+          <p:cNvPr id="34" name="Text 26"/>
           <p:cNvSpPr txBox="1"/>
           <p:nvPr/>
         </p:nvSpPr>
         <p:spPr>
           <a:xfrm>
-            <a:off x="7452360" y="3246120"/>
-            <a:ext cx="4069080" cy="685800"/>
+            <a:off x="7589520" y="3246120"/>
+            <a:ext cx="3931920" cy="685800"/>
           </a:xfrm>
           <a:prstGeom prst="rect">
             <a:avLst/>
@@ -42253,7 +42396,7 @@
                   <a:srgbClr val="1F3864"/>
                 </a:solidFill>
               </a:rPr>
-              <a:t>untrained Qwen3-8B + that hint, one 24 GB GPU: 69.5% at 1.0k tokens</a:t>
+              <a:t>untrained Qwen3-8B + that hint, one 24 GB GPU: the same 69.5%</a:t>
             </a:r>
             <a:endParaRPr lang="en-US" sz="1500" dirty="0"/>
           </a:p>
@@ -42261,7 +42404,7 @@
       </p:sp>
       <p:sp>
         <p:nvSpPr>
-          <p:cNvPr id="32" name="Text 24"/>
+          <p:cNvPr id="35" name="Text 27"/>
           <p:cNvSpPr txBox="1"/>
           <p:nvPr/>
         </p:nvSpPr>
@@ -42297,7 +42440,7 @@
       </p:sp>
       <p:sp>
         <p:nvSpPr>
-          <p:cNvPr id="33" name="Shape 25"/>
+          <p:cNvPr id="36" name="Shape 28"/>
           <p:cNvSpPr/>
           <p:nvPr/>
         </p:nvSpPr>
@@ -42320,7 +42463,7 @@
       </p:sp>
       <p:sp>
         <p:nvSpPr>
-          <p:cNvPr id="34" name="milestone 0"/>
+          <p:cNvPr id="37" name="milestone 0"/>
           <p:cNvSpPr/>
           <p:nvPr/>
         </p:nvSpPr>
@@ -42345,7 +42488,7 @@
       </p:sp>
       <p:pic>
         <p:nvPicPr>
-          <p:cNvPr id="35" name="milestone icon 0" descr="/NAS/SJ/POSTECH/nlp/figs/icons/check.png">    </p:cNvPr>
+          <p:cNvPr id="38" name="milestone icon 0" descr="/NAS/SJ/POSTECH/nlp/figs/icons/check.png">    </p:cNvPr>
           <p:cNvPicPr>
             <a:picLocks noChangeAspect="1"/>
           </p:cNvPicPr>
@@ -42369,7 +42512,7 @@
       </p:pic>
       <p:sp>
         <p:nvSpPr>
-          <p:cNvPr id="36" name="Text 27"/>
+          <p:cNvPr id="39" name="Text 30"/>
           <p:cNvSpPr txBox="1"/>
           <p:nvPr/>
         </p:nvSpPr>
@@ -42405,7 +42548,7 @@
       </p:sp>
       <p:sp>
         <p:nvSpPr>
-          <p:cNvPr id="37" name="milestone 1"/>
+          <p:cNvPr id="40" name="milestone 1"/>
           <p:cNvSpPr/>
           <p:nvPr/>
         </p:nvSpPr>
@@ -42430,7 +42573,7 @@
       </p:sp>
       <p:pic>
         <p:nvPicPr>
-          <p:cNvPr id="38" name="milestone icon 1" descr="/NAS/SJ/POSTECH/nlp/figs/icons/warn.png">    </p:cNvPr>
+          <p:cNvPr id="41" name="milestone icon 1" descr="/NAS/SJ/POSTECH/nlp/figs/icons/warn.png">    </p:cNvPr>
           <p:cNvPicPr>
             <a:picLocks noChangeAspect="1"/>
           </p:cNvPicPr>
@@ -42454,7 +42597,7 @@
       </p:pic>
       <p:sp>
         <p:nvSpPr>
-          <p:cNvPr id="39" name="Text 29"/>
+          <p:cNvPr id="42" name="Text 32"/>
           <p:cNvSpPr txBox="1"/>
           <p:nvPr/>
         </p:nvSpPr>
@@ -42490,7 +42633,7 @@
       </p:sp>
       <p:sp>
         <p:nvSpPr>
-          <p:cNvPr id="40" name="milestone 2"/>
+          <p:cNvPr id="43" name="milestone 2"/>
           <p:cNvSpPr/>
           <p:nvPr/>
         </p:nvSpPr>
@@ -42515,7 +42658,7 @@
       </p:sp>
       <p:pic>
         <p:nvPicPr>
-          <p:cNvPr id="41" name="milestone icon 2" descr="/NAS/SJ/POSTECH/nlp/figs/icons/code.png">    </p:cNvPr>
+          <p:cNvPr id="44" name="milestone icon 2" descr="/NAS/SJ/POSTECH/nlp/figs/icons/code.png">    </p:cNvPr>
           <p:cNvPicPr>
             <a:picLocks noChangeAspect="1"/>
           </p:cNvPicPr>
@@ -42539,7 +42682,7 @@
       </p:pic>
       <p:sp>
         <p:nvSpPr>
-          <p:cNvPr id="42" name="Text 31"/>
+          <p:cNvPr id="45" name="Text 34"/>
           <p:cNvSpPr txBox="1"/>
           <p:nvPr/>
         </p:nvSpPr>
@@ -42575,7 +42718,7 @@
       </p:sp>
       <p:sp>
         <p:nvSpPr>
-          <p:cNvPr id="43" name="Text 32"/>
+          <p:cNvPr id="46" name="Text 35"/>
           <p:cNvSpPr txBox="1"/>
           <p:nvPr/>
         </p:nvSpPr>

--- a/Proposal_Team5.pptx
+++ b/Proposal_Team5.pptx
@@ -137,7 +137,7 @@
   <p:extLst>
     <p:ext uri="{521415D9-36F7-43E2-AB2F-B90AF26B5E84}">
       <p14:sectionLst xmlns:p14="http://schemas.microsoft.com/office/powerpoint/2010/main">
-        <p14:section name="Talk" id="{39df98b2-722f-82c8-4509-817ac9fd6531}">
+        <p14:section name="Talk" id="{acc25499-e708-7930-cb13-85a7700642e5}">
           <p14:sldIdLst>
             <p14:sldId id="256"/>
             <p14:sldId id="257"/>
@@ -150,7 +150,7 @@
             <p14:sldId id="264"/>
           </p14:sldIdLst>
         </p14:section>
-        <p14:section name="Extra pages" id="{608abdc5-b7fc-0d52-baaf-201135546195}">
+        <p14:section name="Extra pages" id="{2fb92d29-f28e-00b8-bf6d-99517da7fa94}">
           <p14:sldIdLst>
             <p14:sldId id="265"/>
             <p14:sldId id="266"/>
@@ -3688,7 +3688,7 @@
           <a:p>
             <a:r>
               <a:rPr lang="en-US" dirty="0"/>
-              <a:t>(70초) 첫 번째 발견입니다. 매뉴얼이 아니라 짧은 힌트를 주세요. 힌트는 이렇게 줍니다. 과제는 무게 제한이 있는 트럭들의 배송 경로를 짜는 것이고, 프롬프트에 OR-Tools를 정확히 쓰는 법 열한 줄을 같이 붙입니다. 그러면 Qwen3-32B가 맞는 함수를 불러 최적 경로를 찾습니다. 대신 긴 참조 문서를 주면, 문서에 경로는 있지만 트럭 무게 규칙이 없어서 없는 함수를 지어내고 프로그램이 죽습니다. 오른쪽은 30문제에서 최적 경로를 찾은 비율입니다. 아무것도 안 주면 23%, 오래 생각하면 오히려 3%, 긴 문서는 7%, 짧은 힌트는 77에서 90%입니다. 모르는 함수 이름은 오래 생각한다고 생기지 않습니다. 힌트는 문제 종류마다 한 번만 만들면 됩니다. 라이브러리를 아는 사람이 쓰거나, 사용법 코드 조각 모음에서 검색하거나, 모델이 다른 문제에서 짜서 검사를 통과한 자기 프로그램을 그대로 씁니다. 세 번째 방법은 사람이 필요 없고, 사람이 쓴 힌트와 같은 정확도였습니다.</a:t>
+              <a:t>(60초) 첫 번째 발견입니다. 매뉴얼이 아니라 짧은 힌트를 주세요. 힌트는 이렇게 줍니다. 과제는 무게 제한이 있는 트럭들의 배송 경로를 짜는 것이고, 프롬프트에 OR-Tools를 정확히 쓰는 법 열한 줄을 같이 붙입니다. 그러면 Qwen3-32B가 맞는 함수를 불러 최적 경로를 찾습니다. 대신 긴 참조 문서를 주면, 문서에 경로는 있지만 트럭 무게 규칙이 없어서 없는 함수를 지어내고 프로그램이 죽습니다. 오른쪽은 30문제에서 최적 경로를 찾은 비율입니다. 아무것도 안 주면 23%, 오래 생각하면 오히려 3%, 긴 문서는 7%, 짧은 힌트는 77에서 90%입니다. 모르는 함수 이름은 오래 생각한다고 생기지 않습니다. 힌트는 이렇게 고릅니다. 같은 종류의 다른 문제들을 먼저 풀게 하고, 공짜 검사를 통과한 프로그램 중 가장 짧은 것을 힌트로 씁니다. 사람이 필요 없고, 사람이 쓴 힌트와 같은 정확도였습니다.</a:t>
             </a:r>
             <a:endParaRPr lang="en-US" dirty="0"/>
           </a:p>
@@ -37320,8 +37320,8 @@
         </p:nvSpPr>
         <p:spPr>
           <a:xfrm>
-            <a:off x="6400800" y="4041648"/>
-            <a:ext cx="4983480" cy="347472"/>
+            <a:off x="6400800" y="4023360"/>
+            <a:ext cx="4983480" cy="320040"/>
           </a:xfrm>
           <a:prstGeom prst="rect">
             <a:avLst/>
@@ -37342,46 +37342,49 @@
                   <a:schemeClr val="tx1"/>
                 </a:solidFill>
               </a:rPr>
-              <a:t>Where the hint comes from (once per problem type):</a:t>
+              <a:t>How we pick the hint (once per problem type):</a:t>
             </a:r>
             <a:endParaRPr lang="en-US" sz="1500" dirty="0"/>
           </a:p>
         </p:txBody>
       </p:sp>
-      <p:pic>
-        <p:nvPicPr>
-          <p:cNvPr id="39" name="hint source pen" descr="/NAS/SJ/POSTECH/nlp/figs/icons/pen.png">    </p:cNvPr>
-          <p:cNvPicPr>
-            <a:picLocks noChangeAspect="1"/>
-          </p:cNvPicPr>
-          <p:nvPr/>
-        </p:nvPicPr>
-        <p:blipFill>
-          <a:blip r:embed="rId6"/>
-          <a:stretch>
-            <a:fillRect/>
-          </a:stretch>
-        </p:blipFill>
-        <p:spPr>
-          <a:xfrm>
-            <a:off x="6446520" y="4462272"/>
-            <a:ext cx="256032" cy="256032"/>
-          </a:xfrm>
-          <a:prstGeom prst="rect">
-            <a:avLst/>
-          </a:prstGeom>
-        </p:spPr>
-      </p:pic>
-      <p:sp>
-        <p:nvSpPr>
-          <p:cNvPr id="40" name="Text 32"/>
+      <p:sp>
+        <p:nvSpPr>
+          <p:cNvPr id="39" name="box solve other problems"/>
+          <p:cNvSpPr/>
+          <p:nvPr/>
+        </p:nvSpPr>
+        <p:spPr>
+          <a:xfrm>
+            <a:off x="6400800" y="4389120"/>
+            <a:ext cx="1115568" cy="749808"/>
+          </a:xfrm>
+          <a:prstGeom prst="roundRect">
+            <a:avLst>
+              <a:gd name="adj" fmla="val 7317"/>
+            </a:avLst>
+          </a:prstGeom>
+          <a:solidFill>
+            <a:srgbClr val="FFFFFF"/>
+          </a:solidFill>
+          <a:ln w="9525">
+            <a:solidFill>
+              <a:srgbClr val="BFBFBF"/>
+            </a:solidFill>
+            <a:prstDash val="solid"/>
+          </a:ln>
+        </p:spPr>
+      </p:sp>
+      <p:sp>
+        <p:nvSpPr>
+          <p:cNvPr id="40" name="Text 33"/>
           <p:cNvSpPr txBox="1"/>
           <p:nvPr/>
         </p:nvSpPr>
         <p:spPr>
           <a:xfrm>
-            <a:off x="6812280" y="4434840"/>
-            <a:ext cx="4572000" cy="310896"/>
+            <a:off x="6473952" y="4389120"/>
+            <a:ext cx="969264" cy="749808"/>
           </a:xfrm>
           <a:prstGeom prst="rect">
             <a:avLst/>
@@ -37393,144 +37396,321 @@
           <a:bodyPr wrap="square" lIns="0" tIns="0" rIns="0" bIns="0" rtlCol="0" anchor="ctr"/>
           <a:lstStyle/>
           <a:p>
+            <a:pPr algn="ctr" indent="0" marL="0">
+              <a:buNone/>
+            </a:pPr>
+            <a:r>
+              <a:rPr lang="en-US" sz="1400" dirty="0">
+                <a:solidFill>
+                  <a:schemeClr val="tx1"/>
+                </a:solidFill>
+              </a:rPr>
+              <a:t>solve other problems of this type</a:t>
+            </a:r>
+            <a:endParaRPr lang="en-US" sz="1400" dirty="0"/>
+          </a:p>
+        </p:txBody>
+      </p:sp>
+      <p:sp>
+        <p:nvSpPr>
+          <p:cNvPr id="41" name="Shape 34"/>
+          <p:cNvSpPr/>
+          <p:nvPr/>
+        </p:nvSpPr>
+        <p:spPr>
+          <a:xfrm>
+            <a:off x="7516368" y="4764024"/>
+            <a:ext cx="164592" cy="0"/>
+          </a:xfrm>
+          <a:prstGeom prst="line">
+            <a:avLst/>
+          </a:prstGeom>
+          <a:noFill/>
+          <a:ln w="25400">
+            <a:solidFill>
+              <a:srgbClr val="7F7F7F"/>
+            </a:solidFill>
+            <a:prstDash val="solid"/>
+            <a:tailEnd type="triangle"/>
+          </a:ln>
+        </p:spPr>
+      </p:sp>
+      <p:sp>
+        <p:nvSpPr>
+          <p:cNvPr id="42" name="box keep those passing t"/>
+          <p:cNvSpPr/>
+          <p:nvPr/>
+        </p:nvSpPr>
+        <p:spPr>
+          <a:xfrm>
+            <a:off x="7680960" y="4389120"/>
+            <a:ext cx="1115568" cy="749808"/>
+          </a:xfrm>
+          <a:prstGeom prst="roundRect">
+            <a:avLst>
+              <a:gd name="adj" fmla="val 7317"/>
+            </a:avLst>
+          </a:prstGeom>
+          <a:solidFill>
+            <a:srgbClr val="FFFFFF"/>
+          </a:solidFill>
+          <a:ln w="9525">
+            <a:solidFill>
+              <a:srgbClr val="BFBFBF"/>
+            </a:solidFill>
+            <a:prstDash val="solid"/>
+          </a:ln>
+        </p:spPr>
+      </p:sp>
+      <p:sp>
+        <p:nvSpPr>
+          <p:cNvPr id="43" name="Text 36"/>
+          <p:cNvSpPr txBox="1"/>
+          <p:nvPr/>
+        </p:nvSpPr>
+        <p:spPr>
+          <a:xfrm>
+            <a:off x="7754112" y="4389120"/>
+            <a:ext cx="969264" cy="749808"/>
+          </a:xfrm>
+          <a:prstGeom prst="rect">
+            <a:avLst/>
+          </a:prstGeom>
+          <a:noFill/>
+          <a:ln/>
+        </p:spPr>
+        <p:txBody>
+          <a:bodyPr wrap="square" lIns="0" tIns="0" rIns="0" bIns="0" rtlCol="0" anchor="ctr"/>
+          <a:lstStyle/>
+          <a:p>
+            <a:pPr algn="ctr" indent="0" marL="0">
+              <a:buNone/>
+            </a:pPr>
+            <a:r>
+              <a:rPr lang="en-US" sz="1400" dirty="0">
+                <a:solidFill>
+                  <a:schemeClr val="tx1"/>
+                </a:solidFill>
+              </a:rPr>
+              <a:t>keep those passing the check</a:t>
+            </a:r>
+            <a:endParaRPr lang="en-US" sz="1400" dirty="0"/>
+          </a:p>
+        </p:txBody>
+      </p:sp>
+      <p:sp>
+        <p:nvSpPr>
+          <p:cNvPr id="44" name="Shape 37"/>
+          <p:cNvSpPr/>
+          <p:nvPr/>
+        </p:nvSpPr>
+        <p:spPr>
+          <a:xfrm>
+            <a:off x="8796528" y="4764024"/>
+            <a:ext cx="164592" cy="0"/>
+          </a:xfrm>
+          <a:prstGeom prst="line">
+            <a:avLst/>
+          </a:prstGeom>
+          <a:noFill/>
+          <a:ln w="25400">
+            <a:solidFill>
+              <a:srgbClr val="7F7F7F"/>
+            </a:solidFill>
+            <a:prstDash val="solid"/>
+            <a:tailEnd type="triangle"/>
+          </a:ln>
+        </p:spPr>
+      </p:sp>
+      <p:sp>
+        <p:nvSpPr>
+          <p:cNvPr id="45" name="box pick the shortest on"/>
+          <p:cNvSpPr/>
+          <p:nvPr/>
+        </p:nvSpPr>
+        <p:spPr>
+          <a:xfrm>
+            <a:off x="8961120" y="4389120"/>
+            <a:ext cx="1115568" cy="749808"/>
+          </a:xfrm>
+          <a:prstGeom prst="roundRect">
+            <a:avLst>
+              <a:gd name="adj" fmla="val 7317"/>
+            </a:avLst>
+          </a:prstGeom>
+          <a:solidFill>
+            <a:srgbClr val="FFFFFF"/>
+          </a:solidFill>
+          <a:ln w="9525">
+            <a:solidFill>
+              <a:srgbClr val="BFBFBF"/>
+            </a:solidFill>
+            <a:prstDash val="solid"/>
+          </a:ln>
+        </p:spPr>
+      </p:sp>
+      <p:sp>
+        <p:nvSpPr>
+          <p:cNvPr id="46" name="Text 39"/>
+          <p:cNvSpPr txBox="1"/>
+          <p:nvPr/>
+        </p:nvSpPr>
+        <p:spPr>
+          <a:xfrm>
+            <a:off x="9034272" y="4389120"/>
+            <a:ext cx="969264" cy="749808"/>
+          </a:xfrm>
+          <a:prstGeom prst="rect">
+            <a:avLst/>
+          </a:prstGeom>
+          <a:noFill/>
+          <a:ln/>
+        </p:spPr>
+        <p:txBody>
+          <a:bodyPr wrap="square" lIns="0" tIns="0" rIns="0" bIns="0" rtlCol="0" anchor="ctr"/>
+          <a:lstStyle/>
+          <a:p>
+            <a:pPr algn="ctr" indent="0" marL="0">
+              <a:buNone/>
+            </a:pPr>
+            <a:r>
+              <a:rPr lang="en-US" sz="1400" dirty="0">
+                <a:solidFill>
+                  <a:schemeClr val="tx1"/>
+                </a:solidFill>
+              </a:rPr>
+              <a:t>pick the shortest one</a:t>
+            </a:r>
+            <a:endParaRPr lang="en-US" sz="1400" dirty="0"/>
+          </a:p>
+        </p:txBody>
+      </p:sp>
+      <p:sp>
+        <p:nvSpPr>
+          <p:cNvPr id="47" name="Shape 40"/>
+          <p:cNvSpPr/>
+          <p:nvPr/>
+        </p:nvSpPr>
+        <p:spPr>
+          <a:xfrm>
+            <a:off x="10076688" y="4764024"/>
+            <a:ext cx="164592" cy="0"/>
+          </a:xfrm>
+          <a:prstGeom prst="line">
+            <a:avLst/>
+          </a:prstGeom>
+          <a:noFill/>
+          <a:ln w="25400">
+            <a:solidFill>
+              <a:srgbClr val="7F7F7F"/>
+            </a:solidFill>
+            <a:prstDash val="solid"/>
+            <a:tailEnd type="triangle"/>
+          </a:ln>
+        </p:spPr>
+      </p:sp>
+      <p:sp>
+        <p:nvSpPr>
+          <p:cNvPr id="48" name="box = the hint"/>
+          <p:cNvSpPr/>
+          <p:nvPr/>
+        </p:nvSpPr>
+        <p:spPr>
+          <a:xfrm>
+            <a:off x="10241280" y="4389120"/>
+            <a:ext cx="1115568" cy="749808"/>
+          </a:xfrm>
+          <a:prstGeom prst="roundRect">
+            <a:avLst>
+              <a:gd name="adj" fmla="val 7317"/>
+            </a:avLst>
+          </a:prstGeom>
+          <a:solidFill>
+            <a:srgbClr val="E2F0D9"/>
+          </a:solidFill>
+          <a:ln w="9525">
+            <a:solidFill>
+              <a:srgbClr val="BFBFBF"/>
+            </a:solidFill>
+            <a:prstDash val="solid"/>
+          </a:ln>
+        </p:spPr>
+      </p:sp>
+      <p:sp>
+        <p:nvSpPr>
+          <p:cNvPr id="49" name="Text 42"/>
+          <p:cNvSpPr txBox="1"/>
+          <p:nvPr/>
+        </p:nvSpPr>
+        <p:spPr>
+          <a:xfrm>
+            <a:off x="10314432" y="4389120"/>
+            <a:ext cx="969264" cy="749808"/>
+          </a:xfrm>
+          <a:prstGeom prst="rect">
+            <a:avLst/>
+          </a:prstGeom>
+          <a:noFill/>
+          <a:ln/>
+        </p:spPr>
+        <p:txBody>
+          <a:bodyPr wrap="square" lIns="0" tIns="0" rIns="0" bIns="0" rtlCol="0" anchor="ctr"/>
+          <a:lstStyle/>
+          <a:p>
+            <a:pPr algn="ctr" indent="0" marL="0">
+              <a:buNone/>
+            </a:pPr>
+            <a:r>
+              <a:rPr lang="en-US" sz="1400" b="1" dirty="0">
+                <a:solidFill>
+                  <a:srgbClr val="38761D"/>
+                </a:solidFill>
+              </a:rPr>
+              <a:t>= the hint</a:t>
+            </a:r>
+            <a:endParaRPr lang="en-US" sz="1400" dirty="0"/>
+          </a:p>
+        </p:txBody>
+      </p:sp>
+      <p:sp>
+        <p:nvSpPr>
+          <p:cNvPr id="50" name="Text 43"/>
+          <p:cNvSpPr txBox="1"/>
+          <p:nvPr/>
+        </p:nvSpPr>
+        <p:spPr>
+          <a:xfrm>
+            <a:off x="6400800" y="5175504"/>
+            <a:ext cx="4983480" cy="292608"/>
+          </a:xfrm>
+          <a:prstGeom prst="rect">
+            <a:avLst/>
+          </a:prstGeom>
+          <a:noFill/>
+          <a:ln/>
+        </p:spPr>
+        <p:txBody>
+          <a:bodyPr wrap="square" lIns="0" tIns="0" rIns="0" bIns="0" rtlCol="0" anchor="ctr"/>
+          <a:lstStyle/>
+          <a:p>
             <a:pPr indent="0" marL="0">
               <a:buNone/>
             </a:pPr>
             <a:r>
               <a:rPr lang="en-US" sz="1400" dirty="0">
                 <a:solidFill>
-                  <a:schemeClr val="tx1"/>
-                </a:solidFill>
-              </a:rPr>
-              <a:t>written by hand by someone who knows the library</a:t>
+                  <a:schemeClr val="tx2"/>
+                </a:solidFill>
+              </a:rPr>
+              <a:t>no human needed; a hand-written or searched hint also works</a:t>
             </a:r>
             <a:endParaRPr lang="en-US" sz="1400" dirty="0"/>
           </a:p>
         </p:txBody>
       </p:sp>
-      <p:pic>
-        <p:nvPicPr>
-          <p:cNvPr id="41" name="hint source page" descr="/NAS/SJ/POSTECH/nlp/figs/icons/page.png">    </p:cNvPr>
-          <p:cNvPicPr>
-            <a:picLocks noChangeAspect="1"/>
-          </p:cNvPicPr>
-          <p:nvPr/>
-        </p:nvPicPr>
-        <p:blipFill>
-          <a:blip r:embed="rId7"/>
-          <a:stretch>
-            <a:fillRect/>
-          </a:stretch>
-        </p:blipFill>
-        <p:spPr>
-          <a:xfrm>
-            <a:off x="6446520" y="4809744"/>
-            <a:ext cx="256032" cy="256032"/>
-          </a:xfrm>
-          <a:prstGeom prst="rect">
-            <a:avLst/>
-          </a:prstGeom>
-        </p:spPr>
-      </p:pic>
-      <p:sp>
-        <p:nvSpPr>
-          <p:cNvPr id="42" name="Text 33"/>
-          <p:cNvSpPr txBox="1"/>
-          <p:nvPr/>
-        </p:nvSpPr>
-        <p:spPr>
-          <a:xfrm>
-            <a:off x="6812280" y="4782312"/>
-            <a:ext cx="4572000" cy="310896"/>
-          </a:xfrm>
-          <a:prstGeom prst="rect">
-            <a:avLst/>
-          </a:prstGeom>
-          <a:noFill/>
-          <a:ln/>
-        </p:spPr>
-        <p:txBody>
-          <a:bodyPr wrap="square" lIns="0" tIns="0" rIns="0" bIns="0" rtlCol="0" anchor="ctr"/>
-          <a:lstStyle/>
-          <a:p>
-            <a:pPr indent="0" marL="0">
-              <a:buNone/>
-            </a:pPr>
-            <a:r>
-              <a:rPr lang="en-US" sz="1400" dirty="0">
-                <a:solidFill>
-                  <a:schemeClr val="tx1"/>
-                </a:solidFill>
-              </a:rPr>
-              <a:t>found by search in a library of usage snippets</a:t>
-            </a:r>
-            <a:endParaRPr lang="en-US" sz="1400" dirty="0"/>
-          </a:p>
-        </p:txBody>
-      </p:sp>
-      <p:pic>
-        <p:nvPicPr>
-          <p:cNvPr id="43" name="hint source check" descr="/NAS/SJ/POSTECH/nlp/figs/icons/check.png">    </p:cNvPr>
-          <p:cNvPicPr>
-            <a:picLocks noChangeAspect="1"/>
-          </p:cNvPicPr>
-          <p:nvPr/>
-        </p:nvPicPr>
-        <p:blipFill>
-          <a:blip r:embed="rId8"/>
-          <a:stretch>
-            <a:fillRect/>
-          </a:stretch>
-        </p:blipFill>
-        <p:spPr>
-          <a:xfrm>
-            <a:off x="6446520" y="5157216"/>
-            <a:ext cx="256032" cy="256032"/>
-          </a:xfrm>
-          <a:prstGeom prst="rect">
-            <a:avLst/>
-          </a:prstGeom>
-        </p:spPr>
-      </p:pic>
-      <p:sp>
-        <p:nvSpPr>
-          <p:cNvPr id="44" name="Text 34"/>
-          <p:cNvSpPr txBox="1"/>
-          <p:nvPr/>
-        </p:nvSpPr>
-        <p:spPr>
-          <a:xfrm>
-            <a:off x="6812280" y="5129784"/>
-            <a:ext cx="4572000" cy="310896"/>
-          </a:xfrm>
-          <a:prstGeom prst="rect">
-            <a:avLst/>
-          </a:prstGeom>
-          <a:noFill/>
-          <a:ln/>
-        </p:spPr>
-        <p:txBody>
-          <a:bodyPr wrap="square" lIns="0" tIns="0" rIns="0" bIns="0" rtlCol="0" anchor="ctr"/>
-          <a:lstStyle/>
-          <a:p>
-            <a:pPr indent="0" marL="0">
-              <a:buNone/>
-            </a:pPr>
-            <a:r>
-              <a:rPr lang="en-US" sz="1400" dirty="0">
-                <a:solidFill>
-                  <a:schemeClr val="tx1"/>
-                </a:solidFill>
-              </a:rPr>
-              <a:t>the model's own program that passed the check (no human)</a:t>
-            </a:r>
-            <a:endParaRPr lang="en-US" sz="1400" dirty="0"/>
-          </a:p>
-        </p:txBody>
-      </p:sp>
-      <p:sp>
-        <p:nvSpPr>
-          <p:cNvPr id="45" name="Text 35"/>
+      <p:sp>
+        <p:nvSpPr>
+          <p:cNvPr id="51" name="Text 44"/>
           <p:cNvSpPr txBox="1"/>
           <p:nvPr/>
         </p:nvSpPr>

--- a/Proposal_Team5.pptx
+++ b/Proposal_Team5.pptx
@@ -137,7 +137,7 @@
   <p:extLst>
     <p:ext uri="{521415D9-36F7-43E2-AB2F-B90AF26B5E84}">
       <p14:sectionLst xmlns:p14="http://schemas.microsoft.com/office/powerpoint/2010/main">
-        <p14:section name="Talk" id="{acc25499-e708-7930-cb13-85a7700642e5}">
+        <p14:section name="Talk" id="{6c1d8f2c-84ca-f2cb-48fc-a68cf4406fd1}">
           <p14:sldIdLst>
             <p14:sldId id="256"/>
             <p14:sldId id="257"/>
@@ -150,7 +150,7 @@
             <p14:sldId id="264"/>
           </p14:sldIdLst>
         </p14:section>
-        <p14:section name="Extra pages" id="{2fb92d29-f28e-00b8-bf6d-99517da7fa94}">
+        <p14:section name="Extra pages" id="{c33d8c8d-b988-ea7a-d241-fb48ac8efd17}">
           <p14:sldIdLst>
             <p14:sldId id="265"/>
             <p14:sldId id="266"/>
@@ -3688,7 +3688,8 @@
           <a:p>
             <a:r>
               <a:rPr lang="en-US" dirty="0"/>
-              <a:t>(60초) 첫 번째 발견입니다. 매뉴얼이 아니라 짧은 힌트를 주세요. 힌트는 이렇게 줍니다. 과제는 무게 제한이 있는 트럭들의 배송 경로를 짜는 것이고, 프롬프트에 OR-Tools를 정확히 쓰는 법 열한 줄을 같이 붙입니다. 그러면 Qwen3-32B가 맞는 함수를 불러 최적 경로를 찾습니다. 대신 긴 참조 문서를 주면, 문서에 경로는 있지만 트럭 무게 규칙이 없어서 없는 함수를 지어내고 프로그램이 죽습니다. 오른쪽은 30문제에서 최적 경로를 찾은 비율입니다. 아무것도 안 주면 23%, 오래 생각하면 오히려 3%, 긴 문서는 7%, 짧은 힌트는 77에서 90%입니다. 모르는 함수 이름은 오래 생각한다고 생기지 않습니다. 힌트는 이렇게 고릅니다. 같은 종류의 다른 문제들을 먼저 풀게 하고, 공짜 검사를 통과한 프로그램 중 가장 짧은 것을 힌트로 씁니다. 사람이 필요 없고, 사람이 쓴 힌트와 같은 정확도였습니다.</a:t>
+              <a:t>(60초) 첫 번째 발견입니다. 매뉴얼이 아니라 짧은 힌트를 주세요. 힌트는 이렇게 줍니다. 과제는 무게 제한이 있는 트럭들의 배송 경로를 짜는 것이고, 프롬프트에 OR-Tools를 정확히 쓰는 법 열한 줄을 같이 붙입니다. 그러면 Qwen3-32B가 맞는 함수를 불러 최적 경로를 찾습니다. 대신 긴 참조 문서를 주면, 문서에 경로는 있지만 트럭 무게 규칙이 없어서 없는 함수를 지어내고 프로그램이 죽습니다. 오른쪽은 30문제에서 최적 경로를 찾은 비율입니다. 아무것도 안 주면 23%, 오래 생각하면 오히려 3%, 긴 문서는 7%, 짧은 힌트는 83%입니다. 모르는 함수 이름은 오래 생각한다고 생기지 않습니다. 힌트는 이렇게 고릅니다. 같은 종류의 다른 문제들을 먼저 풀게 하고, 공짜 검사를 통과한 프로그램 중 가장 짧은 것을 힌트로 씁니다. 사람이 필요 없고, 사람이 쓴 힌트와 같은 정확도였습니다.
+[참고, 읽지 않음] 모델은 답을 무작위로 뽑기 때문에 같은 실험도 돌릴 때마다 조금씩 다릅니다. 짧은 힌트 막대는 같은 실험을 세 번 돌린 평균입니다(77, 83, 90%). 나머지 막대는 한 번씩 돌린 결과입니다.</a:t>
             </a:r>
             <a:endParaRPr lang="en-US" dirty="0"/>
           </a:p>
@@ -14192,7 +14193,7 @@
                   <a:schemeClr val="tx1"/>
                 </a:solidFill>
               </a:rPr>
-              <a:t>BM25 search over a library of titled snippets, Qwen3-32B, % solved optimally (seed 1)</a:t>
+              <a:t>BM25 search over a library of titled snippets, Qwen3-32B, % solved optimally (one run)</a:t>
             </a:r>
             <a:endParaRPr lang="en-US" sz="1700" dirty="0"/>
           </a:p>
@@ -16834,7 +16835,7 @@
                   <a:schemeClr val="tx1"/>
                 </a:solidFill>
               </a:rPr>
-              <a:t>If the check were perfect (word problems, every seed):</a:t>
+              <a:t>If the check were perfect (word problems, every run):</a:t>
             </a:r>
             <a:endParaRPr lang="en-US" sz="1600" dirty="0"/>
           </a:p>
@@ -20001,7 +20002,7 @@
                   <a:schemeClr val="tx1"/>
                 </a:solidFill>
               </a:rPr>
-              <a:t>We gave the router each problem's true Codeforces rating (exploratory; 311 contest problems, gpt-oss-120b, 3 seeds)</a:t>
+              <a:t>We gave the router each problem's true Codeforces rating (exploratory; 311 contest problems, gpt-oss-120b, 3 runs)</a:t>
             </a:r>
             <a:endParaRPr lang="en-US" sz="1700" dirty="0"/>
           </a:p>
@@ -27128,7 +27129,7 @@
                   <a:srgbClr val="4472C4"/>
                 </a:solidFill>
               </a:rPr>
-              <a:t>3 seeds</a:t>
+              <a:t>3 runs</a:t>
             </a:r>
             <a:endParaRPr lang="en-US" sz="3200" dirty="0"/>
           </a:p>
@@ -28944,7 +28945,7 @@
                   <a:schemeClr val="tx1"/>
                 </a:solidFill>
               </a:rPr>
-              <a:t>Most accurate and among the cheapest on all 3 seeds: spend thinking where a check fails</a:t>
+              <a:t>Most accurate and among the cheapest on all 3 runs: spend thinking where a check fails</a:t>
             </a:r>
             <a:endParaRPr lang="en-US" sz="2000" dirty="0"/>
           </a:p>
@@ -29294,7 +29295,7 @@
                   <a:schemeClr val="tx1"/>
                 </a:solidFill>
               </a:rPr>
-              <a:t>Finish the held-out MAMO test (more models, 3 seeds)</a:t>
+              <a:t>Finish the held-out MAMO test (more models, 3 runs)</a:t>
             </a:r>
             <a:endParaRPr lang="en-US" sz="1700" dirty="0"/>
           </a:p>
@@ -29366,7 +29367,7 @@
                   <a:schemeClr val="tx1"/>
                 </a:solidFill>
               </a:rPr>
-              <a:t>Every claim pre-registered and checked on 3 seeds; accuracy always reported with its token cost</a:t>
+              <a:t>Every claim pre-registered and checked on 3 runs; accuracy always reported with its token cost</a:t>
             </a:r>
             <a:endParaRPr lang="en-US" sz="2000" dirty="0"/>
           </a:p>
@@ -33534,7 +33535,7 @@
                   <a:schemeClr val="tx1"/>
                 </a:solidFill>
               </a:rPr>
-              <a:t>one change at a time; predictions written before each run; every claim on 3 seeds; baselines run in our own harness</a:t>
+              <a:t>one change at a time; predictions written before each run; every claim on 3 runs; baselines run in our own harness</a:t>
             </a:r>
             <a:endParaRPr lang="en-US" sz="1400" dirty="0"/>
           </a:p>
@@ -37306,7 +37307,7 @@
                   <a:srgbClr val="4472C4"/>
                 </a:solidFill>
               </a:rPr>
-              <a:t>77–90% (3 runs)</a:t>
+              <a:t>83%</a:t>
             </a:r>
             <a:endParaRPr lang="en-US" sz="1800" dirty="0"/>
           </a:p>
@@ -39210,7 +39211,7 @@
                   <a:schemeClr val="tx1"/>
                 </a:solidFill>
               </a:rPr>
-              <a:t>108 geometry problems (Qwen3-32B, 3 runs)</a:t>
+              <a:t>108 geometry problems (Qwen3-32B)</a:t>
             </a:r>
             <a:endParaRPr lang="en-US" sz="1500" dirty="0"/>
           </a:p>

--- a/Proposal_Team5.pptx
+++ b/Proposal_Team5.pptx
@@ -137,7 +137,7 @@
   <p:extLst>
     <p:ext uri="{521415D9-36F7-43E2-AB2F-B90AF26B5E84}">
       <p14:sectionLst xmlns:p14="http://schemas.microsoft.com/office/powerpoint/2010/main">
-        <p14:section name="Talk" id="{6c1d8f2c-84ca-f2cb-48fc-a68cf4406fd1}">
+        <p14:section name="Talk" id="{f1b356aa-4bc6-b6c6-eb70-76ba3a95a349}">
           <p14:sldIdLst>
             <p14:sldId id="256"/>
             <p14:sldId id="257"/>
@@ -150,7 +150,7 @@
             <p14:sldId id="264"/>
           </p14:sldIdLst>
         </p14:section>
-        <p14:section name="Extra pages" id="{c33d8c8d-b988-ea7a-d241-fb48ac8efd17}">
+        <p14:section name="Extra pages" id="{1292f846-f698-f1a0-205f-d89a869a12e1}">
           <p14:sldIdLst>
             <p14:sldId id="265"/>
             <p14:sldId id="266"/>
@@ -1400,7 +1400,7 @@
           <a:p>
             <a:r>
               <a:rPr lang="en-US" dirty="0"/>
-              <a:t>(15초) 안녕하세요, 5조입니다. LLM으로 계산 수학 문제를 정확하고 싸게 푸는 방법을 제안합니다. 질문은 하나입니다. 추가 노력을 힌트, 검사, 생각 중 어디에 써야 할까요?</a:t>
+              <a:t>(10초) 안녕하세요, 5조입니다. LLM으로 계산 수학 문제를 정확하고 싸게 푸는 방법을 제안합니다. 추가 노력을 힌트, 검사, 생각 중 어디에 써야 할까요?</a:t>
             </a:r>
             <a:endParaRPr lang="en-US" dirty="0"/>
           </a:p>
@@ -2368,7 +2368,7 @@
           <a:p>
             <a:r>
               <a:rPr lang="en-US" dirty="0"/>
-              <a:t>(30초) 저희가 푸는 문제는 네 종류이고, 두 무리로 나뉩니다. 기하 계산과 Codeforces 경시 문제는 맞는 알고리즘이 필요하고, 경시 문제는 그중 어려운 쪽으로 중앙값이 Codeforces Master 수준입니다. 배송 경로와 최적화 문장제는 솔버를 맞게 부르는 법이 필요하고, 문장제는 글을 수식으로 옮기는 단계가 더 있습니다. 이 문제들을 고른 이유는 답이 정확히 하나라 코드로 채점할 수 있고, 필요한 것이 서로 달라서 추가 노력을 어디에 써야 할지 비교할 수 있기 때문입니다. 공개 모델 Qwen3와 gpt-oss로 맞힌 문제 수와 토큰 수를 함께 잽니다.</a:t>
+              <a:t>(25초) 저희가 푸는 문제는 네 종류입니다. 기하와 Codeforces 경시 문제는 맞는 알고리즘이, 배송 경로와 최적화 문장제는 솔버를 맞게 부르는 법이 필요합니다. 경시 문제의 중앙값은 Codeforces Master 수준입니다. 답이 정확히 하나라 코드로 채점할 수 있고, 필요한 것이 서로 달라서 추가 노력을 어디에 쓸지 비교하기 좋습니다.</a:t>
             </a:r>
             <a:endParaRPr lang="en-US" dirty="0"/>
           </a:p>
@@ -3336,7 +3336,7 @@
           <a:p>
             <a:r>
               <a:rPr lang="en-US" dirty="0"/>
-              <a:t>(20초) LLM은 말로 답할 수도 있고, 프로그램을 짤 수도 있습니다. Qwen3-8B에게 같은 도형의 넓이의 두 배를 물었습니다. 옮기고 돌리고 뒤집어도 답은 436입니다. 말로 답하면 매번 다른 답이 나오지만, 프로그램은 네 번 모두 436입니다. 계산에는 프로그램이 맞는 도구입니다.</a:t>
+              <a:t>(15초) LLM은 말로 답할 수도, 프로그램을 짤 수도 있습니다. 같은 도형을 옮기고 돌리면 말로 한 답은 매번 바뀌지만, 프로그램은 항상 436입니다. 그래서 계산은 프로그램에 맡깁니다.</a:t>
             </a:r>
             <a:endParaRPr lang="en-US" dirty="0"/>
           </a:p>
@@ -3600,7 +3600,7 @@
           <a:p>
             <a:r>
               <a:rPr lang="en-US" dirty="0"/>
-              <a:t>(35초) 하지만 두 가지 문제가 있습니다. 첫째, 프로그램은 조용히 틀립니다. 같은 문제인데 프롬프트에 보조 코드만 더하면 6 대신 0을 출력하고, 에러 메시지도 없습니다. 없는 라이브러리 함수를 불러서 죽기도 합니다. 둘째, 오래 생각하면 비쌉니다. 경시 문제 311개에서 gpt-oss-120b는 오래 생각하면 57%에서 66%로 오르지만, 토큰은 4.4배를 씁니다. 그래서 질문입니다. 추가 노력을 코드 힌트, 공짜 검사, 더 많은 생각 중 어디에 써야 할까요?</a:t>
+              <a:t>(25초) 하지만 두 가지가 문제입니다. 첫째, 프로그램은 조용히 틀립니다. 같은 문제에 보조 코드만 더하면 6 대신 0을 내고 에러도 없습니다. 없는 함수를 불러 죽기도 합니다. 둘째, 오래 생각하면 비쌉니다. gpt-oss-120b는 토큰을 4.4배 써서 9점을 더 얻습니다. 그래서 추가 노력을 힌트, 공짜 검사, 생각 중 어디에 쓸지가 저희 질문입니다.</a:t>
             </a:r>
             <a:endParaRPr lang="en-US" dirty="0"/>
           </a:p>
@@ -3688,7 +3688,7 @@
           <a:p>
             <a:r>
               <a:rPr lang="en-US" dirty="0"/>
-              <a:t>(60초) 첫 번째 발견입니다. 매뉴얼이 아니라 짧은 힌트를 주세요. 힌트는 이렇게 줍니다. 과제는 무게 제한이 있는 트럭들의 배송 경로를 짜는 것이고, 프롬프트에 OR-Tools를 정확히 쓰는 법 열한 줄을 같이 붙입니다. 그러면 Qwen3-32B가 맞는 함수를 불러 최적 경로를 찾습니다. 대신 긴 참조 문서를 주면, 문서에 경로는 있지만 트럭 무게 규칙이 없어서 없는 함수를 지어내고 프로그램이 죽습니다. 오른쪽은 30문제에서 최적 경로를 찾은 비율입니다. 아무것도 안 주면 23%, 오래 생각하면 오히려 3%, 긴 문서는 7%, 짧은 힌트는 83%입니다. 모르는 함수 이름은 오래 생각한다고 생기지 않습니다. 힌트는 이렇게 고릅니다. 같은 종류의 다른 문제들을 먼저 풀게 하고, 공짜 검사를 통과한 프로그램 중 가장 짧은 것을 힌트로 씁니다. 사람이 필요 없고, 사람이 쓴 힌트와 같은 정확도였습니다.
+              <a:t>(30초) 첫 번째 발견입니다. 매뉴얼이 아니라 짧은 힌트를 주세요. 트럭 경로를 짜는 과제에 OR-Tools 사용법 열한 줄을 붙이면, Qwen3-32B가 맞는 함수를 불러 최적 경로를 찾습니다. 긴 참조 문서를 주면 없는 함수를 지어내 죽습니다. 30문제에서 아무것도 안 주면 23%, 오래 생각하면 3%, 짧은 힌트는 83%입니다. 힌트는 같은 종류의 다른 문제에서 검사를 통과한 가장 짧은 프로그램을 골라, 사람 없이 만듭니다.
 [참고, 읽지 않음] 모델은 답을 무작위로 뽑기 때문에 같은 실험도 돌릴 때마다 조금씩 다릅니다. 짧은 힌트 막대는 같은 실험을 세 번 돌린 평균입니다(77, 83, 90%). 나머지 막대는 한 번씩 돌린 결과입니다.</a:t>
             </a:r>
             <a:endParaRPr lang="en-US" dirty="0"/>
@@ -3777,7 +3777,7 @@
           <a:p>
             <a:r>
               <a:rPr lang="en-US" dirty="0"/>
-              <a:t>(60초) 두 번째 발견입니다. 공짜 검사가 실패할 때만 생각하게 하세요. 공짜 검사는 이렇게 돌아갑니다. 문제에는 보통 예제가 적혀 있습니다. 'Make a triangle!'에는 막대 3, 4, 5면 답이 0이라는 예제가 있습니다. 모델이 짠 프로그램을 모델 없이 컴퓨터에서 3, 4, 5로 실행해 0이 나오면 그대로 내고, 다르면 그 문제만 더 생각해서 다시 짭니다. 예제가 없으면 프로그램을 두 가지로 짜서 답이 같은지 봅니다. 오른쪽이 결과입니다. 경시 문제 311개에서 항상 오래 생각하면 66.2%에 3만 토큰, 실패할 때만 생각하면 66.3%에 2만 5천 토큰입니다. 예제만으로는 65%이고, 작은 입력을 전부 따져 보는 짧은 프로그램과도 비교해서 66%가 됩니다. 기하에서는 98% 대 99%이고 토큰은 27% 적습니다. 정답 없이도 같은 정확도를 더 싸게 얻습니다.</a:t>
+              <a:t>(35초) 두 번째 발견입니다. 공짜 검사가 실패할 때만 생각하게 하세요. 문제에 '막대 3, 4, 5면 답 0'이라는 예제가 있으면, 모델 없이 우리 프로그램을 3, 4, 5로 돌려 봅니다. 0이 나오면 그대로 내고, 다르면 그 문제만 더 생각합니다. 예제가 없으면 프로그램을 두 번 짜서 비교합니다. 그러면 경시 문제에서 66%, 기하에서 99%로, 항상 생각할 때와 같은 정확도를 18에서 27% 적은 토큰에 얻습니다.</a:t>
             </a:r>
             <a:endParaRPr lang="en-US" dirty="0"/>
           </a:p>
@@ -3865,7 +3865,7 @@
           <a:p>
             <a:r>
               <a:rPr lang="en-US" dirty="0"/>
-              <a:t>(60초) 두 발견을 합친 것이 저희 방법입니다. 위의 네 단계입니다. 힌트를 붙여 프로그램을 쓰고, 공짜 검사를 돌려서, 통과하면 내고 실패하면 생각합니다. 같은 종류의 문제가 데이터만 바꿔 다시 오면 그 프로그램을 재사용합니다. 아이콘은 각 단계를 쓰는 문제 종류입니다. 왼쪽은 실제 문제 하나입니다. Qwen3-8B가 힌트 없이 짜면 없는 함수를 불러 죽습니다. 힌트로 다른 문제에서 검사를 통과한 자기 프로그램을 주면, 두 버전이 모두 20000을 내서 바로 냅니다. 생각만 했다면 5.3k 토큰, 이렇게 하면 0.6k입니다. 오른쪽은 전체 결과입니다. 세 번 답해서 답이 갈리는 문제에 생각을 몰아주는 기존 방식은 74%이고, 저희 방법은 검색으로 찾은 힌트로 84%, 사람이 쓴 힌트로 87%이며 토큰도 더 적습니다. 처음 써 본 MAMO에서는 자동 힌트가 사람이 쓴 힌트와 같은 79%였습니다.</a:t>
+              <a:t>(30초) 둘을 합친 것이 저희 방법입니다. 힌트를 붙여 쓰고, 검사하고, 실패할 때만 생각하고, 같은 종류가 다시 오면 재사용합니다. 실제 문제 하나에서는 힌트 없이 죽던 프로그램이 힌트로 바로 20000을 맞혀, 5.3k 대신 0.6k 토큰을 썼습니다. 기하와 최적화 208문제를 세 모델로 풀면, 답이 갈리는 문제에 생각을 몰아주는 기존 방식은 74%, 저희는 87%이고 토큰도 적습니다.</a:t>
             </a:r>
             <a:endParaRPr lang="en-US" dirty="0"/>
           </a:p>
@@ -3953,7 +3953,7 @@
           <a:p>
             <a:r>
               <a:rPr lang="en-US" dirty="0"/>
-              <a:t>(75초) 마지막으로 새로운 점과 다음 계획입니다. 왼쪽이 흔히 쓰는 방법, 오른쪽이 저희 방법입니다. 첫째, 기존에는 세 번 답해서 답이 갈리는 문제에 생각을 몰아주거나 언제 생각할지를 학습시키지만, 저희는 학습 없이 공짜 검사가 실패한 문제에만 생각을 씁니다. 둘째, 기존에는 매뉴얼이나 교사 모델이 짜서 정답으로 확인한 프로그램을 주지만, 저희는 모델 자신이 짜서 검사를 통과한 프로그램을 짧은 힌트로 주므로 사람도 정답도 필요 없습니다. 셋째, 비용입니다. 개발에 쓰지 않은 MAMO 863문제에서 최적화용으로 파인튜닝한 ORLM-8B를 저희 채점기로 돌리면 69.5%인데, 학습하지 않은 Qwen3-8B에 자기 힌트를 주면 24GB GPU 한 장으로 같은 69.5%를 더 적은 토큰에 냅니다. 다음으로는 더 많은 모델로 검증을 마치고, 실행은 되지만 문제를 잘못 수식으로 옮긴 오류를 힌트로 고칠 수 있는지 시험하고, 문제 종류마다 힌트를 찾겠습니다. 정리하면, 짧은 힌트를 먼저 주고, 공짜 검사가 실패한 곳에서만 생각하게 하자는 것입니다.
+              <a:t>(35초) 새로운 점은 세 가지입니다. 학습 없이 공짜 검사로 생각할 때를 정하고, 정답 없이 모델 자신의 프로그램을 힌트로 쓰며, 파인튜닝한 특화 모델 ORLM-8B와 같은 69.5%를 학습하지 않은 8B 모델로 냅니다. 다음으로는 더 많은 모델로 검증하고, 실행은 되지만 문제를 잘못 수식으로 옮긴 오류를 다루고, 문제 종류마다 힌트를 찾겠습니다. 정리하면, 짧은 힌트를 먼저 주고, 공짜 검사가 실패한 곳에서만 생각하게 하자는 것입니다.
 [더 자세히: 질문이 나오거나 시간이 남을 때]
 첫째 줄, 생각을 어디에 쓸지. 기존 방법은 어려워 보이는 문제에 계산을 더 쓰는 Snell 등의 방식과, 언제 생각할지를 강화학습으로 가르치는 Thinkless, AdaptThink입니다. 저희는 정답 없이 돌리는 공짜 검사가 실패한 문제에만 생각을 씁니다. 기하와 최적화 208문제를 세 모델로 풀면 74%가 87%로 오르고, 토큰은 문제당 4.1k에서 2.5k로 줄었습니다. 87%는 사람이 쓴 힌트를 쓴 결과이고, 검색으로 찾은 힌트로도 84%입니다.
 둘째 줄, 모델에게 무엇을 주는지. 기존에는 매뉴얼 전체를 주거나, 더 큰 교사 모델이 짜서 정답으로 확인한 프로그램 모음을 줍니다. 저희 힌트는 모델이 다른 문제에서 짜서 공짜 검사를 통과한 자기 프로그램입니다. 끝까지 남겨 둔 MAMO 벤치마크에서 사람이 쓴 힌트와 같은 79%를 냈습니다.

--- a/Proposal_Team5.pptx
+++ b/Proposal_Team5.pptx
@@ -137,7 +137,7 @@
   <p:extLst>
     <p:ext uri="{521415D9-36F7-43E2-AB2F-B90AF26B5E84}">
       <p14:sectionLst xmlns:p14="http://schemas.microsoft.com/office/powerpoint/2010/main">
-        <p14:section name="Talk" id="{f1b356aa-4bc6-b6c6-eb70-76ba3a95a349}">
+        <p14:section name="Talk" id="{24554b1c-af96-f43a-7fdc-e2c33b3d1667}">
           <p14:sldIdLst>
             <p14:sldId id="256"/>
             <p14:sldId id="257"/>
@@ -150,7 +150,7 @@
             <p14:sldId id="264"/>
           </p14:sldIdLst>
         </p14:section>
-        <p14:section name="Extra pages" id="{1292f846-f698-f1a0-205f-d89a869a12e1}">
+        <p14:section name="Extra pages" id="{a68a08da-5d97-e2e4-105d-9dd7f4d41791}">
           <p14:sldIdLst>
             <p14:sldId id="265"/>
             <p14:sldId id="266"/>
@@ -37321,8 +37321,8 @@
         </p:nvSpPr>
         <p:spPr>
           <a:xfrm>
-            <a:off x="6400800" y="4023360"/>
-            <a:ext cx="4983480" cy="320040"/>
+            <a:off x="6400800" y="4114800"/>
+            <a:ext cx="4983480" cy="347472"/>
           </a:xfrm>
           <a:prstGeom prst="rect">
             <a:avLst/>
@@ -37343,7 +37343,7 @@
                   <a:schemeClr val="tx1"/>
                 </a:solidFill>
               </a:rPr>
-              <a:t>How we pick the hint (once per problem type):</a:t>
+              <a:t>How we pick the hint (per problem type, no human):</a:t>
             </a:r>
             <a:endParaRPr lang="en-US" sz="1500" dirty="0"/>
           </a:p>
@@ -37351,18 +37351,18 @@
       </p:sp>
       <p:sp>
         <p:nvSpPr>
-          <p:cNvPr id="39" name="box solve other problems"/>
+          <p:cNvPr id="39" name="box its past programs"/>
           <p:cNvSpPr/>
           <p:nvPr/>
         </p:nvSpPr>
         <p:spPr>
           <a:xfrm>
-            <a:off x="6400800" y="4389120"/>
-            <a:ext cx="1115568" cy="749808"/>
+            <a:off x="6400800" y="4572000"/>
+            <a:ext cx="1463040" cy="566928"/>
           </a:xfrm>
           <a:prstGeom prst="roundRect">
             <a:avLst>
-              <a:gd name="adj" fmla="val 7317"/>
+              <a:gd name="adj" fmla="val 9677"/>
             </a:avLst>
           </a:prstGeom>
           <a:solidFill>
@@ -37384,8 +37384,8 @@
         </p:nvSpPr>
         <p:spPr>
           <a:xfrm>
-            <a:off x="6473952" y="4389120"/>
-            <a:ext cx="969264" cy="749808"/>
+            <a:off x="6473952" y="4572000"/>
+            <a:ext cx="1316736" cy="566928"/>
           </a:xfrm>
           <a:prstGeom prst="rect">
             <a:avLst/>
@@ -37401,14 +37401,14 @@
               <a:buNone/>
             </a:pPr>
             <a:r>
-              <a:rPr lang="en-US" sz="1400" dirty="0">
+              <a:rPr lang="en-US" sz="1500" dirty="0">
                 <a:solidFill>
                   <a:schemeClr val="tx1"/>
                 </a:solidFill>
               </a:rPr>
-              <a:t>solve other problems of this type</a:t>
-            </a:r>
-            <a:endParaRPr lang="en-US" sz="1400" dirty="0"/>
+              <a:t>its past programs</a:t>
+            </a:r>
+            <a:endParaRPr lang="en-US" sz="1500" dirty="0"/>
           </a:p>
         </p:txBody>
       </p:sp>
@@ -37420,8 +37420,8 @@
         </p:nvSpPr>
         <p:spPr>
           <a:xfrm>
-            <a:off x="7516368" y="4764024"/>
-            <a:ext cx="164592" cy="0"/>
+            <a:off x="7863840" y="4855464"/>
+            <a:ext cx="292608" cy="0"/>
           </a:xfrm>
           <a:prstGeom prst="line">
             <a:avLst/>
@@ -37438,18 +37438,18 @@
       </p:sp>
       <p:sp>
         <p:nvSpPr>
-          <p:cNvPr id="42" name="box keep those passing t"/>
+          <p:cNvPr id="42" name="box ✓ passed the check"/>
           <p:cNvSpPr/>
           <p:nvPr/>
         </p:nvSpPr>
         <p:spPr>
           <a:xfrm>
-            <a:off x="7680960" y="4389120"/>
-            <a:ext cx="1115568" cy="749808"/>
+            <a:off x="8156448" y="4572000"/>
+            <a:ext cx="1463040" cy="566928"/>
           </a:xfrm>
           <a:prstGeom prst="roundRect">
             <a:avLst>
-              <a:gd name="adj" fmla="val 7317"/>
+              <a:gd name="adj" fmla="val 9677"/>
             </a:avLst>
           </a:prstGeom>
           <a:solidFill>
@@ -37471,8 +37471,8 @@
         </p:nvSpPr>
         <p:spPr>
           <a:xfrm>
-            <a:off x="7754112" y="4389120"/>
-            <a:ext cx="969264" cy="749808"/>
+            <a:off x="8229600" y="4572000"/>
+            <a:ext cx="1316736" cy="566928"/>
           </a:xfrm>
           <a:prstGeom prst="rect">
             <a:avLst/>
@@ -37488,14 +37488,14 @@
               <a:buNone/>
             </a:pPr>
             <a:r>
-              <a:rPr lang="en-US" sz="1400" dirty="0">
+              <a:rPr lang="en-US" sz="1500" dirty="0">
                 <a:solidFill>
                   <a:schemeClr val="tx1"/>
                 </a:solidFill>
               </a:rPr>
-              <a:t>keep those passing the check</a:t>
-            </a:r>
-            <a:endParaRPr lang="en-US" sz="1400" dirty="0"/>
+              <a:t>✓ passed the check</a:t>
+            </a:r>
+            <a:endParaRPr lang="en-US" sz="1500" dirty="0"/>
           </a:p>
         </p:txBody>
       </p:sp>
@@ -37507,8 +37507,8 @@
         </p:nvSpPr>
         <p:spPr>
           <a:xfrm>
-            <a:off x="8796528" y="4764024"/>
-            <a:ext cx="164592" cy="0"/>
+            <a:off x="9619488" y="4855464"/>
+            <a:ext cx="292608" cy="0"/>
           </a:xfrm>
           <a:prstGeom prst="line">
             <a:avLst/>
@@ -37525,105 +37525,18 @@
       </p:sp>
       <p:sp>
         <p:nvSpPr>
-          <p:cNvPr id="45" name="box pick the shortest on"/>
+          <p:cNvPr id="45" name="box shortest = hint"/>
           <p:cNvSpPr/>
           <p:nvPr/>
         </p:nvSpPr>
         <p:spPr>
           <a:xfrm>
-            <a:off x="8961120" y="4389120"/>
-            <a:ext cx="1115568" cy="749808"/>
+            <a:off x="9912096" y="4572000"/>
+            <a:ext cx="1463040" cy="566928"/>
           </a:xfrm>
           <a:prstGeom prst="roundRect">
             <a:avLst>
-              <a:gd name="adj" fmla="val 7317"/>
-            </a:avLst>
-          </a:prstGeom>
-          <a:solidFill>
-            <a:srgbClr val="FFFFFF"/>
-          </a:solidFill>
-          <a:ln w="9525">
-            <a:solidFill>
-              <a:srgbClr val="BFBFBF"/>
-            </a:solidFill>
-            <a:prstDash val="solid"/>
-          </a:ln>
-        </p:spPr>
-      </p:sp>
-      <p:sp>
-        <p:nvSpPr>
-          <p:cNvPr id="46" name="Text 39"/>
-          <p:cNvSpPr txBox="1"/>
-          <p:nvPr/>
-        </p:nvSpPr>
-        <p:spPr>
-          <a:xfrm>
-            <a:off x="9034272" y="4389120"/>
-            <a:ext cx="969264" cy="749808"/>
-          </a:xfrm>
-          <a:prstGeom prst="rect">
-            <a:avLst/>
-          </a:prstGeom>
-          <a:noFill/>
-          <a:ln/>
-        </p:spPr>
-        <p:txBody>
-          <a:bodyPr wrap="square" lIns="0" tIns="0" rIns="0" bIns="0" rtlCol="0" anchor="ctr"/>
-          <a:lstStyle/>
-          <a:p>
-            <a:pPr algn="ctr" indent="0" marL="0">
-              <a:buNone/>
-            </a:pPr>
-            <a:r>
-              <a:rPr lang="en-US" sz="1400" dirty="0">
-                <a:solidFill>
-                  <a:schemeClr val="tx1"/>
-                </a:solidFill>
-              </a:rPr>
-              <a:t>pick the shortest one</a:t>
-            </a:r>
-            <a:endParaRPr lang="en-US" sz="1400" dirty="0"/>
-          </a:p>
-        </p:txBody>
-      </p:sp>
-      <p:sp>
-        <p:nvSpPr>
-          <p:cNvPr id="47" name="Shape 40"/>
-          <p:cNvSpPr/>
-          <p:nvPr/>
-        </p:nvSpPr>
-        <p:spPr>
-          <a:xfrm>
-            <a:off x="10076688" y="4764024"/>
-            <a:ext cx="164592" cy="0"/>
-          </a:xfrm>
-          <a:prstGeom prst="line">
-            <a:avLst/>
-          </a:prstGeom>
-          <a:noFill/>
-          <a:ln w="25400">
-            <a:solidFill>
-              <a:srgbClr val="7F7F7F"/>
-            </a:solidFill>
-            <a:prstDash val="solid"/>
-            <a:tailEnd type="triangle"/>
-          </a:ln>
-        </p:spPr>
-      </p:sp>
-      <p:sp>
-        <p:nvSpPr>
-          <p:cNvPr id="48" name="box = the hint"/>
-          <p:cNvSpPr/>
-          <p:nvPr/>
-        </p:nvSpPr>
-        <p:spPr>
-          <a:xfrm>
-            <a:off x="10241280" y="4389120"/>
-            <a:ext cx="1115568" cy="749808"/>
-          </a:xfrm>
-          <a:prstGeom prst="roundRect">
-            <a:avLst>
-              <a:gd name="adj" fmla="val 7317"/>
+              <a:gd name="adj" fmla="val 9677"/>
             </a:avLst>
           </a:prstGeom>
           <a:solidFill>
@@ -37639,14 +37552,14 @@
       </p:sp>
       <p:sp>
         <p:nvSpPr>
-          <p:cNvPr id="49" name="Text 42"/>
+          <p:cNvPr id="46" name="Text 39"/>
           <p:cNvSpPr txBox="1"/>
           <p:nvPr/>
         </p:nvSpPr>
         <p:spPr>
           <a:xfrm>
-            <a:off x="10314432" y="4389120"/>
-            <a:ext cx="969264" cy="749808"/>
+            <a:off x="9985248" y="4572000"/>
+            <a:ext cx="1316736" cy="566928"/>
           </a:xfrm>
           <a:prstGeom prst="rect">
             <a:avLst/>
@@ -37662,56 +37575,20 @@
               <a:buNone/>
             </a:pPr>
             <a:r>
-              <a:rPr lang="en-US" sz="1400" b="1" dirty="0">
+              <a:rPr lang="en-US" sz="1500" b="1" dirty="0">
                 <a:solidFill>
                   <a:srgbClr val="38761D"/>
                 </a:solidFill>
               </a:rPr>
-              <a:t>= the hint</a:t>
-            </a:r>
-            <a:endParaRPr lang="en-US" sz="1400" dirty="0"/>
-          </a:p>
-        </p:txBody>
-      </p:sp>
-      <p:sp>
-        <p:nvSpPr>
-          <p:cNvPr id="50" name="Text 43"/>
-          <p:cNvSpPr txBox="1"/>
-          <p:nvPr/>
-        </p:nvSpPr>
-        <p:spPr>
-          <a:xfrm>
-            <a:off x="6400800" y="5175504"/>
-            <a:ext cx="4983480" cy="292608"/>
-          </a:xfrm>
-          <a:prstGeom prst="rect">
-            <a:avLst/>
-          </a:prstGeom>
-          <a:noFill/>
-          <a:ln/>
-        </p:spPr>
-        <p:txBody>
-          <a:bodyPr wrap="square" lIns="0" tIns="0" rIns="0" bIns="0" rtlCol="0" anchor="ctr"/>
-          <a:lstStyle/>
-          <a:p>
-            <a:pPr indent="0" marL="0">
-              <a:buNone/>
-            </a:pPr>
-            <a:r>
-              <a:rPr lang="en-US" sz="1400" dirty="0">
-                <a:solidFill>
-                  <a:schemeClr val="tx2"/>
-                </a:solidFill>
-              </a:rPr>
-              <a:t>no human needed; a hand-written or searched hint also works</a:t>
-            </a:r>
-            <a:endParaRPr lang="en-US" sz="1400" dirty="0"/>
-          </a:p>
-        </p:txBody>
-      </p:sp>
-      <p:sp>
-        <p:nvSpPr>
-          <p:cNvPr id="51" name="Text 44"/>
+              <a:t>shortest = hint</a:t>
+            </a:r>
+            <a:endParaRPr lang="en-US" sz="1500" dirty="0"/>
+          </a:p>
+        </p:txBody>
+      </p:sp>
+      <p:sp>
+        <p:nvSpPr>
+          <p:cNvPr id="47" name="Text 40"/>
           <p:cNvSpPr txBox="1"/>
           <p:nvPr/>
         </p:nvSpPr>

--- a/Proposal_Team5.pptx
+++ b/Proposal_Team5.pptx
@@ -137,7 +137,7 @@
   <p:extLst>
     <p:ext uri="{521415D9-36F7-43E2-AB2F-B90AF26B5E84}">
       <p14:sectionLst xmlns:p14="http://schemas.microsoft.com/office/powerpoint/2010/main">
-        <p14:section name="Talk" id="{24554b1c-af96-f43a-7fdc-e2c33b3d1667}">
+        <p14:section name="Talk" id="{225c03cd-66ee-90dc-c657-2bc5e755be8f}">
           <p14:sldIdLst>
             <p14:sldId id="256"/>
             <p14:sldId id="257"/>
@@ -150,7 +150,7 @@
             <p14:sldId id="264"/>
           </p14:sldIdLst>
         </p14:section>
-        <p14:section name="Extra pages" id="{a68a08da-5d97-e2e4-105d-9dd7f4d41791}">
+        <p14:section name="Extra pages" id="{cebb3469-6b71-9e1a-b08d-5b00c5734770}">
           <p14:sldIdLst>
             <p14:sldId id="265"/>
             <p14:sldId id="266"/>
@@ -3688,7 +3688,7 @@
           <a:p>
             <a:r>
               <a:rPr lang="en-US" dirty="0"/>
-              <a:t>(30초) 첫 번째 발견입니다. 매뉴얼이 아니라 짧은 힌트를 주세요. 트럭 경로를 짜는 과제에 OR-Tools 사용법 열한 줄을 붙이면, Qwen3-32B가 맞는 함수를 불러 최적 경로를 찾습니다. 긴 참조 문서를 주면 없는 함수를 지어내 죽습니다. 30문제에서 아무것도 안 주면 23%, 오래 생각하면 3%, 짧은 힌트는 83%입니다. 힌트는 같은 종류의 다른 문제에서 검사를 통과한 가장 짧은 프로그램을 골라, 사람 없이 만듭니다.
+              <a:t>(30초) 첫 번째 발견입니다. 매뉴얼이 아니라 짧은 힌트를 주세요. 트럭 경로를 짜는 과제에 OR-Tools 사용법 열한 줄을 붙이면, Qwen3-32B가 맞는 함수를 불러 최적 경로를 찾습니다. 긴 참조 문서를 주면 없는 함수를 지어내 죽습니다. 30문제에서 아무것도 안 주면 23%, 오래 생각하면 3%, 짧은 힌트는 83%입니다. 이 힌트를 사람 없이 고르는 방법은 뒤의 방법 슬라이드에서 보여 드립니다.
 [참고, 읽지 않음] 모델은 답을 무작위로 뽑기 때문에 같은 실험도 돌릴 때마다 조금씩 다릅니다. 짧은 힌트 막대는 같은 실험을 세 번 돌린 평균입니다(77, 83, 90%). 나머지 막대는 한 번씩 돌린 결과입니다.</a:t>
             </a:r>
             <a:endParaRPr lang="en-US" dirty="0"/>
@@ -3865,7 +3865,7 @@
           <a:p>
             <a:r>
               <a:rPr lang="en-US" dirty="0"/>
-              <a:t>(30초) 둘을 합친 것이 저희 방법입니다. 힌트를 붙여 쓰고, 검사하고, 실패할 때만 생각하고, 같은 종류가 다시 오면 재사용합니다. 실제 문제 하나에서는 힌트 없이 죽던 프로그램이 힌트로 바로 20000을 맞혀, 5.3k 대신 0.6k 토큰을 썼습니다. 기하와 최적화 208문제를 세 모델로 풀면, 답이 갈리는 문제에 생각을 몰아주는 기존 방식은 74%, 저희는 87%이고 토큰도 적습니다.</a:t>
+              <a:t>(40초) 둘을 합친 것이 저희 방법입니다. 힌트를 붙여 쓰고, 검사하고, 실패할 때만 생각하고, 같은 종류가 다시 오면 재사용합니다. 힌트는 사람 없이 이렇게 고릅니다. 모델이 같은 종류의 문제에 짰던 프로그램 중 검사를 통과한 것을 모으고, 가장 짧은 것을 힌트로 씁니다. 실제 문제 하나에서는 힌트 없이 죽던 프로그램이 힌트로 바로 20000을 맞혀, 5.3k 대신 0.6k 토큰을 썼습니다. 기하와 최적화 208문제를 세 모델로 풀면, 답이 갈리는 문제에 생각을 몰아주는 기존 방식은 74%, 저희는 87%이고 토큰도 적습니다.</a:t>
             </a:r>
             <a:endParaRPr lang="en-US" dirty="0"/>
           </a:p>
@@ -36933,8 +36933,8 @@
         </p:nvSpPr>
         <p:spPr>
           <a:xfrm>
-            <a:off x="6400800" y="1920240"/>
-            <a:ext cx="1600200" cy="402336"/>
+            <a:off x="6400800" y="2057400"/>
+            <a:ext cx="1600200" cy="548640"/>
           </a:xfrm>
           <a:prstGeom prst="rect">
             <a:avLst/>
@@ -36969,8 +36969,8 @@
         </p:nvSpPr>
         <p:spPr>
           <a:xfrm>
-            <a:off x="8138160" y="1995678"/>
-            <a:ext cx="336499" cy="251460"/>
+            <a:off x="8138160" y="2160270"/>
+            <a:ext cx="525780" cy="342900"/>
           </a:xfrm>
           <a:prstGeom prst="rect">
             <a:avLst/>
@@ -36994,8 +36994,8 @@
         </p:nvSpPr>
         <p:spPr>
           <a:xfrm>
-            <a:off x="8566099" y="1920240"/>
-            <a:ext cx="1737360" cy="402336"/>
+            <a:off x="8755380" y="2057400"/>
+            <a:ext cx="914400" cy="548640"/>
           </a:xfrm>
           <a:prstGeom prst="rect">
             <a:avLst/>
@@ -37030,8 +37030,8 @@
         </p:nvSpPr>
         <p:spPr>
           <a:xfrm>
-            <a:off x="6400800" y="2423160"/>
-            <a:ext cx="1600200" cy="402336"/>
+            <a:off x="6400800" y="2743200"/>
+            <a:ext cx="1600200" cy="548640"/>
           </a:xfrm>
           <a:prstGeom prst="rect">
             <a:avLst/>
@@ -37066,8 +37066,8 @@
         </p:nvSpPr>
         <p:spPr>
           <a:xfrm>
-            <a:off x="8138160" y="2498598"/>
-            <a:ext cx="45720" cy="251460"/>
+            <a:off x="8138160" y="2846070"/>
+            <a:ext cx="68580" cy="342900"/>
           </a:xfrm>
           <a:prstGeom prst="rect">
             <a:avLst/>
@@ -37091,8 +37091,8 @@
         </p:nvSpPr>
         <p:spPr>
           <a:xfrm>
-            <a:off x="8273491" y="2423160"/>
-            <a:ext cx="1737360" cy="402336"/>
+            <a:off x="8298180" y="2743200"/>
+            <a:ext cx="914400" cy="548640"/>
           </a:xfrm>
           <a:prstGeom prst="rect">
             <a:avLst/>
@@ -37127,8 +37127,8 @@
         </p:nvSpPr>
         <p:spPr>
           <a:xfrm>
-            <a:off x="6400800" y="2926080"/>
-            <a:ext cx="1600200" cy="402336"/>
+            <a:off x="6400800" y="3429000"/>
+            <a:ext cx="1600200" cy="548640"/>
           </a:xfrm>
           <a:prstGeom prst="rect">
             <a:avLst/>
@@ -37163,8 +37163,8 @@
         </p:nvSpPr>
         <p:spPr>
           <a:xfrm>
-            <a:off x="8138160" y="3001518"/>
-            <a:ext cx="102413" cy="251460"/>
+            <a:off x="8138160" y="3531870"/>
+            <a:ext cx="160020" cy="342900"/>
           </a:xfrm>
           <a:prstGeom prst="rect">
             <a:avLst/>
@@ -37188,8 +37188,8 @@
         </p:nvSpPr>
         <p:spPr>
           <a:xfrm>
-            <a:off x="8332013" y="2926080"/>
-            <a:ext cx="1737360" cy="402336"/>
+            <a:off x="8389620" y="3429000"/>
+            <a:ext cx="914400" cy="548640"/>
           </a:xfrm>
           <a:prstGeom prst="rect">
             <a:avLst/>
@@ -37224,8 +37224,8 @@
         </p:nvSpPr>
         <p:spPr>
           <a:xfrm>
-            <a:off x="6400800" y="3429000"/>
-            <a:ext cx="1600200" cy="402336"/>
+            <a:off x="6400800" y="4114800"/>
+            <a:ext cx="1600200" cy="548640"/>
           </a:xfrm>
           <a:prstGeom prst="rect">
             <a:avLst/>
@@ -37260,8 +37260,8 @@
         </p:nvSpPr>
         <p:spPr>
           <a:xfrm>
-            <a:off x="8138160" y="3504438"/>
-            <a:ext cx="1214323" cy="251460"/>
+            <a:off x="8138160" y="4217670"/>
+            <a:ext cx="1897380" cy="342900"/>
           </a:xfrm>
           <a:prstGeom prst="rect">
             <a:avLst/>
@@ -37285,8 +37285,8 @@
         </p:nvSpPr>
         <p:spPr>
           <a:xfrm>
-            <a:off x="9443923" y="3429000"/>
-            <a:ext cx="1737360" cy="402336"/>
+            <a:off x="10126980" y="4114800"/>
+            <a:ext cx="914400" cy="548640"/>
           </a:xfrm>
           <a:prstGeom prst="rect">
             <a:avLst/>
@@ -37321,8 +37321,8 @@
         </p:nvSpPr>
         <p:spPr>
           <a:xfrm>
-            <a:off x="6400800" y="4114800"/>
-            <a:ext cx="4983480" cy="347472"/>
+            <a:off x="6400800" y="4937760"/>
+            <a:ext cx="4983480" cy="411480"/>
           </a:xfrm>
           <a:prstGeom prst="rect">
             <a:avLst/>
@@ -37338,257 +37338,20 @@
               <a:buNone/>
             </a:pPr>
             <a:r>
-              <a:rPr lang="en-US" sz="1500" b="1" dirty="0">
-                <a:solidFill>
-                  <a:schemeClr val="tx1"/>
-                </a:solidFill>
-              </a:rPr>
-              <a:t>How we pick the hint (per problem type, no human):</a:t>
-            </a:r>
-            <a:endParaRPr lang="en-US" sz="1500" dirty="0"/>
-          </a:p>
-        </p:txBody>
-      </p:sp>
-      <p:sp>
-        <p:nvSpPr>
-          <p:cNvPr id="39" name="box its past programs"/>
-          <p:cNvSpPr/>
-          <p:nvPr/>
-        </p:nvSpPr>
-        <p:spPr>
-          <a:xfrm>
-            <a:off x="6400800" y="4572000"/>
-            <a:ext cx="1463040" cy="566928"/>
-          </a:xfrm>
-          <a:prstGeom prst="roundRect">
-            <a:avLst>
-              <a:gd name="adj" fmla="val 9677"/>
-            </a:avLst>
-          </a:prstGeom>
-          <a:solidFill>
-            <a:srgbClr val="FFFFFF"/>
-          </a:solidFill>
-          <a:ln w="9525">
-            <a:solidFill>
-              <a:srgbClr val="BFBFBF"/>
-            </a:solidFill>
-            <a:prstDash val="solid"/>
-          </a:ln>
-        </p:spPr>
-      </p:sp>
-      <p:sp>
-        <p:nvSpPr>
-          <p:cNvPr id="40" name="Text 33"/>
-          <p:cNvSpPr txBox="1"/>
-          <p:nvPr/>
-        </p:nvSpPr>
-        <p:spPr>
-          <a:xfrm>
-            <a:off x="6473952" y="4572000"/>
-            <a:ext cx="1316736" cy="566928"/>
-          </a:xfrm>
-          <a:prstGeom prst="rect">
-            <a:avLst/>
-          </a:prstGeom>
-          <a:noFill/>
-          <a:ln/>
-        </p:spPr>
-        <p:txBody>
-          <a:bodyPr wrap="square" lIns="0" tIns="0" rIns="0" bIns="0" rtlCol="0" anchor="ctr"/>
-          <a:lstStyle/>
-          <a:p>
-            <a:pPr algn="ctr" indent="0" marL="0">
-              <a:buNone/>
-            </a:pPr>
-            <a:r>
-              <a:rPr lang="en-US" sz="1500" dirty="0">
-                <a:solidFill>
-                  <a:schemeClr val="tx1"/>
-                </a:solidFill>
-              </a:rPr>
-              <a:t>its past programs</a:t>
-            </a:r>
-            <a:endParaRPr lang="en-US" sz="1500" dirty="0"/>
-          </a:p>
-        </p:txBody>
-      </p:sp>
-      <p:sp>
-        <p:nvSpPr>
-          <p:cNvPr id="41" name="Shape 34"/>
-          <p:cNvSpPr/>
-          <p:nvPr/>
-        </p:nvSpPr>
-        <p:spPr>
-          <a:xfrm>
-            <a:off x="7863840" y="4855464"/>
-            <a:ext cx="292608" cy="0"/>
-          </a:xfrm>
-          <a:prstGeom prst="line">
-            <a:avLst/>
-          </a:prstGeom>
-          <a:noFill/>
-          <a:ln w="25400">
-            <a:solidFill>
-              <a:srgbClr val="7F7F7F"/>
-            </a:solidFill>
-            <a:prstDash val="solid"/>
-            <a:tailEnd type="triangle"/>
-          </a:ln>
-        </p:spPr>
-      </p:sp>
-      <p:sp>
-        <p:nvSpPr>
-          <p:cNvPr id="42" name="box ✓ passed the check"/>
-          <p:cNvSpPr/>
-          <p:nvPr/>
-        </p:nvSpPr>
-        <p:spPr>
-          <a:xfrm>
-            <a:off x="8156448" y="4572000"/>
-            <a:ext cx="1463040" cy="566928"/>
-          </a:xfrm>
-          <a:prstGeom prst="roundRect">
-            <a:avLst>
-              <a:gd name="adj" fmla="val 9677"/>
-            </a:avLst>
-          </a:prstGeom>
-          <a:solidFill>
-            <a:srgbClr val="FFFFFF"/>
-          </a:solidFill>
-          <a:ln w="9525">
-            <a:solidFill>
-              <a:srgbClr val="BFBFBF"/>
-            </a:solidFill>
-            <a:prstDash val="solid"/>
-          </a:ln>
-        </p:spPr>
-      </p:sp>
-      <p:sp>
-        <p:nvSpPr>
-          <p:cNvPr id="43" name="Text 36"/>
-          <p:cNvSpPr txBox="1"/>
-          <p:nvPr/>
-        </p:nvSpPr>
-        <p:spPr>
-          <a:xfrm>
-            <a:off x="8229600" y="4572000"/>
-            <a:ext cx="1316736" cy="566928"/>
-          </a:xfrm>
-          <a:prstGeom prst="rect">
-            <a:avLst/>
-          </a:prstGeom>
-          <a:noFill/>
-          <a:ln/>
-        </p:spPr>
-        <p:txBody>
-          <a:bodyPr wrap="square" lIns="0" tIns="0" rIns="0" bIns="0" rtlCol="0" anchor="ctr"/>
-          <a:lstStyle/>
-          <a:p>
-            <a:pPr algn="ctr" indent="0" marL="0">
-              <a:buNone/>
-            </a:pPr>
-            <a:r>
-              <a:rPr lang="en-US" sz="1500" dirty="0">
-                <a:solidFill>
-                  <a:schemeClr val="tx1"/>
-                </a:solidFill>
-              </a:rPr>
-              <a:t>✓ passed the check</a:t>
-            </a:r>
-            <a:endParaRPr lang="en-US" sz="1500" dirty="0"/>
-          </a:p>
-        </p:txBody>
-      </p:sp>
-      <p:sp>
-        <p:nvSpPr>
-          <p:cNvPr id="44" name="Shape 37"/>
-          <p:cNvSpPr/>
-          <p:nvPr/>
-        </p:nvSpPr>
-        <p:spPr>
-          <a:xfrm>
-            <a:off x="9619488" y="4855464"/>
-            <a:ext cx="292608" cy="0"/>
-          </a:xfrm>
-          <a:prstGeom prst="line">
-            <a:avLst/>
-          </a:prstGeom>
-          <a:noFill/>
-          <a:ln w="25400">
-            <a:solidFill>
-              <a:srgbClr val="7F7F7F"/>
-            </a:solidFill>
-            <a:prstDash val="solid"/>
-            <a:tailEnd type="triangle"/>
-          </a:ln>
-        </p:spPr>
-      </p:sp>
-      <p:sp>
-        <p:nvSpPr>
-          <p:cNvPr id="45" name="box shortest = hint"/>
-          <p:cNvSpPr/>
-          <p:nvPr/>
-        </p:nvSpPr>
-        <p:spPr>
-          <a:xfrm>
-            <a:off x="9912096" y="4572000"/>
-            <a:ext cx="1463040" cy="566928"/>
-          </a:xfrm>
-          <a:prstGeom prst="roundRect">
-            <a:avLst>
-              <a:gd name="adj" fmla="val 9677"/>
-            </a:avLst>
-          </a:prstGeom>
-          <a:solidFill>
-            <a:srgbClr val="E2F0D9"/>
-          </a:solidFill>
-          <a:ln w="9525">
-            <a:solidFill>
-              <a:srgbClr val="BFBFBF"/>
-            </a:solidFill>
-            <a:prstDash val="solid"/>
-          </a:ln>
-        </p:spPr>
-      </p:sp>
-      <p:sp>
-        <p:nvSpPr>
-          <p:cNvPr id="46" name="Text 39"/>
-          <p:cNvSpPr txBox="1"/>
-          <p:nvPr/>
-        </p:nvSpPr>
-        <p:spPr>
-          <a:xfrm>
-            <a:off x="9985248" y="4572000"/>
-            <a:ext cx="1316736" cy="566928"/>
-          </a:xfrm>
-          <a:prstGeom prst="rect">
-            <a:avLst/>
-          </a:prstGeom>
-          <a:noFill/>
-          <a:ln/>
-        </p:spPr>
-        <p:txBody>
-          <a:bodyPr wrap="square" lIns="0" tIns="0" rIns="0" bIns="0" rtlCol="0" anchor="ctr"/>
-          <a:lstStyle/>
-          <a:p>
-            <a:pPr algn="ctr" indent="0" marL="0">
-              <a:buNone/>
-            </a:pPr>
-            <a:r>
-              <a:rPr lang="en-US" sz="1500" b="1" dirty="0">
-                <a:solidFill>
-                  <a:srgbClr val="38761D"/>
-                </a:solidFill>
-              </a:rPr>
-              <a:t>shortest = hint</a:t>
-            </a:r>
-            <a:endParaRPr lang="en-US" sz="1500" dirty="0"/>
-          </a:p>
-        </p:txBody>
-      </p:sp>
-      <p:sp>
-        <p:nvSpPr>
-          <p:cNvPr id="47" name="Text 40"/>
+              <a:rPr lang="en-US" sz="1400" dirty="0">
+                <a:solidFill>
+                  <a:schemeClr val="tx2"/>
+                </a:solidFill>
+              </a:rPr>
+              <a:t>How we pick the hint without a human: see our method</a:t>
+            </a:r>
+            <a:endParaRPr lang="en-US" sz="1400" dirty="0"/>
+          </a:p>
+        </p:txBody>
+      </p:sp>
+      <p:sp>
+        <p:nvSpPr>
+          <p:cNvPr id="39" name="Text 32"/>
           <p:cNvSpPr txBox="1"/>
           <p:nvPr/>
         </p:nvSpPr>
@@ -40504,7 +40267,7 @@
       </p:pic>
       <p:sp>
         <p:nvSpPr>
-          <p:cNvPr id="37" name="one real problem"/>
+          <p:cNvPr id="37" name="how we pick the hint"/>
           <p:cNvSpPr/>
           <p:nvPr/>
         </p:nvSpPr>
@@ -40559,7 +40322,7 @@
                   <a:srgbClr val="4472C4"/>
                 </a:solidFill>
               </a:rPr>
-              <a:t>One real problem (Qwen3-8B, a MAMO word problem)</a:t>
+              <a:t>① How we pick the hint (once per type, no human)</a:t>
             </a:r>
             <a:endParaRPr lang="en-US" sz="1700" dirty="0"/>
           </a:p>
@@ -40567,18 +40330,18 @@
       </p:sp>
       <p:sp>
         <p:nvSpPr>
-          <p:cNvPr id="39" name="box Task: the minimum co"/>
+          <p:cNvPr id="39" name="box its past programs"/>
           <p:cNvSpPr/>
           <p:nvPr/>
         </p:nvSpPr>
         <p:spPr>
           <a:xfrm>
-            <a:off x="777240" y="2743200"/>
-            <a:ext cx="4892040" cy="548640"/>
+            <a:off x="777240" y="2761488"/>
+            <a:ext cx="1463040" cy="530352"/>
           </a:xfrm>
           <a:prstGeom prst="roundRect">
             <a:avLst>
-              <a:gd name="adj" fmla="val 10000"/>
+              <a:gd name="adj" fmla="val 10345"/>
             </a:avLst>
           </a:prstGeom>
           <a:solidFill>
@@ -40600,8 +40363,8 @@
         </p:nvSpPr>
         <p:spPr>
           <a:xfrm>
-            <a:off x="850392" y="2743200"/>
-            <a:ext cx="4745736" cy="548640"/>
+            <a:off x="850392" y="2761488"/>
+            <a:ext cx="1316736" cy="530352"/>
           </a:xfrm>
           <a:prstGeom prst="rect">
             <a:avLst/>
@@ -40622,7 +40385,7 @@
                   <a:schemeClr val="tx1"/>
                 </a:solidFill>
               </a:rPr>
-              <a:t>Task: the minimum cost of products X, Y, Z under three limits (answer 20000)</a:t>
+              <a:t>its past programs</a:t>
             </a:r>
             <a:endParaRPr lang="en-US" sz="1500" dirty="0"/>
           </a:p>
@@ -40630,18 +40393,228 @@
       </p:sp>
       <p:sp>
         <p:nvSpPr>
-          <p:cNvPr id="41" name="box ✗ no hint: it calls "/>
+          <p:cNvPr id="41" name="Shape 21"/>
           <p:cNvSpPr/>
           <p:nvPr/>
         </p:nvSpPr>
         <p:spPr>
           <a:xfrm>
-            <a:off x="777240" y="3383280"/>
-            <a:ext cx="4892040" cy="502920"/>
+            <a:off x="2240280" y="3026664"/>
+            <a:ext cx="256032" cy="0"/>
+          </a:xfrm>
+          <a:prstGeom prst="line">
+            <a:avLst/>
+          </a:prstGeom>
+          <a:noFill/>
+          <a:ln w="25400">
+            <a:solidFill>
+              <a:srgbClr val="7F7F7F"/>
+            </a:solidFill>
+            <a:prstDash val="solid"/>
+            <a:tailEnd type="triangle"/>
+          </a:ln>
+        </p:spPr>
+      </p:sp>
+      <p:sp>
+        <p:nvSpPr>
+          <p:cNvPr id="42" name="box ✓ passed the check"/>
+          <p:cNvSpPr/>
+          <p:nvPr/>
+        </p:nvSpPr>
+        <p:spPr>
+          <a:xfrm>
+            <a:off x="2496312" y="2761488"/>
+            <a:ext cx="1463040" cy="530352"/>
           </a:xfrm>
           <a:prstGeom prst="roundRect">
             <a:avLst>
-              <a:gd name="adj" fmla="val 10909"/>
+              <a:gd name="adj" fmla="val 10345"/>
+            </a:avLst>
+          </a:prstGeom>
+          <a:solidFill>
+            <a:srgbClr val="FFFFFF"/>
+          </a:solidFill>
+          <a:ln w="9525">
+            <a:solidFill>
+              <a:srgbClr val="BFBFBF"/>
+            </a:solidFill>
+            <a:prstDash val="solid"/>
+          </a:ln>
+        </p:spPr>
+      </p:sp>
+      <p:sp>
+        <p:nvSpPr>
+          <p:cNvPr id="43" name="Text 23"/>
+          <p:cNvSpPr txBox="1"/>
+          <p:nvPr/>
+        </p:nvSpPr>
+        <p:spPr>
+          <a:xfrm>
+            <a:off x="2569464" y="2761488"/>
+            <a:ext cx="1316736" cy="530352"/>
+          </a:xfrm>
+          <a:prstGeom prst="rect">
+            <a:avLst/>
+          </a:prstGeom>
+          <a:noFill/>
+          <a:ln/>
+        </p:spPr>
+        <p:txBody>
+          <a:bodyPr wrap="square" lIns="0" tIns="0" rIns="0" bIns="0" rtlCol="0" anchor="ctr"/>
+          <a:lstStyle/>
+          <a:p>
+            <a:pPr algn="ctr" indent="0" marL="0">
+              <a:buNone/>
+            </a:pPr>
+            <a:r>
+              <a:rPr lang="en-US" sz="1500" dirty="0">
+                <a:solidFill>
+                  <a:schemeClr val="tx1"/>
+                </a:solidFill>
+              </a:rPr>
+              <a:t>✓ passed the check</a:t>
+            </a:r>
+            <a:endParaRPr lang="en-US" sz="1500" dirty="0"/>
+          </a:p>
+        </p:txBody>
+      </p:sp>
+      <p:sp>
+        <p:nvSpPr>
+          <p:cNvPr id="44" name="Shape 24"/>
+          <p:cNvSpPr/>
+          <p:nvPr/>
+        </p:nvSpPr>
+        <p:spPr>
+          <a:xfrm>
+            <a:off x="3959352" y="3026664"/>
+            <a:ext cx="256032" cy="0"/>
+          </a:xfrm>
+          <a:prstGeom prst="line">
+            <a:avLst/>
+          </a:prstGeom>
+          <a:noFill/>
+          <a:ln w="25400">
+            <a:solidFill>
+              <a:srgbClr val="7F7F7F"/>
+            </a:solidFill>
+            <a:prstDash val="solid"/>
+            <a:tailEnd type="triangle"/>
+          </a:ln>
+        </p:spPr>
+      </p:sp>
+      <p:sp>
+        <p:nvSpPr>
+          <p:cNvPr id="45" name="box shortest = hint"/>
+          <p:cNvSpPr/>
+          <p:nvPr/>
+        </p:nvSpPr>
+        <p:spPr>
+          <a:xfrm>
+            <a:off x="4215384" y="2761488"/>
+            <a:ext cx="1463040" cy="530352"/>
+          </a:xfrm>
+          <a:prstGeom prst="roundRect">
+            <a:avLst>
+              <a:gd name="adj" fmla="val 10345"/>
+            </a:avLst>
+          </a:prstGeom>
+          <a:solidFill>
+            <a:srgbClr val="E2F0D9"/>
+          </a:solidFill>
+          <a:ln w="9525">
+            <a:solidFill>
+              <a:srgbClr val="BFBFBF"/>
+            </a:solidFill>
+            <a:prstDash val="solid"/>
+          </a:ln>
+        </p:spPr>
+      </p:sp>
+      <p:sp>
+        <p:nvSpPr>
+          <p:cNvPr id="46" name="Text 26"/>
+          <p:cNvSpPr txBox="1"/>
+          <p:nvPr/>
+        </p:nvSpPr>
+        <p:spPr>
+          <a:xfrm>
+            <a:off x="4288536" y="2761488"/>
+            <a:ext cx="1316736" cy="530352"/>
+          </a:xfrm>
+          <a:prstGeom prst="rect">
+            <a:avLst/>
+          </a:prstGeom>
+          <a:noFill/>
+          <a:ln/>
+        </p:spPr>
+        <p:txBody>
+          <a:bodyPr wrap="square" lIns="0" tIns="0" rIns="0" bIns="0" rtlCol="0" anchor="ctr"/>
+          <a:lstStyle/>
+          <a:p>
+            <a:pPr algn="ctr" indent="0" marL="0">
+              <a:buNone/>
+            </a:pPr>
+            <a:r>
+              <a:rPr lang="en-US" sz="1500" b="1" dirty="0">
+                <a:solidFill>
+                  <a:srgbClr val="38761D"/>
+                </a:solidFill>
+              </a:rPr>
+              <a:t>shortest = hint</a:t>
+            </a:r>
+            <a:endParaRPr lang="en-US" sz="1500" dirty="0"/>
+          </a:p>
+        </p:txBody>
+      </p:sp>
+      <p:sp>
+        <p:nvSpPr>
+          <p:cNvPr id="47" name="Text 27"/>
+          <p:cNvSpPr txBox="1"/>
+          <p:nvPr/>
+        </p:nvSpPr>
+        <p:spPr>
+          <a:xfrm>
+            <a:off x="777240" y="3429000"/>
+            <a:ext cx="4937760" cy="320040"/>
+          </a:xfrm>
+          <a:prstGeom prst="rect">
+            <a:avLst/>
+          </a:prstGeom>
+          <a:noFill/>
+          <a:ln/>
+        </p:spPr>
+        <p:txBody>
+          <a:bodyPr wrap="square" lIns="0" tIns="0" rIns="0" bIns="0" rtlCol="0" anchor="ctr"/>
+          <a:lstStyle/>
+          <a:p>
+            <a:pPr indent="0" marL="0">
+              <a:buNone/>
+            </a:pPr>
+            <a:r>
+              <a:rPr lang="en-US" sz="1500" b="1" dirty="0">
+                <a:solidFill>
+                  <a:schemeClr val="tx1"/>
+                </a:solidFill>
+              </a:rPr>
+              <a:t>One real problem (Qwen3-8B, answer 20000):</a:t>
+            </a:r>
+            <a:endParaRPr lang="en-US" sz="1500" dirty="0"/>
+          </a:p>
+        </p:txBody>
+      </p:sp>
+      <p:sp>
+        <p:nvSpPr>
+          <p:cNvPr id="48" name="box ✗ no hint: it calls "/>
+          <p:cNvSpPr/>
+          <p:nvPr/>
+        </p:nvSpPr>
+        <p:spPr>
+          <a:xfrm>
+            <a:off x="777240" y="3794760"/>
+            <a:ext cx="4892040" cy="457200"/>
+          </a:xfrm>
+          <a:prstGeom prst="roundRect">
+            <a:avLst>
+              <a:gd name="adj" fmla="val 12000"/>
             </a:avLst>
           </a:prstGeom>
           <a:solidFill>
@@ -40657,14 +40630,14 @@
       </p:sp>
       <p:sp>
         <p:nvSpPr>
-          <p:cNvPr id="42" name="Text 22"/>
+          <p:cNvPr id="49" name="Text 29"/>
           <p:cNvSpPr txBox="1"/>
           <p:nvPr/>
         </p:nvSpPr>
         <p:spPr>
           <a:xfrm>
-            <a:off x="850392" y="3383280"/>
-            <a:ext cx="4745736" cy="502920"/>
+            <a:off x="850392" y="3794760"/>
+            <a:ext cx="4745736" cy="457200"/>
           </a:xfrm>
           <a:prstGeom prst="rect">
             <a:avLst/>
@@ -40693,18 +40666,18 @@
       </p:sp>
       <p:sp>
         <p:nvSpPr>
-          <p:cNvPr id="43" name="box ✓ hint = its own che"/>
+          <p:cNvPr id="50" name="box ✓ with the hint: bot"/>
           <p:cNvSpPr/>
           <p:nvPr/>
         </p:nvSpPr>
         <p:spPr>
           <a:xfrm>
-            <a:off x="777240" y="3977640"/>
-            <a:ext cx="4892040" cy="731520"/>
+            <a:off x="777240" y="4325112"/>
+            <a:ext cx="4892040" cy="457200"/>
           </a:xfrm>
           <a:prstGeom prst="roundRect">
             <a:avLst>
-              <a:gd name="adj" fmla="val 7500"/>
+              <a:gd name="adj" fmla="val 12000"/>
             </a:avLst>
           </a:prstGeom>
           <a:solidFill>
@@ -40720,14 +40693,14 @@
       </p:sp>
       <p:sp>
         <p:nvSpPr>
-          <p:cNvPr id="44" name="Text 24"/>
+          <p:cNvPr id="51" name="Text 31"/>
           <p:cNvSpPr txBox="1"/>
           <p:nvPr/>
         </p:nvSpPr>
         <p:spPr>
           <a:xfrm>
-            <a:off x="850392" y="3977640"/>
-            <a:ext cx="4745736" cy="731520"/>
+            <a:off x="850392" y="4325112"/>
+            <a:ext cx="4745736" cy="457200"/>
           </a:xfrm>
           <a:prstGeom prst="rect">
             <a:avLst/>
@@ -40748,7 +40721,7 @@
                   <a:srgbClr val="38761D"/>
                 </a:solidFill>
               </a:rPr>
-              <a:t>✓ hint = its own checked program from another problem: both versions print 20000 → submit</a:t>
+              <a:t>✓ with the hint: both versions print 20000 → submit</a:t>
             </a:r>
             <a:endParaRPr lang="en-US" sz="1500" dirty="0"/>
           </a:p>
@@ -40756,13 +40729,13 @@
       </p:sp>
       <p:sp>
         <p:nvSpPr>
-          <p:cNvPr id="45" name="Text 25"/>
+          <p:cNvPr id="52" name="Text 32"/>
           <p:cNvSpPr txBox="1"/>
           <p:nvPr/>
         </p:nvSpPr>
         <p:spPr>
           <a:xfrm>
-            <a:off x="777240" y="4846320"/>
+            <a:off x="777240" y="4892040"/>
             <a:ext cx="4892040" cy="411480"/>
           </a:xfrm>
           <a:prstGeom prst="rect">
@@ -40803,7 +40776,7 @@
       </p:sp>
       <p:sp>
         <p:nvSpPr>
-          <p:cNvPr id="46" name="overall result"/>
+          <p:cNvPr id="53" name="overall result"/>
           <p:cNvSpPr/>
           <p:nvPr/>
         </p:nvSpPr>
@@ -40830,7 +40803,7 @@
       </p:sp>
       <p:sp>
         <p:nvSpPr>
-          <p:cNvPr id="47" name="Text 27"/>
+          <p:cNvPr id="54" name="Text 34"/>
           <p:cNvSpPr txBox="1"/>
           <p:nvPr/>
         </p:nvSpPr>
@@ -40866,7 +40839,7 @@
       </p:sp>
       <p:sp>
         <p:nvSpPr>
-          <p:cNvPr id="48" name="Text 28"/>
+          <p:cNvPr id="55" name="Text 35"/>
           <p:cNvSpPr txBox="1"/>
           <p:nvPr/>
         </p:nvSpPr>
@@ -40902,7 +40875,7 @@
       </p:sp>
       <p:sp>
         <p:nvSpPr>
-          <p:cNvPr id="49" name="Text 29"/>
+          <p:cNvPr id="56" name="Text 36"/>
           <p:cNvSpPr txBox="1"/>
           <p:nvPr/>
         </p:nvSpPr>
@@ -40938,7 +40911,7 @@
       </p:sp>
       <p:sp>
         <p:nvSpPr>
-          <p:cNvPr id="50" name="Text 30"/>
+          <p:cNvPr id="57" name="Text 37"/>
           <p:cNvSpPr txBox="1"/>
           <p:nvPr/>
         </p:nvSpPr>
@@ -40974,7 +40947,7 @@
       </p:sp>
       <p:sp>
         <p:nvSpPr>
-          <p:cNvPr id="51" name="Text 31"/>
+          <p:cNvPr id="58" name="Text 38"/>
           <p:cNvSpPr txBox="1"/>
           <p:nvPr/>
         </p:nvSpPr>
@@ -41010,7 +40983,7 @@
       </p:sp>
       <p:sp>
         <p:nvSpPr>
-          <p:cNvPr id="52" name="tokens think where answers differ"/>
+          <p:cNvPr id="59" name="tokens think where answers differ"/>
           <p:cNvSpPr/>
           <p:nvPr/>
         </p:nvSpPr>
@@ -41035,7 +41008,7 @@
       </p:sp>
       <p:sp>
         <p:nvSpPr>
-          <p:cNvPr id="53" name="Text 33"/>
+          <p:cNvPr id="60" name="Text 40"/>
           <p:cNvSpPr txBox="1"/>
           <p:nvPr/>
         </p:nvSpPr>
@@ -41071,7 +41044,7 @@
       </p:sp>
       <p:sp>
         <p:nvSpPr>
-          <p:cNvPr id="54" name="Text 34"/>
+          <p:cNvPr id="61" name="Text 41"/>
           <p:cNvSpPr txBox="1"/>
           <p:nvPr/>
         </p:nvSpPr>
@@ -41107,7 +41080,7 @@
       </p:sp>
       <p:sp>
         <p:nvSpPr>
-          <p:cNvPr id="55" name="Text 35"/>
+          <p:cNvPr id="62" name="Text 42"/>
           <p:cNvSpPr txBox="1"/>
           <p:nvPr/>
         </p:nvSpPr>
@@ -41143,7 +41116,7 @@
       </p:sp>
       <p:sp>
         <p:nvSpPr>
-          <p:cNvPr id="56" name="tokens ours, hint found by search"/>
+          <p:cNvPr id="63" name="tokens ours, hint found by search"/>
           <p:cNvSpPr/>
           <p:nvPr/>
         </p:nvSpPr>
@@ -41168,7 +41141,7 @@
       </p:sp>
       <p:sp>
         <p:nvSpPr>
-          <p:cNvPr id="57" name="Text 37"/>
+          <p:cNvPr id="64" name="Text 44"/>
           <p:cNvSpPr txBox="1"/>
           <p:nvPr/>
         </p:nvSpPr>
@@ -41204,7 +41177,7 @@
       </p:sp>
       <p:sp>
         <p:nvSpPr>
-          <p:cNvPr id="58" name="Text 38"/>
+          <p:cNvPr id="65" name="Text 45"/>
           <p:cNvSpPr txBox="1"/>
           <p:nvPr/>
         </p:nvSpPr>
@@ -41240,7 +41213,7 @@
       </p:sp>
       <p:sp>
         <p:nvSpPr>
-          <p:cNvPr id="59" name="Text 39"/>
+          <p:cNvPr id="66" name="Text 46"/>
           <p:cNvSpPr txBox="1"/>
           <p:nvPr/>
         </p:nvSpPr>
@@ -41276,7 +41249,7 @@
       </p:sp>
       <p:sp>
         <p:nvSpPr>
-          <p:cNvPr id="60" name="tokens ours, hand-written hint"/>
+          <p:cNvPr id="67" name="tokens ours, hand-written hint"/>
           <p:cNvSpPr/>
           <p:nvPr/>
         </p:nvSpPr>
@@ -41301,7 +41274,7 @@
       </p:sp>
       <p:sp>
         <p:nvSpPr>
-          <p:cNvPr id="61" name="Text 41"/>
+          <p:cNvPr id="68" name="Text 48"/>
           <p:cNvSpPr txBox="1"/>
           <p:nvPr/>
         </p:nvSpPr>
@@ -41337,7 +41310,7 @@
       </p:sp>
       <p:sp>
         <p:nvSpPr>
-          <p:cNvPr id="62" name="Text 42"/>
+          <p:cNvPr id="69" name="Text 49"/>
           <p:cNvSpPr txBox="1"/>
           <p:nvPr/>
         </p:nvSpPr>
@@ -41373,7 +41346,7 @@
       </p:sp>
       <p:sp>
         <p:nvSpPr>
-          <p:cNvPr id="63" name="Text 43"/>
+          <p:cNvPr id="70" name="Text 50"/>
           <p:cNvSpPr txBox="1"/>
           <p:nvPr/>
         </p:nvSpPr>

--- a/Proposal_Team5.pptx
+++ b/Proposal_Team5.pptx
@@ -137,7 +137,7 @@
   <p:extLst>
     <p:ext uri="{521415D9-36F7-43E2-AB2F-B90AF26B5E84}">
       <p14:sectionLst xmlns:p14="http://schemas.microsoft.com/office/powerpoint/2010/main">
-        <p14:section name="Talk" id="{225c03cd-66ee-90dc-c657-2bc5e755be8f}">
+        <p14:section name="Talk" id="{4be72354-df8e-4cb1-da7c-39754113c340}">
           <p14:sldIdLst>
             <p14:sldId id="256"/>
             <p14:sldId id="257"/>
@@ -150,7 +150,7 @@
             <p14:sldId id="264"/>
           </p14:sldIdLst>
         </p14:section>
-        <p14:section name="Extra pages" id="{cebb3469-6b71-9e1a-b08d-5b00c5734770}">
+        <p14:section name="Extra pages" id="{1bdff7ae-14a7-169b-41d7-15493f2d261a}">
           <p14:sldIdLst>
             <p14:sldId id="265"/>
             <p14:sldId id="266"/>
@@ -1400,7 +1400,7 @@
           <a:p>
             <a:r>
               <a:rPr lang="en-US" dirty="0"/>
-              <a:t>(10초) 안녕하세요, 5조입니다. LLM으로 계산 수학 문제를 정확하고 싸게 푸는 방법을 제안합니다. 추가 노력을 힌트, 검사, 생각 중 어디에 써야 할까요?</a:t>
+              <a:t>(10초) 안녕하세요, 5조입니다. 저희는 답을 정확히 계산해야 하는 수학 문제를 LLM이 프로그램을 짜서 푸는 경우에 집중합니다. 목표는 더 적은 토큰으로 맞는 답을 얻는 것입니다.</a:t>
             </a:r>
             <a:endParaRPr lang="en-US" dirty="0"/>
           </a:p>
@@ -4945,7 +4945,7 @@
                   <a:schemeClr val="tx1"/>
                 </a:solidFill>
               </a:rPr>
-              <a:t>A hint, a check, or more thinking: where should the extra effort go?</a:t>
+              <a:t>Focus: math with an exact answer, solved by programs an LLM writes</a:t>
             </a:r>
             <a:endParaRPr lang="en-US" sz="2200" dirty="0"/>
           </a:p>
@@ -4962,267 +4962,6 @@
               <a:t>Team 5: Sangjun Lee, Seongbin Park · POSTECH CSED490E</a:t>
             </a:r>
             <a:endParaRPr lang="en-US" sz="2200" dirty="0"/>
-          </a:p>
-        </p:txBody>
-      </p:sp>
-      <p:sp>
-        <p:nvSpPr>
-          <p:cNvPr id="4" name="choice a missing fact"/>
-          <p:cNvSpPr/>
-          <p:nvPr/>
-        </p:nvSpPr>
-        <p:spPr>
-          <a:xfrm>
-            <a:off x="3145536" y="4892040"/>
-            <a:ext cx="1874520" cy="502920"/>
-          </a:xfrm>
-          <a:prstGeom prst="roundRect">
-            <a:avLst>
-              <a:gd name="adj" fmla="val 36364"/>
-            </a:avLst>
-          </a:prstGeom>
-          <a:solidFill>
-            <a:srgbClr val="E2F0D9"/>
-          </a:solidFill>
-          <a:ln w="12700">
-            <a:solidFill>
-              <a:srgbClr val="38761D"/>
-            </a:solidFill>
-            <a:prstDash val="solid"/>
-          </a:ln>
-        </p:spPr>
-      </p:sp>
-      <p:pic>
-        <p:nvPicPr>
-          <p:cNvPr id="5" name="choice icon fact" descr="/NAS/SJ/POSTECH/nlp/figs/icons/fact.png">    </p:cNvPr>
-          <p:cNvPicPr>
-            <a:picLocks noChangeAspect="1"/>
-          </p:cNvPicPr>
-          <p:nvPr/>
-        </p:nvPicPr>
-        <p:blipFill>
-          <a:blip r:embed="rId1"/>
-          <a:stretch>
-            <a:fillRect/>
-          </a:stretch>
-        </p:blipFill>
-        <p:spPr>
-          <a:xfrm>
-            <a:off x="3255264" y="4978908"/>
-            <a:ext cx="329184" cy="329184"/>
-          </a:xfrm>
-          <a:prstGeom prst="rect">
-            <a:avLst/>
-          </a:prstGeom>
-        </p:spPr>
-      </p:pic>
-      <p:sp>
-        <p:nvSpPr>
-          <p:cNvPr id="6" name="Text 3"/>
-          <p:cNvSpPr txBox="1"/>
-          <p:nvPr/>
-        </p:nvSpPr>
-        <p:spPr>
-          <a:xfrm>
-            <a:off x="3648456" y="4892040"/>
-            <a:ext cx="1371600" cy="502920"/>
-          </a:xfrm>
-          <a:prstGeom prst="rect">
-            <a:avLst/>
-          </a:prstGeom>
-          <a:noFill/>
-          <a:ln/>
-        </p:spPr>
-        <p:txBody>
-          <a:bodyPr wrap="square" lIns="0" tIns="0" rIns="0" bIns="0" rtlCol="0" anchor="ctr"/>
-          <a:lstStyle/>
-          <a:p>
-            <a:pPr indent="0" marL="0">
-              <a:buNone/>
-            </a:pPr>
-            <a:r>
-              <a:rPr lang="en-US" sz="1500" b="1" dirty="0">
-                <a:solidFill>
-                  <a:srgbClr val="38761D"/>
-                </a:solidFill>
-              </a:rPr>
-              <a:t>a code hint</a:t>
-            </a:r>
-            <a:endParaRPr lang="en-US" sz="1500" dirty="0"/>
-          </a:p>
-        </p:txBody>
-      </p:sp>
-      <p:sp>
-        <p:nvSpPr>
-          <p:cNvPr id="7" name="choice a free check"/>
-          <p:cNvSpPr/>
-          <p:nvPr/>
-        </p:nvSpPr>
-        <p:spPr>
-          <a:xfrm>
-            <a:off x="5157216" y="4892040"/>
-            <a:ext cx="1874520" cy="502920"/>
-          </a:xfrm>
-          <a:prstGeom prst="roundRect">
-            <a:avLst>
-              <a:gd name="adj" fmla="val 36364"/>
-            </a:avLst>
-          </a:prstGeom>
-          <a:solidFill>
-            <a:srgbClr val="E2F0D9"/>
-          </a:solidFill>
-          <a:ln w="12700">
-            <a:solidFill>
-              <a:srgbClr val="38761D"/>
-            </a:solidFill>
-            <a:prstDash val="solid"/>
-          </a:ln>
-        </p:spPr>
-      </p:sp>
-      <p:pic>
-        <p:nvPicPr>
-          <p:cNvPr id="8" name="choice icon check" descr="/NAS/SJ/POSTECH/nlp/figs/icons/check.png">    </p:cNvPr>
-          <p:cNvPicPr>
-            <a:picLocks noChangeAspect="1"/>
-          </p:cNvPicPr>
-          <p:nvPr/>
-        </p:nvPicPr>
-        <p:blipFill>
-          <a:blip r:embed="rId2"/>
-          <a:stretch>
-            <a:fillRect/>
-          </a:stretch>
-        </p:blipFill>
-        <p:spPr>
-          <a:xfrm>
-            <a:off x="5266944" y="4978908"/>
-            <a:ext cx="329184" cy="329184"/>
-          </a:xfrm>
-          <a:prstGeom prst="rect">
-            <a:avLst/>
-          </a:prstGeom>
-        </p:spPr>
-      </p:pic>
-      <p:sp>
-        <p:nvSpPr>
-          <p:cNvPr id="9" name="Text 5"/>
-          <p:cNvSpPr txBox="1"/>
-          <p:nvPr/>
-        </p:nvSpPr>
-        <p:spPr>
-          <a:xfrm>
-            <a:off x="5660136" y="4892040"/>
-            <a:ext cx="1371600" cy="502920"/>
-          </a:xfrm>
-          <a:prstGeom prst="rect">
-            <a:avLst/>
-          </a:prstGeom>
-          <a:noFill/>
-          <a:ln/>
-        </p:spPr>
-        <p:txBody>
-          <a:bodyPr wrap="square" lIns="0" tIns="0" rIns="0" bIns="0" rtlCol="0" anchor="ctr"/>
-          <a:lstStyle/>
-          <a:p>
-            <a:pPr indent="0" marL="0">
-              <a:buNone/>
-            </a:pPr>
-            <a:r>
-              <a:rPr lang="en-US" sz="1500" b="1" dirty="0">
-                <a:solidFill>
-                  <a:srgbClr val="38761D"/>
-                </a:solidFill>
-              </a:rPr>
-              <a:t>a free check</a:t>
-            </a:r>
-            <a:endParaRPr lang="en-US" sz="1500" dirty="0"/>
-          </a:p>
-        </p:txBody>
-      </p:sp>
-      <p:sp>
-        <p:nvSpPr>
-          <p:cNvPr id="10" name="choice more thinking"/>
-          <p:cNvSpPr/>
-          <p:nvPr/>
-        </p:nvSpPr>
-        <p:spPr>
-          <a:xfrm>
-            <a:off x="7168896" y="4892040"/>
-            <a:ext cx="1874520" cy="502920"/>
-          </a:xfrm>
-          <a:prstGeom prst="roundRect">
-            <a:avLst>
-              <a:gd name="adj" fmla="val 36364"/>
-            </a:avLst>
-          </a:prstGeom>
-          <a:solidFill>
-            <a:srgbClr val="FADBD8"/>
-          </a:solidFill>
-          <a:ln w="12700">
-            <a:solidFill>
-              <a:srgbClr val="C00000"/>
-            </a:solidFill>
-            <a:prstDash val="solid"/>
-          </a:ln>
-        </p:spPr>
-      </p:sp>
-      <p:pic>
-        <p:nvPicPr>
-          <p:cNvPr id="11" name="choice icon brain" descr="/NAS/SJ/POSTECH/nlp/figs/icons/brain.png">    </p:cNvPr>
-          <p:cNvPicPr>
-            <a:picLocks noChangeAspect="1"/>
-          </p:cNvPicPr>
-          <p:nvPr/>
-        </p:nvPicPr>
-        <p:blipFill>
-          <a:blip r:embed="rId3"/>
-          <a:stretch>
-            <a:fillRect/>
-          </a:stretch>
-        </p:blipFill>
-        <p:spPr>
-          <a:xfrm>
-            <a:off x="7278624" y="4978908"/>
-            <a:ext cx="329184" cy="329184"/>
-          </a:xfrm>
-          <a:prstGeom prst="rect">
-            <a:avLst/>
-          </a:prstGeom>
-        </p:spPr>
-      </p:pic>
-      <p:sp>
-        <p:nvSpPr>
-          <p:cNvPr id="12" name="Text 7"/>
-          <p:cNvSpPr txBox="1"/>
-          <p:nvPr/>
-        </p:nvSpPr>
-        <p:spPr>
-          <a:xfrm>
-            <a:off x="7671816" y="4892040"/>
-            <a:ext cx="1371600" cy="502920"/>
-          </a:xfrm>
-          <a:prstGeom prst="rect">
-            <a:avLst/>
-          </a:prstGeom>
-          <a:noFill/>
-          <a:ln/>
-        </p:spPr>
-        <p:txBody>
-          <a:bodyPr wrap="square" lIns="0" tIns="0" rIns="0" bIns="0" rtlCol="0" anchor="ctr"/>
-          <a:lstStyle/>
-          <a:p>
-            <a:pPr indent="0" marL="0">
-              <a:buNone/>
-            </a:pPr>
-            <a:r>
-              <a:rPr lang="en-US" sz="1500" b="1" dirty="0">
-                <a:solidFill>
-                  <a:srgbClr val="C00000"/>
-                </a:solidFill>
-              </a:rPr>
-              <a:t>more thinking</a:t>
-            </a:r>
-            <a:endParaRPr lang="en-US" sz="1500" dirty="0"/>
           </a:p>
         </p:txBody>
       </p:sp>

--- a/Proposal_Team5.pptx
+++ b/Proposal_Team5.pptx
@@ -137,7 +137,7 @@
   <p:extLst>
     <p:ext uri="{521415D9-36F7-43E2-AB2F-B90AF26B5E84}">
       <p14:sectionLst xmlns:p14="http://schemas.microsoft.com/office/powerpoint/2010/main">
-        <p14:section name="Talk" id="{4be72354-df8e-4cb1-da7c-39754113c340}">
+        <p14:section name="Talk" id="{978dc987-e7d7-e9bf-0bc6-b2c4e2e941d0}">
           <p14:sldIdLst>
             <p14:sldId id="256"/>
             <p14:sldId id="257"/>
@@ -150,7 +150,7 @@
             <p14:sldId id="264"/>
           </p14:sldIdLst>
         </p14:section>
-        <p14:section name="Extra pages" id="{1bdff7ae-14a7-169b-41d7-15493f2d261a}">
+        <p14:section name="Extra pages" id="{d101d1c7-33e1-3178-4859-dbc3f3ed0029}">
           <p14:sldIdLst>
             <p14:sldId id="265"/>
             <p14:sldId id="266"/>
@@ -3777,7 +3777,7 @@
           <a:p>
             <a:r>
               <a:rPr lang="en-US" dirty="0"/>
-              <a:t>(35초) 두 번째 발견입니다. 공짜 검사가 실패할 때만 생각하게 하세요. 문제에 '막대 3, 4, 5면 답 0'이라는 예제가 있으면, 모델 없이 우리 프로그램을 3, 4, 5로 돌려 봅니다. 0이 나오면 그대로 내고, 다르면 그 문제만 더 생각합니다. 예제가 없으면 프로그램을 두 번 짜서 비교합니다. 그러면 경시 문제에서 66%, 기하에서 99%로, 항상 생각할 때와 같은 정확도를 18에서 27% 적은 토큰에 얻습니다.</a:t>
+              <a:t>(40초) 두 번째 발견입니다. 공짜 검사가 실패할 때만 생각하게 하세요. 공짜 검사란 프로그램을 실행해서 이미 아는 것과 비교해 보는 것으로, 정답도 추가 생각도 필요 없습니다. 문제에 '막대 3, 4, 5면 답 0'이라는 예제가 있으면, 모델 없이 우리 프로그램을 3, 4, 5로 돌려 봅니다. 0이 나오면 그대로 내고, 다르면 그 문제만 더 생각합니다. 예제가 없으면 프로그램을 두 번 짜서 비교합니다. 그러면 경시 문제에서 66%, 기하에서 99%로, 항상 생각할 때와 같은 정확도를 18에서 27% 적은 토큰에 얻습니다.</a:t>
             </a:r>
             <a:endParaRPr lang="en-US" dirty="0"/>
           </a:p>
@@ -37487,30 +37487,41 @@
         <p:spPr>
           <a:xfrm>
             <a:off x="777240" y="1444752"/>
-            <a:ext cx="4937760" cy="384048"/>
-          </a:xfrm>
-          <a:prstGeom prst="rect">
-            <a:avLst/>
-          </a:prstGeom>
-          <a:noFill/>
-          <a:ln/>
-        </p:spPr>
-        <p:txBody>
-          <a:bodyPr wrap="square" lIns="0" tIns="0" rIns="0" bIns="0" rtlCol="0" anchor="ctr"/>
+            <a:ext cx="4937760" cy="640080"/>
+          </a:xfrm>
+          <a:prstGeom prst="rect">
+            <a:avLst/>
+          </a:prstGeom>
+          <a:noFill/>
+          <a:ln/>
+        </p:spPr>
+        <p:txBody>
+          <a:bodyPr wrap="square" lIns="0" tIns="0" rIns="0" bIns="0" rtlCol="0" anchor="t"/>
           <a:lstStyle/>
           <a:p>
             <a:pPr indent="0" marL="0">
               <a:buNone/>
             </a:pPr>
             <a:r>
-              <a:rPr lang="en-US" sz="1800" b="1" dirty="0">
+              <a:rPr lang="en-US" sz="1600" b="1" dirty="0">
                 <a:solidFill>
                   <a:srgbClr val="4472C4"/>
                 </a:solidFill>
               </a:rPr>
-              <a:t>How a free check works</a:t>
-            </a:r>
-            <a:endParaRPr lang="en-US" sz="1800" dirty="0"/>
+              <a:t>Free check</a:t>
+            </a:r>
+            <a:pPr indent="0" marL="0">
+              <a:buNone/>
+            </a:pPr>
+            <a:r>
+              <a:rPr lang="en-US" sz="1600" dirty="0">
+                <a:solidFill>
+                  <a:schemeClr val="tx1"/>
+                </a:solidFill>
+              </a:rPr>
+              <a:t>: run the program and compare with something we already know. No answer key, almost no cost.</a:t>
+            </a:r>
+            <a:endParaRPr lang="en-US" sz="1600" dirty="0"/>
           </a:p>
         </p:txBody>
       </p:sp>
@@ -37522,12 +37533,12 @@
         </p:nvSpPr>
         <p:spPr>
           <a:xfrm>
-            <a:off x="777240" y="1874520"/>
-            <a:ext cx="4892040" cy="566928"/>
+            <a:off x="777240" y="2148840"/>
+            <a:ext cx="4892040" cy="530352"/>
           </a:xfrm>
           <a:prstGeom prst="roundRect">
             <a:avLst>
-              <a:gd name="adj" fmla="val 9677"/>
+              <a:gd name="adj" fmla="val 10345"/>
             </a:avLst>
           </a:prstGeom>
           <a:solidFill>
@@ -37549,8 +37560,8 @@
         </p:nvSpPr>
         <p:spPr>
           <a:xfrm>
-            <a:off x="850392" y="1874520"/>
-            <a:ext cx="4745736" cy="566928"/>
+            <a:off x="850392" y="2148840"/>
+            <a:ext cx="4745736" cy="530352"/>
           </a:xfrm>
           <a:prstGeom prst="rect">
             <a:avLst/>
@@ -37585,8 +37596,8 @@
         </p:nvSpPr>
         <p:spPr>
           <a:xfrm>
-            <a:off x="3218688" y="2441448"/>
-            <a:ext cx="0" cy="210312"/>
+            <a:off x="3218688" y="2679192"/>
+            <a:ext cx="0" cy="182880"/>
           </a:xfrm>
           <a:prstGeom prst="line">
             <a:avLst/>
@@ -37609,12 +37620,12 @@
         </p:nvSpPr>
         <p:spPr>
           <a:xfrm>
-            <a:off x="777240" y="2651760"/>
-            <a:ext cx="4892040" cy="566928"/>
+            <a:off x="777240" y="2862072"/>
+            <a:ext cx="4892040" cy="530352"/>
           </a:xfrm>
           <a:prstGeom prst="roundRect">
             <a:avLst>
-              <a:gd name="adj" fmla="val 9677"/>
+              <a:gd name="adj" fmla="val 10345"/>
             </a:avLst>
           </a:prstGeom>
           <a:solidFill>
@@ -37636,8 +37647,8 @@
         </p:nvSpPr>
         <p:spPr>
           <a:xfrm>
-            <a:off x="850392" y="2651760"/>
-            <a:ext cx="4745736" cy="566928"/>
+            <a:off x="850392" y="2862072"/>
+            <a:ext cx="4745736" cy="530352"/>
           </a:xfrm>
           <a:prstGeom prst="rect">
             <a:avLst/>
@@ -37672,8 +37683,8 @@
         </p:nvSpPr>
         <p:spPr>
           <a:xfrm>
-            <a:off x="1920240" y="3218688"/>
-            <a:ext cx="182880" cy="237744"/>
+            <a:off x="1920240" y="3392424"/>
+            <a:ext cx="182880" cy="201168"/>
           </a:xfrm>
           <a:prstGeom prst="line">
             <a:avLst/>
@@ -37696,8 +37707,8 @@
         </p:nvSpPr>
         <p:spPr>
           <a:xfrm>
-            <a:off x="4343400" y="3218688"/>
-            <a:ext cx="182880" cy="237744"/>
+            <a:off x="4343400" y="3392424"/>
+            <a:ext cx="182880" cy="201168"/>
           </a:xfrm>
           <a:prstGeom prst="line">
             <a:avLst/>
@@ -37720,12 +37731,12 @@
         </p:nvSpPr>
         <p:spPr>
           <a:xfrm>
-            <a:off x="777240" y="3456432"/>
-            <a:ext cx="2377440" cy="658368"/>
+            <a:off x="777240" y="3593592"/>
+            <a:ext cx="2377440" cy="603504"/>
           </a:xfrm>
           <a:prstGeom prst="roundRect">
             <a:avLst>
-              <a:gd name="adj" fmla="val 8333"/>
+              <a:gd name="adj" fmla="val 9091"/>
             </a:avLst>
           </a:prstGeom>
           <a:solidFill>
@@ -37747,8 +37758,8 @@
         </p:nvSpPr>
         <p:spPr>
           <a:xfrm>
-            <a:off x="850392" y="3456432"/>
-            <a:ext cx="2231136" cy="658368"/>
+            <a:off x="850392" y="3593592"/>
+            <a:ext cx="2231136" cy="603504"/>
           </a:xfrm>
           <a:prstGeom prst="rect">
             <a:avLst/>
@@ -37783,12 +37794,12 @@
         </p:nvSpPr>
         <p:spPr>
           <a:xfrm>
-            <a:off x="3291840" y="3456432"/>
-            <a:ext cx="2377440" cy="658368"/>
+            <a:off x="3291840" y="3593592"/>
+            <a:ext cx="2377440" cy="603504"/>
           </a:xfrm>
           <a:prstGeom prst="roundRect">
             <a:avLst>
-              <a:gd name="adj" fmla="val 8333"/>
+              <a:gd name="adj" fmla="val 9091"/>
             </a:avLst>
           </a:prstGeom>
           <a:solidFill>
@@ -37810,8 +37821,8 @@
         </p:nvSpPr>
         <p:spPr>
           <a:xfrm>
-            <a:off x="3364992" y="3456432"/>
-            <a:ext cx="2231136" cy="658368"/>
+            <a:off x="3364992" y="3593592"/>
+            <a:ext cx="2231136" cy="603504"/>
           </a:xfrm>
           <a:prstGeom prst="rect">
             <a:avLst/>
@@ -37846,8 +37857,8 @@
         </p:nvSpPr>
         <p:spPr>
           <a:xfrm>
-            <a:off x="777240" y="4279392"/>
-            <a:ext cx="4892040" cy="365760"/>
+            <a:off x="777240" y="4315968"/>
+            <a:ext cx="4892040" cy="347472"/>
           </a:xfrm>
           <a:prstGeom prst="rect">
             <a:avLst/>
@@ -37882,12 +37893,12 @@
         </p:nvSpPr>
         <p:spPr>
           <a:xfrm>
-            <a:off x="777240" y="4709160"/>
-            <a:ext cx="1463040" cy="548640"/>
+            <a:off x="777240" y="4736592"/>
+            <a:ext cx="1463040" cy="530352"/>
           </a:xfrm>
           <a:prstGeom prst="roundRect">
             <a:avLst>
-              <a:gd name="adj" fmla="val 10000"/>
+              <a:gd name="adj" fmla="val 10345"/>
             </a:avLst>
           </a:prstGeom>
           <a:solidFill>
@@ -37909,8 +37920,8 @@
         </p:nvSpPr>
         <p:spPr>
           <a:xfrm>
-            <a:off x="850392" y="4709160"/>
-            <a:ext cx="1316736" cy="548640"/>
+            <a:off x="850392" y="4736592"/>
+            <a:ext cx="1316736" cy="530352"/>
           </a:xfrm>
           <a:prstGeom prst="rect">
             <a:avLst/>
@@ -37945,12 +37956,12 @@
         </p:nvSpPr>
         <p:spPr>
           <a:xfrm>
-            <a:off x="2331720" y="4709160"/>
-            <a:ext cx="1463040" cy="548640"/>
+            <a:off x="2331720" y="4736592"/>
+            <a:ext cx="1463040" cy="530352"/>
           </a:xfrm>
           <a:prstGeom prst="roundRect">
             <a:avLst>
-              <a:gd name="adj" fmla="val 10000"/>
+              <a:gd name="adj" fmla="val 10345"/>
             </a:avLst>
           </a:prstGeom>
           <a:solidFill>
@@ -37972,8 +37983,8 @@
         </p:nvSpPr>
         <p:spPr>
           <a:xfrm>
-            <a:off x="2404872" y="4709160"/>
-            <a:ext cx="1316736" cy="548640"/>
+            <a:off x="2404872" y="4736592"/>
+            <a:ext cx="1316736" cy="530352"/>
           </a:xfrm>
           <a:prstGeom prst="rect">
             <a:avLst/>
@@ -38008,7 +38019,7 @@
         </p:nvSpPr>
         <p:spPr>
           <a:xfrm>
-            <a:off x="3794760" y="4983480"/>
+            <a:off x="3794760" y="5001768"/>
             <a:ext cx="228600" cy="0"/>
           </a:xfrm>
           <a:prstGeom prst="line">
@@ -38032,12 +38043,12 @@
         </p:nvSpPr>
         <p:spPr>
           <a:xfrm>
-            <a:off x="4023360" y="4709160"/>
-            <a:ext cx="1645920" cy="548640"/>
+            <a:off x="4023360" y="4736592"/>
+            <a:ext cx="1645920" cy="530352"/>
           </a:xfrm>
           <a:prstGeom prst="roundRect">
             <a:avLst>
-              <a:gd name="adj" fmla="val 10000"/>
+              <a:gd name="adj" fmla="val 10345"/>
             </a:avLst>
           </a:prstGeom>
           <a:solidFill>
@@ -38059,8 +38070,8 @@
         </p:nvSpPr>
         <p:spPr>
           <a:xfrm>
-            <a:off x="4096512" y="4709160"/>
-            <a:ext cx="1499616" cy="548640"/>
+            <a:off x="4096512" y="4736592"/>
+            <a:ext cx="1499616" cy="530352"/>
           </a:xfrm>
           <a:prstGeom prst="rect">
             <a:avLst/>

--- a/Proposal_Team5.pptx
+++ b/Proposal_Team5.pptx
@@ -139,7 +139,7 @@
   <p:extLst>
     <p:ext uri="{521415D9-36F7-43E2-AB2F-B90AF26B5E84}">
       <p14:sectionLst xmlns:p14="http://schemas.microsoft.com/office/powerpoint/2010/main">
-        <p14:section name="Talk" id="{4a00954b-f880-1c28-717e-31bf4818fb2a}">
+        <p14:section name="Talk" id="{3af92615-3e28-c4e3-d75a-516dfbd77623}">
           <p14:sldIdLst>
             <p14:sldId id="256"/>
             <p14:sldId id="257"/>
@@ -152,7 +152,7 @@
             <p14:sldId id="264"/>
           </p14:sldIdLst>
         </p14:section>
-        <p14:section name="Extra pages" id="{349d383f-aada-8f0a-076c-86e196f94732}">
+        <p14:section name="Extra pages" id="{159c1776-2873-0942-8c60-e52e01f6be7c}">
           <p14:sldIdLst>
             <p14:sldId id="265"/>
             <p14:sldId id="266"/>
@@ -3957,7 +3957,8 @@
           <a:p>
             <a:r>
               <a:rPr lang="en-US" dirty="0"/>
-              <a:t>(40초) 두 번째 발견입니다. 공짜 검사가 실패할 때만 생각하게 하세요. 공짜 검사란 프로그램을 실행해서 이미 아는 것과 비교해 보는 것으로, 정답도 추가 생각도 필요 없습니다. 문제에 '막대 3, 4, 5면 답 0'이라는 예제가 있으면, 모델 없이 우리 프로그램을 3, 4, 5로 돌려 봅니다. 0이 나오면 그대로 내고, 다르면 그 문제만 더 생각합니다. 예제가 없으면 프로그램을 두 번 짜서 비교합니다. 그러면 경시 문제에서 66%, 기하에서 99%로, 항상 생각할 때와 같은 정확도를 18에서 27% 적은 토큰에 얻습니다.</a:t>
+              <a:t>(40초) 두 번째 발견입니다. 공짜 검사가 실패할 때만 생각하게 하세요. 공짜 검사란 프로그램을 실행해서 이미 아는 것과 비교해 보는 것으로, 정답도 추가 생각도 필요 없습니다. 문제에 '막대 3, 4, 5면 답 0'이라는 예제가 있으면, 모델 없이 우리 프로그램을 3, 4, 5로 돌려 봅니다. 0이 나오면 그대로 내고, 다르면 그 문제만 더 생각합니다. 예제가 없으면 프로그램을 두 번 짜서 비교합니다. 그러면 경시 문제에서 66%, 기하에서 99%로, 항상 생각할 때와 같은 정확도를 18에서 27% 적은 토큰에 얻습니다.
+[참고, 읽지 않음] 경시 66.3%는 예제와, 작은 입력을 전부 따져 보는 느린 프로그램, 두 검사를 함께 쓴 결과입니다. 예제만 쓰면 20k 토큰에 65.0%입니다.</a:t>
             </a:r>
             <a:endParaRPr lang="en-US" dirty="0"/>
           </a:p>
@@ -41808,7 +41809,7 @@
                   <a:schemeClr val="tx2"/>
                 </a:solidFill>
               </a:rPr>
-              <a:t>examples alone give 65.0% at 20k; adding a brute-force program as a second check gives 66.3%</a:t>
+              <a:t>checks used: the examples, and a slow brute-force version of the program</a:t>
             </a:r>
             <a:endParaRPr lang="en-US" sz="1400" dirty="0"/>
           </a:p>

--- a/Proposal_Team5.pptx
+++ b/Proposal_Team5.pptx
@@ -141,7 +141,7 @@
   <p:extLst>
     <p:ext uri="{521415D9-36F7-43E2-AB2F-B90AF26B5E84}">
       <p14:sectionLst xmlns:p14="http://schemas.microsoft.com/office/powerpoint/2010/main">
-        <p14:section name="Talk" id="{a0739146-e50c-9417-10c5-72f6444c1a94}">
+        <p14:section name="Talk" id="{9b82ae02-fd60-1b90-42e4-1bfc7d552adf}">
           <p14:sldIdLst>
             <p14:sldId id="256"/>
             <p14:sldId id="257"/>
@@ -154,7 +154,7 @@
             <p14:sldId id="264"/>
           </p14:sldIdLst>
         </p14:section>
-        <p14:section name="Extra pages" id="{f81be13e-5b73-fb5f-f47a-eed46820a24e}">
+        <p14:section name="Extra pages" id="{b3f4f5ac-6c38-c25b-d7a1-09f573ac31f9}">
           <p14:sldIdLst>
             <p14:sldId id="265"/>
             <p14:sldId id="266"/>
@@ -4314,12 +4314,12 @@
           <a:p>
             <a:r>
               <a:rPr lang="en-US" dirty="0"/>
-              <a:t>(40초) 새로운 점은 세 가지입니다. 학습 없이 공짜 검사로 생각할 때를 정하고, 정답 없이 모델 자신의 프로그램을 힌트로 쓰며, 파인튜닝한 특화 모델 ORLM-8B와 같은 69.5%를 학습하지 않은 8B 모델로 냅니다. 다음으로는 힌트와 검사를 더 정확하고 싸게 만들겠습니다. 문제 종류마다 힌트를 자동으로 고르고, 토큰 없이 더 많은 실수를 잡는 검사를 찾고, 더 많은 모델에서 확인해 보고서와 코드로 내겠습니다. 정리하면, 짧은 힌트를 먼저 주고, 공짜 검사가 실패한 곳에서만 생각하게 하자는 것입니다.
+              <a:t>(40초) 새로운 점은 세 가지입니다. 학습 없이 공짜 검사로 생각할 때를 정하고, 정답 없이 모델 자신의 프로그램을 힌트로 쓰며, 파인튜닝한 특화 모델 ORLM-8B와 같은 69.5%를 학습하지 않은 8B 모델로 냅니다. 다음으로는 힌트와 검사를 자동으로, 더 정확하고 싸게 만들겠습니다. 문제 종류마다 힌트를 자동으로 고르고, 토큰 없이 더 많은 실수를 잡는 검사도 자동으로 고르고, 더 많은 모델에서 확인해 보고서와 코드로 내겠습니다. 정리하면, 짧은 힌트를 먼저 주고, 공짜 검사가 실패한 곳에서만 생각하게 하자는 것입니다.
 [더 자세히: 질문이 나오거나 시간이 남을 때]
 첫째 줄, 생각을 어디에 쓸지. 기존 방법은 어려워 보이는 문제에 계산을 더 쓰는 Snell 등의 방식과, 언제 생각할지를 강화학습으로 가르치는 Thinkless, AdaptThink입니다. 저희는 정답 없이 돌리는 공짜 검사가 실패한 문제에만 생각을 씁니다. 기하와 최적화 208문제를 세 모델로 풀면 74%가 87%로 오르고, 토큰은 문제당 4.1k에서 2.5k로 줄었습니다. 87%는 사람이 쓴 힌트를 쓴 결과이고, 검색으로 찾은 힌트로도 84%입니다.
 둘째 줄, 모델에게 무엇을 주는지. 기존에는 매뉴얼 전체를 주거나, 더 큰 교사 모델이 짜서 정답으로 확인한 프로그램 모음을 줍니다. 저희 힌트는 모델이 다른 문제에서 짜서 공짜 검사를 통과한 자기 프로그램입니다. 끝까지 남겨 둔 MAMO 벤치마크에서 사람이 쓴 힌트와 같은 79%를 냈습니다.
 셋째 줄, 비용. ORLM-8B는 최적화 문장제용으로 파인튜닝한 공개 모델이고, 모델 카드의 형식과 솔버, 그리디 디코딩으로 저희 채점기에서 돌렸습니다: MAMO 69.5%, 문제당 1.1k 토큰(샘플링하면 64~66%). Qwen3-8B는 학습 없이 자기 힌트를 붙여 프로그램을 한 번 짜고 실행이 안 될 때만 생각하게 해서 69.5%, 1.0k 토큰입니다. 두 버전 검사까지 쓰면 71%(3.1k), gpt-oss-20b는 78.8%입니다.
-다음 계획. 하나, 힌트: 지금은 같은 종류의 문제 안에서만 자동 힌트가 통하므로, 새 문제의 종류를 먼저 알아내고 종류마다 힌트를 자동으로 고릅니다. 둘, 검사: MAMO에서 남은 오류의 절반쯤은 정답 라벨이 의심스러운 문제이고, 나머지는 실행도 되고 두 버전이 일치하지만 문제를 잘못 수식으로 옮긴 경우입니다. 이런 실수를 다른 관점으로 잡는 값싼 검사를 찾습니다. 셋, MAMO 검증을 Qwen3-32B와 Qwen3.6까지 세 번씩 마치고, 최종 보고서와 코드를 냅니다.</a:t>
+다음 계획. 하나, 힌트: 지금은 같은 종류의 문제 안에서만 자동 힌트가 통하므로, 새 문제의 종류를 먼저 알아내고 종류마다 힌트를 자동으로 고릅니다. 둘, 검사: MAMO에서 남은 오류의 절반쯤은 정답 라벨이 의심스러운 문제이고, 나머지는 실행도 되고 두 버전이 일치하지만 문제를 잘못 수식으로 옮긴 경우입니다. 이런 실수를 다른 관점으로 잡는 값싼 검사를 찾고, 문제 종류마다 어떤 검사를 쓸지 자동으로 고릅니다. 지금도 30문제만 라벨링하면 정책을 고를 수 있어서, 최선 대비 손실이 0.6점입니다. 셋, MAMO 검증을 Qwen3-32B와 Qwen3.6까지 세 번씩 마치고, 최종 보고서와 코드를 냅니다.</a:t>
             </a:r>
             <a:endParaRPr lang="en-US" dirty="0"/>
           </a:p>
@@ -48114,7 +48114,7 @@
                   <a:schemeClr val="tx1"/>
                 </a:solidFill>
               </a:rPr>
-              <a:t>Next: get the hints and run the checks better and cheaper</a:t>
+              <a:t>Next: get the hints and run the checks automatically, better and cheaper</a:t>
             </a:r>
             <a:endParaRPr lang="en-US" sz="1600" dirty="0"/>
           </a:p>
@@ -48307,7 +48307,7 @@
                   <a:schemeClr val="tx1"/>
                 </a:solidFill>
               </a:rPr>
-              <a:t>checks: catch more mistakes, without extra tokens</a:t>
+              <a:t>checks: chosen automatically, catching more for no extra tokens</a:t>
             </a:r>
             <a:endParaRPr lang="en-US" sz="1500" dirty="0"/>
           </a:p>

--- a/Proposal_Team5.pptx
+++ b/Proposal_Team5.pptx
@@ -141,7 +141,7 @@
   <p:extLst>
     <p:ext uri="{521415D9-36F7-43E2-AB2F-B90AF26B5E84}">
       <p14:sectionLst xmlns:p14="http://schemas.microsoft.com/office/powerpoint/2010/main">
-        <p14:section name="Talk" id="{9b82ae02-fd60-1b90-42e4-1bfc7d552adf}">
+        <p14:section name="Talk" id="{8614e163-e24e-2a66-eadb-db708af27787}">
           <p14:sldIdLst>
             <p14:sldId id="256"/>
             <p14:sldId id="257"/>
@@ -154,7 +154,7 @@
             <p14:sldId id="264"/>
           </p14:sldIdLst>
         </p14:section>
-        <p14:section name="Extra pages" id="{b3f4f5ac-6c38-c25b-d7a1-09f573ac31f9}">
+        <p14:section name="Extra pages" id="{278ad925-3e95-8d53-21e6-fd197d244f12}">
           <p14:sldIdLst>
             <p14:sldId id="265"/>
             <p14:sldId id="266"/>
@@ -4314,7 +4314,7 @@
           <a:p>
             <a:r>
               <a:rPr lang="en-US" dirty="0"/>
-              <a:t>(40초) 새로운 점은 세 가지입니다. 학습 없이 공짜 검사로 생각할 때를 정하고, 정답 없이 모델 자신의 프로그램을 힌트로 쓰며, 파인튜닝한 특화 모델 ORLM-8B와 같은 69.5%를 학습하지 않은 8B 모델로 냅니다. 다음으로는 힌트와 검사를 자동으로, 더 정확하고 싸게 만들겠습니다. 문제 종류마다 힌트를 자동으로 고르고, 토큰 없이 더 많은 실수를 잡는 검사도 자동으로 고르고, 더 많은 모델에서 확인해 보고서와 코드로 내겠습니다. 정리하면, 짧은 힌트를 먼저 주고, 공짜 검사가 실패한 곳에서만 생각하게 하자는 것입니다.
+              <a:t>(55초) 새로운 점은 세 가지입니다. 학습 없이 공짜 검사로 생각할 때를 정하고, 정답 없이 모델 자신의 프로그램을 힌트로 쓰며, 파인튜닝한 특화 모델 ORLM-8B와 같은 69.5%를 학습하지 않은 8B 모델로 냅니다. 다음 연구는 힌트와 검사를 자동으로, 정확하고 싸게 얻는 것입니다. 힌트는 문제 종류마다 검사를 통과한 가장 짧은 프로그램을 자동으로 고르고, 새 문제의 종류부터 알아내며, 필요한 호출만 남깁니다. 검사는 토큰이 들지 않는 검사부터 쓰고, 조용히 틀리는 곳에만 다르게 틀리는 두 번째 관점을 더하고, 종류마다 30문제로 쓸 방법을 고릅니다. 그다음 더 많은 모델에서 확인해 보고서와 코드로 내겠습니다. 정리하면, 짧은 힌트를 먼저 주고, 공짜 검사가 실패한 곳에서만 생각하게 하자는 것입니다.
 [더 자세히: 질문이 나오거나 시간이 남을 때]
 첫째 줄, 생각을 어디에 쓸지. 기존 방법은 어려워 보이는 문제에 계산을 더 쓰는 Snell 등의 방식과, 언제 생각할지를 강화학습으로 가르치는 Thinkless, AdaptThink입니다. 저희는 정답 없이 돌리는 공짜 검사가 실패한 문제에만 생각을 씁니다. 기하와 최적화 208문제를 세 모델로 풀면 74%가 87%로 오르고, 토큰은 문제당 4.1k에서 2.5k로 줄었습니다. 87%는 사람이 쓴 힌트를 쓴 결과이고, 검색으로 찾은 힌트로도 84%입니다.
 둘째 줄, 모델에게 무엇을 주는지. 기존에는 매뉴얼 전체를 주거나, 더 큰 교사 모델이 짜서 정답으로 확인한 프로그램 모음을 줍니다. 저희 힌트는 모델이 다른 문제에서 짜서 공짜 검사를 통과한 자기 프로그램입니다. 끝까지 남겨 둔 MAMO 벤치마크에서 사람이 쓴 힌트와 같은 79%를 냈습니다.
@@ -47219,8 +47219,8 @@
         </p:nvSpPr>
         <p:spPr>
           <a:xfrm>
-            <a:off x="548640" y="1600200"/>
-            <a:ext cx="1463040" cy="685800"/>
+            <a:off x="548640" y="1554480"/>
+            <a:ext cx="1463040" cy="603504"/>
           </a:xfrm>
           <a:prstGeom prst="rect">
             <a:avLst/>
@@ -47255,12 +47255,12 @@
         </p:nvSpPr>
         <p:spPr>
           <a:xfrm>
-            <a:off x="2103120" y="1600200"/>
-            <a:ext cx="4206240" cy="685800"/>
+            <a:off x="2103120" y="1554480"/>
+            <a:ext cx="4206240" cy="603504"/>
           </a:xfrm>
           <a:prstGeom prst="roundRect">
             <a:avLst>
-              <a:gd name="adj" fmla="val 8000"/>
+              <a:gd name="adj" fmla="val 9091"/>
             </a:avLst>
           </a:prstGeom>
           <a:solidFill>
@@ -47282,8 +47282,8 @@
         </p:nvSpPr>
         <p:spPr>
           <a:xfrm>
-            <a:off x="2176272" y="1600200"/>
-            <a:ext cx="4059936" cy="685800"/>
+            <a:off x="2176272" y="1554480"/>
+            <a:ext cx="4059936" cy="603504"/>
           </a:xfrm>
           <a:prstGeom prst="rect">
             <a:avLst/>
@@ -47318,8 +47318,8 @@
         </p:blipFill>
         <p:spPr>
           <a:xfrm>
-            <a:off x="2212848" y="1737360"/>
-            <a:ext cx="411480" cy="411480"/>
+            <a:off x="2212848" y="1664208"/>
+            <a:ext cx="384048" cy="384048"/>
           </a:xfrm>
           <a:prstGeom prst="rect">
             <a:avLst/>
@@ -47334,8 +47334,8 @@
         </p:nvSpPr>
         <p:spPr>
           <a:xfrm>
-            <a:off x="2743200" y="1600200"/>
-            <a:ext cx="3474720" cy="685800"/>
+            <a:off x="2743200" y="1554480"/>
+            <a:ext cx="3474720" cy="603504"/>
           </a:xfrm>
           <a:prstGeom prst="rect">
             <a:avLst/>
@@ -47351,14 +47351,14 @@
               <a:buNone/>
             </a:pPr>
             <a:r>
-              <a:rPr lang="en-US" sz="1500" dirty="0">
+              <a:rPr lang="en-US" sz="1400" dirty="0">
                 <a:solidFill>
                   <a:srgbClr val="404040"/>
                 </a:solidFill>
               </a:rPr>
               <a:t>think more on hard-looking problems, or train the model when to think</a:t>
             </a:r>
-            <a:endParaRPr lang="en-US" sz="1500" dirty="0"/>
+            <a:endParaRPr lang="en-US" sz="1400" dirty="0"/>
           </a:p>
         </p:txBody>
       </p:sp>
@@ -47370,7 +47370,7 @@
         </p:nvSpPr>
         <p:spPr>
           <a:xfrm>
-            <a:off x="6400800" y="1783080"/>
+            <a:off x="6400800" y="1691640"/>
             <a:ext cx="457200" cy="329184"/>
           </a:xfrm>
           <a:prstGeom prst="rightArrow">
@@ -47395,12 +47395,12 @@
         </p:nvSpPr>
         <p:spPr>
           <a:xfrm>
-            <a:off x="6949440" y="1600200"/>
-            <a:ext cx="4663440" cy="685800"/>
+            <a:off x="6949440" y="1554480"/>
+            <a:ext cx="4663440" cy="603504"/>
           </a:xfrm>
           <a:prstGeom prst="roundRect">
             <a:avLst>
-              <a:gd name="adj" fmla="val 8000"/>
+              <a:gd name="adj" fmla="val 9091"/>
             </a:avLst>
           </a:prstGeom>
           <a:solidFill>
@@ -47422,8 +47422,8 @@
         </p:nvSpPr>
         <p:spPr>
           <a:xfrm>
-            <a:off x="7022592" y="1600200"/>
-            <a:ext cx="4517136" cy="685800"/>
+            <a:off x="7022592" y="1554480"/>
+            <a:ext cx="4517136" cy="603504"/>
           </a:xfrm>
           <a:prstGeom prst="rect">
             <a:avLst/>
@@ -47458,8 +47458,8 @@
         </p:blipFill>
         <p:spPr>
           <a:xfrm>
-            <a:off x="7059168" y="1737360"/>
-            <a:ext cx="411480" cy="411480"/>
+            <a:off x="7059168" y="1664208"/>
+            <a:ext cx="384048" cy="384048"/>
           </a:xfrm>
           <a:prstGeom prst="rect">
             <a:avLst/>
@@ -47474,8 +47474,8 @@
         </p:nvSpPr>
         <p:spPr>
           <a:xfrm>
-            <a:off x="7589520" y="1600200"/>
-            <a:ext cx="3931920" cy="685800"/>
+            <a:off x="7589520" y="1554480"/>
+            <a:ext cx="3931920" cy="603504"/>
           </a:xfrm>
           <a:prstGeom prst="rect">
             <a:avLst/>
@@ -47491,14 +47491,14 @@
               <a:buNone/>
             </a:pPr>
             <a:r>
-              <a:rPr lang="en-US" sz="1500" b="1" dirty="0">
+              <a:rPr lang="en-US" sz="1400" b="1" dirty="0">
                 <a:solidFill>
                   <a:srgbClr val="1F3864"/>
                 </a:solidFill>
               </a:rPr>
               <a:t>think only when a free check fails; no training: 87% vs 74% (208 problems)</a:t>
             </a:r>
-            <a:endParaRPr lang="en-US" sz="1500" dirty="0"/>
+            <a:endParaRPr lang="en-US" sz="1400" dirty="0"/>
           </a:p>
         </p:txBody>
       </p:sp>
@@ -47510,8 +47510,8 @@
         </p:nvSpPr>
         <p:spPr>
           <a:xfrm>
-            <a:off x="548640" y="2423160"/>
-            <a:ext cx="1463040" cy="685800"/>
+            <a:off x="548640" y="2231136"/>
+            <a:ext cx="1463040" cy="603504"/>
           </a:xfrm>
           <a:prstGeom prst="rect">
             <a:avLst/>
@@ -47546,12 +47546,12 @@
         </p:nvSpPr>
         <p:spPr>
           <a:xfrm>
-            <a:off x="2103120" y="2423160"/>
-            <a:ext cx="4206240" cy="685800"/>
+            <a:off x="2103120" y="2231136"/>
+            <a:ext cx="4206240" cy="603504"/>
           </a:xfrm>
           <a:prstGeom prst="roundRect">
             <a:avLst>
-              <a:gd name="adj" fmla="val 8000"/>
+              <a:gd name="adj" fmla="val 9091"/>
             </a:avLst>
           </a:prstGeom>
           <a:solidFill>
@@ -47573,8 +47573,8 @@
         </p:nvSpPr>
         <p:spPr>
           <a:xfrm>
-            <a:off x="2176272" y="2423160"/>
-            <a:ext cx="4059936" cy="685800"/>
+            <a:off x="2176272" y="2231136"/>
+            <a:ext cx="4059936" cy="603504"/>
           </a:xfrm>
           <a:prstGeom prst="rect">
             <a:avLst/>
@@ -47609,8 +47609,8 @@
         </p:blipFill>
         <p:spPr>
           <a:xfrm>
-            <a:off x="2212848" y="2560320"/>
-            <a:ext cx="411480" cy="411480"/>
+            <a:off x="2212848" y="2340864"/>
+            <a:ext cx="384048" cy="384048"/>
           </a:xfrm>
           <a:prstGeom prst="rect">
             <a:avLst/>
@@ -47625,8 +47625,8 @@
         </p:nvSpPr>
         <p:spPr>
           <a:xfrm>
-            <a:off x="2743200" y="2423160"/>
-            <a:ext cx="3474720" cy="685800"/>
+            <a:off x="2743200" y="2231136"/>
+            <a:ext cx="3474720" cy="603504"/>
           </a:xfrm>
           <a:prstGeom prst="rect">
             <a:avLst/>
@@ -47642,14 +47642,14 @@
               <a:buNone/>
             </a:pPr>
             <a:r>
-              <a:rPr lang="en-US" sz="1500" dirty="0">
+              <a:rPr lang="en-US" sz="1400" dirty="0">
                 <a:solidFill>
                   <a:srgbClr val="404040"/>
                 </a:solidFill>
               </a:rPr>
               <a:t>the whole manual, or programs from a bigger model checked with answers</a:t>
             </a:r>
-            <a:endParaRPr lang="en-US" sz="1500" dirty="0"/>
+            <a:endParaRPr lang="en-US" sz="1400" dirty="0"/>
           </a:p>
         </p:txBody>
       </p:sp>
@@ -47661,7 +47661,7 @@
         </p:nvSpPr>
         <p:spPr>
           <a:xfrm>
-            <a:off x="6400800" y="2606040"/>
+            <a:off x="6400800" y="2368296"/>
             <a:ext cx="457200" cy="329184"/>
           </a:xfrm>
           <a:prstGeom prst="rightArrow">
@@ -47686,12 +47686,12 @@
         </p:nvSpPr>
         <p:spPr>
           <a:xfrm>
-            <a:off x="6949440" y="2423160"/>
-            <a:ext cx="4663440" cy="685800"/>
+            <a:off x="6949440" y="2231136"/>
+            <a:ext cx="4663440" cy="603504"/>
           </a:xfrm>
           <a:prstGeom prst="roundRect">
             <a:avLst>
-              <a:gd name="adj" fmla="val 8000"/>
+              <a:gd name="adj" fmla="val 9091"/>
             </a:avLst>
           </a:prstGeom>
           <a:solidFill>
@@ -47713,8 +47713,8 @@
         </p:nvSpPr>
         <p:spPr>
           <a:xfrm>
-            <a:off x="7022592" y="2423160"/>
-            <a:ext cx="4517136" cy="685800"/>
+            <a:off x="7022592" y="2231136"/>
+            <a:ext cx="4517136" cy="603504"/>
           </a:xfrm>
           <a:prstGeom prst="rect">
             <a:avLst/>
@@ -47749,8 +47749,8 @@
         </p:blipFill>
         <p:spPr>
           <a:xfrm>
-            <a:off x="7059168" y="2560320"/>
-            <a:ext cx="411480" cy="411480"/>
+            <a:off x="7059168" y="2340864"/>
+            <a:ext cx="384048" cy="384048"/>
           </a:xfrm>
           <a:prstGeom prst="rect">
             <a:avLst/>
@@ -47765,8 +47765,8 @@
         </p:nvSpPr>
         <p:spPr>
           <a:xfrm>
-            <a:off x="7589520" y="2423160"/>
-            <a:ext cx="3931920" cy="685800"/>
+            <a:off x="7589520" y="2231136"/>
+            <a:ext cx="3931920" cy="603504"/>
           </a:xfrm>
           <a:prstGeom prst="rect">
             <a:avLst/>
@@ -47782,14 +47782,14 @@
               <a:buNone/>
             </a:pPr>
             <a:r>
-              <a:rPr lang="en-US" sz="1500" b="1" dirty="0">
+              <a:rPr lang="en-US" sz="1400" b="1" dirty="0">
                 <a:solidFill>
                   <a:srgbClr val="1F3864"/>
                 </a:solidFill>
               </a:rPr>
               <a:t>one short hint: the model's own program that passed the check; no answers</a:t>
             </a:r>
-            <a:endParaRPr lang="en-US" sz="1500" dirty="0"/>
+            <a:endParaRPr lang="en-US" sz="1400" dirty="0"/>
           </a:p>
         </p:txBody>
       </p:sp>
@@ -47801,8 +47801,8 @@
         </p:nvSpPr>
         <p:spPr>
           <a:xfrm>
-            <a:off x="548640" y="3246120"/>
-            <a:ext cx="1463040" cy="685800"/>
+            <a:off x="548640" y="2907792"/>
+            <a:ext cx="1463040" cy="603504"/>
           </a:xfrm>
           <a:prstGeom prst="rect">
             <a:avLst/>
@@ -47837,12 +47837,12 @@
         </p:nvSpPr>
         <p:spPr>
           <a:xfrm>
-            <a:off x="2103120" y="3246120"/>
-            <a:ext cx="4206240" cy="685800"/>
+            <a:off x="2103120" y="2907792"/>
+            <a:ext cx="4206240" cy="603504"/>
           </a:xfrm>
           <a:prstGeom prst="roundRect">
             <a:avLst>
-              <a:gd name="adj" fmla="val 8000"/>
+              <a:gd name="adj" fmla="val 9091"/>
             </a:avLst>
           </a:prstGeom>
           <a:solidFill>
@@ -47864,8 +47864,8 @@
         </p:nvSpPr>
         <p:spPr>
           <a:xfrm>
-            <a:off x="2176272" y="3246120"/>
-            <a:ext cx="4059936" cy="685800"/>
+            <a:off x="2176272" y="2907792"/>
+            <a:ext cx="4059936" cy="603504"/>
           </a:xfrm>
           <a:prstGeom prst="rect">
             <a:avLst/>
@@ -47900,8 +47900,8 @@
         </p:blipFill>
         <p:spPr>
           <a:xfrm>
-            <a:off x="2212848" y="3383280"/>
-            <a:ext cx="411480" cy="411480"/>
+            <a:off x="2212848" y="3017520"/>
+            <a:ext cx="384048" cy="384048"/>
           </a:xfrm>
           <a:prstGeom prst="rect">
             <a:avLst/>
@@ -47916,8 +47916,8 @@
         </p:nvSpPr>
         <p:spPr>
           <a:xfrm>
-            <a:off x="2743200" y="3246120"/>
-            <a:ext cx="3474720" cy="685800"/>
+            <a:off x="2743200" y="2907792"/>
+            <a:ext cx="3474720" cy="603504"/>
           </a:xfrm>
           <a:prstGeom prst="rect">
             <a:avLst/>
@@ -47933,14 +47933,14 @@
               <a:buNone/>
             </a:pPr>
             <a:r>
-              <a:rPr lang="en-US" sz="1500" dirty="0">
+              <a:rPr lang="en-US" sz="1400" dirty="0">
                 <a:solidFill>
                   <a:srgbClr val="404040"/>
                 </a:solidFill>
               </a:rPr>
               <a:t>fine-tune a specialist (ORLM-8B): 69.5% on MAMO</a:t>
             </a:r>
-            <a:endParaRPr lang="en-US" sz="1500" dirty="0"/>
+            <a:endParaRPr lang="en-US" sz="1400" dirty="0"/>
           </a:p>
         </p:txBody>
       </p:sp>
@@ -47952,7 +47952,7 @@
         </p:nvSpPr>
         <p:spPr>
           <a:xfrm>
-            <a:off x="6400800" y="3429000"/>
+            <a:off x="6400800" y="3044952"/>
             <a:ext cx="457200" cy="329184"/>
           </a:xfrm>
           <a:prstGeom prst="rightArrow">
@@ -47977,12 +47977,12 @@
         </p:nvSpPr>
         <p:spPr>
           <a:xfrm>
-            <a:off x="6949440" y="3246120"/>
-            <a:ext cx="4663440" cy="685800"/>
+            <a:off x="6949440" y="2907792"/>
+            <a:ext cx="4663440" cy="603504"/>
           </a:xfrm>
           <a:prstGeom prst="roundRect">
             <a:avLst>
-              <a:gd name="adj" fmla="val 8000"/>
+              <a:gd name="adj" fmla="val 9091"/>
             </a:avLst>
           </a:prstGeom>
           <a:solidFill>
@@ -48004,8 +48004,8 @@
         </p:nvSpPr>
         <p:spPr>
           <a:xfrm>
-            <a:off x="7022592" y="3246120"/>
-            <a:ext cx="4517136" cy="685800"/>
+            <a:off x="7022592" y="2907792"/>
+            <a:ext cx="4517136" cy="603504"/>
           </a:xfrm>
           <a:prstGeom prst="rect">
             <a:avLst/>
@@ -48040,8 +48040,8 @@
         </p:blipFill>
         <p:spPr>
           <a:xfrm>
-            <a:off x="7059168" y="3383280"/>
-            <a:ext cx="411480" cy="411480"/>
+            <a:off x="7059168" y="3017520"/>
+            <a:ext cx="384048" cy="384048"/>
           </a:xfrm>
           <a:prstGeom prst="rect">
             <a:avLst/>
@@ -48056,8 +48056,8 @@
         </p:nvSpPr>
         <p:spPr>
           <a:xfrm>
-            <a:off x="7589520" y="3246120"/>
-            <a:ext cx="3931920" cy="685800"/>
+            <a:off x="7589520" y="2907792"/>
+            <a:ext cx="3931920" cy="603504"/>
           </a:xfrm>
           <a:prstGeom prst="rect">
             <a:avLst/>
@@ -48073,14 +48073,14 @@
               <a:buNone/>
             </a:pPr>
             <a:r>
-              <a:rPr lang="en-US" sz="1500" b="1" dirty="0">
+              <a:rPr lang="en-US" sz="1400" b="1" dirty="0">
                 <a:solidFill>
                   <a:srgbClr val="1F3864"/>
                 </a:solidFill>
               </a:rPr>
               <a:t>untrained Qwen3-8B + that hint, one 24 GB GPU: the same 69.5%</a:t>
             </a:r>
-            <a:endParaRPr lang="en-US" sz="1500" dirty="0"/>
+            <a:endParaRPr lang="en-US" sz="1400" dirty="0"/>
           </a:p>
         </p:txBody>
       </p:sp>
@@ -48092,8 +48092,8 @@
         </p:nvSpPr>
         <p:spPr>
           <a:xfrm>
-            <a:off x="548640" y="4114800"/>
-            <a:ext cx="11064240" cy="365760"/>
+            <a:off x="548640" y="3611880"/>
+            <a:ext cx="8503920" cy="347472"/>
           </a:xfrm>
           <a:prstGeom prst="rect">
             <a:avLst/>
@@ -48114,7 +48114,7 @@
                   <a:schemeClr val="tx1"/>
                 </a:solidFill>
               </a:rPr>
-              <a:t>Next: get the hints and run the checks automatically, better and cheaper</a:t>
+              <a:t>Next: get the hints and run the checks automatically, effectively and cheaply</a:t>
             </a:r>
             <a:endParaRPr lang="en-US" sz="1600" dirty="0"/>
           </a:p>
@@ -48122,55 +48122,70 @@
       </p:sp>
       <p:sp>
         <p:nvSpPr>
-          <p:cNvPr id="36" name="Shape 28"/>
+          <p:cNvPr id="36" name="Text 28"/>
+          <p:cNvSpPr txBox="1"/>
+          <p:nvPr/>
+        </p:nvSpPr>
+        <p:spPr>
+          <a:xfrm>
+            <a:off x="8229600" y="3611880"/>
+            <a:ext cx="3383280" cy="347472"/>
+          </a:xfrm>
+          <a:prstGeom prst="rect">
+            <a:avLst/>
+          </a:prstGeom>
+          <a:noFill/>
+          <a:ln/>
+        </p:spPr>
+        <p:txBody>
+          <a:bodyPr wrap="square" lIns="0" tIns="0" rIns="0" bIns="0" rtlCol="0" anchor="ctr"/>
+          <a:lstStyle/>
+          <a:p>
+            <a:pPr algn="r" indent="0" marL="0">
+              <a:buNone/>
+            </a:pPr>
+            <a:r>
+              <a:rPr lang="en-US" sz="1400" dirty="0">
+                <a:solidFill>
+                  <a:srgbClr val="7F7F7F"/>
+                </a:solidFill>
+              </a:rPr>
+              <a:t>then: more models, report and code</a:t>
+            </a:r>
+            <a:endParaRPr lang="en-US" sz="1400" dirty="0"/>
+          </a:p>
+        </p:txBody>
+      </p:sp>
+      <p:sp>
+        <p:nvSpPr>
+          <p:cNvPr id="37" name="next Hints"/>
           <p:cNvSpPr/>
           <p:nvPr/>
         </p:nvSpPr>
         <p:spPr>
           <a:xfrm>
-            <a:off x="2194560" y="4800600"/>
-            <a:ext cx="7772400" cy="0"/>
-          </a:xfrm>
-          <a:prstGeom prst="line">
-            <a:avLst/>
-          </a:prstGeom>
-          <a:noFill/>
-          <a:ln w="38100">
+            <a:off x="548640" y="4005072"/>
+            <a:ext cx="5440680" cy="1572768"/>
+          </a:xfrm>
+          <a:prstGeom prst="roundRect">
+            <a:avLst>
+              <a:gd name="adj" fmla="val 4651"/>
+            </a:avLst>
+          </a:prstGeom>
+          <a:solidFill>
+            <a:srgbClr val="F2F2F2"/>
+          </a:solidFill>
+          <a:ln w="9525">
             <a:solidFill>
-              <a:srgbClr val="BFBFBF"/>
+              <a:srgbClr val="D9D9D9"/>
             </a:solidFill>
             <a:prstDash val="solid"/>
           </a:ln>
         </p:spPr>
       </p:sp>
-      <p:sp>
-        <p:nvSpPr>
-          <p:cNvPr id="37" name="milestone 0"/>
-          <p:cNvSpPr/>
-          <p:nvPr/>
-        </p:nvSpPr>
-        <p:spPr>
-          <a:xfrm>
-            <a:off x="1920240" y="4526280"/>
-            <a:ext cx="548640" cy="548640"/>
-          </a:xfrm>
-          <a:prstGeom prst="ellipse">
-            <a:avLst/>
-          </a:prstGeom>
-          <a:solidFill>
-            <a:srgbClr val="FFFFFF"/>
-          </a:solidFill>
-          <a:ln w="25400">
-            <a:solidFill>
-              <a:srgbClr val="4472C4"/>
-            </a:solidFill>
-            <a:prstDash val="solid"/>
-          </a:ln>
-        </p:spPr>
-      </p:sp>
       <p:pic>
         <p:nvPicPr>
-          <p:cNvPr id="38" name="milestone icon 0" descr="/NAS/SJ/POSTECH/nlp/figs/icons/fact.png">    </p:cNvPr>
+          <p:cNvPr id="38" name="next icon fact" descr="/NAS/SJ/POSTECH/nlp/figs/icons/fact.png">    </p:cNvPr>
           <p:cNvPicPr>
             <a:picLocks noChangeAspect="1"/>
           </p:cNvPicPr>
@@ -48184,8 +48199,8 @@
         </p:blipFill>
         <p:spPr>
           <a:xfrm>
-            <a:off x="2020824" y="4626864"/>
-            <a:ext cx="347472" cy="347472"/>
+            <a:off x="713232" y="4096512"/>
+            <a:ext cx="329184" cy="329184"/>
           </a:xfrm>
           <a:prstGeom prst="rect">
             <a:avLst/>
@@ -48200,54 +48215,164 @@
         </p:nvSpPr>
         <p:spPr>
           <a:xfrm>
-            <a:off x="548640" y="5102352"/>
-            <a:ext cx="3291840" cy="502920"/>
-          </a:xfrm>
-          <a:prstGeom prst="rect">
-            <a:avLst/>
-          </a:prstGeom>
-          <a:noFill/>
-          <a:ln/>
-        </p:spPr>
-        <p:txBody>
-          <a:bodyPr wrap="square" lIns="0" tIns="0" rIns="0" bIns="0" rtlCol="0" anchor="t"/>
-          <a:lstStyle/>
-          <a:p>
-            <a:pPr algn="ctr" indent="0" marL="0">
-              <a:buNone/>
-            </a:pPr>
-            <a:r>
-              <a:rPr lang="en-US" sz="1500" dirty="0">
+            <a:off x="1115568" y="4069080"/>
+            <a:ext cx="2743200" cy="384048"/>
+          </a:xfrm>
+          <a:prstGeom prst="rect">
+            <a:avLst/>
+          </a:prstGeom>
+          <a:noFill/>
+          <a:ln/>
+        </p:spPr>
+        <p:txBody>
+          <a:bodyPr wrap="square" lIns="0" tIns="0" rIns="0" bIns="0" rtlCol="0" anchor="ctr"/>
+          <a:lstStyle/>
+          <a:p>
+            <a:pPr indent="0" marL="0">
+              <a:buNone/>
+            </a:pPr>
+            <a:r>
+              <a:rPr lang="en-US" sz="1600" b="1" dirty="0">
+                <a:solidFill>
+                  <a:srgbClr val="4472C4"/>
+                </a:solidFill>
+              </a:rPr>
+              <a:t>Hints</a:t>
+            </a:r>
+            <a:endParaRPr lang="en-US" sz="1600" dirty="0"/>
+          </a:p>
+        </p:txBody>
+      </p:sp>
+      <p:sp>
+        <p:nvSpPr>
+          <p:cNvPr id="40" name="Text 31"/>
+          <p:cNvSpPr txBox="1"/>
+          <p:nvPr/>
+        </p:nvSpPr>
+        <p:spPr>
+          <a:xfrm>
+            <a:off x="731520" y="4462272"/>
+            <a:ext cx="5120640" cy="338328"/>
+          </a:xfrm>
+          <a:prstGeom prst="rect">
+            <a:avLst/>
+          </a:prstGeom>
+          <a:noFill/>
+          <a:ln/>
+        </p:spPr>
+        <p:txBody>
+          <a:bodyPr wrap="square" lIns="0" tIns="0" rIns="0" bIns="0" rtlCol="0" anchor="ctr"/>
+          <a:lstStyle/>
+          <a:p>
+            <a:pPr indent="0" marL="0">
+              <a:buNone/>
+            </a:pPr>
+            <a:r>
+              <a:rPr lang="en-US" sz="1400" dirty="0">
                 <a:solidFill>
                   <a:schemeClr val="tx1"/>
                 </a:solidFill>
               </a:rPr>
-              <a:t>hints: picked automatically for every problem type</a:t>
-            </a:r>
-            <a:endParaRPr lang="en-US" sz="1500" dirty="0"/>
-          </a:p>
-        </p:txBody>
-      </p:sp>
-      <p:sp>
-        <p:nvSpPr>
-          <p:cNvPr id="40" name="milestone 1"/>
+              <a:t>• pick per type: the shortest past program that passed the check</a:t>
+            </a:r>
+            <a:endParaRPr lang="en-US" sz="1400" dirty="0"/>
+          </a:p>
+        </p:txBody>
+      </p:sp>
+      <p:sp>
+        <p:nvSpPr>
+          <p:cNvPr id="41" name="Text 32"/>
+          <p:cNvSpPr txBox="1"/>
+          <p:nvPr/>
+        </p:nvSpPr>
+        <p:spPr>
+          <a:xfrm>
+            <a:off x="731520" y="4818888"/>
+            <a:ext cx="5120640" cy="338328"/>
+          </a:xfrm>
+          <a:prstGeom prst="rect">
+            <a:avLst/>
+          </a:prstGeom>
+          <a:noFill/>
+          <a:ln/>
+        </p:spPr>
+        <p:txBody>
+          <a:bodyPr wrap="square" lIns="0" tIns="0" rIns="0" bIns="0" rtlCol="0" anchor="ctr"/>
+          <a:lstStyle/>
+          <a:p>
+            <a:pPr indent="0" marL="0">
+              <a:buNone/>
+            </a:pPr>
+            <a:r>
+              <a:rPr lang="en-US" sz="1400" dirty="0">
+                <a:solidFill>
+                  <a:schemeClr val="tx1"/>
+                </a:solidFill>
+              </a:rPr>
+              <a:t>• tell a new problem's type first (another type's hint misleads)</a:t>
+            </a:r>
+            <a:endParaRPr lang="en-US" sz="1400" dirty="0"/>
+          </a:p>
+        </p:txBody>
+      </p:sp>
+      <p:sp>
+        <p:nvSpPr>
+          <p:cNvPr id="42" name="Text 33"/>
+          <p:cNvSpPr txBox="1"/>
+          <p:nvPr/>
+        </p:nvSpPr>
+        <p:spPr>
+          <a:xfrm>
+            <a:off x="731520" y="5175504"/>
+            <a:ext cx="5120640" cy="338328"/>
+          </a:xfrm>
+          <a:prstGeom prst="rect">
+            <a:avLst/>
+          </a:prstGeom>
+          <a:noFill/>
+          <a:ln/>
+        </p:spPr>
+        <p:txBody>
+          <a:bodyPr wrap="square" lIns="0" tIns="0" rIns="0" bIns="0" rtlCol="0" anchor="ctr"/>
+          <a:lstStyle/>
+          <a:p>
+            <a:pPr indent="0" marL="0">
+              <a:buNone/>
+            </a:pPr>
+            <a:r>
+              <a:rPr lang="en-US" sz="1400" dirty="0">
+                <a:solidFill>
+                  <a:schemeClr val="tx1"/>
+                </a:solidFill>
+              </a:rPr>
+              <a:t>• keep only the needed calls: about 200 input tokens</a:t>
+            </a:r>
+            <a:endParaRPr lang="en-US" sz="1400" dirty="0"/>
+          </a:p>
+        </p:txBody>
+      </p:sp>
+      <p:sp>
+        <p:nvSpPr>
+          <p:cNvPr id="43" name="next Checks"/>
           <p:cNvSpPr/>
           <p:nvPr/>
         </p:nvSpPr>
         <p:spPr>
           <a:xfrm>
-            <a:off x="5806440" y="4526280"/>
-            <a:ext cx="548640" cy="548640"/>
-          </a:xfrm>
-          <a:prstGeom prst="ellipse">
-            <a:avLst/>
+            <a:off x="6172200" y="4005072"/>
+            <a:ext cx="5440680" cy="1572768"/>
+          </a:xfrm>
+          <a:prstGeom prst="roundRect">
+            <a:avLst>
+              <a:gd name="adj" fmla="val 4651"/>
+            </a:avLst>
           </a:prstGeom>
           <a:solidFill>
-            <a:srgbClr val="FFFFFF"/>
+            <a:srgbClr val="F2F2F2"/>
           </a:solidFill>
-          <a:ln w="25400">
+          <a:ln w="9525">
             <a:solidFill>
-              <a:srgbClr val="4472C4"/>
+              <a:srgbClr val="D9D9D9"/>
             </a:solidFill>
             <a:prstDash val="solid"/>
           </a:ln>
@@ -48255,7 +48380,7 @@
       </p:sp>
       <p:pic>
         <p:nvPicPr>
-          <p:cNvPr id="41" name="milestone icon 1" descr="/NAS/SJ/POSTECH/nlp/figs/icons/check.png">    </p:cNvPr>
+          <p:cNvPr id="44" name="next icon check" descr="/NAS/SJ/POSTECH/nlp/figs/icons/check.png">    </p:cNvPr>
           <p:cNvPicPr>
             <a:picLocks noChangeAspect="1"/>
           </p:cNvPicPr>
@@ -48269,8 +48394,8 @@
         </p:blipFill>
         <p:spPr>
           <a:xfrm>
-            <a:off x="5907024" y="4626864"/>
-            <a:ext cx="347472" cy="347472"/>
+            <a:off x="6336792" y="4096512"/>
+            <a:ext cx="329184" cy="329184"/>
           </a:xfrm>
           <a:prstGeom prst="rect">
             <a:avLst/>
@@ -48279,128 +48404,151 @@
       </p:pic>
       <p:sp>
         <p:nvSpPr>
-          <p:cNvPr id="42" name="Text 32"/>
-          <p:cNvSpPr txBox="1"/>
-          <p:nvPr/>
-        </p:nvSpPr>
-        <p:spPr>
-          <a:xfrm>
-            <a:off x="4434840" y="5102352"/>
-            <a:ext cx="3291840" cy="502920"/>
-          </a:xfrm>
-          <a:prstGeom prst="rect">
-            <a:avLst/>
-          </a:prstGeom>
-          <a:noFill/>
-          <a:ln/>
-        </p:spPr>
-        <p:txBody>
-          <a:bodyPr wrap="square" lIns="0" tIns="0" rIns="0" bIns="0" rtlCol="0" anchor="t"/>
-          <a:lstStyle/>
-          <a:p>
-            <a:pPr algn="ctr" indent="0" marL="0">
-              <a:buNone/>
-            </a:pPr>
-            <a:r>
-              <a:rPr lang="en-US" sz="1500" dirty="0">
+          <p:cNvPr id="45" name="Text 35"/>
+          <p:cNvSpPr txBox="1"/>
+          <p:nvPr/>
+        </p:nvSpPr>
+        <p:spPr>
+          <a:xfrm>
+            <a:off x="6739128" y="4069080"/>
+            <a:ext cx="2743200" cy="384048"/>
+          </a:xfrm>
+          <a:prstGeom prst="rect">
+            <a:avLst/>
+          </a:prstGeom>
+          <a:noFill/>
+          <a:ln/>
+        </p:spPr>
+        <p:txBody>
+          <a:bodyPr wrap="square" lIns="0" tIns="0" rIns="0" bIns="0" rtlCol="0" anchor="ctr"/>
+          <a:lstStyle/>
+          <a:p>
+            <a:pPr indent="0" marL="0">
+              <a:buNone/>
+            </a:pPr>
+            <a:r>
+              <a:rPr lang="en-US" sz="1600" b="1" dirty="0">
+                <a:solidFill>
+                  <a:srgbClr val="4472C4"/>
+                </a:solidFill>
+              </a:rPr>
+              <a:t>Checks</a:t>
+            </a:r>
+            <a:endParaRPr lang="en-US" sz="1600" dirty="0"/>
+          </a:p>
+        </p:txBody>
+      </p:sp>
+      <p:sp>
+        <p:nvSpPr>
+          <p:cNvPr id="46" name="Text 36"/>
+          <p:cNvSpPr txBox="1"/>
+          <p:nvPr/>
+        </p:nvSpPr>
+        <p:spPr>
+          <a:xfrm>
+            <a:off x="6355080" y="4462272"/>
+            <a:ext cx="5120640" cy="338328"/>
+          </a:xfrm>
+          <a:prstGeom prst="rect">
+            <a:avLst/>
+          </a:prstGeom>
+          <a:noFill/>
+          <a:ln/>
+        </p:spPr>
+        <p:txBody>
+          <a:bodyPr wrap="square" lIns="0" tIns="0" rIns="0" bIns="0" rtlCol="0" anchor="ctr"/>
+          <a:lstStyle/>
+          <a:p>
+            <a:pPr indent="0" marL="0">
+              <a:buNone/>
+            </a:pPr>
+            <a:r>
+              <a:rPr lang="en-US" sz="1400" dirty="0">
                 <a:solidFill>
                   <a:schemeClr val="tx1"/>
                 </a:solidFill>
               </a:rPr>
-              <a:t>checks: chosen automatically, catching more for no extra tokens</a:t>
-            </a:r>
-            <a:endParaRPr lang="en-US" sz="1500" dirty="0"/>
-          </a:p>
-        </p:txBody>
-      </p:sp>
-      <p:sp>
-        <p:nvSpPr>
-          <p:cNvPr id="43" name="milestone 2"/>
-          <p:cNvSpPr/>
-          <p:nvPr/>
-        </p:nvSpPr>
-        <p:spPr>
-          <a:xfrm>
-            <a:off x="9692640" y="4526280"/>
-            <a:ext cx="548640" cy="548640"/>
-          </a:xfrm>
-          <a:prstGeom prst="ellipse">
-            <a:avLst/>
-          </a:prstGeom>
-          <a:solidFill>
-            <a:srgbClr val="FFFFFF"/>
-          </a:solidFill>
-          <a:ln w="25400">
-            <a:solidFill>
-              <a:srgbClr val="4472C4"/>
-            </a:solidFill>
-            <a:prstDash val="solid"/>
-          </a:ln>
-        </p:spPr>
-      </p:sp>
-      <p:pic>
-        <p:nvPicPr>
-          <p:cNvPr id="44" name="milestone icon 2" descr="/NAS/SJ/POSTECH/nlp/figs/icons/code.png">    </p:cNvPr>
-          <p:cNvPicPr>
-            <a:picLocks noChangeAspect="1"/>
-          </p:cNvPicPr>
-          <p:nvPr/>
-        </p:nvPicPr>
-        <p:blipFill>
-          <a:blip r:embed="rId9"/>
-          <a:stretch>
-            <a:fillRect/>
-          </a:stretch>
-        </p:blipFill>
-        <p:spPr>
-          <a:xfrm>
-            <a:off x="9793224" y="4626864"/>
-            <a:ext cx="347472" cy="347472"/>
-          </a:xfrm>
-          <a:prstGeom prst="rect">
-            <a:avLst/>
-          </a:prstGeom>
-        </p:spPr>
-      </p:pic>
-      <p:sp>
-        <p:nvSpPr>
-          <p:cNvPr id="45" name="Text 34"/>
-          <p:cNvSpPr txBox="1"/>
-          <p:nvPr/>
-        </p:nvSpPr>
-        <p:spPr>
-          <a:xfrm>
-            <a:off x="8321040" y="5102352"/>
-            <a:ext cx="3291840" cy="502920"/>
-          </a:xfrm>
-          <a:prstGeom prst="rect">
-            <a:avLst/>
-          </a:prstGeom>
-          <a:noFill/>
-          <a:ln/>
-        </p:spPr>
-        <p:txBody>
-          <a:bodyPr wrap="square" lIns="0" tIns="0" rIns="0" bIns="0" rtlCol="0" anchor="t"/>
-          <a:lstStyle/>
-          <a:p>
-            <a:pPr algn="ctr" indent="0" marL="0">
-              <a:buNone/>
-            </a:pPr>
-            <a:r>
-              <a:rPr lang="en-US" sz="1500" dirty="0">
+              <a:t>• zero-token checks first: examples, moved copies, plan rules</a:t>
+            </a:r>
+            <a:endParaRPr lang="en-US" sz="1400" dirty="0"/>
+          </a:p>
+        </p:txBody>
+      </p:sp>
+      <p:sp>
+        <p:nvSpPr>
+          <p:cNvPr id="47" name="Text 37"/>
+          <p:cNvSpPr txBox="1"/>
+          <p:nvPr/>
+        </p:nvSpPr>
+        <p:spPr>
+          <a:xfrm>
+            <a:off x="6355080" y="4818888"/>
+            <a:ext cx="5120640" cy="338328"/>
+          </a:xfrm>
+          <a:prstGeom prst="rect">
+            <a:avLst/>
+          </a:prstGeom>
+          <a:noFill/>
+          <a:ln/>
+        </p:spPr>
+        <p:txBody>
+          <a:bodyPr wrap="square" lIns="0" tIns="0" rIns="0" bIns="0" rtlCol="0" anchor="ctr"/>
+          <a:lstStyle/>
+          <a:p>
+            <a:pPr indent="0" marL="0">
+              <a:buNone/>
+            </a:pPr>
+            <a:r>
+              <a:rPr lang="en-US" sz="1400" dirty="0">
                 <a:solidFill>
                   <a:schemeClr val="tx1"/>
                 </a:solidFill>
               </a:rPr>
-              <a:t>test both on more models; report and code</a:t>
-            </a:r>
-            <a:endParaRPr lang="en-US" sz="1500" dirty="0"/>
-          </a:p>
-        </p:txBody>
-      </p:sp>
-      <p:sp>
-        <p:nvSpPr>
-          <p:cNvPr id="46" name="Text 35"/>
+              <a:t>• add a second view that errs differently where errors stay silent</a:t>
+            </a:r>
+            <a:endParaRPr lang="en-US" sz="1400" dirty="0"/>
+          </a:p>
+        </p:txBody>
+      </p:sp>
+      <p:sp>
+        <p:nvSpPr>
+          <p:cNvPr id="48" name="Text 38"/>
+          <p:cNvSpPr txBox="1"/>
+          <p:nvPr/>
+        </p:nvSpPr>
+        <p:spPr>
+          <a:xfrm>
+            <a:off x="6355080" y="5175504"/>
+            <a:ext cx="5120640" cy="338328"/>
+          </a:xfrm>
+          <a:prstGeom prst="rect">
+            <a:avLst/>
+          </a:prstGeom>
+          <a:noFill/>
+          <a:ln/>
+        </p:spPr>
+        <p:txBody>
+          <a:bodyPr wrap="square" lIns="0" tIns="0" rIns="0" bIns="0" rtlCol="0" anchor="ctr"/>
+          <a:lstStyle/>
+          <a:p>
+            <a:pPr indent="0" marL="0">
+              <a:buNone/>
+            </a:pPr>
+            <a:r>
+              <a:rPr lang="en-US" sz="1400" dirty="0">
+                <a:solidFill>
+                  <a:schemeClr val="tx1"/>
+                </a:solidFill>
+              </a:rPr>
+              <a:t>• choose the policy per type from 30 labelled problems</a:t>
+            </a:r>
+            <a:endParaRPr lang="en-US" sz="1400" dirty="0"/>
+          </a:p>
+        </p:txBody>
+      </p:sp>
+      <p:sp>
+        <p:nvSpPr>
+          <p:cNvPr id="49" name="Text 39"/>
           <p:cNvSpPr txBox="1"/>
           <p:nvPr/>
         </p:nvSpPr>

--- a/Proposal_Team5.pptx
+++ b/Proposal_Team5.pptx
@@ -141,7 +141,7 @@
   <p:extLst>
     <p:ext uri="{521415D9-36F7-43E2-AB2F-B90AF26B5E84}">
       <p14:sectionLst xmlns:p14="http://schemas.microsoft.com/office/powerpoint/2010/main">
-        <p14:section name="Talk" id="{8614e163-e24e-2a66-eadb-db708af27787}">
+        <p14:section name="Talk" id="{2e828967-5e85-3307-9250-b980fa9fbfe8}">
           <p14:sldIdLst>
             <p14:sldId id="256"/>
             <p14:sldId id="257"/>
@@ -154,7 +154,7 @@
             <p14:sldId id="264"/>
           </p14:sldIdLst>
         </p14:section>
-        <p14:section name="Extra pages" id="{278ad925-3e95-8d53-21e6-fd197d244f12}">
+        <p14:section name="Extra pages" id="{3737a662-cc89-ab53-0062-ef046178acfd}">
           <p14:sldIdLst>
             <p14:sldId id="265"/>
             <p14:sldId id="266"/>
@@ -4314,12 +4314,12 @@
           <a:p>
             <a:r>
               <a:rPr lang="en-US" dirty="0"/>
-              <a:t>(55초) 새로운 점은 세 가지입니다. 학습 없이 공짜 검사로 생각할 때를 정하고, 정답 없이 모델 자신의 프로그램을 힌트로 쓰며, 파인튜닝한 특화 모델 ORLM-8B와 같은 69.5%를 학습하지 않은 8B 모델로 냅니다. 다음 연구는 힌트와 검사를 자동으로, 정확하고 싸게 얻는 것입니다. 힌트는 문제 종류마다 검사를 통과한 가장 짧은 프로그램을 자동으로 고르고, 새 문제의 종류부터 알아내며, 필요한 호출만 남깁니다. 검사는 토큰이 들지 않는 검사부터 쓰고, 조용히 틀리는 곳에만 다르게 틀리는 두 번째 관점을 더하고, 종류마다 30문제로 쓸 방법을 고릅니다. 그다음 더 많은 모델에서 확인해 보고서와 코드로 내겠습니다. 정리하면, 짧은 힌트를 먼저 주고, 공짜 검사가 실패한 곳에서만 생각하게 하자는 것입니다.
+              <a:t>(65초) 새로운 점은 세 가지입니다. 학습 없이 공짜 검사로 생각할 때를 정하고, 정답 없이 모델 자신의 프로그램을 힌트로 쓰며, 파인튜닝한 특화 모델 ORLM-8B와 같은 69.5%를 학습하지 않은 8B 모델로 냅니다. 다음 연구는 힌트와 검사를 자동으로, 정확하고 싸게 얻는 것입니다. 힌트는 문제 종류마다 검사를 통과한 가장 짧은 프로그램을 자동으로 고르고, 새 문제의 종류부터 알아내며, 필요한 호출만 남깁니다. 검사는 토큰이 들지 않는 검사부터 쓰고, 조용히 틀리는 곳에만 다르게 틀리는 두 번째 관점을 더하고, 종류마다 30문제로 쓸 방법을 고릅니다. 그다음 이 방법을 수학 증명 문제로 넓히겠습니다. 증명은 Lean이 모든 단계를 검사해 주는 완벽한 공짜 검사가 있어서, 거기에 맞는 힌트를 찾는 것이 다음 과제입니다. 정리하면, 짧은 힌트를 먼저 주고, 공짜 검사가 실패한 곳에서만 생각하게 하자는 것입니다.
 [더 자세히: 질문이 나오거나 시간이 남을 때]
 첫째 줄, 생각을 어디에 쓸지. 기존 방법은 어려워 보이는 문제에 계산을 더 쓰는 Snell 등의 방식과, 언제 생각할지를 강화학습으로 가르치는 Thinkless, AdaptThink입니다. 저희는 정답 없이 돌리는 공짜 검사가 실패한 문제에만 생각을 씁니다. 기하와 최적화 208문제를 세 모델로 풀면 74%가 87%로 오르고, 토큰은 문제당 4.1k에서 2.5k로 줄었습니다. 87%는 사람이 쓴 힌트를 쓴 결과이고, 검색으로 찾은 힌트로도 84%입니다.
 둘째 줄, 모델에게 무엇을 주는지. 기존에는 매뉴얼 전체를 주거나, 더 큰 교사 모델이 짜서 정답으로 확인한 프로그램 모음을 줍니다. 저희 힌트는 모델이 다른 문제에서 짜서 공짜 검사를 통과한 자기 프로그램입니다. 끝까지 남겨 둔 MAMO 벤치마크에서 사람이 쓴 힌트와 같은 79%를 냈습니다.
 셋째 줄, 비용. ORLM-8B는 최적화 문장제용으로 파인튜닝한 공개 모델이고, 모델 카드의 형식과 솔버, 그리디 디코딩으로 저희 채점기에서 돌렸습니다: MAMO 69.5%, 문제당 1.1k 토큰(샘플링하면 64~66%). Qwen3-8B는 학습 없이 자기 힌트를 붙여 프로그램을 한 번 짜고 실행이 안 될 때만 생각하게 해서 69.5%, 1.0k 토큰입니다. 두 버전 검사까지 쓰면 71%(3.1k), gpt-oss-20b는 78.8%입니다.
-다음 계획. 하나, 힌트: 지금은 같은 종류의 문제 안에서만 자동 힌트가 통하므로, 새 문제의 종류를 먼저 알아내고 종류마다 힌트를 자동으로 고릅니다. 둘, 검사: MAMO에서 남은 오류의 절반쯤은 정답 라벨이 의심스러운 문제이고, 나머지는 실행도 되고 두 버전이 일치하지만 문제를 잘못 수식으로 옮긴 경우입니다. 이런 실수를 다른 관점으로 잡는 값싼 검사를 찾고, 문제 종류마다 어떤 검사를 쓸지 자동으로 고릅니다. 지금도 30문제만 라벨링하면 정책을 고를 수 있어서, 최선 대비 손실이 0.6점입니다. 셋, MAMO 검증을 Qwen3-32B와 Qwen3.6까지 세 번씩 마치고, 최종 보고서와 코드를 냅니다.</a:t>
+다음 계획. 하나, 힌트: 지금은 같은 종류의 문제 안에서만 자동 힌트가 통하므로, 새 문제의 종류를 먼저 알아내고 종류마다 힌트를 자동으로 고릅니다. 둘, 검사: MAMO에서 남은 오류의 절반쯤은 정답 라벨이 의심스러운 문제이고, 나머지는 실행도 되고 두 버전이 일치하지만 문제를 잘못 수식으로 옮긴 경우입니다. 이런 실수를 다른 관점으로 잡는 값싼 검사를 찾고, 문제 종류마다 어떤 검사를 쓸지 자동으로 고릅니다. 지금도 30문제만 라벨링하면 정책을 고를 수 있어서, 최선 대비 손실이 0.6점입니다. 셋, 수학 증명으로 넓힙니다. Lean이 증명의 모든 단계를 검사하므로 검사는 완벽하지만, 지금까지 일반 모델에는 비슷한 문제의 증명이나 부등식 도구 모음 같은 힌트가 도움이 되지 않았고, 특화 증명 모델 Goedel-Prover-V2-8B가 74%로 가장 잘 풉니다. 증명에 맞는 힌트를 찾는 것이 과제입니다.</a:t>
             </a:r>
             <a:endParaRPr lang="en-US" dirty="0"/>
           </a:p>
@@ -48093,7 +48093,7 @@
         <p:spPr>
           <a:xfrm>
             <a:off x="548640" y="3611880"/>
-            <a:ext cx="8503920" cy="347472"/>
+            <a:ext cx="7680960" cy="347472"/>
           </a:xfrm>
           <a:prstGeom prst="rect">
             <a:avLst/>
@@ -48122,14 +48122,41 @@
       </p:sp>
       <p:sp>
         <p:nvSpPr>
-          <p:cNvPr id="36" name="Text 28"/>
-          <p:cNvSpPr txBox="1"/>
-          <p:nvPr/>
-        </p:nvSpPr>
-        <p:spPr>
-          <a:xfrm>
-            <a:off x="8229600" y="3611880"/>
-            <a:ext cx="3383280" cy="347472"/>
+          <p:cNvPr id="36" name="box then: extend to math"/>
+          <p:cNvSpPr/>
+          <p:nvPr/>
+        </p:nvSpPr>
+        <p:spPr>
+          <a:xfrm>
+            <a:off x="8549640" y="3584448"/>
+            <a:ext cx="3063240" cy="384048"/>
+          </a:xfrm>
+          <a:prstGeom prst="roundRect">
+            <a:avLst>
+              <a:gd name="adj" fmla="val 14286"/>
+            </a:avLst>
+          </a:prstGeom>
+          <a:solidFill>
+            <a:srgbClr val="DEEBF7"/>
+          </a:solidFill>
+          <a:ln w="9525">
+            <a:solidFill>
+              <a:srgbClr val="BFBFBF"/>
+            </a:solidFill>
+            <a:prstDash val="solid"/>
+          </a:ln>
+        </p:spPr>
+      </p:sp>
+      <p:sp>
+        <p:nvSpPr>
+          <p:cNvPr id="37" name="Text 29"/>
+          <p:cNvSpPr txBox="1"/>
+          <p:nvPr/>
+        </p:nvSpPr>
+        <p:spPr>
+          <a:xfrm>
+            <a:off x="8622792" y="3584448"/>
+            <a:ext cx="2916936" cy="384048"/>
           </a:xfrm>
           <a:prstGeom prst="rect">
             <a:avLst/>
@@ -48141,24 +48168,24 @@
           <a:bodyPr wrap="square" lIns="0" tIns="0" rIns="0" bIns="0" rtlCol="0" anchor="ctr"/>
           <a:lstStyle/>
           <a:p>
-            <a:pPr algn="r" indent="0" marL="0">
-              <a:buNone/>
-            </a:pPr>
-            <a:r>
-              <a:rPr lang="en-US" sz="1400" dirty="0">
-                <a:solidFill>
-                  <a:srgbClr val="7F7F7F"/>
-                </a:solidFill>
-              </a:rPr>
-              <a:t>then: more models, report and code</a:t>
-            </a:r>
-            <a:endParaRPr lang="en-US" sz="1400" dirty="0"/>
-          </a:p>
-        </p:txBody>
-      </p:sp>
-      <p:sp>
-        <p:nvSpPr>
-          <p:cNvPr id="37" name="next Hints"/>
+            <a:pPr algn="ctr" indent="0" marL="0">
+              <a:buNone/>
+            </a:pPr>
+            <a:r>
+              <a:rPr lang="en-US" sz="1500" b="1" dirty="0">
+                <a:solidFill>
+                  <a:srgbClr val="1F3864"/>
+                </a:solidFill>
+              </a:rPr>
+              <a:t>then: extend to math proofs</a:t>
+            </a:r>
+            <a:endParaRPr lang="en-US" sz="1500" dirty="0"/>
+          </a:p>
+        </p:txBody>
+      </p:sp>
+      <p:sp>
+        <p:nvSpPr>
+          <p:cNvPr id="38" name="next Hints"/>
           <p:cNvSpPr/>
           <p:nvPr/>
         </p:nvSpPr>
@@ -48185,7 +48212,7 @@
       </p:sp>
       <p:pic>
         <p:nvPicPr>
-          <p:cNvPr id="38" name="next icon fact" descr="/NAS/SJ/POSTECH/nlp/figs/icons/fact.png">    </p:cNvPr>
+          <p:cNvPr id="39" name="next icon fact" descr="/NAS/SJ/POSTECH/nlp/figs/icons/fact.png">    </p:cNvPr>
           <p:cNvPicPr>
             <a:picLocks noChangeAspect="1"/>
           </p:cNvPicPr>
@@ -48209,7 +48236,7 @@
       </p:pic>
       <p:sp>
         <p:nvSpPr>
-          <p:cNvPr id="39" name="Text 30"/>
+          <p:cNvPr id="40" name="Text 31"/>
           <p:cNvSpPr txBox="1"/>
           <p:nvPr/>
         </p:nvSpPr>
@@ -48245,7 +48272,7 @@
       </p:sp>
       <p:sp>
         <p:nvSpPr>
-          <p:cNvPr id="40" name="Text 31"/>
+          <p:cNvPr id="41" name="Text 32"/>
           <p:cNvSpPr txBox="1"/>
           <p:nvPr/>
         </p:nvSpPr>
@@ -48281,7 +48308,7 @@
       </p:sp>
       <p:sp>
         <p:nvSpPr>
-          <p:cNvPr id="41" name="Text 32"/>
+          <p:cNvPr id="42" name="Text 33"/>
           <p:cNvSpPr txBox="1"/>
           <p:nvPr/>
         </p:nvSpPr>
@@ -48317,7 +48344,7 @@
       </p:sp>
       <p:sp>
         <p:nvSpPr>
-          <p:cNvPr id="42" name="Text 33"/>
+          <p:cNvPr id="43" name="Text 34"/>
           <p:cNvSpPr txBox="1"/>
           <p:nvPr/>
         </p:nvSpPr>
@@ -48353,7 +48380,7 @@
       </p:sp>
       <p:sp>
         <p:nvSpPr>
-          <p:cNvPr id="43" name="next Checks"/>
+          <p:cNvPr id="44" name="next Checks"/>
           <p:cNvSpPr/>
           <p:nvPr/>
         </p:nvSpPr>
@@ -48380,7 +48407,7 @@
       </p:sp>
       <p:pic>
         <p:nvPicPr>
-          <p:cNvPr id="44" name="next icon check" descr="/NAS/SJ/POSTECH/nlp/figs/icons/check.png">    </p:cNvPr>
+          <p:cNvPr id="45" name="next icon check" descr="/NAS/SJ/POSTECH/nlp/figs/icons/check.png">    </p:cNvPr>
           <p:cNvPicPr>
             <a:picLocks noChangeAspect="1"/>
           </p:cNvPicPr>
@@ -48404,7 +48431,7 @@
       </p:pic>
       <p:sp>
         <p:nvSpPr>
-          <p:cNvPr id="45" name="Text 35"/>
+          <p:cNvPr id="46" name="Text 36"/>
           <p:cNvSpPr txBox="1"/>
           <p:nvPr/>
         </p:nvSpPr>
@@ -48440,7 +48467,7 @@
       </p:sp>
       <p:sp>
         <p:nvSpPr>
-          <p:cNvPr id="46" name="Text 36"/>
+          <p:cNvPr id="47" name="Text 37"/>
           <p:cNvSpPr txBox="1"/>
           <p:nvPr/>
         </p:nvSpPr>
@@ -48476,7 +48503,7 @@
       </p:sp>
       <p:sp>
         <p:nvSpPr>
-          <p:cNvPr id="47" name="Text 37"/>
+          <p:cNvPr id="48" name="Text 38"/>
           <p:cNvSpPr txBox="1"/>
           <p:nvPr/>
         </p:nvSpPr>
@@ -48512,7 +48539,7 @@
       </p:sp>
       <p:sp>
         <p:nvSpPr>
-          <p:cNvPr id="48" name="Text 38"/>
+          <p:cNvPr id="49" name="Text 39"/>
           <p:cNvSpPr txBox="1"/>
           <p:nvPr/>
         </p:nvSpPr>
@@ -48548,7 +48575,7 @@
       </p:sp>
       <p:sp>
         <p:nvSpPr>
-          <p:cNvPr id="49" name="Text 39"/>
+          <p:cNvPr id="50" name="Text 40"/>
           <p:cNvSpPr txBox="1"/>
           <p:nvPr/>
         </p:nvSpPr>

--- a/Proposal_Team5.pptx
+++ b/Proposal_Team5.pptx
@@ -141,7 +141,7 @@
   <p:extLst>
     <p:ext uri="{521415D9-36F7-43E2-AB2F-B90AF26B5E84}">
       <p14:sectionLst xmlns:p14="http://schemas.microsoft.com/office/powerpoint/2010/main">
-        <p14:section name="Talk" id="{2e828967-5e85-3307-9250-b980fa9fbfe8}">
+        <p14:section name="Talk" id="{ea2a0eac-4bc4-0cb3-9a59-9844b876a3b8}">
           <p14:sldIdLst>
             <p14:sldId id="256"/>
             <p14:sldId id="257"/>
@@ -154,7 +154,7 @@
             <p14:sldId id="264"/>
           </p14:sldIdLst>
         </p14:section>
-        <p14:section name="Extra pages" id="{3737a662-cc89-ab53-0062-ef046178acfd}">
+        <p14:section name="Extra pages" id="{cf5166e4-e9f2-5c72-533c-a104ef837a20}">
           <p14:sldIdLst>
             <p14:sldId id="265"/>
             <p14:sldId id="266"/>
@@ -4314,7 +4314,7 @@
           <a:p>
             <a:r>
               <a:rPr lang="en-US" dirty="0"/>
-              <a:t>(65초) 새로운 점은 세 가지입니다. 학습 없이 공짜 검사로 생각할 때를 정하고, 정답 없이 모델 자신의 프로그램을 힌트로 쓰며, 파인튜닝한 특화 모델 ORLM-8B와 같은 69.5%를 학습하지 않은 8B 모델로 냅니다. 다음 연구는 힌트와 검사를 자동으로, 정확하고 싸게 얻는 것입니다. 힌트는 문제 종류마다 검사를 통과한 가장 짧은 프로그램을 자동으로 고르고, 새 문제의 종류부터 알아내며, 필요한 호출만 남깁니다. 검사는 토큰이 들지 않는 검사부터 쓰고, 조용히 틀리는 곳에만 다르게 틀리는 두 번째 관점을 더하고, 종류마다 30문제로 쓸 방법을 고릅니다. 그다음 이 방법을 수학 증명 문제로 넓히겠습니다. 증명은 Lean이 모든 단계를 검사해 주는 완벽한 공짜 검사가 있어서, 거기에 맞는 힌트를 찾는 것이 다음 과제입니다. 정리하면, 짧은 힌트를 먼저 주고, 공짜 검사가 실패한 곳에서만 생각하게 하자는 것입니다.
+              <a:t>(40초) 새로운 점은 세 가지입니다. 학습 없이 공짜 검사가 실패할 때만 생각해서 74%를 87%로 올렸고, 매뉴얼 대신 사람 없이 고른 짧은 힌트 하나를 주며, 파인튜닝한 특화 모델과 같은 69.5%를 학습 없이 24GB GPU 한 장으로 냅니다. 다음은 세 가지입니다. 힌트를 문제 종류마다 자동으로 고르고, 토큰 없이 더 많이 잡는 검사를 만들고, 마지막으로 수학 증명으로 넓힙니다. 증명은 Lean이 모든 단계를 검사해 주니, 거기에 맞는 힌트를 찾는 것이 과제입니다. 정리하면, 짧은 힌트를 먼저 주고, 공짜 검사가 실패한 곳에서만 생각하게 하자는 것입니다.
 [더 자세히: 질문이 나오거나 시간이 남을 때]
 첫째 줄, 생각을 어디에 쓸지. 기존 방법은 어려워 보이는 문제에 계산을 더 쓰는 Snell 등의 방식과, 언제 생각할지를 강화학습으로 가르치는 Thinkless, AdaptThink입니다. 저희는 정답 없이 돌리는 공짜 검사가 실패한 문제에만 생각을 씁니다. 기하와 최적화 208문제를 세 모델로 풀면 74%가 87%로 오르고, 토큰은 문제당 4.1k에서 2.5k로 줄었습니다. 87%는 사람이 쓴 힌트를 쓴 결과이고, 검색으로 찾은 힌트로도 84%입니다.
 둘째 줄, 모델에게 무엇을 주는지. 기존에는 매뉴얼 전체를 주거나, 더 큰 교사 모델이 짜서 정답으로 확인한 프로그램 모음을 줍니다. 저희 힌트는 모델이 다른 문제에서 짜서 공짜 검사를 통과한 자기 프로그램입니다. 끝까지 남겨 둔 MAMO 벤치마크에서 사람이 쓴 힌트와 같은 79%를 냈습니다.
@@ -47356,7 +47356,7 @@
                   <a:srgbClr val="404040"/>
                 </a:solidFill>
               </a:rPr>
-              <a:t>think more on hard-looking problems, or train the model when to think</a:t>
+              <a:t>think more on hard-looking problems</a:t>
             </a:r>
             <a:endParaRPr lang="en-US" sz="1400" dirty="0"/>
           </a:p>
@@ -47496,7 +47496,7 @@
                   <a:srgbClr val="1F3864"/>
                 </a:solidFill>
               </a:rPr>
-              <a:t>think only when a free check fails; no training: 87% vs 74% (208 problems)</a:t>
+              <a:t>only when a free check fails: 87% vs 74%</a:t>
             </a:r>
             <a:endParaRPr lang="en-US" sz="1400" dirty="0"/>
           </a:p>
@@ -47647,7 +47647,7 @@
                   <a:srgbClr val="404040"/>
                 </a:solidFill>
               </a:rPr>
-              <a:t>the whole manual, or programs from a bigger model checked with answers</a:t>
+              <a:t>the whole manual</a:t>
             </a:r>
             <a:endParaRPr lang="en-US" sz="1400" dirty="0"/>
           </a:p>
@@ -47787,7 +47787,7 @@
                   <a:srgbClr val="1F3864"/>
                 </a:solidFill>
               </a:rPr>
-              <a:t>one short hint: the model's own program that passed the check; no answers</a:t>
+              <a:t>one short hint, picked with no human</a:t>
             </a:r>
             <a:endParaRPr lang="en-US" sz="1400" dirty="0"/>
           </a:p>
@@ -47938,7 +47938,7 @@
                   <a:srgbClr val="404040"/>
                 </a:solidFill>
               </a:rPr>
-              <a:t>fine-tune a specialist (ORLM-8B): 69.5% on MAMO</a:t>
+              <a:t>fine-tune a specialist: 69.5%</a:t>
             </a:r>
             <a:endParaRPr lang="en-US" sz="1400" dirty="0"/>
           </a:p>
@@ -48078,7 +48078,7 @@
                   <a:srgbClr val="1F3864"/>
                 </a:solidFill>
               </a:rPr>
-              <a:t>untrained Qwen3-8B + that hint, one 24 GB GPU: the same 69.5%</a:t>
+              <a:t>no training, one 24 GB GPU: 69.5%</a:t>
             </a:r>
             <a:endParaRPr lang="en-US" sz="1400" dirty="0"/>
           </a:p>
@@ -48093,7 +48093,7 @@
         <p:spPr>
           <a:xfrm>
             <a:off x="548640" y="3611880"/>
-            <a:ext cx="7680960" cy="347472"/>
+            <a:ext cx="11064240" cy="365760"/>
           </a:xfrm>
           <a:prstGeom prst="rect">
             <a:avLst/>
@@ -48109,94 +48109,31 @@
               <a:buNone/>
             </a:pPr>
             <a:r>
-              <a:rPr lang="en-US" sz="1600" b="1" dirty="0">
+              <a:rPr lang="en-US" sz="1800" b="1" dirty="0">
                 <a:solidFill>
                   <a:schemeClr val="tx1"/>
                 </a:solidFill>
               </a:rPr>
-              <a:t>Next: get the hints and run the checks automatically, effectively and cheaply</a:t>
-            </a:r>
-            <a:endParaRPr lang="en-US" sz="1600" dirty="0"/>
-          </a:p>
-        </p:txBody>
-      </p:sp>
-      <p:sp>
-        <p:nvSpPr>
-          <p:cNvPr id="36" name="box then: extend to math"/>
+              <a:t>Next</a:t>
+            </a:r>
+            <a:endParaRPr lang="en-US" sz="1800" dirty="0"/>
+          </a:p>
+        </p:txBody>
+      </p:sp>
+      <p:sp>
+        <p:nvSpPr>
+          <p:cNvPr id="36" name="next Automatic hints"/>
           <p:cNvSpPr/>
           <p:nvPr/>
         </p:nvSpPr>
         <p:spPr>
           <a:xfrm>
-            <a:off x="8549640" y="3584448"/>
-            <a:ext cx="3063240" cy="384048"/>
+            <a:off x="548640" y="4023360"/>
+            <a:ext cx="3566160" cy="1508760"/>
           </a:xfrm>
           <a:prstGeom prst="roundRect">
             <a:avLst>
-              <a:gd name="adj" fmla="val 14286"/>
-            </a:avLst>
-          </a:prstGeom>
-          <a:solidFill>
-            <a:srgbClr val="DEEBF7"/>
-          </a:solidFill>
-          <a:ln w="9525">
-            <a:solidFill>
-              <a:srgbClr val="BFBFBF"/>
-            </a:solidFill>
-            <a:prstDash val="solid"/>
-          </a:ln>
-        </p:spPr>
-      </p:sp>
-      <p:sp>
-        <p:nvSpPr>
-          <p:cNvPr id="37" name="Text 29"/>
-          <p:cNvSpPr txBox="1"/>
-          <p:nvPr/>
-        </p:nvSpPr>
-        <p:spPr>
-          <a:xfrm>
-            <a:off x="8622792" y="3584448"/>
-            <a:ext cx="2916936" cy="384048"/>
-          </a:xfrm>
-          <a:prstGeom prst="rect">
-            <a:avLst/>
-          </a:prstGeom>
-          <a:noFill/>
-          <a:ln/>
-        </p:spPr>
-        <p:txBody>
-          <a:bodyPr wrap="square" lIns="0" tIns="0" rIns="0" bIns="0" rtlCol="0" anchor="ctr"/>
-          <a:lstStyle/>
-          <a:p>
-            <a:pPr algn="ctr" indent="0" marL="0">
-              <a:buNone/>
-            </a:pPr>
-            <a:r>
-              <a:rPr lang="en-US" sz="1500" b="1" dirty="0">
-                <a:solidFill>
-                  <a:srgbClr val="1F3864"/>
-                </a:solidFill>
-              </a:rPr>
-              <a:t>then: extend to math proofs</a:t>
-            </a:r>
-            <a:endParaRPr lang="en-US" sz="1500" dirty="0"/>
-          </a:p>
-        </p:txBody>
-      </p:sp>
-      <p:sp>
-        <p:nvSpPr>
-          <p:cNvPr id="38" name="next Hints"/>
-          <p:cNvSpPr/>
-          <p:nvPr/>
-        </p:nvSpPr>
-        <p:spPr>
-          <a:xfrm>
-            <a:off x="548640" y="4005072"/>
-            <a:ext cx="5440680" cy="1572768"/>
-          </a:xfrm>
-          <a:prstGeom prst="roundRect">
-            <a:avLst>
-              <a:gd name="adj" fmla="val 4651"/>
+              <a:gd name="adj" fmla="val 4848"/>
             </a:avLst>
           </a:prstGeom>
           <a:solidFill>
@@ -48212,7 +48149,7 @@
       </p:sp>
       <p:pic>
         <p:nvPicPr>
-          <p:cNvPr id="39" name="next icon fact" descr="/NAS/SJ/POSTECH/nlp/figs/icons/fact.png">    </p:cNvPr>
+          <p:cNvPr id="37" name="next icon fact" descr="/NAS/SJ/POSTECH/nlp/figs/icons/fact.png">    </p:cNvPr>
           <p:cNvPicPr>
             <a:picLocks noChangeAspect="1"/>
           </p:cNvPicPr>
@@ -48226,8 +48163,8 @@
         </p:blipFill>
         <p:spPr>
           <a:xfrm>
-            <a:off x="713232" y="4096512"/>
-            <a:ext cx="329184" cy="329184"/>
+            <a:off x="749808" y="4160520"/>
+            <a:ext cx="457200" cy="457200"/>
           </a:xfrm>
           <a:prstGeom prst="rect">
             <a:avLst/>
@@ -48236,14 +48173,14 @@
       </p:pic>
       <p:sp>
         <p:nvSpPr>
-          <p:cNvPr id="40" name="Text 31"/>
-          <p:cNvSpPr txBox="1"/>
-          <p:nvPr/>
-        </p:nvSpPr>
-        <p:spPr>
-          <a:xfrm>
-            <a:off x="1115568" y="4069080"/>
-            <a:ext cx="2743200" cy="384048"/>
+          <p:cNvPr id="38" name="Text 29"/>
+          <p:cNvSpPr txBox="1"/>
+          <p:nvPr/>
+        </p:nvSpPr>
+        <p:spPr>
+          <a:xfrm>
+            <a:off x="1325880" y="4133088"/>
+            <a:ext cx="2651760" cy="502920"/>
           </a:xfrm>
           <a:prstGeom prst="rect">
             <a:avLst/>
@@ -48259,139 +48196,67 @@
               <a:buNone/>
             </a:pPr>
             <a:r>
-              <a:rPr lang="en-US" sz="1600" b="1" dirty="0">
+              <a:rPr lang="en-US" sz="1900" b="1" dirty="0">
                 <a:solidFill>
                   <a:srgbClr val="4472C4"/>
                 </a:solidFill>
               </a:rPr>
-              <a:t>Hints</a:t>
-            </a:r>
-            <a:endParaRPr lang="en-US" sz="1600" dirty="0"/>
-          </a:p>
-        </p:txBody>
-      </p:sp>
-      <p:sp>
-        <p:nvSpPr>
-          <p:cNvPr id="41" name="Text 32"/>
-          <p:cNvSpPr txBox="1"/>
-          <p:nvPr/>
-        </p:nvSpPr>
-        <p:spPr>
-          <a:xfrm>
-            <a:off x="731520" y="4462272"/>
-            <a:ext cx="5120640" cy="338328"/>
-          </a:xfrm>
-          <a:prstGeom prst="rect">
-            <a:avLst/>
-          </a:prstGeom>
-          <a:noFill/>
-          <a:ln/>
-        </p:spPr>
-        <p:txBody>
-          <a:bodyPr wrap="square" lIns="0" tIns="0" rIns="0" bIns="0" rtlCol="0" anchor="ctr"/>
+              <a:t>Automatic hints</a:t>
+            </a:r>
+            <a:endParaRPr lang="en-US" sz="1900" dirty="0"/>
+          </a:p>
+        </p:txBody>
+      </p:sp>
+      <p:sp>
+        <p:nvSpPr>
+          <p:cNvPr id="39" name="Text 30"/>
+          <p:cNvSpPr txBox="1"/>
+          <p:nvPr/>
+        </p:nvSpPr>
+        <p:spPr>
+          <a:xfrm>
+            <a:off x="749808" y="4709160"/>
+            <a:ext cx="3200400" cy="731520"/>
+          </a:xfrm>
+          <a:prstGeom prst="rect">
+            <a:avLst/>
+          </a:prstGeom>
+          <a:noFill/>
+          <a:ln/>
+        </p:spPr>
+        <p:txBody>
+          <a:bodyPr wrap="square" lIns="0" tIns="0" rIns="0" bIns="0" rtlCol="0" anchor="t"/>
           <a:lstStyle/>
           <a:p>
             <a:pPr indent="0" marL="0">
               <a:buNone/>
             </a:pPr>
             <a:r>
-              <a:rPr lang="en-US" sz="1400" dirty="0">
+              <a:rPr lang="en-US" sz="1500" dirty="0">
                 <a:solidFill>
                   <a:schemeClr val="tx1"/>
                 </a:solidFill>
               </a:rPr>
-              <a:t>• pick per type: the shortest past program that passed the check</a:t>
-            </a:r>
-            <a:endParaRPr lang="en-US" sz="1400" dirty="0"/>
-          </a:p>
-        </p:txBody>
-      </p:sp>
-      <p:sp>
-        <p:nvSpPr>
-          <p:cNvPr id="42" name="Text 33"/>
-          <p:cNvSpPr txBox="1"/>
-          <p:nvPr/>
-        </p:nvSpPr>
-        <p:spPr>
-          <a:xfrm>
-            <a:off x="731520" y="4818888"/>
-            <a:ext cx="5120640" cy="338328"/>
-          </a:xfrm>
-          <a:prstGeom prst="rect">
-            <a:avLst/>
-          </a:prstGeom>
-          <a:noFill/>
-          <a:ln/>
-        </p:spPr>
-        <p:txBody>
-          <a:bodyPr wrap="square" lIns="0" tIns="0" rIns="0" bIns="0" rtlCol="0" anchor="ctr"/>
-          <a:lstStyle/>
-          <a:p>
-            <a:pPr indent="0" marL="0">
-              <a:buNone/>
-            </a:pPr>
-            <a:r>
-              <a:rPr lang="en-US" sz="1400" dirty="0">
-                <a:solidFill>
-                  <a:schemeClr val="tx1"/>
-                </a:solidFill>
-              </a:rPr>
-              <a:t>• tell a new problem's type first (another type's hint misleads)</a:t>
-            </a:r>
-            <a:endParaRPr lang="en-US" sz="1400" dirty="0"/>
-          </a:p>
-        </p:txBody>
-      </p:sp>
-      <p:sp>
-        <p:nvSpPr>
-          <p:cNvPr id="43" name="Text 34"/>
-          <p:cNvSpPr txBox="1"/>
-          <p:nvPr/>
-        </p:nvSpPr>
-        <p:spPr>
-          <a:xfrm>
-            <a:off x="731520" y="5175504"/>
-            <a:ext cx="5120640" cy="338328"/>
-          </a:xfrm>
-          <a:prstGeom prst="rect">
-            <a:avLst/>
-          </a:prstGeom>
-          <a:noFill/>
-          <a:ln/>
-        </p:spPr>
-        <p:txBody>
-          <a:bodyPr wrap="square" lIns="0" tIns="0" rIns="0" bIns="0" rtlCol="0" anchor="ctr"/>
-          <a:lstStyle/>
-          <a:p>
-            <a:pPr indent="0" marL="0">
-              <a:buNone/>
-            </a:pPr>
-            <a:r>
-              <a:rPr lang="en-US" sz="1400" dirty="0">
-                <a:solidFill>
-                  <a:schemeClr val="tx1"/>
-                </a:solidFill>
-              </a:rPr>
-              <a:t>• keep only the needed calls: about 200 input tokens</a:t>
-            </a:r>
-            <a:endParaRPr lang="en-US" sz="1400" dirty="0"/>
-          </a:p>
-        </p:txBody>
-      </p:sp>
-      <p:sp>
-        <p:nvSpPr>
-          <p:cNvPr id="44" name="next Checks"/>
+              <a:t>picked per problem type, only the needed calls</a:t>
+            </a:r>
+            <a:endParaRPr lang="en-US" sz="1500" dirty="0"/>
+          </a:p>
+        </p:txBody>
+      </p:sp>
+      <p:sp>
+        <p:nvSpPr>
+          <p:cNvPr id="40" name="next Sharper free checks"/>
           <p:cNvSpPr/>
           <p:nvPr/>
         </p:nvSpPr>
         <p:spPr>
           <a:xfrm>
-            <a:off x="6172200" y="4005072"/>
-            <a:ext cx="5440680" cy="1572768"/>
+            <a:off x="4297680" y="4023360"/>
+            <a:ext cx="3566160" cy="1508760"/>
           </a:xfrm>
           <a:prstGeom prst="roundRect">
             <a:avLst>
-              <a:gd name="adj" fmla="val 4651"/>
+              <a:gd name="adj" fmla="val 4848"/>
             </a:avLst>
           </a:prstGeom>
           <a:solidFill>
@@ -48407,7 +48272,7 @@
       </p:sp>
       <p:pic>
         <p:nvPicPr>
-          <p:cNvPr id="45" name="next icon check" descr="/NAS/SJ/POSTECH/nlp/figs/icons/check.png">    </p:cNvPr>
+          <p:cNvPr id="41" name="next icon check" descr="/NAS/SJ/POSTECH/nlp/figs/icons/check.png">    </p:cNvPr>
           <p:cNvPicPr>
             <a:picLocks noChangeAspect="1"/>
           </p:cNvPicPr>
@@ -48421,8 +48286,8 @@
         </p:blipFill>
         <p:spPr>
           <a:xfrm>
-            <a:off x="6336792" y="4096512"/>
-            <a:ext cx="329184" cy="329184"/>
+            <a:off x="4498848" y="4160520"/>
+            <a:ext cx="457200" cy="457200"/>
           </a:xfrm>
           <a:prstGeom prst="rect">
             <a:avLst/>
@@ -48431,14 +48296,14 @@
       </p:pic>
       <p:sp>
         <p:nvSpPr>
-          <p:cNvPr id="46" name="Text 36"/>
-          <p:cNvSpPr txBox="1"/>
-          <p:nvPr/>
-        </p:nvSpPr>
-        <p:spPr>
-          <a:xfrm>
-            <a:off x="6739128" y="4069080"/>
-            <a:ext cx="2743200" cy="384048"/>
+          <p:cNvPr id="42" name="Text 32"/>
+          <p:cNvSpPr txBox="1"/>
+          <p:nvPr/>
+        </p:nvSpPr>
+        <p:spPr>
+          <a:xfrm>
+            <a:off x="5074920" y="4133088"/>
+            <a:ext cx="2651760" cy="502920"/>
           </a:xfrm>
           <a:prstGeom prst="rect">
             <a:avLst/>
@@ -48454,27 +48319,114 @@
               <a:buNone/>
             </a:pPr>
             <a:r>
-              <a:rPr lang="en-US" sz="1600" b="1" dirty="0">
+              <a:rPr lang="en-US" sz="1900" b="1" dirty="0">
                 <a:solidFill>
                   <a:srgbClr val="4472C4"/>
                 </a:solidFill>
               </a:rPr>
-              <a:t>Checks</a:t>
-            </a:r>
-            <a:endParaRPr lang="en-US" sz="1600" dirty="0"/>
-          </a:p>
-        </p:txBody>
-      </p:sp>
-      <p:sp>
-        <p:nvSpPr>
-          <p:cNvPr id="47" name="Text 37"/>
-          <p:cNvSpPr txBox="1"/>
-          <p:nvPr/>
-        </p:nvSpPr>
-        <p:spPr>
-          <a:xfrm>
-            <a:off x="6355080" y="4462272"/>
-            <a:ext cx="5120640" cy="338328"/>
+              <a:t>Sharper free checks</a:t>
+            </a:r>
+            <a:endParaRPr lang="en-US" sz="1900" dirty="0"/>
+          </a:p>
+        </p:txBody>
+      </p:sp>
+      <p:sp>
+        <p:nvSpPr>
+          <p:cNvPr id="43" name="Text 33"/>
+          <p:cNvSpPr txBox="1"/>
+          <p:nvPr/>
+        </p:nvSpPr>
+        <p:spPr>
+          <a:xfrm>
+            <a:off x="4498848" y="4709160"/>
+            <a:ext cx="3200400" cy="731520"/>
+          </a:xfrm>
+          <a:prstGeom prst="rect">
+            <a:avLst/>
+          </a:prstGeom>
+          <a:noFill/>
+          <a:ln/>
+        </p:spPr>
+        <p:txBody>
+          <a:bodyPr wrap="square" lIns="0" tIns="0" rIns="0" bIns="0" rtlCol="0" anchor="t"/>
+          <a:lstStyle/>
+          <a:p>
+            <a:pPr indent="0" marL="0">
+              <a:buNone/>
+            </a:pPr>
+            <a:r>
+              <a:rPr lang="en-US" sz="1500" dirty="0">
+                <a:solidFill>
+                  <a:schemeClr val="tx1"/>
+                </a:solidFill>
+              </a:rPr>
+              <a:t>catch more mistakes, still with no extra tokens</a:t>
+            </a:r>
+            <a:endParaRPr lang="en-US" sz="1500" dirty="0"/>
+          </a:p>
+        </p:txBody>
+      </p:sp>
+      <p:sp>
+        <p:nvSpPr>
+          <p:cNvPr id="44" name="next Math proofs"/>
+          <p:cNvSpPr/>
+          <p:nvPr/>
+        </p:nvSpPr>
+        <p:spPr>
+          <a:xfrm>
+            <a:off x="8046720" y="4023360"/>
+            <a:ext cx="3566160" cy="1508760"/>
+          </a:xfrm>
+          <a:prstGeom prst="roundRect">
+            <a:avLst>
+              <a:gd name="adj" fmla="val 4848"/>
+            </a:avLst>
+          </a:prstGeom>
+          <a:solidFill>
+            <a:srgbClr val="F2F2F2"/>
+          </a:solidFill>
+          <a:ln w="9525">
+            <a:solidFill>
+              <a:srgbClr val="D9D9D9"/>
+            </a:solidFill>
+            <a:prstDash val="solid"/>
+          </a:ln>
+        </p:spPr>
+      </p:sp>
+      <p:pic>
+        <p:nvPicPr>
+          <p:cNvPr id="45" name="next icon sqrt" descr="/NAS/SJ/POSTECH/nlp/figs/icons/sqrt.png">    </p:cNvPr>
+          <p:cNvPicPr>
+            <a:picLocks noChangeAspect="1"/>
+          </p:cNvPicPr>
+          <p:nvPr/>
+        </p:nvPicPr>
+        <p:blipFill>
+          <a:blip r:embed="rId9"/>
+          <a:stretch>
+            <a:fillRect/>
+          </a:stretch>
+        </p:blipFill>
+        <p:spPr>
+          <a:xfrm>
+            <a:off x="8247888" y="4160520"/>
+            <a:ext cx="457200" cy="457200"/>
+          </a:xfrm>
+          <a:prstGeom prst="rect">
+            <a:avLst/>
+          </a:prstGeom>
+        </p:spPr>
+      </p:pic>
+      <p:sp>
+        <p:nvSpPr>
+          <p:cNvPr id="46" name="Text 35"/>
+          <p:cNvSpPr txBox="1"/>
+          <p:nvPr/>
+        </p:nvSpPr>
+        <p:spPr>
+          <a:xfrm>
+            <a:off x="8823960" y="4133088"/>
+            <a:ext cx="2651760" cy="502920"/>
           </a:xfrm>
           <a:prstGeom prst="rect">
             <a:avLst/>
@@ -48490,92 +48442,56 @@
               <a:buNone/>
             </a:pPr>
             <a:r>
-              <a:rPr lang="en-US" sz="1400" dirty="0">
+              <a:rPr lang="en-US" sz="1900" b="1" dirty="0">
+                <a:solidFill>
+                  <a:srgbClr val="4472C4"/>
+                </a:solidFill>
+              </a:rPr>
+              <a:t>Math proofs</a:t>
+            </a:r>
+            <a:endParaRPr lang="en-US" sz="1900" dirty="0"/>
+          </a:p>
+        </p:txBody>
+      </p:sp>
+      <p:sp>
+        <p:nvSpPr>
+          <p:cNvPr id="47" name="Text 36"/>
+          <p:cNvSpPr txBox="1"/>
+          <p:nvPr/>
+        </p:nvSpPr>
+        <p:spPr>
+          <a:xfrm>
+            <a:off x="8247888" y="4709160"/>
+            <a:ext cx="3200400" cy="731520"/>
+          </a:xfrm>
+          <a:prstGeom prst="rect">
+            <a:avLst/>
+          </a:prstGeom>
+          <a:noFill/>
+          <a:ln/>
+        </p:spPr>
+        <p:txBody>
+          <a:bodyPr wrap="square" lIns="0" tIns="0" rIns="0" bIns="0" rtlCol="0" anchor="t"/>
+          <a:lstStyle/>
+          <a:p>
+            <a:pPr indent="0" marL="0">
+              <a:buNone/>
+            </a:pPr>
+            <a:r>
+              <a:rPr lang="en-US" sz="1500" dirty="0">
                 <a:solidFill>
                   <a:schemeClr val="tx1"/>
                 </a:solidFill>
               </a:rPr>
-              <a:t>• zero-token checks first: examples, moved copies, plan rules</a:t>
-            </a:r>
-            <a:endParaRPr lang="en-US" sz="1400" dirty="0"/>
-          </a:p>
-        </p:txBody>
-      </p:sp>
-      <p:sp>
-        <p:nvSpPr>
-          <p:cNvPr id="48" name="Text 38"/>
-          <p:cNvSpPr txBox="1"/>
-          <p:nvPr/>
-        </p:nvSpPr>
-        <p:spPr>
-          <a:xfrm>
-            <a:off x="6355080" y="4818888"/>
-            <a:ext cx="5120640" cy="338328"/>
-          </a:xfrm>
-          <a:prstGeom prst="rect">
-            <a:avLst/>
-          </a:prstGeom>
-          <a:noFill/>
-          <a:ln/>
-        </p:spPr>
-        <p:txBody>
-          <a:bodyPr wrap="square" lIns="0" tIns="0" rIns="0" bIns="0" rtlCol="0" anchor="ctr"/>
-          <a:lstStyle/>
-          <a:p>
-            <a:pPr indent="0" marL="0">
-              <a:buNone/>
-            </a:pPr>
-            <a:r>
-              <a:rPr lang="en-US" sz="1400" dirty="0">
-                <a:solidFill>
-                  <a:schemeClr val="tx1"/>
-                </a:solidFill>
-              </a:rPr>
-              <a:t>• add a second view that errs differently where errors stay silent</a:t>
-            </a:r>
-            <a:endParaRPr lang="en-US" sz="1400" dirty="0"/>
-          </a:p>
-        </p:txBody>
-      </p:sp>
-      <p:sp>
-        <p:nvSpPr>
-          <p:cNvPr id="49" name="Text 39"/>
-          <p:cNvSpPr txBox="1"/>
-          <p:nvPr/>
-        </p:nvSpPr>
-        <p:spPr>
-          <a:xfrm>
-            <a:off x="6355080" y="5175504"/>
-            <a:ext cx="5120640" cy="338328"/>
-          </a:xfrm>
-          <a:prstGeom prst="rect">
-            <a:avLst/>
-          </a:prstGeom>
-          <a:noFill/>
-          <a:ln/>
-        </p:spPr>
-        <p:txBody>
-          <a:bodyPr wrap="square" lIns="0" tIns="0" rIns="0" bIns="0" rtlCol="0" anchor="ctr"/>
-          <a:lstStyle/>
-          <a:p>
-            <a:pPr indent="0" marL="0">
-              <a:buNone/>
-            </a:pPr>
-            <a:r>
-              <a:rPr lang="en-US" sz="1400" dirty="0">
-                <a:solidFill>
-                  <a:schemeClr val="tx1"/>
-                </a:solidFill>
-              </a:rPr>
-              <a:t>• choose the policy per type from 30 labelled problems</a:t>
-            </a:r>
-            <a:endParaRPr lang="en-US" sz="1400" dirty="0"/>
-          </a:p>
-        </p:txBody>
-      </p:sp>
-      <p:sp>
-        <p:nvSpPr>
-          <p:cNvPr id="50" name="Text 40"/>
+              <a:t>Lean checks every step: find the hints that help</a:t>
+            </a:r>
+            <a:endParaRPr lang="en-US" sz="1500" dirty="0"/>
+          </a:p>
+        </p:txBody>
+      </p:sp>
+      <p:sp>
+        <p:nvSpPr>
+          <p:cNvPr id="48" name="Text 37"/>
           <p:cNvSpPr txBox="1"/>
           <p:nvPr/>
         </p:nvSpPr>

--- a/Proposal_Team5.pptx
+++ b/Proposal_Team5.pptx
@@ -141,7 +141,7 @@
   <p:extLst>
     <p:ext uri="{521415D9-36F7-43E2-AB2F-B90AF26B5E84}">
       <p14:sectionLst xmlns:p14="http://schemas.microsoft.com/office/powerpoint/2010/main">
-        <p14:section name="Talk" id="{ea2a0eac-4bc4-0cb3-9a59-9844b876a3b8}">
+        <p14:section name="Talk" id="{0da69995-112b-6f19-0356-937471a1dbd3}">
           <p14:sldIdLst>
             <p14:sldId id="256"/>
             <p14:sldId id="257"/>
@@ -154,7 +154,7 @@
             <p14:sldId id="264"/>
           </p14:sldIdLst>
         </p14:section>
-        <p14:section name="Extra pages" id="{cf5166e4-e9f2-5c72-533c-a104ef837a20}">
+        <p14:section name="Extra pages" id="{c8219b6e-e90c-e5d0-7e54-3ed70bf538e7}">
           <p14:sldIdLst>
             <p14:sldId id="265"/>
             <p14:sldId id="266"/>
@@ -47938,7 +47938,7 @@
                   <a:srgbClr val="404040"/>
                 </a:solidFill>
               </a:rPr>
-              <a:t>fine-tune a specialist: 69.5%</a:t>
+              <a:t>fine-tune a specialist: 69.5% on MAMO</a:t>
             </a:r>
             <a:endParaRPr lang="en-US" sz="1400" dirty="0"/>
           </a:p>
@@ -48078,7 +48078,7 @@
                   <a:srgbClr val="1F3864"/>
                 </a:solidFill>
               </a:rPr>
-              <a:t>no training, one 24 GB GPU: 69.5%</a:t>
+              <a:t>no training, one 24 GB GPU: the same 69.5%</a:t>
             </a:r>
             <a:endParaRPr lang="en-US" sz="1400" dirty="0"/>
           </a:p>
@@ -48092,7 +48092,7 @@
         </p:nvSpPr>
         <p:spPr>
           <a:xfrm>
-            <a:off x="548640" y="3611880"/>
+            <a:off x="548640" y="3657600"/>
             <a:ext cx="11064240" cy="365760"/>
           </a:xfrm>
           <a:prstGeom prst="rect">
@@ -48128,12 +48128,12 @@
         </p:nvSpPr>
         <p:spPr>
           <a:xfrm>
-            <a:off x="548640" y="4023360"/>
-            <a:ext cx="3566160" cy="1508760"/>
+            <a:off x="548640" y="4069080"/>
+            <a:ext cx="3566160" cy="1325880"/>
           </a:xfrm>
           <a:prstGeom prst="roundRect">
             <a:avLst>
-              <a:gd name="adj" fmla="val 4848"/>
+              <a:gd name="adj" fmla="val 5517"/>
             </a:avLst>
           </a:prstGeom>
           <a:solidFill>
@@ -48163,8 +48163,8 @@
         </p:blipFill>
         <p:spPr>
           <a:xfrm>
-            <a:off x="749808" y="4160520"/>
-            <a:ext cx="457200" cy="457200"/>
+            <a:off x="749808" y="4206240"/>
+            <a:ext cx="502920" cy="502920"/>
           </a:xfrm>
           <a:prstGeom prst="rect">
             <a:avLst/>
@@ -48179,8 +48179,8 @@
         </p:nvSpPr>
         <p:spPr>
           <a:xfrm>
-            <a:off x="1325880" y="4133088"/>
-            <a:ext cx="2651760" cy="502920"/>
+            <a:off x="1389888" y="4206240"/>
+            <a:ext cx="2606040" cy="502920"/>
           </a:xfrm>
           <a:prstGeom prst="rect">
             <a:avLst/>
@@ -48196,14 +48196,14 @@
               <a:buNone/>
             </a:pPr>
             <a:r>
-              <a:rPr lang="en-US" sz="1900" b="1" dirty="0">
+              <a:rPr lang="en-US" sz="2000" b="1" dirty="0">
                 <a:solidFill>
                   <a:srgbClr val="4472C4"/>
                 </a:solidFill>
               </a:rPr>
               <a:t>Automatic hints</a:t>
             </a:r>
-            <a:endParaRPr lang="en-US" sz="1900" dirty="0"/>
+            <a:endParaRPr lang="en-US" sz="2000" dirty="0"/>
           </a:p>
         </p:txBody>
       </p:sp>
@@ -48215,17 +48215,17 @@
         </p:nvSpPr>
         <p:spPr>
           <a:xfrm>
-            <a:off x="749808" y="4709160"/>
-            <a:ext cx="3200400" cy="731520"/>
-          </a:xfrm>
-          <a:prstGeom prst="rect">
-            <a:avLst/>
-          </a:prstGeom>
-          <a:noFill/>
-          <a:ln/>
-        </p:spPr>
-        <p:txBody>
-          <a:bodyPr wrap="square" lIns="0" tIns="0" rIns="0" bIns="0" rtlCol="0" anchor="t"/>
+            <a:off x="749808" y="4754880"/>
+            <a:ext cx="3200400" cy="566928"/>
+          </a:xfrm>
+          <a:prstGeom prst="rect">
+            <a:avLst/>
+          </a:prstGeom>
+          <a:noFill/>
+          <a:ln/>
+        </p:spPr>
+        <p:txBody>
+          <a:bodyPr wrap="square" lIns="0" tIns="0" rIns="0" bIns="0" rtlCol="0" anchor="ctr"/>
           <a:lstStyle/>
           <a:p>
             <a:pPr indent="0" marL="0">
@@ -48251,12 +48251,12 @@
         </p:nvSpPr>
         <p:spPr>
           <a:xfrm>
-            <a:off x="4297680" y="4023360"/>
-            <a:ext cx="3566160" cy="1508760"/>
+            <a:off x="4297680" y="4069080"/>
+            <a:ext cx="3566160" cy="1325880"/>
           </a:xfrm>
           <a:prstGeom prst="roundRect">
             <a:avLst>
-              <a:gd name="adj" fmla="val 4848"/>
+              <a:gd name="adj" fmla="val 5517"/>
             </a:avLst>
           </a:prstGeom>
           <a:solidFill>
@@ -48286,8 +48286,8 @@
         </p:blipFill>
         <p:spPr>
           <a:xfrm>
-            <a:off x="4498848" y="4160520"/>
-            <a:ext cx="457200" cy="457200"/>
+            <a:off x="4498848" y="4206240"/>
+            <a:ext cx="502920" cy="502920"/>
           </a:xfrm>
           <a:prstGeom prst="rect">
             <a:avLst/>
@@ -48302,8 +48302,8 @@
         </p:nvSpPr>
         <p:spPr>
           <a:xfrm>
-            <a:off x="5074920" y="4133088"/>
-            <a:ext cx="2651760" cy="502920"/>
+            <a:off x="5138928" y="4206240"/>
+            <a:ext cx="2606040" cy="502920"/>
           </a:xfrm>
           <a:prstGeom prst="rect">
             <a:avLst/>
@@ -48319,14 +48319,14 @@
               <a:buNone/>
             </a:pPr>
             <a:r>
-              <a:rPr lang="en-US" sz="1900" b="1" dirty="0">
+              <a:rPr lang="en-US" sz="2000" b="1" dirty="0">
                 <a:solidFill>
                   <a:srgbClr val="4472C4"/>
                 </a:solidFill>
               </a:rPr>
               <a:t>Sharper free checks</a:t>
             </a:r>
-            <a:endParaRPr lang="en-US" sz="1900" dirty="0"/>
+            <a:endParaRPr lang="en-US" sz="2000" dirty="0"/>
           </a:p>
         </p:txBody>
       </p:sp>
@@ -48338,17 +48338,17 @@
         </p:nvSpPr>
         <p:spPr>
           <a:xfrm>
-            <a:off x="4498848" y="4709160"/>
-            <a:ext cx="3200400" cy="731520"/>
-          </a:xfrm>
-          <a:prstGeom prst="rect">
-            <a:avLst/>
-          </a:prstGeom>
-          <a:noFill/>
-          <a:ln/>
-        </p:spPr>
-        <p:txBody>
-          <a:bodyPr wrap="square" lIns="0" tIns="0" rIns="0" bIns="0" rtlCol="0" anchor="t"/>
+            <a:off x="4498848" y="4754880"/>
+            <a:ext cx="3200400" cy="566928"/>
+          </a:xfrm>
+          <a:prstGeom prst="rect">
+            <a:avLst/>
+          </a:prstGeom>
+          <a:noFill/>
+          <a:ln/>
+        </p:spPr>
+        <p:txBody>
+          <a:bodyPr wrap="square" lIns="0" tIns="0" rIns="0" bIns="0" rtlCol="0" anchor="ctr"/>
           <a:lstStyle/>
           <a:p>
             <a:pPr indent="0" marL="0">
@@ -48374,12 +48374,12 @@
         </p:nvSpPr>
         <p:spPr>
           <a:xfrm>
-            <a:off x="8046720" y="4023360"/>
-            <a:ext cx="3566160" cy="1508760"/>
+            <a:off x="8046720" y="4069080"/>
+            <a:ext cx="3566160" cy="1325880"/>
           </a:xfrm>
           <a:prstGeom prst="roundRect">
             <a:avLst>
-              <a:gd name="adj" fmla="val 4848"/>
+              <a:gd name="adj" fmla="val 5517"/>
             </a:avLst>
           </a:prstGeom>
           <a:solidFill>
@@ -48409,8 +48409,8 @@
         </p:blipFill>
         <p:spPr>
           <a:xfrm>
-            <a:off x="8247888" y="4160520"/>
-            <a:ext cx="457200" cy="457200"/>
+            <a:off x="8247888" y="4206240"/>
+            <a:ext cx="502920" cy="502920"/>
           </a:xfrm>
           <a:prstGeom prst="rect">
             <a:avLst/>
@@ -48425,8 +48425,8 @@
         </p:nvSpPr>
         <p:spPr>
           <a:xfrm>
-            <a:off x="8823960" y="4133088"/>
-            <a:ext cx="2651760" cy="502920"/>
+            <a:off x="8887968" y="4206240"/>
+            <a:ext cx="2606040" cy="502920"/>
           </a:xfrm>
           <a:prstGeom prst="rect">
             <a:avLst/>
@@ -48442,14 +48442,14 @@
               <a:buNone/>
             </a:pPr>
             <a:r>
-              <a:rPr lang="en-US" sz="1900" b="1" dirty="0">
+              <a:rPr lang="en-US" sz="2000" b="1" dirty="0">
                 <a:solidFill>
                   <a:srgbClr val="4472C4"/>
                 </a:solidFill>
               </a:rPr>
               <a:t>Math proofs</a:t>
             </a:r>
-            <a:endParaRPr lang="en-US" sz="1900" dirty="0"/>
+            <a:endParaRPr lang="en-US" sz="2000" dirty="0"/>
           </a:p>
         </p:txBody>
       </p:sp>
@@ -48461,17 +48461,17 @@
         </p:nvSpPr>
         <p:spPr>
           <a:xfrm>
-            <a:off x="8247888" y="4709160"/>
-            <a:ext cx="3200400" cy="731520"/>
-          </a:xfrm>
-          <a:prstGeom prst="rect">
-            <a:avLst/>
-          </a:prstGeom>
-          <a:noFill/>
-          <a:ln/>
-        </p:spPr>
-        <p:txBody>
-          <a:bodyPr wrap="square" lIns="0" tIns="0" rIns="0" bIns="0" rtlCol="0" anchor="t"/>
+            <a:off x="8247888" y="4754880"/>
+            <a:ext cx="3200400" cy="566928"/>
+          </a:xfrm>
+          <a:prstGeom prst="rect">
+            <a:avLst/>
+          </a:prstGeom>
+          <a:noFill/>
+          <a:ln/>
+        </p:spPr>
+        <p:txBody>
+          <a:bodyPr wrap="square" lIns="0" tIns="0" rIns="0" bIns="0" rtlCol="0" anchor="ctr"/>
           <a:lstStyle/>
           <a:p>
             <a:pPr indent="0" marL="0">

--- a/Proposal_Team5.pptx
+++ b/Proposal_Team5.pptx
@@ -141,7 +141,7 @@
   <p:extLst>
     <p:ext uri="{521415D9-36F7-43E2-AB2F-B90AF26B5E84}">
       <p14:sectionLst xmlns:p14="http://schemas.microsoft.com/office/powerpoint/2010/main">
-        <p14:section name="Talk" id="{0da69995-112b-6f19-0356-937471a1dbd3}">
+        <p14:section name="Talk" id="{af050ce6-b4a5-5ac2-e5e9-a38d947ffd4c}">
           <p14:sldIdLst>
             <p14:sldId id="256"/>
             <p14:sldId id="257"/>
@@ -154,7 +154,7 @@
             <p14:sldId id="264"/>
           </p14:sldIdLst>
         </p14:section>
-        <p14:section name="Extra pages" id="{c8219b6e-e90c-e5d0-7e54-3ed70bf538e7}">
+        <p14:section name="Extra pages" id="{e0f412b2-9ac8-f26a-a090-9d83e2dea59e}">
           <p14:sldIdLst>
             <p14:sldId id="265"/>
             <p14:sldId id="266"/>
@@ -48527,6 +48527,42 @@
       </p:sp>
       <p:sp>
         <p:nvSpPr>
+          <p:cNvPr id="49" name="Text 38"/>
+          <p:cNvSpPr txBox="1"/>
+          <p:nvPr/>
+        </p:nvSpPr>
+        <p:spPr>
+          <a:xfrm>
+            <a:off x="548640" y="6263640"/>
+            <a:ext cx="10424160" cy="365760"/>
+          </a:xfrm>
+          <a:prstGeom prst="rect">
+            <a:avLst/>
+          </a:prstGeom>
+          <a:noFill/>
+          <a:ln/>
+        </p:spPr>
+        <p:txBody>
+          <a:bodyPr wrap="square" lIns="0" tIns="0" rIns="0" bIns="0" rtlCol="0" anchor="ctr"/>
+          <a:lstStyle/>
+          <a:p>
+            <a:pPr indent="0" marL="0">
+              <a:buNone/>
+            </a:pPr>
+            <a:r>
+              <a:rPr lang="en-US" sz="1000" dirty="0">
+                <a:solidFill>
+                  <a:srgbClr val="7F7F7F"/>
+                </a:solidFill>
+              </a:rPr>
+              <a:t>References: Snell et al., Scaling LLM Test-Time Compute Optimally, ICLR 2025 (think on hard problems) · DRoC, ICLR 2025 (documentation for solver code) · Huang et al., ORLM, arXiv 2405.17743, 2024 (fine-tuned specialist) · Huang et al., Mamo benchmark, 2024 · Zheng et al., miniF2F, ICLR 2022 (Lean proofs)</a:t>
+            </a:r>
+            <a:endParaRPr lang="en-US" sz="1000" dirty="0"/>
+          </a:p>
+        </p:txBody>
+      </p:sp>
+      <p:sp>
+        <p:nvSpPr>
           <p:cNvPr id="25" name="Slide Number Placeholder 0"/>
           <p:cNvSpPr>
             <a:spLocks noGrp="1"/>

--- a/Proposal_Team5.pptx
+++ b/Proposal_Team5.pptx
@@ -141,7 +141,7 @@
   <p:extLst>
     <p:ext uri="{521415D9-36F7-43E2-AB2F-B90AF26B5E84}">
       <p14:sectionLst xmlns:p14="http://schemas.microsoft.com/office/powerpoint/2010/main">
-        <p14:section name="Talk" id="{af050ce6-b4a5-5ac2-e5e9-a38d947ffd4c}">
+        <p14:section name="Talk" id="{07e7ce68-ed37-fa5c-98c3-394c1c945571}">
           <p14:sldIdLst>
             <p14:sldId id="256"/>
             <p14:sldId id="257"/>
@@ -154,7 +154,7 @@
             <p14:sldId id="264"/>
           </p14:sldIdLst>
         </p14:section>
-        <p14:section name="Extra pages" id="{e0f412b2-9ac8-f26a-a090-9d83e2dea59e}">
+        <p14:section name="Extra pages" id="{18a0e390-0c17-7174-2437-e50ae187fdc8}">
           <p14:sldIdLst>
             <p14:sldId id="265"/>
             <p14:sldId id="266"/>
@@ -48533,17 +48533,17 @@
         </p:nvSpPr>
         <p:spPr>
           <a:xfrm>
-            <a:off x="548640" y="6263640"/>
-            <a:ext cx="10424160" cy="365760"/>
-          </a:xfrm>
-          <a:prstGeom prst="rect">
-            <a:avLst/>
-          </a:prstGeom>
-          <a:noFill/>
-          <a:ln/>
-        </p:spPr>
-        <p:txBody>
-          <a:bodyPr wrap="square" lIns="0" tIns="0" rIns="0" bIns="0" rtlCol="0" anchor="ctr"/>
+            <a:off x="548640" y="6236208"/>
+            <a:ext cx="10424160" cy="502920"/>
+          </a:xfrm>
+          <a:prstGeom prst="rect">
+            <a:avLst/>
+          </a:prstGeom>
+          <a:noFill/>
+          <a:ln/>
+        </p:spPr>
+        <p:txBody>
+          <a:bodyPr wrap="square" lIns="0" tIns="0" rIns="0" bIns="0" rtlCol="0" anchor="t"/>
           <a:lstStyle/>
           <a:p>
             <a:pPr indent="0" marL="0">
@@ -48555,7 +48555,7 @@
                   <a:srgbClr val="7F7F7F"/>
                 </a:solidFill>
               </a:rPr>
-              <a:t>References: Snell et al., Scaling LLM Test-Time Compute Optimally, ICLR 2025 (think on hard problems) · DRoC, ICLR 2025 (documentation for solver code) · Huang et al., ORLM, arXiv 2405.17743, 2024 (fine-tuned specialist) · Huang et al., Mamo benchmark, 2024 · Zheng et al., miniF2F, ICLR 2022 (Lean proofs)</a:t>
+              <a:t>References: Snell et al., Scaling LLM Test-Time Compute Optimally, ICLR 2025 (think on hard problems) · DRoC, ICLR 2025 (documentation for solver code) · Huang et al., ORLM, arXiv 2405.17743, 2024 (fine-tuned specialist) · Huang et al., Mamo benchmark, 2024 · Zheng et al., miniF2F, ICLR 2022 (Lean proofs). Note: 24 GB = Qwen3-8B fits one RTX 3090-class GPU (weights + a 16k-token cache); our runs used 96 GB GPUs</a:t>
             </a:r>
             <a:endParaRPr lang="en-US" sz="1000" dirty="0"/>
           </a:p>

--- a/Proposal_Team5.pptx
+++ b/Proposal_Team5.pptx
@@ -141,7 +141,7 @@
   <p:extLst>
     <p:ext uri="{521415D9-36F7-43E2-AB2F-B90AF26B5E84}">
       <p14:sectionLst xmlns:p14="http://schemas.microsoft.com/office/powerpoint/2010/main">
-        <p14:section name="Talk" id="{07e7ce68-ed37-fa5c-98c3-394c1c945571}">
+        <p14:section name="Talk" id="{ca8990a0-3b86-f5eb-e843-60b3cdced5e4}">
           <p14:sldIdLst>
             <p14:sldId id="256"/>
             <p14:sldId id="257"/>
@@ -154,7 +154,7 @@
             <p14:sldId id="264"/>
           </p14:sldIdLst>
         </p14:section>
-        <p14:section name="Extra pages" id="{18a0e390-0c17-7174-2437-e50ae187fdc8}">
+        <p14:section name="Extra pages" id="{157af9af-c149-241c-c182-0b593f1e82f9}">
           <p14:sldIdLst>
             <p14:sldId id="265"/>
             <p14:sldId id="266"/>
@@ -48533,17 +48533,17 @@
         </p:nvSpPr>
         <p:spPr>
           <a:xfrm>
-            <a:off x="548640" y="6236208"/>
-            <a:ext cx="10424160" cy="502920"/>
-          </a:xfrm>
-          <a:prstGeom prst="rect">
-            <a:avLst/>
-          </a:prstGeom>
-          <a:noFill/>
-          <a:ln/>
-        </p:spPr>
-        <p:txBody>
-          <a:bodyPr wrap="square" lIns="0" tIns="0" rIns="0" bIns="0" rtlCol="0" anchor="t"/>
+            <a:off x="548640" y="6263640"/>
+            <a:ext cx="10424160" cy="365760"/>
+          </a:xfrm>
+          <a:prstGeom prst="rect">
+            <a:avLst/>
+          </a:prstGeom>
+          <a:noFill/>
+          <a:ln/>
+        </p:spPr>
+        <p:txBody>
+          <a:bodyPr wrap="square" lIns="0" tIns="0" rIns="0" bIns="0" rtlCol="0" anchor="ctr"/>
           <a:lstStyle/>
           <a:p>
             <a:pPr indent="0" marL="0">
@@ -48555,7 +48555,7 @@
                   <a:srgbClr val="7F7F7F"/>
                 </a:solidFill>
               </a:rPr>
-              <a:t>References: Snell et al., Scaling LLM Test-Time Compute Optimally, ICLR 2025 (think on hard problems) · DRoC, ICLR 2025 (documentation for solver code) · Huang et al., ORLM, arXiv 2405.17743, 2024 (fine-tuned specialist) · Huang et al., Mamo benchmark, 2024 · Zheng et al., miniF2F, ICLR 2022 (Lean proofs). Note: 24 GB = Qwen3-8B fits one RTX 3090-class GPU (weights + a 16k-token cache); our runs used 96 GB GPUs</a:t>
+              <a:t>References: Snell et al., Scaling LLM Test-Time Compute Optimally, ICLR 2025 (think on hard problems) · DRoC, ICLR 2025 (documentation for solver code) · Huang et al., ORLM, arXiv 2405.17743, 2024 (fine-tuned specialist) · Huang et al., Mamo benchmark, 2024 · Zheng et al., miniF2F, ICLR 2022 (Lean proofs)</a:t>
             </a:r>
             <a:endParaRPr lang="en-US" sz="1000" dirty="0"/>
           </a:p>

--- a/Proposal_Team5.pptx
+++ b/Proposal_Team5.pptx
@@ -141,7 +141,7 @@
   <p:extLst>
     <p:ext uri="{521415D9-36F7-43E2-AB2F-B90AF26B5E84}">
       <p14:sectionLst xmlns:p14="http://schemas.microsoft.com/office/powerpoint/2010/main">
-        <p14:section name="Talk" id="{ca8990a0-3b86-f5eb-e843-60b3cdced5e4}">
+        <p14:section name="Talk" id="{f359e947-9107-26b4-af5e-7cc5e265f53a}">
           <p14:sldIdLst>
             <p14:sldId id="256"/>
             <p14:sldId id="257"/>
@@ -154,7 +154,7 @@
             <p14:sldId id="264"/>
           </p14:sldIdLst>
         </p14:section>
-        <p14:section name="Extra pages" id="{157af9af-c149-241c-c182-0b593f1e82f9}">
+        <p14:section name="Extra pages" id="{9ce7a577-d609-7517-9d60-938efb21029a}">
           <p14:sldIdLst>
             <p14:sldId id="265"/>
             <p14:sldId id="266"/>
@@ -47358,6 +47358,17 @@
               </a:rPr>
               <a:t>think more on hard-looking problems</a:t>
             </a:r>
+            <a:pPr indent="0" marL="0">
+              <a:buNone/>
+            </a:pPr>
+            <a:r>
+              <a:rPr lang="en-US" sz="1100" dirty="0">
+                <a:solidFill>
+                  <a:srgbClr val="7F7F7F"/>
+                </a:solidFill>
+              </a:rPr>
+              <a:t> [1]</a:t>
+            </a:r>
             <a:endParaRPr lang="en-US" sz="1400" dirty="0"/>
           </a:p>
         </p:txBody>
@@ -47647,7 +47658,18 @@
                   <a:srgbClr val="404040"/>
                 </a:solidFill>
               </a:rPr>
-              <a:t>the whole manual</a:t>
+              <a:t>the whole manual, or retrieved documentation</a:t>
+            </a:r>
+            <a:pPr indent="0" marL="0">
+              <a:buNone/>
+            </a:pPr>
+            <a:r>
+              <a:rPr lang="en-US" sz="1100" dirty="0">
+                <a:solidFill>
+                  <a:srgbClr val="7F7F7F"/>
+                </a:solidFill>
+              </a:rPr>
+              <a:t> [2]</a:t>
             </a:r>
             <a:endParaRPr lang="en-US" sz="1400" dirty="0"/>
           </a:p>
@@ -47940,6 +47962,17 @@
               </a:rPr>
               <a:t>fine-tune a specialist: 69.5% on MAMO</a:t>
             </a:r>
+            <a:pPr indent="0" marL="0">
+              <a:buNone/>
+            </a:pPr>
+            <a:r>
+              <a:rPr lang="en-US" sz="1100" dirty="0">
+                <a:solidFill>
+                  <a:srgbClr val="7F7F7F"/>
+                </a:solidFill>
+              </a:rPr>
+              <a:t> [3, 4]</a:t>
+            </a:r>
             <a:endParaRPr lang="en-US" sz="1400" dirty="0"/>
           </a:p>
         </p:txBody>
@@ -48485,6 +48518,17 @@
               </a:rPr>
               <a:t>Lean checks every step: find the hints that help</a:t>
             </a:r>
+            <a:pPr indent="0" marL="0">
+              <a:buNone/>
+            </a:pPr>
+            <a:r>
+              <a:rPr lang="en-US" sz="1100" dirty="0">
+                <a:solidFill>
+                  <a:srgbClr val="7F7F7F"/>
+                </a:solidFill>
+              </a:rPr>
+              <a:t> [5]</a:t>
+            </a:r>
             <a:endParaRPr lang="en-US" sz="1500" dirty="0"/>
           </a:p>
         </p:txBody>
@@ -48555,7 +48599,7 @@
                   <a:srgbClr val="7F7F7F"/>
                 </a:solidFill>
               </a:rPr>
-              <a:t>References: Snell et al., Scaling LLM Test-Time Compute Optimally, ICLR 2025 (think on hard problems) · DRoC, ICLR 2025 (documentation for solver code) · Huang et al., ORLM, arXiv 2405.17743, 2024 (fine-tuned specialist) · Huang et al., Mamo benchmark, 2024 · Zheng et al., miniF2F, ICLR 2022 (Lean proofs)</a:t>
+              <a:t>[1] Snell et al., Scaling LLM Test-Time Compute Optimally, ICLR 2025  [2] DRoC: retrieved documentation for solver code, ICLR 2025  [3] Huang et al., ORLM, arXiv 2405.17743, 2024  [4] Huang et al., Mamo benchmark, 2024  [5] Zheng et al., miniF2F, ICLR 2022</a:t>
             </a:r>
             <a:endParaRPr lang="en-US" sz="1000" dirty="0"/>
           </a:p>

--- a/Proposal_Team5.pptx
+++ b/Proposal_Team5.pptx
@@ -141,7 +141,7 @@
   <p:extLst>
     <p:ext uri="{521415D9-36F7-43E2-AB2F-B90AF26B5E84}">
       <p14:sectionLst xmlns:p14="http://schemas.microsoft.com/office/powerpoint/2010/main">
-        <p14:section name="Talk" id="{f359e947-9107-26b4-af5e-7cc5e265f53a}">
+        <p14:section name="Talk" id="{2891769d-04da-33a7-4d87-bc14d35f1d78}">
           <p14:sldIdLst>
             <p14:sldId id="256"/>
             <p14:sldId id="257"/>
@@ -154,7 +154,7 @@
             <p14:sldId id="264"/>
           </p14:sldIdLst>
         </p14:section>
-        <p14:section name="Extra pages" id="{9ce7a577-d609-7517-9d60-938efb21029a}">
+        <p14:section name="Extra pages" id="{d42db352-0b1c-fcae-d292-66f9f6aa02b4}">
           <p14:sldIdLst>
             <p14:sldId id="265"/>
             <p14:sldId id="266"/>
@@ -4314,7 +4314,7 @@
           <a:p>
             <a:r>
               <a:rPr lang="en-US" dirty="0"/>
-              <a:t>(40초) 새로운 점은 세 가지입니다. 학습 없이 공짜 검사가 실패할 때만 생각해서 74%를 87%로 올렸고, 매뉴얼 대신 사람 없이 고른 짧은 힌트 하나를 주며, 파인튜닝한 특화 모델과 같은 69.5%를 학습 없이 24GB GPU 한 장으로 냅니다. 다음은 세 가지입니다. 힌트를 문제 종류마다 자동으로 고르고, 토큰 없이 더 많이 잡는 검사를 만들고, 마지막으로 수학 증명으로 넓힙니다. 증명은 Lean이 모든 단계를 검사해 주니, 거기에 맞는 힌트를 찾는 것이 과제입니다. 정리하면, 짧은 힌트를 먼저 주고, 공짜 검사가 실패한 곳에서만 생각하게 하자는 것입니다.
+              <a:t>(45초) 새로운 점은 세 가지입니다. 학습 없이 공짜 검사가 실패할 때만 생각해서 74%를 87%로 올렸고, 매뉴얼 대신 사람 없이 고른 짧은 힌트 하나를 주며, 최적화 문장제 863개인 MAMO에서, 파인튜닝한 8B 특화 모델과 같은 69.5%를 같은 크기의 8B 모델로 학습 없이 냅니다. 다음은 세 가지입니다. 힌트를 문제 종류마다 자동으로 고르고, 토큰 없이 더 많이 잡는 검사를 만들고, 마지막으로 수학 증명으로 넓힙니다. 증명은 Lean이 모든 단계를 검사해 주니, 거기에 맞는 힌트를 찾는 것이 과제입니다. 정리하면, 짧은 힌트를 먼저 주고, 공짜 검사가 실패한 곳에서만 생각하게 하자는 것입니다.
 [더 자세히: 질문이 나오거나 시간이 남을 때]
 첫째 줄, 생각을 어디에 쓸지. 기존 방법은 어려워 보이는 문제에 계산을 더 쓰는 Snell 등의 방식과, 언제 생각할지를 강화학습으로 가르치는 Thinkless, AdaptThink입니다. 저희는 정답 없이 돌리는 공짜 검사가 실패한 문제에만 생각을 씁니다. 기하와 최적화 208문제를 세 모델로 풀면 74%가 87%로 오르고, 토큰은 문제당 4.1k에서 2.5k로 줄었습니다. 87%는 사람이 쓴 힌트를 쓴 결과이고, 검색으로 찾은 힌트로도 84%입니다.
 둘째 줄, 모델에게 무엇을 주는지. 기존에는 매뉴얼 전체를 주거나, 더 큰 교사 모델이 짜서 정답으로 확인한 프로그램 모음을 줍니다. 저희 힌트는 모델이 다른 문제에서 짜서 공짜 검사를 통과한 자기 프로그램입니다. 끝까지 남겨 둔 MAMO 벤치마크에서 사람이 쓴 힌트와 같은 79%를 냈습니다.
@@ -47845,7 +47845,7 @@
                   <a:schemeClr val="tx1"/>
                 </a:solidFill>
               </a:rPr>
-              <a:t>What it costs</a:t>
+              <a:t>What it takes</a:t>
             </a:r>
             <a:endParaRPr lang="en-US" sz="1600" dirty="0"/>
           </a:p>
@@ -47960,7 +47960,7 @@
                   <a:srgbClr val="404040"/>
                 </a:solidFill>
               </a:rPr>
-              <a:t>fine-tune a specialist: 69.5% on MAMO</a:t>
+              <a:t>fine-tune an 8B specialist (ORLM): 69.5% on MAMO</a:t>
             </a:r>
             <a:pPr indent="0" marL="0">
               <a:buNone/>
@@ -48111,7 +48111,7 @@
                   <a:srgbClr val="1F3864"/>
                 </a:solidFill>
               </a:rPr>
-              <a:t>no training, one 24 GB GPU: the same 69.5%</a:t>
+              <a:t>an untrained 8B model (Qwen3-8B): the same 69.5%</a:t>
             </a:r>
             <a:endParaRPr lang="en-US" sz="1400" dirty="0"/>
           </a:p>
@@ -48599,7 +48599,7 @@
                   <a:srgbClr val="7F7F7F"/>
                 </a:solidFill>
               </a:rPr>
-              <a:t>[1] Snell et al., Scaling LLM Test-Time Compute Optimally, ICLR 2025  [2] DRoC: retrieved documentation for solver code, ICLR 2025  [3] Huang et al., ORLM, arXiv 2405.17743, 2024  [4] Huang et al., Mamo benchmark, 2024  [5] Zheng et al., miniF2F, ICLR 2022</a:t>
+              <a:t>[1] Snell et al., Scaling LLM Test-Time Compute Optimally, ICLR 2025  [2] DRoC: retrieved documentation for solver code, ICLR 2025  [3] Huang et al., ORLM, arXiv 2405.17743, 2024  [4] Huang et al., Mamo: 863 optimization word problems, 2024  [5] Zheng et al., miniF2F, ICLR 2022</a:t>
             </a:r>
             <a:endParaRPr lang="en-US" sz="1000" dirty="0"/>
           </a:p>

--- a/Proposal_Team5.pptx
+++ b/Proposal_Team5.pptx
@@ -142,7 +142,7 @@
   <p:extLst>
     <p:ext uri="{521415D9-36F7-43E2-AB2F-B90AF26B5E84}">
       <p14:sectionLst xmlns:p14="http://schemas.microsoft.com/office/powerpoint/2010/main">
-        <p14:section name="Talk" id="{de4b744f-05c9-a996-4f90-20089472324c}">
+        <p14:section name="Talk" id="{d425d87a-c967-9fad-6294-b373a49642d8}">
           <p14:sldIdLst>
             <p14:sldId id="256"/>
             <p14:sldId id="257"/>
@@ -155,7 +155,7 @@
             <p14:sldId id="264"/>
           </p14:sldIdLst>
         </p14:section>
-        <p14:section name="Extra pages" id="{537e110b-0a54-2e93-1358-98ff3502d104}">
+        <p14:section name="Extra pages" id="{670593b7-e888-6247-6c61-150efe69e8b4}">
           <p14:sldIdLst>
             <p14:sldId id="265"/>
             <p14:sldId id="266"/>
@@ -4316,7 +4316,7 @@
           <a:p>
             <a:r>
               <a:rPr lang="en-US" dirty="0"/>
-              <a:t>(40초) 둘을 합친 것이 저희 방법입니다. 힌트를 붙여 쓰고, 검사하고, 실패할 때만 생각하고, 같은 종류가 다시 오면 재사용합니다. 힌트는 사람 없이 이렇게 고릅니다. 모델이 같은 종류의 문제에 짰던 프로그램 중 검사를 통과한 것을 모으고, 가장 짧은 것을 힌트로 씁니다. 실제 문제 하나에서는 힌트 없이 죽던 프로그램이 힌트로 바로 20000을 맞혀, 5.3k 대신 0.6k 토큰을 썼습니다. 기하와 최적화 208문제를 세 모델로 풀면, 답이 갈리는 문제에 생각을 몰아주는 기존 방식은 74%, 저희는 87%이고 토큰도 적습니다.</a:t>
+              <a:t>(40초) 둘을 합친 것이 저희 방법입니다. 힌트를 붙여 쓰고, 검사하고, 실패할 때만 생각하고, 같은 종류가 다시 오면 재사용합니다. 힌트는 사람 없이 이렇게 고릅니다. 모델이 앞서 푼 같은 종류의 문제들에서 검사를 통과한 프로그램을 힌트 풀로 모으고, 가장 짧은 것을 씁니다. 이 풀은 정답 없이, 문제가 들어오는 대로 채워집니다. 실제 문제 하나에서는 힌트 없이 죽던 프로그램이 힌트로 바로 20000을 맞혀, 5.3k 대신 0.6k 토큰을 썼습니다. 기하와 최적화 208문제를 세 모델로 풀면, 답이 갈리는 문제에 생각을 몰아주는 기존 방식은 74%, 저희는 87%이고 토큰도 적습니다.</a:t>
             </a:r>
             <a:endParaRPr lang="en-US" dirty="0"/>
           </a:p>
@@ -47426,7 +47426,7 @@
                   <a:srgbClr val="4472C4"/>
                 </a:solidFill>
               </a:rPr>
-              <a:t>① How we pick the hint (once per type, no human)</a:t>
+              <a:t>① Hint pool: its own checked programs (no human)</a:t>
             </a:r>
             <a:endParaRPr lang="en-US" sz="1700" dirty="0"/>
           </a:p>
@@ -47434,7 +47434,7 @@
       </p:sp>
       <p:sp>
         <p:nvSpPr>
-          <p:cNvPr id="39" name="box its past programs"/>
+          <p:cNvPr id="39" name="box programs on earlier "/>
           <p:cNvSpPr/>
           <p:nvPr/>
         </p:nvSpPr>
@@ -47489,7 +47489,7 @@
                   <a:schemeClr val="tx1"/>
                 </a:solidFill>
               </a:rPr>
-              <a:t>its past programs</a:t>
+              <a:t>programs on earlier problems</a:t>
             </a:r>
             <a:endParaRPr lang="en-US" sz="1500" dirty="0"/>
           </a:p>

--- a/Proposal_Team5.pptx
+++ b/Proposal_Team5.pptx
@@ -142,7 +142,7 @@
   <p:extLst>
     <p:ext uri="{521415D9-36F7-43E2-AB2F-B90AF26B5E84}">
       <p14:sectionLst xmlns:p14="http://schemas.microsoft.com/office/powerpoint/2010/main">
-        <p14:section name="Talk" id="{d425d87a-c967-9fad-6294-b373a49642d8}">
+        <p14:section name="Talk" id="{2c936d8d-6338-513c-6ba0-9346b8ac8e84}">
           <p14:sldIdLst>
             <p14:sldId id="256"/>
             <p14:sldId id="257"/>
@@ -155,7 +155,7 @@
             <p14:sldId id="264"/>
           </p14:sldIdLst>
         </p14:section>
-        <p14:section name="Extra pages" id="{670593b7-e888-6247-6c61-150efe69e8b4}">
+        <p14:section name="Extra pages" id="{feb1e1d4-b2f0-3dcd-85d0-0d854c88206a}">
           <p14:sldIdLst>
             <p14:sldId id="265"/>
             <p14:sldId id="266"/>
@@ -1850,7 +1850,7 @@
           <a:p>
             <a:r>
               <a:rPr lang="en-US" dirty="0"/>
-              <a:t>(답변) 힌트는 라이브러리를 어떻게 부르는지, 즉 함수 이름과 인자를 보여 주는 11줄짜리 코드 조각입니다. 같은 종류의 30문제에 똑같이 붙이고, 경로나 숫자나 정답은 들어 있지 않습니다. 긴 참조 문서가 아무것도 안 준 것보다 나쁜 이유는, 경로 설명은 있지만 용량 규칙이 없어서 모델이 빈 곳을 없는 함수로 채우기 때문입니다. 10개 프로그램이 RegisterUnaryLongLivingCallback을 불렀습니다.</a:t>
+              <a:t>(답변) 힌트는 문제마다가 아니라 문제 종류마다 하나이고, 라이브러리를 어떻게 부르는지 보여 줍니다. 사람이 쓴 힌트는 경로 문제에서 OR-Tools 사용법 11줄로, 이 문제의 숫자도 답도 없고 30문제에 똑같이 붙습니다. 자동 힌트는 같은 종류의 다른 문제, 예를 들어 밴과 트럭 문제에서 모델이 짜서 검사를 통과한 가장 짧은 프로그램입니다. 그 문제의 숫자와 제약이 들어 있지만, 가장 짧은 것을 고르면 거의 함수 호출만 남습니다. 힌트가 하는 일은 없는 함수 이름을 지어내지 않게 하는 것입니다. Qwen3-1.7B는 힌트 없이 존재하지 않는 Solver.SUCCESS, solver.INFINITY를 써서 0.1%였고, 힌트를 주면 45%입니다. 하지만 문제를 수식으로 옮기는 일은 여전히 모델의 몫이라 남은 오류는 대부분 잘못된 수식입니다. 참고로 가장 짧은 것 대신 가장 비슷한 문제의 프로그램을 주면 수식 패턴까지 따라 들어가서, 그 프로그램이 맞으면 반복되는 수식 실수를 고치고, 틀리면 같이 틀립니다.</a:t>
             </a:r>
             <a:endParaRPr lang="en-US" dirty="0"/>
           </a:p>
@@ -4503,7 +4503,7 @@
 11: Do the findings cover every kind? (slide 2)
 12: How hard are the problems? (slide 2)
 13: Why does helper code change the answer? (slide 4)
-14: What exactly is the hint? Isn't it the answer? (slide 5)
+14: What exactly is the hint, and what does it do? (slide 5)
 15, 24: How do we get the exact hint? (slide 5)
 16, 17: How do we get a hint that works, cheaply? (slide 5)
 18: Can retrieval (RAG) find the hint? (slide 5)
@@ -12796,7 +12796,7 @@
                   <a:schemeClr val="tx1"/>
                 </a:solidFill>
               </a:rPr>
-              <a:t>Q: what exactly is the hint? Isn't it the answer?</a:t>
+              <a:t>Q: what exactly is the hint, and what does it do?</a:t>
             </a:r>
             <a:endParaRPr lang="en-US" sz="3600" dirty="0"/>
           </a:p>
@@ -12804,487 +12804,18 @@
       </p:sp>
       <p:sp>
         <p:nvSpPr>
-          <p:cNvPr id="3" name="Text 1"/>
-          <p:cNvSpPr txBox="1"/>
-          <p:nvPr/>
-        </p:nvSpPr>
-        <p:spPr>
-          <a:xfrm>
-            <a:off x="548640" y="1188720"/>
-            <a:ext cx="11064240" cy="411480"/>
-          </a:xfrm>
-          <a:prstGeom prst="rect">
-            <a:avLst/>
-          </a:prstGeom>
-          <a:noFill/>
-          <a:ln/>
-        </p:spPr>
-        <p:txBody>
-          <a:bodyPr wrap="square" lIns="0" tIns="0" rIns="0" bIns="0" rtlCol="0" anchor="ctr"/>
-          <a:lstStyle/>
-          <a:p>
-            <a:pPr indent="0" marL="0">
-              <a:buNone/>
-            </a:pPr>
-            <a:r>
-              <a:rPr lang="en-US" sz="1700" dirty="0">
-                <a:solidFill>
-                  <a:schemeClr val="tx1"/>
-                </a:solidFill>
-              </a:rPr>
-              <a:t>The hint for the routing problems of Finding 1: how to call OR-Tools (excerpt of the 11-line snippet)</a:t>
-            </a:r>
-            <a:endParaRPr lang="en-US" sz="1700" dirty="0"/>
-          </a:p>
-        </p:txBody>
-      </p:sp>
-      <p:sp>
-        <p:nvSpPr>
-          <p:cNvPr id="4" name="the fact, excerpt"/>
+          <p:cNvPr id="3" name="hand-written fact"/>
           <p:cNvSpPr/>
           <p:nvPr/>
         </p:nvSpPr>
         <p:spPr>
           <a:xfrm>
-            <a:off x="548640" y="1783080"/>
-            <a:ext cx="6675120" cy="3611880"/>
-          </a:xfrm>
-          <a:prstGeom prst="rect">
-            <a:avLst/>
-          </a:prstGeom>
-          <a:solidFill>
-            <a:srgbClr val="F7F7F7"/>
-          </a:solidFill>
-          <a:ln w="9525">
-            <a:solidFill>
-              <a:srgbClr val="BFBFBF"/>
-            </a:solidFill>
-            <a:prstDash val="solid"/>
-          </a:ln>
-        </p:spPr>
-      </p:sp>
-      <p:sp>
-        <p:nvSpPr>
-          <p:cNvPr id="5" name="Text 3"/>
-          <p:cNvSpPr txBox="1"/>
-          <p:nvPr/>
-        </p:nvSpPr>
-        <p:spPr>
-          <a:xfrm>
-            <a:off x="731520" y="1874520"/>
-            <a:ext cx="6400800" cy="3429000"/>
-          </a:xfrm>
-          <a:prstGeom prst="rect">
-            <a:avLst/>
-          </a:prstGeom>
-          <a:noFill/>
-          <a:ln/>
-        </p:spPr>
-        <p:txBody>
-          <a:bodyPr wrap="square" lIns="0" tIns="0" rIns="0" bIns="0" rtlCol="0" anchor="ctr"/>
-          <a:lstStyle/>
-          <a:p>
-            <a:pPr indent="0" marL="0">
-              <a:buNone/>
-            </a:pPr>
-            <a:r>
-              <a:rPr lang="en-US" sz="1400" dirty="0">
-                <a:solidFill>
-                  <a:schemeClr val="tx1"/>
-                </a:solidFill>
-                <a:latin typeface="Courier New" pitchFamily="34" charset="0"/>
-                <a:ea typeface="Courier New" pitchFamily="34" charset="-122"/>
-                <a:cs typeface="Courier New" pitchFamily="34" charset="-120"/>
-              </a:rPr>
-              <a:t>mgr = pywrapcp.RoutingIndexManager(n + 1, K, 0)</a:t>
-            </a:r>
-            <a:endParaRPr lang="en-US" sz="1400" dirty="0"/>
-          </a:p>
-          <a:p>
-            <a:pPr indent="0" marL="0">
-              <a:buNone/>
-            </a:pPr>
-            <a:r>
-              <a:rPr lang="en-US" sz="1400" dirty="0">
-                <a:solidFill>
-                  <a:schemeClr val="tx1"/>
-                </a:solidFill>
-                <a:latin typeface="Courier New" pitchFamily="34" charset="0"/>
-                <a:ea typeface="Courier New" pitchFamily="34" charset="-122"/>
-                <a:cs typeface="Courier New" pitchFamily="34" charset="-120"/>
-              </a:rPr>
-              <a:t>r = pywrapcp.RoutingModel(mgr)</a:t>
-            </a:r>
-            <a:endParaRPr lang="en-US" sz="1400" dirty="0"/>
-          </a:p>
-          <a:p>
-            <a:pPr indent="0" marL="0">
-              <a:buNone/>
-            </a:pPr>
-            <a:r>
-              <a:rPr lang="en-US" sz="1400" dirty="0">
-                <a:solidFill>
-                  <a:schemeClr val="tx1"/>
-                </a:solidFill>
-                <a:latin typeface="Courier New" pitchFamily="34" charset="0"/>
-                <a:ea typeface="Courier New" pitchFamily="34" charset="-122"/>
-                <a:cs typeface="Courier New" pitchFamily="34" charset="-120"/>
-              </a:rPr>
-              <a:t>cb = r.RegisterTransitCallback(cost)</a:t>
-            </a:r>
-            <a:endParaRPr lang="en-US" sz="1400" dirty="0"/>
-          </a:p>
-          <a:p>
-            <a:pPr indent="0" marL="0">
-              <a:buNone/>
-            </a:pPr>
-            <a:r>
-              <a:rPr lang="en-US" sz="1400" dirty="0">
-                <a:solidFill>
-                  <a:schemeClr val="tx1"/>
-                </a:solidFill>
-                <a:latin typeface="Courier New" pitchFamily="34" charset="0"/>
-                <a:ea typeface="Courier New" pitchFamily="34" charset="-122"/>
-                <a:cs typeface="Courier New" pitchFamily="34" charset="-120"/>
-              </a:rPr>
-              <a:t>r.SetArcCostEvaluatorOfAllVehicles(cb)</a:t>
-            </a:r>
-            <a:endParaRPr lang="en-US" sz="1400" dirty="0"/>
-          </a:p>
-          <a:p>
-            <a:pPr indent="0" marL="0">
-              <a:buNone/>
-            </a:pPr>
-            <a:r>
-              <a:rPr lang="en-US" sz="1400" b="1" dirty="0">
-                <a:solidFill>
-                  <a:srgbClr val="38761D"/>
-                </a:solidFill>
-                <a:latin typeface="Courier New" pitchFamily="34" charset="0"/>
-                <a:ea typeface="Courier New" pitchFamily="34" charset="-122"/>
-                <a:cs typeface="Courier New" pitchFamily="34" charset="-120"/>
-              </a:rPr>
-              <a:t>dcb = r.RegisterUnaryTransitCallback(demand)</a:t>
-            </a:r>
-            <a:endParaRPr lang="en-US" sz="1400" dirty="0"/>
-          </a:p>
-          <a:p>
-            <a:pPr indent="0" marL="0">
-              <a:buNone/>
-            </a:pPr>
-            <a:r>
-              <a:rPr lang="en-US" sz="1400" b="1" dirty="0">
-                <a:solidFill>
-                  <a:srgbClr val="38761D"/>
-                </a:solidFill>
-                <a:latin typeface="Courier New" pitchFamily="34" charset="0"/>
-                <a:ea typeface="Courier New" pitchFamily="34" charset="-122"/>
-                <a:cs typeface="Courier New" pitchFamily="34" charset="-120"/>
-              </a:rPr>
-              <a:t>r.AddDimensionWithVehicleCapacity(dcb, 0, [Q] * K,</a:t>
-            </a:r>
-            <a:endParaRPr lang="en-US" sz="1400" dirty="0"/>
-          </a:p>
-          <a:p>
-            <a:pPr indent="0" marL="0">
-              <a:buNone/>
-            </a:pPr>
-            <a:r>
-              <a:rPr lang="en-US" sz="1400" b="1" dirty="0">
-                <a:solidFill>
-                  <a:srgbClr val="38761D"/>
-                </a:solidFill>
-                <a:latin typeface="Courier New" pitchFamily="34" charset="0"/>
-                <a:ea typeface="Courier New" pitchFamily="34" charset="-122"/>
-                <a:cs typeface="Courier New" pitchFamily="34" charset="-120"/>
-              </a:rPr>
-              <a:t>                 True, "Load")</a:t>
-            </a:r>
-            <a:endParaRPr lang="en-US" sz="1400" dirty="0"/>
-          </a:p>
-          <a:p>
-            <a:pPr indent="0" marL="0">
-              <a:buNone/>
-            </a:pPr>
-            <a:r>
-              <a:rPr lang="en-US" sz="1400" dirty="0">
-                <a:solidFill>
-                  <a:schemeClr val="tx1"/>
-                </a:solidFill>
-                <a:latin typeface="Courier New" pitchFamily="34" charset="0"/>
-                <a:ea typeface="Courier New" pitchFamily="34" charset="-122"/>
-                <a:cs typeface="Courier New" pitchFamily="34" charset="-120"/>
-              </a:rPr>
-              <a:t>p.first_solution_strategy = ...PATH_CHEAPEST_ARC</a:t>
-            </a:r>
-            <a:endParaRPr lang="en-US" sz="1400" dirty="0"/>
-          </a:p>
-          <a:p>
-            <a:pPr indent="0" marL="0">
-              <a:buNone/>
-            </a:pPr>
-            <a:r>
-              <a:rPr lang="en-US" sz="1400" dirty="0">
-                <a:solidFill>
-                  <a:schemeClr val="tx1"/>
-                </a:solidFill>
-                <a:latin typeface="Courier New" pitchFamily="34" charset="0"/>
-                <a:ea typeface="Courier New" pitchFamily="34" charset="-122"/>
-                <a:cs typeface="Courier New" pitchFamily="34" charset="-120"/>
-              </a:rPr>
-              <a:t>sol = r.SolveWithParameters(p)</a:t>
-            </a:r>
-            <a:endParaRPr lang="en-US" sz="1400" dirty="0"/>
-          </a:p>
-          <a:p>
-            <a:pPr indent="0" marL="0">
-              <a:buNone/>
-            </a:pPr>
-            <a:r>
-              <a:rPr lang="en-US" sz="1400" dirty="0">
-                <a:solidFill>
-                  <a:srgbClr val="7F7F7F"/>
-                </a:solidFill>
-                <a:latin typeface="Courier New" pitchFamily="34" charset="0"/>
-                <a:ea typeface="Courier New" pitchFamily="34" charset="-122"/>
-                <a:cs typeface="Courier New" pitchFamily="34" charset="-120"/>
-              </a:rPr>
-              <a:t>...  (11 lines in all)</a:t>
-            </a:r>
-            <a:endParaRPr lang="en-US" sz="1400" dirty="0"/>
-          </a:p>
-        </p:txBody>
-      </p:sp>
-      <p:sp>
-        <p:nvSpPr>
-          <p:cNvPr id="6" name="Text 4"/>
-          <p:cNvSpPr txBox="1"/>
-          <p:nvPr/>
-        </p:nvSpPr>
-        <p:spPr>
-          <a:xfrm>
-            <a:off x="7498080" y="1783080"/>
-            <a:ext cx="320040" cy="457200"/>
-          </a:xfrm>
-          <a:prstGeom prst="rect">
-            <a:avLst/>
-          </a:prstGeom>
-          <a:noFill/>
-          <a:ln/>
-        </p:spPr>
-        <p:txBody>
-          <a:bodyPr wrap="square" lIns="0" tIns="0" rIns="0" bIns="0" rtlCol="0" anchor="ctr"/>
-          <a:lstStyle/>
-          <a:p>
-            <a:pPr indent="0" marL="0">
-              <a:buNone/>
-            </a:pPr>
-            <a:r>
-              <a:rPr lang="en-US" sz="1800" b="1" dirty="0">
-                <a:solidFill>
-                  <a:srgbClr val="38761D"/>
-                </a:solidFill>
-              </a:rPr>
-              <a:t>✓</a:t>
-            </a:r>
-            <a:endParaRPr lang="en-US" sz="1800" dirty="0"/>
-          </a:p>
-        </p:txBody>
-      </p:sp>
-      <p:sp>
-        <p:nvSpPr>
-          <p:cNvPr id="7" name="Text 5"/>
-          <p:cNvSpPr txBox="1"/>
-          <p:nvPr/>
-        </p:nvSpPr>
-        <p:spPr>
-          <a:xfrm>
-            <a:off x="7818120" y="1783080"/>
-            <a:ext cx="3794760" cy="457200"/>
-          </a:xfrm>
-          <a:prstGeom prst="rect">
-            <a:avLst/>
-          </a:prstGeom>
-          <a:noFill/>
-          <a:ln/>
-        </p:spPr>
-        <p:txBody>
-          <a:bodyPr wrap="square" lIns="0" tIns="0" rIns="0" bIns="0" rtlCol="0" anchor="ctr"/>
-          <a:lstStyle/>
-          <a:p>
-            <a:pPr indent="0" marL="0">
-              <a:buNone/>
-            </a:pPr>
-            <a:r>
-              <a:rPr lang="en-US" sz="1500" dirty="0">
-                <a:solidFill>
-                  <a:schemeClr val="tx1"/>
-                </a:solidFill>
-              </a:rPr>
-              <a:t>how to call the library: names and arguments</a:t>
-            </a:r>
-            <a:endParaRPr lang="en-US" sz="1500" dirty="0"/>
-          </a:p>
-        </p:txBody>
-      </p:sp>
-      <p:sp>
-        <p:nvSpPr>
-          <p:cNvPr id="8" name="Text 6"/>
-          <p:cNvSpPr txBox="1"/>
-          <p:nvPr/>
-        </p:nvSpPr>
-        <p:spPr>
-          <a:xfrm>
-            <a:off x="7498080" y="2286000"/>
-            <a:ext cx="320040" cy="457200"/>
-          </a:xfrm>
-          <a:prstGeom prst="rect">
-            <a:avLst/>
-          </a:prstGeom>
-          <a:noFill/>
-          <a:ln/>
-        </p:spPr>
-        <p:txBody>
-          <a:bodyPr wrap="square" lIns="0" tIns="0" rIns="0" bIns="0" rtlCol="0" anchor="ctr"/>
-          <a:lstStyle/>
-          <a:p>
-            <a:pPr indent="0" marL="0">
-              <a:buNone/>
-            </a:pPr>
-            <a:r>
-              <a:rPr lang="en-US" sz="1800" b="1" dirty="0">
-                <a:solidFill>
-                  <a:srgbClr val="38761D"/>
-                </a:solidFill>
-              </a:rPr>
-              <a:t>✓</a:t>
-            </a:r>
-            <a:endParaRPr lang="en-US" sz="1800" dirty="0"/>
-          </a:p>
-        </p:txBody>
-      </p:sp>
-      <p:sp>
-        <p:nvSpPr>
-          <p:cNvPr id="9" name="Text 7"/>
-          <p:cNvSpPr txBox="1"/>
-          <p:nvPr/>
-        </p:nvSpPr>
-        <p:spPr>
-          <a:xfrm>
-            <a:off x="7818120" y="2286000"/>
-            <a:ext cx="3794760" cy="457200"/>
-          </a:xfrm>
-          <a:prstGeom prst="rect">
-            <a:avLst/>
-          </a:prstGeom>
-          <a:noFill/>
-          <a:ln/>
-        </p:spPr>
-        <p:txBody>
-          <a:bodyPr wrap="square" lIns="0" tIns="0" rIns="0" bIns="0" rtlCol="0" anchor="ctr"/>
-          <a:lstStyle/>
-          <a:p>
-            <a:pPr indent="0" marL="0">
-              <a:buNone/>
-            </a:pPr>
-            <a:r>
-              <a:rPr lang="en-US" sz="1500" dirty="0">
-                <a:solidFill>
-                  <a:schemeClr val="tx1"/>
-                </a:solidFill>
-              </a:rPr>
-              <a:t>the same text for all 30 problems of this kind</a:t>
-            </a:r>
-            <a:endParaRPr lang="en-US" sz="1500" dirty="0"/>
-          </a:p>
-        </p:txBody>
-      </p:sp>
-      <p:sp>
-        <p:nvSpPr>
-          <p:cNvPr id="10" name="Text 8"/>
-          <p:cNvSpPr txBox="1"/>
-          <p:nvPr/>
-        </p:nvSpPr>
-        <p:spPr>
-          <a:xfrm>
-            <a:off x="7498080" y="2788920"/>
-            <a:ext cx="320040" cy="457200"/>
-          </a:xfrm>
-          <a:prstGeom prst="rect">
-            <a:avLst/>
-          </a:prstGeom>
-          <a:noFill/>
-          <a:ln/>
-        </p:spPr>
-        <p:txBody>
-          <a:bodyPr wrap="square" lIns="0" tIns="0" rIns="0" bIns="0" rtlCol="0" anchor="ctr"/>
-          <a:lstStyle/>
-          <a:p>
-            <a:pPr indent="0" marL="0">
-              <a:buNone/>
-            </a:pPr>
-            <a:r>
-              <a:rPr lang="en-US" sz="1800" b="1" dirty="0">
-                <a:solidFill>
-                  <a:srgbClr val="C00000"/>
-                </a:solidFill>
-              </a:rPr>
-              <a:t>✗</a:t>
-            </a:r>
-            <a:endParaRPr lang="en-US" sz="1800" dirty="0"/>
-          </a:p>
-        </p:txBody>
-      </p:sp>
-      <p:sp>
-        <p:nvSpPr>
-          <p:cNvPr id="11" name="Text 9"/>
-          <p:cNvSpPr txBox="1"/>
-          <p:nvPr/>
-        </p:nvSpPr>
-        <p:spPr>
-          <a:xfrm>
-            <a:off x="7818120" y="2788920"/>
-            <a:ext cx="3794760" cy="457200"/>
-          </a:xfrm>
-          <a:prstGeom prst="rect">
-            <a:avLst/>
-          </a:prstGeom>
-          <a:noFill/>
-          <a:ln/>
-        </p:spPr>
-        <p:txBody>
-          <a:bodyPr wrap="square" lIns="0" tIns="0" rIns="0" bIns="0" rtlCol="0" anchor="ctr"/>
-          <a:lstStyle/>
-          <a:p>
-            <a:pPr indent="0" marL="0">
-              <a:buNone/>
-            </a:pPr>
-            <a:r>
-              <a:rPr lang="en-US" sz="1500" dirty="0">
-                <a:solidFill>
-                  <a:schemeClr val="tx1"/>
-                </a:solidFill>
-              </a:rPr>
-              <a:t>no route, no numbers, no answer</a:t>
-            </a:r>
-            <a:endParaRPr lang="en-US" sz="1500" dirty="0"/>
-          </a:p>
-        </p:txBody>
-      </p:sp>
-      <p:sp>
-        <p:nvSpPr>
-          <p:cNvPr id="12" name="why the sheet hurts"/>
-          <p:cNvSpPr/>
-          <p:nvPr/>
-        </p:nvSpPr>
-        <p:spPr>
-          <a:xfrm>
-            <a:off x="7498080" y="3429000"/>
-            <a:ext cx="4114800" cy="1965960"/>
+            <a:off x="548640" y="1280160"/>
+            <a:ext cx="5440680" cy="2194560"/>
           </a:xfrm>
           <a:prstGeom prst="roundRect">
             <a:avLst>
-              <a:gd name="adj" fmla="val 3721"/>
+              <a:gd name="adj" fmla="val 3333"/>
             </a:avLst>
           </a:prstGeom>
           <a:solidFill>
@@ -13300,49 +12831,625 @@
       </p:sp>
       <p:sp>
         <p:nvSpPr>
+          <p:cNvPr id="4" name="Text 2"/>
+          <p:cNvSpPr txBox="1"/>
+          <p:nvPr/>
+        </p:nvSpPr>
+        <p:spPr>
+          <a:xfrm>
+            <a:off x="777240" y="1353312"/>
+            <a:ext cx="4983480" cy="384048"/>
+          </a:xfrm>
+          <a:prstGeom prst="rect">
+            <a:avLst/>
+          </a:prstGeom>
+          <a:noFill/>
+          <a:ln/>
+        </p:spPr>
+        <p:txBody>
+          <a:bodyPr wrap="square" lIns="0" tIns="0" rIns="0" bIns="0" rtlCol="0" anchor="ctr"/>
+          <a:lstStyle/>
+          <a:p>
+            <a:pPr indent="0" marL="0">
+              <a:buNone/>
+            </a:pPr>
+            <a:r>
+              <a:rPr lang="en-US" sz="1600" b="1" dirty="0">
+                <a:solidFill>
+                  <a:srgbClr val="4472C4"/>
+                </a:solidFill>
+              </a:rPr>
+              <a:t>Written by hand (routing): library usage only</a:t>
+            </a:r>
+            <a:endParaRPr lang="en-US" sz="1600" dirty="0"/>
+          </a:p>
+        </p:txBody>
+      </p:sp>
+      <p:sp>
+        <p:nvSpPr>
+          <p:cNvPr id="5" name="Text 3"/>
+          <p:cNvSpPr txBox="1"/>
+          <p:nvPr/>
+        </p:nvSpPr>
+        <p:spPr>
+          <a:xfrm>
+            <a:off x="777240" y="1828800"/>
+            <a:ext cx="5029200" cy="1600200"/>
+          </a:xfrm>
+          <a:prstGeom prst="rect">
+            <a:avLst/>
+          </a:prstGeom>
+          <a:noFill/>
+          <a:ln/>
+        </p:spPr>
+        <p:txBody>
+          <a:bodyPr wrap="square" lIns="0" tIns="0" rIns="0" bIns="0" rtlCol="0" anchor="t"/>
+          <a:lstStyle/>
+          <a:p>
+            <a:pPr indent="0" marL="0">
+              <a:buNone/>
+            </a:pPr>
+            <a:r>
+              <a:rPr lang="en-US" sz="1300" dirty="0">
+                <a:solidFill>
+                  <a:schemeClr val="tx1"/>
+                </a:solidFill>
+                <a:latin typeface="Courier New" pitchFamily="34" charset="0"/>
+                <a:ea typeface="Courier New" pitchFamily="34" charset="-122"/>
+                <a:cs typeface="Courier New" pitchFamily="34" charset="-120"/>
+              </a:rPr>
+              <a:t>mgr = pywrapcp.RoutingIndexManager(n + 1, K, 0)</a:t>
+            </a:r>
+            <a:endParaRPr lang="en-US" sz="1300" dirty="0"/>
+          </a:p>
+          <a:p>
+            <a:pPr indent="0" marL="0">
+              <a:buNone/>
+            </a:pPr>
+            <a:r>
+              <a:rPr lang="en-US" sz="1300" dirty="0">
+                <a:solidFill>
+                  <a:schemeClr val="tx1"/>
+                </a:solidFill>
+                <a:latin typeface="Courier New" pitchFamily="34" charset="0"/>
+                <a:ea typeface="Courier New" pitchFamily="34" charset="-122"/>
+                <a:cs typeface="Courier New" pitchFamily="34" charset="-120"/>
+              </a:rPr>
+              <a:t>r = pywrapcp.RoutingModel(mgr)</a:t>
+            </a:r>
+            <a:endParaRPr lang="en-US" sz="1300" dirty="0"/>
+          </a:p>
+          <a:p>
+            <a:pPr indent="0" marL="0">
+              <a:buNone/>
+            </a:pPr>
+            <a:r>
+              <a:rPr lang="en-US" sz="1300" dirty="0">
+                <a:solidFill>
+                  <a:schemeClr val="tx1"/>
+                </a:solidFill>
+                <a:latin typeface="Courier New" pitchFamily="34" charset="0"/>
+                <a:ea typeface="Courier New" pitchFamily="34" charset="-122"/>
+                <a:cs typeface="Courier New" pitchFamily="34" charset="-120"/>
+              </a:rPr>
+              <a:t>dcb = r.RegisterUnaryTransitCallback(demand)</a:t>
+            </a:r>
+            <a:endParaRPr lang="en-US" sz="1300" dirty="0"/>
+          </a:p>
+          <a:p>
+            <a:pPr indent="0" marL="0">
+              <a:buNone/>
+            </a:pPr>
+            <a:r>
+              <a:rPr lang="en-US" sz="1300" dirty="0">
+                <a:solidFill>
+                  <a:schemeClr val="tx1"/>
+                </a:solidFill>
+                <a:latin typeface="Courier New" pitchFamily="34" charset="0"/>
+                <a:ea typeface="Courier New" pitchFamily="34" charset="-122"/>
+                <a:cs typeface="Courier New" pitchFamily="34" charset="-120"/>
+              </a:rPr>
+              <a:t>r.AddDimensionWithVehicleCapacity(dcb, ...)</a:t>
+            </a:r>
+            <a:endParaRPr lang="en-US" sz="1300" dirty="0"/>
+          </a:p>
+          <a:p>
+            <a:pPr indent="0" marL="0">
+              <a:buNone/>
+            </a:pPr>
+            <a:r>
+              <a:rPr lang="en-US" sz="1300" dirty="0">
+                <a:solidFill>
+                  <a:schemeClr val="tx1"/>
+                </a:solidFill>
+                <a:latin typeface="Courier New" pitchFamily="34" charset="0"/>
+                <a:ea typeface="Courier New" pitchFamily="34" charset="-122"/>
+                <a:cs typeface="Courier New" pitchFamily="34" charset="-120"/>
+              </a:rPr>
+              <a:t>sol = r.SolveWithParameters(p)</a:t>
+            </a:r>
+            <a:endParaRPr lang="en-US" sz="1300" dirty="0"/>
+          </a:p>
+          <a:p>
+            <a:pPr indent="0" marL="0">
+              <a:buNone/>
+            </a:pPr>
+            <a:r>
+              <a:rPr lang="en-US" sz="1300" dirty="0">
+                <a:solidFill>
+                  <a:srgbClr val="7F7F7F"/>
+                </a:solidFill>
+                <a:latin typeface="Courier New" pitchFamily="34" charset="0"/>
+                <a:ea typeface="Courier New" pitchFamily="34" charset="-122"/>
+                <a:cs typeface="Courier New" pitchFamily="34" charset="-120"/>
+              </a:rPr>
+              <a:t>… 11 lines, the same for all 30 problems</a:t>
+            </a:r>
+            <a:endParaRPr lang="en-US" sz="1300" dirty="0"/>
+          </a:p>
+        </p:txBody>
+      </p:sp>
+      <p:sp>
+        <p:nvSpPr>
+          <p:cNvPr id="6" name="automatic fact"/>
+          <p:cNvSpPr/>
+          <p:nvPr/>
+        </p:nvSpPr>
+        <p:spPr>
+          <a:xfrm>
+            <a:off x="6172200" y="1280160"/>
+            <a:ext cx="5440680" cy="2194560"/>
+          </a:xfrm>
+          <a:prstGeom prst="roundRect">
+            <a:avLst>
+              <a:gd name="adj" fmla="val 3333"/>
+            </a:avLst>
+          </a:prstGeom>
+          <a:solidFill>
+            <a:srgbClr val="F2F2F2"/>
+          </a:solidFill>
+          <a:ln w="9525">
+            <a:solidFill>
+              <a:srgbClr val="D9D9D9"/>
+            </a:solidFill>
+            <a:prstDash val="solid"/>
+          </a:ln>
+        </p:spPr>
+      </p:sp>
+      <p:sp>
+        <p:nvSpPr>
+          <p:cNvPr id="7" name="Text 5"/>
+          <p:cNvSpPr txBox="1"/>
+          <p:nvPr/>
+        </p:nvSpPr>
+        <p:spPr>
+          <a:xfrm>
+            <a:off x="6400800" y="1353312"/>
+            <a:ext cx="4983480" cy="384048"/>
+          </a:xfrm>
+          <a:prstGeom prst="rect">
+            <a:avLst/>
+          </a:prstGeom>
+          <a:noFill/>
+          <a:ln/>
+        </p:spPr>
+        <p:txBody>
+          <a:bodyPr wrap="square" lIns="0" tIns="0" rIns="0" bIns="0" rtlCol="0" anchor="ctr"/>
+          <a:lstStyle/>
+          <a:p>
+            <a:pPr indent="0" marL="0">
+              <a:buNone/>
+            </a:pPr>
+            <a:r>
+              <a:rPr lang="en-US" sz="1600" b="1" dirty="0">
+                <a:solidFill>
+                  <a:srgbClr val="4472C4"/>
+                </a:solidFill>
+              </a:rPr>
+              <a:t>Automatic (word problems): another problem's program</a:t>
+            </a:r>
+            <a:endParaRPr lang="en-US" sz="1600" dirty="0"/>
+          </a:p>
+        </p:txBody>
+      </p:sp>
+      <p:sp>
+        <p:nvSpPr>
+          <p:cNvPr id="8" name="Text 6"/>
+          <p:cNvSpPr txBox="1"/>
+          <p:nvPr/>
+        </p:nvSpPr>
+        <p:spPr>
+          <a:xfrm>
+            <a:off x="6400800" y="1828800"/>
+            <a:ext cx="5029200" cy="1600200"/>
+          </a:xfrm>
+          <a:prstGeom prst="rect">
+            <a:avLst/>
+          </a:prstGeom>
+          <a:noFill/>
+          <a:ln/>
+        </p:spPr>
+        <p:txBody>
+          <a:bodyPr wrap="square" lIns="0" tIns="0" rIns="0" bIns="0" rtlCol="0" anchor="t"/>
+          <a:lstStyle/>
+          <a:p>
+            <a:pPr indent="0" marL="0">
+              <a:buNone/>
+            </a:pPr>
+            <a:r>
+              <a:rPr lang="en-US" sz="1300" dirty="0">
+                <a:solidFill>
+                  <a:schemeClr val="tx1"/>
+                </a:solidFill>
+                <a:latin typeface="Courier New" pitchFamily="34" charset="0"/>
+                <a:ea typeface="Courier New" pitchFamily="34" charset="-122"/>
+                <a:cs typeface="Courier New" pitchFamily="34" charset="-120"/>
+              </a:rPr>
+              <a:t>solver = pywraplp.Solver.CreateSolver('SCIP')</a:t>
+            </a:r>
+            <a:endParaRPr lang="en-US" sz="1300" dirty="0"/>
+          </a:p>
+          <a:p>
+            <a:pPr indent="0" marL="0">
+              <a:buNone/>
+            </a:pPr>
+            <a:r>
+              <a:rPr lang="en-US" sz="1300" dirty="0">
+                <a:solidFill>
+                  <a:schemeClr val="tx1"/>
+                </a:solidFill>
+                <a:latin typeface="Courier New" pitchFamily="34" charset="0"/>
+                <a:ea typeface="Courier New" pitchFamily="34" charset="-122"/>
+                <a:cs typeface="Courier New" pitchFamily="34" charset="-120"/>
+              </a:rPr>
+              <a:t>v = solver.IntVar(0, solver.infinity(), 'v')</a:t>
+            </a:r>
+            <a:endParaRPr lang="en-US" sz="1300" dirty="0"/>
+          </a:p>
+          <a:p>
+            <a:pPr indent="0" marL="0">
+              <a:buNone/>
+            </a:pPr>
+            <a:r>
+              <a:rPr lang="en-US" sz="1300" dirty="0">
+                <a:solidFill>
+                  <a:srgbClr val="7F7F7F"/>
+                </a:solidFill>
+                <a:latin typeface="Courier New" pitchFamily="34" charset="0"/>
+                <a:ea typeface="Courier New" pitchFamily="34" charset="-122"/>
+                <a:cs typeface="Courier New" pitchFamily="34" charset="-120"/>
+              </a:rPr>
+              <a:t>…  (that problem's own limits)</a:t>
+            </a:r>
+            <a:endParaRPr lang="en-US" sz="1300" dirty="0"/>
+          </a:p>
+          <a:p>
+            <a:pPr indent="0" marL="0">
+              <a:buNone/>
+            </a:pPr>
+            <a:r>
+              <a:rPr lang="en-US" sz="1300" dirty="0">
+                <a:solidFill>
+                  <a:schemeClr val="tx1"/>
+                </a:solidFill>
+                <a:latin typeface="Courier New" pitchFamily="34" charset="0"/>
+                <a:ea typeface="Courier New" pitchFamily="34" charset="-122"/>
+                <a:cs typeface="Courier New" pitchFamily="34" charset="-120"/>
+              </a:rPr>
+              <a:t>solver.Minimize(v)</a:t>
+            </a:r>
+            <a:endParaRPr lang="en-US" sz="1300" dirty="0"/>
+          </a:p>
+          <a:p>
+            <a:pPr indent="0" marL="0">
+              <a:buNone/>
+            </a:pPr>
+            <a:r>
+              <a:rPr lang="en-US" sz="1300" dirty="0">
+                <a:solidFill>
+                  <a:schemeClr val="tx1"/>
+                </a:solidFill>
+                <a:latin typeface="Courier New" pitchFamily="34" charset="0"/>
+                <a:ea typeface="Courier New" pitchFamily="34" charset="-122"/>
+                <a:cs typeface="Courier New" pitchFamily="34" charset="-120"/>
+              </a:rPr>
+              <a:t>status = solver.Solve()</a:t>
+            </a:r>
+            <a:endParaRPr lang="en-US" sz="1300" dirty="0"/>
+          </a:p>
+          <a:p>
+            <a:pPr indent="0" marL="0">
+              <a:buNone/>
+            </a:pPr>
+            <a:r>
+              <a:rPr lang="en-US" sz="1300" dirty="0">
+                <a:solidFill>
+                  <a:srgbClr val="7F7F7F"/>
+                </a:solidFill>
+                <a:latin typeface="Courier New" pitchFamily="34" charset="0"/>
+                <a:ea typeface="Courier New" pitchFamily="34" charset="-122"/>
+                <a:cs typeface="Courier New" pitchFamily="34" charset="-120"/>
+              </a:rPr>
+              <a:t>… a vans-and-trucks problem, not this one</a:t>
+            </a:r>
+            <a:endParaRPr lang="en-US" sz="1300" dirty="0"/>
+          </a:p>
+        </p:txBody>
+      </p:sp>
+      <p:sp>
+        <p:nvSpPr>
+          <p:cNvPr id="9" name="what the fact does"/>
+          <p:cNvSpPr/>
+          <p:nvPr/>
+        </p:nvSpPr>
+        <p:spPr>
+          <a:xfrm>
+            <a:off x="548640" y="3657600"/>
+            <a:ext cx="11064240" cy="1600200"/>
+          </a:xfrm>
+          <a:prstGeom prst="roundRect">
+            <a:avLst>
+              <a:gd name="adj" fmla="val 4571"/>
+            </a:avLst>
+          </a:prstGeom>
+          <a:solidFill>
+            <a:srgbClr val="F2F2F2"/>
+          </a:solidFill>
+          <a:ln w="9525">
+            <a:solidFill>
+              <a:srgbClr val="D9D9D9"/>
+            </a:solidFill>
+            <a:prstDash val="solid"/>
+          </a:ln>
+        </p:spPr>
+      </p:sp>
+      <p:sp>
+        <p:nvSpPr>
+          <p:cNvPr id="10" name="Text 8"/>
+          <p:cNvSpPr txBox="1"/>
+          <p:nvPr/>
+        </p:nvSpPr>
+        <p:spPr>
+          <a:xfrm>
+            <a:off x="777240" y="3712464"/>
+            <a:ext cx="4572000" cy="365760"/>
+          </a:xfrm>
+          <a:prstGeom prst="rect">
+            <a:avLst/>
+          </a:prstGeom>
+          <a:noFill/>
+          <a:ln/>
+        </p:spPr>
+        <p:txBody>
+          <a:bodyPr wrap="square" lIns="0" tIns="0" rIns="0" bIns="0" rtlCol="0" anchor="ctr"/>
+          <a:lstStyle/>
+          <a:p>
+            <a:pPr indent="0" marL="0">
+              <a:buNone/>
+            </a:pPr>
+            <a:r>
+              <a:rPr lang="en-US" sz="1600" b="1" dirty="0">
+                <a:solidFill>
+                  <a:srgbClr val="4472C4"/>
+                </a:solidFill>
+              </a:rPr>
+              <a:t>What it does</a:t>
+            </a:r>
+            <a:endParaRPr lang="en-US" sz="1600" dirty="0"/>
+          </a:p>
+        </p:txBody>
+      </p:sp>
+      <p:sp>
+        <p:nvSpPr>
+          <p:cNvPr id="11" name="Text 9"/>
+          <p:cNvSpPr txBox="1"/>
+          <p:nvPr/>
+        </p:nvSpPr>
+        <p:spPr>
+          <a:xfrm>
+            <a:off x="777240" y="4096512"/>
+            <a:ext cx="274320" cy="365760"/>
+          </a:xfrm>
+          <a:prstGeom prst="rect">
+            <a:avLst/>
+          </a:prstGeom>
+          <a:noFill/>
+          <a:ln/>
+        </p:spPr>
+        <p:txBody>
+          <a:bodyPr wrap="square" lIns="0" tIns="0" rIns="0" bIns="0" rtlCol="0" anchor="ctr"/>
+          <a:lstStyle/>
+          <a:p>
+            <a:pPr indent="0" marL="0">
+              <a:buNone/>
+            </a:pPr>
+            <a:r>
+              <a:rPr lang="en-US" sz="1700" b="1" dirty="0">
+                <a:solidFill>
+                  <a:srgbClr val="38761D"/>
+                </a:solidFill>
+              </a:rPr>
+              <a:t>✓</a:t>
+            </a:r>
+            <a:endParaRPr lang="en-US" sz="1700" dirty="0"/>
+          </a:p>
+        </p:txBody>
+      </p:sp>
+      <p:sp>
+        <p:nvSpPr>
+          <p:cNvPr id="12" name="Text 10"/>
+          <p:cNvSpPr txBox="1"/>
+          <p:nvPr/>
+        </p:nvSpPr>
+        <p:spPr>
+          <a:xfrm>
+            <a:off x="1097280" y="4096512"/>
+            <a:ext cx="10332720" cy="365760"/>
+          </a:xfrm>
+          <a:prstGeom prst="rect">
+            <a:avLst/>
+          </a:prstGeom>
+          <a:noFill/>
+          <a:ln/>
+        </p:spPr>
+        <p:txBody>
+          <a:bodyPr wrap="square" lIns="0" tIns="0" rIns="0" bIns="0" rtlCol="0" anchor="ctr"/>
+          <a:lstStyle/>
+          <a:p>
+            <a:pPr indent="0" marL="0">
+              <a:buNone/>
+            </a:pPr>
+            <a:r>
+              <a:rPr lang="en-US" sz="1400" dirty="0">
+                <a:solidFill>
+                  <a:schemeClr val="tx1"/>
+                </a:solidFill>
+              </a:rPr>
+              <a:t>It stops invented function names: Qwen3-1.7B wrote Solver.SUCCESS and solver.INFINITY (do not exist); with the hint 0.1% → 45% solved</a:t>
+            </a:r>
+            <a:endParaRPr lang="en-US" sz="1400" dirty="0"/>
+          </a:p>
+        </p:txBody>
+      </p:sp>
+      <p:sp>
+        <p:nvSpPr>
           <p:cNvPr id="13" name="Text 11"/>
           <p:cNvSpPr txBox="1"/>
           <p:nvPr/>
         </p:nvSpPr>
         <p:spPr>
           <a:xfrm>
-            <a:off x="7680960" y="3520440"/>
-            <a:ext cx="3749040" cy="1783080"/>
-          </a:xfrm>
-          <a:prstGeom prst="rect">
-            <a:avLst/>
-          </a:prstGeom>
-          <a:noFill/>
-          <a:ln/>
-        </p:spPr>
-        <p:txBody>
-          <a:bodyPr wrap="square" lIns="0" tIns="0" rIns="0" bIns="0" rtlCol="0" anchor="t"/>
+            <a:off x="777240" y="4480560"/>
+            <a:ext cx="274320" cy="365760"/>
+          </a:xfrm>
+          <a:prstGeom prst="rect">
+            <a:avLst/>
+          </a:prstGeom>
+          <a:noFill/>
+          <a:ln/>
+        </p:spPr>
+        <p:txBody>
+          <a:bodyPr wrap="square" lIns="0" tIns="0" rIns="0" bIns="0" rtlCol="0" anchor="ctr"/>
           <a:lstStyle/>
           <a:p>
             <a:pPr indent="0" marL="0">
               <a:buNone/>
             </a:pPr>
             <a:r>
-              <a:rPr lang="en-US" sz="1400" b="1" dirty="0">
+              <a:rPr lang="en-US" sz="1700" b="1" dirty="0">
+                <a:solidFill>
+                  <a:srgbClr val="C00000"/>
+                </a:solidFill>
+              </a:rPr>
+              <a:t>✗</a:t>
+            </a:r>
+            <a:endParaRPr lang="en-US" sz="1700" dirty="0"/>
+          </a:p>
+        </p:txBody>
+      </p:sp>
+      <p:sp>
+        <p:nvSpPr>
+          <p:cNvPr id="14" name="Text 12"/>
+          <p:cNvSpPr txBox="1"/>
+          <p:nvPr/>
+        </p:nvSpPr>
+        <p:spPr>
+          <a:xfrm>
+            <a:off x="1097280" y="4480560"/>
+            <a:ext cx="10332720" cy="365760"/>
+          </a:xfrm>
+          <a:prstGeom prst="rect">
+            <a:avLst/>
+          </a:prstGeom>
+          <a:noFill/>
+          <a:ln/>
+        </p:spPr>
+        <p:txBody>
+          <a:bodyPr wrap="square" lIns="0" tIns="0" rIns="0" bIns="0" rtlCol="0" anchor="ctr"/>
+          <a:lstStyle/>
+          <a:p>
+            <a:pPr indent="0" marL="0">
+              <a:buNone/>
+            </a:pPr>
+            <a:r>
+              <a:rPr lang="en-US" sz="1400" dirty="0">
                 <a:solidFill>
                   <a:schemeClr val="tx1"/>
                 </a:solidFill>
               </a:rPr>
-              <a:t>Why is a long reference sheet worse than nothing (7% vs 23%)?</a:t>
+              <a:t>It does not write the equations: modelling the problem is still the model's job (most errors left are wrong equations)</a:t>
             </a:r>
             <a:endParaRPr lang="en-US" sz="1400" dirty="0"/>
           </a:p>
+        </p:txBody>
+      </p:sp>
+      <p:sp>
+        <p:nvSpPr>
+          <p:cNvPr id="15" name="Text 13"/>
+          <p:cNvSpPr txBox="1"/>
+          <p:nvPr/>
+        </p:nvSpPr>
+        <p:spPr>
+          <a:xfrm>
+            <a:off x="777240" y="4864608"/>
+            <a:ext cx="274320" cy="365760"/>
+          </a:xfrm>
+          <a:prstGeom prst="rect">
+            <a:avLst/>
+          </a:prstGeom>
+          <a:noFill/>
+          <a:ln/>
+        </p:spPr>
+        <p:txBody>
+          <a:bodyPr wrap="square" lIns="0" tIns="0" rIns="0" bIns="0" rtlCol="0" anchor="ctr"/>
+          <a:lstStyle/>
           <a:p>
             <a:pPr indent="0" marL="0">
               <a:buNone/>
             </a:pPr>
             <a:r>
+              <a:rPr lang="en-US" sz="1700" b="1" dirty="0">
+                <a:solidFill>
+                  <a:srgbClr val="C00000"/>
+                </a:solidFill>
+              </a:rPr>
+              <a:t>✗</a:t>
+            </a:r>
+            <a:endParaRPr lang="en-US" sz="1700" dirty="0"/>
+          </a:p>
+        </p:txBody>
+      </p:sp>
+      <p:sp>
+        <p:nvSpPr>
+          <p:cNvPr id="16" name="Text 14"/>
+          <p:cNvSpPr txBox="1"/>
+          <p:nvPr/>
+        </p:nvSpPr>
+        <p:spPr>
+          <a:xfrm>
+            <a:off x="1097280" y="4864608"/>
+            <a:ext cx="10332720" cy="365760"/>
+          </a:xfrm>
+          <a:prstGeom prst="rect">
+            <a:avLst/>
+          </a:prstGeom>
+          <a:noFill/>
+          <a:ln/>
+        </p:spPr>
+        <p:txBody>
+          <a:bodyPr wrap="square" lIns="0" tIns="0" rIns="0" bIns="0" rtlCol="0" anchor="ctr"/>
+          <a:lstStyle/>
+          <a:p>
+            <a:pPr indent="0" marL="0">
+              <a:buNone/>
+            </a:pPr>
+            <a:r>
               <a:rPr lang="en-US" sz="1400" dirty="0">
                 <a:solidFill>
                   <a:schemeClr val="tx1"/>
                 </a:solidFill>
               </a:rPr>
-              <a:t>It shows routing, but not the capacity rule. The model fills the gap with a call that does not exist (10 programs: RegisterUnaryLongLivingCallback).</a:t>
+              <a:t>It never holds this problem's numbers or answer: one hint per problem type</a:t>
             </a:r>
             <a:endParaRPr lang="en-US" sz="1400" dirty="0"/>
           </a:p>
@@ -13350,7 +13457,7 @@
       </p:sp>
       <p:sp>
         <p:nvSpPr>
-          <p:cNvPr id="14" name="Text 12"/>
+          <p:cNvPr id="17" name="Text 15"/>
           <p:cNvSpPr txBox="1"/>
           <p:nvPr/>
         </p:nvSpPr>
@@ -13378,7 +13485,7 @@
                   <a:schemeClr val="tx1"/>
                 </a:solidFill>
               </a:rPr>
-              <a:t>The hint says how to call the library, not how to solve the problem</a:t>
+              <a:t>The hint shows how to call the library; the model still has to solve the problem</a:t>
             </a:r>
             <a:endParaRPr lang="en-US" sz="2000" dirty="0"/>
           </a:p>

--- a/Proposal_Team5.pptx
+++ b/Proposal_Team5.pptx
@@ -142,7 +142,7 @@
   <p:extLst>
     <p:ext uri="{521415D9-36F7-43E2-AB2F-B90AF26B5E84}">
       <p14:sectionLst xmlns:p14="http://schemas.microsoft.com/office/powerpoint/2010/main">
-        <p14:section name="Talk" id="{2c936d8d-6338-513c-6ba0-9346b8ac8e84}">
+        <p14:section name="Talk" id="{ad3273dd-3d64-e50f-bc11-aa4b0041dda1}">
           <p14:sldIdLst>
             <p14:sldId id="256"/>
             <p14:sldId id="257"/>
@@ -155,7 +155,7 @@
             <p14:sldId id="264"/>
           </p14:sldIdLst>
         </p14:section>
-        <p14:section name="Extra pages" id="{feb1e1d4-b2f0-3dcd-85d0-0d854c88206a}">
+        <p14:section name="Extra pages" id="{7ce8f15d-6446-e027-f25f-7d72e8180949}">
           <p14:sldIdLst>
             <p14:sldId id="265"/>
             <p14:sldId id="266"/>
@@ -4050,7 +4050,7 @@
           <a:p>
             <a:r>
               <a:rPr lang="en-US" dirty="0"/>
-              <a:t>(25초) 하지만 두 가지가 문제입니다. 첫째, 프로그램은 조용히 틀립니다. 같은 문제에 보조 코드만 더하면 6 대신 0을 내고 에러도 없습니다. 없는 함수를 불러 죽기도 합니다. 둘째, 오래 생각하면 비쌉니다. gpt-oss-120b는 토큰을 4.4배 써서 9점을 더 얻습니다. 그래서 추가 노력을 힌트, 공짜 검사, 생각 중 어디에 쓸지가 저희 질문입니다.</a:t>
+              <a:t>(45초) 하지만 두 가지가 문제입니다. 첫째, 프로그램은 조용히 틀립니다. 왼쪽 그림처럼 점 10개를 고무줄로 감싸면 꼭짓점이 6개입니다. 같은 모델에게 이 개수를 세는 프로그램을 두 번 짜게 했습니다. 문제만 준 프로그램 A는 6을 내고, 필요 없는 도우미 함수 8개를 같이 준 프로그램 B는 0을 냅니다. B는 에러 없이 그냥 틀린 숫자를 내서, 답을 모르면 틀린 줄 알 수 없습니다. 없는 함수를 불러 아예 멈추기도 합니다. 둘째, 오래 생각하면 비쌉니다. gpt-oss-120b는 토큰을 4.4배 써서 9점을 더 얻습니다. 그래서 추가 노력을 힌트, 공짜 검사, 생각 중 어디에 쓸지가 저희 질문입니다.</a:t>
             </a:r>
             <a:endParaRPr lang="en-US" dirty="0"/>
           </a:p>
@@ -41363,7 +41363,7 @@
         <p:spPr>
           <a:xfrm>
             <a:off x="2971800" y="3794760"/>
-            <a:ext cx="2834640" cy="548640"/>
+            <a:ext cx="2834640" cy="685800"/>
           </a:xfrm>
           <a:prstGeom prst="rect">
             <a:avLst/>
@@ -41379,14 +41379,14 @@
               <a:buNone/>
             </a:pPr>
             <a:r>
-              <a:rPr lang="en-US" sz="1400" dirty="0">
+              <a:rPr lang="en-US" sz="1300" dirty="0">
                 <a:solidFill>
                   <a:schemeClr val="tx2"/>
                 </a:solidFill>
               </a:rPr>
-              <a:t>B's prompt only added helper code (Qwen3-14B)</a:t>
-            </a:r>
-            <a:endParaRPr lang="en-US" sz="1400" dirty="0"/>
+              <a:t>A: the task only. B: the task + 8 helper functions it did not need (Qwen3-14B)</a:t>
+            </a:r>
+            <a:endParaRPr lang="en-US" sz="1300" dirty="0"/>
           </a:p>
         </p:txBody>
       </p:sp>

--- a/Proposal_Team5.pptx
+++ b/Proposal_Team5.pptx
@@ -142,7 +142,7 @@
   <p:extLst>
     <p:ext uri="{521415D9-36F7-43E2-AB2F-B90AF26B5E84}">
       <p14:sectionLst xmlns:p14="http://schemas.microsoft.com/office/powerpoint/2010/main">
-        <p14:section name="Talk" id="{ad3273dd-3d64-e50f-bc11-aa4b0041dda1}">
+        <p14:section name="Talk" id="{fd0fe899-0067-a802-356f-10041d554b64}">
           <p14:sldIdLst>
             <p14:sldId id="256"/>
             <p14:sldId id="257"/>
@@ -155,7 +155,7 @@
             <p14:sldId id="264"/>
           </p14:sldIdLst>
         </p14:section>
-        <p14:section name="Extra pages" id="{7ce8f15d-6446-e027-f25f-7d72e8180949}">
+        <p14:section name="Extra pages" id="{0b890137-f78d-ee45-5400-6638ad7da88e}">
           <p14:sldIdLst>
             <p14:sldId id="265"/>
             <p14:sldId id="266"/>
@@ -4316,7 +4316,7 @@
           <a:p>
             <a:r>
               <a:rPr lang="en-US" dirty="0"/>
-              <a:t>(40초) 둘을 합친 것이 저희 방법입니다. 힌트를 붙여 쓰고, 검사하고, 실패할 때만 생각하고, 같은 종류가 다시 오면 재사용합니다. 힌트는 사람 없이 이렇게 고릅니다. 모델이 앞서 푼 같은 종류의 문제들에서 검사를 통과한 프로그램을 힌트 풀로 모으고, 가장 짧은 것을 씁니다. 이 풀은 정답 없이, 문제가 들어오는 대로 채워집니다. 실제 문제 하나에서는 힌트 없이 죽던 프로그램이 힌트로 바로 20000을 맞혀, 5.3k 대신 0.6k 토큰을 썼습니다. 기하와 최적화 208문제를 세 모델로 풀면, 답이 갈리는 문제에 생각을 몰아주는 기존 방식은 74%, 저희는 87%이고 토큰도 적습니다.</a:t>
+              <a:t>(55초) 둘을 합친 것이 저희 방법입니다. 힌트를 붙여 쓰고, 검사하고, 실패할 때만 생각하고, 같은 종류가 다시 오면 재사용합니다. 힌트는 사람 없이 이렇게 만듭니다. 모델이 앞서 같은 종류의 다른 문제들에 짠 프로그램 중 검사를 통과한 것을 모으고, 그중 가장 짧은 프로그램 코드를 '다른 문제용으로 짠, 돌아가는 프로그램'이라는 설명과 함께 프롬프트에 예시로 붙입니다. 모델은 그 코드를 실행하지 않고, 함수 쓰는 법만 보고 자기 문제의 프로그램을 새로 짭니다. 실제 문제 하나에서는 힌트 없이 죽던 프로그램이 힌트로 바로 20000을 맞혀, 5.3k 대신 0.6k 토큰을 썼습니다. 기하와 최적화 208문제를 세 모델로 풀면, 답이 갈리는 문제에 생각을 몰아주는 기존 방식은 74%, 저희는 87%이고 토큰도 적습니다.</a:t>
             </a:r>
             <a:endParaRPr lang="en-US" dirty="0"/>
           </a:p>
@@ -47715,7 +47715,7 @@
       </p:sp>
       <p:sp>
         <p:nvSpPr>
-          <p:cNvPr id="45" name="box shortest = hint"/>
+          <p:cNvPr id="45" name="box shortest, pasted as "/>
           <p:cNvSpPr/>
           <p:nvPr/>
         </p:nvSpPr>
@@ -47770,7 +47770,7 @@
                   <a:srgbClr val="38761D"/>
                 </a:solidFill>
               </a:rPr>
-              <a:t>shortest = hint</a:t>
+              <a:t>shortest, pasted as an example</a:t>
             </a:r>
             <a:endParaRPr lang="en-US" sz="1500" dirty="0"/>
           </a:p>

--- a/Proposal_Team5.pptx
+++ b/Proposal_Team5.pptx
@@ -142,7 +142,7 @@
   <p:extLst>
     <p:ext uri="{521415D9-36F7-43E2-AB2F-B90AF26B5E84}">
       <p14:sectionLst xmlns:p14="http://schemas.microsoft.com/office/powerpoint/2010/main">
-        <p14:section name="Talk" id="{fd0fe899-0067-a802-356f-10041d554b64}">
+        <p14:section name="Talk" id="{649f8c10-6566-ef5b-33fb-f6515984bcb1}">
           <p14:sldIdLst>
             <p14:sldId id="256"/>
             <p14:sldId id="257"/>
@@ -155,7 +155,7 @@
             <p14:sldId id="264"/>
           </p14:sldIdLst>
         </p14:section>
-        <p14:section name="Extra pages" id="{0b890137-f78d-ee45-5400-6638ad7da88e}">
+        <p14:section name="Extra pages" id="{be8bfbbc-be35-945a-1165-71777fc558d8}">
           <p14:sldIdLst>
             <p14:sldId id="265"/>
             <p14:sldId id="266"/>
@@ -4316,7 +4316,7 @@
           <a:p>
             <a:r>
               <a:rPr lang="en-US" dirty="0"/>
-              <a:t>(55초) 둘을 합친 것이 저희 방법입니다. 힌트를 붙여 쓰고, 검사하고, 실패할 때만 생각하고, 같은 종류가 다시 오면 재사용합니다. 힌트는 사람 없이 이렇게 만듭니다. 모델이 앞서 같은 종류의 다른 문제들에 짠 프로그램 중 검사를 통과한 것을 모으고, 그중 가장 짧은 프로그램 코드를 '다른 문제용으로 짠, 돌아가는 프로그램'이라는 설명과 함께 프롬프트에 예시로 붙입니다. 모델은 그 코드를 실행하지 않고, 함수 쓰는 법만 보고 자기 문제의 프로그램을 새로 짭니다. 실제 문제 하나에서는 힌트 없이 죽던 프로그램이 힌트로 바로 20000을 맞혀, 5.3k 대신 0.6k 토큰을 썼습니다. 기하와 최적화 208문제를 세 모델로 풀면, 답이 갈리는 문제에 생각을 몰아주는 기존 방식은 74%, 저희는 87%이고 토큰도 적습니다.</a:t>
+              <a:t>(55초) 둘을 합친 것이 저희 방법입니다. 힌트를 붙여 쓰고, 검사하고, 실패할 때만 생각하고, 같은 종류가 다시 오면 재사용합니다. 힌트는 사람 없이 이렇게 만듭니다. 모델이 앞서 같은 종류의 다른 문제들에 짠 프로그램 중 에러 없이 실행되어 숫자를 출력한 것만 모으고, 그중 가장 짧은 프로그램 코드를 '다른 문제용으로 짠, 돌아가는 프로그램'이라는 설명과 함께 프롬프트에 예시로 붙입니다. 모델은 그 코드를 실행하지 않고, 함수 쓰는 법만 보고 자기 문제의 프로그램을 새로 짭니다. 실제 문제 하나에서는 힌트 없이 죽던 프로그램이 힌트로 바로 20000을 맞혀, 5.3k 대신 0.6k 토큰을 썼습니다. 기하와 최적화 208문제를 세 모델로 풀면, 답이 갈리는 문제에 생각을 몰아주는 기존 방식은 74%, 저희는 87%이고 토큰도 적습니다.</a:t>
             </a:r>
             <a:endParaRPr lang="en-US" dirty="0"/>
           </a:p>
@@ -47628,7 +47628,7 @@
       </p:sp>
       <p:sp>
         <p:nvSpPr>
-          <p:cNvPr id="42" name="box ✓ passed the check"/>
+          <p:cNvPr id="42" name="box ✓ runs and prints a "/>
           <p:cNvSpPr/>
           <p:nvPr/>
         </p:nvSpPr>
@@ -47683,7 +47683,7 @@
                   <a:schemeClr val="tx1"/>
                 </a:solidFill>
               </a:rPr>
-              <a:t>✓ passed the check</a:t>
+              <a:t>✓ runs and prints a number</a:t>
             </a:r>
             <a:endParaRPr lang="en-US" sz="1500" dirty="0"/>
           </a:p>

--- a/Proposal_Team5.pptx
+++ b/Proposal_Team5.pptx
@@ -142,7 +142,7 @@
   <p:extLst>
     <p:ext uri="{521415D9-36F7-43E2-AB2F-B90AF26B5E84}">
       <p14:sectionLst xmlns:p14="http://schemas.microsoft.com/office/powerpoint/2010/main">
-        <p14:section name="Talk" id="{649f8c10-6566-ef5b-33fb-f6515984bcb1}">
+        <p14:section name="Talk" id="{73ef6e45-056a-3d07-8d6e-f347ea21374d}">
           <p14:sldIdLst>
             <p14:sldId id="256"/>
             <p14:sldId id="257"/>
@@ -155,7 +155,7 @@
             <p14:sldId id="264"/>
           </p14:sldIdLst>
         </p14:section>
-        <p14:section name="Extra pages" id="{be8bfbbc-be35-945a-1165-71777fc558d8}">
+        <p14:section name="Extra pages" id="{2548b8e7-560f-5f0a-2473-5cbea27aa0e0}">
           <p14:sldIdLst>
             <p14:sldId id="265"/>
             <p14:sldId id="266"/>
@@ -4227,7 +4227,7 @@
           <a:p>
             <a:r>
               <a:rPr lang="en-US" dirty="0"/>
-              <a:t>(40초) 두 번째 발견입니다. 공짜 검사가 실패할 때만 생각하게 하세요. 공짜 검사란 프로그램을 실행해서 이미 아는 것과 비교해 보는 것으로, 정답도 추가 생각도 필요 없습니다. 문제에 '막대 3, 4, 5면 답 0'이라는 예제가 있으면, 모델 없이 우리 프로그램을 3, 4, 5로 돌려 봅니다. 0이 나오면 그대로 내고, 다르면 그 문제만 더 생각합니다. 예제가 없으면 프로그램을 두 번 짜서 비교합니다. 그러면 경시 문제에서 66%, 기하에서 99%로, 항상 생각할 때와 같은 정확도를 18에서 27% 적은 토큰에 얻습니다.
+              <a:t>(50초) 두 번째 발견입니다. 생각은 공짜 검사가 실패한 문제에만 쓰세요. 공짜 검사란, 정답 없이 프로그램을 실행해서 이미 아는 것과 비교해 보는 것으로, 토큰이 거의 들지 않습니다. 예를 들어 경시 문제에는 막대가 3, 4, 5이면 답은 0이라는 예제가 있습니다. 프로그램에 3, 4, 5를 넣어 0이 나오면 그대로 내고, 다르면 그 문제만 더 생각해서 다시 짭니다. 예제가 없으면 프로그램을 두 가지로 짜서, 6과 0처럼 답이 다를 때만 생각합니다. 결과는 오른쪽입니다. 경시 문제는 항상 오래 생각할 때와 같은 66%를 3만 대신 2만 5천 토큰에, 기하는 99%를 5.9k 대신 4.3k 토큰에 얻습니다. 정답은 필요 없습니다.
 [참고, 읽지 않음] 경시 66.3%는 예제와, 작은 입력을 전부 따져 보는 느린 프로그램, 두 검사를 함께 쓴 결과입니다. 예제만 쓰면 20k 토큰에 65.0%입니다.</a:t>
             </a:r>
             <a:endParaRPr lang="en-US" dirty="0"/>
@@ -4316,7 +4316,7 @@
           <a:p>
             <a:r>
               <a:rPr lang="en-US" dirty="0"/>
-              <a:t>(55초) 둘을 합친 것이 저희 방법입니다. 힌트를 붙여 쓰고, 검사하고, 실패할 때만 생각하고, 같은 종류가 다시 오면 재사용합니다. 힌트는 사람 없이 이렇게 만듭니다. 모델이 앞서 같은 종류의 다른 문제들에 짠 프로그램 중 에러 없이 실행되어 숫자를 출력한 것만 모으고, 그중 가장 짧은 프로그램 코드를 '다른 문제용으로 짠, 돌아가는 프로그램'이라는 설명과 함께 프롬프트에 예시로 붙입니다. 모델은 그 코드를 실행하지 않고, 함수 쓰는 법만 보고 자기 문제의 프로그램을 새로 짭니다. 실제 문제 하나에서는 힌트 없이 죽던 프로그램이 힌트로 바로 20000을 맞혀, 5.3k 대신 0.6k 토큰을 썼습니다. 기하와 최적화 208문제를 세 모델로 풀면, 답이 갈리는 문제에 생각을 몰아주는 기존 방식은 74%, 저희는 87%이고 토큰도 적습니다.</a:t>
+              <a:t>(60초) 둘을 합친 것이 저희 방법입니다. 위의 네 단계입니다. 힌트를 붙여 프로그램을 쓰고, 공짜 검사를 돌려서, 통과하면 내고 실패하면 그때만 생각합니다. 같은 종류가 다시 오면 그 프로그램을 재사용합니다. 아이콘은 각 단계를 쓰는 문제 종류입니다. 왼쪽은 힌트를 만드는 법입니다. 같은 종류의 앞선 문제들에서 모델이 짠 프로그램 중 실행되어 숫자를 낸 것을 모으고, 가장 짧은 것을 예시로 프롬프트에 붙입니다. 사람도 정답도 필요 없습니다. 실제 문제에서 힌트가 없으면 없는 함수를 불러 죽지만, 힌트가 있으면 두 버전이 모두 20000을 내서 바로 제출하고, 토큰은 생각만 할 때의 5.3k 대신 0.6k입니다. 오른쪽은 전체 결과입니다. 기하와 최적화 208문제를 세 모델로 풀면, 답이 갈리는 문제에 생각을 몰아주는 기존 방식은 74%, 검색한 힌트로 84%, 사람이 쓴 힌트로 87%이고 토큰도 더 적습니다.</a:t>
             </a:r>
             <a:endParaRPr lang="en-US" dirty="0"/>
           </a:p>

--- a/Proposal_Team5.pptx
+++ b/Proposal_Team5.pptx
@@ -142,7 +142,7 @@
   <p:extLst>
     <p:ext uri="{521415D9-36F7-43E2-AB2F-B90AF26B5E84}">
       <p14:sectionLst xmlns:p14="http://schemas.microsoft.com/office/powerpoint/2010/main">
-        <p14:section name="Talk" id="{73ef6e45-056a-3d07-8d6e-f347ea21374d}">
+        <p14:section name="Talk" id="{c864ebdc-f059-53a7-d9f6-f85a0749aedc}">
           <p14:sldIdLst>
             <p14:sldId id="256"/>
             <p14:sldId id="257"/>
@@ -155,7 +155,7 @@
             <p14:sldId id="264"/>
           </p14:sldIdLst>
         </p14:section>
-        <p14:section name="Extra pages" id="{2548b8e7-560f-5f0a-2473-5cbea27aa0e0}">
+        <p14:section name="Extra pages" id="{52189dcf-bb4e-04db-f1c5-712fcbdbc4e5}">
           <p14:sldIdLst>
             <p14:sldId id="265"/>
             <p14:sldId id="266"/>
@@ -4316,7 +4316,8 @@
           <a:p>
             <a:r>
               <a:rPr lang="en-US" dirty="0"/>
-              <a:t>(60초) 둘을 합친 것이 저희 방법입니다. 위의 네 단계입니다. 힌트를 붙여 프로그램을 쓰고, 공짜 검사를 돌려서, 통과하면 내고 실패하면 그때만 생각합니다. 같은 종류가 다시 오면 그 프로그램을 재사용합니다. 아이콘은 각 단계를 쓰는 문제 종류입니다. 왼쪽은 힌트를 만드는 법입니다. 같은 종류의 앞선 문제들에서 모델이 짠 프로그램 중 실행되어 숫자를 낸 것을 모으고, 가장 짧은 것을 예시로 프롬프트에 붙입니다. 사람도 정답도 필요 없습니다. 실제 문제에서 힌트가 없으면 없는 함수를 불러 죽지만, 힌트가 있으면 두 버전이 모두 20000을 내서 바로 제출하고, 토큰은 생각만 할 때의 5.3k 대신 0.6k입니다. 오른쪽은 전체 결과입니다. 기하와 최적화 208문제를 세 모델로 풀면, 답이 갈리는 문제에 생각을 몰아주는 기존 방식은 74%, 검색한 힌트로 84%, 사람이 쓴 힌트로 87%이고 토큰도 더 적습니다.</a:t>
+              <a:t>(65초) 둘을 합친 것이 저희 방법입니다. 위의 네 단계입니다. 힌트를 붙여 프로그램을 쓰고, 공짜 검사를 돌려서, 통과하면 내고 실패하면 그때만 생각합니다. 같은 종류가 다시 오면 그 프로그램을 재사용합니다. 아이콘은 각 단계를 쓰는 문제 종류입니다. 왼쪽은 힌트를 만드는 법입니다. 같은 종류의 앞선 문제들에서 모델이 짠 프로그램 중 실행되어 숫자를 낸 것을 모으고, 가장 짧은 것을 예시로 프롬프트에 붙입니다. 사람도 정답도 필요 없습니다. 실제 문제에서 힌트가 없으면 없는 함수를 불러 죽지만, 힌트가 있으면 두 버전이 모두 20000을 내서 바로 제출하고, 토큰은 생각만 할 때의 5.3k 대신 0.6k입니다. 오른쪽은 전체 결과입니다. 기하와 최적화 208문제를 세 모델로 풀면, 답이 갈리는 문제에 생각을 몰아주는 기존 방식은 74%, 검사가 실패할 때만 생각하면 77%, 여기에 검색한 힌트를 먼저 주면 84%, 사람이 쓴 힌트면 87%이고 토큰도 더 적습니다.
+[참고, 읽지 않음] 힌트 풀의 검사는 '실행되어 숫자를 냄'뿐이라, 풀 안에도 틀린 프로그램이 있습니다(8B 이상 모델에서 17~38%). 정답으로 나중에 확인해 보니, 실제로 고른 가장 짧은 프로그램은 8B 이상 다섯 모델 모두에서 맞았고, Qwen3-4B와 1.7B에서는 틀렸습니다.</a:t>
             </a:r>
             <a:endParaRPr lang="en-US" dirty="0"/>
           </a:p>
@@ -4404,7 +4405,7 @@
           <a:p>
             <a:r>
               <a:rPr lang="en-US" dirty="0"/>
-              <a:t>(45초) 새로운 점은 세 가지입니다. 학습 없이 공짜 검사가 실패할 때만 생각해서 74%를 87%로 올렸고, 매뉴얼 대신 사람 없이 고른 짧은 힌트 하나를 주며, 최적화 문장제 863개인 MAMO에서, 파인튜닝한 8B 특화 모델과 같은 69.5%를 같은 크기의 8B 모델로 학습 없이 냅니다. 다음은 세 가지입니다. 힌트를 문제 종류마다 자동으로 고르고, 토큰 없이 더 많이 잡는 검사를 만들고, 마지막으로 수학 증명으로 넓힙니다. 증명은 Lean이 모든 단계를 검사해 주니, 거기에 맞는 힌트를 찾는 것이 과제입니다. 정리하면, 짧은 힌트를 먼저 주고, 공짜 검사가 실패한 곳에서만 생각하게 하자는 것입니다.
+              <a:t>(50초) 새로운 점은 세 가지입니다. 학습 없이 공짜 검사가 실패할 때만 생각하면 74%가 77%가 되고, 매뉴얼 대신 짧은 힌트를 먼저 주면 87%가 되며, 그 힌트는 사람 없이 골라도 됩니다. 그리고 최적화 문장제 863개인 MAMO에서, 파인튜닝한 8B 특화 모델과 같은 69.5%를 같은 크기의 8B 모델로 학습 없이 냅니다. 다음은 세 가지입니다. 힌트를 문제 종류마다 자동으로 고르고, 토큰 없이 더 많이 잡는 검사를 만들고, 마지막으로 수학 증명으로 넓힙니다. 증명은 Lean이 모든 단계를 검사해 주니, 거기에 맞는 힌트를 찾는 것이 과제입니다. 정리하면, 짧은 힌트를 먼저 주고, 공짜 검사가 실패한 곳에서만 생각하게 하자는 것입니다.
 [더 자세히: 질문이 나오거나 시간이 남을 때]
 첫째 줄, 생각을 어디에 쓸지. 기존 방법은 어려워 보이는 문제에 계산을 더 쓰는 Snell 등의 방식과, 언제 생각할지를 강화학습으로 가르치는 Thinkless, AdaptThink입니다. 저희는 정답 없이 돌리는 공짜 검사가 실패한 문제에만 생각을 씁니다. 기하와 최적화 208문제를 세 모델로 풀면 74%가 87%로 오르고, 토큰은 문제당 4.1k에서 2.5k로 줄었습니다. 87%는 사람이 쓴 힌트를 쓴 결과이고, 검색으로 찾은 힌트로도 84%입니다.
 둘째 줄, 모델에게 무엇을 주는지. 기존에는 매뉴얼 전체를 주거나, 더 큰 교사 모델이 짜서 정답으로 확인한 프로그램 모음을 줍니다. 저희 힌트는 모델이 다른 문제에서 짜서 공짜 검사를 통과한 자기 프로그램입니다. 끝까지 남겨 둔 MAMO 벤치마크에서 사람이 쓴 힌트와 같은 79%를 냈습니다.
@@ -26989,8 +26990,8 @@
         </p:nvSpPr>
         <p:spPr>
           <a:xfrm>
-            <a:off x="6400800" y="3977640"/>
-            <a:ext cx="4983480" cy="1463040"/>
+            <a:off x="6400800" y="3931920"/>
+            <a:ext cx="4983480" cy="1554480"/>
           </a:xfrm>
           <a:prstGeom prst="rect">
             <a:avLst/>
@@ -27006,7 +27007,7 @@
               <a:buNone/>
             </a:pPr>
             <a:r>
-              <a:rPr lang="en-US" sz="1400" b="1" dirty="0">
+              <a:rPr lang="en-US" sz="1300" b="1" dirty="0">
                 <a:solidFill>
                   <a:schemeClr val="tx1"/>
                 </a:solidFill>
@@ -27017,14 +27018,14 @@
               <a:buNone/>
             </a:pPr>
             <a:r>
-              <a:rPr lang="en-US" sz="1400" dirty="0">
+              <a:rPr lang="en-US" sz="1300" dirty="0">
                 <a:solidFill>
                   <a:schemeClr val="tx1"/>
                 </a:solidFill>
               </a:rPr>
-              <a:t>it keeps 60–77% of what a full library gives; the library holds five models' programs; if a model's own programs for a type are all wrong, so is its hint; on varied problems it mostly saves tokens.</a:t>
-            </a:r>
-            <a:endParaRPr lang="en-US" sz="1400" dirty="0"/>
+              <a:t>it keeps 60–77% of what a full library gives; the library holds five models' programs; on varied problems it mostly saves tokens. A program that runs can be wrong: 17–38% of the pool for 8B and larger models (the shortest one was right for all five), and the shortest was wrong for Qwen3-4B and 1.7B.</a:t>
+            </a:r>
+            <a:endParaRPr lang="en-US" sz="1300" dirty="0"/>
           </a:p>
         </p:txBody>
       </p:sp>
@@ -48056,7 +48057,7 @@
         </p:nvSpPr>
         <p:spPr>
           <a:xfrm>
-            <a:off x="8686800" y="2724912"/>
+            <a:off x="8778240" y="2724912"/>
             <a:ext cx="822960" cy="320040"/>
           </a:xfrm>
           <a:prstGeom prst="rect">
@@ -48092,8 +48093,8 @@
         </p:nvSpPr>
         <p:spPr>
           <a:xfrm>
-            <a:off x="9601200" y="2724912"/>
-            <a:ext cx="1783080" cy="320040"/>
+            <a:off x="9692640" y="2724912"/>
+            <a:ext cx="1691640" cy="320040"/>
           </a:xfrm>
           <a:prstGeom prst="rect">
             <a:avLst/>
@@ -48129,7 +48130,7 @@
         <p:spPr>
           <a:xfrm>
             <a:off x="6400800" y="3090672"/>
-            <a:ext cx="2194560" cy="457200"/>
+            <a:ext cx="2286000" cy="457200"/>
           </a:xfrm>
           <a:prstGeom prst="rect">
             <a:avLst/>
@@ -48164,7 +48165,7 @@
         </p:nvSpPr>
         <p:spPr>
           <a:xfrm>
-            <a:off x="8686800" y="3090672"/>
+            <a:off x="8778240" y="3090672"/>
             <a:ext cx="822960" cy="457200"/>
           </a:xfrm>
           <a:prstGeom prst="rect">
@@ -48200,8 +48201,8 @@
         </p:nvSpPr>
         <p:spPr>
           <a:xfrm>
-            <a:off x="9601200" y="3191256"/>
-            <a:ext cx="1051560" cy="256032"/>
+            <a:off x="9692640" y="3191256"/>
+            <a:ext cx="937260" cy="256032"/>
           </a:xfrm>
           <a:prstGeom prst="rect">
             <a:avLst/>
@@ -48225,7 +48226,7 @@
         </p:nvSpPr>
         <p:spPr>
           <a:xfrm>
-            <a:off x="10744200" y="3090672"/>
+            <a:off x="10721340" y="3090672"/>
             <a:ext cx="731520" cy="457200"/>
           </a:xfrm>
           <a:prstGeom prst="rect">
@@ -48261,8 +48262,8 @@
         </p:nvSpPr>
         <p:spPr>
           <a:xfrm>
-            <a:off x="6400800" y="3547872"/>
-            <a:ext cx="2194560" cy="457200"/>
+            <a:off x="6400800" y="3529584"/>
+            <a:ext cx="2286000" cy="457200"/>
           </a:xfrm>
           <a:prstGeom prst="rect">
             <a:avLst/>
@@ -48283,7 +48284,7 @@
                   <a:schemeClr val="tx1"/>
                 </a:solidFill>
               </a:rPr>
-              <a:t>ours, hint found by search</a:t>
+              <a:t>think when the check fails</a:t>
             </a:r>
             <a:endParaRPr lang="en-US" sz="1500" dirty="0"/>
           </a:p>
@@ -48297,7 +48298,7 @@
         </p:nvSpPr>
         <p:spPr>
           <a:xfrm>
-            <a:off x="8686800" y="3547872"/>
+            <a:off x="8778240" y="3529584"/>
             <a:ext cx="822960" cy="457200"/>
           </a:xfrm>
           <a:prstGeom prst="rect">
@@ -48316,6 +48317,139 @@
             <a:r>
               <a:rPr lang="en-US" sz="1700" b="1" dirty="0">
                 <a:solidFill>
+                  <a:srgbClr val="7F7F7F"/>
+                </a:solidFill>
+              </a:rPr>
+              <a:t>77%</a:t>
+            </a:r>
+            <a:endParaRPr lang="en-US" sz="1700" dirty="0"/>
+          </a:p>
+        </p:txBody>
+      </p:sp>
+      <p:sp>
+        <p:nvSpPr>
+          <p:cNvPr id="63" name="tokens think when the check fails"/>
+          <p:cNvSpPr/>
+          <p:nvPr/>
+        </p:nvSpPr>
+        <p:spPr>
+          <a:xfrm>
+            <a:off x="9692640" y="3630168"/>
+            <a:ext cx="960120" cy="256032"/>
+          </a:xfrm>
+          <a:prstGeom prst="rect">
+            <a:avLst/>
+          </a:prstGeom>
+          <a:solidFill>
+            <a:srgbClr val="7F7F7F"/>
+          </a:solidFill>
+          <a:ln w="6350">
+            <a:solidFill>
+              <a:srgbClr val="7F7F7F"/>
+            </a:solidFill>
+            <a:prstDash val="solid"/>
+          </a:ln>
+        </p:spPr>
+      </p:sp>
+      <p:sp>
+        <p:nvSpPr>
+          <p:cNvPr id="64" name="Text 44"/>
+          <p:cNvSpPr txBox="1"/>
+          <p:nvPr/>
+        </p:nvSpPr>
+        <p:spPr>
+          <a:xfrm>
+            <a:off x="10744200" y="3529584"/>
+            <a:ext cx="731520" cy="457200"/>
+          </a:xfrm>
+          <a:prstGeom prst="rect">
+            <a:avLst/>
+          </a:prstGeom>
+          <a:noFill/>
+          <a:ln/>
+        </p:spPr>
+        <p:txBody>
+          <a:bodyPr wrap="square" lIns="0" tIns="0" rIns="0" bIns="0" rtlCol="0" anchor="ctr"/>
+          <a:lstStyle/>
+          <a:p>
+            <a:pPr indent="0" marL="0">
+              <a:buNone/>
+            </a:pPr>
+            <a:r>
+              <a:rPr lang="en-US" sz="1500" b="1" dirty="0">
+                <a:solidFill>
+                  <a:srgbClr val="7F7F7F"/>
+                </a:solidFill>
+              </a:rPr>
+              <a:t>4.2k</a:t>
+            </a:r>
+            <a:endParaRPr lang="en-US" sz="1500" dirty="0"/>
+          </a:p>
+        </p:txBody>
+      </p:sp>
+      <p:sp>
+        <p:nvSpPr>
+          <p:cNvPr id="65" name="Text 45"/>
+          <p:cNvSpPr txBox="1"/>
+          <p:nvPr/>
+        </p:nvSpPr>
+        <p:spPr>
+          <a:xfrm>
+            <a:off x="6400800" y="3968496"/>
+            <a:ext cx="2286000" cy="457200"/>
+          </a:xfrm>
+          <a:prstGeom prst="rect">
+            <a:avLst/>
+          </a:prstGeom>
+          <a:noFill/>
+          <a:ln/>
+        </p:spPr>
+        <p:txBody>
+          <a:bodyPr wrap="square" lIns="0" tIns="0" rIns="0" bIns="0" rtlCol="0" anchor="ctr"/>
+          <a:lstStyle/>
+          <a:p>
+            <a:pPr algn="r" indent="0" marL="0">
+              <a:buNone/>
+            </a:pPr>
+            <a:r>
+              <a:rPr lang="en-US" sz="1500" dirty="0">
+                <a:solidFill>
+                  <a:schemeClr val="tx1"/>
+                </a:solidFill>
+              </a:rPr>
+              <a:t>+ hint found by search</a:t>
+            </a:r>
+            <a:endParaRPr lang="en-US" sz="1500" dirty="0"/>
+          </a:p>
+        </p:txBody>
+      </p:sp>
+      <p:sp>
+        <p:nvSpPr>
+          <p:cNvPr id="66" name="Text 46"/>
+          <p:cNvSpPr txBox="1"/>
+          <p:nvPr/>
+        </p:nvSpPr>
+        <p:spPr>
+          <a:xfrm>
+            <a:off x="8778240" y="3968496"/>
+            <a:ext cx="822960" cy="457200"/>
+          </a:xfrm>
+          <a:prstGeom prst="rect">
+            <a:avLst/>
+          </a:prstGeom>
+          <a:noFill/>
+          <a:ln/>
+        </p:spPr>
+        <p:txBody>
+          <a:bodyPr wrap="square" lIns="0" tIns="0" rIns="0" bIns="0" rtlCol="0" anchor="ctr"/>
+          <a:lstStyle/>
+          <a:p>
+            <a:pPr algn="ctr" indent="0" marL="0">
+              <a:buNone/>
+            </a:pPr>
+            <a:r>
+              <a:rPr lang="en-US" sz="1700" b="1" dirty="0">
+                <a:solidFill>
                   <a:srgbClr val="5B9BD5"/>
                 </a:solidFill>
               </a:rPr>
@@ -48327,14 +48461,14 @@
       </p:sp>
       <p:sp>
         <p:nvSpPr>
-          <p:cNvPr id="63" name="tokens ours, hint found by search"/>
+          <p:cNvPr id="67" name="tokens + hint found by search"/>
           <p:cNvSpPr/>
           <p:nvPr/>
         </p:nvSpPr>
         <p:spPr>
           <a:xfrm>
-            <a:off x="9601200" y="3648456"/>
-            <a:ext cx="846378" cy="256032"/>
+            <a:off x="9692640" y="4069080"/>
+            <a:ext cx="754380" cy="256032"/>
           </a:xfrm>
           <a:prstGeom prst="rect">
             <a:avLst/>
@@ -48352,13 +48486,13 @@
       </p:sp>
       <p:sp>
         <p:nvSpPr>
-          <p:cNvPr id="64" name="Text 44"/>
-          <p:cNvSpPr txBox="1"/>
-          <p:nvPr/>
-        </p:nvSpPr>
-        <p:spPr>
-          <a:xfrm>
-            <a:off x="10539018" y="3547872"/>
+          <p:cNvPr id="68" name="Text 48"/>
+          <p:cNvSpPr txBox="1"/>
+          <p:nvPr/>
+        </p:nvSpPr>
+        <p:spPr>
+          <a:xfrm>
+            <a:off x="10538460" y="3968496"/>
             <a:ext cx="731520" cy="457200"/>
           </a:xfrm>
           <a:prstGeom prst="rect">
@@ -48388,14 +48522,14 @@
       </p:sp>
       <p:sp>
         <p:nvSpPr>
-          <p:cNvPr id="65" name="Text 45"/>
-          <p:cNvSpPr txBox="1"/>
-          <p:nvPr/>
-        </p:nvSpPr>
-        <p:spPr>
-          <a:xfrm>
-            <a:off x="6400800" y="4005072"/>
-            <a:ext cx="2194560" cy="457200"/>
+          <p:cNvPr id="69" name="Text 49"/>
+          <p:cNvSpPr txBox="1"/>
+          <p:nvPr/>
+        </p:nvSpPr>
+        <p:spPr>
+          <a:xfrm>
+            <a:off x="6400800" y="4407408"/>
+            <a:ext cx="2286000" cy="457200"/>
           </a:xfrm>
           <a:prstGeom prst="rect">
             <a:avLst/>
@@ -48416,7 +48550,7 @@
                   <a:schemeClr val="tx1"/>
                 </a:solidFill>
               </a:rPr>
-              <a:t>ours, hand-written hint</a:t>
+              <a:t>+ hand-written hint</a:t>
             </a:r>
             <a:endParaRPr lang="en-US" sz="1500" dirty="0"/>
           </a:p>
@@ -48424,13 +48558,13 @@
       </p:sp>
       <p:sp>
         <p:nvSpPr>
-          <p:cNvPr id="66" name="Text 46"/>
-          <p:cNvSpPr txBox="1"/>
-          <p:nvPr/>
-        </p:nvSpPr>
-        <p:spPr>
-          <a:xfrm>
-            <a:off x="8686800" y="4005072"/>
+          <p:cNvPr id="70" name="Text 50"/>
+          <p:cNvSpPr txBox="1"/>
+          <p:nvPr/>
+        </p:nvSpPr>
+        <p:spPr>
+          <a:xfrm>
+            <a:off x="8778240" y="4407408"/>
             <a:ext cx="822960" cy="457200"/>
           </a:xfrm>
           <a:prstGeom prst="rect">
@@ -48460,14 +48594,14 @@
       </p:sp>
       <p:sp>
         <p:nvSpPr>
-          <p:cNvPr id="67" name="tokens ours, hand-written hint"/>
+          <p:cNvPr id="71" name="tokens + hand-written hint"/>
           <p:cNvSpPr/>
           <p:nvPr/>
         </p:nvSpPr>
         <p:spPr>
           <a:xfrm>
-            <a:off x="9601200" y="4105656"/>
-            <a:ext cx="641195" cy="256032"/>
+            <a:off x="9692640" y="4507992"/>
+            <a:ext cx="571500" cy="256032"/>
           </a:xfrm>
           <a:prstGeom prst="rect">
             <a:avLst/>
@@ -48485,13 +48619,13 @@
       </p:sp>
       <p:sp>
         <p:nvSpPr>
-          <p:cNvPr id="68" name="Text 48"/>
-          <p:cNvSpPr txBox="1"/>
-          <p:nvPr/>
-        </p:nvSpPr>
-        <p:spPr>
-          <a:xfrm>
-            <a:off x="10333835" y="4005072"/>
+          <p:cNvPr id="72" name="Text 52"/>
+          <p:cNvSpPr txBox="1"/>
+          <p:nvPr/>
+        </p:nvSpPr>
+        <p:spPr>
+          <a:xfrm>
+            <a:off x="10355580" y="4407408"/>
             <a:ext cx="731520" cy="457200"/>
           </a:xfrm>
           <a:prstGeom prst="rect">
@@ -48521,14 +48655,14 @@
       </p:sp>
       <p:sp>
         <p:nvSpPr>
-          <p:cNvPr id="69" name="Text 49"/>
-          <p:cNvSpPr txBox="1"/>
-          <p:nvPr/>
-        </p:nvSpPr>
-        <p:spPr>
-          <a:xfrm>
-            <a:off x="6400800" y="4526280"/>
-            <a:ext cx="4983480" cy="822960"/>
+          <p:cNvPr id="73" name="Text 53"/>
+          <p:cNvSpPr txBox="1"/>
+          <p:nvPr/>
+        </p:nvSpPr>
+        <p:spPr>
+          <a:xfrm>
+            <a:off x="6400800" y="4919472"/>
+            <a:ext cx="4983480" cy="548640"/>
           </a:xfrm>
           <a:prstGeom prst="rect">
             <a:avLst/>
@@ -48549,7 +48683,7 @@
                   <a:schemeClr val="tx2"/>
                 </a:solidFill>
               </a:rPr>
-              <a:t>Held-out MAMO (863): the model's own program as the hint = a hand-written one (79% = 79%, gpt-oss-20b)</a:t>
+              <a:t>Held-out MAMO (863): a hint picked with no human = a hand-written one (79% = 79%, gpt-oss-20b)</a:t>
             </a:r>
             <a:endParaRPr lang="en-US" sz="1400" dirty="0"/>
           </a:p>
@@ -48557,7 +48691,7 @@
       </p:sp>
       <p:sp>
         <p:nvSpPr>
-          <p:cNvPr id="70" name="Text 50"/>
+          <p:cNvPr id="74" name="Text 54"/>
           <p:cNvSpPr txBox="1"/>
           <p:nvPr/>
         </p:nvSpPr>
@@ -48916,7 +49050,7 @@
                   <a:srgbClr val="404040"/>
                 </a:solidFill>
               </a:rPr>
-              <a:t>think more on hard-looking problems</a:t>
+              <a:t>think more on hard-looking problems: 74%</a:t>
             </a:r>
             <a:pPr indent="0" marL="0">
               <a:buNone/>
@@ -49067,7 +49201,7 @@
                   <a:srgbClr val="1F3864"/>
                 </a:solidFill>
               </a:rPr>
-              <a:t>only when a free check fails: 87% vs 74%</a:t>
+              <a:t>only when a free check fails: 77%</a:t>
             </a:r>
             <a:endParaRPr lang="en-US" sz="1400" dirty="0"/>
           </a:p>
@@ -49369,7 +49503,7 @@
                   <a:srgbClr val="1F3864"/>
                 </a:solidFill>
               </a:rPr>
-              <a:t>one short hint, picked with no human</a:t>
+              <a:t>a short hint first: 87%; one picked with no human matches it</a:t>
             </a:r>
             <a:endParaRPr lang="en-US" sz="1400" dirty="0"/>
           </a:p>

--- a/Proposal_Team5.pptx
+++ b/Proposal_Team5.pptx
@@ -142,7 +142,7 @@
   <p:extLst>
     <p:ext uri="{521415D9-36F7-43E2-AB2F-B90AF26B5E84}">
       <p14:sectionLst xmlns:p14="http://schemas.microsoft.com/office/powerpoint/2010/main">
-        <p14:section name="Talk" id="{c864ebdc-f059-53a7-d9f6-f85a0749aedc}">
+        <p14:section name="Talk" id="{b611fe70-d987-260b-ebc9-3081d79a73c6}">
           <p14:sldIdLst>
             <p14:sldId id="256"/>
             <p14:sldId id="257"/>
@@ -155,7 +155,7 @@
             <p14:sldId id="264"/>
           </p14:sldIdLst>
         </p14:section>
-        <p14:section name="Extra pages" id="{52189dcf-bb4e-04db-f1c5-712fcbdbc4e5}">
+        <p14:section name="Extra pages" id="{e5d303d5-df49-e37e-3e67-6b41d6a65282}">
           <p14:sldIdLst>
             <p14:sldId id="265"/>
             <p14:sldId id="266"/>
@@ -1410,7 +1410,7 @@
           <a:p>
             <a:r>
               <a:rPr lang="en-US" dirty="0"/>
-              <a:t>(10초) 안녕하세요, 5조입니다. 저희는 답을 정확히 계산해야 하는 수학 문제를 LLM이 프로그램을 짜서 푸는 경우에 집중합니다. 목표는 더 적은 토큰으로 맞는 답을 얻는 것입니다.</a:t>
+              <a:t>(15초) 안녕하세요, 5조입니다. 저희는 답을 정확히 계산해야 하는 수학 문제를 LLM이 프로그램을 짜서 푸는 경우에 집중합니다. 목표는 더 적은 토큰으로 맞는 답을 얻는 것입니다.</a:t>
             </a:r>
             <a:endParaRPr lang="en-US" dirty="0"/>
           </a:p>
@@ -2378,7 +2378,7 @@
           <a:p>
             <a:r>
               <a:rPr lang="en-US" dirty="0"/>
-              <a:t>(25초) 저희가 푸는 문제는 네 종류입니다. 기하와 Codeforces 경시 문제는 맞는 알고리즘이, 배송 경로와 최적화 문장제는 솔버를 맞게 부르는 법이 필요합니다. 경시 문제의 중앙값은 Codeforces Master 수준입니다. 답이 정확히 하나라 코드로 채점할 수 있고, 필요한 것이 서로 달라서 추가 노력을 어디에 쓸지 비교하기 좋습니다.</a:t>
+              <a:t>(35초) 저희가 다루는 문제는 네 종류이고, 두 무리로 나뉩니다. 기하와 경시 문제는 맞는 알고리즘이 필요하고, 배송 경로와 최적화 문장제는 솔버 라이브러리를 맞게 부르는 법이 필요합니다. 이런 코드는 이미 코딩 에이전트가 실제로 쓰고 있는데, 틀려도 티가 나지 않고, 오래 생각하게 하면 비용이 큽니다. 답이 정확히 하나라서 코드로 채점할 수 있다는 점도 이 문제들을 고른 이유입니다. 이 두 무리를 기억해 주세요. 뒤에서 각각 다른 해결책이 필요합니다.</a:t>
             </a:r>
             <a:endParaRPr lang="en-US" dirty="0"/>
           </a:p>
@@ -3346,7 +3346,7 @@
           <a:p>
             <a:r>
               <a:rPr lang="en-US" dirty="0"/>
-              <a:t>(15초) LLM은 말로 답할 수도, 프로그램을 짤 수도 있습니다. 같은 도형을 옮기고 돌리면 말로 한 답은 매번 바뀌지만, 프로그램은 항상 436입니다. 그래서 계산은 프로그램에 맡깁니다.</a:t>
+              <a:t>(10초) 먼저, 계산은 프로그램에 맡깁니다. 같은 도형을 옮기고 돌리면 말로 한 답은 매번 바뀌지만, 프로그램은 항상 436입니다. 그런데 프로그램에도 문제가 있습니다.</a:t>
             </a:r>
             <a:endParaRPr lang="en-US" dirty="0"/>
           </a:p>
@@ -4050,7 +4050,7 @@
           <a:p>
             <a:r>
               <a:rPr lang="en-US" dirty="0"/>
-              <a:t>(45초) 하지만 두 가지가 문제입니다. 첫째, 프로그램은 조용히 틀립니다. 왼쪽 그림처럼 점 10개를 고무줄로 감싸면 꼭짓점이 6개입니다. 같은 모델에게 이 개수를 세는 프로그램을 두 번 짜게 했습니다. 문제만 준 프로그램 A는 6을 내고, 필요 없는 도우미 함수 8개를 같이 준 프로그램 B는 0을 냅니다. B는 에러 없이 그냥 틀린 숫자를 내서, 답을 모르면 틀린 줄 알 수 없습니다. 없는 함수를 불러 아예 멈추기도 합니다. 둘째, 오래 생각하면 비쌉니다. gpt-oss-120b는 토큰을 4.4배 써서 9점을 더 얻습니다. 그래서 추가 노력을 힌트, 공짜 검사, 생각 중 어디에 쓸지가 저희 질문입니다.</a:t>
+              <a:t>(40초) 두 가지가 문제입니다. 첫째, 프로그램은 조용히 틀립니다. 점 10개를 감싸는 고무줄의 꼭짓점은 6개인데, 같은 모델에게 문제만 주면 6을 내고, 코딩 에이전트가 받는 도구 목록처럼 필요 없는 도우미 함수 8개를 같이 주면 0을 냅니다. 에러가 없어서 답을 모르면 틀린 줄 모릅니다. 없는 함수를 불러 멈추기도 합니다. 둘째, 오래 생각하면 비쌉니다. 큰 모델도 토큰을 4.4배 써서 9점을 더 얻을 뿐입니다. 그래서 질문은, 추가 노력을 힌트, 검사, 생각 중 어디에 써야 하느냐입니다.</a:t>
             </a:r>
             <a:endParaRPr lang="en-US" dirty="0"/>
           </a:p>
@@ -4138,7 +4138,7 @@
           <a:p>
             <a:r>
               <a:rPr lang="en-US" dirty="0"/>
-              <a:t>(30초) 첫 번째 발견입니다. 매뉴얼이 아니라 짧은 힌트를 주세요. 트럭 경로를 짜는 과제에 OR-Tools 사용법 열한 줄을 붙이면, Qwen3-32B가 맞는 함수를 불러 최적 경로를 찾습니다. 긴 참조 문서를 주면 없는 함수를 지어내 죽습니다. 30문제에서 아무것도 안 주면 23%, 오래 생각하면 3%, 짧은 힌트는 83%입니다. 이 힌트를 사람 없이 고르는 방법은 뒤의 방법 슬라이드에서 보여 드립니다.
+              <a:t>(35초) 첫 번째 발견은 솔버를 부르는 무리의 이야기입니다. 매뉴얼이 아니라 짧은 힌트를 주세요. 트럭 경로를 짜는 과제에 사용법 열한 줄을 붙이면, 모델이 맞는 함수를 불러 최적 경로를 찾습니다. 필요한 규칙이 빠진 긴 매뉴얼을 주면 없는 함수를 지어내 멈춥니다. 30문제에서 아무것도 안 주면 23%, 오래 생각하게 하면 오히려 3%, 짧은 힌트는 83%입니다. 모르는 함수 이름은 오래 생각한다고 생기지 않습니다. 그럼 알고리즘이 틀리는 경우는 어떻게 할까요?
 [참고, 읽지 않음] 모델은 답을 무작위로 뽑기 때문에 같은 실험도 돌릴 때마다 조금씩 다릅니다. 짧은 힌트 막대는 같은 실험을 세 번 돌린 평균입니다(77, 83, 90%). 나머지 막대는 한 번씩 돌린 결과입니다.</a:t>
             </a:r>
             <a:endParaRPr lang="en-US" dirty="0"/>
@@ -4227,7 +4227,7 @@
           <a:p>
             <a:r>
               <a:rPr lang="en-US" dirty="0"/>
-              <a:t>(50초) 두 번째 발견입니다. 생각은 공짜 검사가 실패한 문제에만 쓰세요. 공짜 검사란, 정답 없이 프로그램을 실행해서 이미 아는 것과 비교해 보는 것으로, 토큰이 거의 들지 않습니다. 예를 들어 경시 문제에는 막대가 3, 4, 5이면 답은 0이라는 예제가 있습니다. 프로그램에 3, 4, 5를 넣어 0이 나오면 그대로 내고, 다르면 그 문제만 더 생각해서 다시 짭니다. 예제가 없으면 프로그램을 두 가지로 짜서, 6과 0처럼 답이 다를 때만 생각합니다. 결과는 오른쪽입니다. 경시 문제는 항상 오래 생각할 때와 같은 66%를 3만 대신 2만 5천 토큰에, 기하는 99%를 5.9k 대신 4.3k 토큰에 얻습니다. 정답은 필요 없습니다.
+              <a:t>(45초) 두 번째 발견은 알고리즘이 필요한 무리의 이야기입니다. 생각은 공짜 검사가 실패한 문제에만 쓰세요. 공짜 검사란, 정답 없이 프로그램을 실행해서 이미 아는 것과 비교해 보는 것으로, 토큰이 거의 들지 않습니다. 경시 문제에는 막대가 3, 4, 5이면 답은 0이라는 예제가 있어서, 프로그램에 넣어 0이 나오면 그대로 내고, 다르면 그 문제만 더 생각합니다. 예제가 없으면 프로그램을 두 가지로 짜서 답이 다를 때만 생각합니다. 그러면 항상 오래 생각할 때와 같은 정확도를 토큰 18에서 27% 적게 얻고, 정답은 필요 없습니다. 이 둘을 합치면 저희 방법이 됩니다.
 [참고, 읽지 않음] 경시 66.3%는 예제와, 작은 입력을 전부 따져 보는 느린 프로그램, 두 검사를 함께 쓴 결과입니다. 예제만 쓰면 20k 토큰에 65.0%입니다.</a:t>
             </a:r>
             <a:endParaRPr lang="en-US" dirty="0"/>
@@ -4316,7 +4316,7 @@
           <a:p>
             <a:r>
               <a:rPr lang="en-US" dirty="0"/>
-              <a:t>(65초) 둘을 합친 것이 저희 방법입니다. 위의 네 단계입니다. 힌트를 붙여 프로그램을 쓰고, 공짜 검사를 돌려서, 통과하면 내고 실패하면 그때만 생각합니다. 같은 종류가 다시 오면 그 프로그램을 재사용합니다. 아이콘은 각 단계를 쓰는 문제 종류입니다. 왼쪽은 힌트를 만드는 법입니다. 같은 종류의 앞선 문제들에서 모델이 짠 프로그램 중 실행되어 숫자를 낸 것을 모으고, 가장 짧은 것을 예시로 프롬프트에 붙입니다. 사람도 정답도 필요 없습니다. 실제 문제에서 힌트가 없으면 없는 함수를 불러 죽지만, 힌트가 있으면 두 버전이 모두 20000을 내서 바로 제출하고, 토큰은 생각만 할 때의 5.3k 대신 0.6k입니다. 오른쪽은 전체 결과입니다. 기하와 최적화 208문제를 세 모델로 풀면, 답이 갈리는 문제에 생각을 몰아주는 기존 방식은 74%, 검사가 실패할 때만 생각하면 77%, 여기에 검색한 힌트를 먼저 주면 84%, 사람이 쓴 힌트면 87%이고 토큰도 더 적습니다.
+              <a:t>(50초) 이제 4장의 질문에 답하면, 힌트를 먼저, 그다음 공짜 검사, 생각은 검사가 실패할 때만입니다. 위의 네 단계가 그 순서이고, 같은 종류가 다시 오면 검사된 프로그램을 재사용합니다. 힌트는 사람 없이 만듭니다. 같은 종류의 앞선 문제들에서 모델이 짠 프로그램 중 실행되어 숫자를 낸 것을 모으고, 가장 짧은 것을 예시로 붙입니다. 오른쪽처럼, 어려워 보이는 문제에 생각을 몰아주는 기존 방식은 74%, 검사만 써도 77%, 힌트까지 쓰면 84에서 87%이고 토큰도 적습니다. 핵심은, 문제가 어려워 보이는지가 아니라 무엇이 틀렸는지에 따라 노력을 쓰는 것입니다. 이름을 모르면 힌트, 조용히 틀리면 검사, 정말 어려우면 생각입니다.
 [참고, 읽지 않음] 힌트 풀의 검사는 '실행되어 숫자를 냄'뿐이라, 풀 안에도 틀린 프로그램이 있습니다(8B 이상 모델에서 17~38%). 정답으로 나중에 확인해 보니, 실제로 고른 가장 짧은 프로그램은 8B 이상 다섯 모델 모두에서 맞았고, Qwen3-4B와 1.7B에서는 틀렸습니다.</a:t>
             </a:r>
             <a:endParaRPr lang="en-US" dirty="0"/>
@@ -4405,7 +4405,7 @@
           <a:p>
             <a:r>
               <a:rPr lang="en-US" dirty="0"/>
-              <a:t>(50초) 새로운 점은 세 가지입니다. 학습 없이 공짜 검사가 실패할 때만 생각하면 74%가 77%가 되고, 매뉴얼 대신 짧은 힌트를 먼저 주면 87%가 되며, 그 힌트는 사람 없이 골라도 됩니다. 그리고 최적화 문장제 863개인 MAMO에서, 파인튜닝한 8B 특화 모델과 같은 69.5%를 같은 크기의 8B 모델로 학습 없이 냅니다. 다음은 세 가지입니다. 힌트를 문제 종류마다 자동으로 고르고, 토큰 없이 더 많이 잡는 검사를 만들고, 마지막으로 수학 증명으로 넓힙니다. 증명은 Lean이 모든 단계를 검사해 주니, 거기에 맞는 힌트를 찾는 것이 과제입니다. 정리하면, 짧은 힌트를 먼저 주고, 공짜 검사가 실패한 곳에서만 생각하게 하자는 것입니다.
+              <a:t>(45초) 새로운 점은 세 가지입니다. 학습 없이 공짜 검사로 생각할 때를 정하고, 매뉴얼 대신 짧은 힌트를 사람 없이 고르며, 파인튜닝한 8B 특화 모델과 같은 정확도를 학습하지 않은 8B 모델로 냅니다. 앞으로 할 일도 세 가지입니다. 첫째, 처음 보는 문제 종류에서도 힌트를 자동으로 고르는 것. 둘째, 실행은 되지만 문제를 잘못 옮긴 프로그램까지 토큰 없이 잡는 검사. 셋째, Lean이 모든 단계를 검사해 주는 수학 증명으로 넓히는 것입니다. 각각 정확도와 토큰을 함께 재서 지금 결과와 비교하겠습니다. 정리하면, 짧은 힌트를 먼저 주고, 공짜 검사가 실패한 곳에서만 생각하게 하자는 것입니다.
 [더 자세히: 질문이 나오거나 시간이 남을 때]
 첫째 줄, 생각을 어디에 쓸지. 기존 방법은 어려워 보이는 문제에 계산을 더 쓰는 Snell 등의 방식과, 언제 생각할지를 강화학습으로 가르치는 Thinkless, AdaptThink입니다. 저희는 정답 없이 돌리는 공짜 검사가 실패한 문제에만 생각을 씁니다. 기하와 최적화 208문제를 세 모델로 풀면 74%가 87%로 오르고, 토큰은 문제당 4.1k에서 2.5k로 줄었습니다. 87%는 사람이 쓴 힌트를 쓴 결과이고, 검색으로 찾은 힌트로도 84%입니다.
 둘째 줄, 모델에게 무엇을 주는지. 기존에는 매뉴얼 전체를 주거나, 더 큰 교사 모델이 짜서 정답으로 확인한 프로그램 모음을 줍니다. 저희 힌트는 모델이 다른 문제에서 짜서 공짜 검사를 통과한 자기 프로그램입니다. 끝까지 남겨 둔 MAMO 벤치마크에서 사람이 쓴 힌트와 같은 79%를 냈습니다.
@@ -4498,7 +4498,7 @@
           <a:p>
             <a:r>
               <a:rPr lang="en-US" dirty="0"/>
-              <a:t>(5초) 감사합니다. 질문 받겠습니다.
+              <a:t>(10초) 감사합니다. 한 줄로 줄이면, 문제가 어려워 보이는지가 아니라 무엇이 틀렸는지에 따라 노력을 쓰자는 것입니다. 질문 받겠습니다.
 [발표자용] 예상 질문 → 보충 슬라이드 번호 (슬라이드 쇼에서 번호를 누르고 Enter):
 10: Why these problems? How do they differ? (slide 2)
 11: Do the findings cover every kind? (slide 2)

--- a/Proposal_Team5.pptx
+++ b/Proposal_Team5.pptx
@@ -142,7 +142,7 @@
   <p:extLst>
     <p:ext uri="{521415D9-36F7-43E2-AB2F-B90AF26B5E84}">
       <p14:sectionLst xmlns:p14="http://schemas.microsoft.com/office/powerpoint/2010/main">
-        <p14:section name="Talk" id="{b611fe70-d987-260b-ebc9-3081d79a73c6}">
+        <p14:section name="Talk" id="{4b98485c-2685-ccc7-7d46-845684e7c05d}">
           <p14:sldIdLst>
             <p14:sldId id="256"/>
             <p14:sldId id="257"/>
@@ -155,7 +155,7 @@
             <p14:sldId id="264"/>
           </p14:sldIdLst>
         </p14:section>
-        <p14:section name="Extra pages" id="{e5d303d5-df49-e37e-3e67-6b41d6a65282}">
+        <p14:section name="Extra pages" id="{64b7378b-f2a2-c5d3-84c9-2dcba15a4cde}">
           <p14:sldIdLst>
             <p14:sldId id="265"/>
             <p14:sldId id="266"/>
@@ -1410,7 +1410,7 @@
           <a:p>
             <a:r>
               <a:rPr lang="en-US" dirty="0"/>
-              <a:t>(15초) 안녕하세요, 5조입니다. 저희는 답을 정확히 계산해야 하는 수학 문제를 LLM이 프로그램을 짜서 푸는 경우에 집중합니다. 목표는 더 적은 토큰으로 맞는 답을 얻는 것입니다.</a:t>
+              <a:t>(10초) 안녕하세요, 5조입니다. 저희는 답을 정확히 계산해야 하는 수학 문제를 LLM이 프로그램을 짜서 푸는 경우에 집중합니다. 목표는 더 적은 토큰으로 맞는 답을 얻는 것입니다.</a:t>
             </a:r>
             <a:endParaRPr lang="en-US" dirty="0"/>
           </a:p>
@@ -2378,7 +2378,7 @@
           <a:p>
             <a:r>
               <a:rPr lang="en-US" dirty="0"/>
-              <a:t>(35초) 저희가 다루는 문제는 네 종류이고, 두 무리로 나뉩니다. 기하와 경시 문제는 맞는 알고리즘이 필요하고, 배송 경로와 최적화 문장제는 솔버 라이브러리를 맞게 부르는 법이 필요합니다. 이런 코드는 이미 코딩 에이전트가 실제로 쓰고 있는데, 틀려도 티가 나지 않고, 오래 생각하게 하면 비용이 큽니다. 답이 정확히 하나라서 코드로 채점할 수 있다는 점도 이 문제들을 고른 이유입니다. 이 두 무리를 기억해 주세요. 뒤에서 각각 다른 해결책이 필요합니다.</a:t>
+              <a:t>(25초) 저희가 푸는 문제는 네 종류입니다. 기하와 Codeforces 경시 문제는 맞는 알고리즘이, 배송 경로와 최적화 문장제는 솔버를 맞게 부르는 법이 필요합니다. 경시 문제의 중앙값은 Codeforces Master 수준입니다. 답이 정확히 하나라 코드로 채점할 수 있고, 필요한 것이 서로 달라서 추가 노력을 어디에 쓸지 비교하기 좋습니다.</a:t>
             </a:r>
             <a:endParaRPr lang="en-US" dirty="0"/>
           </a:p>
@@ -3346,7 +3346,7 @@
           <a:p>
             <a:r>
               <a:rPr lang="en-US" dirty="0"/>
-              <a:t>(10초) 먼저, 계산은 프로그램에 맡깁니다. 같은 도형을 옮기고 돌리면 말로 한 답은 매번 바뀌지만, 프로그램은 항상 436입니다. 그런데 프로그램에도 문제가 있습니다.</a:t>
+              <a:t>(15초) LLM은 말로 답할 수도, 프로그램을 짤 수도 있습니다. 같은 도형을 옮기고 돌리면 말로 한 답은 매번 바뀌지만, 프로그램은 항상 436입니다. 그래서 계산은 프로그램에 맡깁니다.</a:t>
             </a:r>
             <a:endParaRPr lang="en-US" dirty="0"/>
           </a:p>
@@ -4050,7 +4050,7 @@
           <a:p>
             <a:r>
               <a:rPr lang="en-US" dirty="0"/>
-              <a:t>(40초) 두 가지가 문제입니다. 첫째, 프로그램은 조용히 틀립니다. 점 10개를 감싸는 고무줄의 꼭짓점은 6개인데, 같은 모델에게 문제만 주면 6을 내고, 코딩 에이전트가 받는 도구 목록처럼 필요 없는 도우미 함수 8개를 같이 주면 0을 냅니다. 에러가 없어서 답을 모르면 틀린 줄 모릅니다. 없는 함수를 불러 멈추기도 합니다. 둘째, 오래 생각하면 비쌉니다. 큰 모델도 토큰을 4.4배 써서 9점을 더 얻을 뿐입니다. 그래서 질문은, 추가 노력을 힌트, 검사, 생각 중 어디에 써야 하느냐입니다.</a:t>
+              <a:t>(45초) 하지만 두 가지가 문제입니다. 첫째, 프로그램은 조용히 틀립니다. 왼쪽 그림처럼 점 10개를 고무줄로 감싸면 꼭짓점이 6개입니다. 같은 모델에게 이 개수를 세는 프로그램을 두 번 짜게 했습니다. 문제만 준 프로그램 A는 6을 내고, 필요 없는 도우미 함수 8개를 같이 준 프로그램 B는 0을 냅니다. B는 에러 없이 그냥 틀린 숫자를 내서, 답을 모르면 틀린 줄 알 수 없습니다. 없는 함수를 불러 아예 멈추기도 합니다. 둘째, 오래 생각하면 비쌉니다. gpt-oss-120b는 토큰을 4.4배 써서 9점을 더 얻습니다. 그래서 추가 노력을 힌트, 공짜 검사, 생각 중 어디에 쓸지가 저희 질문입니다.</a:t>
             </a:r>
             <a:endParaRPr lang="en-US" dirty="0"/>
           </a:p>
@@ -4138,7 +4138,7 @@
           <a:p>
             <a:r>
               <a:rPr lang="en-US" dirty="0"/>
-              <a:t>(35초) 첫 번째 발견은 솔버를 부르는 무리의 이야기입니다. 매뉴얼이 아니라 짧은 힌트를 주세요. 트럭 경로를 짜는 과제에 사용법 열한 줄을 붙이면, 모델이 맞는 함수를 불러 최적 경로를 찾습니다. 필요한 규칙이 빠진 긴 매뉴얼을 주면 없는 함수를 지어내 멈춥니다. 30문제에서 아무것도 안 주면 23%, 오래 생각하게 하면 오히려 3%, 짧은 힌트는 83%입니다. 모르는 함수 이름은 오래 생각한다고 생기지 않습니다. 그럼 알고리즘이 틀리는 경우는 어떻게 할까요?
+              <a:t>(30초) 첫 번째 발견입니다. 매뉴얼이 아니라 짧은 힌트를 주세요. 트럭 경로를 짜는 과제에 OR-Tools 사용법 열한 줄을 붙이면, Qwen3-32B가 맞는 함수를 불러 최적 경로를 찾습니다. 긴 참조 문서를 주면 없는 함수를 지어내 죽습니다. 30문제에서 아무것도 안 주면 23%, 오래 생각하면 3%, 짧은 힌트는 83%입니다. 이 힌트를 사람 없이 고르는 방법은 뒤의 방법 슬라이드에서 보여 드립니다.
 [참고, 읽지 않음] 모델은 답을 무작위로 뽑기 때문에 같은 실험도 돌릴 때마다 조금씩 다릅니다. 짧은 힌트 막대는 같은 실험을 세 번 돌린 평균입니다(77, 83, 90%). 나머지 막대는 한 번씩 돌린 결과입니다.</a:t>
             </a:r>
             <a:endParaRPr lang="en-US" dirty="0"/>
@@ -4227,7 +4227,7 @@
           <a:p>
             <a:r>
               <a:rPr lang="en-US" dirty="0"/>
-              <a:t>(45초) 두 번째 발견은 알고리즘이 필요한 무리의 이야기입니다. 생각은 공짜 검사가 실패한 문제에만 쓰세요. 공짜 검사란, 정답 없이 프로그램을 실행해서 이미 아는 것과 비교해 보는 것으로, 토큰이 거의 들지 않습니다. 경시 문제에는 막대가 3, 4, 5이면 답은 0이라는 예제가 있어서, 프로그램에 넣어 0이 나오면 그대로 내고, 다르면 그 문제만 더 생각합니다. 예제가 없으면 프로그램을 두 가지로 짜서 답이 다를 때만 생각합니다. 그러면 항상 오래 생각할 때와 같은 정확도를 토큰 18에서 27% 적게 얻고, 정답은 필요 없습니다. 이 둘을 합치면 저희 방법이 됩니다.
+              <a:t>(50초) 두 번째 발견입니다. 생각은 공짜 검사가 실패한 문제에만 쓰세요. 공짜 검사란, 정답 없이 프로그램을 실행해서 이미 아는 것과 비교해 보는 것으로, 토큰이 거의 들지 않습니다. 예를 들어 경시 문제에는 막대가 3, 4, 5이면 답은 0이라는 예제가 있습니다. 프로그램에 3, 4, 5를 넣어 0이 나오면 그대로 내고, 다르면 그 문제만 더 생각해서 다시 짭니다. 예제가 없으면 프로그램을 두 가지로 짜서, 6과 0처럼 답이 다를 때만 생각합니다. 결과는 오른쪽입니다. 경시 문제는 항상 오래 생각할 때와 같은 66%를 3만 대신 2만 5천 토큰에, 기하는 99%를 5.9k 대신 4.3k 토큰에 얻습니다. 정답은 필요 없습니다.
 [참고, 읽지 않음] 경시 66.3%는 예제와, 작은 입력을 전부 따져 보는 느린 프로그램, 두 검사를 함께 쓴 결과입니다. 예제만 쓰면 20k 토큰에 65.0%입니다.</a:t>
             </a:r>
             <a:endParaRPr lang="en-US" dirty="0"/>
@@ -4316,7 +4316,7 @@
           <a:p>
             <a:r>
               <a:rPr lang="en-US" dirty="0"/>
-              <a:t>(50초) 이제 4장의 질문에 답하면, 힌트를 먼저, 그다음 공짜 검사, 생각은 검사가 실패할 때만입니다. 위의 네 단계가 그 순서이고, 같은 종류가 다시 오면 검사된 프로그램을 재사용합니다. 힌트는 사람 없이 만듭니다. 같은 종류의 앞선 문제들에서 모델이 짠 프로그램 중 실행되어 숫자를 낸 것을 모으고, 가장 짧은 것을 예시로 붙입니다. 오른쪽처럼, 어려워 보이는 문제에 생각을 몰아주는 기존 방식은 74%, 검사만 써도 77%, 힌트까지 쓰면 84에서 87%이고 토큰도 적습니다. 핵심은, 문제가 어려워 보이는지가 아니라 무엇이 틀렸는지에 따라 노력을 쓰는 것입니다. 이름을 모르면 힌트, 조용히 틀리면 검사, 정말 어려우면 생각입니다.
+              <a:t>(65초) 둘을 합친 것이 저희 방법입니다. 위의 네 단계입니다. 힌트를 붙여 프로그램을 쓰고, 공짜 검사를 돌려서, 통과하면 내고 실패하면 그때만 생각합니다. 같은 종류가 다시 오면 그 프로그램을 재사용합니다. 아이콘은 각 단계를 쓰는 문제 종류입니다. 왼쪽은 힌트를 만드는 법입니다. 같은 종류의 앞선 문제들에서 모델이 짠 프로그램 중 실행되어 숫자를 낸 것을 모으고, 가장 짧은 것을 예시로 프롬프트에 붙입니다. 사람도 정답도 필요 없습니다. 실제 문제에서 힌트가 없으면 없는 함수를 불러 죽지만, 힌트가 있으면 두 버전이 모두 20000을 내서 바로 제출하고, 토큰은 생각만 할 때의 5.3k 대신 0.6k입니다. 오른쪽은 전체 결과입니다. 기하와 최적화 208문제를 세 모델로 풀면, 답이 갈리는 문제에 생각을 몰아주는 기존 방식은 74%, 검사가 실패할 때만 생각하면 77%, 여기에 검색한 힌트를 먼저 주면 84%, 사람이 쓴 힌트면 87%이고 토큰도 더 적습니다.
 [참고, 읽지 않음] 힌트 풀의 검사는 '실행되어 숫자를 냄'뿐이라, 풀 안에도 틀린 프로그램이 있습니다(8B 이상 모델에서 17~38%). 정답으로 나중에 확인해 보니, 실제로 고른 가장 짧은 프로그램은 8B 이상 다섯 모델 모두에서 맞았고, Qwen3-4B와 1.7B에서는 틀렸습니다.</a:t>
             </a:r>
             <a:endParaRPr lang="en-US" dirty="0"/>
@@ -4405,7 +4405,7 @@
           <a:p>
             <a:r>
               <a:rPr lang="en-US" dirty="0"/>
-              <a:t>(45초) 새로운 점은 세 가지입니다. 학습 없이 공짜 검사로 생각할 때를 정하고, 매뉴얼 대신 짧은 힌트를 사람 없이 고르며, 파인튜닝한 8B 특화 모델과 같은 정확도를 학습하지 않은 8B 모델로 냅니다. 앞으로 할 일도 세 가지입니다. 첫째, 처음 보는 문제 종류에서도 힌트를 자동으로 고르는 것. 둘째, 실행은 되지만 문제를 잘못 옮긴 프로그램까지 토큰 없이 잡는 검사. 셋째, Lean이 모든 단계를 검사해 주는 수학 증명으로 넓히는 것입니다. 각각 정확도와 토큰을 함께 재서 지금 결과와 비교하겠습니다. 정리하면, 짧은 힌트를 먼저 주고, 공짜 검사가 실패한 곳에서만 생각하게 하자는 것입니다.
+              <a:t>(50초) 새로운 점은 세 가지입니다. 학습 없이 공짜 검사가 실패할 때만 생각하면 74%가 77%가 되고, 매뉴얼 대신 짧은 힌트를 먼저 주면 87%가 되며, 그 힌트는 사람 없이 골라도 됩니다. 그리고 최적화 문장제 863개인 MAMO에서, 파인튜닝한 8B 특화 모델과 같은 69.5%를 같은 크기의 8B 모델로 학습 없이 냅니다. 다음은 세 가지입니다. 힌트를 문제 종류마다 자동으로 고르고, 토큰 없이 더 많이 잡는 검사를 만들고, 마지막으로 수학 증명으로 넓힙니다. 증명은 Lean이 모든 단계를 검사해 주니, 거기에 맞는 힌트를 찾는 것이 과제입니다. 정리하면, 짧은 힌트를 먼저 주고, 공짜 검사가 실패한 곳에서만 생각하게 하자는 것입니다.
 [더 자세히: 질문이 나오거나 시간이 남을 때]
 첫째 줄, 생각을 어디에 쓸지. 기존 방법은 어려워 보이는 문제에 계산을 더 쓰는 Snell 등의 방식과, 언제 생각할지를 강화학습으로 가르치는 Thinkless, AdaptThink입니다. 저희는 정답 없이 돌리는 공짜 검사가 실패한 문제에만 생각을 씁니다. 기하와 최적화 208문제를 세 모델로 풀면 74%가 87%로 오르고, 토큰은 문제당 4.1k에서 2.5k로 줄었습니다. 87%는 사람이 쓴 힌트를 쓴 결과이고, 검색으로 찾은 힌트로도 84%입니다.
 둘째 줄, 모델에게 무엇을 주는지. 기존에는 매뉴얼 전체를 주거나, 더 큰 교사 모델이 짜서 정답으로 확인한 프로그램 모음을 줍니다. 저희 힌트는 모델이 다른 문제에서 짜서 공짜 검사를 통과한 자기 프로그램입니다. 끝까지 남겨 둔 MAMO 벤치마크에서 사람이 쓴 힌트와 같은 79%를 냈습니다.
@@ -4498,7 +4498,7 @@
           <a:p>
             <a:r>
               <a:rPr lang="en-US" dirty="0"/>
-              <a:t>(10초) 감사합니다. 한 줄로 줄이면, 문제가 어려워 보이는지가 아니라 무엇이 틀렸는지에 따라 노력을 쓰자는 것입니다. 질문 받겠습니다.
+              <a:t>(5초) 감사합니다. 질문 받겠습니다.
 [발표자용] 예상 질문 → 보충 슬라이드 번호 (슬라이드 쇼에서 번호를 누르고 Enter):
 10: Why these problems? How do they differ? (slide 2)
 11: Do the findings cover every kind? (slide 2)
